--- a/doc/Presentazione/Presentazione_ingsw_parteB.pptx
+++ b/doc/Presentazione/Presentazione_ingsw_parteB.pptx
@@ -5,7 +5,7 @@
     <p:sldMasterId id="2147483648" r:id="rId1"/>
   </p:sldMasterIdLst>
   <p:notesMasterIdLst>
-    <p:notesMasterId r:id="rId24"/>
+    <p:notesMasterId r:id="rId27"/>
   </p:notesMasterIdLst>
   <p:sldIdLst>
     <p:sldId id="256" r:id="rId4"/>
@@ -28,6 +28,9 @@
     <p:sldId id="273" r:id="rId21"/>
     <p:sldId id="274" r:id="rId22"/>
     <p:sldId id="275" r:id="rId23"/>
+    <p:sldId id="276" r:id="rId24"/>
+    <p:sldId id="277" r:id="rId25"/>
+    <p:sldId id="278" r:id="rId26"/>
   </p:sldIdLst>
   <p:sldSz cx="12192000" cy="6858000"/>
   <p:notesSz cx="6858000" cy="9144000"/>
@@ -153,7 +156,7 @@
       </p:grpSpPr>
       <p:sp>
         <p:nvSpPr>
-          <p:cNvPr id="1290379510" name="Segnaposto intestazione 1"/>
+          <p:cNvPr id="359932334" name="Segnaposto intestazione 1"/>
           <p:cNvSpPr>
             <a:spLocks noGrp="1"/>
           </p:cNvSpPr>
@@ -187,7 +190,7 @@
       </p:sp>
       <p:sp>
         <p:nvSpPr>
-          <p:cNvPr id="624170024" name="Segnaposto data 2"/>
+          <p:cNvPr id="201415694" name="Segnaposto data 2"/>
           <p:cNvSpPr>
             <a:spLocks noGrp="1"/>
           </p:cNvSpPr>
@@ -225,7 +228,7 @@
       </p:sp>
       <p:sp>
         <p:nvSpPr>
-          <p:cNvPr id="1928034323" name="Segnaposto immagine diapositiva 3"/>
+          <p:cNvPr id="437000211" name="Segnaposto immagine diapositiva 3"/>
           <p:cNvSpPr>
             <a:spLocks noChangeAspect="1" noGrp="1" noRot="1"/>
           </p:cNvSpPr>
@@ -261,7 +264,7 @@
       </p:sp>
       <p:sp>
         <p:nvSpPr>
-          <p:cNvPr id="1397699127" name="Segnaposto Note 4"/>
+          <p:cNvPr id="412366212" name="Segnaposto Note 4"/>
           <p:cNvSpPr>
             <a:spLocks noGrp="1"/>
           </p:cNvSpPr>
@@ -335,7 +338,7 @@
       </p:sp>
       <p:sp>
         <p:nvSpPr>
-          <p:cNvPr id="925788643" name="Segnaposto piè di pagina 5"/>
+          <p:cNvPr id="1620273658" name="Segnaposto piè di pagina 5"/>
           <p:cNvSpPr>
             <a:spLocks noGrp="1"/>
           </p:cNvSpPr>
@@ -369,7 +372,7 @@
       </p:sp>
       <p:sp>
         <p:nvSpPr>
-          <p:cNvPr id="736537317" name="Segnaposto numero diapositiva 6"/>
+          <p:cNvPr id="1030847972" name="Segnaposto numero diapositiva 6"/>
           <p:cNvSpPr>
             <a:spLocks noGrp="1"/>
           </p:cNvSpPr>
@@ -522,7 +525,7 @@
       </p:grpSpPr>
       <p:sp>
         <p:nvSpPr>
-          <p:cNvPr id="1418223909" name="Segnaposto immagine diapositiva 1"/>
+          <p:cNvPr id="1886709154" name="Segnaposto immagine diapositiva 1"/>
           <p:cNvSpPr>
             <a:spLocks noChangeAspect="1" noGrp="1" noRot="1"/>
           </p:cNvSpPr>
@@ -539,7 +542,7 @@
       </p:sp>
       <p:sp>
         <p:nvSpPr>
-          <p:cNvPr id="2014531782" name="Segnaposto Note 2"/>
+          <p:cNvPr id="1592559170" name="Segnaposto Note 2"/>
           <p:cNvSpPr>
             <a:spLocks noGrp="1"/>
           </p:cNvSpPr>
@@ -564,7 +567,7 @@
       </p:sp>
       <p:sp>
         <p:nvSpPr>
-          <p:cNvPr id="68842034" name="Segnaposto numero diapositiva 3"/>
+          <p:cNvPr id="1847530888" name="Segnaposto numero diapositiva 3"/>
           <p:cNvSpPr>
             <a:spLocks noGrp="1"/>
           </p:cNvSpPr>
@@ -615,7 +618,7 @@
       </p:grpSpPr>
       <p:sp>
         <p:nvSpPr>
-          <p:cNvPr id="1503486993" name="Slide Image Placeholder 1"/>
+          <p:cNvPr id="1172904136" name="Slide Image Placeholder 1"/>
           <p:cNvSpPr>
             <a:spLocks noChangeAspect="1" noGrp="1" noRot="1"/>
           </p:cNvSpPr>
@@ -627,7 +630,7 @@
       </p:sp>
       <p:sp>
         <p:nvSpPr>
-          <p:cNvPr id="1494842246" name="Notes Placeholder 2"/>
+          <p:cNvPr id="167403374" name="Notes Placeholder 2"/>
           <p:cNvSpPr>
             <a:spLocks noGrp="1"/>
           </p:cNvSpPr>
@@ -649,7 +652,7 @@
       </p:sp>
       <p:sp>
         <p:nvSpPr>
-          <p:cNvPr id="1951154063" name="Slide Number Placeholder 3"/>
+          <p:cNvPr id="297425978" name="Slide Number Placeholder 3"/>
           <p:cNvSpPr>
             <a:spLocks noGrp="1"/>
           </p:cNvSpPr>
@@ -700,7 +703,7 @@
       </p:grpSpPr>
       <p:sp>
         <p:nvSpPr>
-          <p:cNvPr id="1569430299" name="Slide Image Placeholder 1"/>
+          <p:cNvPr id="1997200584" name="Slide Image Placeholder 1"/>
           <p:cNvSpPr>
             <a:spLocks noChangeAspect="1" noGrp="1" noRot="1"/>
           </p:cNvSpPr>
@@ -712,7 +715,7 @@
       </p:sp>
       <p:sp>
         <p:nvSpPr>
-          <p:cNvPr id="495546838" name="Notes Placeholder 2"/>
+          <p:cNvPr id="1154652169" name="Notes Placeholder 2"/>
           <p:cNvSpPr>
             <a:spLocks noGrp="1"/>
           </p:cNvSpPr>
@@ -734,7 +737,7 @@
       </p:sp>
       <p:sp>
         <p:nvSpPr>
-          <p:cNvPr id="1958902036" name="Slide Number Placeholder 3"/>
+          <p:cNvPr id="1893709921" name="Slide Number Placeholder 3"/>
           <p:cNvSpPr>
             <a:spLocks noGrp="1"/>
           </p:cNvSpPr>
@@ -785,7 +788,7 @@
       </p:grpSpPr>
       <p:sp>
         <p:nvSpPr>
-          <p:cNvPr id="1523038722" name="Slide Image Placeholder 1"/>
+          <p:cNvPr id="1348156743" name="Slide Image Placeholder 1"/>
           <p:cNvSpPr>
             <a:spLocks noChangeAspect="1" noGrp="1" noRot="1"/>
           </p:cNvSpPr>
@@ -797,7 +800,7 @@
       </p:sp>
       <p:sp>
         <p:nvSpPr>
-          <p:cNvPr id="2056319910" name="Notes Placeholder 2"/>
+          <p:cNvPr id="1598776959" name="Notes Placeholder 2"/>
           <p:cNvSpPr>
             <a:spLocks noGrp="1"/>
           </p:cNvSpPr>
@@ -819,7 +822,7 @@
       </p:sp>
       <p:sp>
         <p:nvSpPr>
-          <p:cNvPr id="1796213329" name="Slide Number Placeholder 3"/>
+          <p:cNvPr id="1403810376" name="Slide Number Placeholder 3"/>
           <p:cNvSpPr>
             <a:spLocks noGrp="1"/>
           </p:cNvSpPr>
@@ -870,7 +873,7 @@
       </p:grpSpPr>
       <p:sp>
         <p:nvSpPr>
-          <p:cNvPr id="445321579" name="Slide Image Placeholder 1"/>
+          <p:cNvPr id="1087923633" name="Slide Image Placeholder 1"/>
           <p:cNvSpPr>
             <a:spLocks noChangeAspect="1" noGrp="1" noRot="1"/>
           </p:cNvSpPr>
@@ -882,7 +885,7 @@
       </p:sp>
       <p:sp>
         <p:nvSpPr>
-          <p:cNvPr id="1739401825" name="Notes Placeholder 2"/>
+          <p:cNvPr id="1530696377" name="Notes Placeholder 2"/>
           <p:cNvSpPr>
             <a:spLocks noGrp="1"/>
           </p:cNvSpPr>
@@ -904,7 +907,7 @@
       </p:sp>
       <p:sp>
         <p:nvSpPr>
-          <p:cNvPr id="900784786" name="Slide Number Placeholder 3"/>
+          <p:cNvPr id="267858865" name="Slide Number Placeholder 3"/>
           <p:cNvSpPr>
             <a:spLocks noGrp="1"/>
           </p:cNvSpPr>
@@ -955,7 +958,7 @@
       </p:grpSpPr>
       <p:sp>
         <p:nvSpPr>
-          <p:cNvPr id="1417141964" name="Slide Image Placeholder 1"/>
+          <p:cNvPr id="1286070024" name="Slide Image Placeholder 1"/>
           <p:cNvSpPr>
             <a:spLocks noChangeAspect="1" noGrp="1" noRot="1"/>
           </p:cNvSpPr>
@@ -967,7 +970,7 @@
       </p:sp>
       <p:sp>
         <p:nvSpPr>
-          <p:cNvPr id="1723326490" name="Notes Placeholder 2"/>
+          <p:cNvPr id="2087769782" name="Notes Placeholder 2"/>
           <p:cNvSpPr>
             <a:spLocks noGrp="1"/>
           </p:cNvSpPr>
@@ -989,7 +992,7 @@
       </p:sp>
       <p:sp>
         <p:nvSpPr>
-          <p:cNvPr id="1045191894" name="Slide Number Placeholder 3"/>
+          <p:cNvPr id="66322064" name="Slide Number Placeholder 3"/>
           <p:cNvSpPr>
             <a:spLocks noGrp="1"/>
           </p:cNvSpPr>
@@ -1005,7 +1008,7 @@
             <a:pPr>
               <a:defRPr/>
             </a:pPr>
-            <a:fld id="{5CE3D79E-5A56-A339-5BD5-3948697C5D93}" type="slidenum">
+            <a:fld id="{E2F52480-0813-D9C9-E145-46E7CB451224}" type="slidenum">
               <a:rPr/>
               <a:t/>
             </a:fld>
@@ -1040,7 +1043,7 @@
       </p:grpSpPr>
       <p:sp>
         <p:nvSpPr>
-          <p:cNvPr id="714847946" name="Slide Image Placeholder 1"/>
+          <p:cNvPr id="695136953" name="Slide Image Placeholder 1"/>
           <p:cNvSpPr>
             <a:spLocks noChangeAspect="1" noGrp="1" noRot="1"/>
           </p:cNvSpPr>
@@ -1052,7 +1055,7 @@
       </p:sp>
       <p:sp>
         <p:nvSpPr>
-          <p:cNvPr id="1186101691" name="Notes Placeholder 2"/>
+          <p:cNvPr id="1993756006" name="Notes Placeholder 2"/>
           <p:cNvSpPr>
             <a:spLocks noGrp="1"/>
           </p:cNvSpPr>
@@ -1074,7 +1077,7 @@
       </p:sp>
       <p:sp>
         <p:nvSpPr>
-          <p:cNvPr id="1418016604" name="Slide Number Placeholder 3"/>
+          <p:cNvPr id="1801450287" name="Slide Number Placeholder 3"/>
           <p:cNvSpPr>
             <a:spLocks noGrp="1"/>
           </p:cNvSpPr>
@@ -1090,7 +1093,7 @@
             <a:pPr>
               <a:defRPr/>
             </a:pPr>
-            <a:fld id="{C1B0ED42-154C-37AC-EA60-9CE5185831C2}" type="slidenum">
+            <a:fld id="{2CB3A339-E4F5-9849-5159-B780C46036EF}" type="slidenum">
               <a:rPr/>
               <a:t/>
             </a:fld>
@@ -1125,7 +1128,7 @@
       </p:grpSpPr>
       <p:sp>
         <p:nvSpPr>
-          <p:cNvPr id="29472692" name="Slide Image Placeholder 1"/>
+          <p:cNvPr id="1833777513" name="Slide Image Placeholder 1"/>
           <p:cNvSpPr>
             <a:spLocks noChangeAspect="1" noGrp="1" noRot="1"/>
           </p:cNvSpPr>
@@ -1137,7 +1140,7 @@
       </p:sp>
       <p:sp>
         <p:nvSpPr>
-          <p:cNvPr id="2120310523" name="Notes Placeholder 2"/>
+          <p:cNvPr id="1452218426" name="Notes Placeholder 2"/>
           <p:cNvSpPr>
             <a:spLocks noGrp="1"/>
           </p:cNvSpPr>
@@ -1159,7 +1162,7 @@
       </p:sp>
       <p:sp>
         <p:nvSpPr>
-          <p:cNvPr id="331964842" name="Slide Number Placeholder 3"/>
+          <p:cNvPr id="2023098653" name="Slide Number Placeholder 3"/>
           <p:cNvSpPr>
             <a:spLocks noGrp="1"/>
           </p:cNvSpPr>
@@ -1175,7 +1178,7 @@
             <a:pPr>
               <a:defRPr/>
             </a:pPr>
-            <a:fld id="{97CE3B5A-C7B8-C31E-D05F-021B77FFEF0E}" type="slidenum">
+            <a:fld id="{7754AAF7-24FB-4C7D-56D0-9F6828B47495}" type="slidenum">
               <a:rPr/>
               <a:t/>
             </a:fld>
@@ -1210,7 +1213,7 @@
       </p:grpSpPr>
       <p:sp>
         <p:nvSpPr>
-          <p:cNvPr id="506456358" name="Slide Image Placeholder 1"/>
+          <p:cNvPr id="826642841" name="Slide Image Placeholder 1"/>
           <p:cNvSpPr>
             <a:spLocks noChangeAspect="1" noGrp="1" noRot="1"/>
           </p:cNvSpPr>
@@ -1222,7 +1225,7 @@
       </p:sp>
       <p:sp>
         <p:nvSpPr>
-          <p:cNvPr id="496033519" name="Notes Placeholder 2"/>
+          <p:cNvPr id="170725483" name="Notes Placeholder 2"/>
           <p:cNvSpPr>
             <a:spLocks noGrp="1"/>
           </p:cNvSpPr>
@@ -1244,7 +1247,7 @@
       </p:sp>
       <p:sp>
         <p:nvSpPr>
-          <p:cNvPr id="1271475493" name="Slide Number Placeholder 3"/>
+          <p:cNvPr id="599569182" name="Slide Number Placeholder 3"/>
           <p:cNvSpPr>
             <a:spLocks noGrp="1"/>
           </p:cNvSpPr>
@@ -1260,7 +1263,7 @@
             <a:pPr>
               <a:defRPr/>
             </a:pPr>
-            <a:fld id="{373A4F64-1DDB-898D-3141-351BAF57DA12}" type="slidenum">
+            <a:fld id="{ECC01B90-6EF3-4614-96E6-28D52D163363}" type="slidenum">
               <a:rPr/>
               <a:t/>
             </a:fld>
@@ -1295,7 +1298,7 @@
       </p:grpSpPr>
       <p:sp>
         <p:nvSpPr>
-          <p:cNvPr id="1203296988" name="Slide Image Placeholder 1"/>
+          <p:cNvPr id="1040290452" name="Slide Image Placeholder 1"/>
           <p:cNvSpPr>
             <a:spLocks noChangeAspect="1" noGrp="1" noRot="1"/>
           </p:cNvSpPr>
@@ -1307,7 +1310,7 @@
       </p:sp>
       <p:sp>
         <p:nvSpPr>
-          <p:cNvPr id="1717544694" name="Notes Placeholder 2"/>
+          <p:cNvPr id="1677648333" name="Notes Placeholder 2"/>
           <p:cNvSpPr>
             <a:spLocks noGrp="1"/>
           </p:cNvSpPr>
@@ -1329,7 +1332,7 @@
       </p:sp>
       <p:sp>
         <p:nvSpPr>
-          <p:cNvPr id="738904043" name="Slide Number Placeholder 3"/>
+          <p:cNvPr id="1466620103" name="Slide Number Placeholder 3"/>
           <p:cNvSpPr>
             <a:spLocks noGrp="1"/>
           </p:cNvSpPr>
@@ -1345,7 +1348,7 @@
             <a:pPr>
               <a:defRPr/>
             </a:pPr>
-            <a:fld id="{E0EEA2AC-6940-83FF-9A62-FDE019F8CFBA}" type="slidenum">
+            <a:fld id="{C1B0ED42-154C-37AC-EA60-9CE5185831C2}" type="slidenum">
               <a:rPr/>
               <a:t/>
             </a:fld>
@@ -1380,7 +1383,7 @@
       </p:grpSpPr>
       <p:sp>
         <p:nvSpPr>
-          <p:cNvPr id="1330832705" name="Slide Image Placeholder 1"/>
+          <p:cNvPr id="361328429" name="Slide Image Placeholder 1"/>
           <p:cNvSpPr>
             <a:spLocks noChangeAspect="1" noGrp="1" noRot="1"/>
           </p:cNvSpPr>
@@ -1392,7 +1395,7 @@
       </p:sp>
       <p:sp>
         <p:nvSpPr>
-          <p:cNvPr id="1279881132" name="Notes Placeholder 2"/>
+          <p:cNvPr id="2076207588" name="Notes Placeholder 2"/>
           <p:cNvSpPr>
             <a:spLocks noGrp="1"/>
           </p:cNvSpPr>
@@ -1414,7 +1417,7 @@
       </p:sp>
       <p:sp>
         <p:nvSpPr>
-          <p:cNvPr id="1527127595" name="Slide Number Placeholder 3"/>
+          <p:cNvPr id="1342391195" name="Slide Number Placeholder 3"/>
           <p:cNvSpPr>
             <a:spLocks noGrp="1"/>
           </p:cNvSpPr>
@@ -1430,7 +1433,7 @@
             <a:pPr>
               <a:defRPr/>
             </a:pPr>
-            <a:fld id="{34DDF272-15C9-97B8-0696-B071723A3A34}" type="slidenum">
+            <a:fld id="{97CE3B5A-C7B8-C31E-D05F-021B77FFEF0E}" type="slidenum">
               <a:rPr/>
               <a:t/>
             </a:fld>
@@ -1465,7 +1468,7 @@
       </p:grpSpPr>
       <p:sp>
         <p:nvSpPr>
-          <p:cNvPr id="963066904" name="Slide Image Placeholder 1"/>
+          <p:cNvPr id="909963068" name="Slide Image Placeholder 1"/>
           <p:cNvSpPr>
             <a:spLocks noChangeAspect="1" noGrp="1" noRot="1"/>
           </p:cNvSpPr>
@@ -1477,7 +1480,7 @@
       </p:sp>
       <p:sp>
         <p:nvSpPr>
-          <p:cNvPr id="137057594" name="Notes Placeholder 2"/>
+          <p:cNvPr id="764258982" name="Notes Placeholder 2"/>
           <p:cNvSpPr>
             <a:spLocks noGrp="1"/>
           </p:cNvSpPr>
@@ -1499,7 +1502,7 @@
       </p:sp>
       <p:sp>
         <p:nvSpPr>
-          <p:cNvPr id="1020428955" name="Slide Number Placeholder 3"/>
+          <p:cNvPr id="1001182147" name="Slide Number Placeholder 3"/>
           <p:cNvSpPr>
             <a:spLocks noGrp="1"/>
           </p:cNvSpPr>
@@ -1550,7 +1553,7 @@
       </p:grpSpPr>
       <p:sp>
         <p:nvSpPr>
-          <p:cNvPr id="2015974854" name="Slide Image Placeholder 1"/>
+          <p:cNvPr id="304025030" name="Slide Image Placeholder 1"/>
           <p:cNvSpPr>
             <a:spLocks noChangeAspect="1" noGrp="1" noRot="1"/>
           </p:cNvSpPr>
@@ -1562,7 +1565,7 @@
       </p:sp>
       <p:sp>
         <p:nvSpPr>
-          <p:cNvPr id="149539516" name="Notes Placeholder 2"/>
+          <p:cNvPr id="1216711154" name="Notes Placeholder 2"/>
           <p:cNvSpPr>
             <a:spLocks noGrp="1"/>
           </p:cNvSpPr>
@@ -1584,7 +1587,262 @@
       </p:sp>
       <p:sp>
         <p:nvSpPr>
-          <p:cNvPr id="324720142" name="Slide Number Placeholder 3"/>
+          <p:cNvPr id="1437157295" name="Slide Number Placeholder 3"/>
+          <p:cNvSpPr>
+            <a:spLocks noGrp="1"/>
+          </p:cNvSpPr>
+          <p:nvPr>
+            <p:ph type="sldNum" sz="quarter" idx="10"/>
+          </p:nvPr>
+        </p:nvSpPr>
+        <p:spPr bwMode="auto"/>
+        <p:txBody>
+          <a:bodyPr/>
+          <a:lstStyle/>
+          <a:p>
+            <a:pPr>
+              <a:defRPr/>
+            </a:pPr>
+            <a:fld id="{373A4F64-1DDB-898D-3141-351BAF57DA12}" type="slidenum">
+              <a:rPr/>
+              <a:t/>
+            </a:fld>
+            <a:endParaRPr/>
+          </a:p>
+        </p:txBody>
+      </p:sp>
+    </p:spTree>
+  </p:cSld>
+  <p:clrMapOvr>
+    <a:masterClrMapping/>
+  </p:clrMapOvr>
+</p:notes>
+</file>
+
+<file path=ppt/notesSlides/notesSlide21.xml><?xml version="1.0" encoding="utf-8"?>
+<p:notes xmlns:a="http://schemas.openxmlformats.org/drawingml/2006/main" xmlns:r="http://schemas.openxmlformats.org/officeDocument/2006/relationships" xmlns:p="http://schemas.openxmlformats.org/presentationml/2006/main" xmlns:m="http://schemas.openxmlformats.org/officeDocument/2006/math" xmlns:w="http://schemas.openxmlformats.org/wordprocessingml/2006/main">
+  <p:cSld name="">
+    <p:spTree>
+      <p:nvGrpSpPr>
+        <p:cNvPr id="1" name=""/>
+        <p:cNvGrpSpPr/>
+        <p:nvPr/>
+      </p:nvGrpSpPr>
+      <p:grpSpPr bwMode="auto">
+        <a:xfrm>
+          <a:off x="0" y="0"/>
+          <a:ext cx="0" cy="0"/>
+          <a:chOff x="0" y="0"/>
+          <a:chExt cx="0" cy="0"/>
+        </a:xfrm>
+      </p:grpSpPr>
+      <p:sp>
+        <p:nvSpPr>
+          <p:cNvPr id="358610792" name="Slide Image Placeholder 1"/>
+          <p:cNvSpPr>
+            <a:spLocks noChangeAspect="1" noGrp="1" noRot="1"/>
+          </p:cNvSpPr>
+          <p:nvPr>
+            <p:ph type="sldImg"/>
+          </p:nvPr>
+        </p:nvSpPr>
+        <p:spPr bwMode="auto"/>
+      </p:sp>
+      <p:sp>
+        <p:nvSpPr>
+          <p:cNvPr id="976864696" name="Notes Placeholder 2"/>
+          <p:cNvSpPr>
+            <a:spLocks noGrp="1"/>
+          </p:cNvSpPr>
+          <p:nvPr>
+            <p:ph type="body" idx="1"/>
+          </p:nvPr>
+        </p:nvSpPr>
+        <p:spPr bwMode="auto"/>
+        <p:txBody>
+          <a:bodyPr/>
+          <a:lstStyle/>
+          <a:p>
+            <a:pPr>
+              <a:defRPr/>
+            </a:pPr>
+            <a:endParaRPr/>
+          </a:p>
+        </p:txBody>
+      </p:sp>
+      <p:sp>
+        <p:nvSpPr>
+          <p:cNvPr id="515598540" name="Slide Number Placeholder 3"/>
+          <p:cNvSpPr>
+            <a:spLocks noGrp="1"/>
+          </p:cNvSpPr>
+          <p:nvPr>
+            <p:ph type="sldNum" sz="quarter" idx="10"/>
+          </p:nvPr>
+        </p:nvSpPr>
+        <p:spPr bwMode="auto"/>
+        <p:txBody>
+          <a:bodyPr/>
+          <a:lstStyle/>
+          <a:p>
+            <a:pPr>
+              <a:defRPr/>
+            </a:pPr>
+            <a:fld id="{E0EEA2AC-6940-83FF-9A62-FDE019F8CFBA}" type="slidenum">
+              <a:rPr/>
+              <a:t/>
+            </a:fld>
+            <a:endParaRPr/>
+          </a:p>
+        </p:txBody>
+      </p:sp>
+    </p:spTree>
+  </p:cSld>
+  <p:clrMapOvr>
+    <a:masterClrMapping/>
+  </p:clrMapOvr>
+</p:notes>
+</file>
+
+<file path=ppt/notesSlides/notesSlide22.xml><?xml version="1.0" encoding="utf-8"?>
+<p:notes xmlns:a="http://schemas.openxmlformats.org/drawingml/2006/main" xmlns:r="http://schemas.openxmlformats.org/officeDocument/2006/relationships" xmlns:p="http://schemas.openxmlformats.org/presentationml/2006/main" xmlns:m="http://schemas.openxmlformats.org/officeDocument/2006/math" xmlns:w="http://schemas.openxmlformats.org/wordprocessingml/2006/main">
+  <p:cSld name="">
+    <p:spTree>
+      <p:nvGrpSpPr>
+        <p:cNvPr id="1" name=""/>
+        <p:cNvGrpSpPr/>
+        <p:nvPr/>
+      </p:nvGrpSpPr>
+      <p:grpSpPr bwMode="auto">
+        <a:xfrm>
+          <a:off x="0" y="0"/>
+          <a:ext cx="0" cy="0"/>
+          <a:chOff x="0" y="0"/>
+          <a:chExt cx="0" cy="0"/>
+        </a:xfrm>
+      </p:grpSpPr>
+      <p:sp>
+        <p:nvSpPr>
+          <p:cNvPr id="661484407" name="Slide Image Placeholder 1"/>
+          <p:cNvSpPr>
+            <a:spLocks noChangeAspect="1" noGrp="1" noRot="1"/>
+          </p:cNvSpPr>
+          <p:nvPr>
+            <p:ph type="sldImg"/>
+          </p:nvPr>
+        </p:nvSpPr>
+        <p:spPr bwMode="auto"/>
+      </p:sp>
+      <p:sp>
+        <p:nvSpPr>
+          <p:cNvPr id="1567864133" name="Notes Placeholder 2"/>
+          <p:cNvSpPr>
+            <a:spLocks noGrp="1"/>
+          </p:cNvSpPr>
+          <p:nvPr>
+            <p:ph type="body" idx="1"/>
+          </p:nvPr>
+        </p:nvSpPr>
+        <p:spPr bwMode="auto"/>
+        <p:txBody>
+          <a:bodyPr/>
+          <a:lstStyle/>
+          <a:p>
+            <a:pPr>
+              <a:defRPr/>
+            </a:pPr>
+            <a:endParaRPr/>
+          </a:p>
+        </p:txBody>
+      </p:sp>
+      <p:sp>
+        <p:nvSpPr>
+          <p:cNvPr id="356777442" name="Slide Number Placeholder 3"/>
+          <p:cNvSpPr>
+            <a:spLocks noGrp="1"/>
+          </p:cNvSpPr>
+          <p:nvPr>
+            <p:ph type="sldNum" sz="quarter" idx="10"/>
+          </p:nvPr>
+        </p:nvSpPr>
+        <p:spPr bwMode="auto"/>
+        <p:txBody>
+          <a:bodyPr/>
+          <a:lstStyle/>
+          <a:p>
+            <a:pPr>
+              <a:defRPr/>
+            </a:pPr>
+            <a:fld id="{34DDF272-15C9-97B8-0696-B071723A3A34}" type="slidenum">
+              <a:rPr/>
+              <a:t/>
+            </a:fld>
+            <a:endParaRPr/>
+          </a:p>
+        </p:txBody>
+      </p:sp>
+    </p:spTree>
+  </p:cSld>
+  <p:clrMapOvr>
+    <a:masterClrMapping/>
+  </p:clrMapOvr>
+</p:notes>
+</file>
+
+<file path=ppt/notesSlides/notesSlide23.xml><?xml version="1.0" encoding="utf-8"?>
+<p:notes xmlns:a="http://schemas.openxmlformats.org/drawingml/2006/main" xmlns:r="http://schemas.openxmlformats.org/officeDocument/2006/relationships" xmlns:p="http://schemas.openxmlformats.org/presentationml/2006/main" xmlns:m="http://schemas.openxmlformats.org/officeDocument/2006/math" xmlns:w="http://schemas.openxmlformats.org/wordprocessingml/2006/main">
+  <p:cSld name="">
+    <p:spTree>
+      <p:nvGrpSpPr>
+        <p:cNvPr id="1" name=""/>
+        <p:cNvGrpSpPr/>
+        <p:nvPr/>
+      </p:nvGrpSpPr>
+      <p:grpSpPr bwMode="auto">
+        <a:xfrm>
+          <a:off x="0" y="0"/>
+          <a:ext cx="0" cy="0"/>
+          <a:chOff x="0" y="0"/>
+          <a:chExt cx="0" cy="0"/>
+        </a:xfrm>
+      </p:grpSpPr>
+      <p:sp>
+        <p:nvSpPr>
+          <p:cNvPr id="1078166060" name="Slide Image Placeholder 1"/>
+          <p:cNvSpPr>
+            <a:spLocks noChangeAspect="1" noGrp="1" noRot="1"/>
+          </p:cNvSpPr>
+          <p:nvPr>
+            <p:ph type="sldImg"/>
+          </p:nvPr>
+        </p:nvSpPr>
+        <p:spPr bwMode="auto"/>
+      </p:sp>
+      <p:sp>
+        <p:nvSpPr>
+          <p:cNvPr id="1274845390" name="Notes Placeholder 2"/>
+          <p:cNvSpPr>
+            <a:spLocks noGrp="1"/>
+          </p:cNvSpPr>
+          <p:nvPr>
+            <p:ph type="body" idx="1"/>
+          </p:nvPr>
+        </p:nvSpPr>
+        <p:spPr bwMode="auto"/>
+        <p:txBody>
+          <a:bodyPr/>
+          <a:lstStyle/>
+          <a:p>
+            <a:pPr>
+              <a:defRPr/>
+            </a:pPr>
+            <a:endParaRPr/>
+          </a:p>
+        </p:txBody>
+      </p:sp>
+      <p:sp>
+        <p:nvSpPr>
+          <p:cNvPr id="340640237" name="Slide Number Placeholder 3"/>
           <p:cNvSpPr>
             <a:spLocks noGrp="1"/>
           </p:cNvSpPr>
@@ -1635,7 +1893,7 @@
       </p:grpSpPr>
       <p:sp>
         <p:nvSpPr>
-          <p:cNvPr id="781235076" name="Slide Image Placeholder 1"/>
+          <p:cNvPr id="1891127264" name="Slide Image Placeholder 1"/>
           <p:cNvSpPr>
             <a:spLocks noChangeAspect="1" noGrp="1" noRot="1"/>
           </p:cNvSpPr>
@@ -1647,7 +1905,7 @@
       </p:sp>
       <p:sp>
         <p:nvSpPr>
-          <p:cNvPr id="556179191" name="Notes Placeholder 2"/>
+          <p:cNvPr id="456444719" name="Notes Placeholder 2"/>
           <p:cNvSpPr>
             <a:spLocks noGrp="1"/>
           </p:cNvSpPr>
@@ -1669,7 +1927,7 @@
       </p:sp>
       <p:sp>
         <p:nvSpPr>
-          <p:cNvPr id="2135982930" name="Slide Number Placeholder 3"/>
+          <p:cNvPr id="266270473" name="Slide Number Placeholder 3"/>
           <p:cNvSpPr>
             <a:spLocks noGrp="1"/>
           </p:cNvSpPr>
@@ -1720,7 +1978,7 @@
       </p:grpSpPr>
       <p:sp>
         <p:nvSpPr>
-          <p:cNvPr id="1659376130" name="Slide Image Placeholder 1"/>
+          <p:cNvPr id="162645574" name="Slide Image Placeholder 1"/>
           <p:cNvSpPr>
             <a:spLocks noChangeAspect="1" noGrp="1" noRot="1"/>
           </p:cNvSpPr>
@@ -1732,7 +1990,7 @@
       </p:sp>
       <p:sp>
         <p:nvSpPr>
-          <p:cNvPr id="1563664412" name="Notes Placeholder 2"/>
+          <p:cNvPr id="506651949" name="Notes Placeholder 2"/>
           <p:cNvSpPr>
             <a:spLocks noGrp="1"/>
           </p:cNvSpPr>
@@ -1754,7 +2012,7 @@
       </p:sp>
       <p:sp>
         <p:nvSpPr>
-          <p:cNvPr id="1524035926" name="Slide Number Placeholder 3"/>
+          <p:cNvPr id="2002783030" name="Slide Number Placeholder 3"/>
           <p:cNvSpPr>
             <a:spLocks noGrp="1"/>
           </p:cNvSpPr>
@@ -1805,7 +2063,7 @@
       </p:grpSpPr>
       <p:sp>
         <p:nvSpPr>
-          <p:cNvPr id="570447049" name="Slide Image Placeholder 1"/>
+          <p:cNvPr id="1803314977" name="Slide Image Placeholder 1"/>
           <p:cNvSpPr>
             <a:spLocks noChangeAspect="1" noGrp="1" noRot="1"/>
           </p:cNvSpPr>
@@ -1817,7 +2075,7 @@
       </p:sp>
       <p:sp>
         <p:nvSpPr>
-          <p:cNvPr id="1722421659" name="Notes Placeholder 2"/>
+          <p:cNvPr id="1500213668" name="Notes Placeholder 2"/>
           <p:cNvSpPr>
             <a:spLocks noGrp="1"/>
           </p:cNvSpPr>
@@ -1839,7 +2097,7 @@
       </p:sp>
       <p:sp>
         <p:nvSpPr>
-          <p:cNvPr id="93445593" name="Slide Number Placeholder 3"/>
+          <p:cNvPr id="1505858981" name="Slide Number Placeholder 3"/>
           <p:cNvSpPr>
             <a:spLocks noGrp="1"/>
           </p:cNvSpPr>
@@ -1890,7 +2148,7 @@
       </p:grpSpPr>
       <p:sp>
         <p:nvSpPr>
-          <p:cNvPr id="629013728" name="Slide Image Placeholder 1"/>
+          <p:cNvPr id="1637556594" name="Slide Image Placeholder 1"/>
           <p:cNvSpPr>
             <a:spLocks noChangeAspect="1" noGrp="1" noRot="1"/>
           </p:cNvSpPr>
@@ -1902,7 +2160,7 @@
       </p:sp>
       <p:sp>
         <p:nvSpPr>
-          <p:cNvPr id="822027208" name="Notes Placeholder 2"/>
+          <p:cNvPr id="2099664211" name="Notes Placeholder 2"/>
           <p:cNvSpPr>
             <a:spLocks noGrp="1"/>
           </p:cNvSpPr>
@@ -1924,7 +2182,7 @@
       </p:sp>
       <p:sp>
         <p:nvSpPr>
-          <p:cNvPr id="1890280899" name="Slide Number Placeholder 3"/>
+          <p:cNvPr id="863438736" name="Slide Number Placeholder 3"/>
           <p:cNvSpPr>
             <a:spLocks noGrp="1"/>
           </p:cNvSpPr>
@@ -1975,7 +2233,7 @@
       </p:grpSpPr>
       <p:sp>
         <p:nvSpPr>
-          <p:cNvPr id="1028287498" name="Slide Image Placeholder 1"/>
+          <p:cNvPr id="1866783340" name="Slide Image Placeholder 1"/>
           <p:cNvSpPr>
             <a:spLocks noChangeAspect="1" noGrp="1" noRot="1"/>
           </p:cNvSpPr>
@@ -1987,7 +2245,7 @@
       </p:sp>
       <p:sp>
         <p:nvSpPr>
-          <p:cNvPr id="1487125422" name="Notes Placeholder 2"/>
+          <p:cNvPr id="438746694" name="Notes Placeholder 2"/>
           <p:cNvSpPr>
             <a:spLocks noGrp="1"/>
           </p:cNvSpPr>
@@ -2009,7 +2267,7 @@
       </p:sp>
       <p:sp>
         <p:nvSpPr>
-          <p:cNvPr id="1497143709" name="Slide Number Placeholder 3"/>
+          <p:cNvPr id="1825001365" name="Slide Number Placeholder 3"/>
           <p:cNvSpPr>
             <a:spLocks noGrp="1"/>
           </p:cNvSpPr>
@@ -2060,7 +2318,7 @@
       </p:grpSpPr>
       <p:sp>
         <p:nvSpPr>
-          <p:cNvPr id="1675663268" name="Slide Image Placeholder 1"/>
+          <p:cNvPr id="593440760" name="Slide Image Placeholder 1"/>
           <p:cNvSpPr>
             <a:spLocks noChangeAspect="1" noGrp="1" noRot="1"/>
           </p:cNvSpPr>
@@ -2072,7 +2330,7 @@
       </p:sp>
       <p:sp>
         <p:nvSpPr>
-          <p:cNvPr id="584677441" name="Notes Placeholder 2"/>
+          <p:cNvPr id="964761949" name="Notes Placeholder 2"/>
           <p:cNvSpPr>
             <a:spLocks noGrp="1"/>
           </p:cNvSpPr>
@@ -2094,7 +2352,7 @@
       </p:sp>
       <p:sp>
         <p:nvSpPr>
-          <p:cNvPr id="535632490" name="Slide Number Placeholder 3"/>
+          <p:cNvPr id="1996399529" name="Slide Number Placeholder 3"/>
           <p:cNvSpPr>
             <a:spLocks noGrp="1"/>
           </p:cNvSpPr>
@@ -2145,7 +2403,7 @@
       </p:grpSpPr>
       <p:sp>
         <p:nvSpPr>
-          <p:cNvPr id="1217780419" name="Slide Image Placeholder 1"/>
+          <p:cNvPr id="1279749026" name="Slide Image Placeholder 1"/>
           <p:cNvSpPr>
             <a:spLocks noChangeAspect="1" noGrp="1" noRot="1"/>
           </p:cNvSpPr>
@@ -2157,7 +2415,7 @@
       </p:sp>
       <p:sp>
         <p:nvSpPr>
-          <p:cNvPr id="740757049" name="Notes Placeholder 2"/>
+          <p:cNvPr id="1443393291" name="Notes Placeholder 2"/>
           <p:cNvSpPr>
             <a:spLocks noGrp="1"/>
           </p:cNvSpPr>
@@ -2179,7 +2437,7 @@
       </p:sp>
       <p:sp>
         <p:nvSpPr>
-          <p:cNvPr id="656636445" name="Slide Number Placeholder 3"/>
+          <p:cNvPr id="816317407" name="Slide Number Placeholder 3"/>
           <p:cNvSpPr>
             <a:spLocks noGrp="1"/>
           </p:cNvSpPr>
@@ -2230,7 +2488,7 @@
       </p:grpSpPr>
       <p:sp>
         <p:nvSpPr>
-          <p:cNvPr id="1326857447" name="Titolo 1"/>
+          <p:cNvPr id="1495173846" name="Titolo 1"/>
           <p:cNvSpPr>
             <a:spLocks noGrp="1"/>
           </p:cNvSpPr>
@@ -2265,7 +2523,7 @@
       </p:sp>
       <p:sp>
         <p:nvSpPr>
-          <p:cNvPr id="1502709416" name="Sottotitolo 2"/>
+          <p:cNvPr id="2096900696" name="Sottotitolo 2"/>
           <p:cNvSpPr>
             <a:spLocks noGrp="1"/>
           </p:cNvSpPr>
@@ -2333,7 +2591,7 @@
       </p:sp>
       <p:sp>
         <p:nvSpPr>
-          <p:cNvPr id="969766095" name="Segnaposto data 3"/>
+          <p:cNvPr id="2098076908" name="Segnaposto data 3"/>
           <p:cNvSpPr>
             <a:spLocks noGrp="1"/>
           </p:cNvSpPr>
@@ -2359,7 +2617,7 @@
       </p:sp>
       <p:sp>
         <p:nvSpPr>
-          <p:cNvPr id="1000243293" name="Segnaposto piè di pagina 4"/>
+          <p:cNvPr id="1451742043" name="Segnaposto piè di pagina 4"/>
           <p:cNvSpPr>
             <a:spLocks noGrp="1"/>
           </p:cNvSpPr>
@@ -2381,7 +2639,7 @@
       </p:sp>
       <p:sp>
         <p:nvSpPr>
-          <p:cNvPr id="773720423" name="Segnaposto numero diapositiva 5"/>
+          <p:cNvPr id="378279587" name="Segnaposto numero diapositiva 5"/>
           <p:cNvSpPr>
             <a:spLocks noGrp="1"/>
           </p:cNvSpPr>
@@ -2432,7 +2690,7 @@
       </p:grpSpPr>
       <p:sp>
         <p:nvSpPr>
-          <p:cNvPr id="900697127" name="Titolo 1"/>
+          <p:cNvPr id="2055484018" name="Titolo 1"/>
           <p:cNvSpPr>
             <a:spLocks noGrp="1"/>
           </p:cNvSpPr>
@@ -2458,7 +2716,7 @@
       </p:sp>
       <p:sp>
         <p:nvSpPr>
-          <p:cNvPr id="443758868" name="Segnaposto testo verticale 2"/>
+          <p:cNvPr id="1867211462" name="Segnaposto testo verticale 2"/>
           <p:cNvSpPr>
             <a:spLocks noGrp="1"/>
           </p:cNvSpPr>
@@ -2524,7 +2782,7 @@
       </p:sp>
       <p:sp>
         <p:nvSpPr>
-          <p:cNvPr id="1683614895" name="Segnaposto data 3"/>
+          <p:cNvPr id="429115142" name="Segnaposto data 3"/>
           <p:cNvSpPr>
             <a:spLocks noGrp="1"/>
           </p:cNvSpPr>
@@ -2550,7 +2808,7 @@
       </p:sp>
       <p:sp>
         <p:nvSpPr>
-          <p:cNvPr id="1977314640" name="Segnaposto piè di pagina 4"/>
+          <p:cNvPr id="1219216710" name="Segnaposto piè di pagina 4"/>
           <p:cNvSpPr>
             <a:spLocks noGrp="1"/>
           </p:cNvSpPr>
@@ -2572,7 +2830,7 @@
       </p:sp>
       <p:sp>
         <p:nvSpPr>
-          <p:cNvPr id="359839595" name="Segnaposto numero diapositiva 5"/>
+          <p:cNvPr id="2085903573" name="Segnaposto numero diapositiva 5"/>
           <p:cNvSpPr>
             <a:spLocks noGrp="1"/>
           </p:cNvSpPr>
@@ -2623,7 +2881,7 @@
       </p:grpSpPr>
       <p:sp>
         <p:nvSpPr>
-          <p:cNvPr id="1312615107" name="Titolo verticale 1"/>
+          <p:cNvPr id="1744356999" name="Titolo verticale 1"/>
           <p:cNvSpPr>
             <a:spLocks noGrp="1"/>
           </p:cNvSpPr>
@@ -2654,7 +2912,7 @@
       </p:sp>
       <p:sp>
         <p:nvSpPr>
-          <p:cNvPr id="129729671" name="Segnaposto testo verticale 2"/>
+          <p:cNvPr id="1437053011" name="Segnaposto testo verticale 2"/>
           <p:cNvSpPr>
             <a:spLocks noGrp="1"/>
           </p:cNvSpPr>
@@ -2725,7 +2983,7 @@
       </p:sp>
       <p:sp>
         <p:nvSpPr>
-          <p:cNvPr id="302568162" name="Segnaposto data 3"/>
+          <p:cNvPr id="729347285" name="Segnaposto data 3"/>
           <p:cNvSpPr>
             <a:spLocks noGrp="1"/>
           </p:cNvSpPr>
@@ -2751,7 +3009,7 @@
       </p:sp>
       <p:sp>
         <p:nvSpPr>
-          <p:cNvPr id="1596585206" name="Segnaposto piè di pagina 4"/>
+          <p:cNvPr id="1905350434" name="Segnaposto piè di pagina 4"/>
           <p:cNvSpPr>
             <a:spLocks noGrp="1"/>
           </p:cNvSpPr>
@@ -2773,7 +3031,7 @@
       </p:sp>
       <p:sp>
         <p:nvSpPr>
-          <p:cNvPr id="1287598478" name="Segnaposto numero diapositiva 5"/>
+          <p:cNvPr id="576792246" name="Segnaposto numero diapositiva 5"/>
           <p:cNvSpPr>
             <a:spLocks noGrp="1"/>
           </p:cNvSpPr>
@@ -2824,7 +3082,7 @@
       </p:grpSpPr>
       <p:sp>
         <p:nvSpPr>
-          <p:cNvPr id="227206324" name="Titolo 1"/>
+          <p:cNvPr id="571728749" name="Titolo 1"/>
           <p:cNvSpPr>
             <a:spLocks noGrp="1"/>
           </p:cNvSpPr>
@@ -2850,7 +3108,7 @@
       </p:sp>
       <p:sp>
         <p:nvSpPr>
-          <p:cNvPr id="977099606" name="Segnaposto contenuto 2"/>
+          <p:cNvPr id="473187805" name="Segnaposto contenuto 2"/>
           <p:cNvSpPr>
             <a:spLocks noGrp="1"/>
           </p:cNvSpPr>
@@ -2916,7 +3174,7 @@
       </p:sp>
       <p:sp>
         <p:nvSpPr>
-          <p:cNvPr id="1830450446" name="Segnaposto data 3"/>
+          <p:cNvPr id="1042055707" name="Segnaposto data 3"/>
           <p:cNvSpPr>
             <a:spLocks noGrp="1"/>
           </p:cNvSpPr>
@@ -2942,7 +3200,7 @@
       </p:sp>
       <p:sp>
         <p:nvSpPr>
-          <p:cNvPr id="117027652" name="Segnaposto piè di pagina 4"/>
+          <p:cNvPr id="636313684" name="Segnaposto piè di pagina 4"/>
           <p:cNvSpPr>
             <a:spLocks noGrp="1"/>
           </p:cNvSpPr>
@@ -2964,7 +3222,7 @@
       </p:sp>
       <p:sp>
         <p:nvSpPr>
-          <p:cNvPr id="1063603573" name="Segnaposto numero diapositiva 5"/>
+          <p:cNvPr id="1113051459" name="Segnaposto numero diapositiva 5"/>
           <p:cNvSpPr>
             <a:spLocks noGrp="1"/>
           </p:cNvSpPr>
@@ -3015,7 +3273,7 @@
       </p:grpSpPr>
       <p:sp>
         <p:nvSpPr>
-          <p:cNvPr id="559273043" name="Titolo 1"/>
+          <p:cNvPr id="2109162318" name="Titolo 1"/>
           <p:cNvSpPr>
             <a:spLocks noGrp="1"/>
           </p:cNvSpPr>
@@ -3050,7 +3308,7 @@
       </p:sp>
       <p:sp>
         <p:nvSpPr>
-          <p:cNvPr id="1731423094" name="Segnaposto testo 2"/>
+          <p:cNvPr id="679328813" name="Segnaposto testo 2"/>
           <p:cNvSpPr>
             <a:spLocks noGrp="1"/>
           </p:cNvSpPr>
@@ -3172,7 +3430,7 @@
       </p:sp>
       <p:sp>
         <p:nvSpPr>
-          <p:cNvPr id="1543707565" name="Segnaposto data 3"/>
+          <p:cNvPr id="1558988994" name="Segnaposto data 3"/>
           <p:cNvSpPr>
             <a:spLocks noGrp="1"/>
           </p:cNvSpPr>
@@ -3198,7 +3456,7 @@
       </p:sp>
       <p:sp>
         <p:nvSpPr>
-          <p:cNvPr id="1148431473" name="Segnaposto piè di pagina 4"/>
+          <p:cNvPr id="769315715" name="Segnaposto piè di pagina 4"/>
           <p:cNvSpPr>
             <a:spLocks noGrp="1"/>
           </p:cNvSpPr>
@@ -3220,7 +3478,7 @@
       </p:sp>
       <p:sp>
         <p:nvSpPr>
-          <p:cNvPr id="316641620" name="Segnaposto numero diapositiva 5"/>
+          <p:cNvPr id="1337338204" name="Segnaposto numero diapositiva 5"/>
           <p:cNvSpPr>
             <a:spLocks noGrp="1"/>
           </p:cNvSpPr>
@@ -3271,7 +3529,7 @@
       </p:grpSpPr>
       <p:sp>
         <p:nvSpPr>
-          <p:cNvPr id="1536072691" name="Title 1"/>
+          <p:cNvPr id="783697391" name="Title 1"/>
           <p:cNvSpPr>
             <a:spLocks noGrp="1"/>
           </p:cNvSpPr>
@@ -3297,7 +3555,7 @@
       </p:sp>
       <p:sp>
         <p:nvSpPr>
-          <p:cNvPr id="1202285231" name="Segnaposto contenuto 2"/>
+          <p:cNvPr id="1216792708" name="Segnaposto contenuto 2"/>
           <p:cNvSpPr>
             <a:spLocks noGrp="1"/>
           </p:cNvSpPr>
@@ -3368,7 +3626,7 @@
       </p:sp>
       <p:sp>
         <p:nvSpPr>
-          <p:cNvPr id="2001726842" name="Segnaposto contenuto 3"/>
+          <p:cNvPr id="1771311523" name="Segnaposto contenuto 3"/>
           <p:cNvSpPr>
             <a:spLocks noGrp="1"/>
           </p:cNvSpPr>
@@ -3439,7 +3697,7 @@
       </p:sp>
       <p:sp>
         <p:nvSpPr>
-          <p:cNvPr id="9266891" name="Segnaposto data 4"/>
+          <p:cNvPr id="2062770771" name="Segnaposto data 4"/>
           <p:cNvSpPr>
             <a:spLocks noGrp="1"/>
           </p:cNvSpPr>
@@ -3465,7 +3723,7 @@
       </p:sp>
       <p:sp>
         <p:nvSpPr>
-          <p:cNvPr id="755493128" name="Segnaposto piè di pagina 5"/>
+          <p:cNvPr id="207704897" name="Segnaposto piè di pagina 5"/>
           <p:cNvSpPr>
             <a:spLocks noGrp="1"/>
           </p:cNvSpPr>
@@ -3487,7 +3745,7 @@
       </p:sp>
       <p:sp>
         <p:nvSpPr>
-          <p:cNvPr id="726241221" name="Segnaposto numero diapositiva 6"/>
+          <p:cNvPr id="141966146" name="Segnaposto numero diapositiva 6"/>
           <p:cNvSpPr>
             <a:spLocks noGrp="1"/>
           </p:cNvSpPr>
@@ -3538,7 +3796,7 @@
       </p:grpSpPr>
       <p:sp>
         <p:nvSpPr>
-          <p:cNvPr id="1615018753" name="Titolo 1"/>
+          <p:cNvPr id="720575459" name="Titolo 1"/>
           <p:cNvSpPr>
             <a:spLocks noGrp="1"/>
           </p:cNvSpPr>
@@ -3569,7 +3827,7 @@
       </p:sp>
       <p:sp>
         <p:nvSpPr>
-          <p:cNvPr id="494565321" name="Segnaposto testo 2"/>
+          <p:cNvPr id="403074179" name="Segnaposto testo 2"/>
           <p:cNvSpPr>
             <a:spLocks noGrp="1"/>
           </p:cNvSpPr>
@@ -3637,7 +3895,7 @@
       </p:sp>
       <p:sp>
         <p:nvSpPr>
-          <p:cNvPr id="1935203864" name="Segnaposto contenuto 3"/>
+          <p:cNvPr id="1034376452" name="Segnaposto contenuto 3"/>
           <p:cNvSpPr>
             <a:spLocks noGrp="1"/>
           </p:cNvSpPr>
@@ -3708,7 +3966,7 @@
       </p:sp>
       <p:sp>
         <p:nvSpPr>
-          <p:cNvPr id="1385413656" name="Segnaposto testo 4"/>
+          <p:cNvPr id="1925355340" name="Segnaposto testo 4"/>
           <p:cNvSpPr>
             <a:spLocks noGrp="1"/>
           </p:cNvSpPr>
@@ -3776,7 +4034,7 @@
       </p:sp>
       <p:sp>
         <p:nvSpPr>
-          <p:cNvPr id="1759858726" name="Segnaposto contenuto 5"/>
+          <p:cNvPr id="2014180446" name="Segnaposto contenuto 5"/>
           <p:cNvSpPr>
             <a:spLocks noGrp="1"/>
           </p:cNvSpPr>
@@ -3847,7 +4105,7 @@
       </p:sp>
       <p:sp>
         <p:nvSpPr>
-          <p:cNvPr id="505370006" name="Segnaposto data 6"/>
+          <p:cNvPr id="1100837243" name="Segnaposto data 6"/>
           <p:cNvSpPr>
             <a:spLocks noGrp="1"/>
           </p:cNvSpPr>
@@ -3873,7 +4131,7 @@
       </p:sp>
       <p:sp>
         <p:nvSpPr>
-          <p:cNvPr id="1500664366" name="Segnaposto piè di pagina 7"/>
+          <p:cNvPr id="319951023" name="Segnaposto piè di pagina 7"/>
           <p:cNvSpPr>
             <a:spLocks noGrp="1"/>
           </p:cNvSpPr>
@@ -3895,7 +4153,7 @@
       </p:sp>
       <p:sp>
         <p:nvSpPr>
-          <p:cNvPr id="1731401636" name="Segnaposto numero diapositiva 8"/>
+          <p:cNvPr id="242465953" name="Segnaposto numero diapositiva 8"/>
           <p:cNvSpPr>
             <a:spLocks noGrp="1"/>
           </p:cNvSpPr>
@@ -3946,7 +4204,7 @@
       </p:grpSpPr>
       <p:sp>
         <p:nvSpPr>
-          <p:cNvPr id="463533174" name="Title 1"/>
+          <p:cNvPr id="1862953579" name="Title 1"/>
           <p:cNvSpPr>
             <a:spLocks noGrp="1"/>
           </p:cNvSpPr>
@@ -3972,7 +4230,7 @@
       </p:sp>
       <p:sp>
         <p:nvSpPr>
-          <p:cNvPr id="1633034603" name="Segnaposto data 2"/>
+          <p:cNvPr id="2069688320" name="Segnaposto data 2"/>
           <p:cNvSpPr>
             <a:spLocks noGrp="1"/>
           </p:cNvSpPr>
@@ -3998,7 +4256,7 @@
       </p:sp>
       <p:sp>
         <p:nvSpPr>
-          <p:cNvPr id="870520527" name="Segnaposto piè di pagina 3"/>
+          <p:cNvPr id="1421529815" name="Segnaposto piè di pagina 3"/>
           <p:cNvSpPr>
             <a:spLocks noGrp="1"/>
           </p:cNvSpPr>
@@ -4020,7 +4278,7 @@
       </p:sp>
       <p:sp>
         <p:nvSpPr>
-          <p:cNvPr id="884127308" name="Segnaposto numero diapositiva 4"/>
+          <p:cNvPr id="168063273" name="Segnaposto numero diapositiva 4"/>
           <p:cNvSpPr>
             <a:spLocks noGrp="1"/>
           </p:cNvSpPr>
@@ -4071,7 +4329,7 @@
       </p:grpSpPr>
       <p:sp>
         <p:nvSpPr>
-          <p:cNvPr id="32032371" name="Segnaposto data 1"/>
+          <p:cNvPr id="1987618487" name="Segnaposto data 1"/>
           <p:cNvSpPr>
             <a:spLocks noGrp="1"/>
           </p:cNvSpPr>
@@ -4097,7 +4355,7 @@
       </p:sp>
       <p:sp>
         <p:nvSpPr>
-          <p:cNvPr id="1322286750" name="Segnaposto piè di pagina 2"/>
+          <p:cNvPr id="1143868976" name="Segnaposto piè di pagina 2"/>
           <p:cNvSpPr>
             <a:spLocks noGrp="1"/>
           </p:cNvSpPr>
@@ -4119,7 +4377,7 @@
       </p:sp>
       <p:sp>
         <p:nvSpPr>
-          <p:cNvPr id="1536536129" name="Segnaposto numero diapositiva 3"/>
+          <p:cNvPr id="1578904580" name="Segnaposto numero diapositiva 3"/>
           <p:cNvSpPr>
             <a:spLocks noGrp="1"/>
           </p:cNvSpPr>
@@ -4170,7 +4428,7 @@
       </p:grpSpPr>
       <p:sp>
         <p:nvSpPr>
-          <p:cNvPr id="483527750" name="Titolo 1"/>
+          <p:cNvPr id="479583672" name="Titolo 1"/>
           <p:cNvSpPr>
             <a:spLocks noGrp="1"/>
           </p:cNvSpPr>
@@ -4205,7 +4463,7 @@
       </p:sp>
       <p:sp>
         <p:nvSpPr>
-          <p:cNvPr id="172185880" name="Segnaposto contenuto 2"/>
+          <p:cNvPr id="1486731977" name="Segnaposto contenuto 2"/>
           <p:cNvSpPr>
             <a:spLocks noGrp="1"/>
           </p:cNvSpPr>
@@ -4304,7 +4562,7 @@
       </p:sp>
       <p:sp>
         <p:nvSpPr>
-          <p:cNvPr id="1853934666" name="Segnaposto testo 3"/>
+          <p:cNvPr id="565939208" name="Segnaposto testo 3"/>
           <p:cNvSpPr>
             <a:spLocks noGrp="1"/>
           </p:cNvSpPr>
@@ -4372,7 +4630,7 @@
       </p:sp>
       <p:sp>
         <p:nvSpPr>
-          <p:cNvPr id="1084080569" name="Segnaposto data 4"/>
+          <p:cNvPr id="611833288" name="Segnaposto data 4"/>
           <p:cNvSpPr>
             <a:spLocks noGrp="1"/>
           </p:cNvSpPr>
@@ -4398,7 +4656,7 @@
       </p:sp>
       <p:sp>
         <p:nvSpPr>
-          <p:cNvPr id="1489050147" name="Segnaposto piè di pagina 5"/>
+          <p:cNvPr id="861767685" name="Segnaposto piè di pagina 5"/>
           <p:cNvSpPr>
             <a:spLocks noGrp="1"/>
           </p:cNvSpPr>
@@ -4420,7 +4678,7 @@
       </p:sp>
       <p:sp>
         <p:nvSpPr>
-          <p:cNvPr id="1113077645" name="Segnaposto numero diapositiva 6"/>
+          <p:cNvPr id="1913216569" name="Segnaposto numero diapositiva 6"/>
           <p:cNvSpPr>
             <a:spLocks noGrp="1"/>
           </p:cNvSpPr>
@@ -4471,7 +4729,7 @@
       </p:grpSpPr>
       <p:sp>
         <p:nvSpPr>
-          <p:cNvPr id="2001389089" name="Titolo 1"/>
+          <p:cNvPr id="106702206" name="Titolo 1"/>
           <p:cNvSpPr>
             <a:spLocks noGrp="1"/>
           </p:cNvSpPr>
@@ -4506,7 +4764,7 @@
       </p:sp>
       <p:sp>
         <p:nvSpPr>
-          <p:cNvPr id="1914859071" name="Segnaposto immagine 2"/>
+          <p:cNvPr id="2144436781" name="Segnaposto immagine 2"/>
           <p:cNvSpPr>
             <a:spLocks noChangeAspect="1" noGrp="1"/>
           </p:cNvSpPr>
@@ -4574,7 +4832,7 @@
       </p:sp>
       <p:sp>
         <p:nvSpPr>
-          <p:cNvPr id="301624316" name="Segnaposto testo 3"/>
+          <p:cNvPr id="994291581" name="Segnaposto testo 3"/>
           <p:cNvSpPr>
             <a:spLocks noGrp="1"/>
           </p:cNvSpPr>
@@ -4642,7 +4900,7 @@
       </p:sp>
       <p:sp>
         <p:nvSpPr>
-          <p:cNvPr id="1835887994" name="Segnaposto data 4"/>
+          <p:cNvPr id="1829581445" name="Segnaposto data 4"/>
           <p:cNvSpPr>
             <a:spLocks noGrp="1"/>
           </p:cNvSpPr>
@@ -4668,7 +4926,7 @@
       </p:sp>
       <p:sp>
         <p:nvSpPr>
-          <p:cNvPr id="786770737" name="Segnaposto piè di pagina 5"/>
+          <p:cNvPr id="639750667" name="Segnaposto piè di pagina 5"/>
           <p:cNvSpPr>
             <a:spLocks noGrp="1"/>
           </p:cNvSpPr>
@@ -4690,7 +4948,7 @@
       </p:sp>
       <p:sp>
         <p:nvSpPr>
-          <p:cNvPr id="405536532" name="Segnaposto numero diapositiva 6"/>
+          <p:cNvPr id="1217308643" name="Segnaposto numero diapositiva 6"/>
           <p:cNvSpPr>
             <a:spLocks noGrp="1"/>
           </p:cNvSpPr>
@@ -4768,7 +5026,7 @@
       </p:grpSpPr>
       <p:sp>
         <p:nvSpPr>
-          <p:cNvPr id="939344659" name="Segnaposto titolo 1"/>
+          <p:cNvPr id="397120540" name="Segnaposto titolo 1"/>
           <p:cNvSpPr>
             <a:spLocks noGrp="1"/>
           </p:cNvSpPr>
@@ -4804,7 +5062,7 @@
       </p:sp>
       <p:sp>
         <p:nvSpPr>
-          <p:cNvPr id="1630993952" name="Segnaposto testo 2"/>
+          <p:cNvPr id="1841652565" name="Segnaposto testo 2"/>
           <p:cNvSpPr>
             <a:spLocks noGrp="1"/>
           </p:cNvSpPr>
@@ -4880,7 +5138,7 @@
       </p:sp>
       <p:sp>
         <p:nvSpPr>
-          <p:cNvPr id="552558528" name="Segnaposto data 3"/>
+          <p:cNvPr id="190234425" name="Segnaposto data 3"/>
           <p:cNvSpPr>
             <a:spLocks noGrp="1"/>
           </p:cNvSpPr>
@@ -4924,7 +5182,7 @@
       </p:sp>
       <p:sp>
         <p:nvSpPr>
-          <p:cNvPr id="821268179" name="Segnaposto piè di pagina 4"/>
+          <p:cNvPr id="1459486652" name="Segnaposto piè di pagina 4"/>
           <p:cNvSpPr>
             <a:spLocks noGrp="1"/>
           </p:cNvSpPr>
@@ -4964,7 +5222,7 @@
       </p:sp>
       <p:sp>
         <p:nvSpPr>
-          <p:cNvPr id="556750004" name="Segnaposto numero diapositiva 5"/>
+          <p:cNvPr id="1778475728" name="Segnaposto numero diapositiva 5"/>
           <p:cNvSpPr>
             <a:spLocks noGrp="1"/>
           </p:cNvSpPr>
@@ -5324,7 +5582,7 @@
       </p:grpSpPr>
       <p:sp>
         <p:nvSpPr>
-          <p:cNvPr id="428444390" name="Title 1"/>
+          <p:cNvPr id="75013951" name="Title 1"/>
           <p:cNvSpPr>
             <a:spLocks noGrp="1"/>
           </p:cNvSpPr>
@@ -5354,7 +5612,7 @@
       </p:sp>
       <p:sp>
         <p:nvSpPr>
-          <p:cNvPr id="460690520" name="Subtitle 2"/>
+          <p:cNvPr id="1853021603" name="Subtitle 2"/>
           <p:cNvSpPr>
             <a:spLocks noGrp="1"/>
           </p:cNvSpPr>
@@ -5387,14 +5645,14 @@
       </p:sp>
       <p:sp>
         <p:nvSpPr>
-          <p:cNvPr id="1795880058" name=""/>
+          <p:cNvPr id="1485969275" name=""/>
           <p:cNvSpPr txBox="1"/>
           <p:nvPr/>
         </p:nvSpPr>
         <p:spPr bwMode="auto">
           <a:xfrm rot="0" flipH="0" flipV="0">
-            <a:off x="8426180" y="4745180"/>
-            <a:ext cx="3073141" cy="1737719"/>
+            <a:off x="7109997" y="4745179"/>
+            <a:ext cx="5003986" cy="1737719"/>
           </a:xfrm>
           <a:prstGeom prst="rect">
             <a:avLst/>
@@ -5420,25 +5678,31 @@
               </a:rPr>
               <a:t>Lorenzo Dolzanelli</a:t>
             </a:r>
-            <a:endParaRPr>
-              <a:latin typeface="DejaVu Sans Condensed"/>
-              <a:cs typeface="DejaVu Sans Condensed"/>
-            </a:endParaRPr>
-          </a:p>
-          <a:p>
-            <a:pPr>
-              <a:lnSpc>
-                <a:spcPct val="200000"/>
-              </a:lnSpc>
-              <a:defRPr/>
-            </a:pPr>
+            <a:r>
+              <a:rPr>
+                <a:latin typeface="DejaVu Sans Condensed"/>
+                <a:cs typeface="DejaVu Sans Condensed"/>
+              </a:rPr>
+              <a:t>	</a:t>
+            </a:r>
             <a:r>
               <a:rPr lang="en">
                 <a:latin typeface="DejaVu Sans Condensed"/>
                 <a:ea typeface="DejaVu Sans Condensed"/>
                 <a:cs typeface="DejaVu Sans Condensed"/>
               </a:rPr>
-              <a:t>Khater Abdelaziz</a:t>
+              <a:t>MAT </a:t>
+            </a:r>
+            <a:r>
+              <a:rPr lang="en" sz="1800" b="0" i="0" u="none" strike="noStrike" cap="none" spc="0">
+                <a:solidFill>
+                  <a:schemeClr val="tx1"/>
+                </a:solidFill>
+                <a:latin typeface="DejaVu Sans Condensed"/>
+                <a:ea typeface="DejaVu Sans Condensed"/>
+                <a:cs typeface="DejaVu Sans Condensed"/>
+              </a:rPr>
+              <a:t>740643</a:t>
             </a:r>
             <a:endParaRPr>
               <a:latin typeface="DejaVu Sans Condensed"/>
@@ -5458,7 +5722,49 @@
                 <a:ea typeface="DejaVu Sans Condensed"/>
                 <a:cs typeface="DejaVu Sans Condensed"/>
               </a:rPr>
-              <a:t>Daniele Miguel Franchi</a:t>
+              <a:t>Khater Abdelaziz		</a:t>
+            </a:r>
+            <a:r>
+              <a:rPr lang="en" sz="1800" b="0" i="0" u="none" strike="noStrike" cap="none" spc="0">
+                <a:solidFill>
+                  <a:schemeClr val="tx1"/>
+                </a:solidFill>
+                <a:latin typeface="DejaVu Sans Condensed"/>
+                <a:ea typeface="DejaVu Sans Condensed"/>
+                <a:cs typeface="DejaVu Sans Condensed"/>
+              </a:rPr>
+              <a:t>MAT 741614</a:t>
+            </a:r>
+            <a:endParaRPr>
+              <a:latin typeface="DejaVu Sans Condensed"/>
+              <a:cs typeface="DejaVu Sans Condensed"/>
+            </a:endParaRPr>
+          </a:p>
+          <a:p>
+            <a:pPr>
+              <a:lnSpc>
+                <a:spcPct val="200000"/>
+              </a:lnSpc>
+              <a:defRPr/>
+            </a:pPr>
+            <a:r>
+              <a:rPr lang="en">
+                <a:latin typeface="DejaVu Sans Condensed"/>
+                <a:ea typeface="DejaVu Sans Condensed"/>
+                <a:cs typeface="DejaVu Sans Condensed"/>
+              </a:rPr>
+              <a:t>Daniele Miguel Franchi	</a:t>
+            </a:r>
+            <a:r>
+              <a:rPr lang="en" sz="1800" b="0" i="0" u="none" strike="noStrike" cap="none" spc="0">
+                <a:solidFill>
+                  <a:schemeClr val="tx1"/>
+                </a:solidFill>
+                <a:latin typeface="DejaVu Sans Condensed"/>
+                <a:ea typeface="DejaVu Sans Condensed"/>
+                <a:cs typeface="DejaVu Sans Condensed"/>
+              </a:rPr>
+              <a:t>MAT 743230</a:t>
             </a:r>
             <a:endParaRPr>
               <a:latin typeface="Open Sans"/>
@@ -5502,7 +5808,7 @@
       </p:grpSpPr>
       <p:sp>
         <p:nvSpPr>
-          <p:cNvPr id="357440522" name="Titolo 1"/>
+          <p:cNvPr id="847546751" name="Titolo 1"/>
           <p:cNvSpPr>
             <a:spLocks noGrp="1"/>
           </p:cNvSpPr>
@@ -5510,7 +5816,12 @@
             <p:ph type="title"/>
           </p:nvPr>
         </p:nvSpPr>
-        <p:spPr bwMode="auto"/>
+        <p:spPr bwMode="auto">
+          <a:xfrm>
+            <a:off x="838199" y="191943"/>
+            <a:ext cx="10515600" cy="1325562"/>
+          </a:xfrm>
+        </p:spPr>
         <p:txBody>
           <a:bodyPr/>
           <a:lstStyle/>
@@ -5533,34 +5844,34 @@
           </a:p>
         </p:txBody>
       </p:sp>
-      <p:sp>
-        <p:nvSpPr>
-          <p:cNvPr id="11527416" name="Segnaposto contenuto 2"/>
-          <p:cNvSpPr>
-            <a:spLocks noGrp="1"/>
-          </p:cNvSpPr>
-          <p:nvPr>
-            <p:ph idx="1"/>
-          </p:nvPr>
-        </p:nvSpPr>
-        <p:spPr bwMode="auto"/>
-        <p:txBody>
-          <a:bodyPr/>
-          <a:lstStyle/>
-          <a:p>
-            <a:pPr marL="0" indent="0">
-              <a:buFont typeface="Arial"/>
-              <a:buNone/>
-              <a:defRPr/>
-            </a:pPr>
-            <a:r>
-              <a:rPr lang="en"/>
-              <a:t>Inserire grafico evidenziando le interfacce intermedie utilizzate per operare astrazioni (UseCase, Repository...)</a:t>
-            </a:r>
-            <a:endParaRPr/>
-          </a:p>
-        </p:txBody>
-      </p:sp>
+      <p:pic>
+        <p:nvPicPr>
+          <p:cNvPr id="782234069" name=""/>
+          <p:cNvPicPr>
+            <a:picLocks noChangeAspect="1"/>
+          </p:cNvPicPr>
+          <p:nvPr/>
+        </p:nvPicPr>
+        <p:blipFill>
+          <a:blip r:embed="rId3">
+            <a:extLst>
+              <a:ext uri="{96DAC541-7B7A-43D3-8B79-37D633B846F1}">
+                <asvg:svgBlip xmlns:asvg="http://schemas.microsoft.com/office/drawing/2016/SVG/main" r:embed="rId4"/>
+              </a:ext>
+            </a:extLst>
+          </a:blip>
+          <a:stretch/>
+        </p:blipFill>
+        <p:spPr bwMode="auto">
+          <a:xfrm flipH="0" flipV="0">
+            <a:off x="1186295" y="1260272"/>
+            <a:ext cx="4071545" cy="5438402"/>
+          </a:xfrm>
+          <a:prstGeom prst="rect">
+            <a:avLst/>
+          </a:prstGeom>
+        </p:spPr>
+      </p:pic>
     </p:spTree>
   </p:cSld>
   <p:clrMapOvr>
@@ -5596,7 +5907,7 @@
       </p:grpSpPr>
       <p:sp>
         <p:nvSpPr>
-          <p:cNvPr id="1030494025" name="Titolo 1"/>
+          <p:cNvPr id="692057745" name="Titolo 1"/>
           <p:cNvSpPr>
             <a:spLocks noGrp="1"/>
           </p:cNvSpPr>
@@ -5640,7 +5951,7 @@
       </p:sp>
       <p:sp>
         <p:nvSpPr>
-          <p:cNvPr id="1036685012" name="Segnaposto contenuto 2"/>
+          <p:cNvPr id="317562871" name="Segnaposto contenuto 2"/>
           <p:cNvSpPr>
             <a:spLocks noGrp="1"/>
           </p:cNvSpPr>
@@ -5685,7 +5996,7 @@
       </p:sp>
       <p:pic>
         <p:nvPicPr>
-          <p:cNvPr id="1952128078" name=""/>
+          <p:cNvPr id="337026905" name=""/>
           <p:cNvPicPr>
             <a:picLocks noChangeAspect="1"/>
           </p:cNvPicPr>
@@ -5707,7 +6018,7 @@
       </p:pic>
       <p:pic>
         <p:nvPicPr>
-          <p:cNvPr id="1521444426" name=""/>
+          <p:cNvPr id="1064753335" name=""/>
           <p:cNvPicPr>
             <a:picLocks noChangeAspect="1"/>
           </p:cNvPicPr>
@@ -5729,7 +6040,7 @@
       </p:pic>
       <p:sp>
         <p:nvSpPr>
-          <p:cNvPr id="881638464" name=""/>
+          <p:cNvPr id="1327605616" name=""/>
           <p:cNvSpPr/>
           <p:nvPr/>
         </p:nvSpPr>
@@ -5807,7 +6118,7 @@
       </p:grpSpPr>
       <p:sp>
         <p:nvSpPr>
-          <p:cNvPr id="930386534" name="Titolo 1"/>
+          <p:cNvPr id="892751524" name="Titolo 1"/>
           <p:cNvSpPr>
             <a:spLocks noGrp="1"/>
           </p:cNvSpPr>
@@ -5862,7 +6173,7 @@
       </p:sp>
       <p:sp>
         <p:nvSpPr>
-          <p:cNvPr id="2042120472" name="Segnaposto contenuto 2"/>
+          <p:cNvPr id="1034785210" name="Segnaposto contenuto 2"/>
           <p:cNvSpPr>
             <a:spLocks noGrp="1"/>
           </p:cNvSpPr>
@@ -5923,7 +6234,7 @@
       </p:grpSpPr>
       <p:sp>
         <p:nvSpPr>
-          <p:cNvPr id="1801512935" name="Titolo 1"/>
+          <p:cNvPr id="529030970" name="Titolo 1"/>
           <p:cNvSpPr>
             <a:spLocks noGrp="1"/>
           </p:cNvSpPr>
@@ -5967,7 +6278,7 @@
       </p:sp>
       <p:sp>
         <p:nvSpPr>
-          <p:cNvPr id="749890870" name="Segnaposto contenuto 2"/>
+          <p:cNvPr id="1374860491" name="Segnaposto contenuto 2"/>
           <p:cNvSpPr>
             <a:spLocks noGrp="1"/>
           </p:cNvSpPr>
@@ -6045,7 +6356,7 @@
       </p:grpSpPr>
       <p:sp>
         <p:nvSpPr>
-          <p:cNvPr id="133287186" name="Titolo 1"/>
+          <p:cNvPr id="279347402" name="Titolo 1"/>
           <p:cNvSpPr>
             <a:spLocks noGrp="1"/>
           </p:cNvSpPr>
@@ -6055,8 +6366,8 @@
         </p:nvSpPr>
         <p:spPr bwMode="auto">
           <a:xfrm>
-            <a:off x="838198" y="88898"/>
-            <a:ext cx="10515600" cy="1325561"/>
+            <a:off x="838197" y="12697"/>
+            <a:ext cx="10515600" cy="1325560"/>
           </a:xfrm>
         </p:spPr>
         <p:txBody>
@@ -6087,54 +6398,531 @@
           </a:p>
         </p:txBody>
       </p:sp>
-      <p:sp>
-        <p:nvSpPr>
-          <p:cNvPr id="866016577" name="Segnaposto contenuto 2"/>
-          <p:cNvSpPr>
-            <a:spLocks noGrp="1"/>
-          </p:cNvSpPr>
-          <p:nvPr>
-            <p:ph idx="1"/>
-          </p:nvPr>
-        </p:nvSpPr>
+      <p:pic>
+        <p:nvPicPr>
+          <p:cNvPr id="505329485" name=""/>
+          <p:cNvPicPr>
+            <a:picLocks noChangeAspect="1"/>
+          </p:cNvPicPr>
+          <p:nvPr/>
+        </p:nvPicPr>
+        <p:blipFill>
+          <a:blip r:embed="rId3">
+            <a:extLst>
+              <a:ext uri="{96DAC541-7B7A-43D3-8B79-37D633B846F1}">
+                <asvg:svgBlip xmlns:asvg="http://schemas.microsoft.com/office/drawing/2016/SVG/main" r:embed="rId4"/>
+              </a:ext>
+            </a:extLst>
+          </a:blip>
+          <a:stretch/>
+        </p:blipFill>
         <p:spPr bwMode="auto">
-          <a:xfrm>
-            <a:off x="838198" y="1253329"/>
-            <a:ext cx="10515600" cy="4351338"/>
+          <a:xfrm flipH="0" flipV="0">
+            <a:off x="401695" y="997479"/>
+            <a:ext cx="4076826" cy="5554842"/>
           </a:xfrm>
+          <a:prstGeom prst="rect">
+            <a:avLst/>
+          </a:prstGeom>
         </p:spPr>
-        <p:txBody>
-          <a:bodyPr/>
-          <a:lstStyle/>
+      </p:pic>
+      <p:sp>
+        <p:nvSpPr>
+          <p:cNvPr id="574398209" name=""/>
+          <p:cNvSpPr txBox="1"/>
+          <p:nvPr/>
+        </p:nvSpPr>
+        <p:spPr bwMode="auto">
+          <a:xfrm rot="0" flipH="0" flipV="0">
+            <a:off x="4793024" y="1338258"/>
+            <a:ext cx="6946457" cy="5474496"/>
+          </a:xfrm>
+          <a:prstGeom prst="roundRect">
+            <a:avLst>
+              <a:gd name="adj" fmla="val 5796"/>
+            </a:avLst>
+          </a:prstGeom>
+          <a:solidFill>
+            <a:schemeClr val="bg1">
+              <a:alpha val="49999"/>
+            </a:schemeClr>
+          </a:solidFill>
+          <a:ln w="12699">
+            <a:solidFill>
+              <a:schemeClr val="tx1"/>
+            </a:solidFill>
+            <a:prstDash val="solid"/>
+          </a:ln>
+        </p:spPr>
+        <p:txBody>
+          <a:bodyPr vertOverflow="overflow" horzOverflow="overflow" vert="horz" wrap="square" lIns="91440" tIns="45720" rIns="91440" bIns="45720" numCol="1" spcCol="0" rtlCol="0" fromWordArt="0" anchor="t" anchorCtr="0" forceAA="0" upright="0" compatLnSpc="0">
+            <a:spAutoFit/>
+          </a:bodyPr>
+          <a:p>
+            <a:pPr>
+              <a:defRPr/>
+            </a:pPr>
+            <a:r>
+              <a:rPr lang="it-IT" sz="1100" b="0" i="0" u="none" strike="noStrike" cap="none" spc="0">
+                <a:solidFill>
+                  <a:schemeClr val="tx1"/>
+                </a:solidFill>
+                <a:latin typeface="Liberation Mono"/>
+                <a:ea typeface="Liberation Mono"/>
+                <a:cs typeface="Liberation Mono"/>
+              </a:rPr>
+              <a:t>YearMonth nextMonth = YearMonth.from(LocalDate.now(clock)).plusMonths(1);</a:t>
+            </a:r>
+            <a:endParaRPr sz="1100" b="0" i="0" u="none" strike="noStrike" cap="none" spc="0">
+              <a:solidFill>
+                <a:schemeClr val="tx1"/>
+              </a:solidFill>
+              <a:latin typeface="Liberation Mono"/>
+              <a:cs typeface="Liberation Mono"/>
+            </a:endParaRPr>
+          </a:p>
+          <a:p>
+            <a:pPr>
+              <a:defRPr/>
+            </a:pPr>
+            <a:endParaRPr sz="1100" b="0" i="0" u="none" strike="noStrike" cap="none" spc="0">
+              <a:solidFill>
+                <a:schemeClr val="tx1"/>
+              </a:solidFill>
+              <a:latin typeface="Liberation Mono"/>
+              <a:cs typeface="Liberation Mono"/>
+            </a:endParaRPr>
+          </a:p>
+          <a:p>
+            <a:pPr>
+              <a:defRPr/>
+            </a:pPr>
+            <a:r>
+              <a:rPr lang="it-IT" sz="1100" b="0" i="0" u="none" strike="noStrike" cap="none" spc="0">
+                <a:solidFill>
+                  <a:schemeClr val="tx1"/>
+                </a:solidFill>
+                <a:latin typeface="Liberation Mono"/>
+                <a:ea typeface="Liberation Mono"/>
+                <a:cs typeface="Liberation Mono"/>
+              </a:rPr>
+              <a:t>        List&lt;VolunteerAvailableDate&gt; volunteerAvailabilitiesNextMonth = volunteerAvailabilityRepository.findByYearMonth(nextMonth);</a:t>
+            </a:r>
+            <a:endParaRPr sz="1100" b="0" i="0" u="none" strike="noStrike" cap="none" spc="0">
+              <a:solidFill>
+                <a:schemeClr val="tx1"/>
+              </a:solidFill>
+              <a:latin typeface="Liberation Mono"/>
+              <a:cs typeface="Liberation Mono"/>
+            </a:endParaRPr>
+          </a:p>
+          <a:p>
+            <a:pPr>
+              <a:defRPr/>
+            </a:pPr>
+            <a:endParaRPr sz="1100" b="0" i="0" u="none" strike="noStrike" cap="none" spc="0">
+              <a:solidFill>
+                <a:schemeClr val="tx1"/>
+              </a:solidFill>
+              <a:latin typeface="Liberation Mono"/>
+              <a:cs typeface="Liberation Mono"/>
+            </a:endParaRPr>
+          </a:p>
+          <a:p>
+            <a:pPr>
+              <a:defRPr/>
+            </a:pPr>
+            <a:r>
+              <a:rPr lang="it-IT" sz="1100" b="0" i="0" u="none" strike="noStrike" cap="none" spc="0">
+                <a:solidFill>
+                  <a:schemeClr val="tx1"/>
+                </a:solidFill>
+                <a:latin typeface="Liberation Mono"/>
+                <a:ea typeface="Liberation Mono"/>
+                <a:cs typeface="Liberation Mono"/>
+              </a:rPr>
+              <a:t>        List&lt;Visit&gt; nextMonthSortedVisits = getNextMonthVisitsSorted(nextMonth.getMonthValue(), nextMonth.getYear());</a:t>
+            </a:r>
+            <a:endParaRPr sz="1100" b="0" i="0" u="none" strike="noStrike" cap="none" spc="0">
+              <a:solidFill>
+                <a:schemeClr val="tx1"/>
+              </a:solidFill>
+              <a:latin typeface="Liberation Mono"/>
+              <a:cs typeface="Liberation Mono"/>
+            </a:endParaRPr>
+          </a:p>
+          <a:p>
+            <a:pPr>
+              <a:defRPr/>
+            </a:pPr>
+            <a:endParaRPr sz="1100" b="0" i="0" u="none" strike="noStrike" cap="none" spc="0">
+              <a:solidFill>
+                <a:schemeClr val="tx1"/>
+              </a:solidFill>
+              <a:latin typeface="Liberation Mono"/>
+              <a:cs typeface="Liberation Mono"/>
+            </a:endParaRPr>
+          </a:p>
+          <a:p>
+            <a:pPr>
+              <a:defRPr/>
+            </a:pPr>
+            <a:r>
+              <a:rPr lang="it-IT" sz="1100" b="0" i="0" u="none" strike="noStrike" cap="none" spc="0">
+                <a:solidFill>
+                  <a:schemeClr val="tx1"/>
+                </a:solidFill>
+                <a:latin typeface="Liberation Mono"/>
+                <a:ea typeface="Liberation Mono"/>
+                <a:cs typeface="Liberation Mono"/>
+              </a:rPr>
+              <a:t>        List&lt;VolunteerIdWithVisitCount&gt; volunteerIdWithVisitCounts = initializeVolunteerWithVisitCount();</a:t>
+            </a:r>
+            <a:endParaRPr sz="1100" b="0" i="0" u="none" strike="noStrike" cap="none" spc="0">
+              <a:solidFill>
+                <a:schemeClr val="tx1"/>
+              </a:solidFill>
+              <a:latin typeface="Liberation Mono"/>
+              <a:cs typeface="Liberation Mono"/>
+            </a:endParaRPr>
+          </a:p>
+          <a:p>
+            <a:pPr>
+              <a:defRPr/>
+            </a:pPr>
+            <a:endParaRPr sz="1100" b="0" i="0" u="none" strike="noStrike" cap="none" spc="0">
+              <a:solidFill>
+                <a:schemeClr val="tx1"/>
+              </a:solidFill>
+              <a:latin typeface="Liberation Mono"/>
+              <a:cs typeface="Liberation Mono"/>
+            </a:endParaRPr>
+          </a:p>
+          <a:p>
+            <a:pPr>
+              <a:defRPr/>
+            </a:pPr>
+            <a:r>
+              <a:rPr lang="it-IT" sz="1100" b="0" i="0" u="none" strike="noStrike" cap="none" spc="0">
+                <a:solidFill>
+                  <a:schemeClr val="tx1"/>
+                </a:solidFill>
+                <a:latin typeface="Liberation Mono"/>
+                <a:ea typeface="Liberation Mono"/>
+                <a:cs typeface="Liberation Mono"/>
+              </a:rPr>
+              <a:t>        for (Visit visit : nextMonthSortedVisits) {</a:t>
+            </a:r>
+            <a:endParaRPr sz="1100" b="0" i="0" u="none" strike="noStrike" cap="none" spc="0">
+              <a:solidFill>
+                <a:schemeClr val="tx1"/>
+              </a:solidFill>
+              <a:latin typeface="Liberation Mono"/>
+              <a:cs typeface="Liberation Mono"/>
+            </a:endParaRPr>
+          </a:p>
+          <a:p>
+            <a:pPr>
+              <a:defRPr/>
+            </a:pPr>
+            <a:r>
+              <a:rPr lang="it-IT" sz="1100" b="0" i="0" u="none" strike="noStrike" cap="none" spc="0">
+                <a:solidFill>
+                  <a:schemeClr val="tx1"/>
+                </a:solidFill>
+                <a:latin typeface="Liberation Mono"/>
+                <a:ea typeface="Liberation Mono"/>
+                <a:cs typeface="Liberation Mono"/>
+              </a:rPr>
+              <a:t>            List&lt;Integer&gt; availableVolunteerIds = getAvailableVolunteersForVisitDate(visit, volunteerAvailabilitiesNextMonth);</a:t>
+            </a:r>
+            <a:endParaRPr sz="1100" b="0" i="0" u="none" strike="noStrike" cap="none" spc="0">
+              <a:solidFill>
+                <a:schemeClr val="tx1"/>
+              </a:solidFill>
+              <a:latin typeface="Liberation Mono"/>
+              <a:cs typeface="Liberation Mono"/>
+            </a:endParaRPr>
+          </a:p>
+          <a:p>
+            <a:pPr>
+              <a:defRPr/>
+            </a:pPr>
+            <a:endParaRPr sz="1100" b="0" i="0" u="none" strike="noStrike" cap="none" spc="0">
+              <a:solidFill>
+                <a:schemeClr val="tx1"/>
+              </a:solidFill>
+              <a:latin typeface="Liberation Mono"/>
+              <a:cs typeface="Liberation Mono"/>
+            </a:endParaRPr>
+          </a:p>
+          <a:p>
+            <a:pPr>
+              <a:defRPr/>
+            </a:pPr>
+            <a:r>
+              <a:rPr lang="it-IT" sz="1100" b="0" i="0" u="none" strike="noStrike" cap="none" spc="0">
+                <a:solidFill>
+                  <a:schemeClr val="tx1"/>
+                </a:solidFill>
+                <a:latin typeface="Liberation Mono"/>
+                <a:ea typeface="Liberation Mono"/>
+                <a:cs typeface="Liberation Mono"/>
+              </a:rPr>
+              <a:t>            if (availableVolunteerIds.isEmpty()) {</a:t>
+            </a:r>
+            <a:endParaRPr sz="1100" b="0" i="0" u="none" strike="noStrike" cap="none" spc="0">
+              <a:solidFill>
+                <a:schemeClr val="tx1"/>
+              </a:solidFill>
+              <a:latin typeface="Liberation Mono"/>
+              <a:cs typeface="Liberation Mono"/>
+            </a:endParaRPr>
+          </a:p>
+          <a:p>
+            <a:pPr>
+              <a:defRPr/>
+            </a:pPr>
+            <a:r>
+              <a:rPr lang="it-IT" sz="1100" b="0" i="0" u="none" strike="noStrike" cap="none" spc="0">
+                <a:solidFill>
+                  <a:schemeClr val="tx1"/>
+                </a:solidFill>
+                <a:latin typeface="Liberation Mono"/>
+                <a:ea typeface="Liberation Mono"/>
+                <a:cs typeface="Liberation Mono"/>
+              </a:rPr>
+              <a:t>                setVisitStatusToCancelled(visit);</a:t>
+            </a:r>
+            <a:endParaRPr sz="1100" b="0" i="0" u="none" strike="noStrike" cap="none" spc="0">
+              <a:solidFill>
+                <a:schemeClr val="tx1"/>
+              </a:solidFill>
+              <a:latin typeface="Liberation Mono"/>
+              <a:cs typeface="Liberation Mono"/>
+            </a:endParaRPr>
+          </a:p>
+          <a:p>
+            <a:pPr>
+              <a:defRPr/>
+            </a:pPr>
+            <a:r>
+              <a:rPr lang="it-IT" sz="1100" b="0" i="0" u="none" strike="noStrike" cap="none" spc="0">
+                <a:solidFill>
+                  <a:schemeClr val="tx1"/>
+                </a:solidFill>
+                <a:latin typeface="Liberation Mono"/>
+                <a:ea typeface="Liberation Mono"/>
+                <a:cs typeface="Liberation Mono"/>
+              </a:rPr>
+              <a:t>            } else if (availableVolunteerIds.size() == 1) {</a:t>
+            </a:r>
+            <a:endParaRPr sz="1100" b="0" i="0" u="none" strike="noStrike" cap="none" spc="0">
+              <a:solidFill>
+                <a:schemeClr val="tx1"/>
+              </a:solidFill>
+              <a:latin typeface="Liberation Mono"/>
+              <a:cs typeface="Liberation Mono"/>
+            </a:endParaRPr>
+          </a:p>
+          <a:p>
+            <a:pPr>
+              <a:defRPr/>
+            </a:pPr>
+            <a:r>
+              <a:rPr lang="it-IT" sz="1100" b="0" i="0" u="none" strike="noStrike" cap="none" spc="0">
+                <a:solidFill>
+                  <a:schemeClr val="tx1"/>
+                </a:solidFill>
+                <a:latin typeface="Liberation Mono"/>
+                <a:ea typeface="Liberation Mono"/>
+                <a:cs typeface="Liberation Mono"/>
+              </a:rPr>
+              <a:t>                assignAvailableVolunteerToVisitIfPossible(visit, availableVolunteerIds, volunteerAvailabilitiesNextMonth, volunteerIdWithVisitCounts);</a:t>
+            </a:r>
+            <a:endParaRPr sz="1100" b="0" i="0" u="none" strike="noStrike" cap="none" spc="0">
+              <a:solidFill>
+                <a:schemeClr val="tx1"/>
+              </a:solidFill>
+              <a:latin typeface="Liberation Mono"/>
+              <a:cs typeface="Liberation Mono"/>
+            </a:endParaRPr>
+          </a:p>
+          <a:p>
+            <a:pPr>
+              <a:defRPr/>
+            </a:pPr>
+            <a:r>
+              <a:rPr lang="it-IT" sz="1100" b="0" i="0" u="none" strike="noStrike" cap="none" spc="0">
+                <a:solidFill>
+                  <a:schemeClr val="tx1"/>
+                </a:solidFill>
+                <a:latin typeface="Liberation Mono"/>
+                <a:ea typeface="Liberation Mono"/>
+                <a:cs typeface="Liberation Mono"/>
+              </a:rPr>
+              <a:t>            } else {</a:t>
+            </a:r>
+            <a:endParaRPr sz="1100" b="0" i="0" u="none" strike="noStrike" cap="none" spc="0">
+              <a:solidFill>
+                <a:schemeClr val="tx1"/>
+              </a:solidFill>
+              <a:latin typeface="Liberation Mono"/>
+              <a:cs typeface="Liberation Mono"/>
+            </a:endParaRPr>
+          </a:p>
+          <a:p>
+            <a:pPr>
+              <a:defRPr/>
+            </a:pPr>
+            <a:r>
+              <a:rPr lang="it-IT" sz="1100" b="0" i="0" u="none" strike="noStrike" cap="none" spc="0">
+                <a:solidFill>
+                  <a:schemeClr val="tx1"/>
+                </a:solidFill>
+                <a:latin typeface="Liberation Mono"/>
+                <a:ea typeface="Liberation Mono"/>
+                <a:cs typeface="Liberation Mono"/>
+              </a:rPr>
+              <a:t>                assignBestVolunteerAvailableToVisit(visit, availableVolunteerIds, volunteerIdWithVisitCounts, volunteerAvailabilitiesNextMonth);</a:t>
+            </a:r>
+            <a:endParaRPr sz="1100" b="0" i="0" u="none" strike="noStrike" cap="none" spc="0">
+              <a:solidFill>
+                <a:schemeClr val="tx1"/>
+              </a:solidFill>
+              <a:latin typeface="Liberation Mono"/>
+              <a:cs typeface="Liberation Mono"/>
+            </a:endParaRPr>
+          </a:p>
+          <a:p>
+            <a:pPr>
+              <a:defRPr/>
+            </a:pPr>
+            <a:r>
+              <a:rPr lang="it-IT" sz="1100" b="0" i="0" u="none" strike="noStrike" cap="none" spc="0">
+                <a:solidFill>
+                  <a:schemeClr val="tx1"/>
+                </a:solidFill>
+                <a:latin typeface="Liberation Mono"/>
+                <a:ea typeface="Liberation Mono"/>
+                <a:cs typeface="Liberation Mono"/>
+              </a:rPr>
+              <a:t>            }</a:t>
+            </a:r>
+            <a:endParaRPr sz="1100" b="0" i="0" u="none" strike="noStrike" cap="none" spc="0">
+              <a:solidFill>
+                <a:schemeClr val="tx1"/>
+              </a:solidFill>
+              <a:latin typeface="Liberation Mono"/>
+              <a:cs typeface="Liberation Mono"/>
+            </a:endParaRPr>
+          </a:p>
+          <a:p>
+            <a:pPr>
+              <a:defRPr/>
+            </a:pPr>
+            <a:r>
+              <a:rPr lang="it-IT" sz="1100" b="0" i="0" u="none" strike="noStrike" cap="none" spc="0">
+                <a:solidFill>
+                  <a:schemeClr val="tx1"/>
+                </a:solidFill>
+                <a:latin typeface="Liberation Mono"/>
+                <a:ea typeface="Liberation Mono"/>
+                <a:cs typeface="Liberation Mono"/>
+              </a:rPr>
+              <a:t>        }</a:t>
+            </a:r>
+            <a:endParaRPr sz="1100" b="0" i="0" u="none" strike="noStrike" cap="none" spc="0">
+              <a:solidFill>
+                <a:schemeClr val="tx1"/>
+              </a:solidFill>
+              <a:latin typeface="Liberation Mono"/>
+              <a:cs typeface="Liberation Mono"/>
+            </a:endParaRPr>
+          </a:p>
+          <a:p>
+            <a:pPr>
+              <a:defRPr/>
+            </a:pPr>
+            <a:r>
+              <a:rPr lang="it-IT" sz="1100" b="0" i="0" u="none" strike="noStrike" cap="none" spc="0">
+                <a:solidFill>
+                  <a:schemeClr val="tx1"/>
+                </a:solidFill>
+                <a:latin typeface="Liberation Mono"/>
+                <a:ea typeface="Liberation Mono"/>
+                <a:cs typeface="Liberation Mono"/>
+              </a:rPr>
+              <a:t>        removeBlockedDatesFromSelectedMonth(nextMonth);</a:t>
+            </a:r>
+            <a:endParaRPr sz="1100" b="0" i="0" u="none" strike="noStrike" cap="none" spc="0">
+              <a:solidFill>
+                <a:schemeClr val="tx1"/>
+              </a:solidFill>
+              <a:latin typeface="Liberation Mono"/>
+              <a:cs typeface="Liberation Mono"/>
+            </a:endParaRPr>
+          </a:p>
+          <a:p>
+            <a:pPr>
+              <a:defRPr/>
+            </a:pPr>
+            <a:endParaRPr sz="1100" b="0" i="0" u="none" strike="noStrike" cap="none" spc="0">
+              <a:solidFill>
+                <a:schemeClr val="tx1"/>
+              </a:solidFill>
+              <a:latin typeface="Liberation Mono"/>
+              <a:cs typeface="Liberation Mono"/>
+            </a:endParaRPr>
+          </a:p>
+          <a:p>
+            <a:pPr>
+              <a:defRPr/>
+            </a:pPr>
+            <a:r>
+              <a:rPr lang="it-IT" sz="1100" b="0" i="0" u="none" strike="noStrike" cap="none" spc="0">
+                <a:solidFill>
+                  <a:schemeClr val="tx1"/>
+                </a:solidFill>
+                <a:latin typeface="Liberation Mono"/>
+                <a:ea typeface="Liberation Mono"/>
+                <a:cs typeface="Liberation Mono"/>
+              </a:rPr>
+              <a:t>        statePort.setVisitPlanCreated(nextMonth.getMonthValue(), nextMonth.getYear(), true);</a:t>
+            </a:r>
+            <a:endParaRPr/>
+          </a:p>
+        </p:txBody>
+      </p:sp>
+      <p:sp>
+        <p:nvSpPr>
+          <p:cNvPr id="1564850453" name=""/>
+          <p:cNvSpPr txBox="1"/>
+          <p:nvPr/>
+        </p:nvSpPr>
+        <p:spPr bwMode="auto">
+          <a:xfrm rot="0" flipH="0" flipV="0">
+            <a:off x="5024045" y="922568"/>
+            <a:ext cx="5872644" cy="366119"/>
+          </a:xfrm>
+          <a:prstGeom prst="rect">
+            <a:avLst/>
+          </a:prstGeom>
+          <a:noFill/>
+        </p:spPr>
+        <p:txBody>
+          <a:bodyPr vertOverflow="overflow" horzOverflow="overflow" vert="horz" wrap="square" lIns="91440" tIns="45720" rIns="91440" bIns="45720" numCol="1" spcCol="0" rtlCol="0" fromWordArt="0" anchor="t" anchorCtr="0" forceAA="0" upright="0" compatLnSpc="0">
+            <a:spAutoFit/>
+          </a:bodyPr>
           <a:p>
             <a:pPr>
               <a:defRPr/>
             </a:pPr>
             <a:r>
               <a:rPr lang="en"/>
-              <a:t>Grafo completo algoritmo</a:t>
-            </a:r>
-            <a:endParaRPr lang="en"/>
-          </a:p>
-          <a:p>
-            <a:pPr>
-              <a:defRPr/>
-            </a:pPr>
-            <a:r>
-              <a:rPr lang="en"/>
-              <a:t>OPPURE</a:t>
-            </a:r>
-            <a:endParaRPr lang="en"/>
-          </a:p>
-          <a:p>
-            <a:pPr>
-              <a:defRPr/>
-            </a:pPr>
-            <a:r>
-              <a:rPr lang="en"/>
-              <a:t>Grafo algoritmo parte assegnazione visita: visita non assegnata, visita assegnata (unico volontario disponibile), visita assegnata (piú volontari disponibili)</a:t>
-            </a:r>
-            <a:endParaRPr lang="en"/>
+              <a:t>createVisitPlan()</a:t>
+            </a:r>
+            <a:endParaRPr/>
           </a:p>
         </p:txBody>
       </p:sp>
@@ -6173,7 +6961,7 @@
       </p:grpSpPr>
       <p:sp>
         <p:nvSpPr>
-          <p:cNvPr id="2096099147" name="Titolo 1"/>
+          <p:cNvPr id="251702473" name="Titolo 1"/>
           <p:cNvSpPr>
             <a:spLocks noGrp="1"/>
           </p:cNvSpPr>
@@ -6182,9 +6970,9 @@
           </p:nvPr>
         </p:nvSpPr>
         <p:spPr bwMode="auto">
-          <a:xfrm flipH="0" flipV="0">
-            <a:off x="838198" y="365123"/>
-            <a:ext cx="5555216" cy="1325561"/>
+          <a:xfrm>
+            <a:off x="838197" y="12697"/>
+            <a:ext cx="10515600" cy="1325560"/>
           </a:xfrm>
         </p:spPr>
         <p:txBody>
@@ -6203,103 +6991,441 @@
                 <a:ea typeface="Noto Sans"/>
                 <a:cs typeface="Noto Sans"/>
               </a:rPr>
-              <a:t>Refactor</a:t>
-            </a:r>
-            <a:r>
-              <a:rPr lang="en" b="1">
-                <a:solidFill>
-                  <a:srgbClr val="0070C0"/>
-                </a:solidFill>
-                <a:latin typeface="Noto Sans"/>
-                <a:ea typeface="Noto Sans"/>
-                <a:cs typeface="Noto Sans"/>
-              </a:rPr>
-              <a:t>ing</a:t>
-            </a:r>
-            <a:endParaRPr/>
-          </a:p>
-        </p:txBody>
-      </p:sp>
-      <p:sp>
-        <p:nvSpPr>
-          <p:cNvPr id="1409869903" name="Segnaposto contenuto 2"/>
-          <p:cNvSpPr>
-            <a:spLocks noGrp="1"/>
-          </p:cNvSpPr>
-          <p:nvPr>
-            <p:ph idx="1"/>
-          </p:nvPr>
-        </p:nvSpPr>
-        <p:spPr bwMode="auto"/>
-        <p:txBody>
-          <a:bodyPr/>
-          <a:lstStyle/>
-          <a:p>
-            <a:pPr marL="0" indent="0">
-              <a:buFont typeface="Arial"/>
-              <a:buNone/>
-              <a:defRPr/>
-            </a:pPr>
-            <a:r>
-              <a:rPr lang="en"/>
-              <a:t>Il refactoring della classe VisitPlanService si é reso necessario perché:</a:t>
-            </a:r>
-            <a:endParaRPr lang="en"/>
-          </a:p>
-          <a:p>
-            <a:pPr>
-              <a:defRPr/>
-            </a:pPr>
-            <a:r>
-              <a:rPr lang="en"/>
-              <a:t>contiene l’algoritmo fondamentale per il funzionamento del programma</a:t>
-            </a:r>
-            <a:endParaRPr lang="en"/>
-          </a:p>
-          <a:p>
-            <a:pPr>
-              <a:defRPr/>
-            </a:pPr>
-            <a:r>
-              <a:rPr lang="en"/>
-              <a:t>é probabile che possa subire modifiche/aggiunte in futuro</a:t>
-            </a:r>
-            <a:endParaRPr lang="en"/>
-          </a:p>
-          <a:p>
-            <a:pPr>
-              <a:defRPr/>
-            </a:pPr>
-            <a:r>
-              <a:rPr lang="en"/>
-              <a:t>combina molte informazioni diverse: visite, tipi di visite, date non disponibili, volontari e relative disponibilitá</a:t>
-            </a:r>
-            <a:endParaRPr lang="en"/>
-          </a:p>
-          <a:p>
-            <a:pPr marL="0" indent="0">
-              <a:buFont typeface="Arial"/>
-              <a:buNone/>
-              <a:defRPr/>
-            </a:pPr>
-            <a:r>
-              <a:rPr lang="en"/>
-              <a:t>Di seguito i pattern di refactoring applicati</a:t>
-            </a:r>
-            <a:endParaRPr/>
-          </a:p>
-        </p:txBody>
-      </p:sp>
-      <p:sp>
-        <p:nvSpPr>
-          <p:cNvPr id="13678555" name=""/>
+              <a:t>Testing White Box – createVisitPlan()</a:t>
+            </a:r>
+            <a:endParaRPr b="1">
+              <a:solidFill>
+                <a:srgbClr val="0070C0"/>
+              </a:solidFill>
+              <a:latin typeface="Noto Sans"/>
+              <a:cs typeface="Noto Sans"/>
+            </a:endParaRPr>
+          </a:p>
+        </p:txBody>
+      </p:sp>
+      <p:sp>
+        <p:nvSpPr>
+          <p:cNvPr id="1148164113" name=""/>
           <p:cNvSpPr txBox="1"/>
           <p:nvPr/>
         </p:nvSpPr>
         <p:spPr bwMode="auto">
           <a:xfrm rot="0" flipH="0" flipV="0">
-            <a:off x="5753406" y="844844"/>
-            <a:ext cx="5851705" cy="518519"/>
+            <a:off x="4793024" y="1856842"/>
+            <a:ext cx="6948977" cy="4449081"/>
+          </a:xfrm>
+          <a:prstGeom prst="roundRect">
+            <a:avLst>
+              <a:gd name="adj" fmla="val 5796"/>
+            </a:avLst>
+          </a:prstGeom>
+          <a:solidFill>
+            <a:schemeClr val="bg1">
+              <a:alpha val="49999"/>
+            </a:schemeClr>
+          </a:solidFill>
+          <a:ln w="12699">
+            <a:solidFill>
+              <a:schemeClr val="tx1"/>
+            </a:solidFill>
+            <a:prstDash val="solid"/>
+          </a:ln>
+        </p:spPr>
+        <p:txBody>
+          <a:bodyPr vertOverflow="overflow" horzOverflow="overflow" vert="horz" wrap="square" lIns="91440" tIns="45720" rIns="91440" bIns="45720" numCol="1" spcCol="0" rtlCol="0" fromWordArt="0" anchor="t" anchorCtr="0" forceAA="0" upright="0" compatLnSpc="0">
+            <a:spAutoFit/>
+          </a:bodyPr>
+          <a:p>
+            <a:pPr>
+              <a:defRPr/>
+            </a:pPr>
+            <a:r>
+              <a:rPr lang="it-IT" sz="1200" b="0" i="0" u="none" strike="noStrike" cap="none" spc="0">
+                <a:solidFill>
+                  <a:schemeClr val="tx1"/>
+                </a:solidFill>
+                <a:latin typeface="Liberation Mono"/>
+                <a:ea typeface="Liberation Mono"/>
+                <a:cs typeface="Liberation Mono"/>
+              </a:rPr>
+              <a:t>@Test</a:t>
+            </a:r>
+            <a:endParaRPr sz="1200" b="0" i="0" u="none" strike="noStrike" cap="none" spc="0">
+              <a:solidFill>
+                <a:schemeClr val="tx1"/>
+              </a:solidFill>
+              <a:latin typeface="Liberation Mono"/>
+              <a:cs typeface="Liberation Mono"/>
+            </a:endParaRPr>
+          </a:p>
+          <a:p>
+            <a:pPr>
+              <a:defRPr/>
+            </a:pPr>
+            <a:r>
+              <a:rPr lang="it-IT" sz="1200" b="0" i="0" u="none" strike="noStrike" cap="none" spc="0">
+                <a:solidFill>
+                  <a:schemeClr val="tx1"/>
+                </a:solidFill>
+                <a:latin typeface="Liberation Mono"/>
+                <a:ea typeface="Liberation Mono"/>
+                <a:cs typeface="Liberation Mono"/>
+              </a:rPr>
+              <a:t>    void createVisitPlan_NoVolunteersAvailable_ShouldCancelVisit() {</a:t>
+            </a:r>
+            <a:endParaRPr sz="1200" b="0" i="0" u="none" strike="noStrike" cap="none" spc="0">
+              <a:solidFill>
+                <a:schemeClr val="tx1"/>
+              </a:solidFill>
+              <a:latin typeface="Liberation Mono"/>
+              <a:cs typeface="Liberation Mono"/>
+            </a:endParaRPr>
+          </a:p>
+          <a:p>
+            <a:pPr>
+              <a:defRPr/>
+            </a:pPr>
+            <a:r>
+              <a:rPr lang="it-IT" sz="1200" b="0" i="0" u="none" strike="noStrike" cap="none" spc="0">
+                <a:solidFill>
+                  <a:schemeClr val="tx1"/>
+                </a:solidFill>
+                <a:latin typeface="Liberation Mono"/>
+                <a:ea typeface="Liberation Mono"/>
+                <a:cs typeface="Liberation Mono"/>
+              </a:rPr>
+              <a:t>        User user = new User(1, "", "", Role.VOLUNTEER, false);</a:t>
+            </a:r>
+            <a:endParaRPr sz="1200" b="0" i="0" u="none" strike="noStrike" cap="none" spc="0">
+              <a:solidFill>
+                <a:schemeClr val="tx1"/>
+              </a:solidFill>
+              <a:latin typeface="Liberation Mono"/>
+              <a:cs typeface="Liberation Mono"/>
+            </a:endParaRPr>
+          </a:p>
+          <a:p>
+            <a:pPr>
+              <a:defRPr/>
+            </a:pPr>
+            <a:endParaRPr sz="1200" b="0" i="0" u="none" strike="noStrike" cap="none" spc="0">
+              <a:solidFill>
+                <a:schemeClr val="tx1"/>
+              </a:solidFill>
+              <a:latin typeface="Liberation Mono"/>
+              <a:cs typeface="Liberation Mono"/>
+            </a:endParaRPr>
+          </a:p>
+          <a:p>
+            <a:pPr>
+              <a:defRPr/>
+            </a:pPr>
+            <a:r>
+              <a:rPr lang="it-IT" sz="1200" b="0" i="0" u="none" strike="noStrike" cap="none" spc="0">
+                <a:solidFill>
+                  <a:schemeClr val="tx1"/>
+                </a:solidFill>
+                <a:latin typeface="Liberation Mono"/>
+                <a:ea typeface="Liberation Mono"/>
+                <a:cs typeface="Liberation Mono"/>
+              </a:rPr>
+              <a:t>        when(userInfoUseCase.getUsersByRole(Role.VOLUNTEER)).thenReturn(List.of(user));</a:t>
+            </a:r>
+            <a:endParaRPr sz="1200" b="0" i="0" u="none" strike="noStrike" cap="none" spc="0">
+              <a:solidFill>
+                <a:schemeClr val="tx1"/>
+              </a:solidFill>
+              <a:latin typeface="Liberation Mono"/>
+              <a:cs typeface="Liberation Mono"/>
+            </a:endParaRPr>
+          </a:p>
+          <a:p>
+            <a:pPr>
+              <a:defRPr/>
+            </a:pPr>
+            <a:r>
+              <a:rPr lang="it-IT" sz="1200" b="0" i="0" u="none" strike="noStrike" cap="none" spc="0">
+                <a:solidFill>
+                  <a:schemeClr val="tx1"/>
+                </a:solidFill>
+                <a:latin typeface="Liberation Mono"/>
+                <a:ea typeface="Liberation Mono"/>
+                <a:cs typeface="Liberation Mono"/>
+              </a:rPr>
+              <a:t>        when(volunteerAvailabilityRepository.findByVolunteerId(1)).thenReturn(List.of());</a:t>
+            </a:r>
+            <a:endParaRPr sz="1200" b="0" i="0" u="none" strike="noStrike" cap="none" spc="0">
+              <a:solidFill>
+                <a:schemeClr val="tx1"/>
+              </a:solidFill>
+              <a:latin typeface="Liberation Mono"/>
+              <a:cs typeface="Liberation Mono"/>
+            </a:endParaRPr>
+          </a:p>
+          <a:p>
+            <a:pPr>
+              <a:defRPr/>
+            </a:pPr>
+            <a:endParaRPr sz="1200" b="0" i="0" u="none" strike="noStrike" cap="none" spc="0">
+              <a:solidFill>
+                <a:schemeClr val="tx1"/>
+              </a:solidFill>
+              <a:latin typeface="Liberation Mono"/>
+              <a:cs typeface="Liberation Mono"/>
+            </a:endParaRPr>
+          </a:p>
+          <a:p>
+            <a:pPr>
+              <a:defRPr/>
+            </a:pPr>
+            <a:r>
+              <a:rPr lang="it-IT" sz="1200" b="0" i="0" u="none" strike="noStrike" cap="none" spc="0">
+                <a:solidFill>
+                  <a:schemeClr val="tx1"/>
+                </a:solidFill>
+                <a:latin typeface="Liberation Mono"/>
+                <a:ea typeface="Liberation Mono"/>
+                <a:cs typeface="Liberation Mono"/>
+              </a:rPr>
+              <a:t>        VisitType visitTypeMock = mock(VisitType.class);</a:t>
+            </a:r>
+            <a:endParaRPr sz="1200" b="0" i="0" u="none" strike="noStrike" cap="none" spc="0">
+              <a:solidFill>
+                <a:schemeClr val="tx1"/>
+              </a:solidFill>
+              <a:latin typeface="Liberation Mono"/>
+              <a:cs typeface="Liberation Mono"/>
+            </a:endParaRPr>
+          </a:p>
+          <a:p>
+            <a:pPr>
+              <a:defRPr/>
+            </a:pPr>
+            <a:r>
+              <a:rPr lang="it-IT" sz="1200" b="0" i="0" u="none" strike="noStrike" cap="none" spc="0">
+                <a:solidFill>
+                  <a:schemeClr val="tx1"/>
+                </a:solidFill>
+                <a:latin typeface="Liberation Mono"/>
+                <a:ea typeface="Liberation Mono"/>
+                <a:cs typeface="Liberation Mono"/>
+              </a:rPr>
+              <a:t>        Visit visit = new Visit(LocalDate.of(2025, 10, 5), user, //</a:t>
+            </a:r>
+            <a:endParaRPr sz="1200" b="0" i="0" u="none" strike="noStrike" cap="none" spc="0">
+              <a:solidFill>
+                <a:schemeClr val="tx1"/>
+              </a:solidFill>
+              <a:latin typeface="Liberation Mono"/>
+              <a:cs typeface="Liberation Mono"/>
+            </a:endParaRPr>
+          </a:p>
+          <a:p>
+            <a:pPr>
+              <a:defRPr/>
+            </a:pPr>
+            <a:r>
+              <a:rPr lang="it-IT" sz="1200" b="0" i="0" u="none" strike="noStrike" cap="none" spc="0">
+                <a:solidFill>
+                  <a:schemeClr val="tx1"/>
+                </a:solidFill>
+                <a:latin typeface="Liberation Mono"/>
+                <a:ea typeface="Liberation Mono"/>
+                <a:cs typeface="Liberation Mono"/>
+              </a:rPr>
+              <a:t>                visitTypeMock, List.of(), VisitStatus.PROPOSED);</a:t>
+            </a:r>
+            <a:endParaRPr sz="1200" b="0" i="0" u="none" strike="noStrike" cap="none" spc="0">
+              <a:solidFill>
+                <a:schemeClr val="tx1"/>
+              </a:solidFill>
+              <a:latin typeface="Liberation Mono"/>
+              <a:cs typeface="Liberation Mono"/>
+            </a:endParaRPr>
+          </a:p>
+          <a:p>
+            <a:pPr>
+              <a:defRPr/>
+            </a:pPr>
+            <a:endParaRPr sz="1200" b="0" i="0" u="none" strike="noStrike" cap="none" spc="0">
+              <a:solidFill>
+                <a:schemeClr val="tx1"/>
+              </a:solidFill>
+              <a:latin typeface="Liberation Mono"/>
+              <a:cs typeface="Liberation Mono"/>
+            </a:endParaRPr>
+          </a:p>
+          <a:p>
+            <a:pPr>
+              <a:defRPr/>
+            </a:pPr>
+            <a:r>
+              <a:rPr lang="it-IT" sz="1200" b="0" i="0" u="none" strike="noStrike" cap="none" spc="0">
+                <a:solidFill>
+                  <a:schemeClr val="tx1"/>
+                </a:solidFill>
+                <a:latin typeface="Liberation Mono"/>
+                <a:ea typeface="Liberation Mono"/>
+                <a:cs typeface="Liberation Mono"/>
+              </a:rPr>
+              <a:t>        when(visitRepository.findAll()).thenReturn(Set.of(visit));</a:t>
+            </a:r>
+            <a:endParaRPr sz="1200" b="0" i="0" u="none" strike="noStrike" cap="none" spc="0">
+              <a:solidFill>
+                <a:schemeClr val="tx1"/>
+              </a:solidFill>
+              <a:latin typeface="Liberation Mono"/>
+              <a:cs typeface="Liberation Mono"/>
+            </a:endParaRPr>
+          </a:p>
+          <a:p>
+            <a:pPr>
+              <a:defRPr/>
+            </a:pPr>
+            <a:endParaRPr sz="1200" b="0" i="0" u="none" strike="noStrike" cap="none" spc="0">
+              <a:solidFill>
+                <a:schemeClr val="tx1"/>
+              </a:solidFill>
+              <a:latin typeface="Liberation Mono"/>
+              <a:cs typeface="Liberation Mono"/>
+            </a:endParaRPr>
+          </a:p>
+          <a:p>
+            <a:pPr>
+              <a:defRPr/>
+            </a:pPr>
+            <a:r>
+              <a:rPr lang="it-IT" sz="1200" b="0" i="0" u="none" strike="noStrike" cap="none" spc="0">
+                <a:solidFill>
+                  <a:schemeClr val="tx1"/>
+                </a:solidFill>
+                <a:latin typeface="Liberation Mono"/>
+                <a:ea typeface="Liberation Mono"/>
+                <a:cs typeface="Liberation Mono"/>
+              </a:rPr>
+              <a:t>        service.createVisitPlan();</a:t>
+            </a:r>
+            <a:endParaRPr sz="1200" b="0" i="0" u="none" strike="noStrike" cap="none" spc="0">
+              <a:solidFill>
+                <a:schemeClr val="tx1"/>
+              </a:solidFill>
+              <a:latin typeface="Liberation Mono"/>
+              <a:cs typeface="Liberation Mono"/>
+            </a:endParaRPr>
+          </a:p>
+          <a:p>
+            <a:pPr>
+              <a:defRPr/>
+            </a:pPr>
+            <a:endParaRPr sz="1200" b="0" i="0" u="none" strike="noStrike" cap="none" spc="0">
+              <a:solidFill>
+                <a:schemeClr val="tx1"/>
+              </a:solidFill>
+              <a:latin typeface="Liberation Mono"/>
+              <a:cs typeface="Liberation Mono"/>
+            </a:endParaRPr>
+          </a:p>
+          <a:p>
+            <a:pPr>
+              <a:defRPr/>
+            </a:pPr>
+            <a:r>
+              <a:rPr lang="it-IT" sz="1200" b="0" i="0" u="none" strike="noStrike" cap="none" spc="0">
+                <a:solidFill>
+                  <a:schemeClr val="tx1"/>
+                </a:solidFill>
+                <a:latin typeface="Liberation Mono"/>
+                <a:ea typeface="Liberation Mono"/>
+                <a:cs typeface="Liberation Mono"/>
+              </a:rPr>
+              <a:t>        assertEquals(VisitStatus.CANCELLED, visit.getVisitStatus());</a:t>
+            </a:r>
+            <a:endParaRPr sz="1200" b="0" i="0" u="none" strike="noStrike" cap="none" spc="0">
+              <a:solidFill>
+                <a:schemeClr val="tx1"/>
+              </a:solidFill>
+              <a:latin typeface="Liberation Mono"/>
+              <a:cs typeface="Liberation Mono"/>
+            </a:endParaRPr>
+          </a:p>
+          <a:p>
+            <a:pPr>
+              <a:defRPr/>
+            </a:pPr>
+            <a:r>
+              <a:rPr lang="it-IT" sz="1200" b="0" i="0" u="none" strike="noStrike" cap="none" spc="0">
+                <a:solidFill>
+                  <a:schemeClr val="tx1"/>
+                </a:solidFill>
+                <a:latin typeface="Liberation Mono"/>
+                <a:ea typeface="Liberation Mono"/>
+                <a:cs typeface="Liberation Mono"/>
+              </a:rPr>
+              <a:t>        verify(visitRepository).save(visit);</a:t>
+            </a:r>
+            <a:endParaRPr sz="1200" b="0" i="0" u="none" strike="noStrike" cap="none" spc="0">
+              <a:solidFill>
+                <a:schemeClr val="tx1"/>
+              </a:solidFill>
+              <a:latin typeface="Liberation Mono"/>
+              <a:cs typeface="Liberation Mono"/>
+            </a:endParaRPr>
+          </a:p>
+          <a:p>
+            <a:pPr>
+              <a:defRPr/>
+            </a:pPr>
+            <a:r>
+              <a:rPr lang="it-IT" sz="1200" b="0" i="0" u="none" strike="noStrike" cap="none" spc="0">
+                <a:solidFill>
+                  <a:schemeClr val="tx1"/>
+                </a:solidFill>
+                <a:latin typeface="Liberation Mono"/>
+                <a:ea typeface="Liberation Mono"/>
+                <a:cs typeface="Liberation Mono"/>
+              </a:rPr>
+              <a:t>        verify(statePort).setVisitPlanCreated(10, 2025, true);</a:t>
+            </a:r>
+            <a:endParaRPr sz="1200" b="0" i="0" u="none" strike="noStrike" cap="none" spc="0">
+              <a:solidFill>
+                <a:schemeClr val="tx1"/>
+              </a:solidFill>
+              <a:latin typeface="Liberation Mono"/>
+              <a:cs typeface="Liberation Mono"/>
+            </a:endParaRPr>
+          </a:p>
+          <a:p>
+            <a:pPr>
+              <a:defRPr/>
+            </a:pPr>
+            <a:r>
+              <a:rPr lang="it-IT" sz="1200" b="0" i="0" u="none" strike="noStrike" cap="none" spc="0">
+                <a:solidFill>
+                  <a:schemeClr val="tx1"/>
+                </a:solidFill>
+                <a:latin typeface="Liberation Mono"/>
+                <a:ea typeface="Liberation Mono"/>
+                <a:cs typeface="Liberation Mono"/>
+              </a:rPr>
+              <a:t>    }</a:t>
+            </a:r>
+            <a:endParaRPr sz="1200">
+              <a:latin typeface="Liberation Mono"/>
+              <a:cs typeface="Liberation Mono"/>
+            </a:endParaRPr>
+          </a:p>
+        </p:txBody>
+      </p:sp>
+      <p:sp>
+        <p:nvSpPr>
+          <p:cNvPr id="913019273" name=""/>
+          <p:cNvSpPr txBox="1"/>
+          <p:nvPr/>
+        </p:nvSpPr>
+        <p:spPr bwMode="auto">
+          <a:xfrm rot="0" flipH="0" flipV="0">
+            <a:off x="5216798" y="1304744"/>
+            <a:ext cx="6101069" cy="366119"/>
           </a:xfrm>
           <a:prstGeom prst="rect">
             <a:avLst/>
@@ -6315,24 +7441,35 @@
               <a:defRPr/>
             </a:pPr>
             <a:r>
-              <a:rPr lang="en" sz="2800" b="1">
-                <a:solidFill>
-                  <a:srgbClr val="0070C0"/>
-                </a:solidFill>
-                <a:latin typeface="DejaVu Sans Condensed"/>
-                <a:ea typeface="DejaVu Sans Condensed"/>
-                <a:cs typeface="DejaVu Sans Condensed"/>
-              </a:rPr>
-              <a:t>Caso di VisitPlanService</a:t>
-            </a:r>
-            <a:endParaRPr b="1">
-              <a:solidFill>
-                <a:srgbClr val="0070C0"/>
-              </a:solidFill>
-            </a:endParaRPr>
-          </a:p>
-        </p:txBody>
-      </p:sp>
+              <a:rPr lang="en"/>
+              <a:t>Nessuna disponibilitá - visita cancellata</a:t>
+            </a:r>
+            <a:endParaRPr/>
+          </a:p>
+        </p:txBody>
+      </p:sp>
+      <p:pic>
+        <p:nvPicPr>
+          <p:cNvPr id="895613081" name=""/>
+          <p:cNvPicPr>
+            <a:picLocks noChangeAspect="1"/>
+          </p:cNvPicPr>
+          <p:nvPr/>
+        </p:nvPicPr>
+        <p:blipFill>
+          <a:blip r:embed="rId3"/>
+          <a:stretch/>
+        </p:blipFill>
+        <p:spPr bwMode="auto">
+          <a:xfrm flipH="0" flipV="0">
+            <a:off x="355297" y="1121684"/>
+            <a:ext cx="3831803" cy="5575898"/>
+          </a:xfrm>
+          <a:prstGeom prst="rect">
+            <a:avLst/>
+          </a:prstGeom>
+        </p:spPr>
+      </p:pic>
     </p:spTree>
   </p:cSld>
   <p:clrMapOvr>
@@ -6368,7 +7505,7 @@
       </p:grpSpPr>
       <p:sp>
         <p:nvSpPr>
-          <p:cNvPr id="94625769" name="Titolo 1"/>
+          <p:cNvPr id="732938630" name="Titolo 1"/>
           <p:cNvSpPr>
             <a:spLocks noGrp="1"/>
           </p:cNvSpPr>
@@ -6378,8 +7515,8 @@
         </p:nvSpPr>
         <p:spPr bwMode="auto">
           <a:xfrm>
-            <a:off x="839459" y="37802"/>
-            <a:ext cx="10515600" cy="1325562"/>
+            <a:off x="838197" y="12697"/>
+            <a:ext cx="10515600" cy="1325560"/>
           </a:xfrm>
         </p:spPr>
         <p:txBody>
@@ -6398,7 +7535,7 @@
                 <a:ea typeface="Noto Sans"/>
                 <a:cs typeface="Noto Sans"/>
               </a:rPr>
-              <a:t>Refactoring</a:t>
+              <a:t>Testing White Box – createVisitPlan()</a:t>
             </a:r>
             <a:endParaRPr b="1">
               <a:solidFill>
@@ -6412,57 +7549,14 @@
       </p:sp>
       <p:sp>
         <p:nvSpPr>
-          <p:cNvPr id="755363798" name=""/>
+          <p:cNvPr id="506825330" name=""/>
           <p:cNvSpPr txBox="1"/>
           <p:nvPr/>
         </p:nvSpPr>
         <p:spPr bwMode="auto">
           <a:xfrm rot="0" flipH="0" flipV="0">
-            <a:off x="4915206" y="441324"/>
-            <a:ext cx="5860344" cy="518519"/>
-          </a:xfrm>
-          <a:prstGeom prst="rect">
-            <a:avLst/>
-          </a:prstGeom>
-          <a:noFill/>
-        </p:spPr>
-        <p:txBody>
-          <a:bodyPr vertOverflow="overflow" horzOverflow="overflow" vert="horz" wrap="square" lIns="91440" tIns="45720" rIns="91440" bIns="45720" numCol="1" spcCol="0" rtlCol="0" fromWordArt="0" anchor="t" anchorCtr="0" forceAA="0" upright="0" compatLnSpc="0">
-            <a:spAutoFit/>
-          </a:bodyPr>
-          <a:p>
-            <a:pPr algn="ctr">
-              <a:defRPr/>
-            </a:pPr>
-            <a:r>
-              <a:rPr lang="en" sz="2800" b="1">
-                <a:solidFill>
-                  <a:srgbClr val="0070C0"/>
-                </a:solidFill>
-                <a:latin typeface="DejaVu Sans Condensed"/>
-                <a:ea typeface="DejaVu Sans Condensed"/>
-                <a:cs typeface="DejaVu Sans Condensed"/>
-              </a:rPr>
-              <a:t>Extract Method - 1</a:t>
-            </a:r>
-            <a:endParaRPr b="1">
-              <a:solidFill>
-                <a:srgbClr val="0070C0"/>
-              </a:solidFill>
-            </a:endParaRPr>
-          </a:p>
-        </p:txBody>
-      </p:sp>
-      <p:sp>
-        <p:nvSpPr>
-          <p:cNvPr id="2100962946" name=""/>
-          <p:cNvSpPr txBox="1"/>
-          <p:nvPr/>
-        </p:nvSpPr>
-        <p:spPr bwMode="auto">
-          <a:xfrm rot="0" flipH="0" flipV="0">
-            <a:off x="457916" y="1160462"/>
-            <a:ext cx="11276167" cy="2524456"/>
+            <a:off x="4793024" y="1487804"/>
+            <a:ext cx="6953297" cy="4985452"/>
           </a:xfrm>
           <a:prstGeom prst="roundRect">
             <a:avLst>
@@ -6490,510 +7584,542 @@
               <a:defRPr/>
             </a:pPr>
             <a:r>
-              <a:rPr lang="it-IT" sz="1400" b="0" i="0" u="none" strike="noStrike" cap="none" spc="0">
-                <a:solidFill>
-                  <a:schemeClr val="tx1"/>
-                </a:solidFill>
-                <a:latin typeface="Liberation Mono"/>
-                <a:ea typeface="Liberation Mono"/>
-                <a:cs typeface="Liberation Mono"/>
-              </a:rPr>
-              <a:t>for (Visit visit : monthVisits) {</a:t>
-            </a:r>
-            <a:endParaRPr sz="1400" b="0" i="0" u="none" strike="noStrike" cap="none" spc="0">
-              <a:solidFill>
-                <a:schemeClr val="tx1"/>
-              </a:solidFill>
-              <a:latin typeface="Liberation Mono"/>
-              <a:cs typeface="Liberation Mono"/>
-            </a:endParaRPr>
-          </a:p>
-          <a:p>
-            <a:pPr>
-              <a:defRPr/>
-            </a:pPr>
-            <a:r>
-              <a:rPr lang="it-IT" sz="1400" b="0" i="0" u="none" strike="noStrike" cap="none" spc="0">
-                <a:solidFill>
-                  <a:schemeClr val="tx1"/>
-                </a:solidFill>
-                <a:latin typeface="Liberation Mono"/>
-                <a:ea typeface="Liberation Mono"/>
-                <a:cs typeface="Liberation Mono"/>
-              </a:rPr>
-              <a:t>            LocalDate day = visit.getDate();</a:t>
-            </a:r>
-            <a:endParaRPr sz="1400" b="0" i="0" u="none" strike="noStrike" cap="none" spc="0">
-              <a:solidFill>
-                <a:schemeClr val="tx1"/>
-              </a:solidFill>
-              <a:latin typeface="Liberation Mono"/>
-              <a:cs typeface="Liberation Mono"/>
-            </a:endParaRPr>
-          </a:p>
-          <a:p>
-            <a:pPr>
-              <a:defRPr/>
-            </a:pPr>
-            <a:r>
-              <a:rPr lang="it-IT" sz="1400" b="0" i="0" u="none" strike="noStrike" cap="none" spc="0">
-                <a:solidFill>
-                  <a:schemeClr val="tx1"/>
-                </a:solidFill>
-                <a:latin typeface="Liberation Mono"/>
-                <a:ea typeface="Liberation Mono"/>
-                <a:cs typeface="Liberation Mono"/>
-              </a:rPr>
-              <a:t>            List&lt;User&gt; availableVolunteers = new ArrayList&lt;&gt;();</a:t>
-            </a:r>
-            <a:endParaRPr sz="1400" b="0" i="0" u="none" strike="noStrike" cap="none" spc="0">
-              <a:solidFill>
-                <a:schemeClr val="tx1"/>
-              </a:solidFill>
-              <a:latin typeface="Liberation Mono"/>
-              <a:cs typeface="Liberation Mono"/>
-            </a:endParaRPr>
-          </a:p>
-          <a:p>
-            <a:pPr>
-              <a:defRPr/>
-            </a:pPr>
-            <a:endParaRPr sz="1400" b="0" i="0" u="none" strike="noStrike" cap="none" spc="0">
-              <a:solidFill>
-                <a:schemeClr val="tx1"/>
-              </a:solidFill>
-              <a:latin typeface="Liberation Mono"/>
-              <a:cs typeface="Liberation Mono"/>
-            </a:endParaRPr>
-          </a:p>
-          <a:p>
-            <a:pPr>
-              <a:defRPr/>
-            </a:pPr>
-            <a:r>
-              <a:rPr lang="it-IT" sz="1400" b="0" i="0" u="none" strike="noStrike" cap="none" spc="0">
-                <a:solidFill>
-                  <a:schemeClr val="tx1"/>
-                </a:solidFill>
-                <a:latin typeface="Liberation Mono"/>
-                <a:ea typeface="Liberation Mono"/>
-                <a:cs typeface="Liberation Mono"/>
-              </a:rPr>
-              <a:t>            // aggiunge alla lista availableVolunteers tutti i volontari che hanno dato</a:t>
-            </a:r>
-            <a:endParaRPr sz="1400" b="0" i="0" u="none" strike="noStrike" cap="none" spc="0">
-              <a:solidFill>
-                <a:schemeClr val="tx1"/>
-              </a:solidFill>
-              <a:latin typeface="Liberation Mono"/>
-              <a:cs typeface="Liberation Mono"/>
-            </a:endParaRPr>
-          </a:p>
-          <a:p>
-            <a:pPr>
-              <a:defRPr/>
-            </a:pPr>
-            <a:r>
-              <a:rPr lang="it-IT" sz="1400" b="0" i="0" u="none" strike="noStrike" cap="none" spc="0">
-                <a:solidFill>
-                  <a:schemeClr val="tx1"/>
-                </a:solidFill>
-                <a:latin typeface="Liberation Mono"/>
-                <a:ea typeface="Liberation Mono"/>
-                <a:cs typeface="Liberation Mono"/>
-              </a:rPr>
-              <a:t>            // disponibilitá per il</a:t>
-            </a:r>
-            <a:endParaRPr sz="1400" b="0" i="0" u="none" strike="noStrike" cap="none" spc="0">
-              <a:solidFill>
-                <a:schemeClr val="tx1"/>
-              </a:solidFill>
-              <a:latin typeface="Liberation Mono"/>
-              <a:cs typeface="Liberation Mono"/>
-            </a:endParaRPr>
-          </a:p>
-          <a:p>
-            <a:pPr>
-              <a:defRPr/>
-            </a:pPr>
-            <a:r>
-              <a:rPr lang="it-IT" sz="1400" b="0" i="0" u="none" strike="noStrike" cap="none" spc="0">
-                <a:solidFill>
-                  <a:schemeClr val="tx1"/>
-                </a:solidFill>
-                <a:latin typeface="Liberation Mono"/>
-                <a:ea typeface="Liberation Mono"/>
-                <a:cs typeface="Liberation Mono"/>
-              </a:rPr>
-              <a:t>            // giorno 'day'</a:t>
-            </a:r>
-            <a:endParaRPr sz="1400" b="0" i="0" u="none" strike="noStrike" cap="none" spc="0">
-              <a:solidFill>
-                <a:schemeClr val="tx1"/>
-              </a:solidFill>
-              <a:latin typeface="Liberation Mono"/>
-              <a:cs typeface="Liberation Mono"/>
-            </a:endParaRPr>
-          </a:p>
-          <a:p>
-            <a:pPr>
-              <a:defRPr/>
-            </a:pPr>
-            <a:r>
-              <a:rPr lang="it-IT" sz="1400" b="0" i="0" u="none" strike="noStrike" cap="none" spc="0">
-                <a:solidFill>
-                  <a:schemeClr val="tx1"/>
-                </a:solidFill>
-                <a:latin typeface="Liberation Mono"/>
-                <a:ea typeface="Liberation Mono"/>
-                <a:cs typeface="Liberation Mono"/>
-              </a:rPr>
-              <a:t>            monthAvailabilities.stream().filter(av -&gt; av.getAvailableDate().equals(day)) //</a:t>
-            </a:r>
-            <a:endParaRPr sz="1400" b="0" i="0" u="none" strike="noStrike" cap="none" spc="0">
-              <a:solidFill>
-                <a:schemeClr val="tx1"/>
-              </a:solidFill>
-              <a:latin typeface="Liberation Mono"/>
-              <a:cs typeface="Liberation Mono"/>
-            </a:endParaRPr>
-          </a:p>
-          <a:p>
-            <a:pPr>
-              <a:defRPr/>
-            </a:pPr>
-            <a:r>
-              <a:rPr lang="it-IT" sz="1400" b="0" i="0" u="none" strike="noStrike" cap="none" spc="0">
-                <a:solidFill>
-                  <a:schemeClr val="tx1"/>
-                </a:solidFill>
-                <a:latin typeface="Liberation Mono"/>
-                <a:ea typeface="Liberation Mono"/>
-                <a:cs typeface="Liberation Mono"/>
-              </a:rPr>
-              <a:t>                    // mappa le disponibilitá VolunteerAvailableDate con gli oggetti USER volontari</a:t>
-            </a:r>
-            <a:endParaRPr sz="1400" b="0" i="0" u="none" strike="noStrike" cap="none" spc="0">
-              <a:solidFill>
-                <a:schemeClr val="tx1"/>
-              </a:solidFill>
-              <a:latin typeface="Liberation Mono"/>
-              <a:cs typeface="Liberation Mono"/>
-            </a:endParaRPr>
-          </a:p>
-          <a:p>
-            <a:pPr>
-              <a:defRPr/>
-            </a:pPr>
-            <a:r>
-              <a:rPr lang="it-IT" sz="1400" b="0" i="0" u="none" strike="noStrike" cap="none" spc="0">
-                <a:solidFill>
-                  <a:schemeClr val="tx1"/>
-                </a:solidFill>
-                <a:latin typeface="Liberation Mono"/>
-                <a:ea typeface="Liberation Mono"/>
-                <a:cs typeface="Liberation Mono"/>
-              </a:rPr>
-              <a:t>                    .map(av -&gt; volunteerById(av.getVolunteerId(), volunteers)) //</a:t>
-            </a:r>
-            <a:endParaRPr sz="1400" b="0" i="0" u="none" strike="noStrike" cap="none" spc="0">
-              <a:solidFill>
-                <a:schemeClr val="tx1"/>
-              </a:solidFill>
-              <a:latin typeface="Liberation Mono"/>
-              <a:cs typeface="Liberation Mono"/>
-            </a:endParaRPr>
-          </a:p>
-          <a:p>
-            <a:pPr>
-              <a:defRPr/>
-            </a:pPr>
-            <a:r>
-              <a:rPr lang="it-IT" sz="1400" b="0" i="0" u="none" strike="noStrike" cap="none" spc="0">
-                <a:solidFill>
-                  <a:schemeClr val="tx1"/>
-                </a:solidFill>
-                <a:latin typeface="Liberation Mono"/>
-                <a:ea typeface="Liberation Mono"/>
-                <a:cs typeface="Liberation Mono"/>
-              </a:rPr>
-              <a:t>                    .forEach(availableVolunteers::add);</a:t>
-            </a:r>
-            <a:endParaRPr/>
-          </a:p>
-        </p:txBody>
-      </p:sp>
-      <p:sp>
-        <p:nvSpPr>
-          <p:cNvPr id="1273657454" name=""/>
+              <a:rPr lang="it-IT" sz="1000" b="0" i="0" u="none" strike="noStrike" cap="none" spc="0">
+                <a:solidFill>
+                  <a:schemeClr val="tx1"/>
+                </a:solidFill>
+                <a:latin typeface="Liberation Mono"/>
+                <a:ea typeface="Liberation Mono"/>
+                <a:cs typeface="Liberation Mono"/>
+              </a:rPr>
+              <a:t> @Test</a:t>
+            </a:r>
+            <a:endParaRPr sz="1000" b="0" i="0" u="none" strike="noStrike" cap="none" spc="0">
+              <a:solidFill>
+                <a:schemeClr val="tx1"/>
+              </a:solidFill>
+              <a:latin typeface="Liberation Mono"/>
+              <a:cs typeface="Liberation Mono"/>
+            </a:endParaRPr>
+          </a:p>
+          <a:p>
+            <a:pPr>
+              <a:defRPr/>
+            </a:pPr>
+            <a:r>
+              <a:rPr lang="it-IT" sz="1000" b="0" i="0" u="none" strike="noStrike" cap="none" spc="0">
+                <a:solidFill>
+                  <a:schemeClr val="tx1"/>
+                </a:solidFill>
+                <a:latin typeface="Liberation Mono"/>
+                <a:ea typeface="Liberation Mono"/>
+                <a:cs typeface="Liberation Mono"/>
+              </a:rPr>
+              <a:t>    void createVisitPlan_OneVolunteerAvailableAndCanDoVisit_ShouldAssignVisit() {</a:t>
+            </a:r>
+            <a:endParaRPr sz="1000" b="0" i="0" u="none" strike="noStrike" cap="none" spc="0">
+              <a:solidFill>
+                <a:schemeClr val="tx1"/>
+              </a:solidFill>
+              <a:latin typeface="Liberation Mono"/>
+              <a:cs typeface="Liberation Mono"/>
+            </a:endParaRPr>
+          </a:p>
+          <a:p>
+            <a:pPr>
+              <a:defRPr/>
+            </a:pPr>
+            <a:r>
+              <a:rPr lang="it-IT" sz="1000" b="0" i="0" u="none" strike="noStrike" cap="none" spc="0">
+                <a:solidFill>
+                  <a:schemeClr val="tx1"/>
+                </a:solidFill>
+                <a:latin typeface="Liberation Mono"/>
+                <a:ea typeface="Liberation Mono"/>
+                <a:cs typeface="Liberation Mono"/>
+              </a:rPr>
+              <a:t>        User volunteer = new User(1, "volunteer", "test", Role.VOLUNTEER, false);</a:t>
+            </a:r>
+            <a:endParaRPr sz="1000" b="0" i="0" u="none" strike="noStrike" cap="none" spc="0">
+              <a:solidFill>
+                <a:schemeClr val="tx1"/>
+              </a:solidFill>
+              <a:latin typeface="Liberation Mono"/>
+              <a:cs typeface="Liberation Mono"/>
+            </a:endParaRPr>
+          </a:p>
+          <a:p>
+            <a:pPr>
+              <a:defRPr/>
+            </a:pPr>
+            <a:r>
+              <a:rPr lang="it-IT" sz="1000" b="0" i="0" u="none" strike="noStrike" cap="none" spc="0">
+                <a:solidFill>
+                  <a:schemeClr val="tx1"/>
+                </a:solidFill>
+                <a:latin typeface="Liberation Mono"/>
+                <a:ea typeface="Liberation Mono"/>
+                <a:cs typeface="Liberation Mono"/>
+              </a:rPr>
+              <a:t>        when(userInfoUseCase.getUsersIdsByRole(Role.VOLUNTEER)).thenReturn(List.of(volunteer.getId()));</a:t>
+            </a:r>
+            <a:endParaRPr sz="1000" b="0" i="0" u="none" strike="noStrike" cap="none" spc="0">
+              <a:solidFill>
+                <a:schemeClr val="tx1"/>
+              </a:solidFill>
+              <a:latin typeface="Liberation Mono"/>
+              <a:cs typeface="Liberation Mono"/>
+            </a:endParaRPr>
+          </a:p>
+          <a:p>
+            <a:pPr>
+              <a:defRPr/>
+            </a:pPr>
+            <a:r>
+              <a:rPr lang="it-IT" sz="1000" b="0" i="0" u="none" strike="noStrike" cap="none" spc="0">
+                <a:solidFill>
+                  <a:schemeClr val="tx1"/>
+                </a:solidFill>
+                <a:latin typeface="Liberation Mono"/>
+                <a:ea typeface="Liberation Mono"/>
+                <a:cs typeface="Liberation Mono"/>
+              </a:rPr>
+              <a:t>        when(userInfoUseCase.findById(1)).thenReturn(Optional.of(volunteer));</a:t>
+            </a:r>
+            <a:endParaRPr sz="1000" b="0" i="0" u="none" strike="noStrike" cap="none" spc="0">
+              <a:solidFill>
+                <a:schemeClr val="tx1"/>
+              </a:solidFill>
+              <a:latin typeface="Liberation Mono"/>
+              <a:cs typeface="Liberation Mono"/>
+            </a:endParaRPr>
+          </a:p>
+          <a:p>
+            <a:pPr>
+              <a:defRPr/>
+            </a:pPr>
+            <a:endParaRPr sz="1000" b="0" i="0" u="none" strike="noStrike" cap="none" spc="0">
+              <a:solidFill>
+                <a:schemeClr val="tx1"/>
+              </a:solidFill>
+              <a:latin typeface="Liberation Mono"/>
+              <a:cs typeface="Liberation Mono"/>
+            </a:endParaRPr>
+          </a:p>
+          <a:p>
+            <a:pPr>
+              <a:defRPr/>
+            </a:pPr>
+            <a:r>
+              <a:rPr lang="it-IT" sz="1000" b="0" i="0" u="none" strike="noStrike" cap="none" spc="0">
+                <a:solidFill>
+                  <a:schemeClr val="tx1"/>
+                </a:solidFill>
+                <a:latin typeface="Liberation Mono"/>
+                <a:ea typeface="Liberation Mono"/>
+                <a:cs typeface="Liberation Mono"/>
+              </a:rPr>
+              <a:t>        LocalDate date = LocalDate.of(2025, 10, 10);</a:t>
+            </a:r>
+            <a:endParaRPr sz="1000" b="0" i="0" u="none" strike="noStrike" cap="none" spc="0">
+              <a:solidFill>
+                <a:schemeClr val="tx1"/>
+              </a:solidFill>
+              <a:latin typeface="Liberation Mono"/>
+              <a:cs typeface="Liberation Mono"/>
+            </a:endParaRPr>
+          </a:p>
+          <a:p>
+            <a:pPr>
+              <a:defRPr/>
+            </a:pPr>
+            <a:r>
+              <a:rPr lang="it-IT" sz="1000" b="0" i="0" u="none" strike="noStrike" cap="none" spc="0">
+                <a:solidFill>
+                  <a:schemeClr val="tx1"/>
+                </a:solidFill>
+                <a:latin typeface="Liberation Mono"/>
+                <a:ea typeface="Liberation Mono"/>
+                <a:cs typeface="Liberation Mono"/>
+              </a:rPr>
+              <a:t>        VolunteerAvailableDate availableDate = new VolunteerAvailableDate(1, date);</a:t>
+            </a:r>
+            <a:endParaRPr sz="1000" b="0" i="0" u="none" strike="noStrike" cap="none" spc="0">
+              <a:solidFill>
+                <a:schemeClr val="tx1"/>
+              </a:solidFill>
+              <a:latin typeface="Liberation Mono"/>
+              <a:cs typeface="Liberation Mono"/>
+            </a:endParaRPr>
+          </a:p>
+          <a:p>
+            <a:pPr>
+              <a:defRPr/>
+            </a:pPr>
+            <a:endParaRPr sz="1000" b="0" i="0" u="none" strike="noStrike" cap="none" spc="0">
+              <a:solidFill>
+                <a:schemeClr val="tx1"/>
+              </a:solidFill>
+              <a:latin typeface="Liberation Mono"/>
+              <a:cs typeface="Liberation Mono"/>
+            </a:endParaRPr>
+          </a:p>
+          <a:p>
+            <a:pPr>
+              <a:defRPr/>
+            </a:pPr>
+            <a:r>
+              <a:rPr lang="it-IT" sz="1000" b="0" i="0" u="none" strike="noStrike" cap="none" spc="0">
+                <a:solidFill>
+                  <a:schemeClr val="tx1"/>
+                </a:solidFill>
+                <a:latin typeface="Liberation Mono"/>
+                <a:ea typeface="Liberation Mono"/>
+                <a:cs typeface="Liberation Mono"/>
+              </a:rPr>
+              <a:t>        VisitType visitTypeMock = mock(VisitType.class);</a:t>
+            </a:r>
+            <a:endParaRPr sz="1000" b="0" i="0" u="none" strike="noStrike" cap="none" spc="0">
+              <a:solidFill>
+                <a:schemeClr val="tx1"/>
+              </a:solidFill>
+              <a:latin typeface="Liberation Mono"/>
+              <a:cs typeface="Liberation Mono"/>
+            </a:endParaRPr>
+          </a:p>
+          <a:p>
+            <a:pPr>
+              <a:defRPr/>
+            </a:pPr>
+            <a:r>
+              <a:rPr lang="it-IT" sz="1000" b="0" i="0" u="none" strike="noStrike" cap="none" spc="0">
+                <a:solidFill>
+                  <a:schemeClr val="tx1"/>
+                </a:solidFill>
+                <a:latin typeface="Liberation Mono"/>
+                <a:ea typeface="Liberation Mono"/>
+                <a:cs typeface="Liberation Mono"/>
+              </a:rPr>
+              <a:t>        Visit visit = new Visit(date, null, visitTypeMock, List.of(), VisitStatus.PROPOSED);</a:t>
+            </a:r>
+            <a:endParaRPr sz="1000" b="0" i="0" u="none" strike="noStrike" cap="none" spc="0">
+              <a:solidFill>
+                <a:schemeClr val="tx1"/>
+              </a:solidFill>
+              <a:latin typeface="Liberation Mono"/>
+              <a:cs typeface="Liberation Mono"/>
+            </a:endParaRPr>
+          </a:p>
+          <a:p>
+            <a:pPr>
+              <a:defRPr/>
+            </a:pPr>
+            <a:r>
+              <a:rPr lang="it-IT" sz="1000" b="0" i="0" u="none" strike="noStrike" cap="none" spc="0">
+                <a:solidFill>
+                  <a:schemeClr val="tx1"/>
+                </a:solidFill>
+                <a:latin typeface="Liberation Mono"/>
+                <a:ea typeface="Liberation Mono"/>
+                <a:cs typeface="Liberation Mono"/>
+              </a:rPr>
+              <a:t>        when(visitRepository.findAll()).thenReturn(Set.of(visit));</a:t>
+            </a:r>
+            <a:endParaRPr sz="1000" b="0" i="0" u="none" strike="noStrike" cap="none" spc="0">
+              <a:solidFill>
+                <a:schemeClr val="tx1"/>
+              </a:solidFill>
+              <a:latin typeface="Liberation Mono"/>
+              <a:cs typeface="Liberation Mono"/>
+            </a:endParaRPr>
+          </a:p>
+          <a:p>
+            <a:pPr>
+              <a:defRPr/>
+            </a:pPr>
+            <a:r>
+              <a:rPr lang="it-IT" sz="1000" b="0" i="0" u="none" strike="noStrike" cap="none" spc="0">
+                <a:solidFill>
+                  <a:schemeClr val="tx1"/>
+                </a:solidFill>
+                <a:latin typeface="Liberation Mono"/>
+                <a:ea typeface="Liberation Mono"/>
+                <a:cs typeface="Liberation Mono"/>
+              </a:rPr>
+              <a:t>        when(visitTypeRepository.findByVolunteerId(1)).thenReturn(Set.of(visitTypeMock));</a:t>
+            </a:r>
+            <a:endParaRPr sz="1000" b="0" i="0" u="none" strike="noStrike" cap="none" spc="0">
+              <a:solidFill>
+                <a:schemeClr val="tx1"/>
+              </a:solidFill>
+              <a:latin typeface="Liberation Mono"/>
+              <a:cs typeface="Liberation Mono"/>
+            </a:endParaRPr>
+          </a:p>
+          <a:p>
+            <a:pPr>
+              <a:defRPr/>
+            </a:pPr>
+            <a:endParaRPr sz="1000" b="0" i="0" u="none" strike="noStrike" cap="none" spc="0">
+              <a:solidFill>
+                <a:schemeClr val="tx1"/>
+              </a:solidFill>
+              <a:latin typeface="Liberation Mono"/>
+              <a:cs typeface="Liberation Mono"/>
+            </a:endParaRPr>
+          </a:p>
+          <a:p>
+            <a:pPr>
+              <a:defRPr/>
+            </a:pPr>
+            <a:r>
+              <a:rPr lang="it-IT" sz="1000" b="0" i="0" u="none" strike="noStrike" cap="none" spc="0">
+                <a:solidFill>
+                  <a:schemeClr val="tx1"/>
+                </a:solidFill>
+                <a:latin typeface="Liberation Mono"/>
+                <a:ea typeface="Liberation Mono"/>
+                <a:cs typeface="Liberation Mono"/>
+              </a:rPr>
+              <a:t>        List&lt;VolunteerAvailableDate&gt; volunteerAvailableDates = new ArrayList&lt;&gt;();</a:t>
+            </a:r>
+            <a:endParaRPr sz="1000" b="0" i="0" u="none" strike="noStrike" cap="none" spc="0">
+              <a:solidFill>
+                <a:schemeClr val="tx1"/>
+              </a:solidFill>
+              <a:latin typeface="Liberation Mono"/>
+              <a:cs typeface="Liberation Mono"/>
+            </a:endParaRPr>
+          </a:p>
+          <a:p>
+            <a:pPr>
+              <a:defRPr/>
+            </a:pPr>
+            <a:r>
+              <a:rPr lang="it-IT" sz="1000" b="0" i="0" u="none" strike="noStrike" cap="none" spc="0">
+                <a:solidFill>
+                  <a:schemeClr val="tx1"/>
+                </a:solidFill>
+                <a:latin typeface="Liberation Mono"/>
+                <a:ea typeface="Liberation Mono"/>
+                <a:cs typeface="Liberation Mono"/>
+              </a:rPr>
+              <a:t>        volunteerAvailableDates.add(availableDate);</a:t>
+            </a:r>
+            <a:endParaRPr sz="1000" b="0" i="0" u="none" strike="noStrike" cap="none" spc="0">
+              <a:solidFill>
+                <a:schemeClr val="tx1"/>
+              </a:solidFill>
+              <a:latin typeface="Liberation Mono"/>
+              <a:cs typeface="Liberation Mono"/>
+            </a:endParaRPr>
+          </a:p>
+          <a:p>
+            <a:pPr>
+              <a:defRPr/>
+            </a:pPr>
+            <a:endParaRPr sz="1000" b="0" i="0" u="none" strike="noStrike" cap="none" spc="0">
+              <a:solidFill>
+                <a:schemeClr val="tx1"/>
+              </a:solidFill>
+              <a:latin typeface="Liberation Mono"/>
+              <a:cs typeface="Liberation Mono"/>
+            </a:endParaRPr>
+          </a:p>
+          <a:p>
+            <a:pPr>
+              <a:defRPr/>
+            </a:pPr>
+            <a:r>
+              <a:rPr lang="it-IT" sz="1000" b="0" i="0" u="none" strike="noStrike" cap="none" spc="0">
+                <a:solidFill>
+                  <a:schemeClr val="tx1"/>
+                </a:solidFill>
+                <a:latin typeface="Liberation Mono"/>
+                <a:ea typeface="Liberation Mono"/>
+                <a:cs typeface="Liberation Mono"/>
+              </a:rPr>
+              <a:t>        when(volunteerAvailabilityRepository.findByYearMonth(YearMonth.of(2025, 10))).thenReturn(volunteerAvailableDates);</a:t>
+            </a:r>
+            <a:endParaRPr sz="1000" b="0" i="0" u="none" strike="noStrike" cap="none" spc="0">
+              <a:solidFill>
+                <a:schemeClr val="tx1"/>
+              </a:solidFill>
+              <a:latin typeface="Liberation Mono"/>
+              <a:cs typeface="Liberation Mono"/>
+            </a:endParaRPr>
+          </a:p>
+          <a:p>
+            <a:pPr>
+              <a:defRPr/>
+            </a:pPr>
+            <a:endParaRPr sz="1000" b="0" i="0" u="none" strike="noStrike" cap="none" spc="0">
+              <a:solidFill>
+                <a:schemeClr val="tx1"/>
+              </a:solidFill>
+              <a:latin typeface="Liberation Mono"/>
+              <a:cs typeface="Liberation Mono"/>
+            </a:endParaRPr>
+          </a:p>
+          <a:p>
+            <a:pPr>
+              <a:defRPr/>
+            </a:pPr>
+            <a:r>
+              <a:rPr lang="it-IT" sz="1000" b="0" i="0" u="none" strike="noStrike" cap="none" spc="0">
+                <a:solidFill>
+                  <a:schemeClr val="tx1"/>
+                </a:solidFill>
+                <a:latin typeface="Liberation Mono"/>
+                <a:ea typeface="Liberation Mono"/>
+                <a:cs typeface="Liberation Mono"/>
+              </a:rPr>
+              <a:t>        service.createVisitPlan();</a:t>
+            </a:r>
+            <a:endParaRPr sz="1000" b="0" i="0" u="none" strike="noStrike" cap="none" spc="0">
+              <a:solidFill>
+                <a:schemeClr val="tx1"/>
+              </a:solidFill>
+              <a:latin typeface="Liberation Mono"/>
+              <a:cs typeface="Liberation Mono"/>
+            </a:endParaRPr>
+          </a:p>
+          <a:p>
+            <a:pPr>
+              <a:defRPr/>
+            </a:pPr>
+            <a:endParaRPr sz="1000" b="0" i="0" u="none" strike="noStrike" cap="none" spc="0">
+              <a:solidFill>
+                <a:schemeClr val="tx1"/>
+              </a:solidFill>
+              <a:latin typeface="Liberation Mono"/>
+              <a:cs typeface="Liberation Mono"/>
+            </a:endParaRPr>
+          </a:p>
+          <a:p>
+            <a:pPr>
+              <a:defRPr/>
+            </a:pPr>
+            <a:r>
+              <a:rPr lang="it-IT" sz="1000" b="0" i="0" u="none" strike="noStrike" cap="none" spc="0">
+                <a:solidFill>
+                  <a:schemeClr val="tx1"/>
+                </a:solidFill>
+                <a:latin typeface="Liberation Mono"/>
+                <a:ea typeface="Liberation Mono"/>
+                <a:cs typeface="Liberation Mono"/>
+              </a:rPr>
+              <a:t>        assertEquals(VisitStatus.PROPOSED, visit.getVisitStatus());</a:t>
+            </a:r>
+            <a:endParaRPr sz="1000" b="0" i="0" u="none" strike="noStrike" cap="none" spc="0">
+              <a:solidFill>
+                <a:schemeClr val="tx1"/>
+              </a:solidFill>
+              <a:latin typeface="Liberation Mono"/>
+              <a:cs typeface="Liberation Mono"/>
+            </a:endParaRPr>
+          </a:p>
+          <a:p>
+            <a:pPr>
+              <a:defRPr/>
+            </a:pPr>
+            <a:r>
+              <a:rPr lang="it-IT" sz="1000" b="0" i="0" u="none" strike="noStrike" cap="none" spc="0">
+                <a:solidFill>
+                  <a:schemeClr val="tx1"/>
+                </a:solidFill>
+                <a:latin typeface="Liberation Mono"/>
+                <a:ea typeface="Liberation Mono"/>
+                <a:cs typeface="Liberation Mono"/>
+              </a:rPr>
+              <a:t>        assertEquals(1, visit.getVolunteer().getId());</a:t>
+            </a:r>
+            <a:endParaRPr sz="1000" b="0" i="0" u="none" strike="noStrike" cap="none" spc="0">
+              <a:solidFill>
+                <a:schemeClr val="tx1"/>
+              </a:solidFill>
+              <a:latin typeface="Liberation Mono"/>
+              <a:cs typeface="Liberation Mono"/>
+            </a:endParaRPr>
+          </a:p>
+          <a:p>
+            <a:pPr>
+              <a:defRPr/>
+            </a:pPr>
+            <a:r>
+              <a:rPr lang="it-IT" sz="1000" b="0" i="0" u="none" strike="noStrike" cap="none" spc="0">
+                <a:solidFill>
+                  <a:schemeClr val="tx1"/>
+                </a:solidFill>
+                <a:latin typeface="Liberation Mono"/>
+                <a:ea typeface="Liberation Mono"/>
+                <a:cs typeface="Liberation Mono"/>
+              </a:rPr>
+              <a:t>        verify(visitRepository).save(visit);</a:t>
+            </a:r>
+            <a:endParaRPr sz="1000" b="0" i="0" u="none" strike="noStrike" cap="none" spc="0">
+              <a:solidFill>
+                <a:schemeClr val="tx1"/>
+              </a:solidFill>
+              <a:latin typeface="Liberation Mono"/>
+              <a:cs typeface="Liberation Mono"/>
+            </a:endParaRPr>
+          </a:p>
+          <a:p>
+            <a:pPr>
+              <a:defRPr/>
+            </a:pPr>
+            <a:r>
+              <a:rPr lang="it-IT" sz="1000" b="0" i="0" u="none" strike="noStrike" cap="none" spc="0">
+                <a:solidFill>
+                  <a:schemeClr val="tx1"/>
+                </a:solidFill>
+                <a:latin typeface="Liberation Mono"/>
+                <a:ea typeface="Liberation Mono"/>
+                <a:cs typeface="Liberation Mono"/>
+              </a:rPr>
+              <a:t>        verify(statePort).setVisitPlanCreated(10, 2025, true);</a:t>
+            </a:r>
+            <a:endParaRPr sz="1000" b="0" i="0" u="none" strike="noStrike" cap="none" spc="0">
+              <a:solidFill>
+                <a:schemeClr val="tx1"/>
+              </a:solidFill>
+              <a:latin typeface="Liberation Mono"/>
+              <a:cs typeface="Liberation Mono"/>
+            </a:endParaRPr>
+          </a:p>
+          <a:p>
+            <a:pPr>
+              <a:defRPr/>
+            </a:pPr>
+            <a:r>
+              <a:rPr lang="it-IT" sz="1000" b="0" i="0" u="none" strike="noStrike" cap="none" spc="0">
+                <a:solidFill>
+                  <a:schemeClr val="tx1"/>
+                </a:solidFill>
+                <a:latin typeface="Liberation Mono"/>
+                <a:ea typeface="Liberation Mono"/>
+                <a:cs typeface="Liberation Mono"/>
+              </a:rPr>
+              <a:t>    }</a:t>
+            </a:r>
+            <a:endParaRPr sz="1000">
+              <a:latin typeface="Liberation Mono"/>
+              <a:cs typeface="Liberation Mono"/>
+            </a:endParaRPr>
+          </a:p>
+        </p:txBody>
+      </p:sp>
+      <p:sp>
+        <p:nvSpPr>
+          <p:cNvPr id="1366006912" name=""/>
           <p:cNvSpPr txBox="1"/>
           <p:nvPr/>
         </p:nvSpPr>
         <p:spPr bwMode="auto">
           <a:xfrm rot="0" flipH="0" flipV="0">
-            <a:off x="457916" y="3827462"/>
-            <a:ext cx="11278686" cy="2966174"/>
-          </a:xfrm>
-          <a:prstGeom prst="roundRect">
-            <a:avLst>
-              <a:gd name="adj" fmla="val 5796"/>
-            </a:avLst>
-          </a:prstGeom>
-          <a:solidFill>
-            <a:schemeClr val="bg1">
-              <a:alpha val="49999"/>
-            </a:schemeClr>
-          </a:solidFill>
-          <a:ln w="12699">
-            <a:solidFill>
-              <a:schemeClr val="tx1"/>
-            </a:solidFill>
-            <a:prstDash val="solid"/>
-          </a:ln>
-        </p:spPr>
-        <p:txBody>
-          <a:bodyPr vertOverflow="overflow" horzOverflow="overflow" vert="horz" wrap="square" lIns="91440" tIns="45720" rIns="91440" bIns="45720" numCol="1" spcCol="0" rtlCol="0" fromWordArt="0" anchor="t" anchorCtr="0" forceAA="0" upright="0" compatLnSpc="0">
-            <a:spAutoFit/>
-          </a:bodyPr>
-          <a:p>
-            <a:pPr>
-              <a:defRPr/>
-            </a:pPr>
-            <a:r>
-              <a:rPr lang="en" sz="1400" b="0" i="0" u="none" strike="noStrike" cap="none" spc="0">
-                <a:solidFill>
-                  <a:schemeClr val="tx1"/>
-                </a:solidFill>
-                <a:latin typeface="Liberation Mono"/>
-                <a:ea typeface="Liberation Mono"/>
-                <a:cs typeface="Liberation Mono"/>
-              </a:rPr>
-              <a:t>for (Visit visit : nextMonthSortedVisits) {</a:t>
-            </a:r>
-            <a:endParaRPr sz="1400" b="0" i="0" u="none" strike="noStrike" cap="none" spc="0">
-              <a:solidFill>
-                <a:schemeClr val="tx1"/>
-              </a:solidFill>
-              <a:latin typeface="Liberation Mono"/>
-              <a:cs typeface="Liberation Mono"/>
-            </a:endParaRPr>
-          </a:p>
-          <a:p>
-            <a:pPr>
-              <a:defRPr/>
-            </a:pPr>
-            <a:r>
-              <a:rPr lang="en" sz="1400" b="0" i="0" u="none" strike="noStrike" cap="none" spc="0">
-                <a:solidFill>
-                  <a:schemeClr val="tx1"/>
-                </a:solidFill>
-                <a:latin typeface="Liberation Mono"/>
-                <a:ea typeface="Liberation Mono"/>
-                <a:cs typeface="Liberation Mono"/>
-              </a:rPr>
-              <a:t>    List&lt;Integer&gt; availableVolunteerIds = </a:t>
-            </a:r>
-            <a:endParaRPr sz="1400" b="0" i="0" u="none" strike="noStrike" cap="none" spc="0">
-              <a:solidFill>
-                <a:schemeClr val="tx1"/>
-              </a:solidFill>
-              <a:latin typeface="Liberation Mono"/>
-              <a:cs typeface="Liberation Mono"/>
-            </a:endParaRPr>
-          </a:p>
-          <a:p>
-            <a:pPr>
-              <a:defRPr/>
-            </a:pPr>
-            <a:r>
-              <a:rPr lang="en" sz="1400" b="0" i="0" u="none" strike="noStrike" cap="none" spc="0">
-                <a:solidFill>
-                  <a:schemeClr val="tx1"/>
-                </a:solidFill>
-                <a:latin typeface="Liberation Mono"/>
-                <a:ea typeface="Liberation Mono"/>
-                <a:cs typeface="Liberation Mono"/>
-              </a:rPr>
-              <a:t>	getAvailableVolunteersForVisitDate(visit, volunteerAvailabilitiesNextMonth);</a:t>
-            </a:r>
-            <a:endParaRPr sz="1400">
-              <a:latin typeface="Liberation Mono"/>
-              <a:cs typeface="Liberation Mono"/>
-            </a:endParaRPr>
-          </a:p>
-          <a:p>
-            <a:pPr>
-              <a:defRPr/>
-            </a:pPr>
-            <a:r>
-              <a:rPr lang="en" sz="1400" b="0" i="0" u="none" strike="noStrike" cap="none" spc="0">
-                <a:solidFill>
-                  <a:schemeClr val="tx1"/>
-                </a:solidFill>
-                <a:latin typeface="Liberation Mono"/>
-                <a:ea typeface="Liberation Mono"/>
-                <a:cs typeface="Liberation Mono"/>
-              </a:rPr>
-              <a:t>...</a:t>
-            </a:r>
-            <a:endParaRPr sz="1400">
-              <a:latin typeface="Liberation Mono"/>
-              <a:cs typeface="Liberation Mono"/>
-            </a:endParaRPr>
-          </a:p>
-          <a:p>
-            <a:pPr>
-              <a:defRPr/>
-            </a:pPr>
-            <a:endParaRPr sz="1400">
-              <a:latin typeface="Liberation Mono"/>
-              <a:cs typeface="Liberation Mono"/>
-            </a:endParaRPr>
-          </a:p>
-          <a:p>
-            <a:pPr>
-              <a:defRPr/>
-            </a:pPr>
-            <a:r>
-              <a:rPr lang="en" sz="1400" b="0" i="0" u="none" strike="noStrike" cap="none" spc="0">
-                <a:solidFill>
-                  <a:schemeClr val="tx1"/>
-                </a:solidFill>
-                <a:latin typeface="Liberation Mono"/>
-                <a:ea typeface="Liberation Mono"/>
-                <a:cs typeface="Liberation Mono"/>
-              </a:rPr>
-              <a:t>private List&lt;Integer&gt; getAvailableVolunteersForVisitDate(Visit visit, List&lt;VolunteerAvailableDate&gt; volunteerAvailabilitiesNextMonth) {</a:t>
-            </a:r>
-            <a:endParaRPr sz="1400" b="0" i="0" u="none" strike="noStrike" cap="none" spc="0">
-              <a:solidFill>
-                <a:schemeClr val="tx1"/>
-              </a:solidFill>
-              <a:latin typeface="Liberation Mono"/>
-              <a:cs typeface="Liberation Mono"/>
-            </a:endParaRPr>
-          </a:p>
-          <a:p>
-            <a:pPr>
-              <a:defRPr/>
-            </a:pPr>
-            <a:r>
-              <a:rPr lang="en" sz="1400" b="0" i="0" u="none" strike="noStrike" cap="none" spc="0">
-                <a:solidFill>
-                  <a:schemeClr val="tx1"/>
-                </a:solidFill>
-                <a:latin typeface="Liberation Mono"/>
-                <a:ea typeface="Liberation Mono"/>
-                <a:cs typeface="Liberation Mono"/>
-              </a:rPr>
-              <a:t>        return volunteerAvailabilitiesNextMonth.stream() //</a:t>
-            </a:r>
-            <a:endParaRPr sz="1400" b="0" i="0" u="none" strike="noStrike" cap="none" spc="0">
-              <a:solidFill>
-                <a:schemeClr val="tx1"/>
-              </a:solidFill>
-              <a:latin typeface="Liberation Mono"/>
-              <a:cs typeface="Liberation Mono"/>
-            </a:endParaRPr>
-          </a:p>
-          <a:p>
-            <a:pPr>
-              <a:defRPr/>
-            </a:pPr>
-            <a:r>
-              <a:rPr lang="en" sz="1400" b="0" i="0" u="none" strike="noStrike" cap="none" spc="0">
-                <a:solidFill>
-                  <a:schemeClr val="tx1"/>
-                </a:solidFill>
-                <a:latin typeface="Liberation Mono"/>
-                <a:ea typeface="Liberation Mono"/>
-                <a:cs typeface="Liberation Mono"/>
-              </a:rPr>
-              <a:t>                .filter(volunteerAvailableDate -&gt; volunteerAvailableDate.getAvailableDate().equals(visit.getDate())) //</a:t>
-            </a:r>
-            <a:endParaRPr sz="1400" b="0" i="0" u="none" strike="noStrike" cap="none" spc="0">
-              <a:solidFill>
-                <a:schemeClr val="tx1"/>
-              </a:solidFill>
-              <a:latin typeface="Liberation Mono"/>
-              <a:cs typeface="Liberation Mono"/>
-            </a:endParaRPr>
-          </a:p>
-          <a:p>
-            <a:pPr>
-              <a:defRPr/>
-            </a:pPr>
-            <a:r>
-              <a:rPr lang="en" sz="1400" b="0" i="0" u="none" strike="noStrike" cap="none" spc="0">
-                <a:solidFill>
-                  <a:schemeClr val="tx1"/>
-                </a:solidFill>
-                <a:latin typeface="Liberation Mono"/>
-                <a:ea typeface="Liberation Mono"/>
-                <a:cs typeface="Liberation Mono"/>
-              </a:rPr>
-              <a:t>                .map(VolunteerAvailableDate::getVolunteerId) //</a:t>
-            </a:r>
-            <a:endParaRPr sz="1400" b="0" i="0" u="none" strike="noStrike" cap="none" spc="0">
-              <a:solidFill>
-                <a:schemeClr val="tx1"/>
-              </a:solidFill>
-              <a:latin typeface="Liberation Mono"/>
-              <a:cs typeface="Liberation Mono"/>
-            </a:endParaRPr>
-          </a:p>
-          <a:p>
-            <a:pPr>
-              <a:defRPr/>
-            </a:pPr>
-            <a:r>
-              <a:rPr lang="en" sz="1400" b="0" i="0" u="none" strike="noStrike" cap="none" spc="0">
-                <a:solidFill>
-                  <a:schemeClr val="tx1"/>
-                </a:solidFill>
-                <a:latin typeface="Liberation Mono"/>
-                <a:ea typeface="Liberation Mono"/>
-                <a:cs typeface="Liberation Mono"/>
-              </a:rPr>
-              <a:t>                .collect(Collectors.toList());</a:t>
-            </a:r>
-            <a:endParaRPr sz="1400" b="0" i="0" u="none" strike="noStrike" cap="none" spc="0">
-              <a:solidFill>
-                <a:schemeClr val="tx1"/>
-              </a:solidFill>
-              <a:latin typeface="Liberation Mono"/>
-              <a:cs typeface="Liberation Mono"/>
-            </a:endParaRPr>
-          </a:p>
-          <a:p>
-            <a:pPr>
-              <a:defRPr/>
-            </a:pPr>
-            <a:r>
-              <a:rPr lang="en" sz="1400" b="0" i="0" u="none" strike="noStrike" cap="none" spc="0">
-                <a:solidFill>
-                  <a:schemeClr val="tx1"/>
-                </a:solidFill>
-                <a:latin typeface="Liberation Mono"/>
-                <a:ea typeface="Liberation Mono"/>
-                <a:cs typeface="Liberation Mono"/>
-              </a:rPr>
-              <a:t>    }</a:t>
-            </a:r>
-            <a:endParaRPr sz="1800"/>
-          </a:p>
-        </p:txBody>
-      </p:sp>
-      <p:sp>
-        <p:nvSpPr>
-          <p:cNvPr id="1736325182" name=""/>
-          <p:cNvSpPr txBox="1"/>
-          <p:nvPr/>
-        </p:nvSpPr>
-        <p:spPr bwMode="auto">
-          <a:xfrm rot="0" flipH="0" flipV="0">
-            <a:off x="9679349" y="1269043"/>
-            <a:ext cx="1995238" cy="640440"/>
+            <a:off x="5230047" y="938624"/>
+            <a:ext cx="6123749" cy="366119"/>
           </a:xfrm>
           <a:prstGeom prst="rect">
             <a:avLst/>
@@ -7001,7 +8127,7 @@
           <a:noFill/>
         </p:spPr>
         <p:txBody>
-          <a:bodyPr vertOverflow="overflow" horzOverflow="overflow" vert="horz" wrap="square" lIns="91440" tIns="45720" rIns="91440" bIns="45720" numCol="1" spcCol="0" rtlCol="0" fromWordArt="0" anchor="ctr" anchorCtr="0" forceAA="0" upright="0" compatLnSpc="0">
+          <a:bodyPr vertOverflow="overflow" horzOverflow="overflow" vert="horz" wrap="square" lIns="91440" tIns="45720" rIns="91440" bIns="45720" numCol="1" spcCol="0" rtlCol="0" fromWordArt="0" anchor="t" anchorCtr="0" forceAA="0" upright="0" compatLnSpc="0">
             <a:spAutoFit/>
           </a:bodyPr>
           <a:p>
@@ -7009,87 +8135,35 @@
               <a:defRPr/>
             </a:pPr>
             <a:r>
-              <a:rPr lang="en" sz="3600" b="1">
-                <a:ln w="6349">
-                  <a:solidFill>
-                    <a:srgbClr val="000000"/>
-                  </a:solidFill>
-                  <a:prstDash val="solid"/>
-                </a:ln>
-                <a:solidFill>
-                  <a:schemeClr val="accent2">
-                    <a:lumMod val="75000"/>
-                  </a:schemeClr>
-                </a:solidFill>
-                <a:latin typeface="Cantarell Extra Bold"/>
-                <a:ea typeface="Cantarell Extra Bold"/>
-                <a:cs typeface="Cantarell Extra Bold"/>
-              </a:rPr>
-              <a:t>PRIMA</a:t>
-            </a:r>
-            <a:endParaRPr>
-              <a:ln w="6349">
-                <a:solidFill>
-                  <a:schemeClr val="tx1"/>
-                </a:solidFill>
-                <a:prstDash val="solid"/>
-              </a:ln>
-            </a:endParaRPr>
-          </a:p>
-        </p:txBody>
-      </p:sp>
-      <p:sp>
-        <p:nvSpPr>
-          <p:cNvPr id="744925092" name=""/>
-          <p:cNvSpPr txBox="1"/>
+              <a:rPr lang="en"/>
+              <a:t>Singola disponibilitá - visita confermata</a:t>
+            </a:r>
+            <a:endParaRPr/>
+          </a:p>
+        </p:txBody>
+      </p:sp>
+      <p:pic>
+        <p:nvPicPr>
+          <p:cNvPr id="266060674" name=""/>
+          <p:cNvPicPr>
+            <a:picLocks noChangeAspect="1"/>
+          </p:cNvPicPr>
           <p:nvPr/>
-        </p:nvSpPr>
+        </p:nvPicPr>
+        <p:blipFill>
+          <a:blip r:embed="rId3"/>
+          <a:stretch/>
+        </p:blipFill>
         <p:spPr bwMode="auto">
-          <a:xfrm rot="0" flipH="0" flipV="0">
-            <a:off x="9679349" y="3920157"/>
-            <a:ext cx="1998837" cy="640440"/>
+          <a:xfrm flipH="0" flipV="0">
+            <a:off x="488999" y="1005647"/>
+            <a:ext cx="3842318" cy="5591199"/>
           </a:xfrm>
           <a:prstGeom prst="rect">
             <a:avLst/>
           </a:prstGeom>
-          <a:noFill/>
         </p:spPr>
-        <p:txBody>
-          <a:bodyPr vertOverflow="overflow" horzOverflow="overflow" vert="horz" wrap="square" lIns="91440" tIns="45720" rIns="91440" bIns="45720" numCol="1" spcCol="0" rtlCol="0" fromWordArt="0" anchor="ctr" anchorCtr="0" forceAA="0" upright="0" compatLnSpc="0">
-            <a:spAutoFit/>
-          </a:bodyPr>
-          <a:p>
-            <a:pPr algn="ctr">
-              <a:defRPr/>
-            </a:pPr>
-            <a:r>
-              <a:rPr lang="en" sz="3600" b="1">
-                <a:ln w="6349">
-                  <a:solidFill>
-                    <a:srgbClr val="000000"/>
-                  </a:solidFill>
-                  <a:prstDash val="solid"/>
-                </a:ln>
-                <a:solidFill>
-                  <a:srgbClr val="92D050"/>
-                </a:solidFill>
-                <a:latin typeface="Cantarell Extra Bold"/>
-                <a:ea typeface="Cantarell Extra Bold"/>
-                <a:cs typeface="Cantarell Extra Bold"/>
-              </a:rPr>
-              <a:t>DOPO</a:t>
-            </a:r>
-            <a:endParaRPr>
-              <a:ln w="6349">
-                <a:solidFill>
-                  <a:schemeClr val="tx1"/>
-                </a:solidFill>
-                <a:prstDash val="solid"/>
-              </a:ln>
-            </a:endParaRPr>
-          </a:p>
-        </p:txBody>
-      </p:sp>
+      </p:pic>
     </p:spTree>
   </p:cSld>
   <p:clrMapOvr>
@@ -7125,7 +8199,7 @@
       </p:grpSpPr>
       <p:sp>
         <p:nvSpPr>
-          <p:cNvPr id="1151672959" name="Titolo 1"/>
+          <p:cNvPr id="492211538" name="Titolo 1"/>
           <p:cNvSpPr>
             <a:spLocks noGrp="1"/>
           </p:cNvSpPr>
@@ -7135,8 +8209,8 @@
         </p:nvSpPr>
         <p:spPr bwMode="auto">
           <a:xfrm>
-            <a:off x="838198" y="37802"/>
-            <a:ext cx="10515600" cy="1325562"/>
+            <a:off x="838197" y="12697"/>
+            <a:ext cx="10515600" cy="1325560"/>
           </a:xfrm>
         </p:spPr>
         <p:txBody>
@@ -7155,7 +8229,7 @@
                 <a:ea typeface="Noto Sans"/>
                 <a:cs typeface="Noto Sans"/>
               </a:rPr>
-              <a:t>Refactoring</a:t>
+              <a:t>Testing White Box – createVisitPlan()</a:t>
             </a:r>
             <a:endParaRPr b="1">
               <a:solidFill>
@@ -7169,57 +8243,14 @@
       </p:sp>
       <p:sp>
         <p:nvSpPr>
-          <p:cNvPr id="436853190" name=""/>
+          <p:cNvPr id="564294578" name=""/>
           <p:cNvSpPr txBox="1"/>
           <p:nvPr/>
         </p:nvSpPr>
         <p:spPr bwMode="auto">
           <a:xfrm rot="0" flipH="0" flipV="0">
-            <a:off x="4383448" y="471802"/>
-            <a:ext cx="7416345" cy="457559"/>
-          </a:xfrm>
-          <a:prstGeom prst="rect">
-            <a:avLst/>
-          </a:prstGeom>
-          <a:noFill/>
-        </p:spPr>
-        <p:txBody>
-          <a:bodyPr vertOverflow="overflow" horzOverflow="overflow" vert="horz" wrap="square" lIns="91440" tIns="45720" rIns="91440" bIns="45720" numCol="1" spcCol="0" rtlCol="0" fromWordArt="0" anchor="t" anchorCtr="0" forceAA="0" upright="0" compatLnSpc="0">
-            <a:spAutoFit/>
-          </a:bodyPr>
-          <a:p>
-            <a:pPr algn="ctr">
-              <a:defRPr/>
-            </a:pPr>
-            <a:r>
-              <a:rPr lang="en" sz="2400" b="1">
-                <a:solidFill>
-                  <a:srgbClr val="0070C0"/>
-                </a:solidFill>
-                <a:latin typeface="DejaVu Sans Condensed"/>
-                <a:ea typeface="DejaVu Sans Condensed"/>
-                <a:cs typeface="DejaVu Sans Condensed"/>
-              </a:rPr>
-              <a:t>Extract Method - 2 + semplificazione logica</a:t>
-            </a:r>
-            <a:endParaRPr sz="1400" b="1">
-              <a:solidFill>
-                <a:srgbClr val="0070C0"/>
-              </a:solidFill>
-            </a:endParaRPr>
-          </a:p>
-        </p:txBody>
-      </p:sp>
-      <p:sp>
-        <p:nvSpPr>
-          <p:cNvPr id="234956284" name=""/>
-          <p:cNvSpPr txBox="1"/>
-          <p:nvPr/>
-        </p:nvSpPr>
-        <p:spPr bwMode="auto">
-          <a:xfrm rot="0" flipH="0" flipV="0">
-            <a:off x="457913" y="1160460"/>
-            <a:ext cx="11635248" cy="4291325"/>
+            <a:off x="4793024" y="1244131"/>
+            <a:ext cx="6958337" cy="5916213"/>
           </a:xfrm>
           <a:prstGeom prst="roundRect">
             <a:avLst>
@@ -7247,445 +8278,726 @@
               <a:defRPr/>
             </a:pPr>
             <a:r>
-              <a:rPr lang="it-IT" sz="1400" b="0" i="0" u="none" strike="noStrike" cap="none" spc="0">
-                <a:solidFill>
-                  <a:schemeClr val="tx1"/>
-                </a:solidFill>
-                <a:latin typeface="Liberation Mono"/>
-                <a:ea typeface="Liberation Mono"/>
-                <a:cs typeface="Liberation Mono"/>
-              </a:rPr>
-              <a:t>if (availableVolunteers.isEmpty()) {</a:t>
-            </a:r>
-            <a:endParaRPr sz="1400" b="0" i="0" u="none" strike="noStrike" cap="none" spc="0">
-              <a:solidFill>
-                <a:schemeClr val="tx1"/>
-              </a:solidFill>
-              <a:latin typeface="Liberation Mono"/>
-              <a:cs typeface="Liberation Mono"/>
-            </a:endParaRPr>
-          </a:p>
-          <a:p>
-            <a:pPr>
-              <a:defRPr/>
-            </a:pPr>
-            <a:r>
-              <a:rPr lang="it-IT" sz="1400" b="0" i="0" u="none" strike="noStrike" cap="none" spc="0">
-                <a:solidFill>
-                  <a:schemeClr val="tx1"/>
-                </a:solidFill>
-                <a:latin typeface="Liberation Mono"/>
-                <a:ea typeface="Liberation Mono"/>
-                <a:cs typeface="Liberation Mono"/>
-              </a:rPr>
-              <a:t>                visit.setVisitStatus(VisitStatus.CANCELLED);</a:t>
-            </a:r>
-            <a:endParaRPr sz="1400" b="0" i="0" u="none" strike="noStrike" cap="none" spc="0">
-              <a:solidFill>
-                <a:schemeClr val="tx1"/>
-              </a:solidFill>
-              <a:latin typeface="Liberation Mono"/>
-              <a:cs typeface="Liberation Mono"/>
-            </a:endParaRPr>
-          </a:p>
-          <a:p>
-            <a:pPr>
-              <a:defRPr/>
-            </a:pPr>
-            <a:r>
-              <a:rPr lang="it-IT" sz="1400" b="0" i="0" u="none" strike="noStrike" cap="none" spc="0">
-                <a:solidFill>
-                  <a:schemeClr val="tx1"/>
-                </a:solidFill>
-                <a:latin typeface="Liberation Mono"/>
-                <a:ea typeface="Liberation Mono"/>
-                <a:cs typeface="Liberation Mono"/>
-              </a:rPr>
-              <a:t>                visitRepository.save(visit);</a:t>
-            </a:r>
-            <a:endParaRPr sz="1400" b="0" i="0" u="none" strike="noStrike" cap="none" spc="0">
-              <a:solidFill>
-                <a:schemeClr val="tx1"/>
-              </a:solidFill>
-              <a:latin typeface="Liberation Mono"/>
-              <a:cs typeface="Liberation Mono"/>
-            </a:endParaRPr>
-          </a:p>
-          <a:p>
-            <a:pPr>
-              <a:defRPr/>
-            </a:pPr>
-            <a:r>
-              <a:rPr lang="it-IT" sz="1400" b="0" i="0" u="none" strike="noStrike" cap="none" spc="0">
-                <a:solidFill>
-                  <a:schemeClr val="tx1"/>
-                </a:solidFill>
-                <a:latin typeface="Liberation Mono"/>
-                <a:ea typeface="Liberation Mono"/>
-                <a:cs typeface="Liberation Mono"/>
-              </a:rPr>
-              <a:t>                continue; // passa alla visita successiva</a:t>
-            </a:r>
-            <a:endParaRPr sz="1400" b="0" i="0" u="none" strike="noStrike" cap="none" spc="0">
-              <a:solidFill>
-                <a:schemeClr val="tx1"/>
-              </a:solidFill>
-              <a:latin typeface="Liberation Mono"/>
-              <a:cs typeface="Liberation Mono"/>
-            </a:endParaRPr>
-          </a:p>
-          <a:p>
-            <a:pPr>
-              <a:defRPr/>
-            </a:pPr>
-            <a:r>
-              <a:rPr lang="it-IT" sz="1400" b="0" i="0" u="none" strike="noStrike" cap="none" spc="0">
-                <a:solidFill>
-                  <a:schemeClr val="tx1"/>
-                </a:solidFill>
-                <a:latin typeface="Liberation Mono"/>
-                <a:ea typeface="Liberation Mono"/>
-                <a:cs typeface="Liberation Mono"/>
-              </a:rPr>
-              <a:t>            } else if (availableVolunteers.size() == 1) {</a:t>
-            </a:r>
-            <a:endParaRPr sz="1400" b="0" i="0" u="none" strike="noStrike" cap="none" spc="0">
-              <a:solidFill>
-                <a:schemeClr val="tx1"/>
-              </a:solidFill>
-              <a:latin typeface="Liberation Mono"/>
-              <a:cs typeface="Liberation Mono"/>
-            </a:endParaRPr>
-          </a:p>
-          <a:p>
-            <a:pPr>
-              <a:defRPr/>
-            </a:pPr>
-            <a:r>
-              <a:rPr lang="it-IT" sz="1400" b="0" i="0" u="none" strike="noStrike" cap="none" spc="0">
-                <a:solidFill>
-                  <a:schemeClr val="tx1"/>
-                </a:solidFill>
-                <a:latin typeface="Liberation Mono"/>
-                <a:ea typeface="Liberation Mono"/>
-                <a:cs typeface="Liberation Mono"/>
-              </a:rPr>
-              <a:t>                User volunteer = availableVolunteers.getFirst();</a:t>
-            </a:r>
-            <a:endParaRPr sz="1400" b="0" i="0" u="none" strike="noStrike" cap="none" spc="0">
-              <a:solidFill>
-                <a:schemeClr val="tx1"/>
-              </a:solidFill>
-              <a:latin typeface="Liberation Mono"/>
-              <a:cs typeface="Liberation Mono"/>
-            </a:endParaRPr>
-          </a:p>
-          <a:p>
-            <a:pPr>
-              <a:defRPr/>
-            </a:pPr>
-            <a:r>
-              <a:rPr lang="it-IT" sz="1400" b="0" i="0" u="none" strike="noStrike" cap="none" spc="0">
-                <a:solidFill>
-                  <a:schemeClr val="tx1"/>
-                </a:solidFill>
-                <a:latin typeface="Liberation Mono"/>
-                <a:ea typeface="Liberation Mono"/>
-                <a:cs typeface="Liberation Mono"/>
-              </a:rPr>
-              <a:t>                if (canDoVisitType(volunteer, visit.getVisitType().getId()))</a:t>
-            </a:r>
-            <a:endParaRPr sz="1400" b="0" i="0" u="none" strike="noStrike" cap="none" spc="0">
-              <a:solidFill>
-                <a:schemeClr val="tx1"/>
-              </a:solidFill>
-              <a:latin typeface="Liberation Mono"/>
-              <a:cs typeface="Liberation Mono"/>
-            </a:endParaRPr>
-          </a:p>
-          <a:p>
-            <a:pPr>
-              <a:defRPr/>
-            </a:pPr>
-            <a:r>
-              <a:rPr lang="it-IT" sz="1400" b="0" i="0" u="none" strike="noStrike" cap="none" spc="0">
-                <a:solidFill>
-                  <a:schemeClr val="tx1"/>
-                </a:solidFill>
-                <a:latin typeface="Liberation Mono"/>
-                <a:ea typeface="Liberation Mono"/>
-                <a:cs typeface="Liberation Mono"/>
-              </a:rPr>
-              <a:t>                    assignVolunteerToVisit(volunteer, visit, monthAvailabilities, volunteerVisitCounts);</a:t>
-            </a:r>
-            <a:endParaRPr sz="1400" b="0" i="0" u="none" strike="noStrike" cap="none" spc="0">
-              <a:solidFill>
-                <a:schemeClr val="tx1"/>
-              </a:solidFill>
-              <a:latin typeface="Liberation Mono"/>
-              <a:cs typeface="Liberation Mono"/>
-            </a:endParaRPr>
-          </a:p>
-          <a:p>
-            <a:pPr>
-              <a:defRPr/>
-            </a:pPr>
-            <a:r>
-              <a:rPr lang="it-IT" sz="1400" b="0" i="0" u="none" strike="noStrike" cap="none" spc="0">
-                <a:solidFill>
-                  <a:schemeClr val="tx1"/>
-                </a:solidFill>
-                <a:latin typeface="Liberation Mono"/>
-                <a:ea typeface="Liberation Mono"/>
-                <a:cs typeface="Liberation Mono"/>
-              </a:rPr>
-              <a:t>                else {</a:t>
-            </a:r>
-            <a:endParaRPr sz="1400" b="0" i="0" u="none" strike="noStrike" cap="none" spc="0">
-              <a:solidFill>
-                <a:schemeClr val="tx1"/>
-              </a:solidFill>
-              <a:latin typeface="Liberation Mono"/>
-              <a:cs typeface="Liberation Mono"/>
-            </a:endParaRPr>
-          </a:p>
-          <a:p>
-            <a:pPr>
-              <a:defRPr/>
-            </a:pPr>
-            <a:r>
-              <a:rPr lang="it-IT" sz="1400" b="0" i="0" u="none" strike="noStrike" cap="none" spc="0">
-                <a:solidFill>
-                  <a:schemeClr val="tx1"/>
-                </a:solidFill>
-                <a:latin typeface="Liberation Mono"/>
-                <a:ea typeface="Liberation Mono"/>
-                <a:cs typeface="Liberation Mono"/>
-              </a:rPr>
-              <a:t>                    visit.setVisitStatus(VisitStatus.CANCELLED);</a:t>
-            </a:r>
-            <a:endParaRPr sz="1400" b="0" i="0" u="none" strike="noStrike" cap="none" spc="0">
-              <a:solidFill>
-                <a:schemeClr val="tx1"/>
-              </a:solidFill>
-              <a:latin typeface="Liberation Mono"/>
-              <a:cs typeface="Liberation Mono"/>
-            </a:endParaRPr>
-          </a:p>
-          <a:p>
-            <a:pPr>
-              <a:defRPr/>
-            </a:pPr>
-            <a:r>
-              <a:rPr lang="it-IT" sz="1400" b="0" i="0" u="none" strike="noStrike" cap="none" spc="0">
-                <a:solidFill>
-                  <a:schemeClr val="tx1"/>
-                </a:solidFill>
-                <a:latin typeface="Liberation Mono"/>
-                <a:ea typeface="Liberation Mono"/>
-                <a:cs typeface="Liberation Mono"/>
-              </a:rPr>
-              <a:t>                    visitRepository.save(visit);</a:t>
-            </a:r>
-            <a:endParaRPr sz="1400" b="0" i="0" u="none" strike="noStrike" cap="none" spc="0">
-              <a:solidFill>
-                <a:schemeClr val="tx1"/>
-              </a:solidFill>
-              <a:latin typeface="Liberation Mono"/>
-              <a:cs typeface="Liberation Mono"/>
-            </a:endParaRPr>
-          </a:p>
-          <a:p>
-            <a:pPr>
-              <a:defRPr/>
-            </a:pPr>
-            <a:r>
-              <a:rPr lang="it-IT" sz="1400" b="0" i="0" u="none" strike="noStrike" cap="none" spc="0">
-                <a:solidFill>
-                  <a:schemeClr val="tx1"/>
-                </a:solidFill>
-                <a:latin typeface="Liberation Mono"/>
-                <a:ea typeface="Liberation Mono"/>
-                <a:cs typeface="Liberation Mono"/>
-              </a:rPr>
-              <a:t>                }</a:t>
-            </a:r>
-            <a:endParaRPr sz="1400" b="0" i="0" u="none" strike="noStrike" cap="none" spc="0">
-              <a:solidFill>
-                <a:schemeClr val="tx1"/>
-              </a:solidFill>
-              <a:latin typeface="Liberation Mono"/>
-              <a:cs typeface="Liberation Mono"/>
-            </a:endParaRPr>
-          </a:p>
-          <a:p>
-            <a:pPr>
-              <a:defRPr/>
-            </a:pPr>
-            <a:r>
-              <a:rPr lang="it-IT" sz="1400" b="0" i="0" u="none" strike="noStrike" cap="none" spc="0">
-                <a:solidFill>
-                  <a:schemeClr val="tx1"/>
-                </a:solidFill>
-                <a:latin typeface="Liberation Mono"/>
-                <a:ea typeface="Liberation Mono"/>
-                <a:cs typeface="Liberation Mono"/>
-              </a:rPr>
-              <a:t>                continue; // passa alla visita successiva</a:t>
-            </a:r>
-            <a:endParaRPr sz="1400" b="0" i="0" u="none" strike="noStrike" cap="none" spc="0">
-              <a:solidFill>
-                <a:schemeClr val="tx1"/>
-              </a:solidFill>
-              <a:latin typeface="Liberation Mono"/>
-              <a:cs typeface="Liberation Mono"/>
-            </a:endParaRPr>
-          </a:p>
-          <a:p>
-            <a:pPr>
-              <a:defRPr/>
-            </a:pPr>
-            <a:r>
-              <a:rPr lang="it-IT" sz="1400" b="0" i="0" u="none" strike="noStrike" cap="none" spc="0">
-                <a:solidFill>
-                  <a:schemeClr val="tx1"/>
-                </a:solidFill>
-                <a:latin typeface="Liberation Mono"/>
-                <a:ea typeface="Liberation Mono"/>
-                <a:cs typeface="Liberation Mono"/>
-              </a:rPr>
-              <a:t>            }</a:t>
-            </a:r>
-            <a:endParaRPr sz="1400" b="0" i="0" u="none" strike="noStrike" cap="none" spc="0">
-              <a:solidFill>
-                <a:schemeClr val="tx1"/>
-              </a:solidFill>
-              <a:latin typeface="Liberation Mono"/>
-              <a:cs typeface="Liberation Mono"/>
-            </a:endParaRPr>
-          </a:p>
-          <a:p>
-            <a:pPr>
-              <a:defRPr/>
-            </a:pPr>
-            <a:r>
-              <a:rPr lang="it-IT" sz="1400" b="0" i="0" u="none" strike="noStrike" cap="none" spc="0">
-                <a:solidFill>
-                  <a:schemeClr val="tx1"/>
-                </a:solidFill>
-                <a:latin typeface="Liberation Mono"/>
-                <a:ea typeface="Liberation Mono"/>
-                <a:cs typeface="Liberation Mono"/>
-              </a:rPr>
-              <a:t>            // piú di 2 volontari con disponibilitá nel giorno considerato</a:t>
-            </a:r>
-            <a:endParaRPr sz="1400" b="0" i="0" u="none" strike="noStrike" cap="none" spc="0">
-              <a:solidFill>
-                <a:schemeClr val="tx1"/>
-              </a:solidFill>
-              <a:latin typeface="Liberation Mono"/>
-              <a:cs typeface="Liberation Mono"/>
-            </a:endParaRPr>
-          </a:p>
-          <a:p>
-            <a:pPr>
-              <a:defRPr/>
-            </a:pPr>
-            <a:r>
-              <a:rPr lang="it-IT" sz="1400" b="0" i="0" u="none" strike="noStrike" cap="none" spc="0">
-                <a:solidFill>
-                  <a:schemeClr val="tx1"/>
-                </a:solidFill>
-                <a:latin typeface="Liberation Mono"/>
-                <a:ea typeface="Liberation Mono"/>
-                <a:cs typeface="Liberation Mono"/>
-              </a:rPr>
-              <a:t>            User bestVolunteer = selectBestVolunteer(availableVolunteers, volunteerVisitCounts);</a:t>
-            </a:r>
-            <a:endParaRPr sz="1400" b="0" i="0" u="none" strike="noStrike" cap="none" spc="0">
-              <a:solidFill>
-                <a:schemeClr val="tx1"/>
-              </a:solidFill>
-              <a:latin typeface="Liberation Mono"/>
-              <a:cs typeface="Liberation Mono"/>
-            </a:endParaRPr>
-          </a:p>
-          <a:p>
-            <a:pPr>
-              <a:defRPr/>
-            </a:pPr>
-            <a:r>
-              <a:rPr lang="it-IT" sz="1400" b="0" i="0" u="none" strike="noStrike" cap="none" spc="0">
-                <a:solidFill>
-                  <a:schemeClr val="tx1"/>
-                </a:solidFill>
-                <a:latin typeface="Liberation Mono"/>
-                <a:ea typeface="Liberation Mono"/>
-                <a:cs typeface="Liberation Mono"/>
-              </a:rPr>
-              <a:t>            assignVolunteerToVisit(bestVolunteer, visit, monthAvailabilities, volunteerVisitCounts);</a:t>
-            </a:r>
-            <a:endParaRPr sz="1400" b="0" i="0" u="none" strike="noStrike" cap="none" spc="0">
-              <a:solidFill>
-                <a:schemeClr val="tx1"/>
-              </a:solidFill>
-              <a:latin typeface="Liberation Mono"/>
-              <a:cs typeface="Liberation Mono"/>
-            </a:endParaRPr>
-          </a:p>
-          <a:p>
-            <a:pPr>
-              <a:defRPr/>
-            </a:pPr>
-            <a:r>
-              <a:rPr lang="it-IT" sz="1400" b="0" i="0" u="none" strike="noStrike" cap="none" spc="0">
-                <a:solidFill>
-                  <a:schemeClr val="tx1"/>
-                </a:solidFill>
-                <a:latin typeface="Liberation Mono"/>
-                <a:ea typeface="Liberation Mono"/>
-                <a:cs typeface="Liberation Mono"/>
-              </a:rPr>
-              <a:t>        }</a:t>
-            </a:r>
-            <a:endParaRPr lang="it-IT" sz="1400" b="0" i="0" u="none" strike="noStrike" cap="none" spc="0">
-              <a:solidFill>
-                <a:schemeClr val="tx1"/>
-              </a:solidFill>
-              <a:latin typeface="Liberation Mono"/>
-              <a:ea typeface="Liberation Mono"/>
-              <a:cs typeface="Liberation Mono"/>
-            </a:endParaRPr>
-          </a:p>
-          <a:p>
-            <a:pPr>
-              <a:defRPr/>
-            </a:pPr>
-            <a:r>
-              <a:rPr lang="en" sz="1400" b="0" i="0" u="none" strike="noStrike" cap="none" spc="0">
-                <a:solidFill>
-                  <a:schemeClr val="tx1"/>
-                </a:solidFill>
-                <a:latin typeface="Liberation Mono"/>
-                <a:ea typeface="Liberation Mono"/>
-                <a:cs typeface="Liberation Mono"/>
-              </a:rPr>
-              <a:t>...</a:t>
-            </a:r>
-            <a:endParaRPr/>
-          </a:p>
-        </p:txBody>
-      </p:sp>
-      <p:sp>
-        <p:nvSpPr>
-          <p:cNvPr id="965707843" name=""/>
+              <a:rPr lang="it-IT" sz="900" b="0" i="0" u="none" strike="noStrike" cap="none" spc="0">
+                <a:solidFill>
+                  <a:schemeClr val="tx1"/>
+                </a:solidFill>
+                <a:latin typeface="Liberation Mono"/>
+                <a:ea typeface="Liberation Mono"/>
+                <a:cs typeface="Liberation Mono"/>
+              </a:rPr>
+              <a:t>@Test</a:t>
+            </a:r>
+            <a:endParaRPr sz="900" b="0" i="0" u="none" strike="noStrike" cap="none" spc="0">
+              <a:solidFill>
+                <a:schemeClr val="tx1"/>
+              </a:solidFill>
+              <a:latin typeface="Liberation Mono"/>
+              <a:cs typeface="Liberation Mono"/>
+            </a:endParaRPr>
+          </a:p>
+          <a:p>
+            <a:pPr>
+              <a:defRPr/>
+            </a:pPr>
+            <a:r>
+              <a:rPr lang="it-IT" sz="900" b="0" i="0" u="none" strike="noStrike" cap="none" spc="0">
+                <a:solidFill>
+                  <a:schemeClr val="tx1"/>
+                </a:solidFill>
+                <a:latin typeface="Liberation Mono"/>
+                <a:ea typeface="Liberation Mono"/>
+                <a:cs typeface="Liberation Mono"/>
+              </a:rPr>
+              <a:t>    void createVisitPlan_MultipleVolunteersAvailable_ShouldAssignBestVolunteer() {</a:t>
+            </a:r>
+            <a:endParaRPr sz="900" b="0" i="0" u="none" strike="noStrike" cap="none" spc="0">
+              <a:solidFill>
+                <a:schemeClr val="tx1"/>
+              </a:solidFill>
+              <a:latin typeface="Liberation Mono"/>
+              <a:cs typeface="Liberation Mono"/>
+            </a:endParaRPr>
+          </a:p>
+          <a:p>
+            <a:pPr>
+              <a:defRPr/>
+            </a:pPr>
+            <a:r>
+              <a:rPr lang="it-IT" sz="900" b="0" i="0" u="none" strike="noStrike" cap="none" spc="0">
+                <a:solidFill>
+                  <a:schemeClr val="tx1"/>
+                </a:solidFill>
+                <a:latin typeface="Liberation Mono"/>
+                <a:ea typeface="Liberation Mono"/>
+                <a:cs typeface="Liberation Mono"/>
+              </a:rPr>
+              <a:t>        User volunteer1 = new User(1, "", "", Role.VOLUNTEER, false);</a:t>
+            </a:r>
+            <a:endParaRPr sz="900" b="0" i="0" u="none" strike="noStrike" cap="none" spc="0">
+              <a:solidFill>
+                <a:schemeClr val="tx1"/>
+              </a:solidFill>
+              <a:latin typeface="Liberation Mono"/>
+              <a:cs typeface="Liberation Mono"/>
+            </a:endParaRPr>
+          </a:p>
+          <a:p>
+            <a:pPr>
+              <a:defRPr/>
+            </a:pPr>
+            <a:r>
+              <a:rPr lang="it-IT" sz="900" b="0" i="0" u="none" strike="noStrike" cap="none" spc="0">
+                <a:solidFill>
+                  <a:schemeClr val="tx1"/>
+                </a:solidFill>
+                <a:latin typeface="Liberation Mono"/>
+                <a:ea typeface="Liberation Mono"/>
+                <a:cs typeface="Liberation Mono"/>
+              </a:rPr>
+              <a:t>        User volunteer2 = new User(2, "", "", Role.VOLUNTEER, false);</a:t>
+            </a:r>
+            <a:endParaRPr sz="900" b="0" i="0" u="none" strike="noStrike" cap="none" spc="0">
+              <a:solidFill>
+                <a:schemeClr val="tx1"/>
+              </a:solidFill>
+              <a:latin typeface="Liberation Mono"/>
+              <a:cs typeface="Liberation Mono"/>
+            </a:endParaRPr>
+          </a:p>
+          <a:p>
+            <a:pPr>
+              <a:defRPr/>
+            </a:pPr>
+            <a:r>
+              <a:rPr lang="it-IT" sz="900" b="0" i="0" u="none" strike="noStrike" cap="none" spc="0">
+                <a:solidFill>
+                  <a:schemeClr val="tx1"/>
+                </a:solidFill>
+                <a:latin typeface="Liberation Mono"/>
+                <a:ea typeface="Liberation Mono"/>
+                <a:cs typeface="Liberation Mono"/>
+              </a:rPr>
+              <a:t>        when(userInfoUseCase.getUsersIdsByRole(Role.VOLUNTEER)).thenReturn(List.of(volunteer1.getId(), volunteer2.getId()));</a:t>
+            </a:r>
+            <a:endParaRPr sz="900" b="0" i="0" u="none" strike="noStrike" cap="none" spc="0">
+              <a:solidFill>
+                <a:schemeClr val="tx1"/>
+              </a:solidFill>
+              <a:latin typeface="Liberation Mono"/>
+              <a:cs typeface="Liberation Mono"/>
+            </a:endParaRPr>
+          </a:p>
+          <a:p>
+            <a:pPr>
+              <a:defRPr/>
+            </a:pPr>
+            <a:r>
+              <a:rPr lang="it-IT" sz="900" b="0" i="0" u="none" strike="noStrike" cap="none" spc="0">
+                <a:solidFill>
+                  <a:schemeClr val="tx1"/>
+                </a:solidFill>
+                <a:latin typeface="Liberation Mono"/>
+                <a:ea typeface="Liberation Mono"/>
+                <a:cs typeface="Liberation Mono"/>
+              </a:rPr>
+              <a:t>        when(userInfoUseCase.findById(1)).thenReturn(Optional.of(volunteer1));</a:t>
+            </a:r>
+            <a:endParaRPr sz="900" b="0" i="0" u="none" strike="noStrike" cap="none" spc="0">
+              <a:solidFill>
+                <a:schemeClr val="tx1"/>
+              </a:solidFill>
+              <a:latin typeface="Liberation Mono"/>
+              <a:cs typeface="Liberation Mono"/>
+            </a:endParaRPr>
+          </a:p>
+          <a:p>
+            <a:pPr>
+              <a:defRPr/>
+            </a:pPr>
+            <a:r>
+              <a:rPr lang="it-IT" sz="900" b="0" i="0" u="none" strike="noStrike" cap="none" spc="0">
+                <a:solidFill>
+                  <a:schemeClr val="tx1"/>
+                </a:solidFill>
+                <a:latin typeface="Liberation Mono"/>
+                <a:ea typeface="Liberation Mono"/>
+                <a:cs typeface="Liberation Mono"/>
+              </a:rPr>
+              <a:t>        when(userInfoUseCase.findById(2)).thenReturn(Optional.of(volunteer2));</a:t>
+            </a:r>
+            <a:endParaRPr sz="900" b="0" i="0" u="none" strike="noStrike" cap="none" spc="0">
+              <a:solidFill>
+                <a:schemeClr val="tx1"/>
+              </a:solidFill>
+              <a:latin typeface="Liberation Mono"/>
+              <a:cs typeface="Liberation Mono"/>
+            </a:endParaRPr>
+          </a:p>
+          <a:p>
+            <a:pPr>
+              <a:defRPr/>
+            </a:pPr>
+            <a:endParaRPr sz="900" b="0" i="0" u="none" strike="noStrike" cap="none" spc="0">
+              <a:solidFill>
+                <a:schemeClr val="tx1"/>
+              </a:solidFill>
+              <a:latin typeface="Liberation Mono"/>
+              <a:cs typeface="Liberation Mono"/>
+            </a:endParaRPr>
+          </a:p>
+          <a:p>
+            <a:pPr>
+              <a:defRPr/>
+            </a:pPr>
+            <a:r>
+              <a:rPr lang="it-IT" sz="900" b="0" i="0" u="none" strike="noStrike" cap="none" spc="0">
+                <a:solidFill>
+                  <a:schemeClr val="tx1"/>
+                </a:solidFill>
+                <a:latin typeface="Liberation Mono"/>
+                <a:ea typeface="Liberation Mono"/>
+                <a:cs typeface="Liberation Mono"/>
+              </a:rPr>
+              <a:t>        LocalDate date = LocalDate.of(2025, 10, 15);</a:t>
+            </a:r>
+            <a:endParaRPr sz="900" b="0" i="0" u="none" strike="noStrike" cap="none" spc="0">
+              <a:solidFill>
+                <a:schemeClr val="tx1"/>
+              </a:solidFill>
+              <a:latin typeface="Liberation Mono"/>
+              <a:cs typeface="Liberation Mono"/>
+            </a:endParaRPr>
+          </a:p>
+          <a:p>
+            <a:pPr>
+              <a:defRPr/>
+            </a:pPr>
+            <a:r>
+              <a:rPr lang="it-IT" sz="900" b="0" i="0" u="none" strike="noStrike" cap="none" spc="0">
+                <a:solidFill>
+                  <a:schemeClr val="tx1"/>
+                </a:solidFill>
+                <a:latin typeface="Liberation Mono"/>
+                <a:ea typeface="Liberation Mono"/>
+                <a:cs typeface="Liberation Mono"/>
+              </a:rPr>
+              <a:t>        VolunteerAvailableDate volunteer1AvailableDate = new VolunteerAvailableDate(1, date);</a:t>
+            </a:r>
+            <a:endParaRPr sz="900" b="0" i="0" u="none" strike="noStrike" cap="none" spc="0">
+              <a:solidFill>
+                <a:schemeClr val="tx1"/>
+              </a:solidFill>
+              <a:latin typeface="Liberation Mono"/>
+              <a:cs typeface="Liberation Mono"/>
+            </a:endParaRPr>
+          </a:p>
+          <a:p>
+            <a:pPr>
+              <a:defRPr/>
+            </a:pPr>
+            <a:r>
+              <a:rPr lang="it-IT" sz="900" b="0" i="0" u="none" strike="noStrike" cap="none" spc="0">
+                <a:solidFill>
+                  <a:schemeClr val="tx1"/>
+                </a:solidFill>
+                <a:latin typeface="Liberation Mono"/>
+                <a:ea typeface="Liberation Mono"/>
+                <a:cs typeface="Liberation Mono"/>
+              </a:rPr>
+              <a:t>        VolunteerAvailableDate volunteer2AvailableDate = new VolunteerAvailableDate(2, date);</a:t>
+            </a:r>
+            <a:endParaRPr sz="900" b="0" i="0" u="none" strike="noStrike" cap="none" spc="0">
+              <a:solidFill>
+                <a:schemeClr val="tx1"/>
+              </a:solidFill>
+              <a:latin typeface="Liberation Mono"/>
+              <a:cs typeface="Liberation Mono"/>
+            </a:endParaRPr>
+          </a:p>
+          <a:p>
+            <a:pPr>
+              <a:defRPr/>
+            </a:pPr>
+            <a:r>
+              <a:rPr lang="it-IT" sz="900" b="0" i="0" u="none" strike="noStrike" cap="none" spc="0">
+                <a:solidFill>
+                  <a:schemeClr val="tx1"/>
+                </a:solidFill>
+                <a:latin typeface="Liberation Mono"/>
+                <a:ea typeface="Liberation Mono"/>
+                <a:cs typeface="Liberation Mono"/>
+              </a:rPr>
+              <a:t>        when(volunteerAvailabilityRepository.findByVolunteerId(1)).thenReturn(List.of(volunteer1AvailableDate));</a:t>
+            </a:r>
+            <a:endParaRPr sz="900" b="0" i="0" u="none" strike="noStrike" cap="none" spc="0">
+              <a:solidFill>
+                <a:schemeClr val="tx1"/>
+              </a:solidFill>
+              <a:latin typeface="Liberation Mono"/>
+              <a:cs typeface="Liberation Mono"/>
+            </a:endParaRPr>
+          </a:p>
+          <a:p>
+            <a:pPr>
+              <a:defRPr/>
+            </a:pPr>
+            <a:r>
+              <a:rPr lang="it-IT" sz="900" b="0" i="0" u="none" strike="noStrike" cap="none" spc="0">
+                <a:solidFill>
+                  <a:schemeClr val="tx1"/>
+                </a:solidFill>
+                <a:latin typeface="Liberation Mono"/>
+                <a:ea typeface="Liberation Mono"/>
+                <a:cs typeface="Liberation Mono"/>
+              </a:rPr>
+              <a:t>        when(volunteerAvailabilityRepository.findByVolunteerId(2)).thenReturn(List.of(volunteer2AvailableDate));</a:t>
+            </a:r>
+            <a:endParaRPr sz="900" b="0" i="0" u="none" strike="noStrike" cap="none" spc="0">
+              <a:solidFill>
+                <a:schemeClr val="tx1"/>
+              </a:solidFill>
+              <a:latin typeface="Liberation Mono"/>
+              <a:cs typeface="Liberation Mono"/>
+            </a:endParaRPr>
+          </a:p>
+          <a:p>
+            <a:pPr>
+              <a:defRPr/>
+            </a:pPr>
+            <a:endParaRPr sz="900" b="0" i="0" u="none" strike="noStrike" cap="none" spc="0">
+              <a:solidFill>
+                <a:schemeClr val="tx1"/>
+              </a:solidFill>
+              <a:latin typeface="Liberation Mono"/>
+              <a:cs typeface="Liberation Mono"/>
+            </a:endParaRPr>
+          </a:p>
+          <a:p>
+            <a:pPr>
+              <a:defRPr/>
+            </a:pPr>
+            <a:r>
+              <a:rPr lang="it-IT" sz="900" b="0" i="0" u="none" strike="noStrike" cap="none" spc="0">
+                <a:solidFill>
+                  <a:schemeClr val="tx1"/>
+                </a:solidFill>
+                <a:latin typeface="Liberation Mono"/>
+                <a:ea typeface="Liberation Mono"/>
+                <a:cs typeface="Liberation Mono"/>
+              </a:rPr>
+              <a:t>        List&lt;VolunteerAvailableDate&gt; volunteerAvailableDates = new ArrayList&lt;&gt;();</a:t>
+            </a:r>
+            <a:endParaRPr sz="900" b="0" i="0" u="none" strike="noStrike" cap="none" spc="0">
+              <a:solidFill>
+                <a:schemeClr val="tx1"/>
+              </a:solidFill>
+              <a:latin typeface="Liberation Mono"/>
+              <a:cs typeface="Liberation Mono"/>
+            </a:endParaRPr>
+          </a:p>
+          <a:p>
+            <a:pPr>
+              <a:defRPr/>
+            </a:pPr>
+            <a:r>
+              <a:rPr lang="it-IT" sz="900" b="0" i="0" u="none" strike="noStrike" cap="none" spc="0">
+                <a:solidFill>
+                  <a:schemeClr val="tx1"/>
+                </a:solidFill>
+                <a:latin typeface="Liberation Mono"/>
+                <a:ea typeface="Liberation Mono"/>
+                <a:cs typeface="Liberation Mono"/>
+              </a:rPr>
+              <a:t>        volunteerAvailableDates.add(volunteer1AvailableDate);</a:t>
+            </a:r>
+            <a:endParaRPr sz="900" b="0" i="0" u="none" strike="noStrike" cap="none" spc="0">
+              <a:solidFill>
+                <a:schemeClr val="tx1"/>
+              </a:solidFill>
+              <a:latin typeface="Liberation Mono"/>
+              <a:cs typeface="Liberation Mono"/>
+            </a:endParaRPr>
+          </a:p>
+          <a:p>
+            <a:pPr>
+              <a:defRPr/>
+            </a:pPr>
+            <a:r>
+              <a:rPr lang="it-IT" sz="900" b="0" i="0" u="none" strike="noStrike" cap="none" spc="0">
+                <a:solidFill>
+                  <a:schemeClr val="tx1"/>
+                </a:solidFill>
+                <a:latin typeface="Liberation Mono"/>
+                <a:ea typeface="Liberation Mono"/>
+                <a:cs typeface="Liberation Mono"/>
+              </a:rPr>
+              <a:t>        volunteerAvailableDates.add(volunteer2AvailableDate);</a:t>
+            </a:r>
+            <a:endParaRPr sz="900" b="0" i="0" u="none" strike="noStrike" cap="none" spc="0">
+              <a:solidFill>
+                <a:schemeClr val="tx1"/>
+              </a:solidFill>
+              <a:latin typeface="Liberation Mono"/>
+              <a:cs typeface="Liberation Mono"/>
+            </a:endParaRPr>
+          </a:p>
+          <a:p>
+            <a:pPr>
+              <a:defRPr/>
+            </a:pPr>
+            <a:endParaRPr sz="900" b="0" i="0" u="none" strike="noStrike" cap="none" spc="0">
+              <a:solidFill>
+                <a:schemeClr val="tx1"/>
+              </a:solidFill>
+              <a:latin typeface="Liberation Mono"/>
+              <a:cs typeface="Liberation Mono"/>
+            </a:endParaRPr>
+          </a:p>
+          <a:p>
+            <a:pPr>
+              <a:defRPr/>
+            </a:pPr>
+            <a:r>
+              <a:rPr lang="it-IT" sz="900" b="0" i="0" u="none" strike="noStrike" cap="none" spc="0">
+                <a:solidFill>
+                  <a:schemeClr val="tx1"/>
+                </a:solidFill>
+                <a:latin typeface="Liberation Mono"/>
+                <a:ea typeface="Liberation Mono"/>
+                <a:cs typeface="Liberation Mono"/>
+              </a:rPr>
+              <a:t>        when(volunteerAvailabilityRepository.findByYearMonth(YearMonth.of(2025, 10))).thenReturn(volunteerAvailableDates);</a:t>
+            </a:r>
+            <a:endParaRPr sz="900" b="0" i="0" u="none" strike="noStrike" cap="none" spc="0">
+              <a:solidFill>
+                <a:schemeClr val="tx1"/>
+              </a:solidFill>
+              <a:latin typeface="Liberation Mono"/>
+              <a:cs typeface="Liberation Mono"/>
+            </a:endParaRPr>
+          </a:p>
+          <a:p>
+            <a:pPr>
+              <a:defRPr/>
+            </a:pPr>
+            <a:endParaRPr sz="900" b="0" i="0" u="none" strike="noStrike" cap="none" spc="0">
+              <a:solidFill>
+                <a:schemeClr val="tx1"/>
+              </a:solidFill>
+              <a:latin typeface="Liberation Mono"/>
+              <a:cs typeface="Liberation Mono"/>
+            </a:endParaRPr>
+          </a:p>
+          <a:p>
+            <a:pPr>
+              <a:defRPr/>
+            </a:pPr>
+            <a:r>
+              <a:rPr lang="it-IT" sz="900" b="0" i="0" u="none" strike="noStrike" cap="none" spc="0">
+                <a:solidFill>
+                  <a:schemeClr val="tx1"/>
+                </a:solidFill>
+                <a:latin typeface="Liberation Mono"/>
+                <a:ea typeface="Liberation Mono"/>
+                <a:cs typeface="Liberation Mono"/>
+              </a:rPr>
+              <a:t>        VisitType visitTypeMock = mock(VisitType.class);</a:t>
+            </a:r>
+            <a:endParaRPr sz="900" b="0" i="0" u="none" strike="noStrike" cap="none" spc="0">
+              <a:solidFill>
+                <a:schemeClr val="tx1"/>
+              </a:solidFill>
+              <a:latin typeface="Liberation Mono"/>
+              <a:cs typeface="Liberation Mono"/>
+            </a:endParaRPr>
+          </a:p>
+          <a:p>
+            <a:pPr>
+              <a:defRPr/>
+            </a:pPr>
+            <a:r>
+              <a:rPr lang="it-IT" sz="900" b="0" i="0" u="none" strike="noStrike" cap="none" spc="0">
+                <a:solidFill>
+                  <a:schemeClr val="tx1"/>
+                </a:solidFill>
+                <a:latin typeface="Liberation Mono"/>
+                <a:ea typeface="Liberation Mono"/>
+                <a:cs typeface="Liberation Mono"/>
+              </a:rPr>
+              <a:t>        Visit visit = new Visit(date, null, visitTypeMock, List.of(), VisitStatus.PROPOSED);</a:t>
+            </a:r>
+            <a:endParaRPr sz="900" b="0" i="0" u="none" strike="noStrike" cap="none" spc="0">
+              <a:solidFill>
+                <a:schemeClr val="tx1"/>
+              </a:solidFill>
+              <a:latin typeface="Liberation Mono"/>
+              <a:cs typeface="Liberation Mono"/>
+            </a:endParaRPr>
+          </a:p>
+          <a:p>
+            <a:pPr>
+              <a:defRPr/>
+            </a:pPr>
+            <a:r>
+              <a:rPr lang="it-IT" sz="900" b="0" i="0" u="none" strike="noStrike" cap="none" spc="0">
+                <a:solidFill>
+                  <a:schemeClr val="tx1"/>
+                </a:solidFill>
+                <a:latin typeface="Liberation Mono"/>
+                <a:ea typeface="Liberation Mono"/>
+                <a:cs typeface="Liberation Mono"/>
+              </a:rPr>
+              <a:t>        when(visitRepository.findAll()).thenReturn(Set.of(visit));</a:t>
+            </a:r>
+            <a:endParaRPr sz="900" b="0" i="0" u="none" strike="noStrike" cap="none" spc="0">
+              <a:solidFill>
+                <a:schemeClr val="tx1"/>
+              </a:solidFill>
+              <a:latin typeface="Liberation Mono"/>
+              <a:cs typeface="Liberation Mono"/>
+            </a:endParaRPr>
+          </a:p>
+          <a:p>
+            <a:pPr>
+              <a:defRPr/>
+            </a:pPr>
+            <a:r>
+              <a:rPr lang="it-IT" sz="900" b="0" i="0" u="none" strike="noStrike" cap="none" spc="0">
+                <a:solidFill>
+                  <a:schemeClr val="tx1"/>
+                </a:solidFill>
+                <a:latin typeface="Liberation Mono"/>
+                <a:ea typeface="Liberation Mono"/>
+                <a:cs typeface="Liberation Mono"/>
+              </a:rPr>
+              <a:t>        when(visitTypeRepository.findByVolunteerId(1)).thenReturn(Set.of(visitTypeMock));</a:t>
+            </a:r>
+            <a:endParaRPr sz="900" b="0" i="0" u="none" strike="noStrike" cap="none" spc="0">
+              <a:solidFill>
+                <a:schemeClr val="tx1"/>
+              </a:solidFill>
+              <a:latin typeface="Liberation Mono"/>
+              <a:cs typeface="Liberation Mono"/>
+            </a:endParaRPr>
+          </a:p>
+          <a:p>
+            <a:pPr>
+              <a:defRPr/>
+            </a:pPr>
+            <a:r>
+              <a:rPr lang="it-IT" sz="900" b="0" i="0" u="none" strike="noStrike" cap="none" spc="0">
+                <a:solidFill>
+                  <a:schemeClr val="tx1"/>
+                </a:solidFill>
+                <a:latin typeface="Liberation Mono"/>
+                <a:ea typeface="Liberation Mono"/>
+                <a:cs typeface="Liberation Mono"/>
+              </a:rPr>
+              <a:t>        when(visitTypeRepository.findByVolunteerId(2)).thenReturn(Set.of(visitTypeMock));</a:t>
+            </a:r>
+            <a:endParaRPr sz="900" b="0" i="0" u="none" strike="noStrike" cap="none" spc="0">
+              <a:solidFill>
+                <a:schemeClr val="tx1"/>
+              </a:solidFill>
+              <a:latin typeface="Liberation Mono"/>
+              <a:cs typeface="Liberation Mono"/>
+            </a:endParaRPr>
+          </a:p>
+          <a:p>
+            <a:pPr>
+              <a:defRPr/>
+            </a:pPr>
+            <a:endParaRPr sz="900" b="0" i="0" u="none" strike="noStrike" cap="none" spc="0">
+              <a:solidFill>
+                <a:schemeClr val="tx1"/>
+              </a:solidFill>
+              <a:latin typeface="Liberation Mono"/>
+              <a:cs typeface="Liberation Mono"/>
+            </a:endParaRPr>
+          </a:p>
+          <a:p>
+            <a:pPr>
+              <a:defRPr/>
+            </a:pPr>
+            <a:r>
+              <a:rPr lang="it-IT" sz="900" b="0" i="0" u="none" strike="noStrike" cap="none" spc="0">
+                <a:solidFill>
+                  <a:schemeClr val="tx1"/>
+                </a:solidFill>
+                <a:latin typeface="Liberation Mono"/>
+                <a:ea typeface="Liberation Mono"/>
+                <a:cs typeface="Liberation Mono"/>
+              </a:rPr>
+              <a:t>        service.createVisitPlan();</a:t>
+            </a:r>
+            <a:endParaRPr sz="900" b="0" i="0" u="none" strike="noStrike" cap="none" spc="0">
+              <a:solidFill>
+                <a:schemeClr val="tx1"/>
+              </a:solidFill>
+              <a:latin typeface="Liberation Mono"/>
+              <a:cs typeface="Liberation Mono"/>
+            </a:endParaRPr>
+          </a:p>
+          <a:p>
+            <a:pPr>
+              <a:defRPr/>
+            </a:pPr>
+            <a:endParaRPr sz="900" b="0" i="0" u="none" strike="noStrike" cap="none" spc="0">
+              <a:solidFill>
+                <a:schemeClr val="tx1"/>
+              </a:solidFill>
+              <a:latin typeface="Liberation Mono"/>
+              <a:cs typeface="Liberation Mono"/>
+            </a:endParaRPr>
+          </a:p>
+          <a:p>
+            <a:pPr>
+              <a:defRPr/>
+            </a:pPr>
+            <a:r>
+              <a:rPr lang="it-IT" sz="900" b="0" i="0" u="none" strike="noStrike" cap="none" spc="0">
+                <a:solidFill>
+                  <a:schemeClr val="tx1"/>
+                </a:solidFill>
+                <a:latin typeface="Liberation Mono"/>
+                <a:ea typeface="Liberation Mono"/>
+                <a:cs typeface="Liberation Mono"/>
+              </a:rPr>
+              <a:t>        assertEquals(VisitStatus.PROPOSED, visit.getVisitStatus());</a:t>
+            </a:r>
+            <a:endParaRPr sz="900" b="0" i="0" u="none" strike="noStrike" cap="none" spc="0">
+              <a:solidFill>
+                <a:schemeClr val="tx1"/>
+              </a:solidFill>
+              <a:latin typeface="Liberation Mono"/>
+              <a:cs typeface="Liberation Mono"/>
+            </a:endParaRPr>
+          </a:p>
+          <a:p>
+            <a:pPr>
+              <a:defRPr/>
+            </a:pPr>
+            <a:r>
+              <a:rPr lang="it-IT" sz="900" b="0" i="0" u="none" strike="noStrike" cap="none" spc="0">
+                <a:solidFill>
+                  <a:schemeClr val="tx1"/>
+                </a:solidFill>
+                <a:latin typeface="Liberation Mono"/>
+                <a:ea typeface="Liberation Mono"/>
+                <a:cs typeface="Liberation Mono"/>
+              </a:rPr>
+              <a:t>        assertNotNull(visit.getVolunteer());</a:t>
+            </a:r>
+            <a:endParaRPr sz="900" b="0" i="0" u="none" strike="noStrike" cap="none" spc="0">
+              <a:solidFill>
+                <a:schemeClr val="tx1"/>
+              </a:solidFill>
+              <a:latin typeface="Liberation Mono"/>
+              <a:cs typeface="Liberation Mono"/>
+            </a:endParaRPr>
+          </a:p>
+          <a:p>
+            <a:pPr>
+              <a:defRPr/>
+            </a:pPr>
+            <a:r>
+              <a:rPr lang="it-IT" sz="900" b="0" i="0" u="none" strike="noStrike" cap="none" spc="0">
+                <a:solidFill>
+                  <a:schemeClr val="tx1"/>
+                </a:solidFill>
+                <a:latin typeface="Liberation Mono"/>
+                <a:ea typeface="Liberation Mono"/>
+                <a:cs typeface="Liberation Mono"/>
+              </a:rPr>
+              <a:t>        verify(visitRepository).save(visit);</a:t>
+            </a:r>
+            <a:endParaRPr sz="900" b="0" i="0" u="none" strike="noStrike" cap="none" spc="0">
+              <a:solidFill>
+                <a:schemeClr val="tx1"/>
+              </a:solidFill>
+              <a:latin typeface="Liberation Mono"/>
+              <a:cs typeface="Liberation Mono"/>
+            </a:endParaRPr>
+          </a:p>
+          <a:p>
+            <a:pPr>
+              <a:defRPr/>
+            </a:pPr>
+            <a:r>
+              <a:rPr lang="it-IT" sz="900" b="0" i="0" u="none" strike="noStrike" cap="none" spc="0">
+                <a:solidFill>
+                  <a:schemeClr val="tx1"/>
+                </a:solidFill>
+                <a:latin typeface="Liberation Mono"/>
+                <a:ea typeface="Liberation Mono"/>
+                <a:cs typeface="Liberation Mono"/>
+              </a:rPr>
+              <a:t>        verify(statePort).setVisitPlanCreated(10, 2025, true);</a:t>
+            </a:r>
+            <a:endParaRPr sz="900" b="0" i="0" u="none" strike="noStrike" cap="none" spc="0">
+              <a:solidFill>
+                <a:schemeClr val="tx1"/>
+              </a:solidFill>
+              <a:latin typeface="Liberation Mono"/>
+              <a:cs typeface="Liberation Mono"/>
+            </a:endParaRPr>
+          </a:p>
+          <a:p>
+            <a:pPr>
+              <a:defRPr/>
+            </a:pPr>
+            <a:r>
+              <a:rPr lang="it-IT" sz="900" b="0" i="0" u="none" strike="noStrike" cap="none" spc="0">
+                <a:solidFill>
+                  <a:schemeClr val="tx1"/>
+                </a:solidFill>
+                <a:latin typeface="Liberation Mono"/>
+                <a:ea typeface="Liberation Mono"/>
+                <a:cs typeface="Liberation Mono"/>
+              </a:rPr>
+              <a:t>    }</a:t>
+            </a:r>
+            <a:endParaRPr sz="900" b="0" i="0" u="none" strike="noStrike" cap="none" spc="0">
+              <a:solidFill>
+                <a:schemeClr val="tx1"/>
+              </a:solidFill>
+              <a:latin typeface="Liberation Mono"/>
+              <a:cs typeface="Liberation Mono"/>
+            </a:endParaRPr>
+          </a:p>
+          <a:p>
+            <a:pPr>
+              <a:defRPr/>
+            </a:pPr>
+            <a:r>
+              <a:rPr lang="it-IT" sz="900" b="0" i="0" u="none" strike="noStrike" cap="none" spc="0">
+                <a:solidFill>
+                  <a:schemeClr val="tx1"/>
+                </a:solidFill>
+                <a:latin typeface="Liberation Mono"/>
+                <a:ea typeface="Liberation Mono"/>
+                <a:cs typeface="Liberation Mono"/>
+              </a:rPr>
+              <a:t>}</a:t>
+            </a:r>
+            <a:endParaRPr sz="800">
+              <a:latin typeface="Liberation Mono"/>
+              <a:cs typeface="Liberation Mono"/>
+            </a:endParaRPr>
+          </a:p>
+        </p:txBody>
+      </p:sp>
+      <p:sp>
+        <p:nvSpPr>
+          <p:cNvPr id="1756827701" name=""/>
           <p:cNvSpPr txBox="1"/>
           <p:nvPr/>
         </p:nvSpPr>
         <p:spPr bwMode="auto">
           <a:xfrm rot="0" flipH="0" flipV="0">
-            <a:off x="9679349" y="1269223"/>
-            <a:ext cx="1995597" cy="640440"/>
+            <a:off x="5230047" y="878011"/>
+            <a:ext cx="6150029" cy="366119"/>
           </a:xfrm>
           <a:prstGeom prst="rect">
             <a:avLst/>
@@ -7693,7 +9005,7 @@
           <a:noFill/>
         </p:spPr>
         <p:txBody>
-          <a:bodyPr vertOverflow="overflow" horzOverflow="overflow" vert="horz" wrap="square" lIns="91440" tIns="45720" rIns="91440" bIns="45720" numCol="1" spcCol="0" rtlCol="0" fromWordArt="0" anchor="ctr" anchorCtr="0" forceAA="0" upright="0" compatLnSpc="0">
+          <a:bodyPr vertOverflow="overflow" horzOverflow="overflow" vert="horz" wrap="square" lIns="91440" tIns="45720" rIns="91440" bIns="45720" numCol="1" spcCol="0" rtlCol="0" fromWordArt="0" anchor="t" anchorCtr="0" forceAA="0" upright="0" compatLnSpc="0">
             <a:spAutoFit/>
           </a:bodyPr>
           <a:p>
@@ -7701,35 +9013,35 @@
               <a:defRPr/>
             </a:pPr>
             <a:r>
-              <a:rPr lang="en" sz="3600" b="1">
-                <a:ln w="6349">
-                  <a:solidFill>
-                    <a:srgbClr val="000000"/>
-                  </a:solidFill>
-                  <a:prstDash val="solid"/>
-                </a:ln>
-                <a:solidFill>
-                  <a:schemeClr val="accent2">
-                    <a:lumMod val="75000"/>
-                  </a:schemeClr>
-                </a:solidFill>
-                <a:latin typeface="Cantarell Extra Bold"/>
-                <a:ea typeface="Cantarell Extra Bold"/>
-                <a:cs typeface="Cantarell Extra Bold"/>
-              </a:rPr>
-              <a:t>PRIMA</a:t>
-            </a:r>
-            <a:endParaRPr>
-              <a:ln w="6349">
-                <a:solidFill>
-                  <a:schemeClr val="tx1"/>
-                </a:solidFill>
-                <a:prstDash val="solid"/>
-              </a:ln>
-            </a:endParaRPr>
-          </a:p>
-        </p:txBody>
-      </p:sp>
+              <a:rPr lang="en"/>
+              <a:t>Piú disponibilitá - scelta del volontario migliore</a:t>
+            </a:r>
+            <a:endParaRPr/>
+          </a:p>
+        </p:txBody>
+      </p:sp>
+      <p:pic>
+        <p:nvPicPr>
+          <p:cNvPr id="317546197" name=""/>
+          <p:cNvPicPr>
+            <a:picLocks noChangeAspect="1"/>
+          </p:cNvPicPr>
+          <p:nvPr/>
+        </p:nvPicPr>
+        <p:blipFill>
+          <a:blip r:embed="rId3"/>
+          <a:stretch/>
+        </p:blipFill>
+        <p:spPr bwMode="auto">
+          <a:xfrm flipH="0" flipV="0">
+            <a:off x="682334" y="1121684"/>
+            <a:ext cx="3821081" cy="5450244"/>
+          </a:xfrm>
+          <a:prstGeom prst="rect">
+            <a:avLst/>
+          </a:prstGeom>
+        </p:spPr>
+      </p:pic>
     </p:spTree>
   </p:cSld>
   <p:clrMapOvr>
@@ -7765,7 +9077,7 @@
       </p:grpSpPr>
       <p:sp>
         <p:nvSpPr>
-          <p:cNvPr id="134650903" name="Titolo 1"/>
+          <p:cNvPr id="59495650" name="Titolo 1"/>
           <p:cNvSpPr>
             <a:spLocks noGrp="1"/>
           </p:cNvSpPr>
@@ -7774,9 +9086,9 @@
           </p:nvPr>
         </p:nvSpPr>
         <p:spPr bwMode="auto">
-          <a:xfrm>
-            <a:off x="838198" y="37801"/>
-            <a:ext cx="10515600" cy="1325561"/>
+          <a:xfrm flipH="0" flipV="0">
+            <a:off x="838198" y="365123"/>
+            <a:ext cx="5555216" cy="1325561"/>
           </a:xfrm>
         </p:spPr>
         <p:txBody>
@@ -7795,7 +9107,18 @@
                 <a:ea typeface="Noto Sans"/>
                 <a:cs typeface="Noto Sans"/>
               </a:rPr>
-              <a:t>Refactoring</a:t>
+              <a:t>Refactor</a:t>
+            </a:r>
+            <a:r>
+              <a:rPr lang="en" b="1">
+                <a:solidFill>
+                  <a:srgbClr val="0070C0"/>
+                </a:solidFill>
+                <a:latin typeface="Noto Sans"/>
+                <a:ea typeface="Noto Sans"/>
+                <a:cs typeface="Noto Sans"/>
+              </a:rPr>
+              <a:t>ing</a:t>
             </a:r>
             <a:endParaRPr/>
           </a:p>
@@ -7803,314 +9126,84 @@
       </p:sp>
       <p:sp>
         <p:nvSpPr>
-          <p:cNvPr id="565642522" name=""/>
+          <p:cNvPr id="104998061" name="Segnaposto contenuto 2"/>
+          <p:cNvSpPr>
+            <a:spLocks noGrp="1"/>
+          </p:cNvSpPr>
+          <p:nvPr>
+            <p:ph idx="1"/>
+          </p:nvPr>
+        </p:nvSpPr>
+        <p:spPr bwMode="auto"/>
+        <p:txBody>
+          <a:bodyPr/>
+          <a:lstStyle/>
+          <a:p>
+            <a:pPr marL="0" indent="0">
+              <a:buFont typeface="Arial"/>
+              <a:buNone/>
+              <a:defRPr/>
+            </a:pPr>
+            <a:r>
+              <a:rPr lang="en"/>
+              <a:t>Il refactoring della classe VisitPlanService si é reso necessario perché:</a:t>
+            </a:r>
+            <a:endParaRPr lang="en"/>
+          </a:p>
+          <a:p>
+            <a:pPr>
+              <a:defRPr/>
+            </a:pPr>
+            <a:r>
+              <a:rPr lang="en"/>
+              <a:t>contiene l’algoritmo fondamentale per il funzionamento del programma</a:t>
+            </a:r>
+            <a:endParaRPr lang="en"/>
+          </a:p>
+          <a:p>
+            <a:pPr>
+              <a:defRPr/>
+            </a:pPr>
+            <a:r>
+              <a:rPr lang="en"/>
+              <a:t>é probabile che possa subire modifiche/aggiunte in futuro</a:t>
+            </a:r>
+            <a:endParaRPr lang="en"/>
+          </a:p>
+          <a:p>
+            <a:pPr>
+              <a:defRPr/>
+            </a:pPr>
+            <a:r>
+              <a:rPr lang="en"/>
+              <a:t>combina molte informazioni diverse: visite, tipi di visite, date non disponibili, volontari e relative disponibilitá</a:t>
+            </a:r>
+            <a:endParaRPr lang="en"/>
+          </a:p>
+          <a:p>
+            <a:pPr marL="0" indent="0">
+              <a:buFont typeface="Arial"/>
+              <a:buNone/>
+              <a:defRPr/>
+            </a:pPr>
+            <a:r>
+              <a:rPr lang="en"/>
+              <a:t>Di seguito i pattern di refactoring applicati</a:t>
+            </a:r>
+            <a:endParaRPr/>
+          </a:p>
+        </p:txBody>
+      </p:sp>
+      <p:sp>
+        <p:nvSpPr>
+          <p:cNvPr id="27321058" name=""/>
           <p:cNvSpPr txBox="1"/>
           <p:nvPr/>
         </p:nvSpPr>
         <p:spPr bwMode="auto">
           <a:xfrm rot="0" flipH="0" flipV="0">
-            <a:off x="457913" y="1160460"/>
-            <a:ext cx="11637768" cy="3407891"/>
-          </a:xfrm>
-          <a:prstGeom prst="roundRect">
-            <a:avLst>
-              <a:gd name="adj" fmla="val 5796"/>
-            </a:avLst>
-          </a:prstGeom>
-          <a:solidFill>
-            <a:schemeClr val="bg1">
-              <a:alpha val="49999"/>
-            </a:schemeClr>
-          </a:solidFill>
-          <a:ln w="12699">
-            <a:solidFill>
-              <a:schemeClr val="tx1"/>
-            </a:solidFill>
-            <a:prstDash val="solid"/>
-          </a:ln>
-        </p:spPr>
-        <p:txBody>
-          <a:bodyPr vertOverflow="overflow" horzOverflow="overflow" vert="horz" wrap="square" lIns="91440" tIns="45720" rIns="91440" bIns="45720" numCol="1" spcCol="0" rtlCol="0" fromWordArt="0" anchor="t" anchorCtr="0" forceAA="0" upright="0" compatLnSpc="0">
-            <a:spAutoFit/>
-          </a:bodyPr>
-          <a:p>
-            <a:pPr>
-              <a:defRPr/>
-            </a:pPr>
-            <a:r>
-              <a:rPr lang="it-IT" sz="1400" b="0" i="0" u="none" strike="noStrike" cap="none" spc="0">
-                <a:solidFill>
-                  <a:schemeClr val="tx1"/>
-                </a:solidFill>
-                <a:latin typeface="Liberation Mono"/>
-                <a:ea typeface="Liberation Mono"/>
-                <a:cs typeface="Liberation Mono"/>
-              </a:rPr>
-              <a:t>for (Visit visit : nextMonthSortedVisits) {</a:t>
-            </a:r>
-            <a:endParaRPr lang="it-IT" sz="1400" b="0" i="0" u="none" strike="noStrike" cap="none" spc="0">
-              <a:solidFill>
-                <a:schemeClr val="tx1"/>
-              </a:solidFill>
-              <a:latin typeface="Liberation Mono"/>
-              <a:ea typeface="Liberation Mono"/>
-              <a:cs typeface="Liberation Mono"/>
-            </a:endParaRPr>
-          </a:p>
-          <a:p>
-            <a:pPr>
-              <a:defRPr/>
-            </a:pPr>
-            <a:r>
-              <a:rPr lang="it-IT" sz="1400" b="0" i="0" u="none" strike="noStrike" cap="none" spc="0">
-                <a:solidFill>
-                  <a:schemeClr val="tx1"/>
-                </a:solidFill>
-                <a:latin typeface="Liberation Mono"/>
-                <a:ea typeface="Liberation Mono"/>
-                <a:cs typeface="Liberation Mono"/>
-              </a:rPr>
-              <a:t>            List&lt;Integer&gt; availableVolunteerIds = getAvailableVolunteersForVisitDate(visit, volunteerAvailabilitiesNextMonth);</a:t>
-            </a:r>
-            <a:endParaRPr sz="1400" b="0" i="0" u="none" strike="noStrike" cap="none" spc="0">
-              <a:solidFill>
-                <a:schemeClr val="tx1"/>
-              </a:solidFill>
-              <a:latin typeface="Liberation Mono"/>
-              <a:cs typeface="Liberation Mono"/>
-            </a:endParaRPr>
-          </a:p>
-          <a:p>
-            <a:pPr>
-              <a:defRPr/>
-            </a:pPr>
-            <a:endParaRPr sz="1400" b="0" i="0" u="none" strike="noStrike" cap="none" spc="0">
-              <a:solidFill>
-                <a:schemeClr val="tx1"/>
-              </a:solidFill>
-              <a:latin typeface="Liberation Mono"/>
-              <a:cs typeface="Liberation Mono"/>
-            </a:endParaRPr>
-          </a:p>
-          <a:p>
-            <a:pPr>
-              <a:defRPr/>
-            </a:pPr>
-            <a:r>
-              <a:rPr lang="it-IT" sz="1400" b="0" i="0" u="none" strike="noStrike" cap="none" spc="0">
-                <a:solidFill>
-                  <a:schemeClr val="tx1"/>
-                </a:solidFill>
-                <a:latin typeface="Liberation Mono"/>
-                <a:ea typeface="Liberation Mono"/>
-                <a:cs typeface="Liberation Mono"/>
-              </a:rPr>
-              <a:t>            if (availableVolunteerIds.isEmpty()) {</a:t>
-            </a:r>
-            <a:endParaRPr sz="1400" b="0" i="0" u="none" strike="noStrike" cap="none" spc="0">
-              <a:solidFill>
-                <a:schemeClr val="tx1"/>
-              </a:solidFill>
-              <a:latin typeface="Liberation Mono"/>
-              <a:cs typeface="Liberation Mono"/>
-            </a:endParaRPr>
-          </a:p>
-          <a:p>
-            <a:pPr>
-              <a:defRPr/>
-            </a:pPr>
-            <a:r>
-              <a:rPr lang="it-IT" sz="1400" b="0" i="0" u="none" strike="noStrike" cap="none" spc="0">
-                <a:solidFill>
-                  <a:schemeClr val="tx1"/>
-                </a:solidFill>
-                <a:latin typeface="Liberation Mono"/>
-                <a:ea typeface="Liberation Mono"/>
-                <a:cs typeface="Liberation Mono"/>
-              </a:rPr>
-              <a:t>                setVisitStatusToCancelled(visit);</a:t>
-            </a:r>
-            <a:endParaRPr sz="1400" b="0" i="0" u="none" strike="noStrike" cap="none" spc="0">
-              <a:solidFill>
-                <a:schemeClr val="tx1"/>
-              </a:solidFill>
-              <a:latin typeface="Liberation Mono"/>
-              <a:cs typeface="Liberation Mono"/>
-            </a:endParaRPr>
-          </a:p>
-          <a:p>
-            <a:pPr>
-              <a:defRPr/>
-            </a:pPr>
-            <a:r>
-              <a:rPr lang="it-IT" sz="1400" b="0" i="0" u="none" strike="noStrike" cap="none" spc="0">
-                <a:solidFill>
-                  <a:schemeClr val="tx1"/>
-                </a:solidFill>
-                <a:latin typeface="Liberation Mono"/>
-                <a:ea typeface="Liberation Mono"/>
-                <a:cs typeface="Liberation Mono"/>
-              </a:rPr>
-              <a:t>            } else if (availableVolunteerIds.size() == 1) {</a:t>
-            </a:r>
-            <a:endParaRPr sz="1400" b="0" i="0" u="none" strike="noStrike" cap="none" spc="0">
-              <a:solidFill>
-                <a:schemeClr val="tx1"/>
-              </a:solidFill>
-              <a:latin typeface="Liberation Mono"/>
-              <a:cs typeface="Liberation Mono"/>
-            </a:endParaRPr>
-          </a:p>
-          <a:p>
-            <a:pPr>
-              <a:defRPr/>
-            </a:pPr>
-            <a:r>
-              <a:rPr lang="it-IT" sz="1400" b="0" i="0" u="none" strike="noStrike" cap="none" spc="0">
-                <a:solidFill>
-                  <a:schemeClr val="tx1"/>
-                </a:solidFill>
-                <a:latin typeface="Liberation Mono"/>
-                <a:ea typeface="Liberation Mono"/>
-                <a:cs typeface="Liberation Mono"/>
-              </a:rPr>
-              <a:t>                assignAvailableVolunteerToVisitIfPossible(visit, availableVolunteerIds, volunteerAvailabilitiesNextMonth, volunteerIdWithVisitCounts);</a:t>
-            </a:r>
-            <a:endParaRPr sz="1400" b="0" i="0" u="none" strike="noStrike" cap="none" spc="0">
-              <a:solidFill>
-                <a:schemeClr val="tx1"/>
-              </a:solidFill>
-              <a:latin typeface="Liberation Mono"/>
-              <a:cs typeface="Liberation Mono"/>
-            </a:endParaRPr>
-          </a:p>
-          <a:p>
-            <a:pPr>
-              <a:defRPr/>
-            </a:pPr>
-            <a:r>
-              <a:rPr lang="it-IT" sz="1400" b="0" i="0" u="none" strike="noStrike" cap="none" spc="0">
-                <a:solidFill>
-                  <a:schemeClr val="tx1"/>
-                </a:solidFill>
-                <a:latin typeface="Liberation Mono"/>
-                <a:ea typeface="Liberation Mono"/>
-                <a:cs typeface="Liberation Mono"/>
-              </a:rPr>
-              <a:t>            } else {</a:t>
-            </a:r>
-            <a:endParaRPr sz="1400" b="0" i="0" u="none" strike="noStrike" cap="none" spc="0">
-              <a:solidFill>
-                <a:schemeClr val="tx1"/>
-              </a:solidFill>
-              <a:latin typeface="Liberation Mono"/>
-              <a:cs typeface="Liberation Mono"/>
-            </a:endParaRPr>
-          </a:p>
-          <a:p>
-            <a:pPr>
-              <a:defRPr/>
-            </a:pPr>
-            <a:r>
-              <a:rPr lang="it-IT" sz="1400" b="0" i="0" u="none" strike="noStrike" cap="none" spc="0">
-                <a:solidFill>
-                  <a:schemeClr val="tx1"/>
-                </a:solidFill>
-                <a:latin typeface="Liberation Mono"/>
-                <a:ea typeface="Liberation Mono"/>
-                <a:cs typeface="Liberation Mono"/>
-              </a:rPr>
-              <a:t>                assignBestVolunteerAvailableToVisit(visit, availableVolunteerIds, volunteerIdWithVisitCounts, volunteerAvailabilitiesNextMonth);</a:t>
-            </a:r>
-            <a:endParaRPr sz="1400" b="0" i="0" u="none" strike="noStrike" cap="none" spc="0">
-              <a:solidFill>
-                <a:schemeClr val="tx1"/>
-              </a:solidFill>
-              <a:latin typeface="Liberation Mono"/>
-              <a:cs typeface="Liberation Mono"/>
-            </a:endParaRPr>
-          </a:p>
-          <a:p>
-            <a:pPr>
-              <a:defRPr/>
-            </a:pPr>
-            <a:r>
-              <a:rPr lang="it-IT" sz="1400" b="0" i="0" u="none" strike="noStrike" cap="none" spc="0">
-                <a:solidFill>
-                  <a:schemeClr val="tx1"/>
-                </a:solidFill>
-                <a:latin typeface="Liberation Mono"/>
-                <a:ea typeface="Liberation Mono"/>
-                <a:cs typeface="Liberation Mono"/>
-              </a:rPr>
-              <a:t>            }</a:t>
-            </a:r>
-            <a:endParaRPr sz="1400" b="0" i="0" u="none" strike="noStrike" cap="none" spc="0">
-              <a:solidFill>
-                <a:schemeClr val="tx1"/>
-              </a:solidFill>
-              <a:latin typeface="Liberation Mono"/>
-              <a:cs typeface="Liberation Mono"/>
-            </a:endParaRPr>
-          </a:p>
-          <a:p>
-            <a:pPr>
-              <a:defRPr/>
-            </a:pPr>
-            <a:r>
-              <a:rPr lang="it-IT" sz="1400" b="0" i="0" u="none" strike="noStrike" cap="none" spc="0">
-                <a:solidFill>
-                  <a:schemeClr val="tx1"/>
-                </a:solidFill>
-                <a:latin typeface="Liberation Mono"/>
-                <a:ea typeface="Liberation Mono"/>
-                <a:cs typeface="Liberation Mono"/>
-              </a:rPr>
-              <a:t>        }</a:t>
-            </a:r>
-            <a:endParaRPr sz="1400" b="0" i="0" u="none" strike="noStrike" cap="none" spc="0">
-              <a:solidFill>
-                <a:schemeClr val="tx1"/>
-              </a:solidFill>
-              <a:latin typeface="Liberation Mono"/>
-              <a:cs typeface="Liberation Mono"/>
-            </a:endParaRPr>
-          </a:p>
-          <a:p>
-            <a:pPr>
-              <a:defRPr/>
-            </a:pPr>
-            <a:r>
-              <a:rPr lang="en" sz="1400" b="0" i="0" u="none" strike="noStrike" cap="none" spc="0">
-                <a:solidFill>
-                  <a:schemeClr val="tx1"/>
-                </a:solidFill>
-                <a:latin typeface="Liberation Mono"/>
-                <a:ea typeface="Liberation Mono"/>
-                <a:cs typeface="Liberation Mono"/>
-              </a:rPr>
-              <a:t>...</a:t>
-            </a:r>
-            <a:endParaRPr sz="1400" b="0" i="0" u="none" strike="noStrike" cap="none" spc="0">
-              <a:solidFill>
-                <a:schemeClr val="tx1"/>
-              </a:solidFill>
-              <a:latin typeface="Liberation Mono"/>
-              <a:cs typeface="Liberation Mono"/>
-            </a:endParaRPr>
-          </a:p>
-        </p:txBody>
-      </p:sp>
-      <p:sp>
-        <p:nvSpPr>
-          <p:cNvPr id="1269801817" name=""/>
-          <p:cNvSpPr txBox="1"/>
-          <p:nvPr/>
-        </p:nvSpPr>
-        <p:spPr bwMode="auto">
-          <a:xfrm rot="0" flipH="0" flipV="0">
-            <a:off x="4383448" y="471802"/>
-            <a:ext cx="7416703" cy="457559"/>
+            <a:off x="5753406" y="844844"/>
+            <a:ext cx="5851705" cy="518519"/>
           </a:xfrm>
           <a:prstGeom prst="rect">
             <a:avLst/>
@@ -8126,7 +9219,7 @@
               <a:defRPr/>
             </a:pPr>
             <a:r>
-              <a:rPr lang="en" sz="2400" b="1">
+              <a:rPr lang="en" sz="2800" b="1">
                 <a:solidFill>
                   <a:srgbClr val="0070C0"/>
                 </a:solidFill>
@@ -8134,64 +9227,12 @@
                 <a:ea typeface="DejaVu Sans Condensed"/>
                 <a:cs typeface="DejaVu Sans Condensed"/>
               </a:rPr>
-              <a:t>Extract Method - 2 + semplificazione logica</a:t>
-            </a:r>
-            <a:endParaRPr sz="1400" b="1">
+              <a:t>Caso di VisitPlanService</a:t>
+            </a:r>
+            <a:endParaRPr b="1">
               <a:solidFill>
                 <a:srgbClr val="0070C0"/>
               </a:solidFill>
-            </a:endParaRPr>
-          </a:p>
-        </p:txBody>
-      </p:sp>
-      <p:sp>
-        <p:nvSpPr>
-          <p:cNvPr id="342961300" name=""/>
-          <p:cNvSpPr txBox="1"/>
-          <p:nvPr/>
-        </p:nvSpPr>
-        <p:spPr bwMode="auto">
-          <a:xfrm rot="0" flipH="0" flipV="0">
-            <a:off x="10039335" y="1839611"/>
-            <a:ext cx="1999196" cy="640440"/>
-          </a:xfrm>
-          <a:prstGeom prst="rect">
-            <a:avLst/>
-          </a:prstGeom>
-          <a:noFill/>
-        </p:spPr>
-        <p:txBody>
-          <a:bodyPr vertOverflow="overflow" horzOverflow="overflow" vert="horz" wrap="square" lIns="91440" tIns="45720" rIns="91440" bIns="45720" numCol="1" spcCol="0" rtlCol="0" fromWordArt="0" anchor="ctr" anchorCtr="0" forceAA="0" upright="0" compatLnSpc="0">
-            <a:spAutoFit/>
-          </a:bodyPr>
-          <a:p>
-            <a:pPr algn="ctr">
-              <a:defRPr/>
-            </a:pPr>
-            <a:r>
-              <a:rPr lang="en" sz="3600" b="1">
-                <a:ln w="6349">
-                  <a:solidFill>
-                    <a:srgbClr val="000000"/>
-                  </a:solidFill>
-                  <a:prstDash val="solid"/>
-                </a:ln>
-                <a:solidFill>
-                  <a:srgbClr val="92D050"/>
-                </a:solidFill>
-                <a:latin typeface="Cantarell Extra Bold"/>
-                <a:ea typeface="Cantarell Extra Bold"/>
-                <a:cs typeface="Cantarell Extra Bold"/>
-              </a:rPr>
-              <a:t>DOPO</a:t>
-            </a:r>
-            <a:endParaRPr>
-              <a:ln w="6349">
-                <a:solidFill>
-                  <a:schemeClr val="tx1"/>
-                </a:solidFill>
-                <a:prstDash val="solid"/>
-              </a:ln>
             </a:endParaRPr>
           </a:p>
         </p:txBody>
@@ -8231,7 +9272,7 @@
       </p:grpSpPr>
       <p:sp>
         <p:nvSpPr>
-          <p:cNvPr id="673584130" name="Titolo 1"/>
+          <p:cNvPr id="149416002" name="Titolo 1"/>
           <p:cNvSpPr>
             <a:spLocks noGrp="1"/>
           </p:cNvSpPr>
@@ -8241,7 +9282,7 @@
         </p:nvSpPr>
         <p:spPr bwMode="auto">
           <a:xfrm>
-            <a:off x="838198" y="37038"/>
+            <a:off x="839459" y="37802"/>
             <a:ext cx="10515600" cy="1325562"/>
           </a:xfrm>
         </p:spPr>
@@ -8263,20 +9304,26 @@
               </a:rPr>
               <a:t>Refactoring</a:t>
             </a:r>
-            <a:endParaRPr/>
-          </a:p>
-        </p:txBody>
-      </p:sp>
-      <p:sp>
-        <p:nvSpPr>
-          <p:cNvPr id="247224350" name=""/>
+            <a:endParaRPr b="1">
+              <a:solidFill>
+                <a:srgbClr val="0070C0"/>
+              </a:solidFill>
+              <a:latin typeface="Noto Sans"/>
+              <a:cs typeface="Noto Sans"/>
+            </a:endParaRPr>
+          </a:p>
+        </p:txBody>
+      </p:sp>
+      <p:sp>
+        <p:nvSpPr>
+          <p:cNvPr id="1040471417" name=""/>
           <p:cNvSpPr txBox="1"/>
           <p:nvPr/>
         </p:nvSpPr>
         <p:spPr bwMode="auto">
           <a:xfrm rot="0" flipH="0" flipV="0">
-            <a:off x="5753405" y="471040"/>
-            <a:ext cx="5870424" cy="457559"/>
+            <a:off x="4915206" y="441324"/>
+            <a:ext cx="5860344" cy="518519"/>
           </a:xfrm>
           <a:prstGeom prst="rect">
             <a:avLst/>
@@ -8292,7 +9339,7 @@
               <a:defRPr/>
             </a:pPr>
             <a:r>
-              <a:rPr lang="en" sz="2400" b="1">
+              <a:rPr lang="en" sz="2800" b="1">
                 <a:solidFill>
                   <a:srgbClr val="0070C0"/>
                 </a:solidFill>
@@ -8300,9 +9347,9 @@
                 <a:ea typeface="DejaVu Sans Condensed"/>
                 <a:cs typeface="DejaVu Sans Condensed"/>
               </a:rPr>
-              <a:t>Replace temporary with invocation</a:t>
-            </a:r>
-            <a:endParaRPr>
+              <a:t>Extract Method - 1</a:t>
+            </a:r>
+            <a:endParaRPr b="1">
               <a:solidFill>
                 <a:srgbClr val="0070C0"/>
               </a:solidFill>
@@ -8312,14 +9359,14 @@
       </p:sp>
       <p:sp>
         <p:nvSpPr>
-          <p:cNvPr id="1961236756" name=""/>
+          <p:cNvPr id="1689386774" name=""/>
           <p:cNvSpPr txBox="1"/>
           <p:nvPr/>
         </p:nvSpPr>
         <p:spPr bwMode="auto">
           <a:xfrm rot="0" flipH="0" flipV="0">
-            <a:off x="351446" y="1362601"/>
-            <a:ext cx="11798655" cy="1641023"/>
+            <a:off x="457916" y="1160462"/>
+            <a:ext cx="11276167" cy="2524456"/>
           </a:xfrm>
           <a:prstGeom prst="roundRect">
             <a:avLst>
@@ -8355,7 +9402,7 @@
                 <a:ea typeface="Liberation Mono"/>
                 <a:cs typeface="Liberation Mono"/>
               </a:rPr>
-              <a:t>LocalDate today = LocalDate.now(clock);</a:t>
+              <a:t>for (Visit visit : monthVisits) {</a:t>
             </a:r>
             <a:endParaRPr sz="1400" b="0" i="0" u="none" strike="noStrike" cap="none" spc="0">
               <a:solidFill>
@@ -8378,7 +9425,7 @@
                 <a:ea typeface="Liberation Mono"/>
                 <a:cs typeface="Liberation Mono"/>
               </a:rPr>
-              <a:t>YearMonth nextMonth = YearMonth.from(today).plusMonths(1);</a:t>
+              <a:t>            LocalDate day = visit.getDate();</a:t>
             </a:r>
             <a:endParaRPr sz="1400" b="0" i="0" u="none" strike="noStrike" cap="none" spc="0">
               <a:solidFill>
@@ -8401,7 +9448,7 @@
                 <a:ea typeface="Liberation Mono"/>
                 <a:cs typeface="Liberation Mono"/>
               </a:rPr>
-              <a:t>int nextMonthValue = nextMonth.getMonthValue();</a:t>
+              <a:t>            List&lt;User&gt; availableVolunteers = new ArrayList&lt;&gt;();</a:t>
             </a:r>
             <a:endParaRPr sz="1400" b="0" i="0" u="none" strike="noStrike" cap="none" spc="0">
               <a:solidFill>
@@ -8415,6 +9462,18 @@
             <a:pPr>
               <a:defRPr/>
             </a:pPr>
+            <a:endParaRPr sz="1400" b="0" i="0" u="none" strike="noStrike" cap="none" spc="0">
+              <a:solidFill>
+                <a:schemeClr val="tx1"/>
+              </a:solidFill>
+              <a:latin typeface="Liberation Mono"/>
+              <a:cs typeface="Liberation Mono"/>
+            </a:endParaRPr>
+          </a:p>
+          <a:p>
+            <a:pPr>
+              <a:defRPr/>
+            </a:pPr>
             <a:r>
               <a:rPr lang="it-IT" sz="1400" b="0" i="0" u="none" strike="noStrike" cap="none" spc="0">
                 <a:solidFill>
@@ -8424,44 +9483,7 @@
                 <a:ea typeface="Liberation Mono"/>
                 <a:cs typeface="Liberation Mono"/>
               </a:rPr>
-              <a:t>int nextYear = nextMonth.getYear();</a:t>
-            </a:r>
-            <a:endParaRPr sz="1400">
-              <a:latin typeface="Liberation Mono"/>
-              <a:cs typeface="Liberation Mono"/>
-            </a:endParaRPr>
-          </a:p>
-          <a:p>
-            <a:pPr>
-              <a:defRPr/>
-            </a:pPr>
-            <a:r>
-              <a:rPr lang="en" sz="1400">
-                <a:latin typeface="Liberation Mono"/>
-                <a:ea typeface="Liberation Mono"/>
-                <a:cs typeface="Liberation Mono"/>
-              </a:rPr>
-              <a:t>...</a:t>
-            </a:r>
-            <a:endParaRPr sz="1400">
-              <a:latin typeface="Liberation Mono"/>
-              <a:cs typeface="Liberation Mono"/>
-            </a:endParaRPr>
-          </a:p>
-          <a:p>
-            <a:pPr>
-              <a:defRPr/>
-            </a:pPr>
-            <a:r>
-              <a:rPr lang="en" sz="1400" b="0" i="0" u="none" strike="noStrike" cap="none" spc="0">
-                <a:solidFill>
-                  <a:schemeClr val="tx1"/>
-                </a:solidFill>
-                <a:latin typeface="Liberation Mono"/>
-                <a:ea typeface="Liberation Mono"/>
-                <a:cs typeface="Liberation Mono"/>
-              </a:rPr>
-              <a:t>removeBlockedDates(nextMonthValue, nextYear);</a:t>
+              <a:t>            // aggiunge alla lista availableVolunteers tutti i volontari che hanno dato</a:t>
             </a:r>
             <a:endParaRPr sz="1400" b="0" i="0" u="none" strike="noStrike" cap="none" spc="0">
               <a:solidFill>
@@ -8476,15 +9498,130 @@
               <a:defRPr/>
             </a:pPr>
             <a:r>
-              <a:rPr lang="en" sz="1400" b="0" i="0" u="none" strike="noStrike" cap="none" spc="0">
-                <a:solidFill>
-                  <a:schemeClr val="tx1"/>
-                </a:solidFill>
-                <a:latin typeface="Liberation Mono"/>
-                <a:ea typeface="Liberation Mono"/>
-                <a:cs typeface="Liberation Mono"/>
-              </a:rPr>
-              <a:t>statePort.setVisitPlanCreated(nextMonthValue, nextYear, true);</a:t>
+              <a:rPr lang="it-IT" sz="1400" b="0" i="0" u="none" strike="noStrike" cap="none" spc="0">
+                <a:solidFill>
+                  <a:schemeClr val="tx1"/>
+                </a:solidFill>
+                <a:latin typeface="Liberation Mono"/>
+                <a:ea typeface="Liberation Mono"/>
+                <a:cs typeface="Liberation Mono"/>
+              </a:rPr>
+              <a:t>            // disponibilitá per il</a:t>
+            </a:r>
+            <a:endParaRPr sz="1400" b="0" i="0" u="none" strike="noStrike" cap="none" spc="0">
+              <a:solidFill>
+                <a:schemeClr val="tx1"/>
+              </a:solidFill>
+              <a:latin typeface="Liberation Mono"/>
+              <a:cs typeface="Liberation Mono"/>
+            </a:endParaRPr>
+          </a:p>
+          <a:p>
+            <a:pPr>
+              <a:defRPr/>
+            </a:pPr>
+            <a:r>
+              <a:rPr lang="it-IT" sz="1400" b="0" i="0" u="none" strike="noStrike" cap="none" spc="0">
+                <a:solidFill>
+                  <a:schemeClr val="tx1"/>
+                </a:solidFill>
+                <a:latin typeface="Liberation Mono"/>
+                <a:ea typeface="Liberation Mono"/>
+                <a:cs typeface="Liberation Mono"/>
+              </a:rPr>
+              <a:t>            // giorno 'day'</a:t>
+            </a:r>
+            <a:endParaRPr sz="1400" b="0" i="0" u="none" strike="noStrike" cap="none" spc="0">
+              <a:solidFill>
+                <a:schemeClr val="tx1"/>
+              </a:solidFill>
+              <a:latin typeface="Liberation Mono"/>
+              <a:cs typeface="Liberation Mono"/>
+            </a:endParaRPr>
+          </a:p>
+          <a:p>
+            <a:pPr>
+              <a:defRPr/>
+            </a:pPr>
+            <a:r>
+              <a:rPr lang="it-IT" sz="1400" b="0" i="0" u="none" strike="noStrike" cap="none" spc="0">
+                <a:solidFill>
+                  <a:schemeClr val="tx1"/>
+                </a:solidFill>
+                <a:latin typeface="Liberation Mono"/>
+                <a:ea typeface="Liberation Mono"/>
+                <a:cs typeface="Liberation Mono"/>
+              </a:rPr>
+              <a:t>            monthAvailabilities.stream().filter(av -&gt; av.getAvailableDate().equals(day)) //</a:t>
+            </a:r>
+            <a:endParaRPr sz="1400" b="0" i="0" u="none" strike="noStrike" cap="none" spc="0">
+              <a:solidFill>
+                <a:schemeClr val="tx1"/>
+              </a:solidFill>
+              <a:latin typeface="Liberation Mono"/>
+              <a:cs typeface="Liberation Mono"/>
+            </a:endParaRPr>
+          </a:p>
+          <a:p>
+            <a:pPr>
+              <a:defRPr/>
+            </a:pPr>
+            <a:r>
+              <a:rPr lang="it-IT" sz="1400" b="0" i="0" u="none" strike="noStrike" cap="none" spc="0">
+                <a:solidFill>
+                  <a:schemeClr val="tx1"/>
+                </a:solidFill>
+                <a:latin typeface="Liberation Mono"/>
+                <a:ea typeface="Liberation Mono"/>
+                <a:cs typeface="Liberation Mono"/>
+              </a:rPr>
+              <a:t>                    // mappa le disponibilitá VolunteerAvailableDate con gli oggetti USER volontari</a:t>
+            </a:r>
+            <a:endParaRPr sz="1400" b="0" i="0" u="none" strike="noStrike" cap="none" spc="0">
+              <a:solidFill>
+                <a:schemeClr val="tx1"/>
+              </a:solidFill>
+              <a:latin typeface="Liberation Mono"/>
+              <a:cs typeface="Liberation Mono"/>
+            </a:endParaRPr>
+          </a:p>
+          <a:p>
+            <a:pPr>
+              <a:defRPr/>
+            </a:pPr>
+            <a:r>
+              <a:rPr lang="it-IT" sz="1400" b="0" i="0" u="none" strike="noStrike" cap="none" spc="0">
+                <a:solidFill>
+                  <a:schemeClr val="tx1"/>
+                </a:solidFill>
+                <a:latin typeface="Liberation Mono"/>
+                <a:ea typeface="Liberation Mono"/>
+                <a:cs typeface="Liberation Mono"/>
+              </a:rPr>
+              <a:t>                    .map(av -&gt; volunteerById(av.getVolunteerId(), volunteers)) //</a:t>
+            </a:r>
+            <a:endParaRPr sz="1400" b="0" i="0" u="none" strike="noStrike" cap="none" spc="0">
+              <a:solidFill>
+                <a:schemeClr val="tx1"/>
+              </a:solidFill>
+              <a:latin typeface="Liberation Mono"/>
+              <a:cs typeface="Liberation Mono"/>
+            </a:endParaRPr>
+          </a:p>
+          <a:p>
+            <a:pPr>
+              <a:defRPr/>
+            </a:pPr>
+            <a:r>
+              <a:rPr lang="it-IT" sz="1400" b="0" i="0" u="none" strike="noStrike" cap="none" spc="0">
+                <a:solidFill>
+                  <a:schemeClr val="tx1"/>
+                </a:solidFill>
+                <a:latin typeface="Liberation Mono"/>
+                <a:ea typeface="Liberation Mono"/>
+                <a:cs typeface="Liberation Mono"/>
+              </a:rPr>
+              <a:t>                    .forEach(availableVolunteers::add);</a:t>
             </a:r>
             <a:endParaRPr/>
           </a:p>
@@ -8492,14 +9629,14 @@
       </p:sp>
       <p:sp>
         <p:nvSpPr>
-          <p:cNvPr id="1049275643" name=""/>
+          <p:cNvPr id="58203512" name=""/>
           <p:cNvSpPr txBox="1"/>
           <p:nvPr/>
         </p:nvSpPr>
         <p:spPr bwMode="auto">
           <a:xfrm rot="0" flipH="0" flipV="0">
-            <a:off x="351446" y="3553351"/>
-            <a:ext cx="11805134" cy="1199306"/>
+            <a:off x="457916" y="3827462"/>
+            <a:ext cx="11278686" cy="2966174"/>
           </a:xfrm>
           <a:prstGeom prst="roundRect">
             <a:avLst>
@@ -8527,15 +9664,15 @@
               <a:defRPr/>
             </a:pPr>
             <a:r>
-              <a:rPr lang="it-IT" sz="1400" b="0" i="0" u="none" strike="noStrike" cap="none" spc="0">
-                <a:solidFill>
-                  <a:schemeClr val="tx1"/>
-                </a:solidFill>
-                <a:latin typeface="Liberation Mono"/>
-                <a:ea typeface="Liberation Mono"/>
-                <a:cs typeface="Liberation Mono"/>
-              </a:rPr>
-              <a:t>LocalDate today = LocalDate.now(clock);</a:t>
+              <a:rPr lang="en" sz="1400" b="0" i="0" u="none" strike="noStrike" cap="none" spc="0">
+                <a:solidFill>
+                  <a:schemeClr val="tx1"/>
+                </a:solidFill>
+                <a:latin typeface="Liberation Mono"/>
+                <a:ea typeface="Liberation Mono"/>
+                <a:cs typeface="Liberation Mono"/>
+              </a:rPr>
+              <a:t>for (Visit visit : nextMonthSortedVisits) {</a:t>
             </a:r>
             <a:endParaRPr sz="1400" b="0" i="0" u="none" strike="noStrike" cap="none" spc="0">
               <a:solidFill>
@@ -8550,15 +9687,15 @@
               <a:defRPr/>
             </a:pPr>
             <a:r>
-              <a:rPr lang="it-IT" sz="1400" b="0" i="0" u="none" strike="noStrike" cap="none" spc="0">
-                <a:solidFill>
-                  <a:schemeClr val="tx1"/>
-                </a:solidFill>
-                <a:latin typeface="Liberation Mono"/>
-                <a:ea typeface="Liberation Mono"/>
-                <a:cs typeface="Liberation Mono"/>
-              </a:rPr>
-              <a:t>YearMonth nextMonth = YearMonth.from(today).plusMonths(1);</a:t>
+              <a:rPr lang="en" sz="1400" b="0" i="0" u="none" strike="noStrike" cap="none" spc="0">
+                <a:solidFill>
+                  <a:schemeClr val="tx1"/>
+                </a:solidFill>
+                <a:latin typeface="Liberation Mono"/>
+                <a:ea typeface="Liberation Mono"/>
+                <a:cs typeface="Liberation Mono"/>
+              </a:rPr>
+              <a:t>    List&lt;Integer&gt; availableVolunteerIds = </a:t>
             </a:r>
             <a:endParaRPr sz="1400" b="0" i="0" u="none" strike="noStrike" cap="none" spc="0">
               <a:solidFill>
@@ -8581,8 +9718,57 @@
                 <a:ea typeface="Liberation Mono"/>
                 <a:cs typeface="Liberation Mono"/>
               </a:rPr>
+              <a:t>	getAvailableVolunteersForVisitDate(visit, volunteerAvailabilitiesNextMonth);</a:t>
+            </a:r>
+            <a:endParaRPr sz="1400">
+              <a:latin typeface="Liberation Mono"/>
+              <a:cs typeface="Liberation Mono"/>
+            </a:endParaRPr>
+          </a:p>
+          <a:p>
+            <a:pPr>
+              <a:defRPr/>
+            </a:pPr>
+            <a:r>
+              <a:rPr lang="en" sz="1400" b="0" i="0" u="none" strike="noStrike" cap="none" spc="0">
+                <a:solidFill>
+                  <a:schemeClr val="tx1"/>
+                </a:solidFill>
+                <a:latin typeface="Liberation Mono"/>
+                <a:ea typeface="Liberation Mono"/>
+                <a:cs typeface="Liberation Mono"/>
+              </a:rPr>
               <a:t>...</a:t>
             </a:r>
+            <a:endParaRPr sz="1400">
+              <a:latin typeface="Liberation Mono"/>
+              <a:cs typeface="Liberation Mono"/>
+            </a:endParaRPr>
+          </a:p>
+          <a:p>
+            <a:pPr>
+              <a:defRPr/>
+            </a:pPr>
+            <a:endParaRPr sz="1400">
+              <a:latin typeface="Liberation Mono"/>
+              <a:cs typeface="Liberation Mono"/>
+            </a:endParaRPr>
+          </a:p>
+          <a:p>
+            <a:pPr>
+              <a:defRPr/>
+            </a:pPr>
+            <a:r>
+              <a:rPr lang="en" sz="1400" b="0" i="0" u="none" strike="noStrike" cap="none" spc="0">
+                <a:solidFill>
+                  <a:schemeClr val="tx1"/>
+                </a:solidFill>
+                <a:latin typeface="Liberation Mono"/>
+                <a:ea typeface="Liberation Mono"/>
+                <a:cs typeface="Liberation Mono"/>
+              </a:rPr>
+              <a:t>private List&lt;Integer&gt; getAvailableVolunteersForVisitDate(Visit visit, List&lt;VolunteerAvailableDate&gt; volunteerAvailabilitiesNextMonth) {</a:t>
+            </a:r>
             <a:endParaRPr sz="1400" b="0" i="0" u="none" strike="noStrike" cap="none" spc="0">
               <a:solidFill>
                 <a:schemeClr val="tx1"/>
@@ -8596,15 +9782,15 @@
               <a:defRPr/>
             </a:pPr>
             <a:r>
-              <a:rPr lang="it-IT" sz="1400" b="0" i="0" u="none" strike="noStrike" cap="none" spc="0">
-                <a:solidFill>
-                  <a:schemeClr val="tx1"/>
-                </a:solidFill>
-                <a:latin typeface="Liberation Mono"/>
-                <a:ea typeface="Liberation Mono"/>
-                <a:cs typeface="Liberation Mono"/>
-              </a:rPr>
-              <a:t>removeBlockedDatesFromSelectedMonth(nextMonth);</a:t>
+              <a:rPr lang="en" sz="1400" b="0" i="0" u="none" strike="noStrike" cap="none" spc="0">
+                <a:solidFill>
+                  <a:schemeClr val="tx1"/>
+                </a:solidFill>
+                <a:latin typeface="Liberation Mono"/>
+                <a:ea typeface="Liberation Mono"/>
+                <a:cs typeface="Liberation Mono"/>
+              </a:rPr>
+              <a:t>        return volunteerAvailabilitiesNextMonth.stream() //</a:t>
             </a:r>
             <a:endParaRPr sz="1400" b="0" i="0" u="none" strike="noStrike" cap="none" spc="0">
               <a:solidFill>
@@ -8619,17 +9805,192 @@
               <a:defRPr/>
             </a:pPr>
             <a:r>
-              <a:rPr lang="it-IT" sz="1400" b="0" i="0" u="none" strike="noStrike" cap="none" spc="0">
-                <a:solidFill>
-                  <a:schemeClr val="tx1"/>
-                </a:solidFill>
-                <a:latin typeface="Liberation Mono"/>
-                <a:ea typeface="Liberation Mono"/>
-                <a:cs typeface="Liberation Mono"/>
-              </a:rPr>
-              <a:t>statePort.setVisitPlanCreated(nextMonth.getMonthValue(), nextMonth.getYear(), true);</a:t>
-            </a:r>
-            <a:endParaRPr/>
+              <a:rPr lang="en" sz="1400" b="0" i="0" u="none" strike="noStrike" cap="none" spc="0">
+                <a:solidFill>
+                  <a:schemeClr val="tx1"/>
+                </a:solidFill>
+                <a:latin typeface="Liberation Mono"/>
+                <a:ea typeface="Liberation Mono"/>
+                <a:cs typeface="Liberation Mono"/>
+              </a:rPr>
+              <a:t>                .filter(volunteerAvailableDate -&gt; volunteerAvailableDate.getAvailableDate().equals(visit.getDate())) //</a:t>
+            </a:r>
+            <a:endParaRPr sz="1400" b="0" i="0" u="none" strike="noStrike" cap="none" spc="0">
+              <a:solidFill>
+                <a:schemeClr val="tx1"/>
+              </a:solidFill>
+              <a:latin typeface="Liberation Mono"/>
+              <a:cs typeface="Liberation Mono"/>
+            </a:endParaRPr>
+          </a:p>
+          <a:p>
+            <a:pPr>
+              <a:defRPr/>
+            </a:pPr>
+            <a:r>
+              <a:rPr lang="en" sz="1400" b="0" i="0" u="none" strike="noStrike" cap="none" spc="0">
+                <a:solidFill>
+                  <a:schemeClr val="tx1"/>
+                </a:solidFill>
+                <a:latin typeface="Liberation Mono"/>
+                <a:ea typeface="Liberation Mono"/>
+                <a:cs typeface="Liberation Mono"/>
+              </a:rPr>
+              <a:t>                .map(VolunteerAvailableDate::getVolunteerId) //</a:t>
+            </a:r>
+            <a:endParaRPr sz="1400" b="0" i="0" u="none" strike="noStrike" cap="none" spc="0">
+              <a:solidFill>
+                <a:schemeClr val="tx1"/>
+              </a:solidFill>
+              <a:latin typeface="Liberation Mono"/>
+              <a:cs typeface="Liberation Mono"/>
+            </a:endParaRPr>
+          </a:p>
+          <a:p>
+            <a:pPr>
+              <a:defRPr/>
+            </a:pPr>
+            <a:r>
+              <a:rPr lang="en" sz="1400" b="0" i="0" u="none" strike="noStrike" cap="none" spc="0">
+                <a:solidFill>
+                  <a:schemeClr val="tx1"/>
+                </a:solidFill>
+                <a:latin typeface="Liberation Mono"/>
+                <a:ea typeface="Liberation Mono"/>
+                <a:cs typeface="Liberation Mono"/>
+              </a:rPr>
+              <a:t>                .collect(Collectors.toList());</a:t>
+            </a:r>
+            <a:endParaRPr sz="1400" b="0" i="0" u="none" strike="noStrike" cap="none" spc="0">
+              <a:solidFill>
+                <a:schemeClr val="tx1"/>
+              </a:solidFill>
+              <a:latin typeface="Liberation Mono"/>
+              <a:cs typeface="Liberation Mono"/>
+            </a:endParaRPr>
+          </a:p>
+          <a:p>
+            <a:pPr>
+              <a:defRPr/>
+            </a:pPr>
+            <a:r>
+              <a:rPr lang="en" sz="1400" b="0" i="0" u="none" strike="noStrike" cap="none" spc="0">
+                <a:solidFill>
+                  <a:schemeClr val="tx1"/>
+                </a:solidFill>
+                <a:latin typeface="Liberation Mono"/>
+                <a:ea typeface="Liberation Mono"/>
+                <a:cs typeface="Liberation Mono"/>
+              </a:rPr>
+              <a:t>    }</a:t>
+            </a:r>
+            <a:endParaRPr sz="1800"/>
+          </a:p>
+        </p:txBody>
+      </p:sp>
+      <p:sp>
+        <p:nvSpPr>
+          <p:cNvPr id="1698375116" name=""/>
+          <p:cNvSpPr txBox="1"/>
+          <p:nvPr/>
+        </p:nvSpPr>
+        <p:spPr bwMode="auto">
+          <a:xfrm rot="0" flipH="0" flipV="0">
+            <a:off x="9679349" y="1269043"/>
+            <a:ext cx="1995238" cy="640440"/>
+          </a:xfrm>
+          <a:prstGeom prst="rect">
+            <a:avLst/>
+          </a:prstGeom>
+          <a:noFill/>
+        </p:spPr>
+        <p:txBody>
+          <a:bodyPr vertOverflow="overflow" horzOverflow="overflow" vert="horz" wrap="square" lIns="91440" tIns="45720" rIns="91440" bIns="45720" numCol="1" spcCol="0" rtlCol="0" fromWordArt="0" anchor="ctr" anchorCtr="0" forceAA="0" upright="0" compatLnSpc="0">
+            <a:spAutoFit/>
+          </a:bodyPr>
+          <a:p>
+            <a:pPr algn="ctr">
+              <a:defRPr/>
+            </a:pPr>
+            <a:r>
+              <a:rPr lang="en" sz="3600" b="1">
+                <a:ln w="6349">
+                  <a:solidFill>
+                    <a:srgbClr val="000000"/>
+                  </a:solidFill>
+                  <a:prstDash val="solid"/>
+                </a:ln>
+                <a:solidFill>
+                  <a:schemeClr val="accent2">
+                    <a:lumMod val="75000"/>
+                  </a:schemeClr>
+                </a:solidFill>
+                <a:latin typeface="Cantarell Extra Bold"/>
+                <a:ea typeface="Cantarell Extra Bold"/>
+                <a:cs typeface="Cantarell Extra Bold"/>
+              </a:rPr>
+              <a:t>PRIMA</a:t>
+            </a:r>
+            <a:endParaRPr>
+              <a:ln w="6349">
+                <a:solidFill>
+                  <a:schemeClr val="tx1"/>
+                </a:solidFill>
+                <a:prstDash val="solid"/>
+              </a:ln>
+            </a:endParaRPr>
+          </a:p>
+        </p:txBody>
+      </p:sp>
+      <p:sp>
+        <p:nvSpPr>
+          <p:cNvPr id="1482612164" name=""/>
+          <p:cNvSpPr txBox="1"/>
+          <p:nvPr/>
+        </p:nvSpPr>
+        <p:spPr bwMode="auto">
+          <a:xfrm rot="0" flipH="0" flipV="0">
+            <a:off x="9679349" y="3920157"/>
+            <a:ext cx="1998837" cy="640440"/>
+          </a:xfrm>
+          <a:prstGeom prst="rect">
+            <a:avLst/>
+          </a:prstGeom>
+          <a:noFill/>
+        </p:spPr>
+        <p:txBody>
+          <a:bodyPr vertOverflow="overflow" horzOverflow="overflow" vert="horz" wrap="square" lIns="91440" tIns="45720" rIns="91440" bIns="45720" numCol="1" spcCol="0" rtlCol="0" fromWordArt="0" anchor="ctr" anchorCtr="0" forceAA="0" upright="0" compatLnSpc="0">
+            <a:spAutoFit/>
+          </a:bodyPr>
+          <a:p>
+            <a:pPr algn="ctr">
+              <a:defRPr/>
+            </a:pPr>
+            <a:r>
+              <a:rPr lang="en" sz="3600" b="1">
+                <a:ln w="6349">
+                  <a:solidFill>
+                    <a:srgbClr val="000000"/>
+                  </a:solidFill>
+                  <a:prstDash val="solid"/>
+                </a:ln>
+                <a:solidFill>
+                  <a:srgbClr val="92D050"/>
+                </a:solidFill>
+                <a:latin typeface="Cantarell Extra Bold"/>
+                <a:ea typeface="Cantarell Extra Bold"/>
+                <a:cs typeface="Cantarell Extra Bold"/>
+              </a:rPr>
+              <a:t>DOPO</a:t>
+            </a:r>
+            <a:endParaRPr>
+              <a:ln w="6349">
+                <a:solidFill>
+                  <a:schemeClr val="tx1"/>
+                </a:solidFill>
+                <a:prstDash val="solid"/>
+              </a:ln>
+            </a:endParaRPr>
           </a:p>
         </p:txBody>
       </p:sp>
@@ -8668,7 +10029,7 @@
       </p:grpSpPr>
       <p:sp>
         <p:nvSpPr>
-          <p:cNvPr id="92236674" name="Titolo 1"/>
+          <p:cNvPr id="594542285" name="Titolo 1"/>
           <p:cNvSpPr>
             <a:spLocks noGrp="1"/>
           </p:cNvSpPr>
@@ -8713,7 +10074,7 @@
       </p:sp>
       <p:sp>
         <p:nvSpPr>
-          <p:cNvPr id="1218477545" name="Segnaposto contenuto 2"/>
+          <p:cNvPr id="324859497" name="Segnaposto contenuto 2"/>
           <p:cNvSpPr>
             <a:spLocks noGrp="1"/>
           </p:cNvSpPr>
@@ -8973,7 +10334,1656 @@
       </p:grpSpPr>
       <p:sp>
         <p:nvSpPr>
-          <p:cNvPr id="349249278" name="Titolo 1"/>
+          <p:cNvPr id="2068409532" name="Titolo 1"/>
+          <p:cNvSpPr>
+            <a:spLocks noGrp="1"/>
+          </p:cNvSpPr>
+          <p:nvPr>
+            <p:ph type="title"/>
+          </p:nvPr>
+        </p:nvSpPr>
+        <p:spPr bwMode="auto">
+          <a:xfrm>
+            <a:off x="838198" y="37802"/>
+            <a:ext cx="10515600" cy="1325562"/>
+          </a:xfrm>
+        </p:spPr>
+        <p:txBody>
+          <a:bodyPr/>
+          <a:lstStyle/>
+          <a:p>
+            <a:pPr>
+              <a:defRPr/>
+            </a:pPr>
+            <a:r>
+              <a:rPr lang="en" b="1">
+                <a:solidFill>
+                  <a:srgbClr val="0070C0"/>
+                </a:solidFill>
+                <a:latin typeface="Noto Sans"/>
+                <a:ea typeface="Noto Sans"/>
+                <a:cs typeface="Noto Sans"/>
+              </a:rPr>
+              <a:t>Refactoring</a:t>
+            </a:r>
+            <a:endParaRPr b="1">
+              <a:solidFill>
+                <a:srgbClr val="0070C0"/>
+              </a:solidFill>
+              <a:latin typeface="Noto Sans"/>
+              <a:cs typeface="Noto Sans"/>
+            </a:endParaRPr>
+          </a:p>
+        </p:txBody>
+      </p:sp>
+      <p:sp>
+        <p:nvSpPr>
+          <p:cNvPr id="17675352" name=""/>
+          <p:cNvSpPr txBox="1"/>
+          <p:nvPr/>
+        </p:nvSpPr>
+        <p:spPr bwMode="auto">
+          <a:xfrm rot="0" flipH="0" flipV="0">
+            <a:off x="4383448" y="471802"/>
+            <a:ext cx="7416345" cy="457559"/>
+          </a:xfrm>
+          <a:prstGeom prst="rect">
+            <a:avLst/>
+          </a:prstGeom>
+          <a:noFill/>
+        </p:spPr>
+        <p:txBody>
+          <a:bodyPr vertOverflow="overflow" horzOverflow="overflow" vert="horz" wrap="square" lIns="91440" tIns="45720" rIns="91440" bIns="45720" numCol="1" spcCol="0" rtlCol="0" fromWordArt="0" anchor="t" anchorCtr="0" forceAA="0" upright="0" compatLnSpc="0">
+            <a:spAutoFit/>
+          </a:bodyPr>
+          <a:p>
+            <a:pPr algn="ctr">
+              <a:defRPr/>
+            </a:pPr>
+            <a:r>
+              <a:rPr lang="en" sz="2400" b="1">
+                <a:solidFill>
+                  <a:srgbClr val="0070C0"/>
+                </a:solidFill>
+                <a:latin typeface="DejaVu Sans Condensed"/>
+                <a:ea typeface="DejaVu Sans Condensed"/>
+                <a:cs typeface="DejaVu Sans Condensed"/>
+              </a:rPr>
+              <a:t>Extract Method - 2 + semplificazione logica</a:t>
+            </a:r>
+            <a:endParaRPr sz="1400" b="1">
+              <a:solidFill>
+                <a:srgbClr val="0070C0"/>
+              </a:solidFill>
+            </a:endParaRPr>
+          </a:p>
+        </p:txBody>
+      </p:sp>
+      <p:sp>
+        <p:nvSpPr>
+          <p:cNvPr id="1873129134" name=""/>
+          <p:cNvSpPr txBox="1"/>
+          <p:nvPr/>
+        </p:nvSpPr>
+        <p:spPr bwMode="auto">
+          <a:xfrm rot="0" flipH="0" flipV="0">
+            <a:off x="457913" y="1160460"/>
+            <a:ext cx="11635248" cy="4291325"/>
+          </a:xfrm>
+          <a:prstGeom prst="roundRect">
+            <a:avLst>
+              <a:gd name="adj" fmla="val 5796"/>
+            </a:avLst>
+          </a:prstGeom>
+          <a:solidFill>
+            <a:schemeClr val="bg1">
+              <a:alpha val="49999"/>
+            </a:schemeClr>
+          </a:solidFill>
+          <a:ln w="12699">
+            <a:solidFill>
+              <a:schemeClr val="tx1"/>
+            </a:solidFill>
+            <a:prstDash val="solid"/>
+          </a:ln>
+        </p:spPr>
+        <p:txBody>
+          <a:bodyPr vertOverflow="overflow" horzOverflow="overflow" vert="horz" wrap="square" lIns="91440" tIns="45720" rIns="91440" bIns="45720" numCol="1" spcCol="0" rtlCol="0" fromWordArt="0" anchor="t" anchorCtr="0" forceAA="0" upright="0" compatLnSpc="0">
+            <a:spAutoFit/>
+          </a:bodyPr>
+          <a:p>
+            <a:pPr>
+              <a:defRPr/>
+            </a:pPr>
+            <a:r>
+              <a:rPr lang="it-IT" sz="1400" b="0" i="0" u="none" strike="noStrike" cap="none" spc="0">
+                <a:solidFill>
+                  <a:schemeClr val="tx1"/>
+                </a:solidFill>
+                <a:latin typeface="Liberation Mono"/>
+                <a:ea typeface="Liberation Mono"/>
+                <a:cs typeface="Liberation Mono"/>
+              </a:rPr>
+              <a:t>if (availableVolunteers.isEmpty()) {</a:t>
+            </a:r>
+            <a:endParaRPr sz="1400" b="0" i="0" u="none" strike="noStrike" cap="none" spc="0">
+              <a:solidFill>
+                <a:schemeClr val="tx1"/>
+              </a:solidFill>
+              <a:latin typeface="Liberation Mono"/>
+              <a:cs typeface="Liberation Mono"/>
+            </a:endParaRPr>
+          </a:p>
+          <a:p>
+            <a:pPr>
+              <a:defRPr/>
+            </a:pPr>
+            <a:r>
+              <a:rPr lang="it-IT" sz="1400" b="0" i="0" u="none" strike="noStrike" cap="none" spc="0">
+                <a:solidFill>
+                  <a:schemeClr val="tx1"/>
+                </a:solidFill>
+                <a:latin typeface="Liberation Mono"/>
+                <a:ea typeface="Liberation Mono"/>
+                <a:cs typeface="Liberation Mono"/>
+              </a:rPr>
+              <a:t>                visit.setVisitStatus(VisitStatus.CANCELLED);</a:t>
+            </a:r>
+            <a:endParaRPr sz="1400" b="0" i="0" u="none" strike="noStrike" cap="none" spc="0">
+              <a:solidFill>
+                <a:schemeClr val="tx1"/>
+              </a:solidFill>
+              <a:latin typeface="Liberation Mono"/>
+              <a:cs typeface="Liberation Mono"/>
+            </a:endParaRPr>
+          </a:p>
+          <a:p>
+            <a:pPr>
+              <a:defRPr/>
+            </a:pPr>
+            <a:r>
+              <a:rPr lang="it-IT" sz="1400" b="0" i="0" u="none" strike="noStrike" cap="none" spc="0">
+                <a:solidFill>
+                  <a:schemeClr val="tx1"/>
+                </a:solidFill>
+                <a:latin typeface="Liberation Mono"/>
+                <a:ea typeface="Liberation Mono"/>
+                <a:cs typeface="Liberation Mono"/>
+              </a:rPr>
+              <a:t>                visitRepository.save(visit);</a:t>
+            </a:r>
+            <a:endParaRPr sz="1400" b="0" i="0" u="none" strike="noStrike" cap="none" spc="0">
+              <a:solidFill>
+                <a:schemeClr val="tx1"/>
+              </a:solidFill>
+              <a:latin typeface="Liberation Mono"/>
+              <a:cs typeface="Liberation Mono"/>
+            </a:endParaRPr>
+          </a:p>
+          <a:p>
+            <a:pPr>
+              <a:defRPr/>
+            </a:pPr>
+            <a:r>
+              <a:rPr lang="it-IT" sz="1400" b="0" i="0" u="none" strike="noStrike" cap="none" spc="0">
+                <a:solidFill>
+                  <a:schemeClr val="tx1"/>
+                </a:solidFill>
+                <a:latin typeface="Liberation Mono"/>
+                <a:ea typeface="Liberation Mono"/>
+                <a:cs typeface="Liberation Mono"/>
+              </a:rPr>
+              <a:t>                continue; // passa alla visita successiva</a:t>
+            </a:r>
+            <a:endParaRPr sz="1400" b="0" i="0" u="none" strike="noStrike" cap="none" spc="0">
+              <a:solidFill>
+                <a:schemeClr val="tx1"/>
+              </a:solidFill>
+              <a:latin typeface="Liberation Mono"/>
+              <a:cs typeface="Liberation Mono"/>
+            </a:endParaRPr>
+          </a:p>
+          <a:p>
+            <a:pPr>
+              <a:defRPr/>
+            </a:pPr>
+            <a:r>
+              <a:rPr lang="it-IT" sz="1400" b="0" i="0" u="none" strike="noStrike" cap="none" spc="0">
+                <a:solidFill>
+                  <a:schemeClr val="tx1"/>
+                </a:solidFill>
+                <a:latin typeface="Liberation Mono"/>
+                <a:ea typeface="Liberation Mono"/>
+                <a:cs typeface="Liberation Mono"/>
+              </a:rPr>
+              <a:t>            } else if (availableVolunteers.size() == 1) {</a:t>
+            </a:r>
+            <a:endParaRPr sz="1400" b="0" i="0" u="none" strike="noStrike" cap="none" spc="0">
+              <a:solidFill>
+                <a:schemeClr val="tx1"/>
+              </a:solidFill>
+              <a:latin typeface="Liberation Mono"/>
+              <a:cs typeface="Liberation Mono"/>
+            </a:endParaRPr>
+          </a:p>
+          <a:p>
+            <a:pPr>
+              <a:defRPr/>
+            </a:pPr>
+            <a:r>
+              <a:rPr lang="it-IT" sz="1400" b="0" i="0" u="none" strike="noStrike" cap="none" spc="0">
+                <a:solidFill>
+                  <a:schemeClr val="tx1"/>
+                </a:solidFill>
+                <a:latin typeface="Liberation Mono"/>
+                <a:ea typeface="Liberation Mono"/>
+                <a:cs typeface="Liberation Mono"/>
+              </a:rPr>
+              <a:t>                User volunteer = availableVolunteers.getFirst();</a:t>
+            </a:r>
+            <a:endParaRPr sz="1400" b="0" i="0" u="none" strike="noStrike" cap="none" spc="0">
+              <a:solidFill>
+                <a:schemeClr val="tx1"/>
+              </a:solidFill>
+              <a:latin typeface="Liberation Mono"/>
+              <a:cs typeface="Liberation Mono"/>
+            </a:endParaRPr>
+          </a:p>
+          <a:p>
+            <a:pPr>
+              <a:defRPr/>
+            </a:pPr>
+            <a:r>
+              <a:rPr lang="it-IT" sz="1400" b="0" i="0" u="none" strike="noStrike" cap="none" spc="0">
+                <a:solidFill>
+                  <a:schemeClr val="tx1"/>
+                </a:solidFill>
+                <a:latin typeface="Liberation Mono"/>
+                <a:ea typeface="Liberation Mono"/>
+                <a:cs typeface="Liberation Mono"/>
+              </a:rPr>
+              <a:t>                if (canDoVisitType(volunteer, visit.getVisitType().getId()))</a:t>
+            </a:r>
+            <a:endParaRPr sz="1400" b="0" i="0" u="none" strike="noStrike" cap="none" spc="0">
+              <a:solidFill>
+                <a:schemeClr val="tx1"/>
+              </a:solidFill>
+              <a:latin typeface="Liberation Mono"/>
+              <a:cs typeface="Liberation Mono"/>
+            </a:endParaRPr>
+          </a:p>
+          <a:p>
+            <a:pPr>
+              <a:defRPr/>
+            </a:pPr>
+            <a:r>
+              <a:rPr lang="it-IT" sz="1400" b="0" i="0" u="none" strike="noStrike" cap="none" spc="0">
+                <a:solidFill>
+                  <a:schemeClr val="tx1"/>
+                </a:solidFill>
+                <a:latin typeface="Liberation Mono"/>
+                <a:ea typeface="Liberation Mono"/>
+                <a:cs typeface="Liberation Mono"/>
+              </a:rPr>
+              <a:t>                    assignVolunteerToVisit(volunteer, visit, monthAvailabilities, volunteerVisitCounts);</a:t>
+            </a:r>
+            <a:endParaRPr sz="1400" b="0" i="0" u="none" strike="noStrike" cap="none" spc="0">
+              <a:solidFill>
+                <a:schemeClr val="tx1"/>
+              </a:solidFill>
+              <a:latin typeface="Liberation Mono"/>
+              <a:cs typeface="Liberation Mono"/>
+            </a:endParaRPr>
+          </a:p>
+          <a:p>
+            <a:pPr>
+              <a:defRPr/>
+            </a:pPr>
+            <a:r>
+              <a:rPr lang="it-IT" sz="1400" b="0" i="0" u="none" strike="noStrike" cap="none" spc="0">
+                <a:solidFill>
+                  <a:schemeClr val="tx1"/>
+                </a:solidFill>
+                <a:latin typeface="Liberation Mono"/>
+                <a:ea typeface="Liberation Mono"/>
+                <a:cs typeface="Liberation Mono"/>
+              </a:rPr>
+              <a:t>                else {</a:t>
+            </a:r>
+            <a:endParaRPr sz="1400" b="0" i="0" u="none" strike="noStrike" cap="none" spc="0">
+              <a:solidFill>
+                <a:schemeClr val="tx1"/>
+              </a:solidFill>
+              <a:latin typeface="Liberation Mono"/>
+              <a:cs typeface="Liberation Mono"/>
+            </a:endParaRPr>
+          </a:p>
+          <a:p>
+            <a:pPr>
+              <a:defRPr/>
+            </a:pPr>
+            <a:r>
+              <a:rPr lang="it-IT" sz="1400" b="0" i="0" u="none" strike="noStrike" cap="none" spc="0">
+                <a:solidFill>
+                  <a:schemeClr val="tx1"/>
+                </a:solidFill>
+                <a:latin typeface="Liberation Mono"/>
+                <a:ea typeface="Liberation Mono"/>
+                <a:cs typeface="Liberation Mono"/>
+              </a:rPr>
+              <a:t>                    visit.setVisitStatus(VisitStatus.CANCELLED);</a:t>
+            </a:r>
+            <a:endParaRPr sz="1400" b="0" i="0" u="none" strike="noStrike" cap="none" spc="0">
+              <a:solidFill>
+                <a:schemeClr val="tx1"/>
+              </a:solidFill>
+              <a:latin typeface="Liberation Mono"/>
+              <a:cs typeface="Liberation Mono"/>
+            </a:endParaRPr>
+          </a:p>
+          <a:p>
+            <a:pPr>
+              <a:defRPr/>
+            </a:pPr>
+            <a:r>
+              <a:rPr lang="it-IT" sz="1400" b="0" i="0" u="none" strike="noStrike" cap="none" spc="0">
+                <a:solidFill>
+                  <a:schemeClr val="tx1"/>
+                </a:solidFill>
+                <a:latin typeface="Liberation Mono"/>
+                <a:ea typeface="Liberation Mono"/>
+                <a:cs typeface="Liberation Mono"/>
+              </a:rPr>
+              <a:t>                    visitRepository.save(visit);</a:t>
+            </a:r>
+            <a:endParaRPr sz="1400" b="0" i="0" u="none" strike="noStrike" cap="none" spc="0">
+              <a:solidFill>
+                <a:schemeClr val="tx1"/>
+              </a:solidFill>
+              <a:latin typeface="Liberation Mono"/>
+              <a:cs typeface="Liberation Mono"/>
+            </a:endParaRPr>
+          </a:p>
+          <a:p>
+            <a:pPr>
+              <a:defRPr/>
+            </a:pPr>
+            <a:r>
+              <a:rPr lang="it-IT" sz="1400" b="0" i="0" u="none" strike="noStrike" cap="none" spc="0">
+                <a:solidFill>
+                  <a:schemeClr val="tx1"/>
+                </a:solidFill>
+                <a:latin typeface="Liberation Mono"/>
+                <a:ea typeface="Liberation Mono"/>
+                <a:cs typeface="Liberation Mono"/>
+              </a:rPr>
+              <a:t>                }</a:t>
+            </a:r>
+            <a:endParaRPr sz="1400" b="0" i="0" u="none" strike="noStrike" cap="none" spc="0">
+              <a:solidFill>
+                <a:schemeClr val="tx1"/>
+              </a:solidFill>
+              <a:latin typeface="Liberation Mono"/>
+              <a:cs typeface="Liberation Mono"/>
+            </a:endParaRPr>
+          </a:p>
+          <a:p>
+            <a:pPr>
+              <a:defRPr/>
+            </a:pPr>
+            <a:r>
+              <a:rPr lang="it-IT" sz="1400" b="0" i="0" u="none" strike="noStrike" cap="none" spc="0">
+                <a:solidFill>
+                  <a:schemeClr val="tx1"/>
+                </a:solidFill>
+                <a:latin typeface="Liberation Mono"/>
+                <a:ea typeface="Liberation Mono"/>
+                <a:cs typeface="Liberation Mono"/>
+              </a:rPr>
+              <a:t>                continue; // passa alla visita successiva</a:t>
+            </a:r>
+            <a:endParaRPr sz="1400" b="0" i="0" u="none" strike="noStrike" cap="none" spc="0">
+              <a:solidFill>
+                <a:schemeClr val="tx1"/>
+              </a:solidFill>
+              <a:latin typeface="Liberation Mono"/>
+              <a:cs typeface="Liberation Mono"/>
+            </a:endParaRPr>
+          </a:p>
+          <a:p>
+            <a:pPr>
+              <a:defRPr/>
+            </a:pPr>
+            <a:r>
+              <a:rPr lang="it-IT" sz="1400" b="0" i="0" u="none" strike="noStrike" cap="none" spc="0">
+                <a:solidFill>
+                  <a:schemeClr val="tx1"/>
+                </a:solidFill>
+                <a:latin typeface="Liberation Mono"/>
+                <a:ea typeface="Liberation Mono"/>
+                <a:cs typeface="Liberation Mono"/>
+              </a:rPr>
+              <a:t>            }</a:t>
+            </a:r>
+            <a:endParaRPr sz="1400" b="0" i="0" u="none" strike="noStrike" cap="none" spc="0">
+              <a:solidFill>
+                <a:schemeClr val="tx1"/>
+              </a:solidFill>
+              <a:latin typeface="Liberation Mono"/>
+              <a:cs typeface="Liberation Mono"/>
+            </a:endParaRPr>
+          </a:p>
+          <a:p>
+            <a:pPr>
+              <a:defRPr/>
+            </a:pPr>
+            <a:r>
+              <a:rPr lang="it-IT" sz="1400" b="0" i="0" u="none" strike="noStrike" cap="none" spc="0">
+                <a:solidFill>
+                  <a:schemeClr val="tx1"/>
+                </a:solidFill>
+                <a:latin typeface="Liberation Mono"/>
+                <a:ea typeface="Liberation Mono"/>
+                <a:cs typeface="Liberation Mono"/>
+              </a:rPr>
+              <a:t>            // piú di 2 volontari con disponibilitá nel giorno considerato</a:t>
+            </a:r>
+            <a:endParaRPr sz="1400" b="0" i="0" u="none" strike="noStrike" cap="none" spc="0">
+              <a:solidFill>
+                <a:schemeClr val="tx1"/>
+              </a:solidFill>
+              <a:latin typeface="Liberation Mono"/>
+              <a:cs typeface="Liberation Mono"/>
+            </a:endParaRPr>
+          </a:p>
+          <a:p>
+            <a:pPr>
+              <a:defRPr/>
+            </a:pPr>
+            <a:r>
+              <a:rPr lang="it-IT" sz="1400" b="0" i="0" u="none" strike="noStrike" cap="none" spc="0">
+                <a:solidFill>
+                  <a:schemeClr val="tx1"/>
+                </a:solidFill>
+                <a:latin typeface="Liberation Mono"/>
+                <a:ea typeface="Liberation Mono"/>
+                <a:cs typeface="Liberation Mono"/>
+              </a:rPr>
+              <a:t>            User bestVolunteer = selectBestVolunteer(availableVolunteers, volunteerVisitCounts);</a:t>
+            </a:r>
+            <a:endParaRPr sz="1400" b="0" i="0" u="none" strike="noStrike" cap="none" spc="0">
+              <a:solidFill>
+                <a:schemeClr val="tx1"/>
+              </a:solidFill>
+              <a:latin typeface="Liberation Mono"/>
+              <a:cs typeface="Liberation Mono"/>
+            </a:endParaRPr>
+          </a:p>
+          <a:p>
+            <a:pPr>
+              <a:defRPr/>
+            </a:pPr>
+            <a:r>
+              <a:rPr lang="it-IT" sz="1400" b="0" i="0" u="none" strike="noStrike" cap="none" spc="0">
+                <a:solidFill>
+                  <a:schemeClr val="tx1"/>
+                </a:solidFill>
+                <a:latin typeface="Liberation Mono"/>
+                <a:ea typeface="Liberation Mono"/>
+                <a:cs typeface="Liberation Mono"/>
+              </a:rPr>
+              <a:t>            assignVolunteerToVisit(bestVolunteer, visit, monthAvailabilities, volunteerVisitCounts);</a:t>
+            </a:r>
+            <a:endParaRPr sz="1400" b="0" i="0" u="none" strike="noStrike" cap="none" spc="0">
+              <a:solidFill>
+                <a:schemeClr val="tx1"/>
+              </a:solidFill>
+              <a:latin typeface="Liberation Mono"/>
+              <a:cs typeface="Liberation Mono"/>
+            </a:endParaRPr>
+          </a:p>
+          <a:p>
+            <a:pPr>
+              <a:defRPr/>
+            </a:pPr>
+            <a:r>
+              <a:rPr lang="it-IT" sz="1400" b="0" i="0" u="none" strike="noStrike" cap="none" spc="0">
+                <a:solidFill>
+                  <a:schemeClr val="tx1"/>
+                </a:solidFill>
+                <a:latin typeface="Liberation Mono"/>
+                <a:ea typeface="Liberation Mono"/>
+                <a:cs typeface="Liberation Mono"/>
+              </a:rPr>
+              <a:t>        }</a:t>
+            </a:r>
+            <a:endParaRPr lang="it-IT" sz="1400" b="0" i="0" u="none" strike="noStrike" cap="none" spc="0">
+              <a:solidFill>
+                <a:schemeClr val="tx1"/>
+              </a:solidFill>
+              <a:latin typeface="Liberation Mono"/>
+              <a:ea typeface="Liberation Mono"/>
+              <a:cs typeface="Liberation Mono"/>
+            </a:endParaRPr>
+          </a:p>
+          <a:p>
+            <a:pPr>
+              <a:defRPr/>
+            </a:pPr>
+            <a:r>
+              <a:rPr lang="en" sz="1400" b="0" i="0" u="none" strike="noStrike" cap="none" spc="0">
+                <a:solidFill>
+                  <a:schemeClr val="tx1"/>
+                </a:solidFill>
+                <a:latin typeface="Liberation Mono"/>
+                <a:ea typeface="Liberation Mono"/>
+                <a:cs typeface="Liberation Mono"/>
+              </a:rPr>
+              <a:t>...</a:t>
+            </a:r>
+            <a:endParaRPr/>
+          </a:p>
+        </p:txBody>
+      </p:sp>
+      <p:sp>
+        <p:nvSpPr>
+          <p:cNvPr id="1625665772" name=""/>
+          <p:cNvSpPr txBox="1"/>
+          <p:nvPr/>
+        </p:nvSpPr>
+        <p:spPr bwMode="auto">
+          <a:xfrm rot="0" flipH="0" flipV="0">
+            <a:off x="9679349" y="1269223"/>
+            <a:ext cx="1995597" cy="640440"/>
+          </a:xfrm>
+          <a:prstGeom prst="rect">
+            <a:avLst/>
+          </a:prstGeom>
+          <a:noFill/>
+        </p:spPr>
+        <p:txBody>
+          <a:bodyPr vertOverflow="overflow" horzOverflow="overflow" vert="horz" wrap="square" lIns="91440" tIns="45720" rIns="91440" bIns="45720" numCol="1" spcCol="0" rtlCol="0" fromWordArt="0" anchor="ctr" anchorCtr="0" forceAA="0" upright="0" compatLnSpc="0">
+            <a:spAutoFit/>
+          </a:bodyPr>
+          <a:p>
+            <a:pPr algn="ctr">
+              <a:defRPr/>
+            </a:pPr>
+            <a:r>
+              <a:rPr lang="en" sz="3600" b="1">
+                <a:ln w="6349">
+                  <a:solidFill>
+                    <a:srgbClr val="000000"/>
+                  </a:solidFill>
+                  <a:prstDash val="solid"/>
+                </a:ln>
+                <a:solidFill>
+                  <a:schemeClr val="accent2">
+                    <a:lumMod val="75000"/>
+                  </a:schemeClr>
+                </a:solidFill>
+                <a:latin typeface="Cantarell Extra Bold"/>
+                <a:ea typeface="Cantarell Extra Bold"/>
+                <a:cs typeface="Cantarell Extra Bold"/>
+              </a:rPr>
+              <a:t>PRIMA</a:t>
+            </a:r>
+            <a:endParaRPr>
+              <a:ln w="6349">
+                <a:solidFill>
+                  <a:schemeClr val="tx1"/>
+                </a:solidFill>
+                <a:prstDash val="solid"/>
+              </a:ln>
+            </a:endParaRPr>
+          </a:p>
+        </p:txBody>
+      </p:sp>
+    </p:spTree>
+  </p:cSld>
+  <p:clrMapOvr>
+    <a:masterClrMapping/>
+  </p:clrMapOvr>
+  <mc:AlternateContent xmlns:mc="http://schemas.openxmlformats.org/markup-compatibility/2006">
+    <mc:Choice xmlns:p159="http://schemas.microsoft.com/office/powerpoint/2015/09/main" xmlns:p14="http://schemas.microsoft.com/office/powerpoint/2010/main" Requires="p159">
+      <p:transition p14:dur="2000" advClick="1"/>
+    </mc:Choice>
+    <mc:Fallback>
+      <p:transition advClick="1"/>
+    </mc:Fallback>
+  </mc:AlternateContent>
+</p:sld>
+</file>
+
+<file path=ppt/slides/slide21.xml><?xml version="1.0" encoding="utf-8"?>
+<p:sld xmlns:a="http://schemas.openxmlformats.org/drawingml/2006/main" xmlns:r="http://schemas.openxmlformats.org/officeDocument/2006/relationships" xmlns:p="http://schemas.openxmlformats.org/presentationml/2006/main" xmlns:m="http://schemas.openxmlformats.org/officeDocument/2006/math" xmlns:w="http://schemas.openxmlformats.org/wordprocessingml/2006/main" xmlns:mc="http://schemas.openxmlformats.org/markup-compatibility/2006" showMasterPhAnim="0" showMasterSp="1" show="1">
+  <p:cSld name="">
+    <p:spTree>
+      <p:nvGrpSpPr>
+        <p:cNvPr id="1" name=""/>
+        <p:cNvGrpSpPr/>
+        <p:nvPr/>
+      </p:nvGrpSpPr>
+      <p:grpSpPr bwMode="auto">
+        <a:xfrm>
+          <a:off x="0" y="0"/>
+          <a:ext cx="0" cy="0"/>
+          <a:chOff x="0" y="0"/>
+          <a:chExt cx="0" cy="0"/>
+        </a:xfrm>
+      </p:grpSpPr>
+      <p:sp>
+        <p:nvSpPr>
+          <p:cNvPr id="449234049" name="Titolo 1"/>
+          <p:cNvSpPr>
+            <a:spLocks noGrp="1"/>
+          </p:cNvSpPr>
+          <p:nvPr>
+            <p:ph type="title"/>
+          </p:nvPr>
+        </p:nvSpPr>
+        <p:spPr bwMode="auto">
+          <a:xfrm>
+            <a:off x="838198" y="37801"/>
+            <a:ext cx="10515600" cy="1325561"/>
+          </a:xfrm>
+        </p:spPr>
+        <p:txBody>
+          <a:bodyPr/>
+          <a:lstStyle/>
+          <a:p>
+            <a:pPr>
+              <a:defRPr/>
+            </a:pPr>
+            <a:r>
+              <a:rPr lang="en" b="1">
+                <a:solidFill>
+                  <a:srgbClr val="0070C0"/>
+                </a:solidFill>
+                <a:latin typeface="Noto Sans"/>
+                <a:ea typeface="Noto Sans"/>
+                <a:cs typeface="Noto Sans"/>
+              </a:rPr>
+              <a:t>Refactoring</a:t>
+            </a:r>
+            <a:endParaRPr/>
+          </a:p>
+        </p:txBody>
+      </p:sp>
+      <p:sp>
+        <p:nvSpPr>
+          <p:cNvPr id="1225781845" name=""/>
+          <p:cNvSpPr txBox="1"/>
+          <p:nvPr/>
+        </p:nvSpPr>
+        <p:spPr bwMode="auto">
+          <a:xfrm rot="0" flipH="0" flipV="0">
+            <a:off x="457913" y="1160460"/>
+            <a:ext cx="11637768" cy="3407891"/>
+          </a:xfrm>
+          <a:prstGeom prst="roundRect">
+            <a:avLst>
+              <a:gd name="adj" fmla="val 5796"/>
+            </a:avLst>
+          </a:prstGeom>
+          <a:solidFill>
+            <a:schemeClr val="bg1">
+              <a:alpha val="49999"/>
+            </a:schemeClr>
+          </a:solidFill>
+          <a:ln w="12699">
+            <a:solidFill>
+              <a:schemeClr val="tx1"/>
+            </a:solidFill>
+            <a:prstDash val="solid"/>
+          </a:ln>
+        </p:spPr>
+        <p:txBody>
+          <a:bodyPr vertOverflow="overflow" horzOverflow="overflow" vert="horz" wrap="square" lIns="91440" tIns="45720" rIns="91440" bIns="45720" numCol="1" spcCol="0" rtlCol="0" fromWordArt="0" anchor="t" anchorCtr="0" forceAA="0" upright="0" compatLnSpc="0">
+            <a:spAutoFit/>
+          </a:bodyPr>
+          <a:p>
+            <a:pPr>
+              <a:defRPr/>
+            </a:pPr>
+            <a:r>
+              <a:rPr lang="it-IT" sz="1400" b="0" i="0" u="none" strike="noStrike" cap="none" spc="0">
+                <a:solidFill>
+                  <a:schemeClr val="tx1"/>
+                </a:solidFill>
+                <a:latin typeface="Liberation Mono"/>
+                <a:ea typeface="Liberation Mono"/>
+                <a:cs typeface="Liberation Mono"/>
+              </a:rPr>
+              <a:t>for (Visit visit : nextMonthSortedVisits) {</a:t>
+            </a:r>
+            <a:endParaRPr lang="it-IT" sz="1400" b="0" i="0" u="none" strike="noStrike" cap="none" spc="0">
+              <a:solidFill>
+                <a:schemeClr val="tx1"/>
+              </a:solidFill>
+              <a:latin typeface="Liberation Mono"/>
+              <a:ea typeface="Liberation Mono"/>
+              <a:cs typeface="Liberation Mono"/>
+            </a:endParaRPr>
+          </a:p>
+          <a:p>
+            <a:pPr>
+              <a:defRPr/>
+            </a:pPr>
+            <a:r>
+              <a:rPr lang="it-IT" sz="1400" b="0" i="0" u="none" strike="noStrike" cap="none" spc="0">
+                <a:solidFill>
+                  <a:schemeClr val="tx1"/>
+                </a:solidFill>
+                <a:latin typeface="Liberation Mono"/>
+                <a:ea typeface="Liberation Mono"/>
+                <a:cs typeface="Liberation Mono"/>
+              </a:rPr>
+              <a:t>            List&lt;Integer&gt; availableVolunteerIds = getAvailableVolunteersForVisitDate(visit, volunteerAvailabilitiesNextMonth);</a:t>
+            </a:r>
+            <a:endParaRPr sz="1400" b="0" i="0" u="none" strike="noStrike" cap="none" spc="0">
+              <a:solidFill>
+                <a:schemeClr val="tx1"/>
+              </a:solidFill>
+              <a:latin typeface="Liberation Mono"/>
+              <a:cs typeface="Liberation Mono"/>
+            </a:endParaRPr>
+          </a:p>
+          <a:p>
+            <a:pPr>
+              <a:defRPr/>
+            </a:pPr>
+            <a:endParaRPr sz="1400" b="0" i="0" u="none" strike="noStrike" cap="none" spc="0">
+              <a:solidFill>
+                <a:schemeClr val="tx1"/>
+              </a:solidFill>
+              <a:latin typeface="Liberation Mono"/>
+              <a:cs typeface="Liberation Mono"/>
+            </a:endParaRPr>
+          </a:p>
+          <a:p>
+            <a:pPr>
+              <a:defRPr/>
+            </a:pPr>
+            <a:r>
+              <a:rPr lang="it-IT" sz="1400" b="0" i="0" u="none" strike="noStrike" cap="none" spc="0">
+                <a:solidFill>
+                  <a:schemeClr val="tx1"/>
+                </a:solidFill>
+                <a:latin typeface="Liberation Mono"/>
+                <a:ea typeface="Liberation Mono"/>
+                <a:cs typeface="Liberation Mono"/>
+              </a:rPr>
+              <a:t>            if (availableVolunteerIds.isEmpty()) {</a:t>
+            </a:r>
+            <a:endParaRPr sz="1400" b="0" i="0" u="none" strike="noStrike" cap="none" spc="0">
+              <a:solidFill>
+                <a:schemeClr val="tx1"/>
+              </a:solidFill>
+              <a:latin typeface="Liberation Mono"/>
+              <a:cs typeface="Liberation Mono"/>
+            </a:endParaRPr>
+          </a:p>
+          <a:p>
+            <a:pPr>
+              <a:defRPr/>
+            </a:pPr>
+            <a:r>
+              <a:rPr lang="it-IT" sz="1400" b="0" i="0" u="none" strike="noStrike" cap="none" spc="0">
+                <a:solidFill>
+                  <a:schemeClr val="tx1"/>
+                </a:solidFill>
+                <a:latin typeface="Liberation Mono"/>
+                <a:ea typeface="Liberation Mono"/>
+                <a:cs typeface="Liberation Mono"/>
+              </a:rPr>
+              <a:t>                setVisitStatusToCancelled(visit);</a:t>
+            </a:r>
+            <a:endParaRPr sz="1400" b="0" i="0" u="none" strike="noStrike" cap="none" spc="0">
+              <a:solidFill>
+                <a:schemeClr val="tx1"/>
+              </a:solidFill>
+              <a:latin typeface="Liberation Mono"/>
+              <a:cs typeface="Liberation Mono"/>
+            </a:endParaRPr>
+          </a:p>
+          <a:p>
+            <a:pPr>
+              <a:defRPr/>
+            </a:pPr>
+            <a:r>
+              <a:rPr lang="it-IT" sz="1400" b="0" i="0" u="none" strike="noStrike" cap="none" spc="0">
+                <a:solidFill>
+                  <a:schemeClr val="tx1"/>
+                </a:solidFill>
+                <a:latin typeface="Liberation Mono"/>
+                <a:ea typeface="Liberation Mono"/>
+                <a:cs typeface="Liberation Mono"/>
+              </a:rPr>
+              <a:t>            } else if (availableVolunteerIds.size() == 1) {</a:t>
+            </a:r>
+            <a:endParaRPr sz="1400" b="0" i="0" u="none" strike="noStrike" cap="none" spc="0">
+              <a:solidFill>
+                <a:schemeClr val="tx1"/>
+              </a:solidFill>
+              <a:latin typeface="Liberation Mono"/>
+              <a:cs typeface="Liberation Mono"/>
+            </a:endParaRPr>
+          </a:p>
+          <a:p>
+            <a:pPr>
+              <a:defRPr/>
+            </a:pPr>
+            <a:r>
+              <a:rPr lang="it-IT" sz="1400" b="0" i="0" u="none" strike="noStrike" cap="none" spc="0">
+                <a:solidFill>
+                  <a:schemeClr val="tx1"/>
+                </a:solidFill>
+                <a:latin typeface="Liberation Mono"/>
+                <a:ea typeface="Liberation Mono"/>
+                <a:cs typeface="Liberation Mono"/>
+              </a:rPr>
+              <a:t>                assignAvailableVolunteerToVisitIfPossible(visit, availableVolunteerIds, volunteerAvailabilitiesNextMonth, volunteerIdWithVisitCounts);</a:t>
+            </a:r>
+            <a:endParaRPr sz="1400" b="0" i="0" u="none" strike="noStrike" cap="none" spc="0">
+              <a:solidFill>
+                <a:schemeClr val="tx1"/>
+              </a:solidFill>
+              <a:latin typeface="Liberation Mono"/>
+              <a:cs typeface="Liberation Mono"/>
+            </a:endParaRPr>
+          </a:p>
+          <a:p>
+            <a:pPr>
+              <a:defRPr/>
+            </a:pPr>
+            <a:r>
+              <a:rPr lang="it-IT" sz="1400" b="0" i="0" u="none" strike="noStrike" cap="none" spc="0">
+                <a:solidFill>
+                  <a:schemeClr val="tx1"/>
+                </a:solidFill>
+                <a:latin typeface="Liberation Mono"/>
+                <a:ea typeface="Liberation Mono"/>
+                <a:cs typeface="Liberation Mono"/>
+              </a:rPr>
+              <a:t>            } else {</a:t>
+            </a:r>
+            <a:endParaRPr sz="1400" b="0" i="0" u="none" strike="noStrike" cap="none" spc="0">
+              <a:solidFill>
+                <a:schemeClr val="tx1"/>
+              </a:solidFill>
+              <a:latin typeface="Liberation Mono"/>
+              <a:cs typeface="Liberation Mono"/>
+            </a:endParaRPr>
+          </a:p>
+          <a:p>
+            <a:pPr>
+              <a:defRPr/>
+            </a:pPr>
+            <a:r>
+              <a:rPr lang="it-IT" sz="1400" b="0" i="0" u="none" strike="noStrike" cap="none" spc="0">
+                <a:solidFill>
+                  <a:schemeClr val="tx1"/>
+                </a:solidFill>
+                <a:latin typeface="Liberation Mono"/>
+                <a:ea typeface="Liberation Mono"/>
+                <a:cs typeface="Liberation Mono"/>
+              </a:rPr>
+              <a:t>                assignBestVolunteerAvailableToVisit(visit, availableVolunteerIds, volunteerIdWithVisitCounts, volunteerAvailabilitiesNextMonth);</a:t>
+            </a:r>
+            <a:endParaRPr sz="1400" b="0" i="0" u="none" strike="noStrike" cap="none" spc="0">
+              <a:solidFill>
+                <a:schemeClr val="tx1"/>
+              </a:solidFill>
+              <a:latin typeface="Liberation Mono"/>
+              <a:cs typeface="Liberation Mono"/>
+            </a:endParaRPr>
+          </a:p>
+          <a:p>
+            <a:pPr>
+              <a:defRPr/>
+            </a:pPr>
+            <a:r>
+              <a:rPr lang="it-IT" sz="1400" b="0" i="0" u="none" strike="noStrike" cap="none" spc="0">
+                <a:solidFill>
+                  <a:schemeClr val="tx1"/>
+                </a:solidFill>
+                <a:latin typeface="Liberation Mono"/>
+                <a:ea typeface="Liberation Mono"/>
+                <a:cs typeface="Liberation Mono"/>
+              </a:rPr>
+              <a:t>            }</a:t>
+            </a:r>
+            <a:endParaRPr sz="1400" b="0" i="0" u="none" strike="noStrike" cap="none" spc="0">
+              <a:solidFill>
+                <a:schemeClr val="tx1"/>
+              </a:solidFill>
+              <a:latin typeface="Liberation Mono"/>
+              <a:cs typeface="Liberation Mono"/>
+            </a:endParaRPr>
+          </a:p>
+          <a:p>
+            <a:pPr>
+              <a:defRPr/>
+            </a:pPr>
+            <a:r>
+              <a:rPr lang="it-IT" sz="1400" b="0" i="0" u="none" strike="noStrike" cap="none" spc="0">
+                <a:solidFill>
+                  <a:schemeClr val="tx1"/>
+                </a:solidFill>
+                <a:latin typeface="Liberation Mono"/>
+                <a:ea typeface="Liberation Mono"/>
+                <a:cs typeface="Liberation Mono"/>
+              </a:rPr>
+              <a:t>        }</a:t>
+            </a:r>
+            <a:endParaRPr sz="1400" b="0" i="0" u="none" strike="noStrike" cap="none" spc="0">
+              <a:solidFill>
+                <a:schemeClr val="tx1"/>
+              </a:solidFill>
+              <a:latin typeface="Liberation Mono"/>
+              <a:cs typeface="Liberation Mono"/>
+            </a:endParaRPr>
+          </a:p>
+          <a:p>
+            <a:pPr>
+              <a:defRPr/>
+            </a:pPr>
+            <a:r>
+              <a:rPr lang="en" sz="1400" b="0" i="0" u="none" strike="noStrike" cap="none" spc="0">
+                <a:solidFill>
+                  <a:schemeClr val="tx1"/>
+                </a:solidFill>
+                <a:latin typeface="Liberation Mono"/>
+                <a:ea typeface="Liberation Mono"/>
+                <a:cs typeface="Liberation Mono"/>
+              </a:rPr>
+              <a:t>...</a:t>
+            </a:r>
+            <a:endParaRPr sz="1400" b="0" i="0" u="none" strike="noStrike" cap="none" spc="0">
+              <a:solidFill>
+                <a:schemeClr val="tx1"/>
+              </a:solidFill>
+              <a:latin typeface="Liberation Mono"/>
+              <a:cs typeface="Liberation Mono"/>
+            </a:endParaRPr>
+          </a:p>
+        </p:txBody>
+      </p:sp>
+      <p:sp>
+        <p:nvSpPr>
+          <p:cNvPr id="1711987548" name=""/>
+          <p:cNvSpPr txBox="1"/>
+          <p:nvPr/>
+        </p:nvSpPr>
+        <p:spPr bwMode="auto">
+          <a:xfrm rot="0" flipH="0" flipV="0">
+            <a:off x="4383448" y="471802"/>
+            <a:ext cx="7416703" cy="457559"/>
+          </a:xfrm>
+          <a:prstGeom prst="rect">
+            <a:avLst/>
+          </a:prstGeom>
+          <a:noFill/>
+        </p:spPr>
+        <p:txBody>
+          <a:bodyPr vertOverflow="overflow" horzOverflow="overflow" vert="horz" wrap="square" lIns="91440" tIns="45720" rIns="91440" bIns="45720" numCol="1" spcCol="0" rtlCol="0" fromWordArt="0" anchor="t" anchorCtr="0" forceAA="0" upright="0" compatLnSpc="0">
+            <a:spAutoFit/>
+          </a:bodyPr>
+          <a:p>
+            <a:pPr algn="ctr">
+              <a:defRPr/>
+            </a:pPr>
+            <a:r>
+              <a:rPr lang="en" sz="2400" b="1">
+                <a:solidFill>
+                  <a:srgbClr val="0070C0"/>
+                </a:solidFill>
+                <a:latin typeface="DejaVu Sans Condensed"/>
+                <a:ea typeface="DejaVu Sans Condensed"/>
+                <a:cs typeface="DejaVu Sans Condensed"/>
+              </a:rPr>
+              <a:t>Extract Method - 2 + semplificazione logica</a:t>
+            </a:r>
+            <a:endParaRPr sz="1400" b="1">
+              <a:solidFill>
+                <a:srgbClr val="0070C0"/>
+              </a:solidFill>
+            </a:endParaRPr>
+          </a:p>
+        </p:txBody>
+      </p:sp>
+      <p:sp>
+        <p:nvSpPr>
+          <p:cNvPr id="23320965" name=""/>
+          <p:cNvSpPr txBox="1"/>
+          <p:nvPr/>
+        </p:nvSpPr>
+        <p:spPr bwMode="auto">
+          <a:xfrm rot="0" flipH="0" flipV="0">
+            <a:off x="10039335" y="1839611"/>
+            <a:ext cx="1999196" cy="640440"/>
+          </a:xfrm>
+          <a:prstGeom prst="rect">
+            <a:avLst/>
+          </a:prstGeom>
+          <a:noFill/>
+        </p:spPr>
+        <p:txBody>
+          <a:bodyPr vertOverflow="overflow" horzOverflow="overflow" vert="horz" wrap="square" lIns="91440" tIns="45720" rIns="91440" bIns="45720" numCol="1" spcCol="0" rtlCol="0" fromWordArt="0" anchor="ctr" anchorCtr="0" forceAA="0" upright="0" compatLnSpc="0">
+            <a:spAutoFit/>
+          </a:bodyPr>
+          <a:p>
+            <a:pPr algn="ctr">
+              <a:defRPr/>
+            </a:pPr>
+            <a:r>
+              <a:rPr lang="en" sz="3600" b="1">
+                <a:ln w="6349">
+                  <a:solidFill>
+                    <a:srgbClr val="000000"/>
+                  </a:solidFill>
+                  <a:prstDash val="solid"/>
+                </a:ln>
+                <a:solidFill>
+                  <a:srgbClr val="92D050"/>
+                </a:solidFill>
+                <a:latin typeface="Cantarell Extra Bold"/>
+                <a:ea typeface="Cantarell Extra Bold"/>
+                <a:cs typeface="Cantarell Extra Bold"/>
+              </a:rPr>
+              <a:t>DOPO</a:t>
+            </a:r>
+            <a:endParaRPr>
+              <a:ln w="6349">
+                <a:solidFill>
+                  <a:schemeClr val="tx1"/>
+                </a:solidFill>
+                <a:prstDash val="solid"/>
+              </a:ln>
+            </a:endParaRPr>
+          </a:p>
+        </p:txBody>
+      </p:sp>
+    </p:spTree>
+  </p:cSld>
+  <p:clrMapOvr>
+    <a:masterClrMapping/>
+  </p:clrMapOvr>
+  <mc:AlternateContent xmlns:mc="http://schemas.openxmlformats.org/markup-compatibility/2006">
+    <mc:Choice xmlns:p159="http://schemas.microsoft.com/office/powerpoint/2015/09/main" xmlns:p14="http://schemas.microsoft.com/office/powerpoint/2010/main" Requires="p159">
+      <p:transition p14:dur="2000" advClick="1"/>
+    </mc:Choice>
+    <mc:Fallback>
+      <p:transition advClick="1"/>
+    </mc:Fallback>
+  </mc:AlternateContent>
+</p:sld>
+</file>
+
+<file path=ppt/slides/slide22.xml><?xml version="1.0" encoding="utf-8"?>
+<p:sld xmlns:a="http://schemas.openxmlformats.org/drawingml/2006/main" xmlns:r="http://schemas.openxmlformats.org/officeDocument/2006/relationships" xmlns:p="http://schemas.openxmlformats.org/presentationml/2006/main" xmlns:m="http://schemas.openxmlformats.org/officeDocument/2006/math" xmlns:w="http://schemas.openxmlformats.org/wordprocessingml/2006/main" xmlns:mc="http://schemas.openxmlformats.org/markup-compatibility/2006" showMasterPhAnim="0" showMasterSp="1" show="1">
+  <p:cSld name="">
+    <p:spTree>
+      <p:nvGrpSpPr>
+        <p:cNvPr id="1" name=""/>
+        <p:cNvGrpSpPr/>
+        <p:nvPr/>
+      </p:nvGrpSpPr>
+      <p:grpSpPr bwMode="auto">
+        <a:xfrm>
+          <a:off x="0" y="0"/>
+          <a:ext cx="0" cy="0"/>
+          <a:chOff x="0" y="0"/>
+          <a:chExt cx="0" cy="0"/>
+        </a:xfrm>
+      </p:grpSpPr>
+      <p:sp>
+        <p:nvSpPr>
+          <p:cNvPr id="1068862128" name="Titolo 1"/>
+          <p:cNvSpPr>
+            <a:spLocks noGrp="1"/>
+          </p:cNvSpPr>
+          <p:nvPr>
+            <p:ph type="title"/>
+          </p:nvPr>
+        </p:nvSpPr>
+        <p:spPr bwMode="auto">
+          <a:xfrm>
+            <a:off x="838198" y="37038"/>
+            <a:ext cx="10515600" cy="1325562"/>
+          </a:xfrm>
+        </p:spPr>
+        <p:txBody>
+          <a:bodyPr/>
+          <a:lstStyle/>
+          <a:p>
+            <a:pPr>
+              <a:defRPr/>
+            </a:pPr>
+            <a:r>
+              <a:rPr lang="en" b="1">
+                <a:solidFill>
+                  <a:srgbClr val="0070C0"/>
+                </a:solidFill>
+                <a:latin typeface="Noto Sans"/>
+                <a:ea typeface="Noto Sans"/>
+                <a:cs typeface="Noto Sans"/>
+              </a:rPr>
+              <a:t>Refactoring</a:t>
+            </a:r>
+            <a:endParaRPr/>
+          </a:p>
+        </p:txBody>
+      </p:sp>
+      <p:sp>
+        <p:nvSpPr>
+          <p:cNvPr id="267580261" name=""/>
+          <p:cNvSpPr txBox="1"/>
+          <p:nvPr/>
+        </p:nvSpPr>
+        <p:spPr bwMode="auto">
+          <a:xfrm rot="0" flipH="0" flipV="0">
+            <a:off x="5753405" y="471040"/>
+            <a:ext cx="5870424" cy="457559"/>
+          </a:xfrm>
+          <a:prstGeom prst="rect">
+            <a:avLst/>
+          </a:prstGeom>
+          <a:noFill/>
+        </p:spPr>
+        <p:txBody>
+          <a:bodyPr vertOverflow="overflow" horzOverflow="overflow" vert="horz" wrap="square" lIns="91440" tIns="45720" rIns="91440" bIns="45720" numCol="1" spcCol="0" rtlCol="0" fromWordArt="0" anchor="t" anchorCtr="0" forceAA="0" upright="0" compatLnSpc="0">
+            <a:spAutoFit/>
+          </a:bodyPr>
+          <a:p>
+            <a:pPr algn="ctr">
+              <a:defRPr/>
+            </a:pPr>
+            <a:r>
+              <a:rPr lang="en" sz="2400" b="1">
+                <a:solidFill>
+                  <a:srgbClr val="0070C0"/>
+                </a:solidFill>
+                <a:latin typeface="DejaVu Sans Condensed"/>
+                <a:ea typeface="DejaVu Sans Condensed"/>
+                <a:cs typeface="DejaVu Sans Condensed"/>
+              </a:rPr>
+              <a:t>Replace temporary with invocation</a:t>
+            </a:r>
+            <a:endParaRPr>
+              <a:solidFill>
+                <a:srgbClr val="0070C0"/>
+              </a:solidFill>
+            </a:endParaRPr>
+          </a:p>
+        </p:txBody>
+      </p:sp>
+      <p:sp>
+        <p:nvSpPr>
+          <p:cNvPr id="1437753394" name=""/>
+          <p:cNvSpPr txBox="1"/>
+          <p:nvPr/>
+        </p:nvSpPr>
+        <p:spPr bwMode="auto">
+          <a:xfrm rot="0" flipH="0" flipV="0">
+            <a:off x="351446" y="1362601"/>
+            <a:ext cx="11798655" cy="1641023"/>
+          </a:xfrm>
+          <a:prstGeom prst="roundRect">
+            <a:avLst>
+              <a:gd name="adj" fmla="val 5796"/>
+            </a:avLst>
+          </a:prstGeom>
+          <a:solidFill>
+            <a:schemeClr val="bg1">
+              <a:alpha val="49999"/>
+            </a:schemeClr>
+          </a:solidFill>
+          <a:ln w="12699">
+            <a:solidFill>
+              <a:schemeClr val="tx1"/>
+            </a:solidFill>
+            <a:prstDash val="solid"/>
+          </a:ln>
+        </p:spPr>
+        <p:txBody>
+          <a:bodyPr vertOverflow="overflow" horzOverflow="overflow" vert="horz" wrap="square" lIns="91440" tIns="45720" rIns="91440" bIns="45720" numCol="1" spcCol="0" rtlCol="0" fromWordArt="0" anchor="t" anchorCtr="0" forceAA="0" upright="0" compatLnSpc="0">
+            <a:spAutoFit/>
+          </a:bodyPr>
+          <a:p>
+            <a:pPr>
+              <a:defRPr/>
+            </a:pPr>
+            <a:r>
+              <a:rPr lang="it-IT" sz="1400" b="0" i="0" u="none" strike="noStrike" cap="none" spc="0">
+                <a:solidFill>
+                  <a:schemeClr val="tx1"/>
+                </a:solidFill>
+                <a:latin typeface="Liberation Mono"/>
+                <a:ea typeface="Liberation Mono"/>
+                <a:cs typeface="Liberation Mono"/>
+              </a:rPr>
+              <a:t>LocalDate today = LocalDate.now(clock);</a:t>
+            </a:r>
+            <a:endParaRPr sz="1400" b="0" i="0" u="none" strike="noStrike" cap="none" spc="0">
+              <a:solidFill>
+                <a:schemeClr val="tx1"/>
+              </a:solidFill>
+              <a:latin typeface="Liberation Mono"/>
+              <a:cs typeface="Liberation Mono"/>
+            </a:endParaRPr>
+          </a:p>
+          <a:p>
+            <a:pPr>
+              <a:defRPr/>
+            </a:pPr>
+            <a:r>
+              <a:rPr lang="it-IT" sz="1400" b="0" i="0" u="none" strike="noStrike" cap="none" spc="0">
+                <a:solidFill>
+                  <a:schemeClr val="tx1"/>
+                </a:solidFill>
+                <a:latin typeface="Liberation Mono"/>
+                <a:ea typeface="Liberation Mono"/>
+                <a:cs typeface="Liberation Mono"/>
+              </a:rPr>
+              <a:t>YearMonth nextMonth = YearMonth.from(today).plusMonths(1);</a:t>
+            </a:r>
+            <a:endParaRPr sz="1400" b="0" i="0" u="none" strike="noStrike" cap="none" spc="0">
+              <a:solidFill>
+                <a:schemeClr val="tx1"/>
+              </a:solidFill>
+              <a:latin typeface="Liberation Mono"/>
+              <a:cs typeface="Liberation Mono"/>
+            </a:endParaRPr>
+          </a:p>
+          <a:p>
+            <a:pPr>
+              <a:defRPr/>
+            </a:pPr>
+            <a:r>
+              <a:rPr lang="it-IT" sz="1400" b="0" i="0" u="none" strike="noStrike" cap="none" spc="0">
+                <a:solidFill>
+                  <a:schemeClr val="tx1"/>
+                </a:solidFill>
+                <a:latin typeface="Liberation Mono"/>
+                <a:ea typeface="Liberation Mono"/>
+                <a:cs typeface="Liberation Mono"/>
+              </a:rPr>
+              <a:t>int nextMonthValue = nextMonth.getMonthValue();</a:t>
+            </a:r>
+            <a:endParaRPr sz="1400" b="0" i="0" u="none" strike="noStrike" cap="none" spc="0">
+              <a:solidFill>
+                <a:schemeClr val="tx1"/>
+              </a:solidFill>
+              <a:latin typeface="Liberation Mono"/>
+              <a:cs typeface="Liberation Mono"/>
+            </a:endParaRPr>
+          </a:p>
+          <a:p>
+            <a:pPr>
+              <a:defRPr/>
+            </a:pPr>
+            <a:r>
+              <a:rPr lang="it-IT" sz="1400" b="0" i="0" u="none" strike="noStrike" cap="none" spc="0">
+                <a:solidFill>
+                  <a:schemeClr val="tx1"/>
+                </a:solidFill>
+                <a:latin typeface="Liberation Mono"/>
+                <a:ea typeface="Liberation Mono"/>
+                <a:cs typeface="Liberation Mono"/>
+              </a:rPr>
+              <a:t>int nextYear = nextMonth.getYear();</a:t>
+            </a:r>
+            <a:endParaRPr sz="1400">
+              <a:latin typeface="Liberation Mono"/>
+              <a:cs typeface="Liberation Mono"/>
+            </a:endParaRPr>
+          </a:p>
+          <a:p>
+            <a:pPr>
+              <a:defRPr/>
+            </a:pPr>
+            <a:r>
+              <a:rPr lang="en" sz="1400">
+                <a:latin typeface="Liberation Mono"/>
+                <a:ea typeface="Liberation Mono"/>
+                <a:cs typeface="Liberation Mono"/>
+              </a:rPr>
+              <a:t>...</a:t>
+            </a:r>
+            <a:endParaRPr sz="1400">
+              <a:latin typeface="Liberation Mono"/>
+              <a:cs typeface="Liberation Mono"/>
+            </a:endParaRPr>
+          </a:p>
+          <a:p>
+            <a:pPr>
+              <a:defRPr/>
+            </a:pPr>
+            <a:r>
+              <a:rPr lang="en" sz="1400" b="0" i="0" u="none" strike="noStrike" cap="none" spc="0">
+                <a:solidFill>
+                  <a:schemeClr val="tx1"/>
+                </a:solidFill>
+                <a:latin typeface="Liberation Mono"/>
+                <a:ea typeface="Liberation Mono"/>
+                <a:cs typeface="Liberation Mono"/>
+              </a:rPr>
+              <a:t>removeBlockedDates(nextMonthValue, nextYear);</a:t>
+            </a:r>
+            <a:endParaRPr sz="1400" b="0" i="0" u="none" strike="noStrike" cap="none" spc="0">
+              <a:solidFill>
+                <a:schemeClr val="tx1"/>
+              </a:solidFill>
+              <a:latin typeface="Liberation Mono"/>
+              <a:cs typeface="Liberation Mono"/>
+            </a:endParaRPr>
+          </a:p>
+          <a:p>
+            <a:pPr>
+              <a:defRPr/>
+            </a:pPr>
+            <a:r>
+              <a:rPr lang="en" sz="1400" b="0" i="0" u="none" strike="noStrike" cap="none" spc="0">
+                <a:solidFill>
+                  <a:schemeClr val="tx1"/>
+                </a:solidFill>
+                <a:latin typeface="Liberation Mono"/>
+                <a:ea typeface="Liberation Mono"/>
+                <a:cs typeface="Liberation Mono"/>
+              </a:rPr>
+              <a:t>statePort.setVisitPlanCreated(nextMonthValue, nextYear, true);</a:t>
+            </a:r>
+            <a:endParaRPr/>
+          </a:p>
+        </p:txBody>
+      </p:sp>
+      <p:sp>
+        <p:nvSpPr>
+          <p:cNvPr id="711399983" name=""/>
+          <p:cNvSpPr txBox="1"/>
+          <p:nvPr/>
+        </p:nvSpPr>
+        <p:spPr bwMode="auto">
+          <a:xfrm rot="0" flipH="0" flipV="0">
+            <a:off x="351446" y="3553351"/>
+            <a:ext cx="11805134" cy="1199306"/>
+          </a:xfrm>
+          <a:prstGeom prst="roundRect">
+            <a:avLst>
+              <a:gd name="adj" fmla="val 5796"/>
+            </a:avLst>
+          </a:prstGeom>
+          <a:solidFill>
+            <a:schemeClr val="bg1">
+              <a:alpha val="49999"/>
+            </a:schemeClr>
+          </a:solidFill>
+          <a:ln w="12699">
+            <a:solidFill>
+              <a:schemeClr val="tx1"/>
+            </a:solidFill>
+            <a:prstDash val="solid"/>
+          </a:ln>
+        </p:spPr>
+        <p:txBody>
+          <a:bodyPr vertOverflow="overflow" horzOverflow="overflow" vert="horz" wrap="square" lIns="91440" tIns="45720" rIns="91440" bIns="45720" numCol="1" spcCol="0" rtlCol="0" fromWordArt="0" anchor="t" anchorCtr="0" forceAA="0" upright="0" compatLnSpc="0">
+            <a:spAutoFit/>
+          </a:bodyPr>
+          <a:p>
+            <a:pPr>
+              <a:defRPr/>
+            </a:pPr>
+            <a:r>
+              <a:rPr lang="it-IT" sz="1400" b="0" i="0" u="none" strike="noStrike" cap="none" spc="0">
+                <a:solidFill>
+                  <a:schemeClr val="tx1"/>
+                </a:solidFill>
+                <a:latin typeface="Liberation Mono"/>
+                <a:ea typeface="Liberation Mono"/>
+                <a:cs typeface="Liberation Mono"/>
+              </a:rPr>
+              <a:t>LocalDate today = LocalDate.now(clock);</a:t>
+            </a:r>
+            <a:endParaRPr sz="1400" b="0" i="0" u="none" strike="noStrike" cap="none" spc="0">
+              <a:solidFill>
+                <a:schemeClr val="tx1"/>
+              </a:solidFill>
+              <a:latin typeface="Liberation Mono"/>
+              <a:cs typeface="Liberation Mono"/>
+            </a:endParaRPr>
+          </a:p>
+          <a:p>
+            <a:pPr>
+              <a:defRPr/>
+            </a:pPr>
+            <a:r>
+              <a:rPr lang="it-IT" sz="1400" b="0" i="0" u="none" strike="noStrike" cap="none" spc="0">
+                <a:solidFill>
+                  <a:schemeClr val="tx1"/>
+                </a:solidFill>
+                <a:latin typeface="Liberation Mono"/>
+                <a:ea typeface="Liberation Mono"/>
+                <a:cs typeface="Liberation Mono"/>
+              </a:rPr>
+              <a:t>YearMonth nextMonth = YearMonth.from(today).plusMonths(1);</a:t>
+            </a:r>
+            <a:endParaRPr sz="1400" b="0" i="0" u="none" strike="noStrike" cap="none" spc="0">
+              <a:solidFill>
+                <a:schemeClr val="tx1"/>
+              </a:solidFill>
+              <a:latin typeface="Liberation Mono"/>
+              <a:cs typeface="Liberation Mono"/>
+            </a:endParaRPr>
+          </a:p>
+          <a:p>
+            <a:pPr>
+              <a:defRPr/>
+            </a:pPr>
+            <a:r>
+              <a:rPr lang="en" sz="1400" b="0" i="0" u="none" strike="noStrike" cap="none" spc="0">
+                <a:solidFill>
+                  <a:schemeClr val="tx1"/>
+                </a:solidFill>
+                <a:latin typeface="Liberation Mono"/>
+                <a:ea typeface="Liberation Mono"/>
+                <a:cs typeface="Liberation Mono"/>
+              </a:rPr>
+              <a:t>...</a:t>
+            </a:r>
+            <a:endParaRPr sz="1400" b="0" i="0" u="none" strike="noStrike" cap="none" spc="0">
+              <a:solidFill>
+                <a:schemeClr val="tx1"/>
+              </a:solidFill>
+              <a:latin typeface="Liberation Mono"/>
+              <a:cs typeface="Liberation Mono"/>
+            </a:endParaRPr>
+          </a:p>
+          <a:p>
+            <a:pPr>
+              <a:defRPr/>
+            </a:pPr>
+            <a:r>
+              <a:rPr lang="it-IT" sz="1400" b="0" i="0" u="none" strike="noStrike" cap="none" spc="0">
+                <a:solidFill>
+                  <a:schemeClr val="tx1"/>
+                </a:solidFill>
+                <a:latin typeface="Liberation Mono"/>
+                <a:ea typeface="Liberation Mono"/>
+                <a:cs typeface="Liberation Mono"/>
+              </a:rPr>
+              <a:t>removeBlockedDatesFromSelectedMonth(nextMonth);</a:t>
+            </a:r>
+            <a:endParaRPr sz="1400" b="0" i="0" u="none" strike="noStrike" cap="none" spc="0">
+              <a:solidFill>
+                <a:schemeClr val="tx1"/>
+              </a:solidFill>
+              <a:latin typeface="Liberation Mono"/>
+              <a:cs typeface="Liberation Mono"/>
+            </a:endParaRPr>
+          </a:p>
+          <a:p>
+            <a:pPr>
+              <a:defRPr/>
+            </a:pPr>
+            <a:r>
+              <a:rPr lang="it-IT" sz="1400" b="0" i="0" u="none" strike="noStrike" cap="none" spc="0">
+                <a:solidFill>
+                  <a:schemeClr val="tx1"/>
+                </a:solidFill>
+                <a:latin typeface="Liberation Mono"/>
+                <a:ea typeface="Liberation Mono"/>
+                <a:cs typeface="Liberation Mono"/>
+              </a:rPr>
+              <a:t>statePort.setVisitPlanCreated(nextMonth.getMonthValue(), nextMonth.getYear(), true);</a:t>
+            </a:r>
+            <a:endParaRPr/>
+          </a:p>
+        </p:txBody>
+      </p:sp>
+      <p:sp>
+        <p:nvSpPr>
+          <p:cNvPr id="1563974945" name=""/>
+          <p:cNvSpPr txBox="1"/>
+          <p:nvPr/>
+        </p:nvSpPr>
+        <p:spPr bwMode="auto">
+          <a:xfrm rot="0" flipH="0" flipV="0">
+            <a:off x="9679348" y="1459902"/>
+            <a:ext cx="1995957" cy="640440"/>
+          </a:xfrm>
+          <a:prstGeom prst="rect">
+            <a:avLst/>
+          </a:prstGeom>
+          <a:noFill/>
+        </p:spPr>
+        <p:txBody>
+          <a:bodyPr vertOverflow="overflow" horzOverflow="overflow" vert="horz" wrap="square" lIns="91440" tIns="45720" rIns="91440" bIns="45720" numCol="1" spcCol="0" rtlCol="0" fromWordArt="0" anchor="ctr" anchorCtr="0" forceAA="0" upright="0" compatLnSpc="0">
+            <a:spAutoFit/>
+          </a:bodyPr>
+          <a:p>
+            <a:pPr algn="ctr">
+              <a:defRPr/>
+            </a:pPr>
+            <a:r>
+              <a:rPr lang="en" sz="3600" b="1">
+                <a:ln w="6349">
+                  <a:solidFill>
+                    <a:srgbClr val="000000"/>
+                  </a:solidFill>
+                  <a:prstDash val="solid"/>
+                </a:ln>
+                <a:solidFill>
+                  <a:schemeClr val="accent2">
+                    <a:lumMod val="75000"/>
+                  </a:schemeClr>
+                </a:solidFill>
+                <a:latin typeface="Cantarell Extra Bold"/>
+                <a:ea typeface="Cantarell Extra Bold"/>
+                <a:cs typeface="Cantarell Extra Bold"/>
+              </a:rPr>
+              <a:t>PRIMA</a:t>
+            </a:r>
+            <a:endParaRPr>
+              <a:ln w="6349">
+                <a:solidFill>
+                  <a:schemeClr val="tx1"/>
+                </a:solidFill>
+                <a:prstDash val="solid"/>
+              </a:ln>
+            </a:endParaRPr>
+          </a:p>
+        </p:txBody>
+      </p:sp>
+      <p:sp>
+        <p:nvSpPr>
+          <p:cNvPr id="1990802124" name=""/>
+          <p:cNvSpPr txBox="1"/>
+          <p:nvPr/>
+        </p:nvSpPr>
+        <p:spPr bwMode="auto">
+          <a:xfrm rot="0" flipH="0" flipV="0">
+            <a:off x="9944084" y="3678115"/>
+            <a:ext cx="1999555" cy="640440"/>
+          </a:xfrm>
+          <a:prstGeom prst="rect">
+            <a:avLst/>
+          </a:prstGeom>
+          <a:noFill/>
+        </p:spPr>
+        <p:txBody>
+          <a:bodyPr vertOverflow="overflow" horzOverflow="overflow" vert="horz" wrap="square" lIns="91440" tIns="45720" rIns="91440" bIns="45720" numCol="1" spcCol="0" rtlCol="0" fromWordArt="0" anchor="ctr" anchorCtr="0" forceAA="0" upright="0" compatLnSpc="0">
+            <a:spAutoFit/>
+          </a:bodyPr>
+          <a:p>
+            <a:pPr algn="ctr">
+              <a:defRPr/>
+            </a:pPr>
+            <a:r>
+              <a:rPr lang="en" sz="3600" b="1">
+                <a:ln w="6349">
+                  <a:solidFill>
+                    <a:srgbClr val="000000"/>
+                  </a:solidFill>
+                  <a:prstDash val="solid"/>
+                </a:ln>
+                <a:solidFill>
+                  <a:srgbClr val="92D050"/>
+                </a:solidFill>
+                <a:latin typeface="Cantarell Extra Bold"/>
+                <a:ea typeface="Cantarell Extra Bold"/>
+                <a:cs typeface="Cantarell Extra Bold"/>
+              </a:rPr>
+              <a:t>DOPO</a:t>
+            </a:r>
+            <a:endParaRPr>
+              <a:ln w="6349">
+                <a:solidFill>
+                  <a:schemeClr val="tx1"/>
+                </a:solidFill>
+                <a:prstDash val="solid"/>
+              </a:ln>
+            </a:endParaRPr>
+          </a:p>
+        </p:txBody>
+      </p:sp>
+    </p:spTree>
+  </p:cSld>
+  <p:clrMapOvr>
+    <a:masterClrMapping/>
+  </p:clrMapOvr>
+  <mc:AlternateContent xmlns:mc="http://schemas.openxmlformats.org/markup-compatibility/2006">
+    <mc:Choice xmlns:p159="http://schemas.microsoft.com/office/powerpoint/2015/09/main" xmlns:p14="http://schemas.microsoft.com/office/powerpoint/2010/main" Requires="p159">
+      <p:transition p14:dur="2000" advClick="1"/>
+    </mc:Choice>
+    <mc:Fallback>
+      <p:transition advClick="1"/>
+    </mc:Fallback>
+  </mc:AlternateContent>
+</p:sld>
+</file>
+
+<file path=ppt/slides/slide23.xml><?xml version="1.0" encoding="utf-8"?>
+<p:sld xmlns:a="http://schemas.openxmlformats.org/drawingml/2006/main" xmlns:r="http://schemas.openxmlformats.org/officeDocument/2006/relationships" xmlns:p="http://schemas.openxmlformats.org/presentationml/2006/main" xmlns:m="http://schemas.openxmlformats.org/officeDocument/2006/math" xmlns:w="http://schemas.openxmlformats.org/wordprocessingml/2006/main" xmlns:mc="http://schemas.openxmlformats.org/markup-compatibility/2006" showMasterPhAnim="0" showMasterSp="1" show="1">
+  <p:cSld name="">
+    <p:spTree>
+      <p:nvGrpSpPr>
+        <p:cNvPr id="1" name=""/>
+        <p:cNvGrpSpPr/>
+        <p:nvPr/>
+      </p:nvGrpSpPr>
+      <p:grpSpPr bwMode="auto">
+        <a:xfrm>
+          <a:off x="0" y="0"/>
+          <a:ext cx="0" cy="0"/>
+          <a:chOff x="0" y="0"/>
+          <a:chExt cx="0" cy="0"/>
+        </a:xfrm>
+      </p:grpSpPr>
+      <p:sp>
+        <p:nvSpPr>
+          <p:cNvPr id="312309608" name="Titolo 1"/>
           <p:cNvSpPr>
             <a:spLocks noGrp="1"/>
           </p:cNvSpPr>
@@ -9011,7 +12021,7 @@
       </p:sp>
       <p:sp>
         <p:nvSpPr>
-          <p:cNvPr id="234112468" name=""/>
+          <p:cNvPr id="356032845" name=""/>
           <p:cNvSpPr txBox="1"/>
           <p:nvPr/>
         </p:nvSpPr>
@@ -9054,7 +12064,7 @@
       </p:sp>
       <p:sp>
         <p:nvSpPr>
-          <p:cNvPr id="1104460646" name=""/>
+          <p:cNvPr id="1589703209" name=""/>
           <p:cNvSpPr txBox="1"/>
           <p:nvPr/>
         </p:nvSpPr>
@@ -9279,7 +12289,7 @@
       </p:sp>
       <p:sp>
         <p:nvSpPr>
-          <p:cNvPr id="93555687" name=""/>
+          <p:cNvPr id="1761411735" name=""/>
           <p:cNvSpPr txBox="1"/>
           <p:nvPr/>
         </p:nvSpPr>
@@ -9394,6 +12404,112 @@
               <a:t>    }</a:t>
             </a:r>
             <a:endParaRPr/>
+          </a:p>
+        </p:txBody>
+      </p:sp>
+      <p:sp>
+        <p:nvSpPr>
+          <p:cNvPr id="1841704908" name=""/>
+          <p:cNvSpPr txBox="1"/>
+          <p:nvPr/>
+        </p:nvSpPr>
+        <p:spPr bwMode="auto">
+          <a:xfrm rot="0" flipH="0" flipV="0">
+            <a:off x="10039334" y="4944940"/>
+            <a:ext cx="1999555" cy="640440"/>
+          </a:xfrm>
+          <a:prstGeom prst="rect">
+            <a:avLst/>
+          </a:prstGeom>
+          <a:noFill/>
+        </p:spPr>
+        <p:txBody>
+          <a:bodyPr vertOverflow="overflow" horzOverflow="overflow" vert="horz" wrap="square" lIns="91440" tIns="45720" rIns="91440" bIns="45720" numCol="1" spcCol="0" rtlCol="0" fromWordArt="0" anchor="ctr" anchorCtr="0" forceAA="0" upright="0" compatLnSpc="0">
+            <a:spAutoFit/>
+          </a:bodyPr>
+          <a:p>
+            <a:pPr algn="ctr">
+              <a:defRPr/>
+            </a:pPr>
+            <a:r>
+              <a:rPr lang="en" sz="3600" b="1">
+                <a:ln w="6349">
+                  <a:solidFill>
+                    <a:srgbClr val="000000"/>
+                  </a:solidFill>
+                  <a:prstDash val="solid"/>
+                </a:ln>
+                <a:solidFill>
+                  <a:srgbClr val="92D050"/>
+                </a:solidFill>
+                <a:latin typeface="Cantarell Extra Bold"/>
+                <a:ea typeface="Cantarell Extra Bold"/>
+                <a:cs typeface="Cantarell Extra Bold"/>
+              </a:rPr>
+              <a:t>DOPO</a:t>
+            </a:r>
+            <a:endParaRPr>
+              <a:ln w="6349">
+                <a:solidFill>
+                  <a:schemeClr val="tx1"/>
+                </a:solidFill>
+                <a:prstDash val="solid"/>
+              </a:ln>
+            </a:endParaRPr>
+          </a:p>
+        </p:txBody>
+      </p:sp>
+      <p:sp>
+        <p:nvSpPr>
+          <p:cNvPr id="1437168857" name=""/>
+          <p:cNvSpPr txBox="1"/>
+          <p:nvPr/>
+        </p:nvSpPr>
+        <p:spPr bwMode="auto">
+          <a:xfrm rot="0" flipH="0" flipV="0">
+            <a:off x="10107973" y="2174456"/>
+            <a:ext cx="1996317" cy="640440"/>
+          </a:xfrm>
+          <a:prstGeom prst="rect">
+            <a:avLst/>
+          </a:prstGeom>
+          <a:noFill/>
+        </p:spPr>
+        <p:txBody>
+          <a:bodyPr vertOverflow="overflow" horzOverflow="overflow" vert="horz" wrap="square" lIns="91440" tIns="45720" rIns="91440" bIns="45720" numCol="1" spcCol="0" rtlCol="0" fromWordArt="0" anchor="ctr" anchorCtr="0" forceAA="0" upright="0" compatLnSpc="0">
+            <a:spAutoFit/>
+          </a:bodyPr>
+          <a:p>
+            <a:pPr algn="ctr">
+              <a:defRPr/>
+            </a:pPr>
+            <a:r>
+              <a:rPr lang="en" sz="3600" b="1">
+                <a:ln w="6349">
+                  <a:solidFill>
+                    <a:srgbClr val="000000"/>
+                  </a:solidFill>
+                  <a:prstDash val="solid"/>
+                </a:ln>
+                <a:solidFill>
+                  <a:schemeClr val="accent2">
+                    <a:lumMod val="75000"/>
+                  </a:schemeClr>
+                </a:solidFill>
+                <a:latin typeface="Cantarell Extra Bold"/>
+                <a:ea typeface="Cantarell Extra Bold"/>
+                <a:cs typeface="Cantarell Extra Bold"/>
+              </a:rPr>
+              <a:t>PRIMA</a:t>
+            </a:r>
+            <a:endParaRPr>
+              <a:ln w="6349">
+                <a:solidFill>
+                  <a:schemeClr val="tx1"/>
+                </a:solidFill>
+                <a:prstDash val="solid"/>
+              </a:ln>
+            </a:endParaRPr>
           </a:p>
         </p:txBody>
       </p:sp>
@@ -9432,7 +12548,7 @@
       </p:grpSpPr>
       <p:sp>
         <p:nvSpPr>
-          <p:cNvPr id="1487670749" name="Titolo 1"/>
+          <p:cNvPr id="425199964" name="Titolo 1"/>
           <p:cNvSpPr>
             <a:spLocks noGrp="1"/>
           </p:cNvSpPr>
@@ -9469,7 +12585,7 @@
       </p:sp>
       <p:pic>
         <p:nvPicPr>
-          <p:cNvPr id="1484333999" name=""/>
+          <p:cNvPr id="1268436596" name=""/>
           <p:cNvPicPr>
             <a:picLocks noChangeAspect="1"/>
           </p:cNvPicPr>
@@ -9530,7 +12646,7 @@
       </p:grpSpPr>
       <p:sp>
         <p:nvSpPr>
-          <p:cNvPr id="28986064" name="Titolo 1"/>
+          <p:cNvPr id="1717396277" name="Titolo 1"/>
           <p:cNvSpPr>
             <a:spLocks noGrp="1"/>
           </p:cNvSpPr>
@@ -9563,7 +12679,7 @@
       </p:sp>
       <p:sp>
         <p:nvSpPr>
-          <p:cNvPr id="837232086" name="Segnaposto contenuto 2"/>
+          <p:cNvPr id="1325949513" name="Segnaposto contenuto 2"/>
           <p:cNvSpPr>
             <a:spLocks noGrp="1"/>
           </p:cNvSpPr>
@@ -9678,7 +12794,7 @@
       </p:grpSpPr>
       <p:sp>
         <p:nvSpPr>
-          <p:cNvPr id="1456239767" name="Titolo 1"/>
+          <p:cNvPr id="1941003365" name="Titolo 1"/>
           <p:cNvSpPr>
             <a:spLocks noGrp="1"/>
           </p:cNvSpPr>
@@ -9717,7 +12833,7 @@
       </p:sp>
       <p:sp>
         <p:nvSpPr>
-          <p:cNvPr id="234523593" name="Segnaposto contenuto 2"/>
+          <p:cNvPr id="1583511586" name="Segnaposto contenuto 2"/>
           <p:cNvSpPr>
             <a:spLocks noGrp="1"/>
           </p:cNvSpPr>
@@ -9765,7 +12881,7 @@
       </p:sp>
       <p:pic>
         <p:nvPicPr>
-          <p:cNvPr id="831649121" name=""/>
+          <p:cNvPr id="1322616823" name=""/>
           <p:cNvPicPr>
             <a:picLocks noChangeAspect="1"/>
           </p:cNvPicPr>
@@ -9826,7 +12942,7 @@
       </p:grpSpPr>
       <p:sp>
         <p:nvSpPr>
-          <p:cNvPr id="1073529300" name="Titolo 1"/>
+          <p:cNvPr id="1792949901" name="Titolo 1"/>
           <p:cNvSpPr>
             <a:spLocks noGrp="1"/>
           </p:cNvSpPr>
@@ -9870,7 +12986,7 @@
       </p:sp>
       <p:sp>
         <p:nvSpPr>
-          <p:cNvPr id="93921066" name=""/>
+          <p:cNvPr id="2040059782" name=""/>
           <p:cNvSpPr txBox="1"/>
           <p:nvPr/>
         </p:nvSpPr>
@@ -10244,7 +13360,7 @@
       </p:sp>
       <p:sp>
         <p:nvSpPr>
-          <p:cNvPr id="1801594066" name=""/>
+          <p:cNvPr id="69616992" name=""/>
           <p:cNvSpPr txBox="1"/>
           <p:nvPr/>
         </p:nvSpPr>
@@ -10294,7 +13410,7 @@
       </p:sp>
       <p:sp>
         <p:nvSpPr>
-          <p:cNvPr id="1478977272" name=""/>
+          <p:cNvPr id="1746594648" name=""/>
           <p:cNvSpPr txBox="1"/>
           <p:nvPr/>
         </p:nvSpPr>
@@ -10381,7 +13497,7 @@
       </p:grpSpPr>
       <p:sp>
         <p:nvSpPr>
-          <p:cNvPr id="226207328" name="Titolo 1"/>
+          <p:cNvPr id="450747012" name="Titolo 1"/>
           <p:cNvSpPr>
             <a:spLocks noGrp="1"/>
           </p:cNvSpPr>
@@ -10425,7 +13541,7 @@
       </p:sp>
       <p:sp>
         <p:nvSpPr>
-          <p:cNvPr id="2080513964" name=""/>
+          <p:cNvPr id="847448281" name=""/>
           <p:cNvSpPr txBox="1"/>
           <p:nvPr/>
         </p:nvSpPr>
@@ -10638,7 +13754,7 @@
       </p:sp>
       <p:sp>
         <p:nvSpPr>
-          <p:cNvPr id="1781301833" name=""/>
+          <p:cNvPr id="1863624069" name=""/>
           <p:cNvSpPr txBox="1"/>
           <p:nvPr/>
         </p:nvSpPr>
@@ -10812,7 +13928,7 @@
       </p:sp>
       <p:sp>
         <p:nvSpPr>
-          <p:cNvPr id="741634977" name=""/>
+          <p:cNvPr id="1078290012" name=""/>
           <p:cNvSpPr txBox="1"/>
           <p:nvPr/>
         </p:nvSpPr>
@@ -11052,7 +14168,7 @@
       </p:sp>
       <p:sp>
         <p:nvSpPr>
-          <p:cNvPr id="344099486" name=""/>
+          <p:cNvPr id="1145214106" name=""/>
           <p:cNvSpPr txBox="1"/>
           <p:nvPr/>
         </p:nvSpPr>
@@ -11137,7 +14253,7 @@
       </p:grpSpPr>
       <p:sp>
         <p:nvSpPr>
-          <p:cNvPr id="209288525" name="Titolo 1"/>
+          <p:cNvPr id="1163515143" name="Titolo 1"/>
           <p:cNvSpPr>
             <a:spLocks noGrp="1"/>
           </p:cNvSpPr>
@@ -11185,7 +14301,7 @@
       </p:sp>
       <p:sp>
         <p:nvSpPr>
-          <p:cNvPr id="1177081334" name="Segnaposto contenuto 2"/>
+          <p:cNvPr id="1259316431" name="Segnaposto contenuto 2"/>
           <p:cNvSpPr>
             <a:spLocks noGrp="1"/>
           </p:cNvSpPr>
@@ -11246,7 +14362,7 @@
       </p:grpSpPr>
       <p:sp>
         <p:nvSpPr>
-          <p:cNvPr id="1882559450" name="Titolo 1"/>
+          <p:cNvPr id="707966385" name="Titolo 1"/>
           <p:cNvSpPr>
             <a:spLocks noGrp="1"/>
           </p:cNvSpPr>
@@ -11279,7 +14395,7 @@
       </p:sp>
       <p:sp>
         <p:nvSpPr>
-          <p:cNvPr id="1035068394" name="Segnaposto contenuto 2"/>
+          <p:cNvPr id="783455782" name="Segnaposto contenuto 2"/>
           <p:cNvSpPr>
             <a:spLocks noGrp="1"/>
           </p:cNvSpPr>

--- a/doc/Presentazione/Presentazione_ingsw_parteB.pptx
+++ b/doc/Presentazione/Presentazione_ingsw_parteB.pptx
@@ -1,36 +1,39 @@
 
 <file path=ppt/presentation.xml><?xml version="1.0" encoding="utf-8"?>
-<p:presentation xmlns:a="http://schemas.openxmlformats.org/drawingml/2006/main" xmlns:r="http://schemas.openxmlformats.org/officeDocument/2006/relationships" xmlns:p="http://schemas.openxmlformats.org/presentationml/2006/main" xmlns:m="http://schemas.openxmlformats.org/officeDocument/2006/math" xmlns:w="http://schemas.openxmlformats.org/wordprocessingml/2006/main" saveSubsetFonts="1">
+<p:presentation xmlns:a="http://schemas.openxmlformats.org/drawingml/2006/main" xmlns:r="http://schemas.openxmlformats.org/officeDocument/2006/relationships" xmlns:p="http://schemas.openxmlformats.org/presentationml/2006/main" saveSubsetFonts="1">
   <p:sldMasterIdLst>
     <p:sldMasterId id="2147483648" r:id="rId1"/>
   </p:sldMasterIdLst>
   <p:notesMasterIdLst>
-    <p:notesMasterId r:id="rId27"/>
+    <p:notesMasterId r:id="rId28"/>
   </p:notesMasterIdLst>
   <p:sldIdLst>
-    <p:sldId id="256" r:id="rId4"/>
-    <p:sldId id="257" r:id="rId5"/>
-    <p:sldId id="258" r:id="rId6"/>
-    <p:sldId id="259" r:id="rId7"/>
-    <p:sldId id="260" r:id="rId8"/>
-    <p:sldId id="261" r:id="rId9"/>
-    <p:sldId id="262" r:id="rId10"/>
-    <p:sldId id="263" r:id="rId11"/>
-    <p:sldId id="264" r:id="rId12"/>
-    <p:sldId id="265" r:id="rId13"/>
-    <p:sldId id="266" r:id="rId14"/>
-    <p:sldId id="267" r:id="rId15"/>
-    <p:sldId id="268" r:id="rId16"/>
-    <p:sldId id="269" r:id="rId17"/>
-    <p:sldId id="270" r:id="rId18"/>
-    <p:sldId id="271" r:id="rId19"/>
-    <p:sldId id="272" r:id="rId20"/>
-    <p:sldId id="273" r:id="rId21"/>
-    <p:sldId id="274" r:id="rId22"/>
-    <p:sldId id="275" r:id="rId23"/>
-    <p:sldId id="276" r:id="rId24"/>
-    <p:sldId id="277" r:id="rId25"/>
-    <p:sldId id="278" r:id="rId26"/>
+    <p:sldId id="256" r:id="rId2"/>
+    <p:sldId id="257" r:id="rId3"/>
+    <p:sldId id="258" r:id="rId4"/>
+    <p:sldId id="259" r:id="rId5"/>
+    <p:sldId id="260" r:id="rId6"/>
+    <p:sldId id="261" r:id="rId7"/>
+    <p:sldId id="262" r:id="rId8"/>
+    <p:sldId id="264" r:id="rId9"/>
+    <p:sldId id="279" r:id="rId10"/>
+    <p:sldId id="280" r:id="rId11"/>
+    <p:sldId id="265" r:id="rId12"/>
+    <p:sldId id="266" r:id="rId13"/>
+    <p:sldId id="267" r:id="rId14"/>
+    <p:sldId id="281" r:id="rId15"/>
+    <p:sldId id="282" r:id="rId16"/>
+    <p:sldId id="268" r:id="rId17"/>
+    <p:sldId id="269" r:id="rId18"/>
+    <p:sldId id="270" r:id="rId19"/>
+    <p:sldId id="271" r:id="rId20"/>
+    <p:sldId id="272" r:id="rId21"/>
+    <p:sldId id="273" r:id="rId22"/>
+    <p:sldId id="274" r:id="rId23"/>
+    <p:sldId id="275" r:id="rId24"/>
+    <p:sldId id="276" r:id="rId25"/>
+    <p:sldId id="277" r:id="rId26"/>
+    <p:sldId id="278" r:id="rId27"/>
   </p:sldIdLst>
   <p:sldSz cx="12192000" cy="6858000"/>
   <p:notesSz cx="6858000" cy="9144000"/>
@@ -129,12 +132,28 @@
       </a:defRPr>
     </a:lvl9pPr>
   </p:defaultTextStyle>
+  <p:extLst>
+    <p:ext uri="{EFAFB233-063F-42B5-8137-9DF3F51BA10A}">
+      <p15:sldGuideLst xmlns:p15="http://schemas.microsoft.com/office/powerpoint/2012/main">
+        <p15:guide id="1" pos="3840">
+          <p15:clr>
+            <a:srgbClr val="A4A3A4"/>
+          </p15:clr>
+        </p15:guide>
+        <p15:guide id="2" orient="horz" pos="2160">
+          <p15:clr>
+            <a:srgbClr val="A4A3A4"/>
+          </p15:clr>
+        </p15:guide>
+      </p15:sldGuideLst>
+    </p:ext>
+  </p:extLst>
 </p:presentation>
 </file>
 
 <file path=ppt/notesMasters/notesMaster1.xml><?xml version="1.0" encoding="utf-8"?>
 <p:notesMaster xmlns:a="http://schemas.openxmlformats.org/drawingml/2006/main" xmlns:r="http://schemas.openxmlformats.org/officeDocument/2006/relationships" xmlns:p="http://schemas.openxmlformats.org/presentationml/2006/main">
-  <p:cSld name="">
+  <p:cSld>
     <p:bg>
       <p:bgRef idx="1001">
         <a:schemeClr val="bg1"/>
@@ -220,7 +239,7 @@
             </a:pPr>
             <a:fld id="{3632E96E-41F7-40C5-8419-297958CC00FA}" type="datetimeFigureOut">
               <a:rPr lang="it-IT"/>
-              <a:t>10/30/2013</a:t>
+              <a:t>18/10/2025</a:t>
             </a:fld>
             <a:endParaRPr lang="it-IT"/>
           </a:p>
@@ -230,7 +249,7 @@
         <p:nvSpPr>
           <p:cNvPr id="437000211" name="Segnaposto immagine diapositiva 3"/>
           <p:cNvSpPr>
-            <a:spLocks noChangeAspect="1" noGrp="1" noRot="1"/>
+            <a:spLocks noGrp="1" noRot="1" noChangeAspect="1"/>
           </p:cNvSpPr>
           <p:nvPr>
             <p:ph type="sldImg" idx="2"/>
@@ -332,7 +351,6 @@
               <a:rPr lang="it-IT"/>
               <a:t>Quinto livello</a:t>
             </a:r>
-            <a:endParaRPr lang="it-IT"/>
           </a:p>
         </p:txBody>
       </p:sp>
@@ -402,7 +420,7 @@
             </a:pPr>
             <a:fld id="{2E6999B8-B6B4-4561-A3CD-BBCDAB9FC9D9}" type="slidenum">
               <a:rPr lang="it-IT"/>
-              <a:t>‹#›</a:t>
+              <a:t>‹N›</a:t>
             </a:fld>
             <a:endParaRPr lang="it-IT"/>
           </a:p>
@@ -507,8 +525,8 @@
 </file>
 
 <file path=ppt/notesSlides/notesSlide1.xml><?xml version="1.0" encoding="utf-8"?>
-<p:notes xmlns:a="http://schemas.openxmlformats.org/drawingml/2006/main" xmlns:r="http://schemas.openxmlformats.org/officeDocument/2006/relationships" xmlns:p="http://schemas.openxmlformats.org/presentationml/2006/main" xmlns:m="http://schemas.openxmlformats.org/officeDocument/2006/math" xmlns:w="http://schemas.openxmlformats.org/wordprocessingml/2006/main">
-  <p:cSld name="">
+<p:notes xmlns:a="http://schemas.openxmlformats.org/drawingml/2006/main" xmlns:r="http://schemas.openxmlformats.org/officeDocument/2006/relationships" xmlns:p="http://schemas.openxmlformats.org/presentationml/2006/main">
+  <p:cSld>
     <p:spTree>
       <p:nvGrpSpPr>
         <p:cNvPr id="1" name=""/>
@@ -527,7 +545,7 @@
         <p:nvSpPr>
           <p:cNvPr id="1886709154" name="Segnaposto immagine diapositiva 1"/>
           <p:cNvSpPr>
-            <a:spLocks noChangeAspect="1" noGrp="1" noRot="1"/>
+            <a:spLocks noGrp="1" noRot="1" noChangeAspect="1"/>
           </p:cNvSpPr>
           <p:nvPr>
             <p:ph type="sldImg"/>
@@ -600,8 +618,8 @@
 </file>
 
 <file path=ppt/notesSlides/notesSlide10.xml><?xml version="1.0" encoding="utf-8"?>
-<p:notes xmlns:a="http://schemas.openxmlformats.org/drawingml/2006/main" xmlns:r="http://schemas.openxmlformats.org/officeDocument/2006/relationships" xmlns:p="http://schemas.openxmlformats.org/presentationml/2006/main" xmlns:m="http://schemas.openxmlformats.org/officeDocument/2006/math" xmlns:w="http://schemas.openxmlformats.org/wordprocessingml/2006/main">
-  <p:cSld name="">
+<p:notes xmlns:a="http://schemas.openxmlformats.org/drawingml/2006/main" xmlns:r="http://schemas.openxmlformats.org/officeDocument/2006/relationships" xmlns:p="http://schemas.openxmlformats.org/presentationml/2006/main">
+  <p:cSld>
     <p:spTree>
       <p:nvGrpSpPr>
         <p:cNvPr id="1" name=""/>
@@ -618,9 +636,9 @@
       </p:grpSpPr>
       <p:sp>
         <p:nvSpPr>
-          <p:cNvPr id="1172904136" name="Slide Image Placeholder 1"/>
-          <p:cNvSpPr>
-            <a:spLocks noChangeAspect="1" noGrp="1" noRot="1"/>
+          <p:cNvPr id="1997200584" name="Slide Image Placeholder 1"/>
+          <p:cNvSpPr>
+            <a:spLocks noGrp="1" noRot="1" noChangeAspect="1"/>
           </p:cNvSpPr>
           <p:nvPr>
             <p:ph type="sldImg"/>
@@ -630,7 +648,7 @@
       </p:sp>
       <p:sp>
         <p:nvSpPr>
-          <p:cNvPr id="167403374" name="Notes Placeholder 2"/>
+          <p:cNvPr id="1154652169" name="Notes Placeholder 2"/>
           <p:cNvSpPr>
             <a:spLocks noGrp="1"/>
           </p:cNvSpPr>
@@ -652,7 +670,7 @@
       </p:sp>
       <p:sp>
         <p:nvSpPr>
-          <p:cNvPr id="297425978" name="Slide Number Placeholder 3"/>
+          <p:cNvPr id="1893709921" name="Slide Number Placeholder 3"/>
           <p:cNvSpPr>
             <a:spLocks noGrp="1"/>
           </p:cNvSpPr>
@@ -668,9 +686,9 @@
             <a:pPr>
               <a:defRPr/>
             </a:pPr>
-            <a:fld id="{5F6D550A-33FF-F345-33F7-C626DCFF7893}" type="slidenum">
+            <a:fld id="{0A354E2A-FD91-BE13-31E5-F9D7895BA612}" type="slidenum">
               <a:rPr/>
-              <a:t/>
+              <a:t>12</a:t>
             </a:fld>
             <a:endParaRPr/>
           </a:p>
@@ -685,8 +703,8 @@
 </file>
 
 <file path=ppt/notesSlides/notesSlide11.xml><?xml version="1.0" encoding="utf-8"?>
-<p:notes xmlns:a="http://schemas.openxmlformats.org/drawingml/2006/main" xmlns:r="http://schemas.openxmlformats.org/officeDocument/2006/relationships" xmlns:p="http://schemas.openxmlformats.org/presentationml/2006/main" xmlns:m="http://schemas.openxmlformats.org/officeDocument/2006/math" xmlns:w="http://schemas.openxmlformats.org/wordprocessingml/2006/main">
-  <p:cSld name="">
+<p:notes xmlns:a="http://schemas.openxmlformats.org/drawingml/2006/main" xmlns:r="http://schemas.openxmlformats.org/officeDocument/2006/relationships" xmlns:p="http://schemas.openxmlformats.org/presentationml/2006/main">
+  <p:cSld>
     <p:spTree>
       <p:nvGrpSpPr>
         <p:cNvPr id="1" name=""/>
@@ -703,9 +721,9 @@
       </p:grpSpPr>
       <p:sp>
         <p:nvSpPr>
-          <p:cNvPr id="1997200584" name="Slide Image Placeholder 1"/>
-          <p:cNvSpPr>
-            <a:spLocks noChangeAspect="1" noGrp="1" noRot="1"/>
+          <p:cNvPr id="1348156743" name="Slide Image Placeholder 1"/>
+          <p:cNvSpPr>
+            <a:spLocks noGrp="1" noRot="1" noChangeAspect="1"/>
           </p:cNvSpPr>
           <p:nvPr>
             <p:ph type="sldImg"/>
@@ -715,7 +733,7 @@
       </p:sp>
       <p:sp>
         <p:nvSpPr>
-          <p:cNvPr id="1154652169" name="Notes Placeholder 2"/>
+          <p:cNvPr id="1598776959" name="Notes Placeholder 2"/>
           <p:cNvSpPr>
             <a:spLocks noGrp="1"/>
           </p:cNvSpPr>
@@ -737,7 +755,7 @@
       </p:sp>
       <p:sp>
         <p:nvSpPr>
-          <p:cNvPr id="1893709921" name="Slide Number Placeholder 3"/>
+          <p:cNvPr id="1403810376" name="Slide Number Placeholder 3"/>
           <p:cNvSpPr>
             <a:spLocks noGrp="1"/>
           </p:cNvSpPr>
@@ -753,9 +771,9 @@
             <a:pPr>
               <a:defRPr/>
             </a:pPr>
-            <a:fld id="{0A354E2A-FD91-BE13-31E5-F9D7895BA612}" type="slidenum">
+            <a:fld id="{B753592B-FCDD-6163-0739-6BAACF3A1F45}" type="slidenum">
               <a:rPr/>
-              <a:t/>
+              <a:t>13</a:t>
             </a:fld>
             <a:endParaRPr/>
           </a:p>
@@ -770,8 +788,8 @@
 </file>
 
 <file path=ppt/notesSlides/notesSlide12.xml><?xml version="1.0" encoding="utf-8"?>
-<p:notes xmlns:a="http://schemas.openxmlformats.org/drawingml/2006/main" xmlns:r="http://schemas.openxmlformats.org/officeDocument/2006/relationships" xmlns:p="http://schemas.openxmlformats.org/presentationml/2006/main" xmlns:m="http://schemas.openxmlformats.org/officeDocument/2006/math" xmlns:w="http://schemas.openxmlformats.org/wordprocessingml/2006/main">
-  <p:cSld name="">
+<p:notes xmlns:a="http://schemas.openxmlformats.org/drawingml/2006/main" xmlns:r="http://schemas.openxmlformats.org/officeDocument/2006/relationships" xmlns:p="http://schemas.openxmlformats.org/presentationml/2006/main">
+  <p:cSld>
     <p:spTree>
       <p:nvGrpSpPr>
         <p:cNvPr id="1" name=""/>
@@ -788,9 +806,9 @@
       </p:grpSpPr>
       <p:sp>
         <p:nvSpPr>
-          <p:cNvPr id="1348156743" name="Slide Image Placeholder 1"/>
-          <p:cNvSpPr>
-            <a:spLocks noChangeAspect="1" noGrp="1" noRot="1"/>
+          <p:cNvPr id="1087923633" name="Slide Image Placeholder 1"/>
+          <p:cNvSpPr>
+            <a:spLocks noGrp="1" noRot="1" noChangeAspect="1"/>
           </p:cNvSpPr>
           <p:nvPr>
             <p:ph type="sldImg"/>
@@ -800,7 +818,7 @@
       </p:sp>
       <p:sp>
         <p:nvSpPr>
-          <p:cNvPr id="1598776959" name="Notes Placeholder 2"/>
+          <p:cNvPr id="1530696377" name="Notes Placeholder 2"/>
           <p:cNvSpPr>
             <a:spLocks noGrp="1"/>
           </p:cNvSpPr>
@@ -822,7 +840,7 @@
       </p:sp>
       <p:sp>
         <p:nvSpPr>
-          <p:cNvPr id="1403810376" name="Slide Number Placeholder 3"/>
+          <p:cNvPr id="267858865" name="Slide Number Placeholder 3"/>
           <p:cNvSpPr>
             <a:spLocks noGrp="1"/>
           </p:cNvSpPr>
@@ -838,9 +856,9 @@
             <a:pPr>
               <a:defRPr/>
             </a:pPr>
-            <a:fld id="{B753592B-FCDD-6163-0739-6BAACF3A1F45}" type="slidenum">
+            <a:fld id="{1CD94749-6FDA-4E9C-36AB-734731960A87}" type="slidenum">
               <a:rPr/>
-              <a:t/>
+              <a:t>16</a:t>
             </a:fld>
             <a:endParaRPr/>
           </a:p>
@@ -855,8 +873,8 @@
 </file>
 
 <file path=ppt/notesSlides/notesSlide13.xml><?xml version="1.0" encoding="utf-8"?>
-<p:notes xmlns:a="http://schemas.openxmlformats.org/drawingml/2006/main" xmlns:r="http://schemas.openxmlformats.org/officeDocument/2006/relationships" xmlns:p="http://schemas.openxmlformats.org/presentationml/2006/main" xmlns:m="http://schemas.openxmlformats.org/officeDocument/2006/math" xmlns:w="http://schemas.openxmlformats.org/wordprocessingml/2006/main">
-  <p:cSld name="">
+<p:notes xmlns:a="http://schemas.openxmlformats.org/drawingml/2006/main" xmlns:r="http://schemas.openxmlformats.org/officeDocument/2006/relationships" xmlns:p="http://schemas.openxmlformats.org/presentationml/2006/main">
+  <p:cSld>
     <p:spTree>
       <p:nvGrpSpPr>
         <p:cNvPr id="1" name=""/>
@@ -873,9 +891,9 @@
       </p:grpSpPr>
       <p:sp>
         <p:nvSpPr>
-          <p:cNvPr id="1087923633" name="Slide Image Placeholder 1"/>
-          <p:cNvSpPr>
-            <a:spLocks noChangeAspect="1" noGrp="1" noRot="1"/>
+          <p:cNvPr id="1286070024" name="Slide Image Placeholder 1"/>
+          <p:cNvSpPr>
+            <a:spLocks noGrp="1" noRot="1" noChangeAspect="1"/>
           </p:cNvSpPr>
           <p:nvPr>
             <p:ph type="sldImg"/>
@@ -885,7 +903,7 @@
       </p:sp>
       <p:sp>
         <p:nvSpPr>
-          <p:cNvPr id="1530696377" name="Notes Placeholder 2"/>
+          <p:cNvPr id="2087769782" name="Notes Placeholder 2"/>
           <p:cNvSpPr>
             <a:spLocks noGrp="1"/>
           </p:cNvSpPr>
@@ -907,7 +925,7 @@
       </p:sp>
       <p:sp>
         <p:nvSpPr>
-          <p:cNvPr id="267858865" name="Slide Number Placeholder 3"/>
+          <p:cNvPr id="66322064" name="Slide Number Placeholder 3"/>
           <p:cNvSpPr>
             <a:spLocks noGrp="1"/>
           </p:cNvSpPr>
@@ -923,9 +941,9 @@
             <a:pPr>
               <a:defRPr/>
             </a:pPr>
-            <a:fld id="{1CD94749-6FDA-4E9C-36AB-734731960A87}" type="slidenum">
+            <a:fld id="{E2F52480-0813-D9C9-E145-46E7CB451224}" type="slidenum">
               <a:rPr/>
-              <a:t/>
+              <a:t>17</a:t>
             </a:fld>
             <a:endParaRPr/>
           </a:p>
@@ -940,8 +958,8 @@
 </file>
 
 <file path=ppt/notesSlides/notesSlide14.xml><?xml version="1.0" encoding="utf-8"?>
-<p:notes xmlns:a="http://schemas.openxmlformats.org/drawingml/2006/main" xmlns:r="http://schemas.openxmlformats.org/officeDocument/2006/relationships" xmlns:p="http://schemas.openxmlformats.org/presentationml/2006/main" xmlns:m="http://schemas.openxmlformats.org/officeDocument/2006/math" xmlns:w="http://schemas.openxmlformats.org/wordprocessingml/2006/main">
-  <p:cSld name="">
+<p:notes xmlns:a="http://schemas.openxmlformats.org/drawingml/2006/main" xmlns:r="http://schemas.openxmlformats.org/officeDocument/2006/relationships" xmlns:p="http://schemas.openxmlformats.org/presentationml/2006/main">
+  <p:cSld>
     <p:spTree>
       <p:nvGrpSpPr>
         <p:cNvPr id="1" name=""/>
@@ -958,9 +976,9 @@
       </p:grpSpPr>
       <p:sp>
         <p:nvSpPr>
-          <p:cNvPr id="1286070024" name="Slide Image Placeholder 1"/>
-          <p:cNvSpPr>
-            <a:spLocks noChangeAspect="1" noGrp="1" noRot="1"/>
+          <p:cNvPr id="695136953" name="Slide Image Placeholder 1"/>
+          <p:cNvSpPr>
+            <a:spLocks noGrp="1" noRot="1" noChangeAspect="1"/>
           </p:cNvSpPr>
           <p:nvPr>
             <p:ph type="sldImg"/>
@@ -970,7 +988,7 @@
       </p:sp>
       <p:sp>
         <p:nvSpPr>
-          <p:cNvPr id="2087769782" name="Notes Placeholder 2"/>
+          <p:cNvPr id="1993756006" name="Notes Placeholder 2"/>
           <p:cNvSpPr>
             <a:spLocks noGrp="1"/>
           </p:cNvSpPr>
@@ -992,7 +1010,7 @@
       </p:sp>
       <p:sp>
         <p:nvSpPr>
-          <p:cNvPr id="66322064" name="Slide Number Placeholder 3"/>
+          <p:cNvPr id="1801450287" name="Slide Number Placeholder 3"/>
           <p:cNvSpPr>
             <a:spLocks noGrp="1"/>
           </p:cNvSpPr>
@@ -1008,9 +1026,9 @@
             <a:pPr>
               <a:defRPr/>
             </a:pPr>
-            <a:fld id="{E2F52480-0813-D9C9-E145-46E7CB451224}" type="slidenum">
+            <a:fld id="{2CB3A339-E4F5-9849-5159-B780C46036EF}" type="slidenum">
               <a:rPr/>
-              <a:t/>
+              <a:t>18</a:t>
             </a:fld>
             <a:endParaRPr/>
           </a:p>
@@ -1025,8 +1043,8 @@
 </file>
 
 <file path=ppt/notesSlides/notesSlide15.xml><?xml version="1.0" encoding="utf-8"?>
-<p:notes xmlns:a="http://schemas.openxmlformats.org/drawingml/2006/main" xmlns:r="http://schemas.openxmlformats.org/officeDocument/2006/relationships" xmlns:p="http://schemas.openxmlformats.org/presentationml/2006/main" xmlns:m="http://schemas.openxmlformats.org/officeDocument/2006/math" xmlns:w="http://schemas.openxmlformats.org/wordprocessingml/2006/main">
-  <p:cSld name="">
+<p:notes xmlns:a="http://schemas.openxmlformats.org/drawingml/2006/main" xmlns:r="http://schemas.openxmlformats.org/officeDocument/2006/relationships" xmlns:p="http://schemas.openxmlformats.org/presentationml/2006/main">
+  <p:cSld>
     <p:spTree>
       <p:nvGrpSpPr>
         <p:cNvPr id="1" name=""/>
@@ -1043,9 +1061,9 @@
       </p:grpSpPr>
       <p:sp>
         <p:nvSpPr>
-          <p:cNvPr id="695136953" name="Slide Image Placeholder 1"/>
-          <p:cNvSpPr>
-            <a:spLocks noChangeAspect="1" noGrp="1" noRot="1"/>
+          <p:cNvPr id="1833777513" name="Slide Image Placeholder 1"/>
+          <p:cNvSpPr>
+            <a:spLocks noGrp="1" noRot="1" noChangeAspect="1"/>
           </p:cNvSpPr>
           <p:nvPr>
             <p:ph type="sldImg"/>
@@ -1055,7 +1073,7 @@
       </p:sp>
       <p:sp>
         <p:nvSpPr>
-          <p:cNvPr id="1993756006" name="Notes Placeholder 2"/>
+          <p:cNvPr id="1452218426" name="Notes Placeholder 2"/>
           <p:cNvSpPr>
             <a:spLocks noGrp="1"/>
           </p:cNvSpPr>
@@ -1077,7 +1095,7 @@
       </p:sp>
       <p:sp>
         <p:nvSpPr>
-          <p:cNvPr id="1801450287" name="Slide Number Placeholder 3"/>
+          <p:cNvPr id="2023098653" name="Slide Number Placeholder 3"/>
           <p:cNvSpPr>
             <a:spLocks noGrp="1"/>
           </p:cNvSpPr>
@@ -1093,9 +1111,9 @@
             <a:pPr>
               <a:defRPr/>
             </a:pPr>
-            <a:fld id="{2CB3A339-E4F5-9849-5159-B780C46036EF}" type="slidenum">
+            <a:fld id="{7754AAF7-24FB-4C7D-56D0-9F6828B47495}" type="slidenum">
               <a:rPr/>
-              <a:t/>
+              <a:t>19</a:t>
             </a:fld>
             <a:endParaRPr/>
           </a:p>
@@ -1110,8 +1128,8 @@
 </file>
 
 <file path=ppt/notesSlides/notesSlide16.xml><?xml version="1.0" encoding="utf-8"?>
-<p:notes xmlns:a="http://schemas.openxmlformats.org/drawingml/2006/main" xmlns:r="http://schemas.openxmlformats.org/officeDocument/2006/relationships" xmlns:p="http://schemas.openxmlformats.org/presentationml/2006/main" xmlns:m="http://schemas.openxmlformats.org/officeDocument/2006/math" xmlns:w="http://schemas.openxmlformats.org/wordprocessingml/2006/main">
-  <p:cSld name="">
+<p:notes xmlns:a="http://schemas.openxmlformats.org/drawingml/2006/main" xmlns:r="http://schemas.openxmlformats.org/officeDocument/2006/relationships" xmlns:p="http://schemas.openxmlformats.org/presentationml/2006/main">
+  <p:cSld>
     <p:spTree>
       <p:nvGrpSpPr>
         <p:cNvPr id="1" name=""/>
@@ -1128,9 +1146,9 @@
       </p:grpSpPr>
       <p:sp>
         <p:nvSpPr>
-          <p:cNvPr id="1833777513" name="Slide Image Placeholder 1"/>
-          <p:cNvSpPr>
-            <a:spLocks noChangeAspect="1" noGrp="1" noRot="1"/>
+          <p:cNvPr id="826642841" name="Slide Image Placeholder 1"/>
+          <p:cNvSpPr>
+            <a:spLocks noGrp="1" noRot="1" noChangeAspect="1"/>
           </p:cNvSpPr>
           <p:nvPr>
             <p:ph type="sldImg"/>
@@ -1140,7 +1158,7 @@
       </p:sp>
       <p:sp>
         <p:nvSpPr>
-          <p:cNvPr id="1452218426" name="Notes Placeholder 2"/>
+          <p:cNvPr id="170725483" name="Notes Placeholder 2"/>
           <p:cNvSpPr>
             <a:spLocks noGrp="1"/>
           </p:cNvSpPr>
@@ -1162,7 +1180,7 @@
       </p:sp>
       <p:sp>
         <p:nvSpPr>
-          <p:cNvPr id="2023098653" name="Slide Number Placeholder 3"/>
+          <p:cNvPr id="599569182" name="Slide Number Placeholder 3"/>
           <p:cNvSpPr>
             <a:spLocks noGrp="1"/>
           </p:cNvSpPr>
@@ -1178,9 +1196,9 @@
             <a:pPr>
               <a:defRPr/>
             </a:pPr>
-            <a:fld id="{7754AAF7-24FB-4C7D-56D0-9F6828B47495}" type="slidenum">
+            <a:fld id="{ECC01B90-6EF3-4614-96E6-28D52D163363}" type="slidenum">
               <a:rPr/>
-              <a:t/>
+              <a:t>20</a:t>
             </a:fld>
             <a:endParaRPr/>
           </a:p>
@@ -1195,8 +1213,8 @@
 </file>
 
 <file path=ppt/notesSlides/notesSlide17.xml><?xml version="1.0" encoding="utf-8"?>
-<p:notes xmlns:a="http://schemas.openxmlformats.org/drawingml/2006/main" xmlns:r="http://schemas.openxmlformats.org/officeDocument/2006/relationships" xmlns:p="http://schemas.openxmlformats.org/presentationml/2006/main" xmlns:m="http://schemas.openxmlformats.org/officeDocument/2006/math" xmlns:w="http://schemas.openxmlformats.org/wordprocessingml/2006/main">
-  <p:cSld name="">
+<p:notes xmlns:a="http://schemas.openxmlformats.org/drawingml/2006/main" xmlns:r="http://schemas.openxmlformats.org/officeDocument/2006/relationships" xmlns:p="http://schemas.openxmlformats.org/presentationml/2006/main">
+  <p:cSld>
     <p:spTree>
       <p:nvGrpSpPr>
         <p:cNvPr id="1" name=""/>
@@ -1213,9 +1231,9 @@
       </p:grpSpPr>
       <p:sp>
         <p:nvSpPr>
-          <p:cNvPr id="826642841" name="Slide Image Placeholder 1"/>
-          <p:cNvSpPr>
-            <a:spLocks noChangeAspect="1" noGrp="1" noRot="1"/>
+          <p:cNvPr id="1040290452" name="Slide Image Placeholder 1"/>
+          <p:cNvSpPr>
+            <a:spLocks noGrp="1" noRot="1" noChangeAspect="1"/>
           </p:cNvSpPr>
           <p:nvPr>
             <p:ph type="sldImg"/>
@@ -1225,7 +1243,7 @@
       </p:sp>
       <p:sp>
         <p:nvSpPr>
-          <p:cNvPr id="170725483" name="Notes Placeholder 2"/>
+          <p:cNvPr id="1677648333" name="Notes Placeholder 2"/>
           <p:cNvSpPr>
             <a:spLocks noGrp="1"/>
           </p:cNvSpPr>
@@ -1247,7 +1265,7 @@
       </p:sp>
       <p:sp>
         <p:nvSpPr>
-          <p:cNvPr id="599569182" name="Slide Number Placeholder 3"/>
+          <p:cNvPr id="1466620103" name="Slide Number Placeholder 3"/>
           <p:cNvSpPr>
             <a:spLocks noGrp="1"/>
           </p:cNvSpPr>
@@ -1263,9 +1281,9 @@
             <a:pPr>
               <a:defRPr/>
             </a:pPr>
-            <a:fld id="{ECC01B90-6EF3-4614-96E6-28D52D163363}" type="slidenum">
+            <a:fld id="{C1B0ED42-154C-37AC-EA60-9CE5185831C2}" type="slidenum">
               <a:rPr/>
-              <a:t/>
+              <a:t>21</a:t>
             </a:fld>
             <a:endParaRPr/>
           </a:p>
@@ -1280,8 +1298,8 @@
 </file>
 
 <file path=ppt/notesSlides/notesSlide18.xml><?xml version="1.0" encoding="utf-8"?>
-<p:notes xmlns:a="http://schemas.openxmlformats.org/drawingml/2006/main" xmlns:r="http://schemas.openxmlformats.org/officeDocument/2006/relationships" xmlns:p="http://schemas.openxmlformats.org/presentationml/2006/main" xmlns:m="http://schemas.openxmlformats.org/officeDocument/2006/math" xmlns:w="http://schemas.openxmlformats.org/wordprocessingml/2006/main">
-  <p:cSld name="">
+<p:notes xmlns:a="http://schemas.openxmlformats.org/drawingml/2006/main" xmlns:r="http://schemas.openxmlformats.org/officeDocument/2006/relationships" xmlns:p="http://schemas.openxmlformats.org/presentationml/2006/main">
+  <p:cSld>
     <p:spTree>
       <p:nvGrpSpPr>
         <p:cNvPr id="1" name=""/>
@@ -1298,9 +1316,9 @@
       </p:grpSpPr>
       <p:sp>
         <p:nvSpPr>
-          <p:cNvPr id="1040290452" name="Slide Image Placeholder 1"/>
-          <p:cNvSpPr>
-            <a:spLocks noChangeAspect="1" noGrp="1" noRot="1"/>
+          <p:cNvPr id="361328429" name="Slide Image Placeholder 1"/>
+          <p:cNvSpPr>
+            <a:spLocks noGrp="1" noRot="1" noChangeAspect="1"/>
           </p:cNvSpPr>
           <p:nvPr>
             <p:ph type="sldImg"/>
@@ -1310,7 +1328,7 @@
       </p:sp>
       <p:sp>
         <p:nvSpPr>
-          <p:cNvPr id="1677648333" name="Notes Placeholder 2"/>
+          <p:cNvPr id="2076207588" name="Notes Placeholder 2"/>
           <p:cNvSpPr>
             <a:spLocks noGrp="1"/>
           </p:cNvSpPr>
@@ -1332,7 +1350,7 @@
       </p:sp>
       <p:sp>
         <p:nvSpPr>
-          <p:cNvPr id="1466620103" name="Slide Number Placeholder 3"/>
+          <p:cNvPr id="1342391195" name="Slide Number Placeholder 3"/>
           <p:cNvSpPr>
             <a:spLocks noGrp="1"/>
           </p:cNvSpPr>
@@ -1348,9 +1366,9 @@
             <a:pPr>
               <a:defRPr/>
             </a:pPr>
-            <a:fld id="{C1B0ED42-154C-37AC-EA60-9CE5185831C2}" type="slidenum">
+            <a:fld id="{97CE3B5A-C7B8-C31E-D05F-021B77FFEF0E}" type="slidenum">
               <a:rPr/>
-              <a:t/>
+              <a:t>22</a:t>
             </a:fld>
             <a:endParaRPr/>
           </a:p>
@@ -1365,8 +1383,8 @@
 </file>
 
 <file path=ppt/notesSlides/notesSlide19.xml><?xml version="1.0" encoding="utf-8"?>
-<p:notes xmlns:a="http://schemas.openxmlformats.org/drawingml/2006/main" xmlns:r="http://schemas.openxmlformats.org/officeDocument/2006/relationships" xmlns:p="http://schemas.openxmlformats.org/presentationml/2006/main" xmlns:m="http://schemas.openxmlformats.org/officeDocument/2006/math" xmlns:w="http://schemas.openxmlformats.org/wordprocessingml/2006/main">
-  <p:cSld name="">
+<p:notes xmlns:a="http://schemas.openxmlformats.org/drawingml/2006/main" xmlns:r="http://schemas.openxmlformats.org/officeDocument/2006/relationships" xmlns:p="http://schemas.openxmlformats.org/presentationml/2006/main">
+  <p:cSld>
     <p:spTree>
       <p:nvGrpSpPr>
         <p:cNvPr id="1" name=""/>
@@ -1383,9 +1401,9 @@
       </p:grpSpPr>
       <p:sp>
         <p:nvSpPr>
-          <p:cNvPr id="361328429" name="Slide Image Placeholder 1"/>
-          <p:cNvSpPr>
-            <a:spLocks noChangeAspect="1" noGrp="1" noRot="1"/>
+          <p:cNvPr id="304025030" name="Slide Image Placeholder 1"/>
+          <p:cNvSpPr>
+            <a:spLocks noGrp="1" noRot="1" noChangeAspect="1"/>
           </p:cNvSpPr>
           <p:nvPr>
             <p:ph type="sldImg"/>
@@ -1395,7 +1413,7 @@
       </p:sp>
       <p:sp>
         <p:nvSpPr>
-          <p:cNvPr id="2076207588" name="Notes Placeholder 2"/>
+          <p:cNvPr id="1216711154" name="Notes Placeholder 2"/>
           <p:cNvSpPr>
             <a:spLocks noGrp="1"/>
           </p:cNvSpPr>
@@ -1417,7 +1435,7 @@
       </p:sp>
       <p:sp>
         <p:nvSpPr>
-          <p:cNvPr id="1342391195" name="Slide Number Placeholder 3"/>
+          <p:cNvPr id="1437157295" name="Slide Number Placeholder 3"/>
           <p:cNvSpPr>
             <a:spLocks noGrp="1"/>
           </p:cNvSpPr>
@@ -1433,9 +1451,9 @@
             <a:pPr>
               <a:defRPr/>
             </a:pPr>
-            <a:fld id="{97CE3B5A-C7B8-C31E-D05F-021B77FFEF0E}" type="slidenum">
+            <a:fld id="{373A4F64-1DDB-898D-3141-351BAF57DA12}" type="slidenum">
               <a:rPr/>
-              <a:t/>
+              <a:t>23</a:t>
             </a:fld>
             <a:endParaRPr/>
           </a:p>
@@ -1450,8 +1468,8 @@
 </file>
 
 <file path=ppt/notesSlides/notesSlide2.xml><?xml version="1.0" encoding="utf-8"?>
-<p:notes xmlns:a="http://schemas.openxmlformats.org/drawingml/2006/main" xmlns:r="http://schemas.openxmlformats.org/officeDocument/2006/relationships" xmlns:p="http://schemas.openxmlformats.org/presentationml/2006/main" xmlns:m="http://schemas.openxmlformats.org/officeDocument/2006/math" xmlns:w="http://schemas.openxmlformats.org/wordprocessingml/2006/main">
-  <p:cSld name="">
+<p:notes xmlns:a="http://schemas.openxmlformats.org/drawingml/2006/main" xmlns:r="http://schemas.openxmlformats.org/officeDocument/2006/relationships" xmlns:p="http://schemas.openxmlformats.org/presentationml/2006/main">
+  <p:cSld>
     <p:spTree>
       <p:nvGrpSpPr>
         <p:cNvPr id="1" name=""/>
@@ -1470,7 +1488,7 @@
         <p:nvSpPr>
           <p:cNvPr id="909963068" name="Slide Image Placeholder 1"/>
           <p:cNvSpPr>
-            <a:spLocks noChangeAspect="1" noGrp="1" noRot="1"/>
+            <a:spLocks noGrp="1" noRot="1" noChangeAspect="1"/>
           </p:cNvSpPr>
           <p:nvPr>
             <p:ph type="sldImg"/>
@@ -1520,7 +1538,7 @@
             </a:pPr>
             <a:fld id="{590700E5-196F-F5BA-0D79-8AB7D4EE95B4}" type="slidenum">
               <a:rPr/>
-              <a:t/>
+              <a:t>2</a:t>
             </a:fld>
             <a:endParaRPr/>
           </a:p>
@@ -1535,8 +1553,8 @@
 </file>
 
 <file path=ppt/notesSlides/notesSlide20.xml><?xml version="1.0" encoding="utf-8"?>
-<p:notes xmlns:a="http://schemas.openxmlformats.org/drawingml/2006/main" xmlns:r="http://schemas.openxmlformats.org/officeDocument/2006/relationships" xmlns:p="http://schemas.openxmlformats.org/presentationml/2006/main" xmlns:m="http://schemas.openxmlformats.org/officeDocument/2006/math" xmlns:w="http://schemas.openxmlformats.org/wordprocessingml/2006/main">
-  <p:cSld name="">
+<p:notes xmlns:a="http://schemas.openxmlformats.org/drawingml/2006/main" xmlns:r="http://schemas.openxmlformats.org/officeDocument/2006/relationships" xmlns:p="http://schemas.openxmlformats.org/presentationml/2006/main">
+  <p:cSld>
     <p:spTree>
       <p:nvGrpSpPr>
         <p:cNvPr id="1" name=""/>
@@ -1553,9 +1571,9 @@
       </p:grpSpPr>
       <p:sp>
         <p:nvSpPr>
-          <p:cNvPr id="304025030" name="Slide Image Placeholder 1"/>
-          <p:cNvSpPr>
-            <a:spLocks noChangeAspect="1" noGrp="1" noRot="1"/>
+          <p:cNvPr id="358610792" name="Slide Image Placeholder 1"/>
+          <p:cNvSpPr>
+            <a:spLocks noGrp="1" noRot="1" noChangeAspect="1"/>
           </p:cNvSpPr>
           <p:nvPr>
             <p:ph type="sldImg"/>
@@ -1565,7 +1583,7 @@
       </p:sp>
       <p:sp>
         <p:nvSpPr>
-          <p:cNvPr id="1216711154" name="Notes Placeholder 2"/>
+          <p:cNvPr id="976864696" name="Notes Placeholder 2"/>
           <p:cNvSpPr>
             <a:spLocks noGrp="1"/>
           </p:cNvSpPr>
@@ -1587,7 +1605,7 @@
       </p:sp>
       <p:sp>
         <p:nvSpPr>
-          <p:cNvPr id="1437157295" name="Slide Number Placeholder 3"/>
+          <p:cNvPr id="515598540" name="Slide Number Placeholder 3"/>
           <p:cNvSpPr>
             <a:spLocks noGrp="1"/>
           </p:cNvSpPr>
@@ -1603,9 +1621,9 @@
             <a:pPr>
               <a:defRPr/>
             </a:pPr>
-            <a:fld id="{373A4F64-1DDB-898D-3141-351BAF57DA12}" type="slidenum">
+            <a:fld id="{E0EEA2AC-6940-83FF-9A62-FDE019F8CFBA}" type="slidenum">
               <a:rPr/>
-              <a:t/>
+              <a:t>24</a:t>
             </a:fld>
             <a:endParaRPr/>
           </a:p>
@@ -1620,8 +1638,8 @@
 </file>
 
 <file path=ppt/notesSlides/notesSlide21.xml><?xml version="1.0" encoding="utf-8"?>
-<p:notes xmlns:a="http://schemas.openxmlformats.org/drawingml/2006/main" xmlns:r="http://schemas.openxmlformats.org/officeDocument/2006/relationships" xmlns:p="http://schemas.openxmlformats.org/presentationml/2006/main" xmlns:m="http://schemas.openxmlformats.org/officeDocument/2006/math" xmlns:w="http://schemas.openxmlformats.org/wordprocessingml/2006/main">
-  <p:cSld name="">
+<p:notes xmlns:a="http://schemas.openxmlformats.org/drawingml/2006/main" xmlns:r="http://schemas.openxmlformats.org/officeDocument/2006/relationships" xmlns:p="http://schemas.openxmlformats.org/presentationml/2006/main">
+  <p:cSld>
     <p:spTree>
       <p:nvGrpSpPr>
         <p:cNvPr id="1" name=""/>
@@ -1638,9 +1656,9 @@
       </p:grpSpPr>
       <p:sp>
         <p:nvSpPr>
-          <p:cNvPr id="358610792" name="Slide Image Placeholder 1"/>
-          <p:cNvSpPr>
-            <a:spLocks noChangeAspect="1" noGrp="1" noRot="1"/>
+          <p:cNvPr id="661484407" name="Slide Image Placeholder 1"/>
+          <p:cNvSpPr>
+            <a:spLocks noGrp="1" noRot="1" noChangeAspect="1"/>
           </p:cNvSpPr>
           <p:nvPr>
             <p:ph type="sldImg"/>
@@ -1650,7 +1668,7 @@
       </p:sp>
       <p:sp>
         <p:nvSpPr>
-          <p:cNvPr id="976864696" name="Notes Placeholder 2"/>
+          <p:cNvPr id="1567864133" name="Notes Placeholder 2"/>
           <p:cNvSpPr>
             <a:spLocks noGrp="1"/>
           </p:cNvSpPr>
@@ -1672,7 +1690,7 @@
       </p:sp>
       <p:sp>
         <p:nvSpPr>
-          <p:cNvPr id="515598540" name="Slide Number Placeholder 3"/>
+          <p:cNvPr id="356777442" name="Slide Number Placeholder 3"/>
           <p:cNvSpPr>
             <a:spLocks noGrp="1"/>
           </p:cNvSpPr>
@@ -1688,9 +1706,9 @@
             <a:pPr>
               <a:defRPr/>
             </a:pPr>
-            <a:fld id="{E0EEA2AC-6940-83FF-9A62-FDE019F8CFBA}" type="slidenum">
+            <a:fld id="{34DDF272-15C9-97B8-0696-B071723A3A34}" type="slidenum">
               <a:rPr/>
-              <a:t/>
+              <a:t>25</a:t>
             </a:fld>
             <a:endParaRPr/>
           </a:p>
@@ -1705,8 +1723,8 @@
 </file>
 
 <file path=ppt/notesSlides/notesSlide22.xml><?xml version="1.0" encoding="utf-8"?>
-<p:notes xmlns:a="http://schemas.openxmlformats.org/drawingml/2006/main" xmlns:r="http://schemas.openxmlformats.org/officeDocument/2006/relationships" xmlns:p="http://schemas.openxmlformats.org/presentationml/2006/main" xmlns:m="http://schemas.openxmlformats.org/officeDocument/2006/math" xmlns:w="http://schemas.openxmlformats.org/wordprocessingml/2006/main">
-  <p:cSld name="">
+<p:notes xmlns:a="http://schemas.openxmlformats.org/drawingml/2006/main" xmlns:r="http://schemas.openxmlformats.org/officeDocument/2006/relationships" xmlns:p="http://schemas.openxmlformats.org/presentationml/2006/main">
+  <p:cSld>
     <p:spTree>
       <p:nvGrpSpPr>
         <p:cNvPr id="1" name=""/>
@@ -1723,9 +1741,9 @@
       </p:grpSpPr>
       <p:sp>
         <p:nvSpPr>
-          <p:cNvPr id="661484407" name="Slide Image Placeholder 1"/>
-          <p:cNvSpPr>
-            <a:spLocks noChangeAspect="1" noGrp="1" noRot="1"/>
+          <p:cNvPr id="1078166060" name="Slide Image Placeholder 1"/>
+          <p:cNvSpPr>
+            <a:spLocks noGrp="1" noRot="1" noChangeAspect="1"/>
           </p:cNvSpPr>
           <p:nvPr>
             <p:ph type="sldImg"/>
@@ -1735,7 +1753,7 @@
       </p:sp>
       <p:sp>
         <p:nvSpPr>
-          <p:cNvPr id="1567864133" name="Notes Placeholder 2"/>
+          <p:cNvPr id="1274845390" name="Notes Placeholder 2"/>
           <p:cNvSpPr>
             <a:spLocks noGrp="1"/>
           </p:cNvSpPr>
@@ -1757,7 +1775,7 @@
       </p:sp>
       <p:sp>
         <p:nvSpPr>
-          <p:cNvPr id="356777442" name="Slide Number Placeholder 3"/>
+          <p:cNvPr id="340640237" name="Slide Number Placeholder 3"/>
           <p:cNvSpPr>
             <a:spLocks noGrp="1"/>
           </p:cNvSpPr>
@@ -1773,9 +1791,9 @@
             <a:pPr>
               <a:defRPr/>
             </a:pPr>
-            <a:fld id="{34DDF272-15C9-97B8-0696-B071723A3A34}" type="slidenum">
+            <a:fld id="{63195650-B0F5-4319-E0B1-4A630F16C93D}" type="slidenum">
               <a:rPr/>
-              <a:t/>
+              <a:t>26</a:t>
             </a:fld>
             <a:endParaRPr/>
           </a:p>
@@ -1789,9 +1807,9 @@
 </p:notes>
 </file>
 
-<file path=ppt/notesSlides/notesSlide23.xml><?xml version="1.0" encoding="utf-8"?>
-<p:notes xmlns:a="http://schemas.openxmlformats.org/drawingml/2006/main" xmlns:r="http://schemas.openxmlformats.org/officeDocument/2006/relationships" xmlns:p="http://schemas.openxmlformats.org/presentationml/2006/main" xmlns:m="http://schemas.openxmlformats.org/officeDocument/2006/math" xmlns:w="http://schemas.openxmlformats.org/wordprocessingml/2006/main">
-  <p:cSld name="">
+<file path=ppt/notesSlides/notesSlide3.xml><?xml version="1.0" encoding="utf-8"?>
+<p:notes xmlns:a="http://schemas.openxmlformats.org/drawingml/2006/main" xmlns:r="http://schemas.openxmlformats.org/officeDocument/2006/relationships" xmlns:p="http://schemas.openxmlformats.org/presentationml/2006/main">
+  <p:cSld>
     <p:spTree>
       <p:nvGrpSpPr>
         <p:cNvPr id="1" name=""/>
@@ -1808,9 +1826,9 @@
       </p:grpSpPr>
       <p:sp>
         <p:nvSpPr>
-          <p:cNvPr id="1078166060" name="Slide Image Placeholder 1"/>
-          <p:cNvSpPr>
-            <a:spLocks noChangeAspect="1" noGrp="1" noRot="1"/>
+          <p:cNvPr id="1891127264" name="Slide Image Placeholder 1"/>
+          <p:cNvSpPr>
+            <a:spLocks noGrp="1" noRot="1" noChangeAspect="1"/>
           </p:cNvSpPr>
           <p:nvPr>
             <p:ph type="sldImg"/>
@@ -1820,7 +1838,7 @@
       </p:sp>
       <p:sp>
         <p:nvSpPr>
-          <p:cNvPr id="1274845390" name="Notes Placeholder 2"/>
+          <p:cNvPr id="456444719" name="Notes Placeholder 2"/>
           <p:cNvSpPr>
             <a:spLocks noGrp="1"/>
           </p:cNvSpPr>
@@ -1842,7 +1860,7 @@
       </p:sp>
       <p:sp>
         <p:nvSpPr>
-          <p:cNvPr id="340640237" name="Slide Number Placeholder 3"/>
+          <p:cNvPr id="266270473" name="Slide Number Placeholder 3"/>
           <p:cNvSpPr>
             <a:spLocks noGrp="1"/>
           </p:cNvSpPr>
@@ -1858,9 +1876,9 @@
             <a:pPr>
               <a:defRPr/>
             </a:pPr>
-            <a:fld id="{63195650-B0F5-4319-E0B1-4A630F16C93D}" type="slidenum">
+            <a:fld id="{B52D84ED-ECE8-373D-C4B2-0C151F616E20}" type="slidenum">
               <a:rPr/>
-              <a:t/>
+              <a:t>3</a:t>
             </a:fld>
             <a:endParaRPr/>
           </a:p>
@@ -1874,9 +1892,9 @@
 </p:notes>
 </file>
 
-<file path=ppt/notesSlides/notesSlide3.xml><?xml version="1.0" encoding="utf-8"?>
-<p:notes xmlns:a="http://schemas.openxmlformats.org/drawingml/2006/main" xmlns:r="http://schemas.openxmlformats.org/officeDocument/2006/relationships" xmlns:p="http://schemas.openxmlformats.org/presentationml/2006/main" xmlns:m="http://schemas.openxmlformats.org/officeDocument/2006/math" xmlns:w="http://schemas.openxmlformats.org/wordprocessingml/2006/main">
-  <p:cSld name="">
+<file path=ppt/notesSlides/notesSlide4.xml><?xml version="1.0" encoding="utf-8"?>
+<p:notes xmlns:a="http://schemas.openxmlformats.org/drawingml/2006/main" xmlns:r="http://schemas.openxmlformats.org/officeDocument/2006/relationships" xmlns:p="http://schemas.openxmlformats.org/presentationml/2006/main">
+  <p:cSld>
     <p:spTree>
       <p:nvGrpSpPr>
         <p:cNvPr id="1" name=""/>
@@ -1893,9 +1911,9 @@
       </p:grpSpPr>
       <p:sp>
         <p:nvSpPr>
-          <p:cNvPr id="1891127264" name="Slide Image Placeholder 1"/>
-          <p:cNvSpPr>
-            <a:spLocks noChangeAspect="1" noGrp="1" noRot="1"/>
+          <p:cNvPr id="162645574" name="Slide Image Placeholder 1"/>
+          <p:cNvSpPr>
+            <a:spLocks noGrp="1" noRot="1" noChangeAspect="1"/>
           </p:cNvSpPr>
           <p:nvPr>
             <p:ph type="sldImg"/>
@@ -1905,7 +1923,7 @@
       </p:sp>
       <p:sp>
         <p:nvSpPr>
-          <p:cNvPr id="456444719" name="Notes Placeholder 2"/>
+          <p:cNvPr id="506651949" name="Notes Placeholder 2"/>
           <p:cNvSpPr>
             <a:spLocks noGrp="1"/>
           </p:cNvSpPr>
@@ -1927,7 +1945,7 @@
       </p:sp>
       <p:sp>
         <p:nvSpPr>
-          <p:cNvPr id="266270473" name="Slide Number Placeholder 3"/>
+          <p:cNvPr id="2002783030" name="Slide Number Placeholder 3"/>
           <p:cNvSpPr>
             <a:spLocks noGrp="1"/>
           </p:cNvSpPr>
@@ -1943,9 +1961,9 @@
             <a:pPr>
               <a:defRPr/>
             </a:pPr>
-            <a:fld id="{B52D84ED-ECE8-373D-C4B2-0C151F616E20}" type="slidenum">
+            <a:fld id="{24D98B3A-AE8A-2B48-B60D-2D19AEA09961}" type="slidenum">
               <a:rPr/>
-              <a:t/>
+              <a:t>4</a:t>
             </a:fld>
             <a:endParaRPr/>
           </a:p>
@@ -1959,9 +1977,9 @@
 </p:notes>
 </file>
 
-<file path=ppt/notesSlides/notesSlide4.xml><?xml version="1.0" encoding="utf-8"?>
-<p:notes xmlns:a="http://schemas.openxmlformats.org/drawingml/2006/main" xmlns:r="http://schemas.openxmlformats.org/officeDocument/2006/relationships" xmlns:p="http://schemas.openxmlformats.org/presentationml/2006/main" xmlns:m="http://schemas.openxmlformats.org/officeDocument/2006/math" xmlns:w="http://schemas.openxmlformats.org/wordprocessingml/2006/main">
-  <p:cSld name="">
+<file path=ppt/notesSlides/notesSlide5.xml><?xml version="1.0" encoding="utf-8"?>
+<p:notes xmlns:a="http://schemas.openxmlformats.org/drawingml/2006/main" xmlns:r="http://schemas.openxmlformats.org/officeDocument/2006/relationships" xmlns:p="http://schemas.openxmlformats.org/presentationml/2006/main">
+  <p:cSld>
     <p:spTree>
       <p:nvGrpSpPr>
         <p:cNvPr id="1" name=""/>
@@ -1978,9 +1996,9 @@
       </p:grpSpPr>
       <p:sp>
         <p:nvSpPr>
-          <p:cNvPr id="162645574" name="Slide Image Placeholder 1"/>
-          <p:cNvSpPr>
-            <a:spLocks noChangeAspect="1" noGrp="1" noRot="1"/>
+          <p:cNvPr id="1803314977" name="Slide Image Placeholder 1"/>
+          <p:cNvSpPr>
+            <a:spLocks noGrp="1" noRot="1" noChangeAspect="1"/>
           </p:cNvSpPr>
           <p:nvPr>
             <p:ph type="sldImg"/>
@@ -1990,7 +2008,7 @@
       </p:sp>
       <p:sp>
         <p:nvSpPr>
-          <p:cNvPr id="506651949" name="Notes Placeholder 2"/>
+          <p:cNvPr id="1500213668" name="Notes Placeholder 2"/>
           <p:cNvSpPr>
             <a:spLocks noGrp="1"/>
           </p:cNvSpPr>
@@ -2012,7 +2030,7 @@
       </p:sp>
       <p:sp>
         <p:nvSpPr>
-          <p:cNvPr id="2002783030" name="Slide Number Placeholder 3"/>
+          <p:cNvPr id="1505858981" name="Slide Number Placeholder 3"/>
           <p:cNvSpPr>
             <a:spLocks noGrp="1"/>
           </p:cNvSpPr>
@@ -2028,9 +2046,9 @@
             <a:pPr>
               <a:defRPr/>
             </a:pPr>
-            <a:fld id="{24D98B3A-AE8A-2B48-B60D-2D19AEA09961}" type="slidenum">
+            <a:fld id="{82BD46CB-D826-5F31-9C25-5AA9FC7A4C14}" type="slidenum">
               <a:rPr/>
-              <a:t/>
+              <a:t>5</a:t>
             </a:fld>
             <a:endParaRPr/>
           </a:p>
@@ -2044,9 +2062,9 @@
 </p:notes>
 </file>
 
-<file path=ppt/notesSlides/notesSlide5.xml><?xml version="1.0" encoding="utf-8"?>
-<p:notes xmlns:a="http://schemas.openxmlformats.org/drawingml/2006/main" xmlns:r="http://schemas.openxmlformats.org/officeDocument/2006/relationships" xmlns:p="http://schemas.openxmlformats.org/presentationml/2006/main" xmlns:m="http://schemas.openxmlformats.org/officeDocument/2006/math" xmlns:w="http://schemas.openxmlformats.org/wordprocessingml/2006/main">
-  <p:cSld name="">
+<file path=ppt/notesSlides/notesSlide6.xml><?xml version="1.0" encoding="utf-8"?>
+<p:notes xmlns:a="http://schemas.openxmlformats.org/drawingml/2006/main" xmlns:r="http://schemas.openxmlformats.org/officeDocument/2006/relationships" xmlns:p="http://schemas.openxmlformats.org/presentationml/2006/main">
+  <p:cSld>
     <p:spTree>
       <p:nvGrpSpPr>
         <p:cNvPr id="1" name=""/>
@@ -2063,9 +2081,9 @@
       </p:grpSpPr>
       <p:sp>
         <p:nvSpPr>
-          <p:cNvPr id="1803314977" name="Slide Image Placeholder 1"/>
-          <p:cNvSpPr>
-            <a:spLocks noChangeAspect="1" noGrp="1" noRot="1"/>
+          <p:cNvPr id="1637556594" name="Slide Image Placeholder 1"/>
+          <p:cNvSpPr>
+            <a:spLocks noGrp="1" noRot="1" noChangeAspect="1"/>
           </p:cNvSpPr>
           <p:nvPr>
             <p:ph type="sldImg"/>
@@ -2075,7 +2093,7 @@
       </p:sp>
       <p:sp>
         <p:nvSpPr>
-          <p:cNvPr id="1500213668" name="Notes Placeholder 2"/>
+          <p:cNvPr id="2099664211" name="Notes Placeholder 2"/>
           <p:cNvSpPr>
             <a:spLocks noGrp="1"/>
           </p:cNvSpPr>
@@ -2097,7 +2115,7 @@
       </p:sp>
       <p:sp>
         <p:nvSpPr>
-          <p:cNvPr id="1505858981" name="Slide Number Placeholder 3"/>
+          <p:cNvPr id="863438736" name="Slide Number Placeholder 3"/>
           <p:cNvSpPr>
             <a:spLocks noGrp="1"/>
           </p:cNvSpPr>
@@ -2113,9 +2131,9 @@
             <a:pPr>
               <a:defRPr/>
             </a:pPr>
-            <a:fld id="{82BD46CB-D826-5F31-9C25-5AA9FC7A4C14}" type="slidenum">
+            <a:fld id="{2C2480C3-7ECA-BEA5-1D8D-6A196042D57D}" type="slidenum">
               <a:rPr/>
-              <a:t/>
+              <a:t>6</a:t>
             </a:fld>
             <a:endParaRPr/>
           </a:p>
@@ -2129,9 +2147,9 @@
 </p:notes>
 </file>
 
-<file path=ppt/notesSlides/notesSlide6.xml><?xml version="1.0" encoding="utf-8"?>
-<p:notes xmlns:a="http://schemas.openxmlformats.org/drawingml/2006/main" xmlns:r="http://schemas.openxmlformats.org/officeDocument/2006/relationships" xmlns:p="http://schemas.openxmlformats.org/presentationml/2006/main" xmlns:m="http://schemas.openxmlformats.org/officeDocument/2006/math" xmlns:w="http://schemas.openxmlformats.org/wordprocessingml/2006/main">
-  <p:cSld name="">
+<file path=ppt/notesSlides/notesSlide7.xml><?xml version="1.0" encoding="utf-8"?>
+<p:notes xmlns:a="http://schemas.openxmlformats.org/drawingml/2006/main" xmlns:r="http://schemas.openxmlformats.org/officeDocument/2006/relationships" xmlns:p="http://schemas.openxmlformats.org/presentationml/2006/main">
+  <p:cSld>
     <p:spTree>
       <p:nvGrpSpPr>
         <p:cNvPr id="1" name=""/>
@@ -2148,9 +2166,9 @@
       </p:grpSpPr>
       <p:sp>
         <p:nvSpPr>
-          <p:cNvPr id="1637556594" name="Slide Image Placeholder 1"/>
-          <p:cNvSpPr>
-            <a:spLocks noChangeAspect="1" noGrp="1" noRot="1"/>
+          <p:cNvPr id="1866783340" name="Slide Image Placeholder 1"/>
+          <p:cNvSpPr>
+            <a:spLocks noGrp="1" noRot="1" noChangeAspect="1"/>
           </p:cNvSpPr>
           <p:nvPr>
             <p:ph type="sldImg"/>
@@ -2160,7 +2178,7 @@
       </p:sp>
       <p:sp>
         <p:nvSpPr>
-          <p:cNvPr id="2099664211" name="Notes Placeholder 2"/>
+          <p:cNvPr id="438746694" name="Notes Placeholder 2"/>
           <p:cNvSpPr>
             <a:spLocks noGrp="1"/>
           </p:cNvSpPr>
@@ -2182,7 +2200,7 @@
       </p:sp>
       <p:sp>
         <p:nvSpPr>
-          <p:cNvPr id="863438736" name="Slide Number Placeholder 3"/>
+          <p:cNvPr id="1825001365" name="Slide Number Placeholder 3"/>
           <p:cNvSpPr>
             <a:spLocks noGrp="1"/>
           </p:cNvSpPr>
@@ -2198,9 +2216,9 @@
             <a:pPr>
               <a:defRPr/>
             </a:pPr>
-            <a:fld id="{2C2480C3-7ECA-BEA5-1D8D-6A196042D57D}" type="slidenum">
+            <a:fld id="{CFCBDFB4-5DE2-4395-7D2B-3F76437FF0D3}" type="slidenum">
               <a:rPr/>
-              <a:t/>
+              <a:t>7</a:t>
             </a:fld>
             <a:endParaRPr/>
           </a:p>
@@ -2214,9 +2232,9 @@
 </p:notes>
 </file>
 
-<file path=ppt/notesSlides/notesSlide7.xml><?xml version="1.0" encoding="utf-8"?>
-<p:notes xmlns:a="http://schemas.openxmlformats.org/drawingml/2006/main" xmlns:r="http://schemas.openxmlformats.org/officeDocument/2006/relationships" xmlns:p="http://schemas.openxmlformats.org/presentationml/2006/main" xmlns:m="http://schemas.openxmlformats.org/officeDocument/2006/math" xmlns:w="http://schemas.openxmlformats.org/wordprocessingml/2006/main">
-  <p:cSld name="">
+<file path=ppt/notesSlides/notesSlide8.xml><?xml version="1.0" encoding="utf-8"?>
+<p:notes xmlns:a="http://schemas.openxmlformats.org/drawingml/2006/main" xmlns:r="http://schemas.openxmlformats.org/officeDocument/2006/relationships" xmlns:p="http://schemas.openxmlformats.org/presentationml/2006/main">
+  <p:cSld>
     <p:spTree>
       <p:nvGrpSpPr>
         <p:cNvPr id="1" name=""/>
@@ -2233,9 +2251,9 @@
       </p:grpSpPr>
       <p:sp>
         <p:nvSpPr>
-          <p:cNvPr id="1866783340" name="Slide Image Placeholder 1"/>
-          <p:cNvSpPr>
-            <a:spLocks noChangeAspect="1" noGrp="1" noRot="1"/>
+          <p:cNvPr id="1279749026" name="Slide Image Placeholder 1"/>
+          <p:cNvSpPr>
+            <a:spLocks noGrp="1" noRot="1" noChangeAspect="1"/>
           </p:cNvSpPr>
           <p:nvPr>
             <p:ph type="sldImg"/>
@@ -2245,7 +2263,7 @@
       </p:sp>
       <p:sp>
         <p:nvSpPr>
-          <p:cNvPr id="438746694" name="Notes Placeholder 2"/>
+          <p:cNvPr id="1443393291" name="Notes Placeholder 2"/>
           <p:cNvSpPr>
             <a:spLocks noGrp="1"/>
           </p:cNvSpPr>
@@ -2267,7 +2285,7 @@
       </p:sp>
       <p:sp>
         <p:nvSpPr>
-          <p:cNvPr id="1825001365" name="Slide Number Placeholder 3"/>
+          <p:cNvPr id="816317407" name="Slide Number Placeholder 3"/>
           <p:cNvSpPr>
             <a:spLocks noGrp="1"/>
           </p:cNvSpPr>
@@ -2283,9 +2301,9 @@
             <a:pPr>
               <a:defRPr/>
             </a:pPr>
-            <a:fld id="{CFCBDFB4-5DE2-4395-7D2B-3F76437FF0D3}" type="slidenum">
+            <a:fld id="{17F3189F-EC7B-F6F2-E7B6-A1DC7CF396BE}" type="slidenum">
               <a:rPr/>
-              <a:t/>
+              <a:t>8</a:t>
             </a:fld>
             <a:endParaRPr/>
           </a:p>
@@ -2299,9 +2317,9 @@
 </p:notes>
 </file>
 
-<file path=ppt/notesSlides/notesSlide8.xml><?xml version="1.0" encoding="utf-8"?>
-<p:notes xmlns:a="http://schemas.openxmlformats.org/drawingml/2006/main" xmlns:r="http://schemas.openxmlformats.org/officeDocument/2006/relationships" xmlns:p="http://schemas.openxmlformats.org/presentationml/2006/main" xmlns:m="http://schemas.openxmlformats.org/officeDocument/2006/math" xmlns:w="http://schemas.openxmlformats.org/wordprocessingml/2006/main">
-  <p:cSld name="">
+<file path=ppt/notesSlides/notesSlide9.xml><?xml version="1.0" encoding="utf-8"?>
+<p:notes xmlns:a="http://schemas.openxmlformats.org/drawingml/2006/main" xmlns:r="http://schemas.openxmlformats.org/officeDocument/2006/relationships" xmlns:p="http://schemas.openxmlformats.org/presentationml/2006/main">
+  <p:cSld>
     <p:spTree>
       <p:nvGrpSpPr>
         <p:cNvPr id="1" name=""/>
@@ -2318,9 +2336,9 @@
       </p:grpSpPr>
       <p:sp>
         <p:nvSpPr>
-          <p:cNvPr id="593440760" name="Slide Image Placeholder 1"/>
-          <p:cNvSpPr>
-            <a:spLocks noChangeAspect="1" noGrp="1" noRot="1"/>
+          <p:cNvPr id="1172904136" name="Slide Image Placeholder 1"/>
+          <p:cNvSpPr>
+            <a:spLocks noGrp="1" noRot="1" noChangeAspect="1"/>
           </p:cNvSpPr>
           <p:nvPr>
             <p:ph type="sldImg"/>
@@ -2330,7 +2348,7 @@
       </p:sp>
       <p:sp>
         <p:nvSpPr>
-          <p:cNvPr id="964761949" name="Notes Placeholder 2"/>
+          <p:cNvPr id="167403374" name="Notes Placeholder 2"/>
           <p:cNvSpPr>
             <a:spLocks noGrp="1"/>
           </p:cNvSpPr>
@@ -2352,7 +2370,7 @@
       </p:sp>
       <p:sp>
         <p:nvSpPr>
-          <p:cNvPr id="1996399529" name="Slide Number Placeholder 3"/>
+          <p:cNvPr id="297425978" name="Slide Number Placeholder 3"/>
           <p:cNvSpPr>
             <a:spLocks noGrp="1"/>
           </p:cNvSpPr>
@@ -2368,94 +2386,9 @@
             <a:pPr>
               <a:defRPr/>
             </a:pPr>
-            <a:fld id="{B9DDE1CB-8FCE-18A1-707D-61FC3B9A3E4F}" type="slidenum">
+            <a:fld id="{5F6D550A-33FF-F345-33F7-C626DCFF7893}" type="slidenum">
               <a:rPr/>
-              <a:t/>
-            </a:fld>
-            <a:endParaRPr/>
-          </a:p>
-        </p:txBody>
-      </p:sp>
-    </p:spTree>
-  </p:cSld>
-  <p:clrMapOvr>
-    <a:masterClrMapping/>
-  </p:clrMapOvr>
-</p:notes>
-</file>
-
-<file path=ppt/notesSlides/notesSlide9.xml><?xml version="1.0" encoding="utf-8"?>
-<p:notes xmlns:a="http://schemas.openxmlformats.org/drawingml/2006/main" xmlns:r="http://schemas.openxmlformats.org/officeDocument/2006/relationships" xmlns:p="http://schemas.openxmlformats.org/presentationml/2006/main" xmlns:m="http://schemas.openxmlformats.org/officeDocument/2006/math" xmlns:w="http://schemas.openxmlformats.org/wordprocessingml/2006/main">
-  <p:cSld name="">
-    <p:spTree>
-      <p:nvGrpSpPr>
-        <p:cNvPr id="1" name=""/>
-        <p:cNvGrpSpPr/>
-        <p:nvPr/>
-      </p:nvGrpSpPr>
-      <p:grpSpPr bwMode="auto">
-        <a:xfrm>
-          <a:off x="0" y="0"/>
-          <a:ext cx="0" cy="0"/>
-          <a:chOff x="0" y="0"/>
-          <a:chExt cx="0" cy="0"/>
-        </a:xfrm>
-      </p:grpSpPr>
-      <p:sp>
-        <p:nvSpPr>
-          <p:cNvPr id="1279749026" name="Slide Image Placeholder 1"/>
-          <p:cNvSpPr>
-            <a:spLocks noChangeAspect="1" noGrp="1" noRot="1"/>
-          </p:cNvSpPr>
-          <p:nvPr>
-            <p:ph type="sldImg"/>
-          </p:nvPr>
-        </p:nvSpPr>
-        <p:spPr bwMode="auto"/>
-      </p:sp>
-      <p:sp>
-        <p:nvSpPr>
-          <p:cNvPr id="1443393291" name="Notes Placeholder 2"/>
-          <p:cNvSpPr>
-            <a:spLocks noGrp="1"/>
-          </p:cNvSpPr>
-          <p:nvPr>
-            <p:ph type="body" idx="1"/>
-          </p:nvPr>
-        </p:nvSpPr>
-        <p:spPr bwMode="auto"/>
-        <p:txBody>
-          <a:bodyPr/>
-          <a:lstStyle/>
-          <a:p>
-            <a:pPr>
-              <a:defRPr/>
-            </a:pPr>
-            <a:endParaRPr/>
-          </a:p>
-        </p:txBody>
-      </p:sp>
-      <p:sp>
-        <p:nvSpPr>
-          <p:cNvPr id="816317407" name="Slide Number Placeholder 3"/>
-          <p:cNvSpPr>
-            <a:spLocks noGrp="1"/>
-          </p:cNvSpPr>
-          <p:nvPr>
-            <p:ph type="sldNum" sz="quarter" idx="10"/>
-          </p:nvPr>
-        </p:nvSpPr>
-        <p:spPr bwMode="auto"/>
-        <p:txBody>
-          <a:bodyPr/>
-          <a:lstStyle/>
-          <a:p>
-            <a:pPr>
-              <a:defRPr/>
-            </a:pPr>
-            <a:fld id="{17F3189F-EC7B-F6F2-E7B6-A1DC7CF396BE}" type="slidenum">
-              <a:rPr/>
-              <a:t/>
+              <a:t>11</a:t>
             </a:fld>
             <a:endParaRPr/>
           </a:p>
@@ -2470,7 +2403,7 @@
 </file>
 
 <file path=ppt/slideLayouts/slideLayout1.xml><?xml version="1.0" encoding="utf-8"?>
-<p:sldLayout xmlns:a="http://schemas.openxmlformats.org/drawingml/2006/main" xmlns:r="http://schemas.openxmlformats.org/officeDocument/2006/relationships" xmlns:p="http://schemas.openxmlformats.org/presentationml/2006/main" xmlns:m="http://schemas.openxmlformats.org/officeDocument/2006/math" xmlns:w="http://schemas.openxmlformats.org/wordprocessingml/2006/main" matchingName="" preserve="1" showMasterPhAnim="0" showMasterSp="1" type="title" userDrawn="1">
+<p:sldLayout xmlns:a="http://schemas.openxmlformats.org/drawingml/2006/main" xmlns:r="http://schemas.openxmlformats.org/officeDocument/2006/relationships" xmlns:p="http://schemas.openxmlformats.org/presentationml/2006/main" showMasterPhAnim="0" type="title" preserve="1" userDrawn="1">
   <p:cSld name="Diapositiva titolo">
     <p:spTree>
       <p:nvGrpSpPr>
@@ -2517,7 +2450,6 @@
               <a:rPr lang="it-IT"/>
               <a:t>Fare clic per modificare lo stile del titolo</a:t>
             </a:r>
-            <a:endParaRPr lang="it-IT"/>
           </a:p>
         </p:txBody>
       </p:sp>
@@ -2585,7 +2517,6 @@
               <a:rPr lang="it-IT"/>
               <a:t>Fare clic per modificare lo stile del sottotitolo dello schema</a:t>
             </a:r>
-            <a:endParaRPr lang="it-IT"/>
           </a:p>
         </p:txBody>
       </p:sp>
@@ -2609,7 +2540,7 @@
             </a:pPr>
             <a:fld id="{BCC18F51-09EC-435C-A3BA-64A766E099C0}" type="datetimeFigureOut">
               <a:rPr lang="it-IT"/>
-              <a:t>30.10.2013</a:t>
+              <a:t>18/10/2025</a:t>
             </a:fld>
             <a:endParaRPr lang="it-IT"/>
           </a:p>
@@ -2657,7 +2588,7 @@
             </a:pPr>
             <a:fld id="{08395586-F03A-48D1-94DF-16B239DF4FB5}" type="slidenum">
               <a:rPr lang="it-IT"/>
-              <a:t>‹#›</a:t>
+              <a:t>‹N›</a:t>
             </a:fld>
             <a:endParaRPr lang="it-IT"/>
           </a:p>
@@ -2672,7 +2603,7 @@
 </file>
 
 <file path=ppt/slideLayouts/slideLayout10.xml><?xml version="1.0" encoding="utf-8"?>
-<p:sldLayout xmlns:a="http://schemas.openxmlformats.org/drawingml/2006/main" xmlns:r="http://schemas.openxmlformats.org/officeDocument/2006/relationships" xmlns:p="http://schemas.openxmlformats.org/presentationml/2006/main" xmlns:m="http://schemas.openxmlformats.org/officeDocument/2006/math" xmlns:w="http://schemas.openxmlformats.org/wordprocessingml/2006/main" matchingName="" preserve="1" showMasterPhAnim="0" showMasterSp="1" type="vertTx" userDrawn="1">
+<p:sldLayout xmlns:a="http://schemas.openxmlformats.org/drawingml/2006/main" xmlns:r="http://schemas.openxmlformats.org/officeDocument/2006/relationships" xmlns:p="http://schemas.openxmlformats.org/presentationml/2006/main" showMasterPhAnim="0" type="vertTx" preserve="1" userDrawn="1">
   <p:cSld name="Titolo e testo verticale">
     <p:spTree>
       <p:nvGrpSpPr>
@@ -2710,7 +2641,6 @@
               <a:rPr lang="it-IT"/>
               <a:t>Fare clic per modificare lo stile del titolo</a:t>
             </a:r>
-            <a:endParaRPr lang="it-IT"/>
           </a:p>
         </p:txBody>
       </p:sp>
@@ -2776,7 +2706,6 @@
               <a:rPr lang="it-IT"/>
               <a:t>Quinto livello</a:t>
             </a:r>
-            <a:endParaRPr lang="it-IT"/>
           </a:p>
         </p:txBody>
       </p:sp>
@@ -2800,7 +2729,7 @@
             </a:pPr>
             <a:fld id="{BCC18F51-09EC-435C-A3BA-64A766E099C0}" type="datetimeFigureOut">
               <a:rPr lang="it-IT"/>
-              <a:t>30.10.2013</a:t>
+              <a:t>18/10/2025</a:t>
             </a:fld>
             <a:endParaRPr lang="it-IT"/>
           </a:p>
@@ -2848,7 +2777,7 @@
             </a:pPr>
             <a:fld id="{08395586-F03A-48D1-94DF-16B239DF4FB5}" type="slidenum">
               <a:rPr lang="it-IT"/>
-              <a:t>‹#›</a:t>
+              <a:t>‹N›</a:t>
             </a:fld>
             <a:endParaRPr lang="it-IT"/>
           </a:p>
@@ -2863,7 +2792,7 @@
 </file>
 
 <file path=ppt/slideLayouts/slideLayout11.xml><?xml version="1.0" encoding="utf-8"?>
-<p:sldLayout xmlns:a="http://schemas.openxmlformats.org/drawingml/2006/main" xmlns:r="http://schemas.openxmlformats.org/officeDocument/2006/relationships" xmlns:p="http://schemas.openxmlformats.org/presentationml/2006/main" xmlns:m="http://schemas.openxmlformats.org/officeDocument/2006/math" xmlns:w="http://schemas.openxmlformats.org/wordprocessingml/2006/main" matchingName="" preserve="1" showMasterPhAnim="0" showMasterSp="1" type="vertTitleAndTx" userDrawn="1">
+<p:sldLayout xmlns:a="http://schemas.openxmlformats.org/drawingml/2006/main" xmlns:r="http://schemas.openxmlformats.org/officeDocument/2006/relationships" xmlns:p="http://schemas.openxmlformats.org/presentationml/2006/main" showMasterPhAnim="0" type="vertTitleAndTx" preserve="1" userDrawn="1">
   <p:cSld name="Titolo e testo verticale">
     <p:spTree>
       <p:nvGrpSpPr>
@@ -2906,7 +2835,6 @@
               <a:rPr lang="it-IT"/>
               <a:t>Fare clic per modificare lo stile del titolo</a:t>
             </a:r>
-            <a:endParaRPr lang="it-IT"/>
           </a:p>
         </p:txBody>
       </p:sp>
@@ -2977,7 +2905,6 @@
               <a:rPr lang="it-IT"/>
               <a:t>Quinto livello</a:t>
             </a:r>
-            <a:endParaRPr lang="it-IT"/>
           </a:p>
         </p:txBody>
       </p:sp>
@@ -3001,7 +2928,7 @@
             </a:pPr>
             <a:fld id="{BCC18F51-09EC-435C-A3BA-64A766E099C0}" type="datetimeFigureOut">
               <a:rPr lang="it-IT"/>
-              <a:t>30.10.2013</a:t>
+              <a:t>18/10/2025</a:t>
             </a:fld>
             <a:endParaRPr lang="it-IT"/>
           </a:p>
@@ -3049,7 +2976,7 @@
             </a:pPr>
             <a:fld id="{08395586-F03A-48D1-94DF-16B239DF4FB5}" type="slidenum">
               <a:rPr lang="it-IT"/>
-              <a:t>‹#›</a:t>
+              <a:t>‹N›</a:t>
             </a:fld>
             <a:endParaRPr lang="it-IT"/>
           </a:p>
@@ -3064,7 +2991,7 @@
 </file>
 
 <file path=ppt/slideLayouts/slideLayout2.xml><?xml version="1.0" encoding="utf-8"?>
-<p:sldLayout xmlns:a="http://schemas.openxmlformats.org/drawingml/2006/main" xmlns:r="http://schemas.openxmlformats.org/officeDocument/2006/relationships" xmlns:p="http://schemas.openxmlformats.org/presentationml/2006/main" xmlns:m="http://schemas.openxmlformats.org/officeDocument/2006/math" xmlns:w="http://schemas.openxmlformats.org/wordprocessingml/2006/main" matchingName="" preserve="1" showMasterPhAnim="0" showMasterSp="1" type="obj" userDrawn="1">
+<p:sldLayout xmlns:a="http://schemas.openxmlformats.org/drawingml/2006/main" xmlns:r="http://schemas.openxmlformats.org/officeDocument/2006/relationships" xmlns:p="http://schemas.openxmlformats.org/presentationml/2006/main" showMasterPhAnim="0" type="obj" preserve="1" userDrawn="1">
   <p:cSld name="Titolo e contenuto">
     <p:spTree>
       <p:nvGrpSpPr>
@@ -3102,7 +3029,6 @@
               <a:rPr lang="it-IT"/>
               <a:t>Fare clic per modificare lo stile del titolo</a:t>
             </a:r>
-            <a:endParaRPr lang="it-IT"/>
           </a:p>
         </p:txBody>
       </p:sp>
@@ -3168,7 +3094,6 @@
               <a:rPr lang="it-IT"/>
               <a:t>Quinto livello</a:t>
             </a:r>
-            <a:endParaRPr lang="it-IT"/>
           </a:p>
         </p:txBody>
       </p:sp>
@@ -3192,7 +3117,7 @@
             </a:pPr>
             <a:fld id="{BCC18F51-09EC-435C-A3BA-64A766E099C0}" type="datetimeFigureOut">
               <a:rPr lang="it-IT"/>
-              <a:t>30.10.2013</a:t>
+              <a:t>18/10/2025</a:t>
             </a:fld>
             <a:endParaRPr lang="it-IT"/>
           </a:p>
@@ -3240,7 +3165,7 @@
             </a:pPr>
             <a:fld id="{08395586-F03A-48D1-94DF-16B239DF4FB5}" type="slidenum">
               <a:rPr lang="it-IT"/>
-              <a:t>‹#›</a:t>
+              <a:t>‹N›</a:t>
             </a:fld>
             <a:endParaRPr lang="it-IT"/>
           </a:p>
@@ -3255,7 +3180,7 @@
 </file>
 
 <file path=ppt/slideLayouts/slideLayout3.xml><?xml version="1.0" encoding="utf-8"?>
-<p:sldLayout xmlns:a="http://schemas.openxmlformats.org/drawingml/2006/main" xmlns:r="http://schemas.openxmlformats.org/officeDocument/2006/relationships" xmlns:p="http://schemas.openxmlformats.org/presentationml/2006/main" xmlns:m="http://schemas.openxmlformats.org/officeDocument/2006/math" xmlns:w="http://schemas.openxmlformats.org/wordprocessingml/2006/main" matchingName="" preserve="1" showMasterPhAnim="0" showMasterSp="1" type="secHead" userDrawn="1">
+<p:sldLayout xmlns:a="http://schemas.openxmlformats.org/drawingml/2006/main" xmlns:r="http://schemas.openxmlformats.org/officeDocument/2006/relationships" xmlns:p="http://schemas.openxmlformats.org/presentationml/2006/main" showMasterPhAnim="0" type="secHead" preserve="1" userDrawn="1">
   <p:cSld name="Intestazione sezione">
     <p:spTree>
       <p:nvGrpSpPr>
@@ -3302,7 +3227,6 @@
               <a:rPr lang="it-IT"/>
               <a:t>Fare clic per modificare lo stile del titolo</a:t>
             </a:r>
-            <a:endParaRPr lang="it-IT"/>
           </a:p>
         </p:txBody>
       </p:sp>
@@ -3448,7 +3372,7 @@
             </a:pPr>
             <a:fld id="{BCC18F51-09EC-435C-A3BA-64A766E099C0}" type="datetimeFigureOut">
               <a:rPr lang="it-IT"/>
-              <a:t>30.10.2013</a:t>
+              <a:t>18/10/2025</a:t>
             </a:fld>
             <a:endParaRPr lang="it-IT"/>
           </a:p>
@@ -3496,7 +3420,7 @@
             </a:pPr>
             <a:fld id="{08395586-F03A-48D1-94DF-16B239DF4FB5}" type="slidenum">
               <a:rPr lang="it-IT"/>
-              <a:t>‹#›</a:t>
+              <a:t>‹N›</a:t>
             </a:fld>
             <a:endParaRPr lang="it-IT"/>
           </a:p>
@@ -3511,7 +3435,7 @@
 </file>
 
 <file path=ppt/slideLayouts/slideLayout4.xml><?xml version="1.0" encoding="utf-8"?>
-<p:sldLayout xmlns:a="http://schemas.openxmlformats.org/drawingml/2006/main" xmlns:r="http://schemas.openxmlformats.org/officeDocument/2006/relationships" xmlns:p="http://schemas.openxmlformats.org/presentationml/2006/main" xmlns:m="http://schemas.openxmlformats.org/officeDocument/2006/math" xmlns:w="http://schemas.openxmlformats.org/wordprocessingml/2006/main" matchingName="" preserve="1" showMasterPhAnim="0" showMasterSp="1" type="twoObj" userDrawn="1">
+<p:sldLayout xmlns:a="http://schemas.openxmlformats.org/drawingml/2006/main" xmlns:r="http://schemas.openxmlformats.org/officeDocument/2006/relationships" xmlns:p="http://schemas.openxmlformats.org/presentationml/2006/main" showMasterPhAnim="0" type="twoObj" preserve="1" userDrawn="1">
   <p:cSld name="Due contenuti">
     <p:spTree>
       <p:nvGrpSpPr>
@@ -3549,7 +3473,6 @@
               <a:rPr lang="it-IT"/>
               <a:t>Fare clic per modificare lo stile del titolo</a:t>
             </a:r>
-            <a:endParaRPr lang="it-IT"/>
           </a:p>
         </p:txBody>
       </p:sp>
@@ -3620,7 +3543,6 @@
               <a:rPr lang="it-IT"/>
               <a:t>Quinto livello</a:t>
             </a:r>
-            <a:endParaRPr lang="it-IT"/>
           </a:p>
         </p:txBody>
       </p:sp>
@@ -3691,7 +3613,6 @@
               <a:rPr lang="it-IT"/>
               <a:t>Quinto livello</a:t>
             </a:r>
-            <a:endParaRPr lang="it-IT"/>
           </a:p>
         </p:txBody>
       </p:sp>
@@ -3715,7 +3636,7 @@
             </a:pPr>
             <a:fld id="{BCC18F51-09EC-435C-A3BA-64A766E099C0}" type="datetimeFigureOut">
               <a:rPr lang="it-IT"/>
-              <a:t>30.10.2013</a:t>
+              <a:t>18/10/2025</a:t>
             </a:fld>
             <a:endParaRPr lang="it-IT"/>
           </a:p>
@@ -3763,7 +3684,7 @@
             </a:pPr>
             <a:fld id="{08395586-F03A-48D1-94DF-16B239DF4FB5}" type="slidenum">
               <a:rPr lang="it-IT"/>
-              <a:t>‹#›</a:t>
+              <a:t>‹N›</a:t>
             </a:fld>
             <a:endParaRPr lang="it-IT"/>
           </a:p>
@@ -3778,7 +3699,7 @@
 </file>
 
 <file path=ppt/slideLayouts/slideLayout5.xml><?xml version="1.0" encoding="utf-8"?>
-<p:sldLayout xmlns:a="http://schemas.openxmlformats.org/drawingml/2006/main" xmlns:r="http://schemas.openxmlformats.org/officeDocument/2006/relationships" xmlns:p="http://schemas.openxmlformats.org/presentationml/2006/main" xmlns:m="http://schemas.openxmlformats.org/officeDocument/2006/math" xmlns:w="http://schemas.openxmlformats.org/wordprocessingml/2006/main" matchingName="" preserve="1" showMasterPhAnim="0" showMasterSp="1" type="twoTxTwoObj" userDrawn="1">
+<p:sldLayout xmlns:a="http://schemas.openxmlformats.org/drawingml/2006/main" xmlns:r="http://schemas.openxmlformats.org/officeDocument/2006/relationships" xmlns:p="http://schemas.openxmlformats.org/presentationml/2006/main" showMasterPhAnim="0" type="twoTxTwoObj" preserve="1" userDrawn="1">
   <p:cSld name="Confronto">
     <p:spTree>
       <p:nvGrpSpPr>
@@ -3821,7 +3742,6 @@
               <a:rPr lang="it-IT"/>
               <a:t>Fare clic per modificare lo stile del titolo</a:t>
             </a:r>
-            <a:endParaRPr lang="it-IT"/>
           </a:p>
         </p:txBody>
       </p:sp>
@@ -3960,7 +3880,6 @@
               <a:rPr lang="it-IT"/>
               <a:t>Quinto livello</a:t>
             </a:r>
-            <a:endParaRPr lang="it-IT"/>
           </a:p>
         </p:txBody>
       </p:sp>
@@ -4099,7 +4018,6 @@
               <a:rPr lang="it-IT"/>
               <a:t>Quinto livello</a:t>
             </a:r>
-            <a:endParaRPr lang="it-IT"/>
           </a:p>
         </p:txBody>
       </p:sp>
@@ -4123,7 +4041,7 @@
             </a:pPr>
             <a:fld id="{BCC18F51-09EC-435C-A3BA-64A766E099C0}" type="datetimeFigureOut">
               <a:rPr lang="it-IT"/>
-              <a:t>30.10.2013</a:t>
+              <a:t>18/10/2025</a:t>
             </a:fld>
             <a:endParaRPr lang="it-IT"/>
           </a:p>
@@ -4171,7 +4089,7 @@
             </a:pPr>
             <a:fld id="{08395586-F03A-48D1-94DF-16B239DF4FB5}" type="slidenum">
               <a:rPr lang="it-IT"/>
-              <a:t>‹#›</a:t>
+              <a:t>‹N›</a:t>
             </a:fld>
             <a:endParaRPr lang="it-IT"/>
           </a:p>
@@ -4186,7 +4104,7 @@
 </file>
 
 <file path=ppt/slideLayouts/slideLayout6.xml><?xml version="1.0" encoding="utf-8"?>
-<p:sldLayout xmlns:a="http://schemas.openxmlformats.org/drawingml/2006/main" xmlns:r="http://schemas.openxmlformats.org/officeDocument/2006/relationships" xmlns:p="http://schemas.openxmlformats.org/presentationml/2006/main" xmlns:m="http://schemas.openxmlformats.org/officeDocument/2006/math" xmlns:w="http://schemas.openxmlformats.org/wordprocessingml/2006/main" matchingName="" preserve="1" showMasterPhAnim="0" showMasterSp="1" type="titleOnly" userDrawn="1">
+<p:sldLayout xmlns:a="http://schemas.openxmlformats.org/drawingml/2006/main" xmlns:r="http://schemas.openxmlformats.org/officeDocument/2006/relationships" xmlns:p="http://schemas.openxmlformats.org/presentationml/2006/main" showMasterPhAnim="0" type="titleOnly" preserve="1" userDrawn="1">
   <p:cSld name="Solo titolo">
     <p:spTree>
       <p:nvGrpSpPr>
@@ -4224,7 +4142,6 @@
               <a:rPr lang="it-IT"/>
               <a:t>Fare clic per modificare lo stile del titolo</a:t>
             </a:r>
-            <a:endParaRPr lang="it-IT"/>
           </a:p>
         </p:txBody>
       </p:sp>
@@ -4248,7 +4165,7 @@
             </a:pPr>
             <a:fld id="{BCC18F51-09EC-435C-A3BA-64A766E099C0}" type="datetimeFigureOut">
               <a:rPr lang="it-IT"/>
-              <a:t>30.10.2013</a:t>
+              <a:t>18/10/2025</a:t>
             </a:fld>
             <a:endParaRPr lang="it-IT"/>
           </a:p>
@@ -4296,7 +4213,7 @@
             </a:pPr>
             <a:fld id="{08395586-F03A-48D1-94DF-16B239DF4FB5}" type="slidenum">
               <a:rPr lang="it-IT"/>
-              <a:t>‹#›</a:t>
+              <a:t>‹N›</a:t>
             </a:fld>
             <a:endParaRPr lang="it-IT"/>
           </a:p>
@@ -4311,7 +4228,7 @@
 </file>
 
 <file path=ppt/slideLayouts/slideLayout7.xml><?xml version="1.0" encoding="utf-8"?>
-<p:sldLayout xmlns:a="http://schemas.openxmlformats.org/drawingml/2006/main" xmlns:r="http://schemas.openxmlformats.org/officeDocument/2006/relationships" xmlns:p="http://schemas.openxmlformats.org/presentationml/2006/main" xmlns:m="http://schemas.openxmlformats.org/officeDocument/2006/math" xmlns:w="http://schemas.openxmlformats.org/wordprocessingml/2006/main" matchingName="" preserve="1" showMasterPhAnim="0" showMasterSp="1" type="blank" userDrawn="1">
+<p:sldLayout xmlns:a="http://schemas.openxmlformats.org/drawingml/2006/main" xmlns:r="http://schemas.openxmlformats.org/officeDocument/2006/relationships" xmlns:p="http://schemas.openxmlformats.org/presentationml/2006/main" showMasterPhAnim="0" type="blank" preserve="1" userDrawn="1">
   <p:cSld name="Vuota">
     <p:spTree>
       <p:nvGrpSpPr>
@@ -4347,7 +4264,7 @@
             </a:pPr>
             <a:fld id="{BCC18F51-09EC-435C-A3BA-64A766E099C0}" type="datetimeFigureOut">
               <a:rPr lang="it-IT"/>
-              <a:t>30.10.2013</a:t>
+              <a:t>18/10/2025</a:t>
             </a:fld>
             <a:endParaRPr lang="it-IT"/>
           </a:p>
@@ -4395,7 +4312,7 @@
             </a:pPr>
             <a:fld id="{08395586-F03A-48D1-94DF-16B239DF4FB5}" type="slidenum">
               <a:rPr lang="it-IT"/>
-              <a:t>‹#›</a:t>
+              <a:t>‹N›</a:t>
             </a:fld>
             <a:endParaRPr lang="it-IT"/>
           </a:p>
@@ -4410,7 +4327,7 @@
 </file>
 
 <file path=ppt/slideLayouts/slideLayout8.xml><?xml version="1.0" encoding="utf-8"?>
-<p:sldLayout xmlns:a="http://schemas.openxmlformats.org/drawingml/2006/main" xmlns:r="http://schemas.openxmlformats.org/officeDocument/2006/relationships" xmlns:p="http://schemas.openxmlformats.org/presentationml/2006/main" xmlns:m="http://schemas.openxmlformats.org/officeDocument/2006/math" xmlns:w="http://schemas.openxmlformats.org/wordprocessingml/2006/main" matchingName="" preserve="1" showMasterPhAnim="0" showMasterSp="1" type="objTx" userDrawn="1">
+<p:sldLayout xmlns:a="http://schemas.openxmlformats.org/drawingml/2006/main" xmlns:r="http://schemas.openxmlformats.org/officeDocument/2006/relationships" xmlns:p="http://schemas.openxmlformats.org/presentationml/2006/main" showMasterPhAnim="0" type="objTx" preserve="1" userDrawn="1">
   <p:cSld name="Contenuto con didascalia">
     <p:spTree>
       <p:nvGrpSpPr>
@@ -4457,7 +4374,6 @@
               <a:rPr lang="it-IT"/>
               <a:t>Fare clic per modificare lo stile del titolo</a:t>
             </a:r>
-            <a:endParaRPr lang="it-IT"/>
           </a:p>
         </p:txBody>
       </p:sp>
@@ -4556,7 +4472,6 @@
               <a:rPr lang="it-IT"/>
               <a:t>Quinto livello</a:t>
             </a:r>
-            <a:endParaRPr lang="it-IT"/>
           </a:p>
         </p:txBody>
       </p:sp>
@@ -4648,7 +4563,7 @@
             </a:pPr>
             <a:fld id="{BCC18F51-09EC-435C-A3BA-64A766E099C0}" type="datetimeFigureOut">
               <a:rPr lang="it-IT"/>
-              <a:t>30.10.2013</a:t>
+              <a:t>18/10/2025</a:t>
             </a:fld>
             <a:endParaRPr lang="it-IT"/>
           </a:p>
@@ -4696,7 +4611,7 @@
             </a:pPr>
             <a:fld id="{08395586-F03A-48D1-94DF-16B239DF4FB5}" type="slidenum">
               <a:rPr lang="it-IT"/>
-              <a:t>‹#›</a:t>
+              <a:t>‹N›</a:t>
             </a:fld>
             <a:endParaRPr lang="it-IT"/>
           </a:p>
@@ -4711,7 +4626,7 @@
 </file>
 
 <file path=ppt/slideLayouts/slideLayout9.xml><?xml version="1.0" encoding="utf-8"?>
-<p:sldLayout xmlns:a="http://schemas.openxmlformats.org/drawingml/2006/main" xmlns:r="http://schemas.openxmlformats.org/officeDocument/2006/relationships" xmlns:p="http://schemas.openxmlformats.org/presentationml/2006/main" xmlns:m="http://schemas.openxmlformats.org/officeDocument/2006/math" xmlns:w="http://schemas.openxmlformats.org/wordprocessingml/2006/main" matchingName="" preserve="1" showMasterPhAnim="0" showMasterSp="1" type="picTx" userDrawn="1">
+<p:sldLayout xmlns:a="http://schemas.openxmlformats.org/drawingml/2006/main" xmlns:r="http://schemas.openxmlformats.org/officeDocument/2006/relationships" xmlns:p="http://schemas.openxmlformats.org/presentationml/2006/main" showMasterPhAnim="0" type="picTx" preserve="1" userDrawn="1">
   <p:cSld name="Immagine con didascalia">
     <p:spTree>
       <p:nvGrpSpPr>
@@ -4758,7 +4673,6 @@
               <a:rPr lang="it-IT"/>
               <a:t>Fare clic per modificare lo stile del titolo</a:t>
             </a:r>
-            <a:endParaRPr lang="it-IT"/>
           </a:p>
         </p:txBody>
       </p:sp>
@@ -4766,7 +4680,7 @@
         <p:nvSpPr>
           <p:cNvPr id="2144436781" name="Segnaposto immagine 2"/>
           <p:cNvSpPr>
-            <a:spLocks noChangeAspect="1" noGrp="1"/>
+            <a:spLocks noGrp="1" noChangeAspect="1"/>
           </p:cNvSpPr>
           <p:nvPr>
             <p:ph type="pic" idx="1"/>
@@ -4826,7 +4740,6 @@
               <a:rPr lang="it-IT"/>
               <a:t>Fare clic sull'icona per aggiungere un'immagine</a:t>
             </a:r>
-            <a:endParaRPr lang="it-IT"/>
           </a:p>
         </p:txBody>
       </p:sp>
@@ -4918,7 +4831,7 @@
             </a:pPr>
             <a:fld id="{BCC18F51-09EC-435C-A3BA-64A766E099C0}" type="datetimeFigureOut">
               <a:rPr lang="it-IT"/>
-              <a:t>30.10.2013</a:t>
+              <a:t>18/10/2025</a:t>
             </a:fld>
             <a:endParaRPr lang="it-IT"/>
           </a:p>
@@ -4966,7 +4879,7 @@
             </a:pPr>
             <a:fld id="{08395586-F03A-48D1-94DF-16B239DF4FB5}" type="slidenum">
               <a:rPr lang="it-IT"/>
-              <a:t>‹#›</a:t>
+              <a:t>‹N›</a:t>
             </a:fld>
             <a:endParaRPr lang="it-IT"/>
           </a:p>
@@ -4981,10 +4894,10 @@
 </file>
 
 <file path=ppt/slideMasters/slideMaster1.xml><?xml version="1.0" encoding="utf-8"?>
-<p:sldMaster xmlns:a="http://schemas.openxmlformats.org/drawingml/2006/main" xmlns:r="http://schemas.openxmlformats.org/officeDocument/2006/relationships" xmlns:p="http://schemas.openxmlformats.org/presentationml/2006/main" xmlns:m="http://schemas.openxmlformats.org/officeDocument/2006/math" xmlns:w="http://schemas.openxmlformats.org/wordprocessingml/2006/main" preserve="0">
-  <p:cSld name="">
+<p:sldMaster xmlns:a="http://schemas.openxmlformats.org/drawingml/2006/main" xmlns:r="http://schemas.openxmlformats.org/officeDocument/2006/relationships" xmlns:p="http://schemas.openxmlformats.org/presentationml/2006/main">
+  <p:cSld>
     <p:bg>
-      <p:bgPr shadeToTitle="0">
+      <p:bgPr>
         <a:gradFill>
           <a:gsLst>
             <a:gs pos="0">
@@ -5008,6 +4921,7 @@
           </a:gsLst>
           <a:lin ang="10800000" scaled="1"/>
         </a:gradFill>
+        <a:effectLst/>
       </p:bgPr>
     </p:bg>
     <p:spTree>
@@ -5056,7 +4970,6 @@
               <a:rPr lang="it-IT"/>
               <a:t>Fare clic per modificare lo stile del titolo</a:t>
             </a:r>
-            <a:endParaRPr lang="it-IT"/>
           </a:p>
         </p:txBody>
       </p:sp>
@@ -5132,7 +5045,6 @@
               <a:rPr lang="it-IT"/>
               <a:t>Quinto livello</a:t>
             </a:r>
-            <a:endParaRPr lang="it-IT"/>
           </a:p>
         </p:txBody>
       </p:sp>
@@ -5174,7 +5086,7 @@
             </a:pPr>
             <a:fld id="{BCC18F51-09EC-435C-A3BA-64A766E099C0}" type="datetimeFigureOut">
               <a:rPr lang="it-IT"/>
-              <a:t>30.10.2013</a:t>
+              <a:t>18/10/2025</a:t>
             </a:fld>
             <a:endParaRPr lang="it-IT"/>
           </a:p>
@@ -5258,7 +5170,7 @@
             </a:pPr>
             <a:fld id="{08395586-F03A-48D1-94DF-16B239DF4FB5}" type="slidenum">
               <a:rPr lang="it-IT"/>
-              <a:t>‹#›</a:t>
+              <a:t>‹N›</a:t>
             </a:fld>
             <a:endParaRPr lang="it-IT"/>
           </a:p>
@@ -5564,8 +5476,8 @@
 </file>
 
 <file path=ppt/slides/slide1.xml><?xml version="1.0" encoding="utf-8"?>
-<p:sld xmlns:a="http://schemas.openxmlformats.org/drawingml/2006/main" xmlns:r="http://schemas.openxmlformats.org/officeDocument/2006/relationships" xmlns:p="http://schemas.openxmlformats.org/presentationml/2006/main" xmlns:m="http://schemas.openxmlformats.org/officeDocument/2006/math" xmlns:w="http://schemas.openxmlformats.org/wordprocessingml/2006/main" xmlns:mc="http://schemas.openxmlformats.org/markup-compatibility/2006" showMasterPhAnim="0" showMasterSp="1" show="1">
-  <p:cSld name="">
+<p:sld xmlns:a="http://schemas.openxmlformats.org/drawingml/2006/main" xmlns:r="http://schemas.openxmlformats.org/officeDocument/2006/relationships" xmlns:p="http://schemas.openxmlformats.org/presentationml/2006/main" showMasterPhAnim="0">
+  <p:cSld>
     <p:spTree>
       <p:nvGrpSpPr>
         <p:cNvPr id="1" name=""/>
@@ -5645,13 +5557,13 @@
       </p:sp>
       <p:sp>
         <p:nvSpPr>
-          <p:cNvPr id="1485969275" name=""/>
+          <p:cNvPr id="1485969275" name="CasellaDiTesto 1485969274"/>
           <p:cNvSpPr txBox="1"/>
           <p:nvPr/>
         </p:nvSpPr>
         <p:spPr bwMode="auto">
-          <a:xfrm rot="0" flipH="0" flipV="0">
-            <a:off x="7109997" y="4745179"/>
+          <a:xfrm>
+            <a:off x="3768161" y="4166278"/>
             <a:ext cx="5003986" cy="1737719"/>
           </a:xfrm>
           <a:prstGeom prst="rect">
@@ -5660,9 +5572,10 @@
           <a:noFill/>
         </p:spPr>
         <p:txBody>
-          <a:bodyPr vertOverflow="overflow" horzOverflow="overflow" vert="horz" wrap="square" lIns="91440" tIns="45720" rIns="91440" bIns="45720" numCol="1" spcCol="0" rtlCol="0" fromWordArt="0" anchor="t" anchorCtr="0" forceAA="0" upright="0" compatLnSpc="0">
+          <a:bodyPr vertOverflow="overflow" horzOverflow="overflow" vert="horz" wrap="square" lIns="91440" tIns="45720" rIns="91440" bIns="45720" numCol="1" spcCol="0" rtlCol="0" fromWordArt="0" anchor="t" anchorCtr="0" forceAA="0" compatLnSpc="0">
             <a:spAutoFit/>
           </a:bodyPr>
+          <a:lstStyle/>
           <a:p>
             <a:pPr>
               <a:lnSpc>
@@ -5671,7 +5584,7 @@
               <a:defRPr/>
             </a:pPr>
             <a:r>
-              <a:rPr lang="en">
+              <a:rPr lang="en" dirty="0">
                 <a:latin typeface="DejaVu Sans Condensed"/>
                 <a:ea typeface="DejaVu Sans Condensed"/>
                 <a:cs typeface="DejaVu Sans Condensed"/>
@@ -5679,14 +5592,14 @@
               <a:t>Lorenzo Dolzanelli</a:t>
             </a:r>
             <a:r>
-              <a:rPr>
+              <a:rPr dirty="0">
                 <a:latin typeface="DejaVu Sans Condensed"/>
                 <a:cs typeface="DejaVu Sans Condensed"/>
               </a:rPr>
               <a:t>	</a:t>
             </a:r>
             <a:r>
-              <a:rPr lang="en">
+              <a:rPr lang="en" dirty="0">
                 <a:latin typeface="DejaVu Sans Condensed"/>
                 <a:ea typeface="DejaVu Sans Condensed"/>
                 <a:cs typeface="DejaVu Sans Condensed"/>
@@ -5694,7 +5607,7 @@
               <a:t>MAT </a:t>
             </a:r>
             <a:r>
-              <a:rPr lang="en" sz="1800" b="0" i="0" u="none" strike="noStrike" cap="none" spc="0">
+              <a:rPr lang="en" sz="1800" b="0" i="0" u="none" strike="noStrike" cap="none" spc="0" dirty="0">
                 <a:solidFill>
                   <a:schemeClr val="tx1"/>
                 </a:solidFill>
@@ -5704,7 +5617,7 @@
               </a:rPr>
               <a:t>740643</a:t>
             </a:r>
-            <a:endParaRPr>
+            <a:endParaRPr dirty="0">
               <a:latin typeface="DejaVu Sans Condensed"/>
               <a:cs typeface="DejaVu Sans Condensed"/>
             </a:endParaRPr>
@@ -5717,15 +5630,15 @@
               <a:defRPr/>
             </a:pPr>
             <a:r>
-              <a:rPr lang="en">
+              <a:rPr lang="en" dirty="0">
                 <a:latin typeface="DejaVu Sans Condensed"/>
                 <a:ea typeface="DejaVu Sans Condensed"/>
                 <a:cs typeface="DejaVu Sans Condensed"/>
               </a:rPr>
-              <a:t>Khater Abdelaziz		</a:t>
-            </a:r>
-            <a:r>
-              <a:rPr lang="en" sz="1800" b="0" i="0" u="none" strike="noStrike" cap="none" spc="0">
+              <a:t>Khater Abdelaziz	</a:t>
+            </a:r>
+            <a:r>
+              <a:rPr lang="en" sz="1800" b="0" i="0" u="none" strike="noStrike" cap="none" spc="0" dirty="0">
                 <a:solidFill>
                   <a:schemeClr val="tx1"/>
                 </a:solidFill>
@@ -5735,7 +5648,7 @@
               </a:rPr>
               <a:t>MAT 741614</a:t>
             </a:r>
-            <a:endParaRPr>
+            <a:endParaRPr dirty="0">
               <a:latin typeface="DejaVu Sans Condensed"/>
               <a:cs typeface="DejaVu Sans Condensed"/>
             </a:endParaRPr>
@@ -5748,7 +5661,7 @@
               <a:defRPr/>
             </a:pPr>
             <a:r>
-              <a:rPr lang="en">
+              <a:rPr lang="en" dirty="0">
                 <a:latin typeface="DejaVu Sans Condensed"/>
                 <a:ea typeface="DejaVu Sans Condensed"/>
                 <a:cs typeface="DejaVu Sans Condensed"/>
@@ -5756,7 +5669,7 @@
               <a:t>Daniele Miguel Franchi	</a:t>
             </a:r>
             <a:r>
-              <a:rPr lang="en" sz="1800" b="0" i="0" u="none" strike="noStrike" cap="none" spc="0">
+              <a:rPr lang="en" sz="1800" b="0" i="0" u="none" strike="noStrike" cap="none" spc="0" dirty="0">
                 <a:solidFill>
                   <a:schemeClr val="tx1"/>
                 </a:solidFill>
@@ -5766,7 +5679,7 @@
               </a:rPr>
               <a:t>MAT 743230</a:t>
             </a:r>
-            <a:endParaRPr>
+            <a:endParaRPr dirty="0">
               <a:latin typeface="Open Sans"/>
               <a:cs typeface="Open Sans"/>
             </a:endParaRPr>
@@ -5778,20 +5691,171 @@
   <p:clrMapOvr>
     <a:masterClrMapping/>
   </p:clrMapOvr>
-  <mc:AlternateContent xmlns:mc="http://schemas.openxmlformats.org/markup-compatibility/2006">
-    <mc:Choice xmlns:p159="http://schemas.microsoft.com/office/powerpoint/2015/09/main" xmlns:p14="http://schemas.microsoft.com/office/powerpoint/2010/main" Requires="p159">
-      <p:transition p14:dur="2000" advClick="1"/>
-    </mc:Choice>
-    <mc:Fallback>
-      <p:transition advClick="1"/>
-    </mc:Fallback>
-  </mc:AlternateContent>
 </p:sld>
 </file>
 
 <file path=ppt/slides/slide10.xml><?xml version="1.0" encoding="utf-8"?>
-<p:sld xmlns:a="http://schemas.openxmlformats.org/drawingml/2006/main" xmlns:r="http://schemas.openxmlformats.org/officeDocument/2006/relationships" xmlns:p="http://schemas.openxmlformats.org/presentationml/2006/main" xmlns:m="http://schemas.openxmlformats.org/officeDocument/2006/math" xmlns:w="http://schemas.openxmlformats.org/wordprocessingml/2006/main" xmlns:mc="http://schemas.openxmlformats.org/markup-compatibility/2006" showMasterPhAnim="0" showMasterSp="1" show="1">
-  <p:cSld name="">
+<p:sld xmlns:a="http://schemas.openxmlformats.org/drawingml/2006/main" xmlns:r="http://schemas.openxmlformats.org/officeDocument/2006/relationships" xmlns:p="http://schemas.openxmlformats.org/presentationml/2006/main">
+  <p:cSld>
+    <p:spTree>
+      <p:nvGrpSpPr>
+        <p:cNvPr id="1" name="">
+          <a:extLst>
+            <a:ext uri="{FF2B5EF4-FFF2-40B4-BE49-F238E27FC236}">
+              <a16:creationId xmlns:a16="http://schemas.microsoft.com/office/drawing/2014/main" id="{68D3ACE7-B743-0131-74F9-CED3AD0B5F9A}"/>
+            </a:ext>
+          </a:extLst>
+        </p:cNvPr>
+        <p:cNvGrpSpPr/>
+        <p:nvPr/>
+      </p:nvGrpSpPr>
+      <p:grpSpPr>
+        <a:xfrm>
+          <a:off x="0" y="0"/>
+          <a:ext cx="0" cy="0"/>
+          <a:chOff x="0" y="0"/>
+          <a:chExt cx="0" cy="0"/>
+        </a:xfrm>
+      </p:grpSpPr>
+      <p:sp>
+        <p:nvSpPr>
+          <p:cNvPr id="2" name="Titolo 1">
+            <a:extLst>
+              <a:ext uri="{FF2B5EF4-FFF2-40B4-BE49-F238E27FC236}">
+                <a16:creationId xmlns:a16="http://schemas.microsoft.com/office/drawing/2014/main" id="{8ECFB85B-6420-798F-B1F8-91A8584CABDC}"/>
+              </a:ext>
+            </a:extLst>
+          </p:cNvPr>
+          <p:cNvSpPr>
+            <a:spLocks noGrp="1"/>
+          </p:cNvSpPr>
+          <p:nvPr>
+            <p:ph type="title"/>
+          </p:nvPr>
+        </p:nvSpPr>
+        <p:spPr/>
+        <p:txBody>
+          <a:bodyPr/>
+          <a:lstStyle/>
+          <a:p>
+            <a:r>
+              <a:rPr lang="en" b="1" dirty="0">
+                <a:solidFill>
+                  <a:srgbClr val="0070C0"/>
+                </a:solidFill>
+                <a:latin typeface="Noto Sans"/>
+                <a:ea typeface="Noto Sans"/>
+                <a:cs typeface="Noto Sans"/>
+              </a:rPr>
+              <a:t>GRASP 2 - Controller</a:t>
+            </a:r>
+            <a:endParaRPr lang="it-IT" dirty="0"/>
+          </a:p>
+        </p:txBody>
+      </p:sp>
+      <p:sp>
+        <p:nvSpPr>
+          <p:cNvPr id="3" name="Segnaposto contenuto 2">
+            <a:extLst>
+              <a:ext uri="{FF2B5EF4-FFF2-40B4-BE49-F238E27FC236}">
+                <a16:creationId xmlns:a16="http://schemas.microsoft.com/office/drawing/2014/main" id="{73162E61-7133-90D8-8027-16D47E1B4579}"/>
+              </a:ext>
+            </a:extLst>
+          </p:cNvPr>
+          <p:cNvSpPr>
+            <a:spLocks noGrp="1"/>
+          </p:cNvSpPr>
+          <p:nvPr>
+            <p:ph idx="1"/>
+          </p:nvPr>
+        </p:nvSpPr>
+        <p:spPr/>
+        <p:txBody>
+          <a:bodyPr/>
+          <a:lstStyle/>
+          <a:p>
+            <a:pPr marL="0" indent="0">
+              <a:buNone/>
+            </a:pPr>
+            <a:r>
+              <a:rPr lang="en-GB" dirty="0" err="1"/>
+              <a:t>Esempio</a:t>
+            </a:r>
+            <a:r>
+              <a:rPr lang="en-GB" dirty="0"/>
+              <a:t> </a:t>
+            </a:r>
+            <a:r>
+              <a:rPr lang="en-GB" dirty="0" err="1"/>
+              <a:t>chiamata</a:t>
+            </a:r>
+            <a:r>
+              <a:rPr lang="en-GB" dirty="0"/>
+              <a:t> POST da </a:t>
+            </a:r>
+            <a:r>
+              <a:rPr lang="en-GB" dirty="0" err="1"/>
+              <a:t>BookingController</a:t>
+            </a:r>
+            <a:endParaRPr lang="en-GB" dirty="0"/>
+          </a:p>
+          <a:p>
+            <a:pPr marL="0" indent="0">
+              <a:buNone/>
+            </a:pPr>
+            <a:br>
+              <a:rPr lang="en-GB" dirty="0"/>
+            </a:br>
+            <a:endParaRPr lang="it-IT" dirty="0"/>
+          </a:p>
+        </p:txBody>
+      </p:sp>
+      <p:pic>
+        <p:nvPicPr>
+          <p:cNvPr id="5" name="Immagine 4">
+            <a:extLst>
+              <a:ext uri="{FF2B5EF4-FFF2-40B4-BE49-F238E27FC236}">
+                <a16:creationId xmlns:a16="http://schemas.microsoft.com/office/drawing/2014/main" id="{EF425A12-B226-9F04-DF5E-6760C478FFDE}"/>
+              </a:ext>
+            </a:extLst>
+          </p:cNvPr>
+          <p:cNvPicPr>
+            <a:picLocks noChangeAspect="1"/>
+          </p:cNvPicPr>
+          <p:nvPr/>
+        </p:nvPicPr>
+        <p:blipFill>
+          <a:blip r:embed="rId2"/>
+          <a:stretch>
+            <a:fillRect/>
+          </a:stretch>
+        </p:blipFill>
+        <p:spPr>
+          <a:xfrm>
+            <a:off x="951782" y="2709240"/>
+            <a:ext cx="10288436" cy="2324424"/>
+          </a:xfrm>
+          <a:prstGeom prst="rect">
+            <a:avLst/>
+          </a:prstGeom>
+        </p:spPr>
+      </p:pic>
+    </p:spTree>
+    <p:extLst>
+      <p:ext uri="{BB962C8B-B14F-4D97-AF65-F5344CB8AC3E}">
+        <p14:creationId xmlns:p14="http://schemas.microsoft.com/office/powerpoint/2010/main" val="2763414888"/>
+      </p:ext>
+    </p:extLst>
+  </p:cSld>
+  <p:clrMapOvr>
+    <a:masterClrMapping/>
+  </p:clrMapOvr>
+</p:sld>
+</file>
+
+<file path=ppt/slides/slide11.xml><?xml version="1.0" encoding="utf-8"?>
+<p:sld xmlns:a="http://schemas.openxmlformats.org/drawingml/2006/main" xmlns:r="http://schemas.openxmlformats.org/officeDocument/2006/relationships" xmlns:p="http://schemas.openxmlformats.org/presentationml/2006/main" showMasterPhAnim="0">
+  <p:cSld>
     <p:spTree>
       <p:nvGrpSpPr>
         <p:cNvPr id="1" name=""/>
@@ -5846,7 +5910,7 @@
       </p:sp>
       <p:pic>
         <p:nvPicPr>
-          <p:cNvPr id="782234069" name=""/>
+          <p:cNvPr id="782234069" name="Elemento grafico 782234068"/>
           <p:cNvPicPr>
             <a:picLocks noChangeAspect="1"/>
           </p:cNvPicPr>
@@ -5863,7 +5927,7 @@
           <a:stretch/>
         </p:blipFill>
         <p:spPr bwMode="auto">
-          <a:xfrm flipH="0" flipV="0">
+          <a:xfrm>
             <a:off x="1186295" y="1260272"/>
             <a:ext cx="4071545" cy="5438402"/>
           </a:xfrm>
@@ -5877,20 +5941,12 @@
   <p:clrMapOvr>
     <a:masterClrMapping/>
   </p:clrMapOvr>
-  <mc:AlternateContent xmlns:mc="http://schemas.openxmlformats.org/markup-compatibility/2006">
-    <mc:Choice xmlns:p159="http://schemas.microsoft.com/office/powerpoint/2015/09/main" xmlns:p14="http://schemas.microsoft.com/office/powerpoint/2010/main" Requires="p159">
-      <p:transition p14:dur="2000" advClick="1"/>
-    </mc:Choice>
-    <mc:Fallback>
-      <p:transition advClick="1"/>
-    </mc:Fallback>
-  </mc:AlternateContent>
 </p:sld>
 </file>
 
-<file path=ppt/slides/slide11.xml><?xml version="1.0" encoding="utf-8"?>
-<p:sld xmlns:a="http://schemas.openxmlformats.org/drawingml/2006/main" xmlns:r="http://schemas.openxmlformats.org/officeDocument/2006/relationships" xmlns:p="http://schemas.openxmlformats.org/presentationml/2006/main" xmlns:m="http://schemas.openxmlformats.org/officeDocument/2006/math" xmlns:w="http://schemas.openxmlformats.org/wordprocessingml/2006/main" xmlns:mc="http://schemas.openxmlformats.org/markup-compatibility/2006" showMasterPhAnim="0" showMasterSp="1" show="1">
-  <p:cSld name="">
+<file path=ppt/slides/slide12.xml><?xml version="1.0" encoding="utf-8"?>
+<p:sld xmlns:a="http://schemas.openxmlformats.org/drawingml/2006/main" xmlns:r="http://schemas.openxmlformats.org/officeDocument/2006/relationships" xmlns:p="http://schemas.openxmlformats.org/presentationml/2006/main" showMasterPhAnim="0">
+  <p:cSld>
     <p:spTree>
       <p:nvGrpSpPr>
         <p:cNvPr id="1" name=""/>
@@ -5961,7 +6017,7 @@
         </p:nvSpPr>
         <p:spPr bwMode="auto">
           <a:xfrm>
-            <a:off x="838198" y="1253330"/>
+            <a:off x="838198" y="1172214"/>
             <a:ext cx="10515600" cy="4351338"/>
           </a:xfrm>
         </p:spPr>
@@ -5975,10 +6031,9 @@
               <a:defRPr/>
             </a:pPr>
             <a:r>
-              <a:rPr lang="en" sz="2400"/>
+              <a:rPr lang="en" sz="2400" dirty="0"/>
               <a:t>Riorganizzazione delle interfacce UseCase, implementate nei Service.</a:t>
             </a:r>
-            <a:endParaRPr lang="en" sz="2400"/>
           </a:p>
           <a:p>
             <a:pPr marL="0" indent="0">
@@ -5987,16 +6042,16 @@
               <a:defRPr/>
             </a:pPr>
             <a:r>
-              <a:rPr lang="en" sz="2400"/>
-              <a:t>Le interfacce contenevano troppe funzioni, di conseguenza sono state scorporate in interfacce piú piccole</a:t>
-            </a:r>
-            <a:endParaRPr/>
+              <a:rPr lang="en" sz="2400" dirty="0"/>
+              <a:t>Le interfacce contenevano troppe funzioni, di conseguenza sono state scorporate in interfacce piú piccole che svolgono compiti precisi</a:t>
+            </a:r>
+            <a:endParaRPr dirty="0"/>
           </a:p>
         </p:txBody>
       </p:sp>
       <p:pic>
         <p:nvPicPr>
-          <p:cNvPr id="337026905" name=""/>
+          <p:cNvPr id="337026905" name="Immagine 337026904"/>
           <p:cNvPicPr>
             <a:picLocks noChangeAspect="1"/>
           </p:cNvPicPr>
@@ -6007,7 +6062,7 @@
           <a:stretch/>
         </p:blipFill>
         <p:spPr bwMode="auto">
-          <a:xfrm flipH="0" flipV="0">
+          <a:xfrm>
             <a:off x="1219199" y="2538225"/>
             <a:ext cx="2983274" cy="4157848"/>
           </a:xfrm>
@@ -6018,7 +6073,7 @@
       </p:pic>
       <p:pic>
         <p:nvPicPr>
-          <p:cNvPr id="1064753335" name=""/>
+          <p:cNvPr id="1064753335" name="Immagine 1064753334"/>
           <p:cNvPicPr>
             <a:picLocks noChangeAspect="1"/>
           </p:cNvPicPr>
@@ -6029,7 +6084,7 @@
           <a:stretch/>
         </p:blipFill>
         <p:spPr bwMode="auto">
-          <a:xfrm flipH="0" flipV="0">
+          <a:xfrm>
             <a:off x="6638924" y="2373658"/>
             <a:ext cx="2802299" cy="4322415"/>
           </a:xfrm>
@@ -6040,12 +6095,12 @@
       </p:pic>
       <p:sp>
         <p:nvSpPr>
-          <p:cNvPr id="1327605616" name=""/>
+          <p:cNvPr id="1327605616" name="Freccia a destra 1327605615"/>
           <p:cNvSpPr/>
           <p:nvPr/>
         </p:nvSpPr>
         <p:spPr bwMode="auto">
-          <a:xfrm rot="0" flipH="0" flipV="0">
+          <a:xfrm>
             <a:off x="4431074" y="3758024"/>
             <a:ext cx="1819274" cy="1257299"/>
           </a:xfrm>
@@ -6082,26 +6137,25 @@
             <a:schemeClr val="lt1"/>
           </a:fontRef>
         </p:style>
+        <p:txBody>
+          <a:bodyPr/>
+          <a:lstStyle/>
+          <a:p>
+            <a:endParaRPr lang="it-IT"/>
+          </a:p>
+        </p:txBody>
       </p:sp>
     </p:spTree>
   </p:cSld>
   <p:clrMapOvr>
     <a:masterClrMapping/>
   </p:clrMapOvr>
-  <mc:AlternateContent xmlns:mc="http://schemas.openxmlformats.org/markup-compatibility/2006">
-    <mc:Choice xmlns:p159="http://schemas.microsoft.com/office/powerpoint/2015/09/main" xmlns:p14="http://schemas.microsoft.com/office/powerpoint/2010/main" Requires="p159">
-      <p:transition p14:dur="2000" advClick="1"/>
-    </mc:Choice>
-    <mc:Fallback>
-      <p:transition advClick="1"/>
-    </mc:Fallback>
-  </mc:AlternateContent>
 </p:sld>
 </file>
 
-<file path=ppt/slides/slide12.xml><?xml version="1.0" encoding="utf-8"?>
-<p:sld xmlns:a="http://schemas.openxmlformats.org/drawingml/2006/main" xmlns:r="http://schemas.openxmlformats.org/officeDocument/2006/relationships" xmlns:p="http://schemas.openxmlformats.org/presentationml/2006/main" xmlns:m="http://schemas.openxmlformats.org/officeDocument/2006/math" xmlns:w="http://schemas.openxmlformats.org/wordprocessingml/2006/main" xmlns:mc="http://schemas.openxmlformats.org/markup-compatibility/2006" showMasterPhAnim="0" showMasterSp="1" show="1">
-  <p:cSld name="">
+<file path=ppt/slides/slide13.xml><?xml version="1.0" encoding="utf-8"?>
+<p:sld xmlns:a="http://schemas.openxmlformats.org/drawingml/2006/main" xmlns:r="http://schemas.openxmlformats.org/officeDocument/2006/relationships" xmlns:p="http://schemas.openxmlformats.org/presentationml/2006/main" showMasterPhAnim="0">
+  <p:cSld>
     <p:spTree>
       <p:nvGrpSpPr>
         <p:cNvPr id="1" name=""/>
@@ -6135,7 +6189,7 @@
               <a:defRPr/>
             </a:pPr>
             <a:r>
-              <a:rPr lang="en" b="1">
+              <a:rPr lang="en" b="1" dirty="0">
                 <a:solidFill>
                   <a:srgbClr val="0070C0"/>
                 </a:solidFill>
@@ -6143,31 +6197,9 @@
                 <a:ea typeface="Noto Sans"/>
                 <a:cs typeface="Noto Sans"/>
               </a:rPr>
-              <a:t>GoF –</a:t>
-            </a:r>
-            <a:r>
-              <a:rPr lang="en" b="1">
-                <a:solidFill>
-                  <a:srgbClr val="0070C0"/>
-                </a:solidFill>
-                <a:latin typeface="Noto Sans"/>
-                <a:ea typeface="Noto Sans"/>
-                <a:cs typeface="Noto Sans"/>
-              </a:rPr>
-              <a:t> </a:t>
-            </a:r>
-            <a:r>
-              <a:rPr lang="en" b="1">
-                <a:solidFill>
-                  <a:srgbClr val="0070C0"/>
-                </a:solidFill>
-                <a:latin typeface="Noto Sans"/>
-                <a:ea typeface="Noto Sans"/>
-                <a:cs typeface="Noto Sans"/>
-              </a:rPr>
-              <a:t>repository/adapter/convert exception</a:t>
-            </a:r>
-            <a:endParaRPr/>
+              <a:t>GoF 1 – Strategy</a:t>
+            </a:r>
+            <a:endParaRPr dirty="0"/>
           </a:p>
         </p:txBody>
       </p:sp>
@@ -6192,10 +6224,10 @@
               <a:defRPr/>
             </a:pPr>
             <a:r>
-              <a:rPr lang="en"/>
-              <a:t>Valutare quale inserire, preferirei repository cosí possiamo spiegare come viene gestita la persistenza con le Repository, jpaRepository e oggetti Entity</a:t>
-            </a:r>
-            <a:endParaRPr/>
+              <a:rPr lang="en-GB" dirty="0"/>
+              <a:t>TODO</a:t>
+            </a:r>
+            <a:endParaRPr dirty="0"/>
           </a:p>
         </p:txBody>
       </p:sp>
@@ -6204,20 +6236,860 @@
   <p:clrMapOvr>
     <a:masterClrMapping/>
   </p:clrMapOvr>
-  <mc:AlternateContent xmlns:mc="http://schemas.openxmlformats.org/markup-compatibility/2006">
-    <mc:Choice xmlns:p159="http://schemas.microsoft.com/office/powerpoint/2015/09/main" xmlns:p14="http://schemas.microsoft.com/office/powerpoint/2010/main" Requires="p159">
-      <p:transition p14:dur="2000" advClick="1"/>
-    </mc:Choice>
-    <mc:Fallback>
-      <p:transition advClick="1"/>
-    </mc:Fallback>
-  </mc:AlternateContent>
 </p:sld>
 </file>
 
-<file path=ppt/slides/slide13.xml><?xml version="1.0" encoding="utf-8"?>
-<p:sld xmlns:a="http://schemas.openxmlformats.org/drawingml/2006/main" xmlns:r="http://schemas.openxmlformats.org/officeDocument/2006/relationships" xmlns:p="http://schemas.openxmlformats.org/presentationml/2006/main" xmlns:m="http://schemas.openxmlformats.org/officeDocument/2006/math" xmlns:w="http://schemas.openxmlformats.org/wordprocessingml/2006/main" xmlns:mc="http://schemas.openxmlformats.org/markup-compatibility/2006" showMasterPhAnim="0" showMasterSp="1" show="1">
-  <p:cSld name="">
+<file path=ppt/slides/slide14.xml><?xml version="1.0" encoding="utf-8"?>
+<p:sld xmlns:a="http://schemas.openxmlformats.org/drawingml/2006/main" xmlns:r="http://schemas.openxmlformats.org/officeDocument/2006/relationships" xmlns:p="http://schemas.openxmlformats.org/presentationml/2006/main">
+  <p:cSld>
+    <p:spTree>
+      <p:nvGrpSpPr>
+        <p:cNvPr id="1" name=""/>
+        <p:cNvGrpSpPr/>
+        <p:nvPr/>
+      </p:nvGrpSpPr>
+      <p:grpSpPr>
+        <a:xfrm>
+          <a:off x="0" y="0"/>
+          <a:ext cx="0" cy="0"/>
+          <a:chOff x="0" y="0"/>
+          <a:chExt cx="0" cy="0"/>
+        </a:xfrm>
+      </p:grpSpPr>
+      <p:sp>
+        <p:nvSpPr>
+          <p:cNvPr id="2" name="Titolo 1">
+            <a:extLst>
+              <a:ext uri="{FF2B5EF4-FFF2-40B4-BE49-F238E27FC236}">
+                <a16:creationId xmlns:a16="http://schemas.microsoft.com/office/drawing/2014/main" id="{7422F803-BA15-8AD1-688E-015568313C98}"/>
+              </a:ext>
+            </a:extLst>
+          </p:cNvPr>
+          <p:cNvSpPr>
+            <a:spLocks noGrp="1"/>
+          </p:cNvSpPr>
+          <p:nvPr>
+            <p:ph type="title"/>
+          </p:nvPr>
+        </p:nvSpPr>
+        <p:spPr/>
+        <p:txBody>
+          <a:bodyPr/>
+          <a:lstStyle/>
+          <a:p>
+            <a:r>
+              <a:rPr lang="en" b="1" dirty="0">
+                <a:solidFill>
+                  <a:srgbClr val="0070C0"/>
+                </a:solidFill>
+                <a:latin typeface="Noto Sans"/>
+                <a:ea typeface="Noto Sans"/>
+                <a:cs typeface="Noto Sans"/>
+              </a:rPr>
+              <a:t>GoF 2 – Adapter</a:t>
+            </a:r>
+            <a:endParaRPr lang="it-IT" dirty="0"/>
+          </a:p>
+        </p:txBody>
+      </p:sp>
+      <p:sp>
+        <p:nvSpPr>
+          <p:cNvPr id="3" name="Segnaposto contenuto 2">
+            <a:extLst>
+              <a:ext uri="{FF2B5EF4-FFF2-40B4-BE49-F238E27FC236}">
+                <a16:creationId xmlns:a16="http://schemas.microsoft.com/office/drawing/2014/main" id="{A4326178-2684-9E2D-E183-8E47E322C619}"/>
+              </a:ext>
+            </a:extLst>
+          </p:cNvPr>
+          <p:cNvSpPr>
+            <a:spLocks noGrp="1"/>
+          </p:cNvSpPr>
+          <p:nvPr>
+            <p:ph idx="1"/>
+          </p:nvPr>
+        </p:nvSpPr>
+        <p:spPr/>
+        <p:txBody>
+          <a:bodyPr/>
+          <a:lstStyle/>
+          <a:p>
+            <a:pPr marL="0" indent="0">
+              <a:buNone/>
+            </a:pPr>
+            <a:r>
+              <a:rPr lang="it-IT" dirty="0"/>
+              <a:t>Il pattern Adapter è stato applicato alle Repository JPA fornite da Spring Data per introdurre un’interfaccia stabile (rappresentata da </a:t>
+            </a:r>
+            <a:r>
+              <a:rPr lang="it-IT" dirty="0" err="1"/>
+              <a:t>RepositoryPort</a:t>
+            </a:r>
+            <a:r>
+              <a:rPr lang="it-IT" dirty="0"/>
+              <a:t>) che permette ai Service di interagire con il livello di persistenza in modo naturale e indipendente dai dettagli di implementazione.</a:t>
+            </a:r>
+          </a:p>
+          <a:p>
+            <a:pPr marL="0" indent="0">
+              <a:buNone/>
+            </a:pPr>
+            <a:r>
+              <a:rPr lang="it-IT" dirty="0"/>
+              <a:t>L’Adapter ha il compito di trasformare i dati tra il modello di dominio e le </a:t>
+            </a:r>
+            <a:r>
+              <a:rPr lang="it-IT" dirty="0" err="1"/>
+              <a:t>Entity</a:t>
+            </a:r>
+            <a:r>
+              <a:rPr lang="it-IT" dirty="0"/>
+              <a:t> del database. In lettura, converte le </a:t>
+            </a:r>
+            <a:r>
+              <a:rPr lang="it-IT" dirty="0" err="1"/>
+              <a:t>Entity</a:t>
+            </a:r>
+            <a:r>
+              <a:rPr lang="it-IT" dirty="0"/>
+              <a:t> in oggetti di dominio, rendendo i dati utilizzabili dai Service. In scrittura, effettua la conversione inversa.</a:t>
+            </a:r>
+          </a:p>
+          <a:p>
+            <a:pPr marL="0" indent="0">
+              <a:buNone/>
+            </a:pPr>
+            <a:endParaRPr lang="it-IT" dirty="0"/>
+          </a:p>
+        </p:txBody>
+      </p:sp>
+    </p:spTree>
+    <p:extLst>
+      <p:ext uri="{BB962C8B-B14F-4D97-AF65-F5344CB8AC3E}">
+        <p14:creationId xmlns:p14="http://schemas.microsoft.com/office/powerpoint/2010/main" val="3737302103"/>
+      </p:ext>
+    </p:extLst>
+  </p:cSld>
+  <p:clrMapOvr>
+    <a:masterClrMapping/>
+  </p:clrMapOvr>
+</p:sld>
+</file>
+
+<file path=ppt/slides/slide15.xml><?xml version="1.0" encoding="utf-8"?>
+<p:sld xmlns:a="http://schemas.openxmlformats.org/drawingml/2006/main" xmlns:r="http://schemas.openxmlformats.org/officeDocument/2006/relationships" xmlns:p="http://schemas.openxmlformats.org/presentationml/2006/main">
+  <p:cSld>
+    <p:spTree>
+      <p:nvGrpSpPr>
+        <p:cNvPr id="1" name="">
+          <a:extLst>
+            <a:ext uri="{FF2B5EF4-FFF2-40B4-BE49-F238E27FC236}">
+              <a16:creationId xmlns:a16="http://schemas.microsoft.com/office/drawing/2014/main" id="{9948C226-010D-E665-C445-E05414218686}"/>
+            </a:ext>
+          </a:extLst>
+        </p:cNvPr>
+        <p:cNvGrpSpPr/>
+        <p:nvPr/>
+      </p:nvGrpSpPr>
+      <p:grpSpPr>
+        <a:xfrm>
+          <a:off x="0" y="0"/>
+          <a:ext cx="0" cy="0"/>
+          <a:chOff x="0" y="0"/>
+          <a:chExt cx="0" cy="0"/>
+        </a:xfrm>
+      </p:grpSpPr>
+      <p:sp>
+        <p:nvSpPr>
+          <p:cNvPr id="3" name="Segnaposto contenuto 2">
+            <a:extLst>
+              <a:ext uri="{FF2B5EF4-FFF2-40B4-BE49-F238E27FC236}">
+                <a16:creationId xmlns:a16="http://schemas.microsoft.com/office/drawing/2014/main" id="{D1CF207D-83F7-A124-F78F-528CBB5E46B1}"/>
+              </a:ext>
+            </a:extLst>
+          </p:cNvPr>
+          <p:cNvSpPr>
+            <a:spLocks noGrp="1"/>
+          </p:cNvSpPr>
+          <p:nvPr>
+            <p:ph idx="1"/>
+          </p:nvPr>
+        </p:nvSpPr>
+        <p:spPr>
+          <a:xfrm>
+            <a:off x="2317294" y="5242952"/>
+            <a:ext cx="1668283" cy="519541"/>
+          </a:xfrm>
+        </p:spPr>
+        <p:txBody>
+          <a:bodyPr/>
+          <a:lstStyle/>
+          <a:p>
+            <a:pPr marL="0" indent="0">
+              <a:buNone/>
+            </a:pPr>
+            <a:r>
+              <a:rPr lang="en-GB" dirty="0" err="1"/>
+              <a:t>Adaptee</a:t>
+            </a:r>
+            <a:endParaRPr lang="en-GB" dirty="0"/>
+          </a:p>
+        </p:txBody>
+      </p:sp>
+      <p:pic>
+        <p:nvPicPr>
+          <p:cNvPr id="5" name="Immagine 4">
+            <a:extLst>
+              <a:ext uri="{FF2B5EF4-FFF2-40B4-BE49-F238E27FC236}">
+                <a16:creationId xmlns:a16="http://schemas.microsoft.com/office/drawing/2014/main" id="{82A045DF-D4D4-0852-A9EC-5ACC91AF7303}"/>
+              </a:ext>
+            </a:extLst>
+          </p:cNvPr>
+          <p:cNvPicPr>
+            <a:picLocks noChangeAspect="1"/>
+          </p:cNvPicPr>
+          <p:nvPr/>
+        </p:nvPicPr>
+        <p:blipFill>
+          <a:blip r:embed="rId2"/>
+          <a:stretch>
+            <a:fillRect/>
+          </a:stretch>
+        </p:blipFill>
+        <p:spPr>
+          <a:xfrm>
+            <a:off x="3903636" y="4884445"/>
+            <a:ext cx="6626325" cy="1637713"/>
+          </a:xfrm>
+          <a:prstGeom prst="rect">
+            <a:avLst/>
+          </a:prstGeom>
+        </p:spPr>
+      </p:pic>
+      <p:pic>
+        <p:nvPicPr>
+          <p:cNvPr id="7" name="Immagine 6">
+            <a:extLst>
+              <a:ext uri="{FF2B5EF4-FFF2-40B4-BE49-F238E27FC236}">
+                <a16:creationId xmlns:a16="http://schemas.microsoft.com/office/drawing/2014/main" id="{4DC2B46C-63CB-579B-C388-8DA4AAE1ADC8}"/>
+              </a:ext>
+            </a:extLst>
+          </p:cNvPr>
+          <p:cNvPicPr>
+            <a:picLocks noChangeAspect="1"/>
+          </p:cNvPicPr>
+          <p:nvPr/>
+        </p:nvPicPr>
+        <p:blipFill>
+          <a:blip r:embed="rId3"/>
+          <a:stretch>
+            <a:fillRect/>
+          </a:stretch>
+        </p:blipFill>
+        <p:spPr>
+          <a:xfrm>
+            <a:off x="3151436" y="2745617"/>
+            <a:ext cx="3782338" cy="1637713"/>
+          </a:xfrm>
+          <a:prstGeom prst="rect">
+            <a:avLst/>
+          </a:prstGeom>
+        </p:spPr>
+      </p:pic>
+      <p:sp>
+        <p:nvSpPr>
+          <p:cNvPr id="12" name="Segnaposto contenuto 2">
+            <a:extLst>
+              <a:ext uri="{FF2B5EF4-FFF2-40B4-BE49-F238E27FC236}">
+                <a16:creationId xmlns:a16="http://schemas.microsoft.com/office/drawing/2014/main" id="{47E65938-AA23-82E3-83AF-45B3C939587B}"/>
+              </a:ext>
+            </a:extLst>
+          </p:cNvPr>
+          <p:cNvSpPr txBox="1">
+            <a:spLocks/>
+          </p:cNvSpPr>
+          <p:nvPr/>
+        </p:nvSpPr>
+        <p:spPr bwMode="auto">
+          <a:xfrm>
+            <a:off x="1523599" y="3169229"/>
+            <a:ext cx="1585145" cy="519541"/>
+          </a:xfrm>
+          <a:prstGeom prst="rect">
+            <a:avLst/>
+          </a:prstGeom>
+        </p:spPr>
+        <p:txBody>
+          <a:bodyPr vert="horz" lIns="91440" tIns="45720" rIns="91440" bIns="45720" rtlCol="0">
+            <a:normAutofit/>
+          </a:bodyPr>
+          <a:lstStyle>
+            <a:lvl1pPr marL="228600" indent="-228600" algn="l" defTabSz="914400" rtl="0">
+              <a:lnSpc>
+                <a:spcPct val="90000"/>
+              </a:lnSpc>
+              <a:spcBef>
+                <a:spcPts val="1000"/>
+              </a:spcBef>
+              <a:buFont typeface="Arial"/>
+              <a:buChar char="•"/>
+              <a:defRPr sz="2800">
+                <a:solidFill>
+                  <a:schemeClr val="tx1"/>
+                </a:solidFill>
+                <a:latin typeface="+mn-lt"/>
+                <a:ea typeface="+mn-ea"/>
+                <a:cs typeface="+mn-cs"/>
+              </a:defRPr>
+            </a:lvl1pPr>
+            <a:lvl2pPr marL="685800" indent="-228600" algn="l" defTabSz="914400" rtl="0">
+              <a:lnSpc>
+                <a:spcPct val="90000"/>
+              </a:lnSpc>
+              <a:spcBef>
+                <a:spcPts val="500"/>
+              </a:spcBef>
+              <a:buFont typeface="Arial"/>
+              <a:buChar char="•"/>
+              <a:defRPr sz="2400">
+                <a:solidFill>
+                  <a:schemeClr val="tx1"/>
+                </a:solidFill>
+                <a:latin typeface="+mn-lt"/>
+                <a:ea typeface="+mn-ea"/>
+                <a:cs typeface="+mn-cs"/>
+              </a:defRPr>
+            </a:lvl2pPr>
+            <a:lvl3pPr marL="1143000" indent="-228600" algn="l" defTabSz="914400" rtl="0">
+              <a:lnSpc>
+                <a:spcPct val="90000"/>
+              </a:lnSpc>
+              <a:spcBef>
+                <a:spcPts val="500"/>
+              </a:spcBef>
+              <a:buFont typeface="Arial"/>
+              <a:buChar char="•"/>
+              <a:defRPr sz="2000">
+                <a:solidFill>
+                  <a:schemeClr val="tx1"/>
+                </a:solidFill>
+                <a:latin typeface="+mn-lt"/>
+                <a:ea typeface="+mn-ea"/>
+                <a:cs typeface="+mn-cs"/>
+              </a:defRPr>
+            </a:lvl3pPr>
+            <a:lvl4pPr marL="1600200" indent="-228600" algn="l" defTabSz="914400" rtl="0">
+              <a:lnSpc>
+                <a:spcPct val="90000"/>
+              </a:lnSpc>
+              <a:spcBef>
+                <a:spcPts val="500"/>
+              </a:spcBef>
+              <a:buFont typeface="Arial"/>
+              <a:buChar char="•"/>
+              <a:defRPr sz="1800">
+                <a:solidFill>
+                  <a:schemeClr val="tx1"/>
+                </a:solidFill>
+                <a:latin typeface="+mn-lt"/>
+                <a:ea typeface="+mn-ea"/>
+                <a:cs typeface="+mn-cs"/>
+              </a:defRPr>
+            </a:lvl4pPr>
+            <a:lvl5pPr marL="2057400" indent="-228600" algn="l" defTabSz="914400" rtl="0">
+              <a:lnSpc>
+                <a:spcPct val="90000"/>
+              </a:lnSpc>
+              <a:spcBef>
+                <a:spcPts val="500"/>
+              </a:spcBef>
+              <a:buFont typeface="Arial"/>
+              <a:buChar char="•"/>
+              <a:defRPr sz="1800">
+                <a:solidFill>
+                  <a:schemeClr val="tx1"/>
+                </a:solidFill>
+                <a:latin typeface="+mn-lt"/>
+                <a:ea typeface="+mn-ea"/>
+                <a:cs typeface="+mn-cs"/>
+              </a:defRPr>
+            </a:lvl5pPr>
+            <a:lvl6pPr marL="2514600" indent="-228600" algn="l" defTabSz="914400" rtl="0">
+              <a:lnSpc>
+                <a:spcPct val="90000"/>
+              </a:lnSpc>
+              <a:spcBef>
+                <a:spcPts val="500"/>
+              </a:spcBef>
+              <a:buFont typeface="Arial"/>
+              <a:buChar char="•"/>
+              <a:defRPr sz="1800">
+                <a:solidFill>
+                  <a:schemeClr val="tx1"/>
+                </a:solidFill>
+                <a:latin typeface="+mn-lt"/>
+                <a:ea typeface="+mn-ea"/>
+                <a:cs typeface="+mn-cs"/>
+              </a:defRPr>
+            </a:lvl6pPr>
+            <a:lvl7pPr marL="2971800" indent="-228600" algn="l" defTabSz="914400" rtl="0">
+              <a:lnSpc>
+                <a:spcPct val="90000"/>
+              </a:lnSpc>
+              <a:spcBef>
+                <a:spcPts val="500"/>
+              </a:spcBef>
+              <a:buFont typeface="Arial"/>
+              <a:buChar char="•"/>
+              <a:defRPr sz="1800">
+                <a:solidFill>
+                  <a:schemeClr val="tx1"/>
+                </a:solidFill>
+                <a:latin typeface="+mn-lt"/>
+                <a:ea typeface="+mn-ea"/>
+                <a:cs typeface="+mn-cs"/>
+              </a:defRPr>
+            </a:lvl7pPr>
+            <a:lvl8pPr marL="3429000" indent="-228600" algn="l" defTabSz="914400" rtl="0">
+              <a:lnSpc>
+                <a:spcPct val="90000"/>
+              </a:lnSpc>
+              <a:spcBef>
+                <a:spcPts val="500"/>
+              </a:spcBef>
+              <a:buFont typeface="Arial"/>
+              <a:buChar char="•"/>
+              <a:defRPr sz="1800">
+                <a:solidFill>
+                  <a:schemeClr val="tx1"/>
+                </a:solidFill>
+                <a:latin typeface="+mn-lt"/>
+                <a:ea typeface="+mn-ea"/>
+                <a:cs typeface="+mn-cs"/>
+              </a:defRPr>
+            </a:lvl8pPr>
+            <a:lvl9pPr marL="3886200" indent="-228600" algn="l" defTabSz="914400" rtl="0">
+              <a:lnSpc>
+                <a:spcPct val="90000"/>
+              </a:lnSpc>
+              <a:spcBef>
+                <a:spcPts val="500"/>
+              </a:spcBef>
+              <a:buFont typeface="Arial"/>
+              <a:buChar char="•"/>
+              <a:defRPr sz="1800">
+                <a:solidFill>
+                  <a:schemeClr val="tx1"/>
+                </a:solidFill>
+                <a:latin typeface="+mn-lt"/>
+                <a:ea typeface="+mn-ea"/>
+                <a:cs typeface="+mn-cs"/>
+              </a:defRPr>
+            </a:lvl9pPr>
+          </a:lstStyle>
+          <a:p>
+            <a:pPr marL="0" indent="0">
+              <a:buFont typeface="Arial"/>
+              <a:buNone/>
+            </a:pPr>
+            <a:r>
+              <a:rPr lang="en-GB" dirty="0"/>
+              <a:t>Adapter</a:t>
+            </a:r>
+          </a:p>
+        </p:txBody>
+      </p:sp>
+      <p:cxnSp>
+        <p:nvCxnSpPr>
+          <p:cNvPr id="14" name="Connettore 2 13">
+            <a:extLst>
+              <a:ext uri="{FF2B5EF4-FFF2-40B4-BE49-F238E27FC236}">
+                <a16:creationId xmlns:a16="http://schemas.microsoft.com/office/drawing/2014/main" id="{222C07A4-4C4B-1C8E-187D-184D4F204641}"/>
+              </a:ext>
+            </a:extLst>
+          </p:cNvPr>
+          <p:cNvCxnSpPr>
+            <a:cxnSpLocks/>
+          </p:cNvCxnSpPr>
+          <p:nvPr/>
+        </p:nvCxnSpPr>
+        <p:spPr>
+          <a:xfrm>
+            <a:off x="5670596" y="4369409"/>
+            <a:ext cx="184195" cy="515036"/>
+          </a:xfrm>
+          <a:prstGeom prst="straightConnector1">
+            <a:avLst/>
+          </a:prstGeom>
+          <a:ln w="19050" cap="flat" cmpd="sng" algn="ctr">
+            <a:solidFill>
+              <a:schemeClr val="accent1"/>
+            </a:solidFill>
+            <a:prstDash val="solid"/>
+            <a:round/>
+            <a:headEnd type="none" w="med" len="med"/>
+            <a:tailEnd type="arrow" w="med" len="med"/>
+          </a:ln>
+        </p:spPr>
+        <p:style>
+          <a:lnRef idx="0">
+            <a:scrgbClr r="0" g="0" b="0"/>
+          </a:lnRef>
+          <a:fillRef idx="0">
+            <a:scrgbClr r="0" g="0" b="0"/>
+          </a:fillRef>
+          <a:effectRef idx="0">
+            <a:scrgbClr r="0" g="0" b="0"/>
+          </a:effectRef>
+          <a:fontRef idx="minor">
+            <a:schemeClr val="tx1"/>
+          </a:fontRef>
+        </p:style>
+      </p:cxnSp>
+      <p:sp>
+        <p:nvSpPr>
+          <p:cNvPr id="15" name="Segnaposto contenuto 2">
+            <a:extLst>
+              <a:ext uri="{FF2B5EF4-FFF2-40B4-BE49-F238E27FC236}">
+                <a16:creationId xmlns:a16="http://schemas.microsoft.com/office/drawing/2014/main" id="{5BF79AA0-5CC8-D320-CC96-53BC434B11C4}"/>
+              </a:ext>
+            </a:extLst>
+          </p:cNvPr>
+          <p:cNvSpPr txBox="1">
+            <a:spLocks/>
+          </p:cNvSpPr>
+          <p:nvPr/>
+        </p:nvSpPr>
+        <p:spPr bwMode="auto">
+          <a:xfrm>
+            <a:off x="542764" y="1071746"/>
+            <a:ext cx="1585145" cy="519541"/>
+          </a:xfrm>
+          <a:prstGeom prst="rect">
+            <a:avLst/>
+          </a:prstGeom>
+        </p:spPr>
+        <p:txBody>
+          <a:bodyPr vert="horz" lIns="91440" tIns="45720" rIns="91440" bIns="45720" rtlCol="0">
+            <a:normAutofit/>
+          </a:bodyPr>
+          <a:lstStyle>
+            <a:lvl1pPr marL="228600" indent="-228600" algn="l" defTabSz="914400" rtl="0">
+              <a:lnSpc>
+                <a:spcPct val="90000"/>
+              </a:lnSpc>
+              <a:spcBef>
+                <a:spcPts val="1000"/>
+              </a:spcBef>
+              <a:buFont typeface="Arial"/>
+              <a:buChar char="•"/>
+              <a:defRPr sz="2800">
+                <a:solidFill>
+                  <a:schemeClr val="tx1"/>
+                </a:solidFill>
+                <a:latin typeface="+mn-lt"/>
+                <a:ea typeface="+mn-ea"/>
+                <a:cs typeface="+mn-cs"/>
+              </a:defRPr>
+            </a:lvl1pPr>
+            <a:lvl2pPr marL="685800" indent="-228600" algn="l" defTabSz="914400" rtl="0">
+              <a:lnSpc>
+                <a:spcPct val="90000"/>
+              </a:lnSpc>
+              <a:spcBef>
+                <a:spcPts val="500"/>
+              </a:spcBef>
+              <a:buFont typeface="Arial"/>
+              <a:buChar char="•"/>
+              <a:defRPr sz="2400">
+                <a:solidFill>
+                  <a:schemeClr val="tx1"/>
+                </a:solidFill>
+                <a:latin typeface="+mn-lt"/>
+                <a:ea typeface="+mn-ea"/>
+                <a:cs typeface="+mn-cs"/>
+              </a:defRPr>
+            </a:lvl2pPr>
+            <a:lvl3pPr marL="1143000" indent="-228600" algn="l" defTabSz="914400" rtl="0">
+              <a:lnSpc>
+                <a:spcPct val="90000"/>
+              </a:lnSpc>
+              <a:spcBef>
+                <a:spcPts val="500"/>
+              </a:spcBef>
+              <a:buFont typeface="Arial"/>
+              <a:buChar char="•"/>
+              <a:defRPr sz="2000">
+                <a:solidFill>
+                  <a:schemeClr val="tx1"/>
+                </a:solidFill>
+                <a:latin typeface="+mn-lt"/>
+                <a:ea typeface="+mn-ea"/>
+                <a:cs typeface="+mn-cs"/>
+              </a:defRPr>
+            </a:lvl3pPr>
+            <a:lvl4pPr marL="1600200" indent="-228600" algn="l" defTabSz="914400" rtl="0">
+              <a:lnSpc>
+                <a:spcPct val="90000"/>
+              </a:lnSpc>
+              <a:spcBef>
+                <a:spcPts val="500"/>
+              </a:spcBef>
+              <a:buFont typeface="Arial"/>
+              <a:buChar char="•"/>
+              <a:defRPr sz="1800">
+                <a:solidFill>
+                  <a:schemeClr val="tx1"/>
+                </a:solidFill>
+                <a:latin typeface="+mn-lt"/>
+                <a:ea typeface="+mn-ea"/>
+                <a:cs typeface="+mn-cs"/>
+              </a:defRPr>
+            </a:lvl4pPr>
+            <a:lvl5pPr marL="2057400" indent="-228600" algn="l" defTabSz="914400" rtl="0">
+              <a:lnSpc>
+                <a:spcPct val="90000"/>
+              </a:lnSpc>
+              <a:spcBef>
+                <a:spcPts val="500"/>
+              </a:spcBef>
+              <a:buFont typeface="Arial"/>
+              <a:buChar char="•"/>
+              <a:defRPr sz="1800">
+                <a:solidFill>
+                  <a:schemeClr val="tx1"/>
+                </a:solidFill>
+                <a:latin typeface="+mn-lt"/>
+                <a:ea typeface="+mn-ea"/>
+                <a:cs typeface="+mn-cs"/>
+              </a:defRPr>
+            </a:lvl5pPr>
+            <a:lvl6pPr marL="2514600" indent="-228600" algn="l" defTabSz="914400" rtl="0">
+              <a:lnSpc>
+                <a:spcPct val="90000"/>
+              </a:lnSpc>
+              <a:spcBef>
+                <a:spcPts val="500"/>
+              </a:spcBef>
+              <a:buFont typeface="Arial"/>
+              <a:buChar char="•"/>
+              <a:defRPr sz="1800">
+                <a:solidFill>
+                  <a:schemeClr val="tx1"/>
+                </a:solidFill>
+                <a:latin typeface="+mn-lt"/>
+                <a:ea typeface="+mn-ea"/>
+                <a:cs typeface="+mn-cs"/>
+              </a:defRPr>
+            </a:lvl6pPr>
+            <a:lvl7pPr marL="2971800" indent="-228600" algn="l" defTabSz="914400" rtl="0">
+              <a:lnSpc>
+                <a:spcPct val="90000"/>
+              </a:lnSpc>
+              <a:spcBef>
+                <a:spcPts val="500"/>
+              </a:spcBef>
+              <a:buFont typeface="Arial"/>
+              <a:buChar char="•"/>
+              <a:defRPr sz="1800">
+                <a:solidFill>
+                  <a:schemeClr val="tx1"/>
+                </a:solidFill>
+                <a:latin typeface="+mn-lt"/>
+                <a:ea typeface="+mn-ea"/>
+                <a:cs typeface="+mn-cs"/>
+              </a:defRPr>
+            </a:lvl7pPr>
+            <a:lvl8pPr marL="3429000" indent="-228600" algn="l" defTabSz="914400" rtl="0">
+              <a:lnSpc>
+                <a:spcPct val="90000"/>
+              </a:lnSpc>
+              <a:spcBef>
+                <a:spcPts val="500"/>
+              </a:spcBef>
+              <a:buFont typeface="Arial"/>
+              <a:buChar char="•"/>
+              <a:defRPr sz="1800">
+                <a:solidFill>
+                  <a:schemeClr val="tx1"/>
+                </a:solidFill>
+                <a:latin typeface="+mn-lt"/>
+                <a:ea typeface="+mn-ea"/>
+                <a:cs typeface="+mn-cs"/>
+              </a:defRPr>
+            </a:lvl8pPr>
+            <a:lvl9pPr marL="3886200" indent="-228600" algn="l" defTabSz="914400" rtl="0">
+              <a:lnSpc>
+                <a:spcPct val="90000"/>
+              </a:lnSpc>
+              <a:spcBef>
+                <a:spcPts val="500"/>
+              </a:spcBef>
+              <a:buFont typeface="Arial"/>
+              <a:buChar char="•"/>
+              <a:defRPr sz="1800">
+                <a:solidFill>
+                  <a:schemeClr val="tx1"/>
+                </a:solidFill>
+                <a:latin typeface="+mn-lt"/>
+                <a:ea typeface="+mn-ea"/>
+                <a:cs typeface="+mn-cs"/>
+              </a:defRPr>
+            </a:lvl9pPr>
+          </a:lstStyle>
+          <a:p>
+            <a:pPr marL="0" indent="0">
+              <a:buFont typeface="Arial"/>
+              <a:buNone/>
+            </a:pPr>
+            <a:r>
+              <a:rPr lang="en-GB" dirty="0"/>
+              <a:t>Target</a:t>
+            </a:r>
+          </a:p>
+        </p:txBody>
+      </p:sp>
+      <p:pic>
+        <p:nvPicPr>
+          <p:cNvPr id="17" name="Immagine 16">
+            <a:extLst>
+              <a:ext uri="{FF2B5EF4-FFF2-40B4-BE49-F238E27FC236}">
+                <a16:creationId xmlns:a16="http://schemas.microsoft.com/office/drawing/2014/main" id="{6F1DCB05-E89B-8DAA-26F3-959AF619020A}"/>
+              </a:ext>
+            </a:extLst>
+          </p:cNvPr>
+          <p:cNvPicPr>
+            <a:picLocks noChangeAspect="1"/>
+          </p:cNvPicPr>
+          <p:nvPr/>
+        </p:nvPicPr>
+        <p:blipFill>
+          <a:blip r:embed="rId4"/>
+          <a:stretch>
+            <a:fillRect/>
+          </a:stretch>
+        </p:blipFill>
+        <p:spPr>
+          <a:xfrm>
+            <a:off x="1835561" y="1065884"/>
+            <a:ext cx="6187210" cy="1243723"/>
+          </a:xfrm>
+          <a:prstGeom prst="rect">
+            <a:avLst/>
+          </a:prstGeom>
+        </p:spPr>
+      </p:pic>
+      <p:cxnSp>
+        <p:nvCxnSpPr>
+          <p:cNvPr id="18" name="Connettore 2 17">
+            <a:extLst>
+              <a:ext uri="{FF2B5EF4-FFF2-40B4-BE49-F238E27FC236}">
+                <a16:creationId xmlns:a16="http://schemas.microsoft.com/office/drawing/2014/main" id="{671CBAA7-42EE-2AFD-934D-4E1E23D5FEE2}"/>
+              </a:ext>
+            </a:extLst>
+          </p:cNvPr>
+          <p:cNvCxnSpPr>
+            <a:cxnSpLocks/>
+            <a:stCxn id="17" idx="2"/>
+            <a:endCxn id="7" idx="0"/>
+          </p:cNvCxnSpPr>
+          <p:nvPr/>
+        </p:nvCxnSpPr>
+        <p:spPr>
+          <a:xfrm>
+            <a:off x="4929166" y="2309607"/>
+            <a:ext cx="113439" cy="436010"/>
+          </a:xfrm>
+          <a:prstGeom prst="straightConnector1">
+            <a:avLst/>
+          </a:prstGeom>
+          <a:ln w="19050" cap="flat" cmpd="sng" algn="ctr">
+            <a:solidFill>
+              <a:schemeClr val="accent1"/>
+            </a:solidFill>
+            <a:prstDash val="solid"/>
+            <a:round/>
+            <a:headEnd type="none" w="med" len="med"/>
+            <a:tailEnd type="arrow" w="med" len="med"/>
+          </a:ln>
+        </p:spPr>
+        <p:style>
+          <a:lnRef idx="0">
+            <a:scrgbClr r="0" g="0" b="0"/>
+          </a:lnRef>
+          <a:fillRef idx="0">
+            <a:scrgbClr r="0" g="0" b="0"/>
+          </a:fillRef>
+          <a:effectRef idx="0">
+            <a:scrgbClr r="0" g="0" b="0"/>
+          </a:effectRef>
+          <a:fontRef idx="minor">
+            <a:schemeClr val="tx1"/>
+          </a:fontRef>
+        </p:style>
+      </p:cxnSp>
+      <p:pic>
+        <p:nvPicPr>
+          <p:cNvPr id="2050" name="Picture 2" descr="PlantUML diagram">
+            <a:extLst>
+              <a:ext uri="{FF2B5EF4-FFF2-40B4-BE49-F238E27FC236}">
+                <a16:creationId xmlns:a16="http://schemas.microsoft.com/office/drawing/2014/main" id="{DF86E73B-ED4F-3267-C421-684BE338922C}"/>
+              </a:ext>
+            </a:extLst>
+          </p:cNvPr>
+          <p:cNvPicPr>
+            <a:picLocks noChangeAspect="1" noChangeArrowheads="1"/>
+          </p:cNvPicPr>
+          <p:nvPr/>
+        </p:nvPicPr>
+        <p:blipFill>
+          <a:blip r:embed="rId5">
+            <a:extLst>
+              <a:ext uri="{28A0092B-C50C-407E-A947-70E740481C1C}">
+                <a14:useLocalDpi xmlns:a14="http://schemas.microsoft.com/office/drawing/2010/main" val="0"/>
+              </a:ext>
+            </a:extLst>
+          </a:blip>
+          <a:srcRect/>
+          <a:stretch>
+            <a:fillRect/>
+          </a:stretch>
+        </p:blipFill>
+        <p:spPr bwMode="auto">
+          <a:xfrm>
+            <a:off x="8523539" y="816409"/>
+            <a:ext cx="2657475" cy="3238500"/>
+          </a:xfrm>
+          <a:prstGeom prst="rect">
+            <a:avLst/>
+          </a:prstGeom>
+          <a:noFill/>
+          <a:extLst>
+            <a:ext uri="{909E8E84-426E-40DD-AFC4-6F175D3DCCD1}">
+              <a14:hiddenFill xmlns:a14="http://schemas.microsoft.com/office/drawing/2010/main">
+                <a:solidFill>
+                  <a:srgbClr val="FFFFFF"/>
+                </a:solidFill>
+              </a14:hiddenFill>
+            </a:ext>
+          </a:extLst>
+        </p:spPr>
+      </p:pic>
+    </p:spTree>
+    <p:extLst>
+      <p:ext uri="{BB962C8B-B14F-4D97-AF65-F5344CB8AC3E}">
+        <p14:creationId xmlns:p14="http://schemas.microsoft.com/office/powerpoint/2010/main" val="2584312502"/>
+      </p:ext>
+    </p:extLst>
+  </p:cSld>
+  <p:clrMapOvr>
+    <a:masterClrMapping/>
+  </p:clrMapOvr>
+</p:sld>
+</file>
+
+<file path=ppt/slides/slide16.xml><?xml version="1.0" encoding="utf-8"?>
+<p:sld xmlns:a="http://schemas.openxmlformats.org/drawingml/2006/main" xmlns:r="http://schemas.openxmlformats.org/officeDocument/2006/relationships" xmlns:p="http://schemas.openxmlformats.org/presentationml/2006/main" showMasterPhAnim="0">
+  <p:cSld>
     <p:spTree>
       <p:nvGrpSpPr>
         <p:cNvPr id="1" name=""/>
@@ -6305,7 +7177,6 @@
               <a:rPr lang="en"/>
               <a:t>Data l’esigenza di eseguire piú refactoring sul metodo createVisitPlan() in VisitPlanService (vedi a slide NN ), prima di operare é stato necessario definire diversi casi di test in modo da verificare che l’algoritmo si comportasse sempre alla stessa maniera.</a:t>
             </a:r>
-            <a:endParaRPr lang="en"/>
           </a:p>
           <a:p>
             <a:pPr marL="0" indent="0">
@@ -6326,20 +7197,12 @@
   <p:clrMapOvr>
     <a:masterClrMapping/>
   </p:clrMapOvr>
-  <mc:AlternateContent xmlns:mc="http://schemas.openxmlformats.org/markup-compatibility/2006">
-    <mc:Choice xmlns:p159="http://schemas.microsoft.com/office/powerpoint/2015/09/main" xmlns:p14="http://schemas.microsoft.com/office/powerpoint/2010/main" Requires="p159">
-      <p:transition p14:dur="2000" advClick="1"/>
-    </mc:Choice>
-    <mc:Fallback>
-      <p:transition advClick="1"/>
-    </mc:Fallback>
-  </mc:AlternateContent>
 </p:sld>
 </file>
 
-<file path=ppt/slides/slide14.xml><?xml version="1.0" encoding="utf-8"?>
-<p:sld xmlns:a="http://schemas.openxmlformats.org/drawingml/2006/main" xmlns:r="http://schemas.openxmlformats.org/officeDocument/2006/relationships" xmlns:p="http://schemas.openxmlformats.org/presentationml/2006/main" xmlns:m="http://schemas.openxmlformats.org/officeDocument/2006/math" xmlns:w="http://schemas.openxmlformats.org/wordprocessingml/2006/main" xmlns:mc="http://schemas.openxmlformats.org/markup-compatibility/2006" showMasterPhAnim="0" showMasterSp="1" show="1">
-  <p:cSld name="">
+<file path=ppt/slides/slide17.xml><?xml version="1.0" encoding="utf-8"?>
+<p:sld xmlns:a="http://schemas.openxmlformats.org/drawingml/2006/main" xmlns:r="http://schemas.openxmlformats.org/officeDocument/2006/relationships" xmlns:p="http://schemas.openxmlformats.org/presentationml/2006/main" showMasterPhAnim="0">
+  <p:cSld>
     <p:spTree>
       <p:nvGrpSpPr>
         <p:cNvPr id="1" name=""/>
@@ -6400,7 +7263,7 @@
       </p:sp>
       <p:pic>
         <p:nvPicPr>
-          <p:cNvPr id="505329485" name=""/>
+          <p:cNvPr id="505329485" name="Elemento grafico 505329484"/>
           <p:cNvPicPr>
             <a:picLocks noChangeAspect="1"/>
           </p:cNvPicPr>
@@ -6417,7 +7280,7 @@
           <a:stretch/>
         </p:blipFill>
         <p:spPr bwMode="auto">
-          <a:xfrm flipH="0" flipV="0">
+          <a:xfrm>
             <a:off x="401695" y="997479"/>
             <a:ext cx="4076826" cy="5554842"/>
           </a:xfrm>
@@ -6428,12 +7291,12 @@
       </p:pic>
       <p:sp>
         <p:nvSpPr>
-          <p:cNvPr id="574398209" name=""/>
+          <p:cNvPr id="574398209" name="CasellaDiTesto 574398208"/>
           <p:cNvSpPr txBox="1"/>
           <p:nvPr/>
         </p:nvSpPr>
         <p:spPr bwMode="auto">
-          <a:xfrm rot="0" flipH="0" flipV="0">
+          <a:xfrm>
             <a:off x="4793024" y="1338258"/>
             <a:ext cx="6946457" cy="5474496"/>
           </a:xfrm>
@@ -6455,9 +7318,10 @@
           </a:ln>
         </p:spPr>
         <p:txBody>
-          <a:bodyPr vertOverflow="overflow" horzOverflow="overflow" vert="horz" wrap="square" lIns="91440" tIns="45720" rIns="91440" bIns="45720" numCol="1" spcCol="0" rtlCol="0" fromWordArt="0" anchor="t" anchorCtr="0" forceAA="0" upright="0" compatLnSpc="0">
+          <a:bodyPr vertOverflow="overflow" horzOverflow="overflow" vert="horz" wrap="square" lIns="91440" tIns="45720" rIns="91440" bIns="45720" numCol="1" spcCol="0" rtlCol="0" fromWordArt="0" anchor="t" anchorCtr="0" forceAA="0" compatLnSpc="0">
             <a:spAutoFit/>
           </a:bodyPr>
+          <a:lstStyle/>
           <a:p>
             <a:pPr>
               <a:defRPr/>
@@ -6896,12 +7760,12 @@
       </p:sp>
       <p:sp>
         <p:nvSpPr>
-          <p:cNvPr id="1564850453" name=""/>
+          <p:cNvPr id="1564850453" name="CasellaDiTesto 1564850452"/>
           <p:cNvSpPr txBox="1"/>
           <p:nvPr/>
         </p:nvSpPr>
         <p:spPr bwMode="auto">
-          <a:xfrm rot="0" flipH="0" flipV="0">
+          <a:xfrm>
             <a:off x="5024045" y="922568"/>
             <a:ext cx="5872644" cy="366119"/>
           </a:xfrm>
@@ -6911,9 +7775,10 @@
           <a:noFill/>
         </p:spPr>
         <p:txBody>
-          <a:bodyPr vertOverflow="overflow" horzOverflow="overflow" vert="horz" wrap="square" lIns="91440" tIns="45720" rIns="91440" bIns="45720" numCol="1" spcCol="0" rtlCol="0" fromWordArt="0" anchor="t" anchorCtr="0" forceAA="0" upright="0" compatLnSpc="0">
+          <a:bodyPr vertOverflow="overflow" horzOverflow="overflow" vert="horz" wrap="square" lIns="91440" tIns="45720" rIns="91440" bIns="45720" numCol="1" spcCol="0" rtlCol="0" fromWordArt="0" anchor="t" anchorCtr="0" forceAA="0" compatLnSpc="0">
             <a:spAutoFit/>
           </a:bodyPr>
+          <a:lstStyle/>
           <a:p>
             <a:pPr>
               <a:defRPr/>
@@ -6931,20 +7796,12 @@
   <p:clrMapOvr>
     <a:masterClrMapping/>
   </p:clrMapOvr>
-  <mc:AlternateContent xmlns:mc="http://schemas.openxmlformats.org/markup-compatibility/2006">
-    <mc:Choice xmlns:p159="http://schemas.microsoft.com/office/powerpoint/2015/09/main" xmlns:p14="http://schemas.microsoft.com/office/powerpoint/2010/main" Requires="p159">
-      <p:transition p14:dur="2000" advClick="1"/>
-    </mc:Choice>
-    <mc:Fallback>
-      <p:transition advClick="1"/>
-    </mc:Fallback>
-  </mc:AlternateContent>
 </p:sld>
 </file>
 
-<file path=ppt/slides/slide15.xml><?xml version="1.0" encoding="utf-8"?>
-<p:sld xmlns:a="http://schemas.openxmlformats.org/drawingml/2006/main" xmlns:r="http://schemas.openxmlformats.org/officeDocument/2006/relationships" xmlns:p="http://schemas.openxmlformats.org/presentationml/2006/main" xmlns:m="http://schemas.openxmlformats.org/officeDocument/2006/math" xmlns:w="http://schemas.openxmlformats.org/wordprocessingml/2006/main" xmlns:mc="http://schemas.openxmlformats.org/markup-compatibility/2006" showMasterPhAnim="0" showMasterSp="1" show="1">
-  <p:cSld name="">
+<file path=ppt/slides/slide18.xml><?xml version="1.0" encoding="utf-8"?>
+<p:sld xmlns:a="http://schemas.openxmlformats.org/drawingml/2006/main" xmlns:r="http://schemas.openxmlformats.org/officeDocument/2006/relationships" xmlns:p="http://schemas.openxmlformats.org/presentationml/2006/main" showMasterPhAnim="0">
+  <p:cSld>
     <p:spTree>
       <p:nvGrpSpPr>
         <p:cNvPr id="1" name=""/>
@@ -7005,12 +7862,12 @@
       </p:sp>
       <p:sp>
         <p:nvSpPr>
-          <p:cNvPr id="1148164113" name=""/>
+          <p:cNvPr id="1148164113" name="CasellaDiTesto 1148164112"/>
           <p:cNvSpPr txBox="1"/>
           <p:nvPr/>
         </p:nvSpPr>
         <p:spPr bwMode="auto">
-          <a:xfrm rot="0" flipH="0" flipV="0">
+          <a:xfrm>
             <a:off x="4793024" y="1856842"/>
             <a:ext cx="6948977" cy="4449081"/>
           </a:xfrm>
@@ -7032,9 +7889,10 @@
           </a:ln>
         </p:spPr>
         <p:txBody>
-          <a:bodyPr vertOverflow="overflow" horzOverflow="overflow" vert="horz" wrap="square" lIns="91440" tIns="45720" rIns="91440" bIns="45720" numCol="1" spcCol="0" rtlCol="0" fromWordArt="0" anchor="t" anchorCtr="0" forceAA="0" upright="0" compatLnSpc="0">
+          <a:bodyPr vertOverflow="overflow" horzOverflow="overflow" vert="horz" wrap="square" lIns="91440" tIns="45720" rIns="91440" bIns="45720" numCol="1" spcCol="0" rtlCol="0" fromWordArt="0" anchor="t" anchorCtr="0" forceAA="0" compatLnSpc="0">
             <a:spAutoFit/>
           </a:bodyPr>
+          <a:lstStyle/>
           <a:p>
             <a:pPr>
               <a:defRPr/>
@@ -7418,12 +8276,12 @@
       </p:sp>
       <p:sp>
         <p:nvSpPr>
-          <p:cNvPr id="913019273" name=""/>
+          <p:cNvPr id="913019273" name="CasellaDiTesto 913019272"/>
           <p:cNvSpPr txBox="1"/>
           <p:nvPr/>
         </p:nvSpPr>
         <p:spPr bwMode="auto">
-          <a:xfrm rot="0" flipH="0" flipV="0">
+          <a:xfrm>
             <a:off x="5216798" y="1304744"/>
             <a:ext cx="6101069" cy="366119"/>
           </a:xfrm>
@@ -7433,9 +8291,10 @@
           <a:noFill/>
         </p:spPr>
         <p:txBody>
-          <a:bodyPr vertOverflow="overflow" horzOverflow="overflow" vert="horz" wrap="square" lIns="91440" tIns="45720" rIns="91440" bIns="45720" numCol="1" spcCol="0" rtlCol="0" fromWordArt="0" anchor="t" anchorCtr="0" forceAA="0" upright="0" compatLnSpc="0">
+          <a:bodyPr vertOverflow="overflow" horzOverflow="overflow" vert="horz" wrap="square" lIns="91440" tIns="45720" rIns="91440" bIns="45720" numCol="1" spcCol="0" rtlCol="0" fromWordArt="0" anchor="t" anchorCtr="0" forceAA="0" compatLnSpc="0">
             <a:spAutoFit/>
           </a:bodyPr>
+          <a:lstStyle/>
           <a:p>
             <a:pPr algn="ctr">
               <a:defRPr/>
@@ -7450,7 +8309,7 @@
       </p:sp>
       <p:pic>
         <p:nvPicPr>
-          <p:cNvPr id="895613081" name=""/>
+          <p:cNvPr id="895613081" name="Immagine 895613080"/>
           <p:cNvPicPr>
             <a:picLocks noChangeAspect="1"/>
           </p:cNvPicPr>
@@ -7461,7 +8320,7 @@
           <a:stretch/>
         </p:blipFill>
         <p:spPr bwMode="auto">
-          <a:xfrm flipH="0" flipV="0">
+          <a:xfrm>
             <a:off x="355297" y="1121684"/>
             <a:ext cx="3831803" cy="5575898"/>
           </a:xfrm>
@@ -7475,20 +8334,12 @@
   <p:clrMapOvr>
     <a:masterClrMapping/>
   </p:clrMapOvr>
-  <mc:AlternateContent xmlns:mc="http://schemas.openxmlformats.org/markup-compatibility/2006">
-    <mc:Choice xmlns:p159="http://schemas.microsoft.com/office/powerpoint/2015/09/main" xmlns:p14="http://schemas.microsoft.com/office/powerpoint/2010/main" Requires="p159">
-      <p:transition p14:dur="2000" advClick="1"/>
-    </mc:Choice>
-    <mc:Fallback>
-      <p:transition advClick="1"/>
-    </mc:Fallback>
-  </mc:AlternateContent>
 </p:sld>
 </file>
 
-<file path=ppt/slides/slide16.xml><?xml version="1.0" encoding="utf-8"?>
-<p:sld xmlns:a="http://schemas.openxmlformats.org/drawingml/2006/main" xmlns:r="http://schemas.openxmlformats.org/officeDocument/2006/relationships" xmlns:p="http://schemas.openxmlformats.org/presentationml/2006/main" xmlns:m="http://schemas.openxmlformats.org/officeDocument/2006/math" xmlns:w="http://schemas.openxmlformats.org/wordprocessingml/2006/main" xmlns:mc="http://schemas.openxmlformats.org/markup-compatibility/2006" showMasterPhAnim="0" showMasterSp="1" show="1">
-  <p:cSld name="">
+<file path=ppt/slides/slide19.xml><?xml version="1.0" encoding="utf-8"?>
+<p:sld xmlns:a="http://schemas.openxmlformats.org/drawingml/2006/main" xmlns:r="http://schemas.openxmlformats.org/officeDocument/2006/relationships" xmlns:p="http://schemas.openxmlformats.org/presentationml/2006/main" showMasterPhAnim="0">
+  <p:cSld>
     <p:spTree>
       <p:nvGrpSpPr>
         <p:cNvPr id="1" name=""/>
@@ -7549,12 +8400,12 @@
       </p:sp>
       <p:sp>
         <p:nvSpPr>
-          <p:cNvPr id="506825330" name=""/>
+          <p:cNvPr id="506825330" name="CasellaDiTesto 506825329"/>
           <p:cNvSpPr txBox="1"/>
           <p:nvPr/>
         </p:nvSpPr>
         <p:spPr bwMode="auto">
-          <a:xfrm rot="0" flipH="0" flipV="0">
+          <a:xfrm>
             <a:off x="4793024" y="1487804"/>
             <a:ext cx="6953297" cy="4985452"/>
           </a:xfrm>
@@ -7576,9 +8427,10 @@
           </a:ln>
         </p:spPr>
         <p:txBody>
-          <a:bodyPr vertOverflow="overflow" horzOverflow="overflow" vert="horz" wrap="square" lIns="91440" tIns="45720" rIns="91440" bIns="45720" numCol="1" spcCol="0" rtlCol="0" fromWordArt="0" anchor="t" anchorCtr="0" forceAA="0" upright="0" compatLnSpc="0">
+          <a:bodyPr vertOverflow="overflow" horzOverflow="overflow" vert="horz" wrap="square" lIns="91440" tIns="45720" rIns="91440" bIns="45720" numCol="1" spcCol="0" rtlCol="0" fromWordArt="0" anchor="t" anchorCtr="0" forceAA="0" compatLnSpc="0">
             <a:spAutoFit/>
           </a:bodyPr>
+          <a:lstStyle/>
           <a:p>
             <a:pPr>
               <a:defRPr/>
@@ -8112,12 +8964,12 @@
       </p:sp>
       <p:sp>
         <p:nvSpPr>
-          <p:cNvPr id="1366006912" name=""/>
+          <p:cNvPr id="1366006912" name="CasellaDiTesto 1366006911"/>
           <p:cNvSpPr txBox="1"/>
           <p:nvPr/>
         </p:nvSpPr>
         <p:spPr bwMode="auto">
-          <a:xfrm rot="0" flipH="0" flipV="0">
+          <a:xfrm>
             <a:off x="5230047" y="938624"/>
             <a:ext cx="6123749" cy="366119"/>
           </a:xfrm>
@@ -8127,9 +8979,10 @@
           <a:noFill/>
         </p:spPr>
         <p:txBody>
-          <a:bodyPr vertOverflow="overflow" horzOverflow="overflow" vert="horz" wrap="square" lIns="91440" tIns="45720" rIns="91440" bIns="45720" numCol="1" spcCol="0" rtlCol="0" fromWordArt="0" anchor="t" anchorCtr="0" forceAA="0" upright="0" compatLnSpc="0">
+          <a:bodyPr vertOverflow="overflow" horzOverflow="overflow" vert="horz" wrap="square" lIns="91440" tIns="45720" rIns="91440" bIns="45720" numCol="1" spcCol="0" rtlCol="0" fromWordArt="0" anchor="t" anchorCtr="0" forceAA="0" compatLnSpc="0">
             <a:spAutoFit/>
           </a:bodyPr>
+          <a:lstStyle/>
           <a:p>
             <a:pPr algn="ctr">
               <a:defRPr/>
@@ -8144,7 +8997,7 @@
       </p:sp>
       <p:pic>
         <p:nvPicPr>
-          <p:cNvPr id="266060674" name=""/>
+          <p:cNvPr id="266060674" name="Immagine 266060673"/>
           <p:cNvPicPr>
             <a:picLocks noChangeAspect="1"/>
           </p:cNvPicPr>
@@ -8155,7 +9008,7 @@
           <a:stretch/>
         </p:blipFill>
         <p:spPr bwMode="auto">
-          <a:xfrm flipH="0" flipV="0">
+          <a:xfrm>
             <a:off x="488999" y="1005647"/>
             <a:ext cx="3842318" cy="5591199"/>
           </a:xfrm>
@@ -8169,20 +9022,12 @@
   <p:clrMapOvr>
     <a:masterClrMapping/>
   </p:clrMapOvr>
-  <mc:AlternateContent xmlns:mc="http://schemas.openxmlformats.org/markup-compatibility/2006">
-    <mc:Choice xmlns:p159="http://schemas.microsoft.com/office/powerpoint/2015/09/main" xmlns:p14="http://schemas.microsoft.com/office/powerpoint/2010/main" Requires="p159">
-      <p:transition p14:dur="2000" advClick="1"/>
-    </mc:Choice>
-    <mc:Fallback>
-      <p:transition advClick="1"/>
-    </mc:Fallback>
-  </mc:AlternateContent>
 </p:sld>
 </file>
 
-<file path=ppt/slides/slide17.xml><?xml version="1.0" encoding="utf-8"?>
-<p:sld xmlns:a="http://schemas.openxmlformats.org/drawingml/2006/main" xmlns:r="http://schemas.openxmlformats.org/officeDocument/2006/relationships" xmlns:p="http://schemas.openxmlformats.org/presentationml/2006/main" xmlns:m="http://schemas.openxmlformats.org/officeDocument/2006/math" xmlns:w="http://schemas.openxmlformats.org/wordprocessingml/2006/main" xmlns:mc="http://schemas.openxmlformats.org/markup-compatibility/2006" showMasterPhAnim="0" showMasterSp="1" show="1">
-  <p:cSld name="">
+<file path=ppt/slides/slide2.xml><?xml version="1.0" encoding="utf-8"?>
+<p:sld xmlns:a="http://schemas.openxmlformats.org/drawingml/2006/main" xmlns:r="http://schemas.openxmlformats.org/officeDocument/2006/relationships" xmlns:p="http://schemas.openxmlformats.org/presentationml/2006/main" showMasterPhAnim="0">
+  <p:cSld>
     <p:spTree>
       <p:nvGrpSpPr>
         <p:cNvPr id="1" name=""/>
@@ -8199,6 +9044,315 @@
       </p:grpSpPr>
       <p:sp>
         <p:nvSpPr>
+          <p:cNvPr id="594542285" name="Titolo 1"/>
+          <p:cNvSpPr>
+            <a:spLocks noGrp="1"/>
+          </p:cNvSpPr>
+          <p:nvPr>
+            <p:ph type="title"/>
+          </p:nvPr>
+        </p:nvSpPr>
+        <p:spPr bwMode="auto">
+          <a:prstGeom prst="rect">
+            <a:avLst/>
+          </a:prstGeom>
+          <a:ln w="12699">
+            <a:noFill/>
+            <a:prstDash val="solid"/>
+          </a:ln>
+        </p:spPr>
+        <p:txBody>
+          <a:bodyPr/>
+          <a:lstStyle/>
+          <a:p>
+            <a:pPr>
+              <a:defRPr/>
+            </a:pPr>
+            <a:r>
+              <a:rPr lang="en" b="1" dirty="0">
+                <a:ln w="6349">
+                  <a:noFill/>
+                  <a:prstDash val="solid"/>
+                </a:ln>
+                <a:solidFill>
+                  <a:srgbClr val="0070C0"/>
+                </a:solidFill>
+                <a:latin typeface="Noto Sans"/>
+                <a:ea typeface="Noto Sans"/>
+                <a:cs typeface="Noto Sans"/>
+              </a:rPr>
+              <a:t>Indice dei contenuti</a:t>
+            </a:r>
+            <a:endParaRPr dirty="0"/>
+          </a:p>
+        </p:txBody>
+      </p:sp>
+      <p:sp>
+        <p:nvSpPr>
+          <p:cNvPr id="324859497" name="Segnaposto contenuto 2"/>
+          <p:cNvSpPr>
+            <a:spLocks noGrp="1"/>
+          </p:cNvSpPr>
+          <p:nvPr>
+            <p:ph idx="1"/>
+          </p:nvPr>
+        </p:nvSpPr>
+        <p:spPr bwMode="auto"/>
+        <p:txBody>
+          <a:bodyPr vertOverflow="overflow" horzOverflow="overflow" vert="horz" wrap="square" lIns="91440" tIns="45720" rIns="91440" bIns="45720" numCol="1" spcCol="0" rtlCol="0" fromWordArt="0" anchor="t" anchorCtr="0" forceAA="0" compatLnSpc="0">
+            <a:normAutofit lnSpcReduction="13000"/>
+          </a:bodyPr>
+          <a:lstStyle/>
+          <a:p>
+            <a:pPr marL="394023" indent="-394023">
+              <a:buFont typeface="Arial"/>
+              <a:buAutoNum type="alphaUcPeriod"/>
+              <a:defRPr/>
+            </a:pPr>
+            <a:r>
+              <a:rPr lang="en" sz="1800" dirty="0">
+                <a:latin typeface="DejaVu Sans Condensed"/>
+                <a:ea typeface="DejaVu Sans Condensed"/>
+                <a:cs typeface="DejaVu Sans Condensed"/>
+              </a:rPr>
+              <a:t>Separazione modello-vista			</a:t>
+            </a:r>
+            <a:r>
+              <a:rPr lang="en-GB" sz="1800" dirty="0">
+                <a:latin typeface="DejaVu Sans Condensed"/>
+                <a:ea typeface="DejaVu Sans Condensed"/>
+                <a:cs typeface="DejaVu Sans Condensed"/>
+              </a:rPr>
+              <a:t>n slide</a:t>
+            </a:r>
+            <a:endParaRPr sz="1800" dirty="0">
+              <a:latin typeface="DejaVu Sans Condensed"/>
+              <a:cs typeface="DejaVu Sans Condensed"/>
+            </a:endParaRPr>
+          </a:p>
+          <a:p>
+            <a:pPr marL="394023" indent="-394023">
+              <a:buFont typeface="Arial"/>
+              <a:buAutoNum type="alphaUcPeriod"/>
+              <a:defRPr/>
+            </a:pPr>
+            <a:r>
+              <a:rPr lang="en" sz="1800" dirty="0">
+                <a:latin typeface="DejaVu Sans Condensed"/>
+                <a:ea typeface="DejaVu Sans Condensed"/>
+                <a:cs typeface="DejaVu Sans Condensed"/>
+              </a:rPr>
+              <a:t>Esempi di pattern GRASP		</a:t>
+            </a:r>
+            <a:endParaRPr sz="1800" dirty="0">
+              <a:latin typeface="DejaVu Sans Condensed"/>
+              <a:cs typeface="DejaVu Sans Condensed"/>
+            </a:endParaRPr>
+          </a:p>
+          <a:p>
+            <a:pPr marL="794073" lvl="1" indent="-394023">
+              <a:buFont typeface="Arial"/>
+              <a:buAutoNum type="alphaUcPeriod"/>
+              <a:defRPr/>
+            </a:pPr>
+            <a:r>
+              <a:rPr lang="en" sz="1800" dirty="0">
+                <a:latin typeface="DejaVu Sans Condensed"/>
+                <a:ea typeface="DejaVu Sans Condensed"/>
+                <a:cs typeface="DejaVu Sans Condensed"/>
+              </a:rPr>
+              <a:t>GRASP 1 – Information Expert		n slide</a:t>
+            </a:r>
+            <a:endParaRPr sz="1800" dirty="0">
+              <a:latin typeface="DejaVu Sans Condensed"/>
+              <a:cs typeface="DejaVu Sans Condensed"/>
+            </a:endParaRPr>
+          </a:p>
+          <a:p>
+            <a:pPr marL="794073" lvl="1" indent="-394023">
+              <a:buFont typeface="Arial"/>
+              <a:buAutoNum type="alphaUcPeriod"/>
+              <a:defRPr/>
+            </a:pPr>
+            <a:r>
+              <a:rPr lang="en" sz="1800" dirty="0">
+                <a:latin typeface="DejaVu Sans Condensed"/>
+                <a:ea typeface="DejaVu Sans Condensed"/>
+                <a:cs typeface="DejaVu Sans Condensed"/>
+              </a:rPr>
+              <a:t>GRASP 2 – Controller				n slide</a:t>
+            </a:r>
+            <a:endParaRPr sz="1800" dirty="0">
+              <a:latin typeface="DejaVu Sans Condensed"/>
+              <a:cs typeface="DejaVu Sans Condensed"/>
+            </a:endParaRPr>
+          </a:p>
+          <a:p>
+            <a:pPr marL="394023" lvl="0" indent="-394023">
+              <a:buFont typeface="Arial"/>
+              <a:buAutoNum type="alphaUcPeriod"/>
+              <a:defRPr/>
+            </a:pPr>
+            <a:r>
+              <a:rPr lang="en" sz="1800" dirty="0">
+                <a:latin typeface="DejaVu Sans Condensed"/>
+                <a:ea typeface="DejaVu Sans Condensed"/>
+                <a:cs typeface="DejaVu Sans Condensed"/>
+              </a:rPr>
+              <a:t>Esempi di pattern SOLID			</a:t>
+            </a:r>
+            <a:endParaRPr sz="1800" dirty="0">
+              <a:latin typeface="DejaVu Sans Condensed"/>
+              <a:cs typeface="DejaVu Sans Condensed"/>
+            </a:endParaRPr>
+          </a:p>
+          <a:p>
+            <a:pPr marL="794073" lvl="1" indent="-394023">
+              <a:buFont typeface="Arial"/>
+              <a:buAutoNum type="alphaUcPeriod"/>
+              <a:defRPr/>
+            </a:pPr>
+            <a:r>
+              <a:rPr lang="en" sz="1800" dirty="0">
+                <a:latin typeface="DejaVu Sans Condensed"/>
+                <a:ea typeface="DejaVu Sans Condensed"/>
+                <a:cs typeface="DejaVu Sans Condensed"/>
+              </a:rPr>
+              <a:t>SOLID 1 – Dependency Inversion 		n slide</a:t>
+            </a:r>
+            <a:endParaRPr sz="1800" dirty="0">
+              <a:latin typeface="DejaVu Sans Condensed"/>
+              <a:cs typeface="DejaVu Sans Condensed"/>
+            </a:endParaRPr>
+          </a:p>
+          <a:p>
+            <a:pPr marL="794073" lvl="1" indent="-394023">
+              <a:buFont typeface="Arial"/>
+              <a:buAutoNum type="alphaUcPeriod"/>
+              <a:defRPr/>
+            </a:pPr>
+            <a:r>
+              <a:rPr lang="en" sz="1800" dirty="0">
+                <a:latin typeface="DejaVu Sans Condensed"/>
+                <a:ea typeface="DejaVu Sans Condensed"/>
+                <a:cs typeface="DejaVu Sans Condensed"/>
+              </a:rPr>
+              <a:t>SOLID 2 – Interface Segregation		n slide</a:t>
+            </a:r>
+          </a:p>
+          <a:p>
+            <a:pPr marL="336873" indent="-394023">
+              <a:buFont typeface="Arial"/>
+              <a:buAutoNum type="alphaUcPeriod"/>
+              <a:defRPr/>
+            </a:pPr>
+            <a:r>
+              <a:rPr lang="en" sz="1800" dirty="0">
+                <a:latin typeface="DejaVu Sans Condensed"/>
+                <a:cs typeface="DejaVu Sans Condensed"/>
+              </a:rPr>
+              <a:t>Esempi di pattern GoF</a:t>
+            </a:r>
+          </a:p>
+          <a:p>
+            <a:pPr marL="794073" lvl="1" indent="-394023">
+              <a:buFont typeface="Arial"/>
+              <a:buAutoNum type="alphaUcPeriod"/>
+              <a:defRPr/>
+            </a:pPr>
+            <a:r>
+              <a:rPr lang="en" sz="1800" dirty="0">
+                <a:latin typeface="DejaVu Sans Condensed"/>
+                <a:cs typeface="DejaVu Sans Condensed"/>
+              </a:rPr>
+              <a:t>GoF 1 – Strategy				n slide</a:t>
+            </a:r>
+          </a:p>
+          <a:p>
+            <a:pPr marL="794073" lvl="1" indent="-394023">
+              <a:buFont typeface="Arial"/>
+              <a:buAutoNum type="alphaUcPeriod"/>
+              <a:defRPr/>
+            </a:pPr>
+            <a:r>
+              <a:rPr lang="en" sz="1800" dirty="0">
+                <a:latin typeface="DejaVu Sans Condensed"/>
+                <a:cs typeface="DejaVu Sans Condensed"/>
+              </a:rPr>
+              <a:t>GoF 2 – Adapter				n slide</a:t>
+            </a:r>
+            <a:endParaRPr sz="1800" dirty="0">
+              <a:latin typeface="DejaVu Sans Condensed"/>
+              <a:cs typeface="DejaVu Sans Condensed"/>
+            </a:endParaRPr>
+          </a:p>
+          <a:p>
+            <a:pPr marL="394023" lvl="0" indent="-394023">
+              <a:buFont typeface="Arial"/>
+              <a:buAutoNum type="alphaUcPeriod"/>
+              <a:defRPr/>
+            </a:pPr>
+            <a:r>
+              <a:rPr lang="en" sz="1800" dirty="0">
+                <a:latin typeface="DejaVu Sans Condensed"/>
+                <a:ea typeface="DejaVu Sans Condensed"/>
+                <a:cs typeface="DejaVu Sans Condensed"/>
+              </a:rPr>
+              <a:t>Esempi di testing					n slide</a:t>
+            </a:r>
+            <a:endParaRPr sz="1800" dirty="0">
+              <a:latin typeface="DejaVu Sans Condensed"/>
+              <a:cs typeface="DejaVu Sans Condensed"/>
+            </a:endParaRPr>
+          </a:p>
+          <a:p>
+            <a:pPr marL="394023" lvl="0" indent="-394023">
+              <a:buFont typeface="Arial"/>
+              <a:buAutoNum type="alphaUcPeriod"/>
+              <a:defRPr/>
+            </a:pPr>
+            <a:r>
+              <a:rPr lang="en" sz="1800" dirty="0">
+                <a:latin typeface="DejaVu Sans Condensed"/>
+                <a:ea typeface="DejaVu Sans Condensed"/>
+                <a:cs typeface="DejaVu Sans Condensed"/>
+              </a:rPr>
+              <a:t>Esempi di refactoring				n slide</a:t>
+            </a:r>
+            <a:endParaRPr sz="1800" dirty="0">
+              <a:latin typeface="Cantarell"/>
+              <a:cs typeface="Cantarell"/>
+            </a:endParaRPr>
+          </a:p>
+        </p:txBody>
+      </p:sp>
+    </p:spTree>
+  </p:cSld>
+  <p:clrMapOvr>
+    <a:masterClrMapping/>
+  </p:clrMapOvr>
+</p:sld>
+</file>
+
+<file path=ppt/slides/slide20.xml><?xml version="1.0" encoding="utf-8"?>
+<p:sld xmlns:a="http://schemas.openxmlformats.org/drawingml/2006/main" xmlns:r="http://schemas.openxmlformats.org/officeDocument/2006/relationships" xmlns:p="http://schemas.openxmlformats.org/presentationml/2006/main" showMasterPhAnim="0">
+  <p:cSld>
+    <p:spTree>
+      <p:nvGrpSpPr>
+        <p:cNvPr id="1" name=""/>
+        <p:cNvGrpSpPr/>
+        <p:nvPr/>
+      </p:nvGrpSpPr>
+      <p:grpSpPr bwMode="auto">
+        <a:xfrm>
+          <a:off x="0" y="0"/>
+          <a:ext cx="0" cy="0"/>
+          <a:chOff x="0" y="0"/>
+          <a:chExt cx="0" cy="0"/>
+        </a:xfrm>
+      </p:grpSpPr>
+      <p:sp>
+        <p:nvSpPr>
           <p:cNvPr id="492211538" name="Titolo 1"/>
           <p:cNvSpPr>
             <a:spLocks noGrp="1"/>
@@ -8243,12 +9397,12 @@
       </p:sp>
       <p:sp>
         <p:nvSpPr>
-          <p:cNvPr id="564294578" name=""/>
+          <p:cNvPr id="564294578" name="CasellaDiTesto 564294577"/>
           <p:cNvSpPr txBox="1"/>
           <p:nvPr/>
         </p:nvSpPr>
         <p:spPr bwMode="auto">
-          <a:xfrm rot="0" flipH="0" flipV="0">
+          <a:xfrm>
             <a:off x="4793024" y="1244131"/>
             <a:ext cx="6958337" cy="5916213"/>
           </a:xfrm>
@@ -8270,9 +9424,10 @@
           </a:ln>
         </p:spPr>
         <p:txBody>
-          <a:bodyPr vertOverflow="overflow" horzOverflow="overflow" vert="horz" wrap="square" lIns="91440" tIns="45720" rIns="91440" bIns="45720" numCol="1" spcCol="0" rtlCol="0" fromWordArt="0" anchor="t" anchorCtr="0" forceAA="0" upright="0" compatLnSpc="0">
+          <a:bodyPr vertOverflow="overflow" horzOverflow="overflow" vert="horz" wrap="square" lIns="91440" tIns="45720" rIns="91440" bIns="45720" numCol="1" spcCol="0" rtlCol="0" fromWordArt="0" anchor="t" anchorCtr="0" forceAA="0" compatLnSpc="0">
             <a:spAutoFit/>
           </a:bodyPr>
+          <a:lstStyle/>
           <a:p>
             <a:pPr>
               <a:defRPr/>
@@ -8990,12 +10145,12 @@
       </p:sp>
       <p:sp>
         <p:nvSpPr>
-          <p:cNvPr id="1756827701" name=""/>
+          <p:cNvPr id="1756827701" name="CasellaDiTesto 1756827700"/>
           <p:cNvSpPr txBox="1"/>
           <p:nvPr/>
         </p:nvSpPr>
         <p:spPr bwMode="auto">
-          <a:xfrm rot="0" flipH="0" flipV="0">
+          <a:xfrm>
             <a:off x="5230047" y="878011"/>
             <a:ext cx="6150029" cy="366119"/>
           </a:xfrm>
@@ -9005,9 +10160,10 @@
           <a:noFill/>
         </p:spPr>
         <p:txBody>
-          <a:bodyPr vertOverflow="overflow" horzOverflow="overflow" vert="horz" wrap="square" lIns="91440" tIns="45720" rIns="91440" bIns="45720" numCol="1" spcCol="0" rtlCol="0" fromWordArt="0" anchor="t" anchorCtr="0" forceAA="0" upright="0" compatLnSpc="0">
+          <a:bodyPr vertOverflow="overflow" horzOverflow="overflow" vert="horz" wrap="square" lIns="91440" tIns="45720" rIns="91440" bIns="45720" numCol="1" spcCol="0" rtlCol="0" fromWordArt="0" anchor="t" anchorCtr="0" forceAA="0" compatLnSpc="0">
             <a:spAutoFit/>
           </a:bodyPr>
+          <a:lstStyle/>
           <a:p>
             <a:pPr algn="ctr">
               <a:defRPr/>
@@ -9022,7 +10178,7 @@
       </p:sp>
       <p:pic>
         <p:nvPicPr>
-          <p:cNvPr id="317546197" name=""/>
+          <p:cNvPr id="317546197" name="Immagine 317546196"/>
           <p:cNvPicPr>
             <a:picLocks noChangeAspect="1"/>
           </p:cNvPicPr>
@@ -9033,7 +10189,7 @@
           <a:stretch/>
         </p:blipFill>
         <p:spPr bwMode="auto">
-          <a:xfrm flipH="0" flipV="0">
+          <a:xfrm>
             <a:off x="682334" y="1121684"/>
             <a:ext cx="3821081" cy="5450244"/>
           </a:xfrm>
@@ -9047,20 +10203,12 @@
   <p:clrMapOvr>
     <a:masterClrMapping/>
   </p:clrMapOvr>
-  <mc:AlternateContent xmlns:mc="http://schemas.openxmlformats.org/markup-compatibility/2006">
-    <mc:Choice xmlns:p159="http://schemas.microsoft.com/office/powerpoint/2015/09/main" xmlns:p14="http://schemas.microsoft.com/office/powerpoint/2010/main" Requires="p159">
-      <p:transition p14:dur="2000" advClick="1"/>
-    </mc:Choice>
-    <mc:Fallback>
-      <p:transition advClick="1"/>
-    </mc:Fallback>
-  </mc:AlternateContent>
 </p:sld>
 </file>
 
-<file path=ppt/slides/slide18.xml><?xml version="1.0" encoding="utf-8"?>
-<p:sld xmlns:a="http://schemas.openxmlformats.org/drawingml/2006/main" xmlns:r="http://schemas.openxmlformats.org/officeDocument/2006/relationships" xmlns:p="http://schemas.openxmlformats.org/presentationml/2006/main" xmlns:m="http://schemas.openxmlformats.org/officeDocument/2006/math" xmlns:w="http://schemas.openxmlformats.org/wordprocessingml/2006/main" xmlns:mc="http://schemas.openxmlformats.org/markup-compatibility/2006" showMasterPhAnim="0" showMasterSp="1" show="1">
-  <p:cSld name="">
+<file path=ppt/slides/slide21.xml><?xml version="1.0" encoding="utf-8"?>
+<p:sld xmlns:a="http://schemas.openxmlformats.org/drawingml/2006/main" xmlns:r="http://schemas.openxmlformats.org/officeDocument/2006/relationships" xmlns:p="http://schemas.openxmlformats.org/presentationml/2006/main" showMasterPhAnim="0">
+  <p:cSld>
     <p:spTree>
       <p:nvGrpSpPr>
         <p:cNvPr id="1" name=""/>
@@ -9086,7 +10234,7 @@
           </p:nvPr>
         </p:nvSpPr>
         <p:spPr bwMode="auto">
-          <a:xfrm flipH="0" flipV="0">
+          <a:xfrm>
             <a:off x="838198" y="365123"/>
             <a:ext cx="5555216" cy="1325561"/>
           </a:xfrm>
@@ -9107,18 +10255,7 @@
                 <a:ea typeface="Noto Sans"/>
                 <a:cs typeface="Noto Sans"/>
               </a:rPr>
-              <a:t>Refactor</a:t>
-            </a:r>
-            <a:r>
-              <a:rPr lang="en" b="1">
-                <a:solidFill>
-                  <a:srgbClr val="0070C0"/>
-                </a:solidFill>
-                <a:latin typeface="Noto Sans"/>
-                <a:ea typeface="Noto Sans"/>
-                <a:cs typeface="Noto Sans"/>
-              </a:rPr>
-              <a:t>ing</a:t>
+              <a:t>Refactoring</a:t>
             </a:r>
             <a:endParaRPr/>
           </a:p>
@@ -9148,7 +10285,6 @@
               <a:rPr lang="en"/>
               <a:t>Il refactoring della classe VisitPlanService si é reso necessario perché:</a:t>
             </a:r>
-            <a:endParaRPr lang="en"/>
           </a:p>
           <a:p>
             <a:pPr>
@@ -9158,7 +10294,6 @@
               <a:rPr lang="en"/>
               <a:t>contiene l’algoritmo fondamentale per il funzionamento del programma</a:t>
             </a:r>
-            <a:endParaRPr lang="en"/>
           </a:p>
           <a:p>
             <a:pPr>
@@ -9168,7 +10303,6 @@
               <a:rPr lang="en"/>
               <a:t>é probabile che possa subire modifiche/aggiunte in futuro</a:t>
             </a:r>
-            <a:endParaRPr lang="en"/>
           </a:p>
           <a:p>
             <a:pPr>
@@ -9178,7 +10312,6 @@
               <a:rPr lang="en"/>
               <a:t>combina molte informazioni diverse: visite, tipi di visite, date non disponibili, volontari e relative disponibilitá</a:t>
             </a:r>
-            <a:endParaRPr lang="en"/>
           </a:p>
           <a:p>
             <a:pPr marL="0" indent="0">
@@ -9196,12 +10329,12 @@
       </p:sp>
       <p:sp>
         <p:nvSpPr>
-          <p:cNvPr id="27321058" name=""/>
+          <p:cNvPr id="27321058" name="CasellaDiTesto 27321057"/>
           <p:cNvSpPr txBox="1"/>
           <p:nvPr/>
         </p:nvSpPr>
         <p:spPr bwMode="auto">
-          <a:xfrm rot="0" flipH="0" flipV="0">
+          <a:xfrm>
             <a:off x="5753406" y="844844"/>
             <a:ext cx="5851705" cy="518519"/>
           </a:xfrm>
@@ -9211,9 +10344,10 @@
           <a:noFill/>
         </p:spPr>
         <p:txBody>
-          <a:bodyPr vertOverflow="overflow" horzOverflow="overflow" vert="horz" wrap="square" lIns="91440" tIns="45720" rIns="91440" bIns="45720" numCol="1" spcCol="0" rtlCol="0" fromWordArt="0" anchor="t" anchorCtr="0" forceAA="0" upright="0" compatLnSpc="0">
+          <a:bodyPr vertOverflow="overflow" horzOverflow="overflow" vert="horz" wrap="square" lIns="91440" tIns="45720" rIns="91440" bIns="45720" numCol="1" spcCol="0" rtlCol="0" fromWordArt="0" anchor="t" anchorCtr="0" forceAA="0" compatLnSpc="0">
             <a:spAutoFit/>
           </a:bodyPr>
+          <a:lstStyle/>
           <a:p>
             <a:pPr algn="ctr">
               <a:defRPr/>
@@ -9242,20 +10376,12 @@
   <p:clrMapOvr>
     <a:masterClrMapping/>
   </p:clrMapOvr>
-  <mc:AlternateContent xmlns:mc="http://schemas.openxmlformats.org/markup-compatibility/2006">
-    <mc:Choice xmlns:p159="http://schemas.microsoft.com/office/powerpoint/2015/09/main" xmlns:p14="http://schemas.microsoft.com/office/powerpoint/2010/main" Requires="p159">
-      <p:transition p14:dur="2000" advClick="1"/>
-    </mc:Choice>
-    <mc:Fallback>
-      <p:transition advClick="1"/>
-    </mc:Fallback>
-  </mc:AlternateContent>
 </p:sld>
 </file>
 
-<file path=ppt/slides/slide19.xml><?xml version="1.0" encoding="utf-8"?>
-<p:sld xmlns:a="http://schemas.openxmlformats.org/drawingml/2006/main" xmlns:r="http://schemas.openxmlformats.org/officeDocument/2006/relationships" xmlns:p="http://schemas.openxmlformats.org/presentationml/2006/main" xmlns:m="http://schemas.openxmlformats.org/officeDocument/2006/math" xmlns:w="http://schemas.openxmlformats.org/wordprocessingml/2006/main" xmlns:mc="http://schemas.openxmlformats.org/markup-compatibility/2006" showMasterPhAnim="0" showMasterSp="1" show="1">
-  <p:cSld name="">
+<file path=ppt/slides/slide22.xml><?xml version="1.0" encoding="utf-8"?>
+<p:sld xmlns:a="http://schemas.openxmlformats.org/drawingml/2006/main" xmlns:r="http://schemas.openxmlformats.org/officeDocument/2006/relationships" xmlns:p="http://schemas.openxmlformats.org/presentationml/2006/main" showMasterPhAnim="0">
+  <p:cSld>
     <p:spTree>
       <p:nvGrpSpPr>
         <p:cNvPr id="1" name=""/>
@@ -9316,12 +10442,12 @@
       </p:sp>
       <p:sp>
         <p:nvSpPr>
-          <p:cNvPr id="1040471417" name=""/>
+          <p:cNvPr id="1040471417" name="CasellaDiTesto 1040471416"/>
           <p:cNvSpPr txBox="1"/>
           <p:nvPr/>
         </p:nvSpPr>
         <p:spPr bwMode="auto">
-          <a:xfrm rot="0" flipH="0" flipV="0">
+          <a:xfrm>
             <a:off x="4915206" y="441324"/>
             <a:ext cx="5860344" cy="518519"/>
           </a:xfrm>
@@ -9331,9 +10457,10 @@
           <a:noFill/>
         </p:spPr>
         <p:txBody>
-          <a:bodyPr vertOverflow="overflow" horzOverflow="overflow" vert="horz" wrap="square" lIns="91440" tIns="45720" rIns="91440" bIns="45720" numCol="1" spcCol="0" rtlCol="0" fromWordArt="0" anchor="t" anchorCtr="0" forceAA="0" upright="0" compatLnSpc="0">
+          <a:bodyPr vertOverflow="overflow" horzOverflow="overflow" vert="horz" wrap="square" lIns="91440" tIns="45720" rIns="91440" bIns="45720" numCol="1" spcCol="0" rtlCol="0" fromWordArt="0" anchor="t" anchorCtr="0" forceAA="0" compatLnSpc="0">
             <a:spAutoFit/>
           </a:bodyPr>
+          <a:lstStyle/>
           <a:p>
             <a:pPr algn="ctr">
               <a:defRPr/>
@@ -9359,12 +10486,12 @@
       </p:sp>
       <p:sp>
         <p:nvSpPr>
-          <p:cNvPr id="1689386774" name=""/>
+          <p:cNvPr id="1689386774" name="CasellaDiTesto 1689386773"/>
           <p:cNvSpPr txBox="1"/>
           <p:nvPr/>
         </p:nvSpPr>
         <p:spPr bwMode="auto">
-          <a:xfrm rot="0" flipH="0" flipV="0">
+          <a:xfrm>
             <a:off x="457916" y="1160462"/>
             <a:ext cx="11276167" cy="2524456"/>
           </a:xfrm>
@@ -9386,9 +10513,10 @@
           </a:ln>
         </p:spPr>
         <p:txBody>
-          <a:bodyPr vertOverflow="overflow" horzOverflow="overflow" vert="horz" wrap="square" lIns="91440" tIns="45720" rIns="91440" bIns="45720" numCol="1" spcCol="0" rtlCol="0" fromWordArt="0" anchor="t" anchorCtr="0" forceAA="0" upright="0" compatLnSpc="0">
+          <a:bodyPr vertOverflow="overflow" horzOverflow="overflow" vert="horz" wrap="square" lIns="91440" tIns="45720" rIns="91440" bIns="45720" numCol="1" spcCol="0" rtlCol="0" fromWordArt="0" anchor="t" anchorCtr="0" forceAA="0" compatLnSpc="0">
             <a:spAutoFit/>
           </a:bodyPr>
+          <a:lstStyle/>
           <a:p>
             <a:pPr>
               <a:defRPr/>
@@ -9629,12 +10757,12 @@
       </p:sp>
       <p:sp>
         <p:nvSpPr>
-          <p:cNvPr id="58203512" name=""/>
+          <p:cNvPr id="58203512" name="CasellaDiTesto 58203511"/>
           <p:cNvSpPr txBox="1"/>
           <p:nvPr/>
         </p:nvSpPr>
         <p:spPr bwMode="auto">
-          <a:xfrm rot="0" flipH="0" flipV="0">
+          <a:xfrm>
             <a:off x="457916" y="3827462"/>
             <a:ext cx="11278686" cy="2966174"/>
           </a:xfrm>
@@ -9656,9 +10784,10 @@
           </a:ln>
         </p:spPr>
         <p:txBody>
-          <a:bodyPr vertOverflow="overflow" horzOverflow="overflow" vert="horz" wrap="square" lIns="91440" tIns="45720" rIns="91440" bIns="45720" numCol="1" spcCol="0" rtlCol="0" fromWordArt="0" anchor="t" anchorCtr="0" forceAA="0" upright="0" compatLnSpc="0">
+          <a:bodyPr vertOverflow="overflow" horzOverflow="overflow" vert="horz" wrap="square" lIns="91440" tIns="45720" rIns="91440" bIns="45720" numCol="1" spcCol="0" rtlCol="0" fromWordArt="0" anchor="t" anchorCtr="0" forceAA="0" compatLnSpc="0">
             <a:spAutoFit/>
           </a:bodyPr>
+          <a:lstStyle/>
           <a:p>
             <a:pPr>
               <a:defRPr/>
@@ -9890,12 +11019,12 @@
       </p:sp>
       <p:sp>
         <p:nvSpPr>
-          <p:cNvPr id="1698375116" name=""/>
+          <p:cNvPr id="1698375116" name="CasellaDiTesto 1698375115"/>
           <p:cNvSpPr txBox="1"/>
           <p:nvPr/>
         </p:nvSpPr>
         <p:spPr bwMode="auto">
-          <a:xfrm rot="0" flipH="0" flipV="0">
+          <a:xfrm>
             <a:off x="9679349" y="1269043"/>
             <a:ext cx="1995238" cy="640440"/>
           </a:xfrm>
@@ -9905,9 +11034,10 @@
           <a:noFill/>
         </p:spPr>
         <p:txBody>
-          <a:bodyPr vertOverflow="overflow" horzOverflow="overflow" vert="horz" wrap="square" lIns="91440" tIns="45720" rIns="91440" bIns="45720" numCol="1" spcCol="0" rtlCol="0" fromWordArt="0" anchor="ctr" anchorCtr="0" forceAA="0" upright="0" compatLnSpc="0">
+          <a:bodyPr vertOverflow="overflow" horzOverflow="overflow" vert="horz" wrap="square" lIns="91440" tIns="45720" rIns="91440" bIns="45720" numCol="1" spcCol="0" rtlCol="0" fromWordArt="0" anchor="ctr" anchorCtr="0" forceAA="0" compatLnSpc="0">
             <a:spAutoFit/>
           </a:bodyPr>
+          <a:lstStyle/>
           <a:p>
             <a:pPr algn="ctr">
               <a:defRPr/>
@@ -9944,12 +11074,12 @@
       </p:sp>
       <p:sp>
         <p:nvSpPr>
-          <p:cNvPr id="1482612164" name=""/>
+          <p:cNvPr id="1482612164" name="CasellaDiTesto 1482612163"/>
           <p:cNvSpPr txBox="1"/>
           <p:nvPr/>
         </p:nvSpPr>
         <p:spPr bwMode="auto">
-          <a:xfrm rot="0" flipH="0" flipV="0">
+          <a:xfrm>
             <a:off x="9679349" y="3920157"/>
             <a:ext cx="1998837" cy="640440"/>
           </a:xfrm>
@@ -9959,9 +11089,10 @@
           <a:noFill/>
         </p:spPr>
         <p:txBody>
-          <a:bodyPr vertOverflow="overflow" horzOverflow="overflow" vert="horz" wrap="square" lIns="91440" tIns="45720" rIns="91440" bIns="45720" numCol="1" spcCol="0" rtlCol="0" fromWordArt="0" anchor="ctr" anchorCtr="0" forceAA="0" upright="0" compatLnSpc="0">
+          <a:bodyPr vertOverflow="overflow" horzOverflow="overflow" vert="horz" wrap="square" lIns="91440" tIns="45720" rIns="91440" bIns="45720" numCol="1" spcCol="0" rtlCol="0" fromWordArt="0" anchor="ctr" anchorCtr="0" forceAA="0" compatLnSpc="0">
             <a:spAutoFit/>
           </a:bodyPr>
+          <a:lstStyle/>
           <a:p>
             <a:pPr algn="ctr">
               <a:defRPr/>
@@ -9999,20 +11130,12 @@
   <p:clrMapOvr>
     <a:masterClrMapping/>
   </p:clrMapOvr>
-  <mc:AlternateContent xmlns:mc="http://schemas.openxmlformats.org/markup-compatibility/2006">
-    <mc:Choice xmlns:p159="http://schemas.microsoft.com/office/powerpoint/2015/09/main" xmlns:p14="http://schemas.microsoft.com/office/powerpoint/2010/main" Requires="p159">
-      <p:transition p14:dur="2000" advClick="1"/>
-    </mc:Choice>
-    <mc:Fallback>
-      <p:transition advClick="1"/>
-    </mc:Fallback>
-  </mc:AlternateContent>
 </p:sld>
 </file>
 
-<file path=ppt/slides/slide2.xml><?xml version="1.0" encoding="utf-8"?>
-<p:sld xmlns:a="http://schemas.openxmlformats.org/drawingml/2006/main" xmlns:r="http://schemas.openxmlformats.org/officeDocument/2006/relationships" xmlns:p="http://schemas.openxmlformats.org/presentationml/2006/main" xmlns:m="http://schemas.openxmlformats.org/officeDocument/2006/math" xmlns:w="http://schemas.openxmlformats.org/wordprocessingml/2006/main" xmlns:mc="http://schemas.openxmlformats.org/markup-compatibility/2006" showMasterPhAnim="0" showMasterSp="1" show="1">
-  <p:cSld name="">
+<file path=ppt/slides/slide23.xml><?xml version="1.0" encoding="utf-8"?>
+<p:sld xmlns:a="http://schemas.openxmlformats.org/drawingml/2006/main" xmlns:r="http://schemas.openxmlformats.org/officeDocument/2006/relationships" xmlns:p="http://schemas.openxmlformats.org/presentationml/2006/main" showMasterPhAnim="0">
+  <p:cSld>
     <p:spTree>
       <p:nvGrpSpPr>
         <p:cNvPr id="1" name=""/>
@@ -10029,311 +11152,6 @@
       </p:grpSpPr>
       <p:sp>
         <p:nvSpPr>
-          <p:cNvPr id="594542285" name="Titolo 1"/>
-          <p:cNvSpPr>
-            <a:spLocks noGrp="1"/>
-          </p:cNvSpPr>
-          <p:nvPr>
-            <p:ph type="title"/>
-          </p:nvPr>
-        </p:nvSpPr>
-        <p:spPr bwMode="auto">
-          <a:prstGeom prst="rect">
-            <a:avLst/>
-          </a:prstGeom>
-          <a:ln w="12699">
-            <a:noFill/>
-            <a:prstDash val="solid"/>
-          </a:ln>
-        </p:spPr>
-        <p:txBody>
-          <a:bodyPr/>
-          <a:lstStyle/>
-          <a:p>
-            <a:pPr>
-              <a:defRPr/>
-            </a:pPr>
-            <a:r>
-              <a:rPr lang="en" b="1">
-                <a:ln w="6349">
-                  <a:noFill/>
-                  <a:prstDash val="solid"/>
-                </a:ln>
-                <a:solidFill>
-                  <a:srgbClr val="0070C0"/>
-                </a:solidFill>
-                <a:latin typeface="Noto Sans"/>
-                <a:ea typeface="Noto Sans"/>
-                <a:cs typeface="Noto Sans"/>
-              </a:rPr>
-              <a:t>Indice dei contenuti</a:t>
-            </a:r>
-            <a:endParaRPr/>
-          </a:p>
-        </p:txBody>
-      </p:sp>
-      <p:sp>
-        <p:nvSpPr>
-          <p:cNvPr id="324859497" name="Segnaposto contenuto 2"/>
-          <p:cNvSpPr>
-            <a:spLocks noGrp="1"/>
-          </p:cNvSpPr>
-          <p:nvPr>
-            <p:ph idx="1"/>
-          </p:nvPr>
-        </p:nvSpPr>
-        <p:spPr bwMode="auto"/>
-        <p:txBody>
-          <a:bodyPr vertOverflow="overflow" horzOverflow="overflow" vert="horz" wrap="square" lIns="91440" tIns="45720" rIns="91440" bIns="45720" numCol="1" spcCol="0" rtlCol="0" fromWordArt="0" anchor="t" anchorCtr="0" forceAA="0" upright="0" compatLnSpc="0">
-            <a:normAutofit fontScale="85000" lnSpcReduction="3000"/>
-          </a:bodyPr>
-          <a:lstStyle/>
-          <a:p>
-            <a:pPr marL="394023" indent="-394023">
-              <a:buFont typeface="Arial"/>
-              <a:buAutoNum type="alphaUcPeriod"/>
-              <a:defRPr/>
-            </a:pPr>
-            <a:r>
-              <a:rPr lang="en">
-                <a:latin typeface="DejaVu Sans Condensed"/>
-                <a:ea typeface="DejaVu Sans Condensed"/>
-                <a:cs typeface="DejaVu Sans Condensed"/>
-              </a:rPr>
-              <a:t>Separazione modello-vista		aa</a:t>
-            </a:r>
-            <a:endParaRPr>
-              <a:latin typeface="DejaVu Sans Condensed"/>
-              <a:cs typeface="DejaVu Sans Condensed"/>
-            </a:endParaRPr>
-          </a:p>
-          <a:p>
-            <a:pPr marL="394023" indent="-394023">
-              <a:buFont typeface="Arial"/>
-              <a:buAutoNum type="alphaUcPeriod"/>
-              <a:defRPr/>
-            </a:pPr>
-            <a:r>
-              <a:rPr lang="en">
-                <a:latin typeface="DejaVu Sans Condensed"/>
-                <a:ea typeface="DejaVu Sans Condensed"/>
-                <a:cs typeface="DejaVu Sans Condensed"/>
-              </a:rPr>
-              <a:t>Esempi di pattern GRASP			aa</a:t>
-            </a:r>
-            <a:endParaRPr>
-              <a:latin typeface="DejaVu Sans Condensed"/>
-              <a:cs typeface="DejaVu Sans Condensed"/>
-            </a:endParaRPr>
-          </a:p>
-          <a:p>
-            <a:pPr marL="794073" lvl="1" indent="-394023">
-              <a:buFont typeface="Arial"/>
-              <a:buAutoNum type="alphaUcPeriod"/>
-              <a:defRPr/>
-            </a:pPr>
-            <a:r>
-              <a:rPr lang="en">
-                <a:latin typeface="DejaVu Sans Condensed"/>
-                <a:ea typeface="DejaVu Sans Condensed"/>
-                <a:cs typeface="DejaVu Sans Condensed"/>
-              </a:rPr>
-              <a:t>GRASP 1				bb</a:t>
-            </a:r>
-            <a:endParaRPr>
-              <a:latin typeface="DejaVu Sans Condensed"/>
-              <a:cs typeface="DejaVu Sans Condensed"/>
-            </a:endParaRPr>
-          </a:p>
-          <a:p>
-            <a:pPr marL="794073" lvl="1" indent="-394023">
-              <a:buFont typeface="Arial"/>
-              <a:buAutoNum type="alphaUcPeriod"/>
-              <a:defRPr/>
-            </a:pPr>
-            <a:r>
-              <a:rPr lang="en">
-                <a:latin typeface="DejaVu Sans Condensed"/>
-                <a:ea typeface="DejaVu Sans Condensed"/>
-                <a:cs typeface="DejaVu Sans Condensed"/>
-              </a:rPr>
-              <a:t>GRASP 2				bb</a:t>
-            </a:r>
-            <a:endParaRPr>
-              <a:latin typeface="DejaVu Sans Condensed"/>
-              <a:cs typeface="DejaVu Sans Condensed"/>
-            </a:endParaRPr>
-          </a:p>
-          <a:p>
-            <a:pPr marL="794073" lvl="1" indent="-394023">
-              <a:buFont typeface="Arial"/>
-              <a:buAutoNum type="alphaUcPeriod"/>
-              <a:defRPr/>
-            </a:pPr>
-            <a:r>
-              <a:rPr lang="en">
-                <a:latin typeface="DejaVu Sans Condensed"/>
-                <a:ea typeface="DejaVu Sans Condensed"/>
-                <a:cs typeface="DejaVu Sans Condensed"/>
-              </a:rPr>
-              <a:t>GRASP 3				bb</a:t>
-            </a:r>
-            <a:endParaRPr>
-              <a:latin typeface="DejaVu Sans Condensed"/>
-              <a:cs typeface="DejaVu Sans Condensed"/>
-            </a:endParaRPr>
-          </a:p>
-          <a:p>
-            <a:pPr marL="394023" lvl="0" indent="-394023">
-              <a:buFont typeface="Arial"/>
-              <a:buAutoNum type="alphaUcPeriod"/>
-              <a:defRPr/>
-            </a:pPr>
-            <a:r>
-              <a:rPr lang="en">
-                <a:latin typeface="DejaVu Sans Condensed"/>
-                <a:ea typeface="DejaVu Sans Condensed"/>
-                <a:cs typeface="DejaVu Sans Condensed"/>
-              </a:rPr>
-              <a:t>Esempi di pattern SOLID			aa</a:t>
-            </a:r>
-            <a:endParaRPr>
-              <a:latin typeface="DejaVu Sans Condensed"/>
-              <a:cs typeface="DejaVu Sans Condensed"/>
-            </a:endParaRPr>
-          </a:p>
-          <a:p>
-            <a:pPr marL="794073" lvl="1" indent="-394023">
-              <a:buFont typeface="Arial"/>
-              <a:buAutoNum type="alphaUcPeriod"/>
-              <a:defRPr/>
-            </a:pPr>
-            <a:r>
-              <a:rPr lang="en">
-                <a:latin typeface="DejaVu Sans Condensed"/>
-                <a:ea typeface="DejaVu Sans Condensed"/>
-                <a:cs typeface="DejaVu Sans Condensed"/>
-              </a:rPr>
-              <a:t>SOLID 1					bb</a:t>
-            </a:r>
-            <a:endParaRPr>
-              <a:latin typeface="DejaVu Sans Condensed"/>
-              <a:cs typeface="DejaVu Sans Condensed"/>
-            </a:endParaRPr>
-          </a:p>
-          <a:p>
-            <a:pPr marL="794073" lvl="1" indent="-394023">
-              <a:buFont typeface="Arial"/>
-              <a:buAutoNum type="alphaUcPeriod"/>
-              <a:defRPr/>
-            </a:pPr>
-            <a:r>
-              <a:rPr lang="en">
-                <a:latin typeface="DejaVu Sans Condensed"/>
-                <a:ea typeface="DejaVu Sans Condensed"/>
-                <a:cs typeface="DejaVu Sans Condensed"/>
-              </a:rPr>
-              <a:t>SOLID 2					bb</a:t>
-            </a:r>
-            <a:endParaRPr>
-              <a:latin typeface="DejaVu Sans Condensed"/>
-              <a:cs typeface="DejaVu Sans Condensed"/>
-            </a:endParaRPr>
-          </a:p>
-          <a:p>
-            <a:pPr marL="794073" lvl="1" indent="-394023">
-              <a:buFont typeface="Arial"/>
-              <a:buAutoNum type="alphaUcPeriod"/>
-              <a:defRPr/>
-            </a:pPr>
-            <a:r>
-              <a:rPr lang="en">
-                <a:latin typeface="DejaVu Sans Condensed"/>
-                <a:ea typeface="DejaVu Sans Condensed"/>
-                <a:cs typeface="DejaVu Sans Condensed"/>
-              </a:rPr>
-              <a:t>SOLID 3					bb</a:t>
-            </a:r>
-            <a:endParaRPr>
-              <a:latin typeface="DejaVu Sans Condensed"/>
-              <a:cs typeface="DejaVu Sans Condensed"/>
-            </a:endParaRPr>
-          </a:p>
-          <a:p>
-            <a:pPr marL="394023" lvl="0" indent="-394023">
-              <a:buFont typeface="Arial"/>
-              <a:buAutoNum type="alphaUcPeriod"/>
-              <a:defRPr/>
-            </a:pPr>
-            <a:r>
-              <a:rPr lang="en">
-                <a:latin typeface="DejaVu Sans Condensed"/>
-                <a:ea typeface="DejaVu Sans Condensed"/>
-                <a:cs typeface="DejaVu Sans Condensed"/>
-              </a:rPr>
-              <a:t>Esempi di testing				aa</a:t>
-            </a:r>
-            <a:endParaRPr>
-              <a:latin typeface="DejaVu Sans Condensed"/>
-              <a:cs typeface="DejaVu Sans Condensed"/>
-            </a:endParaRPr>
-          </a:p>
-          <a:p>
-            <a:pPr marL="394023" lvl="0" indent="-394023">
-              <a:buFont typeface="Arial"/>
-              <a:buAutoNum type="alphaUcPeriod"/>
-              <a:defRPr/>
-            </a:pPr>
-            <a:r>
-              <a:rPr lang="en">
-                <a:latin typeface="DejaVu Sans Condensed"/>
-                <a:ea typeface="DejaVu Sans Condensed"/>
-                <a:cs typeface="DejaVu Sans Condensed"/>
-              </a:rPr>
-              <a:t>Esempi di refactoring			aa</a:t>
-            </a:r>
-            <a:endParaRPr>
-              <a:latin typeface="Cantarell"/>
-              <a:cs typeface="Cantarell"/>
-            </a:endParaRPr>
-          </a:p>
-        </p:txBody>
-      </p:sp>
-    </p:spTree>
-  </p:cSld>
-  <p:clrMapOvr>
-    <a:masterClrMapping/>
-  </p:clrMapOvr>
-  <mc:AlternateContent xmlns:mc="http://schemas.openxmlformats.org/markup-compatibility/2006">
-    <mc:Choice xmlns:p159="http://schemas.microsoft.com/office/powerpoint/2015/09/main" xmlns:p14="http://schemas.microsoft.com/office/powerpoint/2010/main" Requires="p159">
-      <p:transition p14:dur="2000" advClick="1"/>
-    </mc:Choice>
-    <mc:Fallback>
-      <p:transition advClick="1"/>
-    </mc:Fallback>
-  </mc:AlternateContent>
-</p:sld>
-</file>
-
-<file path=ppt/slides/slide20.xml><?xml version="1.0" encoding="utf-8"?>
-<p:sld xmlns:a="http://schemas.openxmlformats.org/drawingml/2006/main" xmlns:r="http://schemas.openxmlformats.org/officeDocument/2006/relationships" xmlns:p="http://schemas.openxmlformats.org/presentationml/2006/main" xmlns:m="http://schemas.openxmlformats.org/officeDocument/2006/math" xmlns:w="http://schemas.openxmlformats.org/wordprocessingml/2006/main" xmlns:mc="http://schemas.openxmlformats.org/markup-compatibility/2006" showMasterPhAnim="0" showMasterSp="1" show="1">
-  <p:cSld name="">
-    <p:spTree>
-      <p:nvGrpSpPr>
-        <p:cNvPr id="1" name=""/>
-        <p:cNvGrpSpPr/>
-        <p:nvPr/>
-      </p:nvGrpSpPr>
-      <p:grpSpPr bwMode="auto">
-        <a:xfrm>
-          <a:off x="0" y="0"/>
-          <a:ext cx="0" cy="0"/>
-          <a:chOff x="0" y="0"/>
-          <a:chExt cx="0" cy="0"/>
-        </a:xfrm>
-      </p:grpSpPr>
-      <p:sp>
-        <p:nvSpPr>
           <p:cNvPr id="2068409532" name="Titolo 1"/>
           <p:cNvSpPr>
             <a:spLocks noGrp="1"/>
@@ -10378,12 +11196,12 @@
       </p:sp>
       <p:sp>
         <p:nvSpPr>
-          <p:cNvPr id="17675352" name=""/>
+          <p:cNvPr id="17675352" name="CasellaDiTesto 17675351"/>
           <p:cNvSpPr txBox="1"/>
           <p:nvPr/>
         </p:nvSpPr>
         <p:spPr bwMode="auto">
-          <a:xfrm rot="0" flipH="0" flipV="0">
+          <a:xfrm>
             <a:off x="4383448" y="471802"/>
             <a:ext cx="7416345" cy="457559"/>
           </a:xfrm>
@@ -10393,9 +11211,10 @@
           <a:noFill/>
         </p:spPr>
         <p:txBody>
-          <a:bodyPr vertOverflow="overflow" horzOverflow="overflow" vert="horz" wrap="square" lIns="91440" tIns="45720" rIns="91440" bIns="45720" numCol="1" spcCol="0" rtlCol="0" fromWordArt="0" anchor="t" anchorCtr="0" forceAA="0" upright="0" compatLnSpc="0">
+          <a:bodyPr vertOverflow="overflow" horzOverflow="overflow" vert="horz" wrap="square" lIns="91440" tIns="45720" rIns="91440" bIns="45720" numCol="1" spcCol="0" rtlCol="0" fromWordArt="0" anchor="t" anchorCtr="0" forceAA="0" compatLnSpc="0">
             <a:spAutoFit/>
           </a:bodyPr>
+          <a:lstStyle/>
           <a:p>
             <a:pPr algn="ctr">
               <a:defRPr/>
@@ -10421,12 +11240,12 @@
       </p:sp>
       <p:sp>
         <p:nvSpPr>
-          <p:cNvPr id="1873129134" name=""/>
+          <p:cNvPr id="1873129134" name="CasellaDiTesto 1873129133"/>
           <p:cNvSpPr txBox="1"/>
           <p:nvPr/>
         </p:nvSpPr>
         <p:spPr bwMode="auto">
-          <a:xfrm rot="0" flipH="0" flipV="0">
+          <a:xfrm>
             <a:off x="457913" y="1160460"/>
             <a:ext cx="11635248" cy="4291325"/>
           </a:xfrm>
@@ -10448,9 +11267,10 @@
           </a:ln>
         </p:spPr>
         <p:txBody>
-          <a:bodyPr vertOverflow="overflow" horzOverflow="overflow" vert="horz" wrap="square" lIns="91440" tIns="45720" rIns="91440" bIns="45720" numCol="1" spcCol="0" rtlCol="0" fromWordArt="0" anchor="t" anchorCtr="0" forceAA="0" upright="0" compatLnSpc="0">
+          <a:bodyPr vertOverflow="overflow" horzOverflow="overflow" vert="horz" wrap="square" lIns="91440" tIns="45720" rIns="91440" bIns="45720" numCol="1" spcCol="0" rtlCol="0" fromWordArt="0" anchor="t" anchorCtr="0" forceAA="0" compatLnSpc="0">
             <a:spAutoFit/>
           </a:bodyPr>
+          <a:lstStyle/>
           <a:p>
             <a:pPr>
               <a:defRPr/>
@@ -10857,14 +11677,6 @@
               </a:rPr>
               <a:t>        }</a:t>
             </a:r>
-            <a:endParaRPr lang="it-IT" sz="1400" b="0" i="0" u="none" strike="noStrike" cap="none" spc="0">
-              <a:solidFill>
-                <a:schemeClr val="tx1"/>
-              </a:solidFill>
-              <a:latin typeface="Liberation Mono"/>
-              <a:ea typeface="Liberation Mono"/>
-              <a:cs typeface="Liberation Mono"/>
-            </a:endParaRPr>
           </a:p>
           <a:p>
             <a:pPr>
@@ -10887,12 +11699,12 @@
       </p:sp>
       <p:sp>
         <p:nvSpPr>
-          <p:cNvPr id="1625665772" name=""/>
+          <p:cNvPr id="1625665772" name="CasellaDiTesto 1625665771"/>
           <p:cNvSpPr txBox="1"/>
           <p:nvPr/>
         </p:nvSpPr>
         <p:spPr bwMode="auto">
-          <a:xfrm rot="0" flipH="0" flipV="0">
+          <a:xfrm>
             <a:off x="9679349" y="1269223"/>
             <a:ext cx="1995597" cy="640440"/>
           </a:xfrm>
@@ -10902,9 +11714,10 @@
           <a:noFill/>
         </p:spPr>
         <p:txBody>
-          <a:bodyPr vertOverflow="overflow" horzOverflow="overflow" vert="horz" wrap="square" lIns="91440" tIns="45720" rIns="91440" bIns="45720" numCol="1" spcCol="0" rtlCol="0" fromWordArt="0" anchor="ctr" anchorCtr="0" forceAA="0" upright="0" compatLnSpc="0">
+          <a:bodyPr vertOverflow="overflow" horzOverflow="overflow" vert="horz" wrap="square" lIns="91440" tIns="45720" rIns="91440" bIns="45720" numCol="1" spcCol="0" rtlCol="0" fromWordArt="0" anchor="ctr" anchorCtr="0" forceAA="0" compatLnSpc="0">
             <a:spAutoFit/>
           </a:bodyPr>
+          <a:lstStyle/>
           <a:p>
             <a:pPr algn="ctr">
               <a:defRPr/>
@@ -10944,20 +11757,12 @@
   <p:clrMapOvr>
     <a:masterClrMapping/>
   </p:clrMapOvr>
-  <mc:AlternateContent xmlns:mc="http://schemas.openxmlformats.org/markup-compatibility/2006">
-    <mc:Choice xmlns:p159="http://schemas.microsoft.com/office/powerpoint/2015/09/main" xmlns:p14="http://schemas.microsoft.com/office/powerpoint/2010/main" Requires="p159">
-      <p:transition p14:dur="2000" advClick="1"/>
-    </mc:Choice>
-    <mc:Fallback>
-      <p:transition advClick="1"/>
-    </mc:Fallback>
-  </mc:AlternateContent>
 </p:sld>
 </file>
 
-<file path=ppt/slides/slide21.xml><?xml version="1.0" encoding="utf-8"?>
-<p:sld xmlns:a="http://schemas.openxmlformats.org/drawingml/2006/main" xmlns:r="http://schemas.openxmlformats.org/officeDocument/2006/relationships" xmlns:p="http://schemas.openxmlformats.org/presentationml/2006/main" xmlns:m="http://schemas.openxmlformats.org/officeDocument/2006/math" xmlns:w="http://schemas.openxmlformats.org/wordprocessingml/2006/main" xmlns:mc="http://schemas.openxmlformats.org/markup-compatibility/2006" showMasterPhAnim="0" showMasterSp="1" show="1">
-  <p:cSld name="">
+<file path=ppt/slides/slide24.xml><?xml version="1.0" encoding="utf-8"?>
+<p:sld xmlns:a="http://schemas.openxmlformats.org/drawingml/2006/main" xmlns:r="http://schemas.openxmlformats.org/officeDocument/2006/relationships" xmlns:p="http://schemas.openxmlformats.org/presentationml/2006/main" showMasterPhAnim="0">
+  <p:cSld>
     <p:spTree>
       <p:nvGrpSpPr>
         <p:cNvPr id="1" name=""/>
@@ -11012,12 +11817,12 @@
       </p:sp>
       <p:sp>
         <p:nvSpPr>
-          <p:cNvPr id="1225781845" name=""/>
+          <p:cNvPr id="1225781845" name="CasellaDiTesto 1225781844"/>
           <p:cNvSpPr txBox="1"/>
           <p:nvPr/>
         </p:nvSpPr>
         <p:spPr bwMode="auto">
-          <a:xfrm rot="0" flipH="0" flipV="0">
+          <a:xfrm>
             <a:off x="457913" y="1160460"/>
             <a:ext cx="11637768" cy="3407891"/>
           </a:xfrm>
@@ -11039,9 +11844,10 @@
           </a:ln>
         </p:spPr>
         <p:txBody>
-          <a:bodyPr vertOverflow="overflow" horzOverflow="overflow" vert="horz" wrap="square" lIns="91440" tIns="45720" rIns="91440" bIns="45720" numCol="1" spcCol="0" rtlCol="0" fromWordArt="0" anchor="t" anchorCtr="0" forceAA="0" upright="0" compatLnSpc="0">
+          <a:bodyPr vertOverflow="overflow" horzOverflow="overflow" vert="horz" wrap="square" lIns="91440" tIns="45720" rIns="91440" bIns="45720" numCol="1" spcCol="0" rtlCol="0" fromWordArt="0" anchor="t" anchorCtr="0" forceAA="0" compatLnSpc="0">
             <a:spAutoFit/>
           </a:bodyPr>
+          <a:lstStyle/>
           <a:p>
             <a:pPr>
               <a:defRPr/>
@@ -11057,14 +11863,6 @@
               </a:rPr>
               <a:t>for (Visit visit : nextMonthSortedVisits) {</a:t>
             </a:r>
-            <a:endParaRPr lang="it-IT" sz="1400" b="0" i="0" u="none" strike="noStrike" cap="none" spc="0">
-              <a:solidFill>
-                <a:schemeClr val="tx1"/>
-              </a:solidFill>
-              <a:latin typeface="Liberation Mono"/>
-              <a:ea typeface="Liberation Mono"/>
-              <a:cs typeface="Liberation Mono"/>
-            </a:endParaRPr>
           </a:p>
           <a:p>
             <a:pPr>
@@ -11312,12 +12110,12 @@
       </p:sp>
       <p:sp>
         <p:nvSpPr>
-          <p:cNvPr id="1711987548" name=""/>
+          <p:cNvPr id="1711987548" name="CasellaDiTesto 1711987547"/>
           <p:cNvSpPr txBox="1"/>
           <p:nvPr/>
         </p:nvSpPr>
         <p:spPr bwMode="auto">
-          <a:xfrm rot="0" flipH="0" flipV="0">
+          <a:xfrm>
             <a:off x="4383448" y="471802"/>
             <a:ext cx="7416703" cy="457559"/>
           </a:xfrm>
@@ -11327,9 +12125,10 @@
           <a:noFill/>
         </p:spPr>
         <p:txBody>
-          <a:bodyPr vertOverflow="overflow" horzOverflow="overflow" vert="horz" wrap="square" lIns="91440" tIns="45720" rIns="91440" bIns="45720" numCol="1" spcCol="0" rtlCol="0" fromWordArt="0" anchor="t" anchorCtr="0" forceAA="0" upright="0" compatLnSpc="0">
+          <a:bodyPr vertOverflow="overflow" horzOverflow="overflow" vert="horz" wrap="square" lIns="91440" tIns="45720" rIns="91440" bIns="45720" numCol="1" spcCol="0" rtlCol="0" fromWordArt="0" anchor="t" anchorCtr="0" forceAA="0" compatLnSpc="0">
             <a:spAutoFit/>
           </a:bodyPr>
+          <a:lstStyle/>
           <a:p>
             <a:pPr algn="ctr">
               <a:defRPr/>
@@ -11355,12 +12154,12 @@
       </p:sp>
       <p:sp>
         <p:nvSpPr>
-          <p:cNvPr id="23320965" name=""/>
+          <p:cNvPr id="23320965" name="CasellaDiTesto 23320964"/>
           <p:cNvSpPr txBox="1"/>
           <p:nvPr/>
         </p:nvSpPr>
         <p:spPr bwMode="auto">
-          <a:xfrm rot="0" flipH="0" flipV="0">
+          <a:xfrm>
             <a:off x="10039335" y="1839611"/>
             <a:ext cx="1999196" cy="640440"/>
           </a:xfrm>
@@ -11370,9 +12169,10 @@
           <a:noFill/>
         </p:spPr>
         <p:txBody>
-          <a:bodyPr vertOverflow="overflow" horzOverflow="overflow" vert="horz" wrap="square" lIns="91440" tIns="45720" rIns="91440" bIns="45720" numCol="1" spcCol="0" rtlCol="0" fromWordArt="0" anchor="ctr" anchorCtr="0" forceAA="0" upright="0" compatLnSpc="0">
+          <a:bodyPr vertOverflow="overflow" horzOverflow="overflow" vert="horz" wrap="square" lIns="91440" tIns="45720" rIns="91440" bIns="45720" numCol="1" spcCol="0" rtlCol="0" fromWordArt="0" anchor="ctr" anchorCtr="0" forceAA="0" compatLnSpc="0">
             <a:spAutoFit/>
           </a:bodyPr>
+          <a:lstStyle/>
           <a:p>
             <a:pPr algn="ctr">
               <a:defRPr/>
@@ -11410,20 +12210,12 @@
   <p:clrMapOvr>
     <a:masterClrMapping/>
   </p:clrMapOvr>
-  <mc:AlternateContent xmlns:mc="http://schemas.openxmlformats.org/markup-compatibility/2006">
-    <mc:Choice xmlns:p159="http://schemas.microsoft.com/office/powerpoint/2015/09/main" xmlns:p14="http://schemas.microsoft.com/office/powerpoint/2010/main" Requires="p159">
-      <p:transition p14:dur="2000" advClick="1"/>
-    </mc:Choice>
-    <mc:Fallback>
-      <p:transition advClick="1"/>
-    </mc:Fallback>
-  </mc:AlternateContent>
 </p:sld>
 </file>
 
-<file path=ppt/slides/slide22.xml><?xml version="1.0" encoding="utf-8"?>
-<p:sld xmlns:a="http://schemas.openxmlformats.org/drawingml/2006/main" xmlns:r="http://schemas.openxmlformats.org/officeDocument/2006/relationships" xmlns:p="http://schemas.openxmlformats.org/presentationml/2006/main" xmlns:m="http://schemas.openxmlformats.org/officeDocument/2006/math" xmlns:w="http://schemas.openxmlformats.org/wordprocessingml/2006/main" xmlns:mc="http://schemas.openxmlformats.org/markup-compatibility/2006" showMasterPhAnim="0" showMasterSp="1" show="1">
-  <p:cSld name="">
+<file path=ppt/slides/slide25.xml><?xml version="1.0" encoding="utf-8"?>
+<p:sld xmlns:a="http://schemas.openxmlformats.org/drawingml/2006/main" xmlns:r="http://schemas.openxmlformats.org/officeDocument/2006/relationships" xmlns:p="http://schemas.openxmlformats.org/presentationml/2006/main" showMasterPhAnim="0">
+  <p:cSld>
     <p:spTree>
       <p:nvGrpSpPr>
         <p:cNvPr id="1" name=""/>
@@ -11478,12 +12270,12 @@
       </p:sp>
       <p:sp>
         <p:nvSpPr>
-          <p:cNvPr id="267580261" name=""/>
+          <p:cNvPr id="267580261" name="CasellaDiTesto 267580260"/>
           <p:cNvSpPr txBox="1"/>
           <p:nvPr/>
         </p:nvSpPr>
         <p:spPr bwMode="auto">
-          <a:xfrm rot="0" flipH="0" flipV="0">
+          <a:xfrm>
             <a:off x="5753405" y="471040"/>
             <a:ext cx="5870424" cy="457559"/>
           </a:xfrm>
@@ -11493,9 +12285,10 @@
           <a:noFill/>
         </p:spPr>
         <p:txBody>
-          <a:bodyPr vertOverflow="overflow" horzOverflow="overflow" vert="horz" wrap="square" lIns="91440" tIns="45720" rIns="91440" bIns="45720" numCol="1" spcCol="0" rtlCol="0" fromWordArt="0" anchor="t" anchorCtr="0" forceAA="0" upright="0" compatLnSpc="0">
+          <a:bodyPr vertOverflow="overflow" horzOverflow="overflow" vert="horz" wrap="square" lIns="91440" tIns="45720" rIns="91440" bIns="45720" numCol="1" spcCol="0" rtlCol="0" fromWordArt="0" anchor="t" anchorCtr="0" forceAA="0" compatLnSpc="0">
             <a:spAutoFit/>
           </a:bodyPr>
+          <a:lstStyle/>
           <a:p>
             <a:pPr algn="ctr">
               <a:defRPr/>
@@ -11521,12 +12314,12 @@
       </p:sp>
       <p:sp>
         <p:nvSpPr>
-          <p:cNvPr id="1437753394" name=""/>
+          <p:cNvPr id="1437753394" name="CasellaDiTesto 1437753393"/>
           <p:cNvSpPr txBox="1"/>
           <p:nvPr/>
         </p:nvSpPr>
         <p:spPr bwMode="auto">
-          <a:xfrm rot="0" flipH="0" flipV="0">
+          <a:xfrm>
             <a:off x="351446" y="1362601"/>
             <a:ext cx="11798655" cy="1641023"/>
           </a:xfrm>
@@ -11548,9 +12341,10 @@
           </a:ln>
         </p:spPr>
         <p:txBody>
-          <a:bodyPr vertOverflow="overflow" horzOverflow="overflow" vert="horz" wrap="square" lIns="91440" tIns="45720" rIns="91440" bIns="45720" numCol="1" spcCol="0" rtlCol="0" fromWordArt="0" anchor="t" anchorCtr="0" forceAA="0" upright="0" compatLnSpc="0">
+          <a:bodyPr vertOverflow="overflow" horzOverflow="overflow" vert="horz" wrap="square" lIns="91440" tIns="45720" rIns="91440" bIns="45720" numCol="1" spcCol="0" rtlCol="0" fromWordArt="0" anchor="t" anchorCtr="0" forceAA="0" compatLnSpc="0">
             <a:spAutoFit/>
           </a:bodyPr>
+          <a:lstStyle/>
           <a:p>
             <a:pPr>
               <a:defRPr/>
@@ -11701,12 +12495,12 @@
       </p:sp>
       <p:sp>
         <p:nvSpPr>
-          <p:cNvPr id="711399983" name=""/>
+          <p:cNvPr id="711399983" name="CasellaDiTesto 711399982"/>
           <p:cNvSpPr txBox="1"/>
           <p:nvPr/>
         </p:nvSpPr>
         <p:spPr bwMode="auto">
-          <a:xfrm rot="0" flipH="0" flipV="0">
+          <a:xfrm>
             <a:off x="351446" y="3553351"/>
             <a:ext cx="11805134" cy="1199306"/>
           </a:xfrm>
@@ -11728,9 +12522,10 @@
           </a:ln>
         </p:spPr>
         <p:txBody>
-          <a:bodyPr vertOverflow="overflow" horzOverflow="overflow" vert="horz" wrap="square" lIns="91440" tIns="45720" rIns="91440" bIns="45720" numCol="1" spcCol="0" rtlCol="0" fromWordArt="0" anchor="t" anchorCtr="0" forceAA="0" upright="0" compatLnSpc="0">
+          <a:bodyPr vertOverflow="overflow" horzOverflow="overflow" vert="horz" wrap="square" lIns="91440" tIns="45720" rIns="91440" bIns="45720" numCol="1" spcCol="0" rtlCol="0" fromWordArt="0" anchor="t" anchorCtr="0" forceAA="0" compatLnSpc="0">
             <a:spAutoFit/>
           </a:bodyPr>
+          <a:lstStyle/>
           <a:p>
             <a:pPr>
               <a:defRPr/>
@@ -11844,12 +12639,12 @@
       </p:sp>
       <p:sp>
         <p:nvSpPr>
-          <p:cNvPr id="1563974945" name=""/>
+          <p:cNvPr id="1563974945" name="CasellaDiTesto 1563974944"/>
           <p:cNvSpPr txBox="1"/>
           <p:nvPr/>
         </p:nvSpPr>
         <p:spPr bwMode="auto">
-          <a:xfrm rot="0" flipH="0" flipV="0">
+          <a:xfrm>
             <a:off x="9679348" y="1459902"/>
             <a:ext cx="1995957" cy="640440"/>
           </a:xfrm>
@@ -11859,9 +12654,10 @@
           <a:noFill/>
         </p:spPr>
         <p:txBody>
-          <a:bodyPr vertOverflow="overflow" horzOverflow="overflow" vert="horz" wrap="square" lIns="91440" tIns="45720" rIns="91440" bIns="45720" numCol="1" spcCol="0" rtlCol="0" fromWordArt="0" anchor="ctr" anchorCtr="0" forceAA="0" upright="0" compatLnSpc="0">
+          <a:bodyPr vertOverflow="overflow" horzOverflow="overflow" vert="horz" wrap="square" lIns="91440" tIns="45720" rIns="91440" bIns="45720" numCol="1" spcCol="0" rtlCol="0" fromWordArt="0" anchor="ctr" anchorCtr="0" forceAA="0" compatLnSpc="0">
             <a:spAutoFit/>
           </a:bodyPr>
+          <a:lstStyle/>
           <a:p>
             <a:pPr algn="ctr">
               <a:defRPr/>
@@ -11898,12 +12694,12 @@
       </p:sp>
       <p:sp>
         <p:nvSpPr>
-          <p:cNvPr id="1990802124" name=""/>
+          <p:cNvPr id="1990802124" name="CasellaDiTesto 1990802123"/>
           <p:cNvSpPr txBox="1"/>
           <p:nvPr/>
         </p:nvSpPr>
         <p:spPr bwMode="auto">
-          <a:xfrm rot="0" flipH="0" flipV="0">
+          <a:xfrm>
             <a:off x="9944084" y="3678115"/>
             <a:ext cx="1999555" cy="640440"/>
           </a:xfrm>
@@ -11913,9 +12709,10 @@
           <a:noFill/>
         </p:spPr>
         <p:txBody>
-          <a:bodyPr vertOverflow="overflow" horzOverflow="overflow" vert="horz" wrap="square" lIns="91440" tIns="45720" rIns="91440" bIns="45720" numCol="1" spcCol="0" rtlCol="0" fromWordArt="0" anchor="ctr" anchorCtr="0" forceAA="0" upright="0" compatLnSpc="0">
+          <a:bodyPr vertOverflow="overflow" horzOverflow="overflow" vert="horz" wrap="square" lIns="91440" tIns="45720" rIns="91440" bIns="45720" numCol="1" spcCol="0" rtlCol="0" fromWordArt="0" anchor="ctr" anchorCtr="0" forceAA="0" compatLnSpc="0">
             <a:spAutoFit/>
           </a:bodyPr>
+          <a:lstStyle/>
           <a:p>
             <a:pPr algn="ctr">
               <a:defRPr/>
@@ -11953,20 +12750,12 @@
   <p:clrMapOvr>
     <a:masterClrMapping/>
   </p:clrMapOvr>
-  <mc:AlternateContent xmlns:mc="http://schemas.openxmlformats.org/markup-compatibility/2006">
-    <mc:Choice xmlns:p159="http://schemas.microsoft.com/office/powerpoint/2015/09/main" xmlns:p14="http://schemas.microsoft.com/office/powerpoint/2010/main" Requires="p159">
-      <p:transition p14:dur="2000" advClick="1"/>
-    </mc:Choice>
-    <mc:Fallback>
-      <p:transition advClick="1"/>
-    </mc:Fallback>
-  </mc:AlternateContent>
 </p:sld>
 </file>
 
-<file path=ppt/slides/slide23.xml><?xml version="1.0" encoding="utf-8"?>
-<p:sld xmlns:a="http://schemas.openxmlformats.org/drawingml/2006/main" xmlns:r="http://schemas.openxmlformats.org/officeDocument/2006/relationships" xmlns:p="http://schemas.openxmlformats.org/presentationml/2006/main" xmlns:m="http://schemas.openxmlformats.org/officeDocument/2006/math" xmlns:w="http://schemas.openxmlformats.org/wordprocessingml/2006/main" xmlns:mc="http://schemas.openxmlformats.org/markup-compatibility/2006" showMasterPhAnim="0" showMasterSp="1" show="1">
-  <p:cSld name="">
+<file path=ppt/slides/slide26.xml><?xml version="1.0" encoding="utf-8"?>
+<p:sld xmlns:a="http://schemas.openxmlformats.org/drawingml/2006/main" xmlns:r="http://schemas.openxmlformats.org/officeDocument/2006/relationships" xmlns:p="http://schemas.openxmlformats.org/presentationml/2006/main" showMasterPhAnim="0">
+  <p:cSld>
     <p:spTree>
       <p:nvGrpSpPr>
         <p:cNvPr id="1" name=""/>
@@ -12021,12 +12810,12 @@
       </p:sp>
       <p:sp>
         <p:nvSpPr>
-          <p:cNvPr id="356032845" name=""/>
+          <p:cNvPr id="356032845" name="CasellaDiTesto 356032844"/>
           <p:cNvSpPr txBox="1"/>
           <p:nvPr/>
         </p:nvSpPr>
         <p:spPr bwMode="auto">
-          <a:xfrm rot="0" flipH="0" flipV="0">
+          <a:xfrm>
             <a:off x="5383575" y="433185"/>
             <a:ext cx="6477589" cy="488039"/>
           </a:xfrm>
@@ -12036,9 +12825,10 @@
           <a:noFill/>
         </p:spPr>
         <p:txBody>
-          <a:bodyPr vertOverflow="overflow" horzOverflow="overflow" vert="horz" wrap="square" lIns="91440" tIns="45720" rIns="91440" bIns="45720" numCol="1" spcCol="0" rtlCol="0" fromWordArt="0" anchor="t" anchorCtr="0" forceAA="0" upright="0" compatLnSpc="0">
+          <a:bodyPr vertOverflow="overflow" horzOverflow="overflow" vert="horz" wrap="square" lIns="91440" tIns="45720" rIns="91440" bIns="45720" numCol="1" spcCol="0" rtlCol="0" fromWordArt="0" anchor="t" anchorCtr="0" forceAA="0" compatLnSpc="0">
             <a:spAutoFit/>
           </a:bodyPr>
+          <a:lstStyle/>
           <a:p>
             <a:pPr algn="ctr">
               <a:defRPr/>
@@ -12064,12 +12854,12 @@
       </p:sp>
       <p:sp>
         <p:nvSpPr>
-          <p:cNvPr id="1589703209" name=""/>
+          <p:cNvPr id="1589703209" name="CasellaDiTesto 1589703208"/>
           <p:cNvSpPr txBox="1"/>
           <p:nvPr/>
         </p:nvSpPr>
         <p:spPr bwMode="auto">
-          <a:xfrm rot="0" flipH="0" flipV="0">
+          <a:xfrm>
             <a:off x="351447" y="1248301"/>
             <a:ext cx="11813415" cy="2303598"/>
           </a:xfrm>
@@ -12091,9 +12881,10 @@
           </a:ln>
         </p:spPr>
         <p:txBody>
-          <a:bodyPr vertOverflow="overflow" horzOverflow="overflow" vert="horz" wrap="square" lIns="91440" tIns="45720" rIns="91440" bIns="45720" numCol="1" spcCol="0" rtlCol="0" fromWordArt="0" anchor="t" anchorCtr="0" forceAA="0" upright="0" compatLnSpc="0">
+          <a:bodyPr vertOverflow="overflow" horzOverflow="overflow" vert="horz" wrap="square" lIns="91440" tIns="45720" rIns="91440" bIns="45720" numCol="1" spcCol="0" rtlCol="0" fromWordArt="0" anchor="t" anchorCtr="0" forceAA="0" compatLnSpc="0">
             <a:spAutoFit/>
           </a:bodyPr>
+          <a:lstStyle/>
           <a:p>
             <a:pPr>
               <a:defRPr/>
@@ -12289,12 +13080,12 @@
       </p:sp>
       <p:sp>
         <p:nvSpPr>
-          <p:cNvPr id="1761411735" name=""/>
+          <p:cNvPr id="1761411735" name="CasellaDiTesto 1761411734"/>
           <p:cNvSpPr txBox="1"/>
           <p:nvPr/>
         </p:nvSpPr>
         <p:spPr bwMode="auto">
-          <a:xfrm rot="0" flipH="0" flipV="0">
+          <a:xfrm>
             <a:off x="351447" y="4001026"/>
             <a:ext cx="11844014" cy="1641023"/>
           </a:xfrm>
@@ -12316,9 +13107,10 @@
           </a:ln>
         </p:spPr>
         <p:txBody>
-          <a:bodyPr vertOverflow="overflow" horzOverflow="overflow" vert="horz" wrap="square" lIns="91440" tIns="45720" rIns="91440" bIns="45720" numCol="1" spcCol="0" rtlCol="0" fromWordArt="0" anchor="t" anchorCtr="0" forceAA="0" upright="0" compatLnSpc="0">
+          <a:bodyPr vertOverflow="overflow" horzOverflow="overflow" vert="horz" wrap="square" lIns="91440" tIns="45720" rIns="91440" bIns="45720" numCol="1" spcCol="0" rtlCol="0" fromWordArt="0" anchor="t" anchorCtr="0" forceAA="0" compatLnSpc="0">
             <a:spAutoFit/>
           </a:bodyPr>
+          <a:lstStyle/>
           <a:p>
             <a:pPr>
               <a:defRPr/>
@@ -12409,12 +13201,12 @@
       </p:sp>
       <p:sp>
         <p:nvSpPr>
-          <p:cNvPr id="1841704908" name=""/>
+          <p:cNvPr id="1841704908" name="CasellaDiTesto 1841704907"/>
           <p:cNvSpPr txBox="1"/>
           <p:nvPr/>
         </p:nvSpPr>
         <p:spPr bwMode="auto">
-          <a:xfrm rot="0" flipH="0" flipV="0">
+          <a:xfrm>
             <a:off x="10039334" y="4944940"/>
             <a:ext cx="1999555" cy="640440"/>
           </a:xfrm>
@@ -12424,9 +13216,10 @@
           <a:noFill/>
         </p:spPr>
         <p:txBody>
-          <a:bodyPr vertOverflow="overflow" horzOverflow="overflow" vert="horz" wrap="square" lIns="91440" tIns="45720" rIns="91440" bIns="45720" numCol="1" spcCol="0" rtlCol="0" fromWordArt="0" anchor="ctr" anchorCtr="0" forceAA="0" upright="0" compatLnSpc="0">
+          <a:bodyPr vertOverflow="overflow" horzOverflow="overflow" vert="horz" wrap="square" lIns="91440" tIns="45720" rIns="91440" bIns="45720" numCol="1" spcCol="0" rtlCol="0" fromWordArt="0" anchor="ctr" anchorCtr="0" forceAA="0" compatLnSpc="0">
             <a:spAutoFit/>
           </a:bodyPr>
+          <a:lstStyle/>
           <a:p>
             <a:pPr algn="ctr">
               <a:defRPr/>
@@ -12461,12 +13254,12 @@
       </p:sp>
       <p:sp>
         <p:nvSpPr>
-          <p:cNvPr id="1437168857" name=""/>
+          <p:cNvPr id="1437168857" name="CasellaDiTesto 1437168856"/>
           <p:cNvSpPr txBox="1"/>
           <p:nvPr/>
         </p:nvSpPr>
         <p:spPr bwMode="auto">
-          <a:xfrm rot="0" flipH="0" flipV="0">
+          <a:xfrm>
             <a:off x="10107973" y="2174456"/>
             <a:ext cx="1996317" cy="640440"/>
           </a:xfrm>
@@ -12476,9 +13269,10 @@
           <a:noFill/>
         </p:spPr>
         <p:txBody>
-          <a:bodyPr vertOverflow="overflow" horzOverflow="overflow" vert="horz" wrap="square" lIns="91440" tIns="45720" rIns="91440" bIns="45720" numCol="1" spcCol="0" rtlCol="0" fromWordArt="0" anchor="ctr" anchorCtr="0" forceAA="0" upright="0" compatLnSpc="0">
+          <a:bodyPr vertOverflow="overflow" horzOverflow="overflow" vert="horz" wrap="square" lIns="91440" tIns="45720" rIns="91440" bIns="45720" numCol="1" spcCol="0" rtlCol="0" fromWordArt="0" anchor="ctr" anchorCtr="0" forceAA="0" compatLnSpc="0">
             <a:spAutoFit/>
           </a:bodyPr>
+          <a:lstStyle/>
           <a:p>
             <a:pPr algn="ctr">
               <a:defRPr/>
@@ -12518,20 +13312,12 @@
   <p:clrMapOvr>
     <a:masterClrMapping/>
   </p:clrMapOvr>
-  <mc:AlternateContent xmlns:mc="http://schemas.openxmlformats.org/markup-compatibility/2006">
-    <mc:Choice xmlns:p159="http://schemas.microsoft.com/office/powerpoint/2015/09/main" xmlns:p14="http://schemas.microsoft.com/office/powerpoint/2010/main" Requires="p159">
-      <p:transition p14:dur="2000" advClick="1"/>
-    </mc:Choice>
-    <mc:Fallback>
-      <p:transition advClick="1"/>
-    </mc:Fallback>
-  </mc:AlternateContent>
 </p:sld>
 </file>
 
 <file path=ppt/slides/slide3.xml><?xml version="1.0" encoding="utf-8"?>
-<p:sld xmlns:a="http://schemas.openxmlformats.org/drawingml/2006/main" xmlns:r="http://schemas.openxmlformats.org/officeDocument/2006/relationships" xmlns:p="http://schemas.openxmlformats.org/presentationml/2006/main" xmlns:m="http://schemas.openxmlformats.org/officeDocument/2006/math" xmlns:w="http://schemas.openxmlformats.org/wordprocessingml/2006/main" xmlns:mc="http://schemas.openxmlformats.org/markup-compatibility/2006" showMasterPhAnim="0" showMasterSp="1" show="1">
-  <p:cSld name="">
+<p:sld xmlns:a="http://schemas.openxmlformats.org/drawingml/2006/main" xmlns:r="http://schemas.openxmlformats.org/officeDocument/2006/relationships" xmlns:p="http://schemas.openxmlformats.org/presentationml/2006/main" showMasterPhAnim="0">
+  <p:cSld>
     <p:spTree>
       <p:nvGrpSpPr>
         <p:cNvPr id="1" name=""/>
@@ -12585,7 +13371,7 @@
       </p:sp>
       <p:pic>
         <p:nvPicPr>
-          <p:cNvPr id="1268436596" name=""/>
+          <p:cNvPr id="1268436596" name="Elemento grafico 1268436595"/>
           <p:cNvPicPr>
             <a:picLocks noChangeAspect="1"/>
           </p:cNvPicPr>
@@ -12602,7 +13388,7 @@
           <a:stretch/>
         </p:blipFill>
         <p:spPr bwMode="auto">
-          <a:xfrm flipH="0" flipV="0">
+          <a:xfrm>
             <a:off x="78818" y="1840019"/>
             <a:ext cx="12001499" cy="3285315"/>
           </a:xfrm>
@@ -12616,20 +13402,12 @@
   <p:clrMapOvr>
     <a:masterClrMapping/>
   </p:clrMapOvr>
-  <mc:AlternateContent xmlns:mc="http://schemas.openxmlformats.org/markup-compatibility/2006">
-    <mc:Choice xmlns:p159="http://schemas.microsoft.com/office/powerpoint/2015/09/main" xmlns:p14="http://schemas.microsoft.com/office/powerpoint/2010/main" Requires="p159">
-      <p:transition p14:dur="2000" advClick="1"/>
-    </mc:Choice>
-    <mc:Fallback>
-      <p:transition advClick="1"/>
-    </mc:Fallback>
-  </mc:AlternateContent>
 </p:sld>
 </file>
 
 <file path=ppt/slides/slide4.xml><?xml version="1.0" encoding="utf-8"?>
-<p:sld xmlns:a="http://schemas.openxmlformats.org/drawingml/2006/main" xmlns:r="http://schemas.openxmlformats.org/officeDocument/2006/relationships" xmlns:p="http://schemas.openxmlformats.org/presentationml/2006/main" xmlns:m="http://schemas.openxmlformats.org/officeDocument/2006/math" xmlns:w="http://schemas.openxmlformats.org/wordprocessingml/2006/main" xmlns:mc="http://schemas.openxmlformats.org/markup-compatibility/2006" showMasterPhAnim="0" showMasterSp="1" show="1">
-  <p:cSld name="">
+<p:sld xmlns:a="http://schemas.openxmlformats.org/drawingml/2006/main" xmlns:r="http://schemas.openxmlformats.org/officeDocument/2006/relationships" xmlns:p="http://schemas.openxmlformats.org/presentationml/2006/main" showMasterPhAnim="0">
+  <p:cSld>
     <p:spTree>
       <p:nvGrpSpPr>
         <p:cNvPr id="1" name=""/>
@@ -12698,64 +13476,78 @@
               <a:defRPr/>
             </a:pPr>
             <a:r>
-              <a:rPr lang="en"/>
+              <a:rPr lang="en" dirty="0"/>
               <a:t>La separazione avviene seguendo il pattern MVC:</a:t>
             </a:r>
-            <a:endParaRPr lang="en"/>
-          </a:p>
-          <a:p>
-            <a:pPr>
-              <a:defRPr/>
-            </a:pPr>
-            <a:r>
-              <a:rPr lang="en"/>
-              <a:t>la vista é contenuta esclusivamente nei template HTML in Thymeleaf</a:t>
-            </a:r>
-            <a:endParaRPr lang="en"/>
-          </a:p>
-          <a:p>
-            <a:pPr>
-              <a:defRPr/>
-            </a:pPr>
-            <a:r>
-              <a:rPr lang="en"/>
-              <a:t>I</a:t>
-            </a:r>
-            <a:r>
-              <a:rPr lang="en"/>
-              <a:t> controller sono di due tipi:</a:t>
-            </a:r>
-            <a:endParaRPr lang="en"/>
+          </a:p>
+          <a:p>
+            <a:pPr>
+              <a:defRPr/>
+            </a:pPr>
+            <a:r>
+              <a:rPr lang="en" dirty="0"/>
+              <a:t>la </a:t>
+            </a:r>
+            <a:r>
+              <a:rPr lang="en" b="1" dirty="0"/>
+              <a:t>View</a:t>
+            </a:r>
+            <a:r>
+              <a:rPr lang="en" dirty="0"/>
+              <a:t> é contenuta esclusivamente nei template HTML in Thymeleaf</a:t>
+            </a:r>
+          </a:p>
+          <a:p>
+            <a:pPr>
+              <a:defRPr/>
+            </a:pPr>
+            <a:r>
+              <a:rPr lang="en" dirty="0"/>
+              <a:t>I </a:t>
+            </a:r>
+            <a:r>
+              <a:rPr lang="en" b="1" dirty="0"/>
+              <a:t>Controller</a:t>
+            </a:r>
+            <a:r>
+              <a:rPr lang="en" dirty="0"/>
+              <a:t> sono di due tipi:</a:t>
+            </a:r>
           </a:p>
           <a:p>
             <a:pPr lvl="1">
               <a:defRPr/>
             </a:pPr>
             <a:r>
-              <a:rPr lang="en"/>
+              <a:rPr lang="en" dirty="0"/>
               <a:t>REST controller utilizzati per fornire le API per recuperare/inviare dati</a:t>
             </a:r>
-            <a:endParaRPr lang="en"/>
           </a:p>
           <a:p>
             <a:pPr lvl="1">
               <a:defRPr/>
             </a:pPr>
             <a:r>
-              <a:rPr lang="en"/>
+              <a:rPr lang="en" dirty="0"/>
               <a:t>View controller utilizzati per inviare i template di Thymeleaf all’utente</a:t>
             </a:r>
-            <a:endParaRPr lang="en"/>
           </a:p>
           <a:p>
             <a:pPr lvl="0">
               <a:defRPr/>
             </a:pPr>
             <a:r>
-              <a:rPr lang="en"/>
-              <a:t>Il modello </a:t>
-            </a:r>
-            <a:endParaRPr lang="en"/>
+              <a:rPr lang="en" dirty="0"/>
+              <a:t>Il </a:t>
+            </a:r>
+            <a:r>
+              <a:rPr lang="en" b="1" dirty="0"/>
+              <a:t>Model </a:t>
+            </a:r>
+            <a:r>
+              <a:rPr lang="en" dirty="0"/>
+              <a:t>consiste nei service che svolgono la logica di business</a:t>
+            </a:r>
           </a:p>
         </p:txBody>
       </p:sp>
@@ -12764,20 +13556,12 @@
   <p:clrMapOvr>
     <a:masterClrMapping/>
   </p:clrMapOvr>
-  <mc:AlternateContent xmlns:mc="http://schemas.openxmlformats.org/markup-compatibility/2006">
-    <mc:Choice xmlns:p159="http://schemas.microsoft.com/office/powerpoint/2015/09/main" xmlns:p14="http://schemas.microsoft.com/office/powerpoint/2010/main" Requires="p159">
-      <p:transition p14:dur="2000" advClick="1"/>
-    </mc:Choice>
-    <mc:Fallback>
-      <p:transition advClick="1"/>
-    </mc:Fallback>
-  </mc:AlternateContent>
 </p:sld>
 </file>
 
 <file path=ppt/slides/slide5.xml><?xml version="1.0" encoding="utf-8"?>
-<p:sld xmlns:a="http://schemas.openxmlformats.org/drawingml/2006/main" xmlns:r="http://schemas.openxmlformats.org/officeDocument/2006/relationships" xmlns:p="http://schemas.openxmlformats.org/presentationml/2006/main" xmlns:m="http://schemas.openxmlformats.org/officeDocument/2006/math" xmlns:w="http://schemas.openxmlformats.org/wordprocessingml/2006/main" xmlns:mc="http://schemas.openxmlformats.org/markup-compatibility/2006" showMasterPhAnim="0" showMasterSp="1" show="1">
-  <p:cSld name="">
+<p:sld xmlns:a="http://schemas.openxmlformats.org/drawingml/2006/main" xmlns:r="http://schemas.openxmlformats.org/officeDocument/2006/relationships" xmlns:p="http://schemas.openxmlformats.org/presentationml/2006/main" showMasterPhAnim="0">
+  <p:cSld>
     <p:spTree>
       <p:nvGrpSpPr>
         <p:cNvPr id="1" name=""/>
@@ -12842,14 +13626,14 @@
           </p:nvPr>
         </p:nvSpPr>
         <p:spPr bwMode="auto">
-          <a:xfrm flipH="0" flipV="0">
+          <a:xfrm>
             <a:off x="6622472" y="698139"/>
             <a:ext cx="4808413" cy="659534"/>
           </a:xfrm>
         </p:spPr>
         <p:txBody>
-          <a:bodyPr vertOverflow="overflow" horzOverflow="overflow" vert="horz" wrap="square" lIns="91440" tIns="45720" rIns="91440" bIns="45720" numCol="1" spcCol="0" rtlCol="0" fromWordArt="0" anchor="ctr" anchorCtr="0" forceAA="0" upright="0" compatLnSpc="0">
-            <a:normAutofit fontScale="95000" lnSpcReduction="1000"/>
+          <a:bodyPr vertOverflow="overflow" horzOverflow="overflow" vert="horz" wrap="square" lIns="91440" tIns="45720" rIns="91440" bIns="45720" numCol="1" spcCol="0" rtlCol="0" fromWordArt="0" anchor="ctr" anchorCtr="0" forceAA="0" compatLnSpc="0">
+            <a:normAutofit fontScale="87500" lnSpcReduction="1000"/>
           </a:bodyPr>
           <a:lstStyle/>
           <a:p>
@@ -12881,7 +13665,7 @@
       </p:sp>
       <p:pic>
         <p:nvPicPr>
-          <p:cNvPr id="1322616823" name=""/>
+          <p:cNvPr id="1322616823" name="Elemento grafico 1322616822"/>
           <p:cNvPicPr>
             <a:picLocks noChangeAspect="1"/>
           </p:cNvPicPr>
@@ -12898,7 +13682,7 @@
           <a:stretch/>
         </p:blipFill>
         <p:spPr bwMode="auto">
-          <a:xfrm flipH="0" flipV="0">
+          <a:xfrm>
             <a:off x="381886" y="1495497"/>
             <a:ext cx="11542568" cy="5135727"/>
           </a:xfrm>
@@ -12912,20 +13696,12 @@
   <p:clrMapOvr>
     <a:masterClrMapping/>
   </p:clrMapOvr>
-  <mc:AlternateContent xmlns:mc="http://schemas.openxmlformats.org/markup-compatibility/2006">
-    <mc:Choice xmlns:p159="http://schemas.microsoft.com/office/powerpoint/2015/09/main" xmlns:p14="http://schemas.microsoft.com/office/powerpoint/2010/main" Requires="p159">
-      <p:transition p14:dur="2000" advClick="1"/>
-    </mc:Choice>
-    <mc:Fallback>
-      <p:transition advClick="1"/>
-    </mc:Fallback>
-  </mc:AlternateContent>
 </p:sld>
 </file>
 
 <file path=ppt/slides/slide6.xml><?xml version="1.0" encoding="utf-8"?>
-<p:sld xmlns:a="http://schemas.openxmlformats.org/drawingml/2006/main" xmlns:r="http://schemas.openxmlformats.org/officeDocument/2006/relationships" xmlns:p="http://schemas.openxmlformats.org/presentationml/2006/main" xmlns:m="http://schemas.openxmlformats.org/officeDocument/2006/math" xmlns:w="http://schemas.openxmlformats.org/wordprocessingml/2006/main" xmlns:mc="http://schemas.openxmlformats.org/markup-compatibility/2006" showMasterPhAnim="0" showMasterSp="1" show="1">
-  <p:cSld name="">
+<p:sld xmlns:a="http://schemas.openxmlformats.org/drawingml/2006/main" xmlns:r="http://schemas.openxmlformats.org/officeDocument/2006/relationships" xmlns:p="http://schemas.openxmlformats.org/presentationml/2006/main" showMasterPhAnim="0">
+  <p:cSld>
     <p:spTree>
       <p:nvGrpSpPr>
         <p:cNvPr id="1" name=""/>
@@ -12986,12 +13762,12 @@
       </p:sp>
       <p:sp>
         <p:nvSpPr>
-          <p:cNvPr id="2040059782" name=""/>
+          <p:cNvPr id="2040059782" name="CasellaDiTesto 2040059781"/>
           <p:cNvSpPr txBox="1"/>
           <p:nvPr/>
         </p:nvSpPr>
         <p:spPr bwMode="auto">
-          <a:xfrm rot="0" flipH="0" flipV="0">
+          <a:xfrm>
             <a:off x="351446" y="1731960"/>
             <a:ext cx="11608529" cy="2966174"/>
           </a:xfrm>
@@ -13013,15 +13789,16 @@
           </a:ln>
         </p:spPr>
         <p:txBody>
-          <a:bodyPr vertOverflow="overflow" horzOverflow="overflow" vert="horz" wrap="square" lIns="91440" tIns="45720" rIns="91440" bIns="45720" numCol="1" spcCol="0" rtlCol="0" fromWordArt="0" anchor="t" anchorCtr="0" forceAA="0" upright="0" compatLnSpc="0">
+          <a:bodyPr vertOverflow="overflow" horzOverflow="overflow" vert="horz" wrap="square" lIns="91440" tIns="45720" rIns="91440" bIns="45720" numCol="1" spcCol="0" rtlCol="0" fromWordArt="0" anchor="t" anchorCtr="0" forceAA="0" compatLnSpc="0">
             <a:spAutoFit/>
           </a:bodyPr>
-          <a:p>
-            <a:pPr>
-              <a:defRPr/>
-            </a:pPr>
-            <a:r>
-              <a:rPr lang="en" sz="1400" b="0" i="0" u="none" strike="noStrike" cap="none" spc="0">
+          <a:lstStyle/>
+          <a:p>
+            <a:pPr>
+              <a:defRPr/>
+            </a:pPr>
+            <a:r>
+              <a:rPr lang="en" sz="1400" b="0" i="0" u="none" strike="noStrike" cap="none" spc="0" dirty="0">
                 <a:solidFill>
                   <a:schemeClr val="tx1"/>
                 </a:solidFill>
@@ -13031,113 +13808,369 @@
               </a:rPr>
               <a:t>// VisitPlanService</a:t>
             </a:r>
-            <a:endParaRPr sz="1400" b="0" i="0" u="none" strike="noStrike" cap="none" spc="0">
-              <a:solidFill>
-                <a:schemeClr val="tx1"/>
-              </a:solidFill>
-              <a:latin typeface="Liberation Mono"/>
-              <a:cs typeface="Liberation Mono"/>
-            </a:endParaRPr>
-          </a:p>
-          <a:p>
-            <a:pPr>
-              <a:defRPr/>
-            </a:pPr>
-            <a:r>
-              <a:rPr lang="it-IT" sz="1400" b="0" i="0" u="none" strike="noStrike" cap="none" spc="0">
-                <a:solidFill>
-                  <a:schemeClr val="tx1"/>
-                </a:solidFill>
-                <a:latin typeface="Liberation Mono"/>
-                <a:ea typeface="Liberation Mono"/>
-                <a:cs typeface="Liberation Mono"/>
-              </a:rPr>
-              <a:t>private List&lt;VolunteerAvailableDate&gt; initMonthAvailabilities(List&lt;User&gt; volunteers, int month, int year) {</a:t>
-            </a:r>
-            <a:endParaRPr lang="it-IT" sz="1400" b="0" i="0" u="none" strike="noStrike" cap="none" spc="0">
-              <a:solidFill>
-                <a:schemeClr val="tx1"/>
-              </a:solidFill>
-              <a:latin typeface="Liberation Mono"/>
-              <a:ea typeface="Liberation Mono"/>
-              <a:cs typeface="Liberation Mono"/>
-            </a:endParaRPr>
-          </a:p>
-          <a:p>
-            <a:pPr>
-              <a:defRPr/>
-            </a:pPr>
-            <a:r>
-              <a:rPr lang="it-IT" sz="1400" b="0" i="0" u="none" strike="noStrike" cap="none" spc="0">
-                <a:solidFill>
-                  <a:schemeClr val="tx1"/>
-                </a:solidFill>
-                <a:latin typeface="Liberation Mono"/>
-                <a:ea typeface="Liberation Mono"/>
-                <a:cs typeface="Liberation Mono"/>
-              </a:rPr>
-              <a:t>        List&lt;VolunteerAvailableDate&gt; monthAvailabilities = new ArrayList&lt;&gt;();</a:t>
-            </a:r>
-            <a:endParaRPr sz="1400" b="0" i="0" u="none" strike="noStrike" cap="none" spc="0">
-              <a:solidFill>
-                <a:schemeClr val="tx1"/>
-              </a:solidFill>
-              <a:latin typeface="Liberation Mono"/>
-              <a:cs typeface="Liberation Mono"/>
-            </a:endParaRPr>
-          </a:p>
-          <a:p>
-            <a:pPr>
-              <a:defRPr/>
-            </a:pPr>
-            <a:r>
-              <a:rPr lang="it-IT" sz="1400" b="0" i="0" u="none" strike="noStrike" cap="none" spc="0">
-                <a:solidFill>
-                  <a:schemeClr val="tx1"/>
-                </a:solidFill>
-                <a:latin typeface="Liberation Mono"/>
-                <a:ea typeface="Liberation Mono"/>
-                <a:cs typeface="Liberation Mono"/>
-              </a:rPr>
-              <a:t>        for (User v : volunteers) {</a:t>
-            </a:r>
-            <a:endParaRPr sz="1400" b="0" i="0" u="none" strike="noStrike" cap="none" spc="0">
-              <a:solidFill>
-                <a:schemeClr val="tx1"/>
-              </a:solidFill>
-              <a:latin typeface="Liberation Mono"/>
-              <a:cs typeface="Liberation Mono"/>
-            </a:endParaRPr>
-          </a:p>
-          <a:p>
-            <a:pPr>
-              <a:defRPr/>
-            </a:pPr>
-            <a:r>
-              <a:rPr lang="it-IT" sz="1400" b="0" i="0" u="none" strike="noStrike" cap="none" spc="0">
-                <a:solidFill>
-                  <a:schemeClr val="tx1"/>
-                </a:solidFill>
-                <a:latin typeface="Liberation Mono"/>
-                <a:ea typeface="Liberation Mono"/>
-                <a:cs typeface="Liberation Mono"/>
-              </a:rPr>
-              <a:t>            // per ogni volontario recupera le sue disponibilitá e seleziona quelle del mese</a:t>
-            </a:r>
-            <a:endParaRPr sz="1400" b="0" i="0" u="none" strike="noStrike" cap="none" spc="0">
-              <a:solidFill>
-                <a:schemeClr val="tx1"/>
-              </a:solidFill>
-              <a:latin typeface="Liberation Mono"/>
-              <a:cs typeface="Liberation Mono"/>
-            </a:endParaRPr>
-          </a:p>
-          <a:p>
-            <a:pPr>
-              <a:defRPr/>
-            </a:pPr>
-            <a:r>
-              <a:rPr lang="it-IT" sz="1400" b="0" i="0" u="none" strike="noStrike" cap="none" spc="0">
+            <a:endParaRPr sz="1400" b="0" i="0" u="none" strike="noStrike" cap="none" spc="0" dirty="0">
+              <a:solidFill>
+                <a:schemeClr val="tx1"/>
+              </a:solidFill>
+              <a:latin typeface="Liberation Mono"/>
+              <a:cs typeface="Liberation Mono"/>
+            </a:endParaRPr>
+          </a:p>
+          <a:p>
+            <a:pPr>
+              <a:defRPr/>
+            </a:pPr>
+            <a:r>
+              <a:rPr lang="it-IT" sz="1400" b="0" i="0" u="none" strike="noStrike" cap="none" spc="0" dirty="0">
+                <a:solidFill>
+                  <a:schemeClr val="tx1"/>
+                </a:solidFill>
+                <a:latin typeface="Liberation Mono"/>
+                <a:ea typeface="Liberation Mono"/>
+                <a:cs typeface="Liberation Mono"/>
+              </a:rPr>
+              <a:t>private List&lt;</a:t>
+            </a:r>
+            <a:r>
+              <a:rPr lang="it-IT" sz="1400" b="0" i="0" u="none" strike="noStrike" cap="none" spc="0" dirty="0" err="1">
+                <a:solidFill>
+                  <a:schemeClr val="tx1"/>
+                </a:solidFill>
+                <a:latin typeface="Liberation Mono"/>
+                <a:ea typeface="Liberation Mono"/>
+                <a:cs typeface="Liberation Mono"/>
+              </a:rPr>
+              <a:t>VolunteerAvailableDate</a:t>
+            </a:r>
+            <a:r>
+              <a:rPr lang="it-IT" sz="1400" b="0" i="0" u="none" strike="noStrike" cap="none" spc="0" dirty="0">
+                <a:solidFill>
+                  <a:schemeClr val="tx1"/>
+                </a:solidFill>
+                <a:latin typeface="Liberation Mono"/>
+                <a:ea typeface="Liberation Mono"/>
+                <a:cs typeface="Liberation Mono"/>
+              </a:rPr>
+              <a:t>&gt; </a:t>
+            </a:r>
+            <a:r>
+              <a:rPr lang="it-IT" sz="1400" b="0" i="0" u="none" strike="noStrike" cap="none" spc="0" dirty="0" err="1">
+                <a:solidFill>
+                  <a:schemeClr val="tx1"/>
+                </a:solidFill>
+                <a:latin typeface="Liberation Mono"/>
+                <a:ea typeface="Liberation Mono"/>
+                <a:cs typeface="Liberation Mono"/>
+              </a:rPr>
+              <a:t>initMonthAvailabilities</a:t>
+            </a:r>
+            <a:r>
+              <a:rPr lang="it-IT" sz="1400" b="0" i="0" u="none" strike="noStrike" cap="none" spc="0" dirty="0">
+                <a:solidFill>
+                  <a:schemeClr val="tx1"/>
+                </a:solidFill>
+                <a:latin typeface="Liberation Mono"/>
+                <a:ea typeface="Liberation Mono"/>
+                <a:cs typeface="Liberation Mono"/>
+              </a:rPr>
+              <a:t>(List&lt;User&gt; </a:t>
+            </a:r>
+            <a:r>
+              <a:rPr lang="it-IT" sz="1400" b="0" i="0" u="none" strike="noStrike" cap="none" spc="0" dirty="0" err="1">
+                <a:solidFill>
+                  <a:schemeClr val="tx1"/>
+                </a:solidFill>
+                <a:latin typeface="Liberation Mono"/>
+                <a:ea typeface="Liberation Mono"/>
+                <a:cs typeface="Liberation Mono"/>
+              </a:rPr>
+              <a:t>volunteers</a:t>
+            </a:r>
+            <a:r>
+              <a:rPr lang="it-IT" sz="1400" b="0" i="0" u="none" strike="noStrike" cap="none" spc="0" dirty="0">
+                <a:solidFill>
+                  <a:schemeClr val="tx1"/>
+                </a:solidFill>
+                <a:latin typeface="Liberation Mono"/>
+                <a:ea typeface="Liberation Mono"/>
+                <a:cs typeface="Liberation Mono"/>
+              </a:rPr>
+              <a:t>, </a:t>
+            </a:r>
+            <a:r>
+              <a:rPr lang="it-IT" sz="1400" b="0" i="0" u="none" strike="noStrike" cap="none" spc="0" dirty="0" err="1">
+                <a:solidFill>
+                  <a:schemeClr val="tx1"/>
+                </a:solidFill>
+                <a:latin typeface="Liberation Mono"/>
+                <a:ea typeface="Liberation Mono"/>
+                <a:cs typeface="Liberation Mono"/>
+              </a:rPr>
+              <a:t>int</a:t>
+            </a:r>
+            <a:r>
+              <a:rPr lang="it-IT" sz="1400" b="0" i="0" u="none" strike="noStrike" cap="none" spc="0" dirty="0">
+                <a:solidFill>
+                  <a:schemeClr val="tx1"/>
+                </a:solidFill>
+                <a:latin typeface="Liberation Mono"/>
+                <a:ea typeface="Liberation Mono"/>
+                <a:cs typeface="Liberation Mono"/>
+              </a:rPr>
+              <a:t> </a:t>
+            </a:r>
+            <a:r>
+              <a:rPr lang="it-IT" sz="1400" b="0" i="0" u="none" strike="noStrike" cap="none" spc="0" dirty="0" err="1">
+                <a:solidFill>
+                  <a:schemeClr val="tx1"/>
+                </a:solidFill>
+                <a:latin typeface="Liberation Mono"/>
+                <a:ea typeface="Liberation Mono"/>
+                <a:cs typeface="Liberation Mono"/>
+              </a:rPr>
+              <a:t>month</a:t>
+            </a:r>
+            <a:r>
+              <a:rPr lang="it-IT" sz="1400" b="0" i="0" u="none" strike="noStrike" cap="none" spc="0" dirty="0">
+                <a:solidFill>
+                  <a:schemeClr val="tx1"/>
+                </a:solidFill>
+                <a:latin typeface="Liberation Mono"/>
+                <a:ea typeface="Liberation Mono"/>
+                <a:cs typeface="Liberation Mono"/>
+              </a:rPr>
+              <a:t>, </a:t>
+            </a:r>
+            <a:r>
+              <a:rPr lang="it-IT" sz="1400" b="0" i="0" u="none" strike="noStrike" cap="none" spc="0" dirty="0" err="1">
+                <a:solidFill>
+                  <a:schemeClr val="tx1"/>
+                </a:solidFill>
+                <a:latin typeface="Liberation Mono"/>
+                <a:ea typeface="Liberation Mono"/>
+                <a:cs typeface="Liberation Mono"/>
+              </a:rPr>
+              <a:t>int</a:t>
+            </a:r>
+            <a:r>
+              <a:rPr lang="it-IT" sz="1400" b="0" i="0" u="none" strike="noStrike" cap="none" spc="0" dirty="0">
+                <a:solidFill>
+                  <a:schemeClr val="tx1"/>
+                </a:solidFill>
+                <a:latin typeface="Liberation Mono"/>
+                <a:ea typeface="Liberation Mono"/>
+                <a:cs typeface="Liberation Mono"/>
+              </a:rPr>
+              <a:t> </a:t>
+            </a:r>
+            <a:r>
+              <a:rPr lang="it-IT" sz="1400" b="0" i="0" u="none" strike="noStrike" cap="none" spc="0" dirty="0" err="1">
+                <a:solidFill>
+                  <a:schemeClr val="tx1"/>
+                </a:solidFill>
+                <a:latin typeface="Liberation Mono"/>
+                <a:ea typeface="Liberation Mono"/>
+                <a:cs typeface="Liberation Mono"/>
+              </a:rPr>
+              <a:t>year</a:t>
+            </a:r>
+            <a:r>
+              <a:rPr lang="it-IT" sz="1400" b="0" i="0" u="none" strike="noStrike" cap="none" spc="0" dirty="0">
+                <a:solidFill>
+                  <a:schemeClr val="tx1"/>
+                </a:solidFill>
+                <a:latin typeface="Liberation Mono"/>
+                <a:ea typeface="Liberation Mono"/>
+                <a:cs typeface="Liberation Mono"/>
+              </a:rPr>
+              <a:t>) {</a:t>
+            </a:r>
+          </a:p>
+          <a:p>
+            <a:pPr>
+              <a:defRPr/>
+            </a:pPr>
+            <a:r>
+              <a:rPr lang="it-IT" sz="1400" b="0" i="0" u="none" strike="noStrike" cap="none" spc="0" dirty="0">
+                <a:solidFill>
+                  <a:schemeClr val="tx1"/>
+                </a:solidFill>
+                <a:latin typeface="Liberation Mono"/>
+                <a:ea typeface="Liberation Mono"/>
+                <a:cs typeface="Liberation Mono"/>
+              </a:rPr>
+              <a:t>        List&lt;</a:t>
+            </a:r>
+            <a:r>
+              <a:rPr lang="it-IT" sz="1400" b="0" i="0" u="none" strike="noStrike" cap="none" spc="0" dirty="0" err="1">
+                <a:solidFill>
+                  <a:schemeClr val="tx1"/>
+                </a:solidFill>
+                <a:latin typeface="Liberation Mono"/>
+                <a:ea typeface="Liberation Mono"/>
+                <a:cs typeface="Liberation Mono"/>
+              </a:rPr>
+              <a:t>VolunteerAvailableDate</a:t>
+            </a:r>
+            <a:r>
+              <a:rPr lang="it-IT" sz="1400" b="0" i="0" u="none" strike="noStrike" cap="none" spc="0" dirty="0">
+                <a:solidFill>
+                  <a:schemeClr val="tx1"/>
+                </a:solidFill>
+                <a:latin typeface="Liberation Mono"/>
+                <a:ea typeface="Liberation Mono"/>
+                <a:cs typeface="Liberation Mono"/>
+              </a:rPr>
+              <a:t>&gt; </a:t>
+            </a:r>
+            <a:r>
+              <a:rPr lang="it-IT" sz="1400" b="0" i="0" u="none" strike="noStrike" cap="none" spc="0" dirty="0" err="1">
+                <a:solidFill>
+                  <a:schemeClr val="tx1"/>
+                </a:solidFill>
+                <a:latin typeface="Liberation Mono"/>
+                <a:ea typeface="Liberation Mono"/>
+                <a:cs typeface="Liberation Mono"/>
+              </a:rPr>
+              <a:t>monthAvailabilities</a:t>
+            </a:r>
+            <a:r>
+              <a:rPr lang="it-IT" sz="1400" b="0" i="0" u="none" strike="noStrike" cap="none" spc="0" dirty="0">
+                <a:solidFill>
+                  <a:schemeClr val="tx1"/>
+                </a:solidFill>
+                <a:latin typeface="Liberation Mono"/>
+                <a:ea typeface="Liberation Mono"/>
+                <a:cs typeface="Liberation Mono"/>
+              </a:rPr>
+              <a:t> = new </a:t>
+            </a:r>
+            <a:r>
+              <a:rPr lang="it-IT" sz="1400" b="0" i="0" u="none" strike="noStrike" cap="none" spc="0" dirty="0" err="1">
+                <a:solidFill>
+                  <a:schemeClr val="tx1"/>
+                </a:solidFill>
+                <a:latin typeface="Liberation Mono"/>
+                <a:ea typeface="Liberation Mono"/>
+                <a:cs typeface="Liberation Mono"/>
+              </a:rPr>
+              <a:t>ArrayList</a:t>
+            </a:r>
+            <a:r>
+              <a:rPr lang="it-IT" sz="1400" b="0" i="0" u="none" strike="noStrike" cap="none" spc="0" dirty="0">
+                <a:solidFill>
+                  <a:schemeClr val="tx1"/>
+                </a:solidFill>
+                <a:latin typeface="Liberation Mono"/>
+                <a:ea typeface="Liberation Mono"/>
+                <a:cs typeface="Liberation Mono"/>
+              </a:rPr>
+              <a:t>&lt;&gt;();</a:t>
+            </a:r>
+            <a:endParaRPr sz="1400" b="0" i="0" u="none" strike="noStrike" cap="none" spc="0" dirty="0">
+              <a:solidFill>
+                <a:schemeClr val="tx1"/>
+              </a:solidFill>
+              <a:latin typeface="Liberation Mono"/>
+              <a:cs typeface="Liberation Mono"/>
+            </a:endParaRPr>
+          </a:p>
+          <a:p>
+            <a:pPr>
+              <a:defRPr/>
+            </a:pPr>
+            <a:r>
+              <a:rPr lang="it-IT" sz="1400" b="0" i="0" u="none" strike="noStrike" cap="none" spc="0" dirty="0">
+                <a:solidFill>
+                  <a:schemeClr val="tx1"/>
+                </a:solidFill>
+                <a:latin typeface="Liberation Mono"/>
+                <a:ea typeface="Liberation Mono"/>
+                <a:cs typeface="Liberation Mono"/>
+              </a:rPr>
+              <a:t>        for (User v : </a:t>
+            </a:r>
+            <a:r>
+              <a:rPr lang="it-IT" sz="1400" b="0" i="0" u="none" strike="noStrike" cap="none" spc="0" dirty="0" err="1">
+                <a:solidFill>
+                  <a:schemeClr val="tx1"/>
+                </a:solidFill>
+                <a:latin typeface="Liberation Mono"/>
+                <a:ea typeface="Liberation Mono"/>
+                <a:cs typeface="Liberation Mono"/>
+              </a:rPr>
+              <a:t>volunteers</a:t>
+            </a:r>
+            <a:r>
+              <a:rPr lang="it-IT" sz="1400" b="0" i="0" u="none" strike="noStrike" cap="none" spc="0" dirty="0">
+                <a:solidFill>
+                  <a:schemeClr val="tx1"/>
+                </a:solidFill>
+                <a:latin typeface="Liberation Mono"/>
+                <a:ea typeface="Liberation Mono"/>
+                <a:cs typeface="Liberation Mono"/>
+              </a:rPr>
+              <a:t>) {</a:t>
+            </a:r>
+            <a:endParaRPr sz="1400" b="0" i="0" u="none" strike="noStrike" cap="none" spc="0" dirty="0">
+              <a:solidFill>
+                <a:schemeClr val="tx1"/>
+              </a:solidFill>
+              <a:latin typeface="Liberation Mono"/>
+              <a:cs typeface="Liberation Mono"/>
+            </a:endParaRPr>
+          </a:p>
+          <a:p>
+            <a:pPr>
+              <a:defRPr/>
+            </a:pPr>
+            <a:r>
+              <a:rPr lang="it-IT" sz="1400" b="0" i="0" u="none" strike="noStrike" cap="none" spc="0" dirty="0">
+                <a:solidFill>
+                  <a:schemeClr val="tx1"/>
+                </a:solidFill>
+                <a:latin typeface="Liberation Mono"/>
+                <a:ea typeface="Liberation Mono"/>
+                <a:cs typeface="Liberation Mono"/>
+              </a:rPr>
+              <a:t>            // per ogni volontario recupera le sue </a:t>
+            </a:r>
+            <a:r>
+              <a:rPr lang="it-IT" sz="1400" b="0" i="0" u="none" strike="noStrike" cap="none" spc="0" dirty="0" err="1">
+                <a:solidFill>
+                  <a:schemeClr val="tx1"/>
+                </a:solidFill>
+                <a:latin typeface="Liberation Mono"/>
+                <a:ea typeface="Liberation Mono"/>
+                <a:cs typeface="Liberation Mono"/>
+              </a:rPr>
+              <a:t>disponibilitá</a:t>
+            </a:r>
+            <a:r>
+              <a:rPr lang="it-IT" sz="1400" b="0" i="0" u="none" strike="noStrike" cap="none" spc="0" dirty="0">
+                <a:solidFill>
+                  <a:schemeClr val="tx1"/>
+                </a:solidFill>
+                <a:latin typeface="Liberation Mono"/>
+                <a:ea typeface="Liberation Mono"/>
+                <a:cs typeface="Liberation Mono"/>
+              </a:rPr>
+              <a:t> e seleziona quelle del mese</a:t>
+            </a:r>
+            <a:endParaRPr sz="1400" b="0" i="0" u="none" strike="noStrike" cap="none" spc="0" dirty="0">
+              <a:solidFill>
+                <a:schemeClr val="tx1"/>
+              </a:solidFill>
+              <a:latin typeface="Liberation Mono"/>
+              <a:cs typeface="Liberation Mono"/>
+            </a:endParaRPr>
+          </a:p>
+          <a:p>
+            <a:pPr>
+              <a:defRPr/>
+            </a:pPr>
+            <a:r>
+              <a:rPr lang="it-IT" sz="1400" b="0" i="0" u="none" strike="noStrike" cap="none" spc="0" dirty="0">
                 <a:solidFill>
                   <a:schemeClr val="tx1"/>
                 </a:solidFill>
@@ -13147,79 +14180,181 @@
               </a:rPr>
               <a:t>            // selezionato</a:t>
             </a:r>
-            <a:endParaRPr sz="1400" b="0" i="0" u="none" strike="noStrike" cap="none" spc="0">
-              <a:solidFill>
-                <a:schemeClr val="tx1"/>
-              </a:solidFill>
-              <a:latin typeface="Liberation Mono"/>
-              <a:cs typeface="Liberation Mono"/>
-            </a:endParaRPr>
-          </a:p>
-          <a:p>
-            <a:pPr>
-              <a:defRPr/>
-            </a:pPr>
-            <a:r>
-              <a:rPr lang="it-IT" sz="1400" b="0" i="0" u="none" strike="noStrike" cap="none" spc="0">
-                <a:solidFill>
-                  <a:schemeClr val="tx1"/>
-                </a:solidFill>
-                <a:latin typeface="Liberation Mono"/>
-                <a:ea typeface="Liberation Mono"/>
-                <a:cs typeface="Liberation Mono"/>
-              </a:rPr>
-              <a:t>            List&lt;VolunteerAvailableDate&gt; volunteerAvailabilities = new ArrayList&lt;&gt;();</a:t>
-            </a:r>
-            <a:endParaRPr sz="1400" b="0" i="0" u="none" strike="noStrike" cap="none" spc="0">
-              <a:solidFill>
-                <a:schemeClr val="tx1"/>
-              </a:solidFill>
-              <a:latin typeface="Liberation Mono"/>
-              <a:cs typeface="Liberation Mono"/>
-            </a:endParaRPr>
-          </a:p>
-          <a:p>
-            <a:pPr>
-              <a:defRPr/>
-            </a:pPr>
-            <a:endParaRPr sz="1400" b="0" i="0" u="none" strike="noStrike" cap="none" spc="0">
-              <a:solidFill>
-                <a:schemeClr val="tx1"/>
-              </a:solidFill>
-              <a:latin typeface="Liberation Mono"/>
-              <a:cs typeface="Liberation Mono"/>
-            </a:endParaRPr>
-          </a:p>
-          <a:p>
-            <a:pPr>
-              <a:defRPr/>
-            </a:pPr>
-            <a:r>
-              <a:rPr lang="it-IT" sz="1400" b="0" i="0" u="none" strike="noStrike" cap="none" spc="0">
-                <a:solidFill>
-                  <a:schemeClr val="tx1"/>
-                </a:solidFill>
-                <a:latin typeface="Liberation Mono"/>
-                <a:ea typeface="Liberation Mono"/>
-                <a:cs typeface="Liberation Mono"/>
-              </a:rPr>
-              <a:t>            volunteerAvailabilityRepository.findByVolunteerId(v.getId())</a:t>
-            </a:r>
-            <a:endParaRPr lang="it-IT" sz="1400" b="0" i="0" u="none" strike="noStrike" cap="none" spc="0">
-              <a:solidFill>
-                <a:schemeClr val="tx1"/>
-              </a:solidFill>
-              <a:latin typeface="Liberation Mono"/>
-              <a:ea typeface="Liberation Mono"/>
-              <a:cs typeface="Liberation Mono"/>
-            </a:endParaRPr>
-          </a:p>
-          <a:p>
-            <a:pPr>
-              <a:defRPr/>
-            </a:pPr>
-            <a:r>
-              <a:rPr lang="en" sz="1400" b="0" i="0" u="none" strike="noStrike" cap="none" spc="0">
+            <a:endParaRPr sz="1400" b="0" i="0" u="none" strike="noStrike" cap="none" spc="0" dirty="0">
+              <a:solidFill>
+                <a:schemeClr val="tx1"/>
+              </a:solidFill>
+              <a:latin typeface="Liberation Mono"/>
+              <a:cs typeface="Liberation Mono"/>
+            </a:endParaRPr>
+          </a:p>
+          <a:p>
+            <a:pPr>
+              <a:defRPr/>
+            </a:pPr>
+            <a:r>
+              <a:rPr lang="it-IT" sz="1400" b="0" i="0" u="none" strike="noStrike" cap="none" spc="0" dirty="0">
+                <a:solidFill>
+                  <a:schemeClr val="tx1"/>
+                </a:solidFill>
+                <a:latin typeface="Liberation Mono"/>
+                <a:ea typeface="Liberation Mono"/>
+                <a:cs typeface="Liberation Mono"/>
+              </a:rPr>
+              <a:t>            List&lt;</a:t>
+            </a:r>
+            <a:r>
+              <a:rPr lang="it-IT" sz="1400" b="0" i="0" u="none" strike="noStrike" cap="none" spc="0" dirty="0" err="1">
+                <a:solidFill>
+                  <a:schemeClr val="tx1"/>
+                </a:solidFill>
+                <a:latin typeface="Liberation Mono"/>
+                <a:ea typeface="Liberation Mono"/>
+                <a:cs typeface="Liberation Mono"/>
+              </a:rPr>
+              <a:t>VolunteerAvailableDate</a:t>
+            </a:r>
+            <a:r>
+              <a:rPr lang="it-IT" sz="1400" b="0" i="0" u="none" strike="noStrike" cap="none" spc="0" dirty="0">
+                <a:solidFill>
+                  <a:schemeClr val="tx1"/>
+                </a:solidFill>
+                <a:latin typeface="Liberation Mono"/>
+                <a:ea typeface="Liberation Mono"/>
+                <a:cs typeface="Liberation Mono"/>
+              </a:rPr>
+              <a:t>&gt; </a:t>
+            </a:r>
+            <a:r>
+              <a:rPr lang="it-IT" sz="1400" b="0" i="0" u="none" strike="noStrike" cap="none" spc="0" dirty="0" err="1">
+                <a:solidFill>
+                  <a:schemeClr val="tx1"/>
+                </a:solidFill>
+                <a:latin typeface="Liberation Mono"/>
+                <a:ea typeface="Liberation Mono"/>
+                <a:cs typeface="Liberation Mono"/>
+              </a:rPr>
+              <a:t>volunteerAvailabilities</a:t>
+            </a:r>
+            <a:r>
+              <a:rPr lang="it-IT" sz="1400" b="0" i="0" u="none" strike="noStrike" cap="none" spc="0" dirty="0">
+                <a:solidFill>
+                  <a:schemeClr val="tx1"/>
+                </a:solidFill>
+                <a:latin typeface="Liberation Mono"/>
+                <a:ea typeface="Liberation Mono"/>
+                <a:cs typeface="Liberation Mono"/>
+              </a:rPr>
+              <a:t> = new </a:t>
+            </a:r>
+            <a:r>
+              <a:rPr lang="it-IT" sz="1400" b="0" i="0" u="none" strike="noStrike" cap="none" spc="0" dirty="0" err="1">
+                <a:solidFill>
+                  <a:schemeClr val="tx1"/>
+                </a:solidFill>
+                <a:latin typeface="Liberation Mono"/>
+                <a:ea typeface="Liberation Mono"/>
+                <a:cs typeface="Liberation Mono"/>
+              </a:rPr>
+              <a:t>ArrayList</a:t>
+            </a:r>
+            <a:r>
+              <a:rPr lang="it-IT" sz="1400" b="0" i="0" u="none" strike="noStrike" cap="none" spc="0" dirty="0">
+                <a:solidFill>
+                  <a:schemeClr val="tx1"/>
+                </a:solidFill>
+                <a:latin typeface="Liberation Mono"/>
+                <a:ea typeface="Liberation Mono"/>
+                <a:cs typeface="Liberation Mono"/>
+              </a:rPr>
+              <a:t>&lt;&gt;();</a:t>
+            </a:r>
+            <a:endParaRPr sz="1400" b="0" i="0" u="none" strike="noStrike" cap="none" spc="0" dirty="0">
+              <a:solidFill>
+                <a:schemeClr val="tx1"/>
+              </a:solidFill>
+              <a:latin typeface="Liberation Mono"/>
+              <a:cs typeface="Liberation Mono"/>
+            </a:endParaRPr>
+          </a:p>
+          <a:p>
+            <a:pPr>
+              <a:defRPr/>
+            </a:pPr>
+            <a:endParaRPr sz="1400" b="0" i="0" u="none" strike="noStrike" cap="none" spc="0" dirty="0">
+              <a:solidFill>
+                <a:schemeClr val="tx1"/>
+              </a:solidFill>
+              <a:latin typeface="Liberation Mono"/>
+              <a:cs typeface="Liberation Mono"/>
+            </a:endParaRPr>
+          </a:p>
+          <a:p>
+            <a:pPr>
+              <a:defRPr/>
+            </a:pPr>
+            <a:r>
+              <a:rPr lang="it-IT" sz="1400" b="0" i="0" u="none" strike="noStrike" cap="none" spc="0" dirty="0">
+                <a:solidFill>
+                  <a:schemeClr val="tx1"/>
+                </a:solidFill>
+                <a:latin typeface="Liberation Mono"/>
+                <a:ea typeface="Liberation Mono"/>
+                <a:cs typeface="Liberation Mono"/>
+              </a:rPr>
+              <a:t>            </a:t>
+            </a:r>
+            <a:r>
+              <a:rPr lang="it-IT" sz="1400" b="0" i="0" u="none" strike="noStrike" cap="none" spc="0" dirty="0" err="1">
+                <a:solidFill>
+                  <a:schemeClr val="tx1"/>
+                </a:solidFill>
+                <a:latin typeface="Liberation Mono"/>
+                <a:ea typeface="Liberation Mono"/>
+                <a:cs typeface="Liberation Mono"/>
+              </a:rPr>
+              <a:t>volunteerAvailabilityRepository.findByVolunteerId</a:t>
+            </a:r>
+            <a:r>
+              <a:rPr lang="it-IT" sz="1400" b="0" i="0" u="none" strike="noStrike" cap="none" spc="0" dirty="0">
+                <a:solidFill>
+                  <a:schemeClr val="tx1"/>
+                </a:solidFill>
+                <a:latin typeface="Liberation Mono"/>
+                <a:ea typeface="Liberation Mono"/>
+                <a:cs typeface="Liberation Mono"/>
+              </a:rPr>
+              <a:t>(</a:t>
+            </a:r>
+            <a:r>
+              <a:rPr lang="it-IT" sz="1400" b="0" i="0" u="none" strike="noStrike" cap="none" spc="0" dirty="0" err="1">
+                <a:solidFill>
+                  <a:schemeClr val="tx1"/>
+                </a:solidFill>
+                <a:latin typeface="Liberation Mono"/>
+                <a:ea typeface="Liberation Mono"/>
+                <a:cs typeface="Liberation Mono"/>
+              </a:rPr>
+              <a:t>v.getId</a:t>
+            </a:r>
+            <a:r>
+              <a:rPr lang="it-IT" sz="1400" b="0" i="0" u="none" strike="noStrike" cap="none" spc="0" dirty="0">
+                <a:solidFill>
+                  <a:schemeClr val="tx1"/>
+                </a:solidFill>
+                <a:latin typeface="Liberation Mono"/>
+                <a:ea typeface="Liberation Mono"/>
+                <a:cs typeface="Liberation Mono"/>
+              </a:rPr>
+              <a:t>())</a:t>
+            </a:r>
+          </a:p>
+          <a:p>
+            <a:pPr>
+              <a:defRPr/>
+            </a:pPr>
+            <a:r>
+              <a:rPr lang="en" sz="1400" b="0" i="0" u="none" strike="noStrike" cap="none" spc="0" dirty="0">
                 <a:solidFill>
                   <a:schemeClr val="tx1"/>
                 </a:solidFill>
@@ -13230,7 +14365,7 @@
               <a:t>                      </a:t>
             </a:r>
             <a:r>
-              <a:rPr lang="it-IT" sz="1400" b="0" i="0" u="none" strike="noStrike" cap="none" spc="0">
+              <a:rPr lang="it-IT" sz="1400" b="0" i="0" u="none" strike="noStrike" cap="none" spc="0" dirty="0">
                 <a:solidFill>
                   <a:schemeClr val="tx1"/>
                 </a:solidFill>
@@ -13240,21 +14375,13 @@
               </a:rPr>
               <a:t>.stream()</a:t>
             </a:r>
-            <a:endParaRPr lang="it-IT" sz="1400" b="0" i="0" u="none" strike="noStrike" cap="none" spc="0">
-              <a:solidFill>
-                <a:schemeClr val="tx1"/>
-              </a:solidFill>
-              <a:latin typeface="Liberation Mono"/>
-              <a:ea typeface="Liberation Mono"/>
-              <a:cs typeface="Liberation Mono"/>
-            </a:endParaRPr>
-          </a:p>
-          <a:p>
-            <a:pPr>
-              <a:defRPr/>
-            </a:pPr>
-            <a:r>
-              <a:rPr lang="en" sz="1400" b="0" i="0" u="none" strike="noStrike" cap="none" spc="0">
+          </a:p>
+          <a:p>
+            <a:pPr>
+              <a:defRPr/>
+            </a:pPr>
+            <a:r>
+              <a:rPr lang="en" sz="1400" b="0" i="0" u="none" strike="noStrike" cap="none" spc="0" dirty="0">
                 <a:solidFill>
                   <a:schemeClr val="tx1"/>
                 </a:solidFill>
@@ -13265,29 +14392,84 @@
               <a:t>                      </a:t>
             </a:r>
             <a:r>
-              <a:rPr lang="it-IT" sz="1400" b="0" i="0" u="none" strike="noStrike" cap="none" spc="0">
-                <a:solidFill>
-                  <a:schemeClr val="tx1"/>
-                </a:solidFill>
-                <a:latin typeface="Liberation Mono"/>
-                <a:ea typeface="Liberation Mono"/>
-                <a:cs typeface="Liberation Mono"/>
-              </a:rPr>
-              <a:t>.filter(</a:t>
-            </a:r>
-            <a:r>
-              <a:rPr lang="it-IT" sz="1400" b="0" i="0" u="none" strike="noStrike" cap="none" spc="0">
-                <a:solidFill>
-                  <a:schemeClr val="tx1"/>
-                </a:solidFill>
-                <a:latin typeface="Liberation Mono"/>
-                <a:ea typeface="Liberation Mono"/>
-                <a:cs typeface="Liberation Mono"/>
-              </a:rPr>
-              <a:t>va -&gt; va.getAvailableDate().getMonthValue() == month &amp;&amp;</a:t>
-            </a:r>
-            <a:r>
-              <a:rPr lang="en" sz="1400" b="0" i="0" u="none" strike="noStrike" cap="none" spc="0">
+              <a:rPr lang="it-IT" sz="1400" b="0" i="0" u="none" strike="noStrike" cap="none" spc="0" dirty="0">
+                <a:solidFill>
+                  <a:schemeClr val="tx1"/>
+                </a:solidFill>
+                <a:latin typeface="Liberation Mono"/>
+                <a:ea typeface="Liberation Mono"/>
+                <a:cs typeface="Liberation Mono"/>
+              </a:rPr>
+              <a:t>.filter(va -&gt; </a:t>
+            </a:r>
+            <a:r>
+              <a:rPr lang="it-IT" sz="1400" b="0" i="0" u="none" strike="noStrike" cap="none" spc="0" dirty="0" err="1">
+                <a:solidFill>
+                  <a:schemeClr val="tx1"/>
+                </a:solidFill>
+                <a:latin typeface="Liberation Mono"/>
+                <a:ea typeface="Liberation Mono"/>
+                <a:cs typeface="Liberation Mono"/>
+              </a:rPr>
+              <a:t>va.getAvailableDate</a:t>
+            </a:r>
+            <a:r>
+              <a:rPr lang="it-IT" sz="1400" b="0" i="0" u="none" strike="noStrike" cap="none" spc="0" dirty="0">
+                <a:solidFill>
+                  <a:schemeClr val="tx1"/>
+                </a:solidFill>
+                <a:latin typeface="Liberation Mono"/>
+                <a:ea typeface="Liberation Mono"/>
+                <a:cs typeface="Liberation Mono"/>
+              </a:rPr>
+              <a:t>().</a:t>
+            </a:r>
+            <a:r>
+              <a:rPr lang="it-IT" sz="1400" b="0" i="0" u="none" strike="noStrike" cap="none" spc="0" dirty="0" err="1">
+                <a:solidFill>
+                  <a:schemeClr val="tx1"/>
+                </a:solidFill>
+                <a:latin typeface="Liberation Mono"/>
+                <a:ea typeface="Liberation Mono"/>
+                <a:cs typeface="Liberation Mono"/>
+              </a:rPr>
+              <a:t>getMonthValue</a:t>
+            </a:r>
+            <a:r>
+              <a:rPr lang="it-IT" sz="1400" b="0" i="0" u="none" strike="noStrike" cap="none" spc="0" dirty="0">
+                <a:solidFill>
+                  <a:schemeClr val="tx1"/>
+                </a:solidFill>
+                <a:latin typeface="Liberation Mono"/>
+                <a:ea typeface="Liberation Mono"/>
+                <a:cs typeface="Liberation Mono"/>
+              </a:rPr>
+              <a:t>() == </a:t>
+            </a:r>
+            <a:r>
+              <a:rPr lang="it-IT" sz="1400" b="0" i="0" u="none" strike="noStrike" cap="none" spc="0" dirty="0" err="1">
+                <a:solidFill>
+                  <a:schemeClr val="tx1"/>
+                </a:solidFill>
+                <a:latin typeface="Liberation Mono"/>
+                <a:ea typeface="Liberation Mono"/>
+                <a:cs typeface="Liberation Mono"/>
+              </a:rPr>
+              <a:t>month</a:t>
+            </a:r>
+            <a:r>
+              <a:rPr lang="it-IT" sz="1400" b="0" i="0" u="none" strike="noStrike" cap="none" spc="0" dirty="0">
+                <a:solidFill>
+                  <a:schemeClr val="tx1"/>
+                </a:solidFill>
+                <a:latin typeface="Liberation Mono"/>
+                <a:ea typeface="Liberation Mono"/>
+                <a:cs typeface="Liberation Mono"/>
+              </a:rPr>
+              <a:t> &amp;&amp;</a:t>
+            </a:r>
+            <a:r>
+              <a:rPr lang="en" sz="1400" b="0" i="0" u="none" strike="noStrike" cap="none" spc="0" dirty="0">
                 <a:solidFill>
                   <a:schemeClr val="tx1"/>
                 </a:solidFill>
@@ -13298,7 +14480,7 @@
               <a:t> </a:t>
             </a:r>
             <a:r>
-              <a:rPr lang="it-IT" sz="1400" b="0" i="0" u="none" strike="noStrike" cap="none" spc="0">
+              <a:rPr lang="it-IT" sz="1400" b="0" i="0" u="none" strike="noStrike" cap="none" spc="0" dirty="0">
                 <a:solidFill>
                   <a:schemeClr val="tx1"/>
                 </a:solidFill>
@@ -13309,7 +14491,7 @@
               <a:t>							</a:t>
             </a:r>
             <a:r>
-              <a:rPr lang="en" sz="1400" b="0" i="0" u="none" strike="noStrike" cap="none" spc="0">
+              <a:rPr lang="en" sz="1400" b="0" i="0" u="none" strike="noStrike" cap="none" spc="0" dirty="0">
                 <a:solidFill>
                   <a:schemeClr val="tx1"/>
                 </a:solidFill>
@@ -13320,54 +14502,167 @@
               <a:t>  </a:t>
             </a:r>
             <a:r>
-              <a:rPr lang="it-IT" sz="1400" b="0" i="0" u="none" strike="noStrike" cap="none" spc="0">
-                <a:solidFill>
-                  <a:schemeClr val="tx1"/>
-                </a:solidFill>
-                <a:latin typeface="Liberation Mono"/>
-                <a:ea typeface="Liberation Mono"/>
-                <a:cs typeface="Liberation Mono"/>
-              </a:rPr>
-              <a:t>va.getAvailableDate().getYear() == year)</a:t>
-            </a:r>
-            <a:endParaRPr lang="it-IT" sz="1400" b="0" i="0" u="none" strike="noStrike" cap="none" spc="0">
-              <a:solidFill>
-                <a:schemeClr val="tx1"/>
-              </a:solidFill>
-              <a:latin typeface="Liberation Mono"/>
-              <a:ea typeface="Liberation Mono"/>
-              <a:cs typeface="Liberation Mono"/>
-            </a:endParaRPr>
-          </a:p>
-          <a:p>
-            <a:pPr>
-              <a:defRPr/>
-            </a:pPr>
-            <a:r>
-              <a:rPr lang="it-IT" sz="1400" b="0" i="0" u="none" strike="noStrike" cap="none" spc="0">
-                <a:solidFill>
-                  <a:schemeClr val="tx1"/>
-                </a:solidFill>
-                <a:latin typeface="Liberation Mono"/>
-                <a:ea typeface="Liberation Mono"/>
-                <a:cs typeface="Liberation Mono"/>
-              </a:rPr>
-              <a:t>                    .forEach(volunteerAvailabilities::add);</a:t>
-            </a:r>
-            <a:endParaRPr/>
-          </a:p>
-        </p:txBody>
-      </p:sp>
-      <p:sp>
-        <p:nvSpPr>
-          <p:cNvPr id="69616992" name=""/>
+              <a:rPr lang="it-IT" sz="1400" b="0" i="0" u="none" strike="noStrike" cap="none" spc="0" dirty="0" err="1">
+                <a:solidFill>
+                  <a:schemeClr val="tx1"/>
+                </a:solidFill>
+                <a:latin typeface="Liberation Mono"/>
+                <a:ea typeface="Liberation Mono"/>
+                <a:cs typeface="Liberation Mono"/>
+              </a:rPr>
+              <a:t>va.getAvailableDate</a:t>
+            </a:r>
+            <a:r>
+              <a:rPr lang="it-IT" sz="1400" b="0" i="0" u="none" strike="noStrike" cap="none" spc="0" dirty="0">
+                <a:solidFill>
+                  <a:schemeClr val="tx1"/>
+                </a:solidFill>
+                <a:latin typeface="Liberation Mono"/>
+                <a:ea typeface="Liberation Mono"/>
+                <a:cs typeface="Liberation Mono"/>
+              </a:rPr>
+              <a:t>().</a:t>
+            </a:r>
+            <a:r>
+              <a:rPr lang="it-IT" sz="1400" b="0" i="0" u="none" strike="noStrike" cap="none" spc="0" dirty="0" err="1">
+                <a:solidFill>
+                  <a:schemeClr val="tx1"/>
+                </a:solidFill>
+                <a:latin typeface="Liberation Mono"/>
+                <a:ea typeface="Liberation Mono"/>
+                <a:cs typeface="Liberation Mono"/>
+              </a:rPr>
+              <a:t>getYear</a:t>
+            </a:r>
+            <a:r>
+              <a:rPr lang="it-IT" sz="1400" b="0" i="0" u="none" strike="noStrike" cap="none" spc="0" dirty="0">
+                <a:solidFill>
+                  <a:schemeClr val="tx1"/>
+                </a:solidFill>
+                <a:latin typeface="Liberation Mono"/>
+                <a:ea typeface="Liberation Mono"/>
+                <a:cs typeface="Liberation Mono"/>
+              </a:rPr>
+              <a:t>() == </a:t>
+            </a:r>
+            <a:r>
+              <a:rPr lang="it-IT" sz="1400" b="0" i="0" u="none" strike="noStrike" cap="none" spc="0" dirty="0" err="1">
+                <a:solidFill>
+                  <a:schemeClr val="tx1"/>
+                </a:solidFill>
+                <a:latin typeface="Liberation Mono"/>
+                <a:ea typeface="Liberation Mono"/>
+                <a:cs typeface="Liberation Mono"/>
+              </a:rPr>
+              <a:t>year</a:t>
+            </a:r>
+            <a:r>
+              <a:rPr lang="it-IT" sz="1400" b="0" i="0" u="none" strike="noStrike" cap="none" spc="0" dirty="0">
+                <a:solidFill>
+                  <a:schemeClr val="tx1"/>
+                </a:solidFill>
+                <a:latin typeface="Liberation Mono"/>
+                <a:ea typeface="Liberation Mono"/>
+                <a:cs typeface="Liberation Mono"/>
+              </a:rPr>
+              <a:t>)</a:t>
+            </a:r>
+          </a:p>
+          <a:p>
+            <a:pPr>
+              <a:defRPr/>
+            </a:pPr>
+            <a:r>
+              <a:rPr lang="it-IT" sz="1400" b="0" i="0" u="none" strike="noStrike" cap="none" spc="0" dirty="0">
+                <a:solidFill>
+                  <a:schemeClr val="tx1"/>
+                </a:solidFill>
+                <a:latin typeface="Liberation Mono"/>
+                <a:ea typeface="Liberation Mono"/>
+                <a:cs typeface="Liberation Mono"/>
+              </a:rPr>
+              <a:t>                    .</a:t>
+            </a:r>
+            <a:r>
+              <a:rPr lang="it-IT" sz="1400" b="0" i="0" u="none" strike="noStrike" cap="none" spc="0" dirty="0" err="1">
+                <a:solidFill>
+                  <a:schemeClr val="tx1"/>
+                </a:solidFill>
+                <a:latin typeface="Liberation Mono"/>
+                <a:ea typeface="Liberation Mono"/>
+                <a:cs typeface="Liberation Mono"/>
+              </a:rPr>
+              <a:t>forEach</a:t>
+            </a:r>
+            <a:r>
+              <a:rPr lang="it-IT" sz="1400" b="0" i="0" u="none" strike="noStrike" cap="none" spc="0" dirty="0">
+                <a:solidFill>
+                  <a:schemeClr val="tx1"/>
+                </a:solidFill>
+                <a:latin typeface="Liberation Mono"/>
+                <a:ea typeface="Liberation Mono"/>
+                <a:cs typeface="Liberation Mono"/>
+              </a:rPr>
+              <a:t>(</a:t>
+            </a:r>
+            <a:r>
+              <a:rPr lang="it-IT" sz="1400" b="0" i="0" u="none" strike="noStrike" cap="none" spc="0" dirty="0" err="1">
+                <a:solidFill>
+                  <a:schemeClr val="tx1"/>
+                </a:solidFill>
+                <a:latin typeface="Liberation Mono"/>
+                <a:ea typeface="Liberation Mono"/>
+                <a:cs typeface="Liberation Mono"/>
+              </a:rPr>
+              <a:t>volunteerAvailabilities</a:t>
+            </a:r>
+            <a:r>
+              <a:rPr lang="it-IT" sz="1400" b="0" i="0" u="none" strike="noStrike" cap="none" spc="0" dirty="0">
+                <a:solidFill>
+                  <a:schemeClr val="tx1"/>
+                </a:solidFill>
+                <a:latin typeface="Liberation Mono"/>
+                <a:ea typeface="Liberation Mono"/>
+                <a:cs typeface="Liberation Mono"/>
+              </a:rPr>
+              <a:t>::</a:t>
+            </a:r>
+            <a:r>
+              <a:rPr lang="it-IT" sz="1400" b="0" i="0" u="none" strike="noStrike" cap="none" spc="0" dirty="0" err="1">
+                <a:solidFill>
+                  <a:schemeClr val="tx1"/>
+                </a:solidFill>
+                <a:latin typeface="Liberation Mono"/>
+                <a:ea typeface="Liberation Mono"/>
+                <a:cs typeface="Liberation Mono"/>
+              </a:rPr>
+              <a:t>add</a:t>
+            </a:r>
+            <a:r>
+              <a:rPr lang="it-IT" sz="1400" b="0" i="0" u="none" strike="noStrike" cap="none" spc="0" dirty="0">
+                <a:solidFill>
+                  <a:schemeClr val="tx1"/>
+                </a:solidFill>
+                <a:latin typeface="Liberation Mono"/>
+                <a:ea typeface="Liberation Mono"/>
+                <a:cs typeface="Liberation Mono"/>
+              </a:rPr>
+              <a:t>);</a:t>
+            </a:r>
+            <a:endParaRPr dirty="0"/>
+          </a:p>
+        </p:txBody>
+      </p:sp>
+      <p:sp>
+        <p:nvSpPr>
+          <p:cNvPr id="69616992" name="CasellaDiTesto 69616991"/>
           <p:cNvSpPr txBox="1"/>
           <p:nvPr/>
         </p:nvSpPr>
         <p:spPr bwMode="auto">
-          <a:xfrm rot="0" flipH="0" flipV="0">
-            <a:off x="401998" y="4862925"/>
-            <a:ext cx="11855593" cy="1189079"/>
+          <a:xfrm>
+            <a:off x="351446" y="4751092"/>
+            <a:ext cx="11855593" cy="1154162"/>
           </a:xfrm>
           <a:prstGeom prst="rect">
             <a:avLst/>
@@ -13375,47 +14670,39 @@
           <a:noFill/>
         </p:spPr>
         <p:txBody>
-          <a:bodyPr vertOverflow="overflow" horzOverflow="overflow" vert="horz" wrap="square" lIns="91440" tIns="45720" rIns="91440" bIns="45720" numCol="1" spcCol="0" rtlCol="0" fromWordArt="0" anchor="t" anchorCtr="0" forceAA="0" upright="0" compatLnSpc="0">
+          <a:bodyPr vertOverflow="overflow" horzOverflow="overflow" vert="horz" wrap="square" lIns="91440" tIns="45720" rIns="91440" bIns="45720" numCol="1" spcCol="0" rtlCol="0" fromWordArt="0" anchor="t" anchorCtr="0" forceAA="0" compatLnSpc="0">
             <a:spAutoFit/>
           </a:bodyPr>
-          <a:p>
-            <a:pPr>
-              <a:defRPr/>
-            </a:pPr>
-            <a:r>
-              <a:rPr lang="en"/>
-              <a:t>Nella classe VisitPlanService il metodo initMonthAvailabilities chiamava delle repository per selezionare alcuni oggetti Entity.</a:t>
-            </a:r>
-            <a:endParaRPr lang="en"/>
-          </a:p>
-          <a:p>
-            <a:pPr>
-              <a:defRPr/>
-            </a:pPr>
-            <a:r>
-              <a:rPr lang="en"/>
-              <a:t>Si é deciso di spostare questo compito alla classe  </a:t>
-            </a:r>
-            <a:r>
-              <a:rPr lang="en"/>
-              <a:t>jpaVolunteerRepositoryAdapter visto che </a:t>
-            </a:r>
-            <a:r>
-              <a:rPr lang="en"/>
-              <a:t>fornisce giá funzioni di base per la lettura/scrittura dati da DB tramite oggetti Entity</a:t>
-            </a:r>
-            <a:endParaRPr/>
-          </a:p>
-        </p:txBody>
-      </p:sp>
-      <p:sp>
-        <p:nvSpPr>
-          <p:cNvPr id="1746594648" name=""/>
+          <a:lstStyle/>
+          <a:p>
+            <a:pPr>
+              <a:defRPr/>
+            </a:pPr>
+            <a:r>
+              <a:rPr lang="en" dirty="0"/>
+              <a:t>Nella classe VisitPlanService il metodo initMonthAvailabilities chiamava diverse repository per selezionare più dati, che andava poi a gestire e associare per recuperare informazioni su dati del database.</a:t>
+            </a:r>
+          </a:p>
+          <a:p>
+            <a:pPr>
+              <a:defRPr/>
+            </a:pPr>
+            <a:r>
+              <a:rPr lang="en" dirty="0"/>
+              <a:t>Si é deciso di spostare questo compito alla classe jpaVolunteerRepositoryAdapter visto che fornisce giá funzioni di base per la lettura/scrittura dati da DB.</a:t>
+            </a:r>
+            <a:endParaRPr dirty="0"/>
+          </a:p>
+        </p:txBody>
+      </p:sp>
+      <p:sp>
+        <p:nvSpPr>
+          <p:cNvPr id="1746594648" name="CasellaDiTesto 1746594647"/>
           <p:cNvSpPr txBox="1"/>
           <p:nvPr/>
         </p:nvSpPr>
         <p:spPr bwMode="auto">
-          <a:xfrm rot="0" flipH="0" flipV="0">
+          <a:xfrm>
             <a:off x="9869850" y="948644"/>
             <a:ext cx="1994879" cy="640440"/>
           </a:xfrm>
@@ -13425,9 +14712,10 @@
           <a:noFill/>
         </p:spPr>
         <p:txBody>
-          <a:bodyPr vertOverflow="overflow" horzOverflow="overflow" vert="horz" wrap="square" lIns="91440" tIns="45720" rIns="91440" bIns="45720" numCol="1" spcCol="0" rtlCol="0" fromWordArt="0" anchor="ctr" anchorCtr="0" forceAA="0" upright="0" compatLnSpc="0">
+          <a:bodyPr vertOverflow="overflow" horzOverflow="overflow" vert="horz" wrap="square" lIns="91440" tIns="45720" rIns="91440" bIns="45720" numCol="1" spcCol="0" rtlCol="0" fromWordArt="0" anchor="ctr" anchorCtr="0" forceAA="0" compatLnSpc="0">
             <a:spAutoFit/>
           </a:bodyPr>
+          <a:lstStyle/>
           <a:p>
             <a:pPr algn="ctr">
               <a:defRPr/>
@@ -13467,20 +14755,12 @@
   <p:clrMapOvr>
     <a:masterClrMapping/>
   </p:clrMapOvr>
-  <mc:AlternateContent xmlns:mc="http://schemas.openxmlformats.org/markup-compatibility/2006">
-    <mc:Choice xmlns:p159="http://schemas.microsoft.com/office/powerpoint/2015/09/main" xmlns:p14="http://schemas.microsoft.com/office/powerpoint/2010/main" Requires="p159">
-      <p:transition p14:dur="2000" advClick="1"/>
-    </mc:Choice>
-    <mc:Fallback>
-      <p:transition advClick="1"/>
-    </mc:Fallback>
-  </mc:AlternateContent>
 </p:sld>
 </file>
 
 <file path=ppt/slides/slide7.xml><?xml version="1.0" encoding="utf-8"?>
-<p:sld xmlns:a="http://schemas.openxmlformats.org/drawingml/2006/main" xmlns:r="http://schemas.openxmlformats.org/officeDocument/2006/relationships" xmlns:p="http://schemas.openxmlformats.org/presentationml/2006/main" xmlns:m="http://schemas.openxmlformats.org/officeDocument/2006/math" xmlns:w="http://schemas.openxmlformats.org/wordprocessingml/2006/main" xmlns:mc="http://schemas.openxmlformats.org/markup-compatibility/2006" showMasterPhAnim="0" showMasterSp="1" show="1">
-  <p:cSld name="">
+<p:sld xmlns:a="http://schemas.openxmlformats.org/drawingml/2006/main" xmlns:r="http://schemas.openxmlformats.org/officeDocument/2006/relationships" xmlns:p="http://schemas.openxmlformats.org/presentationml/2006/main" showMasterPhAnim="0">
+  <p:cSld>
     <p:spTree>
       <p:nvGrpSpPr>
         <p:cNvPr id="1" name=""/>
@@ -13541,12 +14821,12 @@
       </p:sp>
       <p:sp>
         <p:nvSpPr>
-          <p:cNvPr id="847448281" name=""/>
+          <p:cNvPr id="847448281" name="CasellaDiTesto 847448280"/>
           <p:cNvSpPr txBox="1"/>
           <p:nvPr/>
         </p:nvSpPr>
         <p:spPr bwMode="auto">
-          <a:xfrm rot="0" flipH="0" flipV="0">
+          <a:xfrm>
             <a:off x="351446" y="2981850"/>
             <a:ext cx="11782816" cy="1861881"/>
           </a:xfrm>
@@ -13568,15 +14848,16 @@
           </a:ln>
         </p:spPr>
         <p:txBody>
-          <a:bodyPr vertOverflow="overflow" horzOverflow="overflow" vert="horz" wrap="square" lIns="91440" tIns="45720" rIns="91440" bIns="45720" numCol="1" spcCol="0" rtlCol="0" fromWordArt="0" anchor="t" anchorCtr="0" forceAA="0" upright="0" compatLnSpc="0">
+          <a:bodyPr vertOverflow="overflow" horzOverflow="overflow" vert="horz" wrap="square" lIns="91440" tIns="45720" rIns="91440" bIns="45720" numCol="1" spcCol="0" rtlCol="0" fromWordArt="0" anchor="t" anchorCtr="0" forceAA="0" compatLnSpc="0">
             <a:spAutoFit/>
           </a:bodyPr>
-          <a:p>
-            <a:pPr>
-              <a:defRPr/>
-            </a:pPr>
-            <a:r>
-              <a:rPr lang="en" sz="1400" b="0" i="0" u="none" strike="noStrike" cap="none" spc="0">
+          <a:lstStyle/>
+          <a:p>
+            <a:pPr>
+              <a:defRPr/>
+            </a:pPr>
+            <a:r>
+              <a:rPr lang="en" sz="1400" b="0" i="0" u="none" strike="noStrike" cap="none" spc="0" dirty="0">
                 <a:solidFill>
                   <a:schemeClr val="tx1"/>
                 </a:solidFill>
@@ -13586,67 +14867,191 @@
               </a:rPr>
               <a:t>// adapters.jpa.adapter.jpaVolunteerAvailableDateRepositoryAdapter</a:t>
             </a:r>
-            <a:endParaRPr sz="1400" b="0" i="0" u="none" strike="noStrike" cap="none" spc="0">
-              <a:solidFill>
-                <a:schemeClr val="tx1"/>
-              </a:solidFill>
-              <a:latin typeface="Liberation Mono"/>
-              <a:cs typeface="Liberation Mono"/>
-            </a:endParaRPr>
-          </a:p>
-          <a:p>
-            <a:pPr>
-              <a:defRPr/>
-            </a:pPr>
-            <a:r>
-              <a:rPr lang="it-IT" sz="1400" b="0" i="0" u="none" strike="noStrike" cap="none" spc="0">
-                <a:solidFill>
-                  <a:schemeClr val="tx1"/>
-                </a:solidFill>
-                <a:latin typeface="Liberation Mono"/>
-                <a:ea typeface="Liberation Mono"/>
-                <a:cs typeface="Liberation Mono"/>
-              </a:rPr>
-              <a:t>public List&lt;VolunteerAvailableDate&gt; findByYearMonth(YearMonth yearMonth) {</a:t>
-            </a:r>
-            <a:endParaRPr lang="it-IT" sz="1400" b="0" i="0" u="none" strike="noStrike" cap="none" spc="0">
-              <a:solidFill>
-                <a:schemeClr val="tx1"/>
-              </a:solidFill>
-              <a:latin typeface="Liberation Mono"/>
-              <a:ea typeface="Liberation Mono"/>
-              <a:cs typeface="Liberation Mono"/>
-            </a:endParaRPr>
-          </a:p>
-          <a:p>
-            <a:pPr>
-              <a:defRPr/>
-            </a:pPr>
-            <a:r>
-              <a:rPr lang="it-IT" sz="1400" b="0" i="0" u="none" strike="noStrike" cap="none" spc="0">
-                <a:solidFill>
-                  <a:schemeClr val="tx1"/>
-                </a:solidFill>
-                <a:latin typeface="Liberation Mono"/>
-                <a:ea typeface="Liberation Mono"/>
-                <a:cs typeface="Liberation Mono"/>
-              </a:rPr>
-              <a:t>        return repository.findAll()</a:t>
-            </a:r>
-            <a:endParaRPr sz="1400" b="0" i="0" u="none" strike="noStrike" cap="none" spc="0">
-              <a:solidFill>
-                <a:schemeClr val="tx1"/>
-              </a:solidFill>
-              <a:latin typeface="Liberation Mono"/>
-              <a:cs typeface="Liberation Mono"/>
-            </a:endParaRPr>
-          </a:p>
-          <a:p>
-            <a:pPr>
-              <a:defRPr/>
-            </a:pPr>
-            <a:r>
-              <a:rPr lang="it-IT" sz="1400" b="0" i="0" u="none" strike="noStrike" cap="none" spc="0">
+            <a:endParaRPr sz="1400" b="0" i="0" u="none" strike="noStrike" cap="none" spc="0" dirty="0">
+              <a:solidFill>
+                <a:schemeClr val="tx1"/>
+              </a:solidFill>
+              <a:latin typeface="Liberation Mono"/>
+              <a:cs typeface="Liberation Mono"/>
+            </a:endParaRPr>
+          </a:p>
+          <a:p>
+            <a:pPr>
+              <a:defRPr/>
+            </a:pPr>
+            <a:r>
+              <a:rPr lang="it-IT" sz="1400" b="0" i="0" u="none" strike="noStrike" cap="none" spc="0" dirty="0">
+                <a:solidFill>
+                  <a:schemeClr val="tx1"/>
+                </a:solidFill>
+                <a:latin typeface="Liberation Mono"/>
+                <a:ea typeface="Liberation Mono"/>
+                <a:cs typeface="Liberation Mono"/>
+              </a:rPr>
+              <a:t>public List&lt;</a:t>
+            </a:r>
+            <a:r>
+              <a:rPr lang="it-IT" sz="1400" b="0" i="0" u="none" strike="noStrike" cap="none" spc="0" dirty="0" err="1">
+                <a:solidFill>
+                  <a:schemeClr val="tx1"/>
+                </a:solidFill>
+                <a:latin typeface="Liberation Mono"/>
+                <a:ea typeface="Liberation Mono"/>
+                <a:cs typeface="Liberation Mono"/>
+              </a:rPr>
+              <a:t>VolunteerAvailableDate</a:t>
+            </a:r>
+            <a:r>
+              <a:rPr lang="it-IT" sz="1400" b="0" i="0" u="none" strike="noStrike" cap="none" spc="0" dirty="0">
+                <a:solidFill>
+                  <a:schemeClr val="tx1"/>
+                </a:solidFill>
+                <a:latin typeface="Liberation Mono"/>
+                <a:ea typeface="Liberation Mono"/>
+                <a:cs typeface="Liberation Mono"/>
+              </a:rPr>
+              <a:t>&gt; </a:t>
+            </a:r>
+            <a:r>
+              <a:rPr lang="it-IT" sz="1400" b="0" i="0" u="none" strike="noStrike" cap="none" spc="0" dirty="0" err="1">
+                <a:solidFill>
+                  <a:schemeClr val="tx1"/>
+                </a:solidFill>
+                <a:latin typeface="Liberation Mono"/>
+                <a:ea typeface="Liberation Mono"/>
+                <a:cs typeface="Liberation Mono"/>
+              </a:rPr>
+              <a:t>findByYearMonth</a:t>
+            </a:r>
+            <a:r>
+              <a:rPr lang="it-IT" sz="1400" b="0" i="0" u="none" strike="noStrike" cap="none" spc="0" dirty="0">
+                <a:solidFill>
+                  <a:schemeClr val="tx1"/>
+                </a:solidFill>
+                <a:latin typeface="Liberation Mono"/>
+                <a:ea typeface="Liberation Mono"/>
+                <a:cs typeface="Liberation Mono"/>
+              </a:rPr>
+              <a:t>(</a:t>
+            </a:r>
+            <a:r>
+              <a:rPr lang="it-IT" sz="1400" b="0" i="0" u="none" strike="noStrike" cap="none" spc="0" dirty="0" err="1">
+                <a:solidFill>
+                  <a:schemeClr val="tx1"/>
+                </a:solidFill>
+                <a:latin typeface="Liberation Mono"/>
+                <a:ea typeface="Liberation Mono"/>
+                <a:cs typeface="Liberation Mono"/>
+              </a:rPr>
+              <a:t>YearMonth</a:t>
+            </a:r>
+            <a:r>
+              <a:rPr lang="it-IT" sz="1400" b="0" i="0" u="none" strike="noStrike" cap="none" spc="0" dirty="0">
+                <a:solidFill>
+                  <a:schemeClr val="tx1"/>
+                </a:solidFill>
+                <a:latin typeface="Liberation Mono"/>
+                <a:ea typeface="Liberation Mono"/>
+                <a:cs typeface="Liberation Mono"/>
+              </a:rPr>
+              <a:t> </a:t>
+            </a:r>
+            <a:r>
+              <a:rPr lang="it-IT" sz="1400" b="0" i="0" u="none" strike="noStrike" cap="none" spc="0" dirty="0" err="1">
+                <a:solidFill>
+                  <a:schemeClr val="tx1"/>
+                </a:solidFill>
+                <a:latin typeface="Liberation Mono"/>
+                <a:ea typeface="Liberation Mono"/>
+                <a:cs typeface="Liberation Mono"/>
+              </a:rPr>
+              <a:t>yearMonth</a:t>
+            </a:r>
+            <a:r>
+              <a:rPr lang="it-IT" sz="1400" b="0" i="0" u="none" strike="noStrike" cap="none" spc="0" dirty="0">
+                <a:solidFill>
+                  <a:schemeClr val="tx1"/>
+                </a:solidFill>
+                <a:latin typeface="Liberation Mono"/>
+                <a:ea typeface="Liberation Mono"/>
+                <a:cs typeface="Liberation Mono"/>
+              </a:rPr>
+              <a:t>) {</a:t>
+            </a:r>
+          </a:p>
+          <a:p>
+            <a:pPr>
+              <a:defRPr/>
+            </a:pPr>
+            <a:r>
+              <a:rPr lang="it-IT" sz="1400" b="0" i="0" u="none" strike="noStrike" cap="none" spc="0" dirty="0">
+                <a:solidFill>
+                  <a:schemeClr val="tx1"/>
+                </a:solidFill>
+                <a:latin typeface="Liberation Mono"/>
+                <a:ea typeface="Liberation Mono"/>
+                <a:cs typeface="Liberation Mono"/>
+              </a:rPr>
+              <a:t>        </a:t>
+            </a:r>
+            <a:r>
+              <a:rPr lang="it-IT" sz="1400" b="0" i="0" u="none" strike="noStrike" cap="none" spc="0" dirty="0" err="1">
+                <a:solidFill>
+                  <a:schemeClr val="tx1"/>
+                </a:solidFill>
+                <a:latin typeface="Liberation Mono"/>
+                <a:ea typeface="Liberation Mono"/>
+                <a:cs typeface="Liberation Mono"/>
+              </a:rPr>
+              <a:t>return</a:t>
+            </a:r>
+            <a:r>
+              <a:rPr lang="it-IT" sz="1400" b="0" i="0" u="none" strike="noStrike" cap="none" spc="0" dirty="0">
+                <a:solidFill>
+                  <a:schemeClr val="tx1"/>
+                </a:solidFill>
+                <a:latin typeface="Liberation Mono"/>
+                <a:ea typeface="Liberation Mono"/>
+                <a:cs typeface="Liberation Mono"/>
+              </a:rPr>
+              <a:t> </a:t>
+            </a:r>
+            <a:r>
+              <a:rPr lang="it-IT" sz="1400" b="0" i="0" u="none" strike="noStrike" cap="none" spc="0" dirty="0" err="1">
+                <a:solidFill>
+                  <a:schemeClr val="tx1"/>
+                </a:solidFill>
+                <a:latin typeface="Liberation Mono"/>
+                <a:ea typeface="Liberation Mono"/>
+                <a:cs typeface="Liberation Mono"/>
+              </a:rPr>
+              <a:t>repository.findAll</a:t>
+            </a:r>
+            <a:r>
+              <a:rPr lang="it-IT" sz="1400" b="0" i="0" u="none" strike="noStrike" cap="none" spc="0" dirty="0">
+                <a:solidFill>
+                  <a:schemeClr val="tx1"/>
+                </a:solidFill>
+                <a:latin typeface="Liberation Mono"/>
+                <a:ea typeface="Liberation Mono"/>
+                <a:cs typeface="Liberation Mono"/>
+              </a:rPr>
+              <a:t>()</a:t>
+            </a:r>
+            <a:endParaRPr sz="1400" b="0" i="0" u="none" strike="noStrike" cap="none" spc="0" dirty="0">
+              <a:solidFill>
+                <a:schemeClr val="tx1"/>
+              </a:solidFill>
+              <a:latin typeface="Liberation Mono"/>
+              <a:cs typeface="Liberation Mono"/>
+            </a:endParaRPr>
+          </a:p>
+          <a:p>
+            <a:pPr>
+              <a:defRPr/>
+            </a:pPr>
+            <a:r>
+              <a:rPr lang="it-IT" sz="1400" b="0" i="0" u="none" strike="noStrike" cap="none" spc="0" dirty="0">
                 <a:solidFill>
                   <a:schemeClr val="tx1"/>
                 </a:solidFill>
@@ -13656,89 +15061,309 @@
               </a:rPr>
               <a:t>               .stream()</a:t>
             </a:r>
-            <a:endParaRPr sz="1400" b="0" i="0" u="none" strike="noStrike" cap="none" spc="0">
-              <a:solidFill>
-                <a:schemeClr val="tx1"/>
-              </a:solidFill>
-              <a:latin typeface="Liberation Mono"/>
-              <a:cs typeface="Liberation Mono"/>
-            </a:endParaRPr>
-          </a:p>
-          <a:p>
-            <a:pPr>
-              <a:defRPr/>
-            </a:pPr>
-            <a:r>
-              <a:rPr lang="it-IT" sz="1400" b="0" i="0" u="none" strike="noStrike" cap="none" spc="0">
-                <a:solidFill>
-                  <a:schemeClr val="tx1"/>
-                </a:solidFill>
-                <a:latin typeface="Liberation Mono"/>
-                <a:ea typeface="Liberation Mono"/>
-                <a:cs typeface="Liberation Mono"/>
-              </a:rPr>
-              <a:t>               .filter(entity -&gt; entity.getId().getAvailableDate().getMonth() == yearMonth.getMonth())</a:t>
-            </a:r>
-            <a:endParaRPr sz="1400" b="0" i="0" u="none" strike="noStrike" cap="none" spc="0">
-              <a:solidFill>
-                <a:schemeClr val="tx1"/>
-              </a:solidFill>
-              <a:latin typeface="Liberation Mono"/>
-              <a:cs typeface="Liberation Mono"/>
-            </a:endParaRPr>
-          </a:p>
-          <a:p>
-            <a:pPr>
-              <a:defRPr/>
-            </a:pPr>
-            <a:r>
-              <a:rPr lang="it-IT" sz="1400" b="0" i="0" u="none" strike="noStrike" cap="none" spc="0">
-                <a:solidFill>
-                  <a:schemeClr val="tx1"/>
-                </a:solidFill>
-                <a:latin typeface="Liberation Mono"/>
-                <a:ea typeface="Liberation Mono"/>
-                <a:cs typeface="Liberation Mono"/>
-              </a:rPr>
-              <a:t>               .map(this::toDomain)</a:t>
-            </a:r>
-            <a:endParaRPr sz="1400" b="0" i="0" u="none" strike="noStrike" cap="none" spc="0">
-              <a:solidFill>
-                <a:schemeClr val="tx1"/>
-              </a:solidFill>
-              <a:latin typeface="Liberation Mono"/>
-              <a:cs typeface="Liberation Mono"/>
-            </a:endParaRPr>
-          </a:p>
-          <a:p>
-            <a:pPr>
-              <a:defRPr/>
-            </a:pPr>
-            <a:r>
-              <a:rPr lang="it-IT" sz="1400" b="0" i="0" u="none" strike="noStrike" cap="none" spc="0">
-                <a:solidFill>
-                  <a:schemeClr val="tx1"/>
-                </a:solidFill>
-                <a:latin typeface="Liberation Mono"/>
-                <a:ea typeface="Liberation Mono"/>
-                <a:cs typeface="Liberation Mono"/>
-              </a:rPr>
-              <a:t>               .collect(Collectors.toList());</a:t>
-            </a:r>
-            <a:endParaRPr sz="1400" b="0" i="0" u="none" strike="noStrike" cap="none" spc="0">
-              <a:solidFill>
-                <a:schemeClr val="tx1"/>
-              </a:solidFill>
-              <a:latin typeface="Liberation Mono"/>
-              <a:cs typeface="Liberation Mono"/>
-            </a:endParaRPr>
-          </a:p>
-          <a:p>
-            <a:pPr>
-              <a:defRPr/>
-            </a:pPr>
-            <a:r>
-              <a:rPr lang="it-IT" sz="1400" b="0" i="0" u="none" strike="noStrike" cap="none" spc="0">
+            <a:endParaRPr sz="1400" b="0" i="0" u="none" strike="noStrike" cap="none" spc="0" dirty="0">
+              <a:solidFill>
+                <a:schemeClr val="tx1"/>
+              </a:solidFill>
+              <a:latin typeface="Liberation Mono"/>
+              <a:cs typeface="Liberation Mono"/>
+            </a:endParaRPr>
+          </a:p>
+          <a:p>
+            <a:pPr>
+              <a:defRPr/>
+            </a:pPr>
+            <a:r>
+              <a:rPr lang="it-IT" sz="1400" b="0" i="0" u="none" strike="noStrike" cap="none" spc="0" dirty="0">
+                <a:solidFill>
+                  <a:schemeClr val="tx1"/>
+                </a:solidFill>
+                <a:latin typeface="Liberation Mono"/>
+                <a:ea typeface="Liberation Mono"/>
+                <a:cs typeface="Liberation Mono"/>
+              </a:rPr>
+              <a:t>               .filter(</a:t>
+            </a:r>
+            <a:r>
+              <a:rPr lang="it-IT" sz="1400" b="0" i="0" u="none" strike="noStrike" cap="none" spc="0" dirty="0" err="1">
+                <a:solidFill>
+                  <a:schemeClr val="tx1"/>
+                </a:solidFill>
+                <a:latin typeface="Liberation Mono"/>
+                <a:ea typeface="Liberation Mono"/>
+                <a:cs typeface="Liberation Mono"/>
+              </a:rPr>
+              <a:t>entity</a:t>
+            </a:r>
+            <a:r>
+              <a:rPr lang="it-IT" sz="1400" b="0" i="0" u="none" strike="noStrike" cap="none" spc="0" dirty="0">
+                <a:solidFill>
+                  <a:schemeClr val="tx1"/>
+                </a:solidFill>
+                <a:latin typeface="Liberation Mono"/>
+                <a:ea typeface="Liberation Mono"/>
+                <a:cs typeface="Liberation Mono"/>
+              </a:rPr>
+              <a:t> -&gt; </a:t>
+            </a:r>
+            <a:r>
+              <a:rPr lang="it-IT" sz="1400" b="0" i="0" u="none" strike="noStrike" cap="none" spc="0" dirty="0" err="1">
+                <a:solidFill>
+                  <a:schemeClr val="tx1"/>
+                </a:solidFill>
+                <a:latin typeface="Liberation Mono"/>
+                <a:ea typeface="Liberation Mono"/>
+                <a:cs typeface="Liberation Mono"/>
+              </a:rPr>
+              <a:t>entity.getId</a:t>
+            </a:r>
+            <a:r>
+              <a:rPr lang="it-IT" sz="1400" b="0" i="0" u="none" strike="noStrike" cap="none" spc="0" dirty="0">
+                <a:solidFill>
+                  <a:schemeClr val="tx1"/>
+                </a:solidFill>
+                <a:latin typeface="Liberation Mono"/>
+                <a:ea typeface="Liberation Mono"/>
+                <a:cs typeface="Liberation Mono"/>
+              </a:rPr>
+              <a:t>().</a:t>
+            </a:r>
+            <a:r>
+              <a:rPr lang="it-IT" sz="1400" b="0" i="0" u="none" strike="noStrike" cap="none" spc="0" dirty="0" err="1">
+                <a:solidFill>
+                  <a:schemeClr val="tx1"/>
+                </a:solidFill>
+                <a:latin typeface="Liberation Mono"/>
+                <a:ea typeface="Liberation Mono"/>
+                <a:cs typeface="Liberation Mono"/>
+              </a:rPr>
+              <a:t>getAvailableDate</a:t>
+            </a:r>
+            <a:r>
+              <a:rPr lang="it-IT" sz="1400" b="0" i="0" u="none" strike="noStrike" cap="none" spc="0" dirty="0">
+                <a:solidFill>
+                  <a:schemeClr val="tx1"/>
+                </a:solidFill>
+                <a:latin typeface="Liberation Mono"/>
+                <a:ea typeface="Liberation Mono"/>
+                <a:cs typeface="Liberation Mono"/>
+              </a:rPr>
+              <a:t>().</a:t>
+            </a:r>
+            <a:r>
+              <a:rPr lang="it-IT" sz="1400" b="0" i="0" u="none" strike="noStrike" cap="none" spc="0" dirty="0" err="1">
+                <a:solidFill>
+                  <a:schemeClr val="tx1"/>
+                </a:solidFill>
+                <a:latin typeface="Liberation Mono"/>
+                <a:ea typeface="Liberation Mono"/>
+                <a:cs typeface="Liberation Mono"/>
+              </a:rPr>
+              <a:t>getMonth</a:t>
+            </a:r>
+            <a:r>
+              <a:rPr lang="it-IT" sz="1400" b="0" i="0" u="none" strike="noStrike" cap="none" spc="0" dirty="0">
+                <a:solidFill>
+                  <a:schemeClr val="tx1"/>
+                </a:solidFill>
+                <a:latin typeface="Liberation Mono"/>
+                <a:ea typeface="Liberation Mono"/>
+                <a:cs typeface="Liberation Mono"/>
+              </a:rPr>
+              <a:t>() == </a:t>
+            </a:r>
+            <a:r>
+              <a:rPr lang="it-IT" sz="1400" b="0" i="0" u="none" strike="noStrike" cap="none" spc="0" dirty="0" err="1">
+                <a:solidFill>
+                  <a:schemeClr val="tx1"/>
+                </a:solidFill>
+                <a:latin typeface="Liberation Mono"/>
+                <a:ea typeface="Liberation Mono"/>
+                <a:cs typeface="Liberation Mono"/>
+              </a:rPr>
+              <a:t>yearMonth.getMonth</a:t>
+            </a:r>
+            <a:r>
+              <a:rPr lang="it-IT" sz="1400" b="0" i="0" u="none" strike="noStrike" cap="none" spc="0" dirty="0">
+                <a:solidFill>
+                  <a:schemeClr val="tx1"/>
+                </a:solidFill>
+                <a:latin typeface="Liberation Mono"/>
+                <a:ea typeface="Liberation Mono"/>
+                <a:cs typeface="Liberation Mono"/>
+              </a:rPr>
+              <a:t>())</a:t>
+            </a:r>
+            <a:endParaRPr sz="1400" b="0" i="0" u="none" strike="noStrike" cap="none" spc="0" dirty="0">
+              <a:solidFill>
+                <a:schemeClr val="tx1"/>
+              </a:solidFill>
+              <a:latin typeface="Liberation Mono"/>
+              <a:cs typeface="Liberation Mono"/>
+            </a:endParaRPr>
+          </a:p>
+          <a:p>
+            <a:pPr>
+              <a:defRPr/>
+            </a:pPr>
+            <a:r>
+              <a:rPr lang="it-IT" sz="1400" b="0" i="0" u="none" strike="noStrike" cap="none" spc="0" dirty="0">
+                <a:solidFill>
+                  <a:schemeClr val="tx1"/>
+                </a:solidFill>
+                <a:latin typeface="Liberation Mono"/>
+                <a:ea typeface="Liberation Mono"/>
+                <a:cs typeface="Liberation Mono"/>
+              </a:rPr>
+              <a:t>               .</a:t>
+            </a:r>
+            <a:r>
+              <a:rPr lang="it-IT" sz="1400" b="0" i="0" u="none" strike="noStrike" cap="none" spc="0" dirty="0" err="1">
+                <a:solidFill>
+                  <a:schemeClr val="tx1"/>
+                </a:solidFill>
+                <a:latin typeface="Liberation Mono"/>
+                <a:ea typeface="Liberation Mono"/>
+                <a:cs typeface="Liberation Mono"/>
+              </a:rPr>
+              <a:t>map</a:t>
+            </a:r>
+            <a:r>
+              <a:rPr lang="it-IT" sz="1400" b="0" i="0" u="none" strike="noStrike" cap="none" spc="0" dirty="0">
+                <a:solidFill>
+                  <a:schemeClr val="tx1"/>
+                </a:solidFill>
+                <a:latin typeface="Liberation Mono"/>
+                <a:ea typeface="Liberation Mono"/>
+                <a:cs typeface="Liberation Mono"/>
+              </a:rPr>
+              <a:t>(</a:t>
+            </a:r>
+            <a:r>
+              <a:rPr lang="it-IT" sz="1400" b="0" i="0" u="none" strike="noStrike" cap="none" spc="0" dirty="0" err="1">
+                <a:solidFill>
+                  <a:schemeClr val="tx1"/>
+                </a:solidFill>
+                <a:latin typeface="Liberation Mono"/>
+                <a:ea typeface="Liberation Mono"/>
+                <a:cs typeface="Liberation Mono"/>
+              </a:rPr>
+              <a:t>this</a:t>
+            </a:r>
+            <a:r>
+              <a:rPr lang="it-IT" sz="1400" b="0" i="0" u="none" strike="noStrike" cap="none" spc="0" dirty="0">
+                <a:solidFill>
+                  <a:schemeClr val="tx1"/>
+                </a:solidFill>
+                <a:latin typeface="Liberation Mono"/>
+                <a:ea typeface="Liberation Mono"/>
+                <a:cs typeface="Liberation Mono"/>
+              </a:rPr>
+              <a:t>::</a:t>
+            </a:r>
+            <a:r>
+              <a:rPr lang="it-IT" sz="1400" b="0" i="0" u="none" strike="noStrike" cap="none" spc="0" dirty="0" err="1">
+                <a:solidFill>
+                  <a:schemeClr val="tx1"/>
+                </a:solidFill>
+                <a:latin typeface="Liberation Mono"/>
+                <a:ea typeface="Liberation Mono"/>
+                <a:cs typeface="Liberation Mono"/>
+              </a:rPr>
+              <a:t>toDomain</a:t>
+            </a:r>
+            <a:r>
+              <a:rPr lang="it-IT" sz="1400" b="0" i="0" u="none" strike="noStrike" cap="none" spc="0" dirty="0">
+                <a:solidFill>
+                  <a:schemeClr val="tx1"/>
+                </a:solidFill>
+                <a:latin typeface="Liberation Mono"/>
+                <a:ea typeface="Liberation Mono"/>
+                <a:cs typeface="Liberation Mono"/>
+              </a:rPr>
+              <a:t>)</a:t>
+            </a:r>
+            <a:endParaRPr sz="1400" b="0" i="0" u="none" strike="noStrike" cap="none" spc="0" dirty="0">
+              <a:solidFill>
+                <a:schemeClr val="tx1"/>
+              </a:solidFill>
+              <a:latin typeface="Liberation Mono"/>
+              <a:cs typeface="Liberation Mono"/>
+            </a:endParaRPr>
+          </a:p>
+          <a:p>
+            <a:pPr>
+              <a:defRPr/>
+            </a:pPr>
+            <a:r>
+              <a:rPr lang="it-IT" sz="1400" b="0" i="0" u="none" strike="noStrike" cap="none" spc="0" dirty="0">
+                <a:solidFill>
+                  <a:schemeClr val="tx1"/>
+                </a:solidFill>
+                <a:latin typeface="Liberation Mono"/>
+                <a:ea typeface="Liberation Mono"/>
+                <a:cs typeface="Liberation Mono"/>
+              </a:rPr>
+              <a:t>               .</a:t>
+            </a:r>
+            <a:r>
+              <a:rPr lang="it-IT" sz="1400" b="0" i="0" u="none" strike="noStrike" cap="none" spc="0" dirty="0" err="1">
+                <a:solidFill>
+                  <a:schemeClr val="tx1"/>
+                </a:solidFill>
+                <a:latin typeface="Liberation Mono"/>
+                <a:ea typeface="Liberation Mono"/>
+                <a:cs typeface="Liberation Mono"/>
+              </a:rPr>
+              <a:t>collect</a:t>
+            </a:r>
+            <a:r>
+              <a:rPr lang="it-IT" sz="1400" b="0" i="0" u="none" strike="noStrike" cap="none" spc="0" dirty="0">
+                <a:solidFill>
+                  <a:schemeClr val="tx1"/>
+                </a:solidFill>
+                <a:latin typeface="Liberation Mono"/>
+                <a:ea typeface="Liberation Mono"/>
+                <a:cs typeface="Liberation Mono"/>
+              </a:rPr>
+              <a:t>(</a:t>
+            </a:r>
+            <a:r>
+              <a:rPr lang="it-IT" sz="1400" b="0" i="0" u="none" strike="noStrike" cap="none" spc="0" dirty="0" err="1">
+                <a:solidFill>
+                  <a:schemeClr val="tx1"/>
+                </a:solidFill>
+                <a:latin typeface="Liberation Mono"/>
+                <a:ea typeface="Liberation Mono"/>
+                <a:cs typeface="Liberation Mono"/>
+              </a:rPr>
+              <a:t>Collectors.toList</a:t>
+            </a:r>
+            <a:r>
+              <a:rPr lang="it-IT" sz="1400" b="0" i="0" u="none" strike="noStrike" cap="none" spc="0" dirty="0">
+                <a:solidFill>
+                  <a:schemeClr val="tx1"/>
+                </a:solidFill>
+                <a:latin typeface="Liberation Mono"/>
+                <a:ea typeface="Liberation Mono"/>
+                <a:cs typeface="Liberation Mono"/>
+              </a:rPr>
+              <a:t>());</a:t>
+            </a:r>
+            <a:endParaRPr sz="1400" b="0" i="0" u="none" strike="noStrike" cap="none" spc="0" dirty="0">
+              <a:solidFill>
+                <a:schemeClr val="tx1"/>
+              </a:solidFill>
+              <a:latin typeface="Liberation Mono"/>
+              <a:cs typeface="Liberation Mono"/>
+            </a:endParaRPr>
+          </a:p>
+          <a:p>
+            <a:pPr>
+              <a:defRPr/>
+            </a:pPr>
+            <a:r>
+              <a:rPr lang="it-IT" sz="1400" b="0" i="0" u="none" strike="noStrike" cap="none" spc="0" dirty="0">
                 <a:solidFill>
                   <a:schemeClr val="tx1"/>
                 </a:solidFill>
@@ -13748,20 +15373,20 @@
               </a:rPr>
               <a:t>    }</a:t>
             </a:r>
-            <a:endParaRPr/>
-          </a:p>
-        </p:txBody>
-      </p:sp>
-      <p:sp>
-        <p:nvSpPr>
-          <p:cNvPr id="1863624069" name=""/>
+            <a:endParaRPr dirty="0"/>
+          </a:p>
+        </p:txBody>
+      </p:sp>
+      <p:sp>
+        <p:nvSpPr>
+          <p:cNvPr id="1863624069" name="CasellaDiTesto 1863624068"/>
           <p:cNvSpPr txBox="1"/>
           <p:nvPr/>
         </p:nvSpPr>
         <p:spPr bwMode="auto">
-          <a:xfrm rot="0" flipH="0" flipV="0">
+          <a:xfrm>
             <a:off x="351446" y="4956249"/>
-            <a:ext cx="11808375" cy="1641023"/>
+            <a:ext cx="11808375" cy="1448139"/>
           </a:xfrm>
           <a:prstGeom prst="roundRect">
             <a:avLst>
@@ -13781,15 +15406,16 @@
           </a:ln>
         </p:spPr>
         <p:txBody>
-          <a:bodyPr vertOverflow="overflow" horzOverflow="overflow" vert="horz" wrap="square" lIns="91440" tIns="45720" rIns="91440" bIns="45720" numCol="1" spcCol="0" rtlCol="0" fromWordArt="0" anchor="t" anchorCtr="0" forceAA="0" upright="0" compatLnSpc="0">
+          <a:bodyPr vertOverflow="overflow" horzOverflow="overflow" vert="horz" wrap="square" lIns="91440" tIns="45720" rIns="91440" bIns="45720" numCol="1" spcCol="0" rtlCol="0" fromWordArt="0" anchor="t" anchorCtr="0" forceAA="0" compatLnSpc="0">
             <a:spAutoFit/>
           </a:bodyPr>
-          <a:p>
-            <a:pPr>
-              <a:defRPr/>
-            </a:pPr>
-            <a:r>
-              <a:rPr lang="en" sz="1400" b="0" i="0" u="none" strike="noStrike" cap="none" spc="0">
+          <a:lstStyle/>
+          <a:p>
+            <a:pPr>
+              <a:defRPr/>
+            </a:pPr>
+            <a:r>
+              <a:rPr lang="en" sz="1400" b="0" i="0" u="none" strike="noStrike" cap="none" spc="0" dirty="0">
                 <a:solidFill>
                   <a:schemeClr val="tx1"/>
                 </a:solidFill>
@@ -13799,10 +15425,272 @@
               </a:rPr>
               <a:t>//VisitPlanService.createVisitPlan()</a:t>
             </a:r>
-            <a:endParaRPr lang="en" sz="1400" b="0" i="0" u="none" strike="noStrike" cap="none" spc="0">
-              <a:solidFill>
-                <a:schemeClr val="tx1"/>
-              </a:solidFill>
+          </a:p>
+          <a:p>
+            <a:pPr>
+              <a:defRPr/>
+            </a:pPr>
+            <a:r>
+              <a:rPr lang="en" sz="1400" b="0" i="0" u="none" strike="noStrike" cap="none" spc="0" dirty="0">
+                <a:solidFill>
+                  <a:schemeClr val="tx1"/>
+                </a:solidFill>
+                <a:latin typeface="Liberation Mono"/>
+                <a:ea typeface="Liberation Mono"/>
+                <a:cs typeface="Liberation Mono"/>
+              </a:rPr>
+              <a:t>...</a:t>
+            </a:r>
+            <a:endParaRPr sz="1400" b="0" i="0" u="none" strike="noStrike" cap="none" spc="0" dirty="0">
+              <a:solidFill>
+                <a:schemeClr val="tx1"/>
+              </a:solidFill>
+              <a:latin typeface="Liberation Mono"/>
+              <a:cs typeface="Liberation Mono"/>
+            </a:endParaRPr>
+          </a:p>
+          <a:p>
+            <a:pPr>
+              <a:defRPr/>
+            </a:pPr>
+            <a:r>
+              <a:rPr lang="it-IT" sz="1400" b="0" i="0" u="none" strike="noStrike" cap="none" spc="0" dirty="0" err="1">
+                <a:solidFill>
+                  <a:schemeClr val="tx1"/>
+                </a:solidFill>
+                <a:latin typeface="Liberation Mono"/>
+                <a:ea typeface="Liberation Mono"/>
+                <a:cs typeface="Liberation Mono"/>
+              </a:rPr>
+              <a:t>YearMonth</a:t>
+            </a:r>
+            <a:r>
+              <a:rPr lang="it-IT" sz="1400" b="0" i="0" u="none" strike="noStrike" cap="none" spc="0" dirty="0">
+                <a:solidFill>
+                  <a:schemeClr val="tx1"/>
+                </a:solidFill>
+                <a:latin typeface="Liberation Mono"/>
+                <a:ea typeface="Liberation Mono"/>
+                <a:cs typeface="Liberation Mono"/>
+              </a:rPr>
+              <a:t> </a:t>
+            </a:r>
+            <a:r>
+              <a:rPr lang="it-IT" sz="1400" b="0" i="0" u="none" strike="noStrike" cap="none" spc="0" dirty="0" err="1">
+                <a:solidFill>
+                  <a:schemeClr val="tx1"/>
+                </a:solidFill>
+                <a:latin typeface="Liberation Mono"/>
+                <a:ea typeface="Liberation Mono"/>
+                <a:cs typeface="Liberation Mono"/>
+              </a:rPr>
+              <a:t>nextMonth</a:t>
+            </a:r>
+            <a:r>
+              <a:rPr lang="it-IT" sz="1400" b="0" i="0" u="none" strike="noStrike" cap="none" spc="0" dirty="0">
+                <a:solidFill>
+                  <a:schemeClr val="tx1"/>
+                </a:solidFill>
+                <a:latin typeface="Liberation Mono"/>
+                <a:ea typeface="Liberation Mono"/>
+                <a:cs typeface="Liberation Mono"/>
+              </a:rPr>
+              <a:t> = </a:t>
+            </a:r>
+            <a:r>
+              <a:rPr lang="it-IT" sz="1400" b="0" i="0" u="none" strike="noStrike" cap="none" spc="0" dirty="0" err="1">
+                <a:solidFill>
+                  <a:schemeClr val="tx1"/>
+                </a:solidFill>
+                <a:latin typeface="Liberation Mono"/>
+                <a:ea typeface="Liberation Mono"/>
+                <a:cs typeface="Liberation Mono"/>
+              </a:rPr>
+              <a:t>YearMonth.from</a:t>
+            </a:r>
+            <a:r>
+              <a:rPr lang="it-IT" sz="1400" b="0" i="0" u="none" strike="noStrike" cap="none" spc="0" dirty="0">
+                <a:solidFill>
+                  <a:schemeClr val="tx1"/>
+                </a:solidFill>
+                <a:latin typeface="Liberation Mono"/>
+                <a:ea typeface="Liberation Mono"/>
+                <a:cs typeface="Liberation Mono"/>
+              </a:rPr>
+              <a:t>(</a:t>
+            </a:r>
+            <a:r>
+              <a:rPr lang="it-IT" sz="1400" b="0" i="0" u="none" strike="noStrike" cap="none" spc="0" dirty="0" err="1">
+                <a:solidFill>
+                  <a:schemeClr val="tx1"/>
+                </a:solidFill>
+                <a:latin typeface="Liberation Mono"/>
+                <a:ea typeface="Liberation Mono"/>
+                <a:cs typeface="Liberation Mono"/>
+              </a:rPr>
+              <a:t>LocalDate.now</a:t>
+            </a:r>
+            <a:r>
+              <a:rPr lang="it-IT" sz="1400" b="0" i="0" u="none" strike="noStrike" cap="none" spc="0" dirty="0">
+                <a:solidFill>
+                  <a:schemeClr val="tx1"/>
+                </a:solidFill>
+                <a:latin typeface="Liberation Mono"/>
+                <a:ea typeface="Liberation Mono"/>
+                <a:cs typeface="Liberation Mono"/>
+              </a:rPr>
+              <a:t>(clock)).</a:t>
+            </a:r>
+            <a:r>
+              <a:rPr lang="it-IT" sz="1400" b="0" i="0" u="none" strike="noStrike" cap="none" spc="0" dirty="0" err="1">
+                <a:solidFill>
+                  <a:schemeClr val="tx1"/>
+                </a:solidFill>
+                <a:latin typeface="Liberation Mono"/>
+                <a:ea typeface="Liberation Mono"/>
+                <a:cs typeface="Liberation Mono"/>
+              </a:rPr>
+              <a:t>plusMonths</a:t>
+            </a:r>
+            <a:r>
+              <a:rPr lang="it-IT" sz="1400" b="0" i="0" u="none" strike="noStrike" cap="none" spc="0" dirty="0">
+                <a:solidFill>
+                  <a:schemeClr val="tx1"/>
+                </a:solidFill>
+                <a:latin typeface="Liberation Mono"/>
+                <a:ea typeface="Liberation Mono"/>
+                <a:cs typeface="Liberation Mono"/>
+              </a:rPr>
+              <a:t>(1);</a:t>
+            </a:r>
+          </a:p>
+          <a:p>
+            <a:pPr>
+              <a:defRPr/>
+            </a:pPr>
+            <a:endParaRPr sz="1400" b="0" i="0" u="none" strike="noStrike" cap="none" spc="0" dirty="0">
+              <a:solidFill>
+                <a:schemeClr val="tx1"/>
+              </a:solidFill>
+              <a:latin typeface="Liberation Mono"/>
+              <a:cs typeface="Liberation Mono"/>
+            </a:endParaRPr>
+          </a:p>
+          <a:p>
+            <a:pPr>
+              <a:defRPr/>
+            </a:pPr>
+            <a:r>
+              <a:rPr lang="it-IT" sz="1400" b="0" i="0" u="none" strike="noStrike" cap="none" spc="0" dirty="0">
+                <a:solidFill>
+                  <a:schemeClr val="tx1"/>
+                </a:solidFill>
+                <a:latin typeface="Liberation Mono"/>
+                <a:ea typeface="Liberation Mono"/>
+                <a:cs typeface="Liberation Mono"/>
+              </a:rPr>
+              <a:t>List&lt;</a:t>
+            </a:r>
+            <a:r>
+              <a:rPr lang="it-IT" sz="1400" b="0" i="0" u="none" strike="noStrike" cap="none" spc="0" dirty="0" err="1">
+                <a:solidFill>
+                  <a:schemeClr val="tx1"/>
+                </a:solidFill>
+                <a:latin typeface="Liberation Mono"/>
+                <a:ea typeface="Liberation Mono"/>
+                <a:cs typeface="Liberation Mono"/>
+              </a:rPr>
+              <a:t>VolunteerAvailableDate</a:t>
+            </a:r>
+            <a:r>
+              <a:rPr lang="it-IT" sz="1400" b="0" i="0" u="none" strike="noStrike" cap="none" spc="0" dirty="0">
+                <a:solidFill>
+                  <a:schemeClr val="tx1"/>
+                </a:solidFill>
+                <a:latin typeface="Liberation Mono"/>
+                <a:ea typeface="Liberation Mono"/>
+                <a:cs typeface="Liberation Mono"/>
+              </a:rPr>
+              <a:t>&gt; </a:t>
+            </a:r>
+            <a:r>
+              <a:rPr lang="it-IT" sz="1400" b="0" i="0" u="none" strike="noStrike" cap="none" spc="0" dirty="0" err="1">
+                <a:solidFill>
+                  <a:schemeClr val="tx1"/>
+                </a:solidFill>
+                <a:latin typeface="Liberation Mono"/>
+                <a:ea typeface="Liberation Mono"/>
+                <a:cs typeface="Liberation Mono"/>
+              </a:rPr>
+              <a:t>volunteerAvailabilitiesNextMonth</a:t>
+            </a:r>
+            <a:r>
+              <a:rPr lang="it-IT" sz="1400" b="0" i="0" u="none" strike="noStrike" cap="none" spc="0" dirty="0">
+                <a:solidFill>
+                  <a:schemeClr val="tx1"/>
+                </a:solidFill>
+                <a:latin typeface="Liberation Mono"/>
+                <a:ea typeface="Liberation Mono"/>
+                <a:cs typeface="Liberation Mono"/>
+              </a:rPr>
+              <a:t> =</a:t>
+            </a:r>
+            <a:r>
+              <a:rPr lang="en" sz="1400" b="0" i="0" u="none" strike="noStrike" cap="none" spc="0" dirty="0">
+                <a:solidFill>
+                  <a:schemeClr val="tx1"/>
+                </a:solidFill>
+                <a:latin typeface="Liberation Mono"/>
+                <a:ea typeface="Liberation Mono"/>
+                <a:cs typeface="Liberation Mono"/>
+              </a:rPr>
+              <a:t> </a:t>
+            </a:r>
+            <a:r>
+              <a:rPr lang="it-IT" sz="1400" b="0" i="0" u="none" strike="noStrike" cap="none" spc="0" dirty="0" err="1">
+                <a:solidFill>
+                  <a:schemeClr val="tx1"/>
+                </a:solidFill>
+                <a:latin typeface="Liberation Mono"/>
+                <a:ea typeface="Liberation Mono"/>
+                <a:cs typeface="Liberation Mono"/>
+              </a:rPr>
+              <a:t>volunteerAvailabilityRepository.findByYearMonth</a:t>
+            </a:r>
+            <a:r>
+              <a:rPr lang="it-IT" sz="1400" b="0" i="0" u="none" strike="noStrike" cap="none" spc="0" dirty="0">
+                <a:solidFill>
+                  <a:schemeClr val="tx1"/>
+                </a:solidFill>
+                <a:latin typeface="Liberation Mono"/>
+                <a:ea typeface="Liberation Mono"/>
+                <a:cs typeface="Liberation Mono"/>
+              </a:rPr>
+              <a:t>(</a:t>
+            </a:r>
+            <a:r>
+              <a:rPr lang="it-IT" sz="1400" b="0" i="0" u="none" strike="noStrike" cap="none" spc="0" dirty="0" err="1">
+                <a:solidFill>
+                  <a:schemeClr val="tx1"/>
+                </a:solidFill>
+                <a:latin typeface="Liberation Mono"/>
+                <a:ea typeface="Liberation Mono"/>
+                <a:cs typeface="Liberation Mono"/>
+              </a:rPr>
+              <a:t>nextMonth</a:t>
+            </a:r>
+            <a:r>
+              <a:rPr lang="it-IT" sz="1400" b="0" i="0" u="none" strike="noStrike" cap="none" spc="0" dirty="0">
+                <a:solidFill>
+                  <a:schemeClr val="tx1"/>
+                </a:solidFill>
+                <a:latin typeface="Liberation Mono"/>
+                <a:ea typeface="Liberation Mono"/>
+                <a:cs typeface="Liberation Mono"/>
+              </a:rPr>
+              <a:t>);</a:t>
+            </a:r>
+            <a:endParaRPr sz="1400" dirty="0">
               <a:latin typeface="Liberation Mono"/>
               <a:ea typeface="Liberation Mono"/>
               <a:cs typeface="Liberation Mono"/>
@@ -13813,127 +15701,25 @@
               <a:defRPr/>
             </a:pPr>
             <a:r>
-              <a:rPr lang="en" sz="1400" b="0" i="0" u="none" strike="noStrike" cap="none" spc="0">
-                <a:solidFill>
-                  <a:schemeClr val="tx1"/>
-                </a:solidFill>
+              <a:rPr lang="en" sz="1400" dirty="0">
                 <a:latin typeface="Liberation Mono"/>
                 <a:ea typeface="Liberation Mono"/>
                 <a:cs typeface="Liberation Mono"/>
               </a:rPr>
               <a:t>...</a:t>
             </a:r>
-            <a:endParaRPr sz="1400" b="0" i="0" u="none" strike="noStrike" cap="none" spc="0">
-              <a:solidFill>
-                <a:schemeClr val="tx1"/>
-              </a:solidFill>
-              <a:latin typeface="Liberation Mono"/>
-              <a:cs typeface="Liberation Mono"/>
-            </a:endParaRPr>
-          </a:p>
-          <a:p>
-            <a:pPr>
-              <a:defRPr/>
-            </a:pPr>
-            <a:r>
-              <a:rPr lang="it-IT" sz="1400" b="0" i="0" u="none" strike="noStrike" cap="none" spc="0">
-                <a:solidFill>
-                  <a:schemeClr val="tx1"/>
-                </a:solidFill>
-                <a:latin typeface="Liberation Mono"/>
-                <a:ea typeface="Liberation Mono"/>
-                <a:cs typeface="Liberation Mono"/>
-              </a:rPr>
-              <a:t>YearMonth nextMonth = YearMonth.from(LocalDate.now(clock)).plusMonths(1);</a:t>
-            </a:r>
-            <a:endParaRPr lang="it-IT" sz="1400" b="0" i="0" u="none" strike="noStrike" cap="none" spc="0">
-              <a:solidFill>
-                <a:schemeClr val="tx1"/>
-              </a:solidFill>
-              <a:latin typeface="Liberation Mono"/>
-              <a:ea typeface="Liberation Mono"/>
-              <a:cs typeface="Liberation Mono"/>
-            </a:endParaRPr>
-          </a:p>
-          <a:p>
-            <a:pPr>
-              <a:defRPr/>
-            </a:pPr>
-            <a:endParaRPr sz="1400" b="0" i="0" u="none" strike="noStrike" cap="none" spc="0">
-              <a:solidFill>
-                <a:schemeClr val="tx1"/>
-              </a:solidFill>
-              <a:latin typeface="Liberation Mono"/>
-              <a:cs typeface="Liberation Mono"/>
-            </a:endParaRPr>
-          </a:p>
-          <a:p>
-            <a:pPr>
-              <a:defRPr/>
-            </a:pPr>
-            <a:r>
-              <a:rPr lang="it-IT" sz="1400" b="0" i="0" u="none" strike="noStrike" cap="none" spc="0">
-                <a:solidFill>
-                  <a:schemeClr val="tx1"/>
-                </a:solidFill>
-                <a:latin typeface="Liberation Mono"/>
-                <a:ea typeface="Liberation Mono"/>
-                <a:cs typeface="Liberation Mono"/>
-              </a:rPr>
-              <a:t>List&lt;VolunteerAvailableDate&gt; volunteerAvailabilitiesNextMonth =</a:t>
-            </a:r>
-            <a:r>
-              <a:rPr lang="en" sz="1400" b="0" i="0" u="none" strike="noStrike" cap="none" spc="0">
-                <a:solidFill>
-                  <a:schemeClr val="tx1"/>
-                </a:solidFill>
-                <a:latin typeface="Liberation Mono"/>
-                <a:ea typeface="Liberation Mono"/>
-                <a:cs typeface="Liberation Mono"/>
-              </a:rPr>
-              <a:t> </a:t>
-            </a:r>
-            <a:r>
-              <a:rPr lang="it-IT" sz="1400" b="0" i="0" u="none" strike="noStrike" cap="none" spc="0">
-                <a:solidFill>
-                  <a:schemeClr val="tx1"/>
-                </a:solidFill>
-                <a:latin typeface="Liberation Mono"/>
-                <a:ea typeface="Liberation Mono"/>
-                <a:cs typeface="Liberation Mono"/>
-              </a:rPr>
-              <a:t>	volunteerAvailabilityRepository.findByYearMonth(nextMonth);</a:t>
-            </a:r>
-            <a:endParaRPr sz="1400">
-              <a:latin typeface="Liberation Mono"/>
-              <a:ea typeface="Liberation Mono"/>
-              <a:cs typeface="Liberation Mono"/>
-            </a:endParaRPr>
-          </a:p>
-          <a:p>
-            <a:pPr>
-              <a:defRPr/>
-            </a:pPr>
-            <a:r>
-              <a:rPr lang="en" sz="1400">
-                <a:latin typeface="Liberation Mono"/>
-                <a:ea typeface="Liberation Mono"/>
-                <a:cs typeface="Liberation Mono"/>
-              </a:rPr>
-              <a:t>...</a:t>
-            </a:r>
-            <a:endParaRPr/>
-          </a:p>
-        </p:txBody>
-      </p:sp>
-      <p:sp>
-        <p:nvSpPr>
-          <p:cNvPr id="1078290012" name=""/>
+            <a:endParaRPr dirty="0"/>
+          </a:p>
+        </p:txBody>
+      </p:sp>
+      <p:sp>
+        <p:nvSpPr>
+          <p:cNvPr id="1078290012" name="CasellaDiTesto 1078290011"/>
           <p:cNvSpPr txBox="1"/>
           <p:nvPr/>
         </p:nvSpPr>
         <p:spPr bwMode="auto">
-          <a:xfrm rot="0" flipH="0" flipV="0">
+          <a:xfrm>
             <a:off x="351446" y="967568"/>
             <a:ext cx="11811975" cy="1956535"/>
           </a:xfrm>
@@ -13955,32 +15741,33 @@
           </a:ln>
         </p:spPr>
         <p:txBody>
-          <a:bodyPr vertOverflow="overflow" horzOverflow="overflow" vert="horz" wrap="square" lIns="91440" tIns="45720" rIns="91440" bIns="45720" numCol="1" spcCol="0" rtlCol="0" fromWordArt="0" anchor="t" anchorCtr="0" forceAA="0" upright="0" compatLnSpc="0">
+          <a:bodyPr vertOverflow="overflow" horzOverflow="overflow" vert="horz" wrap="square" lIns="91440" tIns="45720" rIns="91440" bIns="45720" numCol="1" spcCol="0" rtlCol="0" fromWordArt="0" anchor="t" anchorCtr="0" forceAA="0" compatLnSpc="0">
             <a:spAutoFit/>
           </a:bodyPr>
-          <a:p>
-            <a:pPr>
-              <a:defRPr/>
-            </a:pPr>
-            <a:r>
-              <a:rPr lang="en" sz="1400">
+          <a:lstStyle/>
+          <a:p>
+            <a:pPr>
+              <a:defRPr/>
+            </a:pPr>
+            <a:r>
+              <a:rPr lang="en" sz="1400" dirty="0">
                 <a:latin typeface="Liberation Mono"/>
                 <a:ea typeface="Liberation Mono"/>
                 <a:cs typeface="Liberation Mono"/>
               </a:rPr>
               <a:t>// application.port.out.VolunteerAvailableDateRepositoryPort</a:t>
             </a:r>
-            <a:endParaRPr sz="1400">
-              <a:latin typeface="Liberation Mono"/>
-              <a:cs typeface="Liberation Mono"/>
-            </a:endParaRPr>
-          </a:p>
-          <a:p>
-            <a:pPr>
-              <a:defRPr/>
-            </a:pPr>
-            <a:r>
-              <a:rPr lang="en" sz="1300" b="0" i="0" u="none" strike="noStrike" cap="none" spc="0">
+            <a:endParaRPr sz="1400" dirty="0">
+              <a:latin typeface="Liberation Mono"/>
+              <a:cs typeface="Liberation Mono"/>
+            </a:endParaRPr>
+          </a:p>
+          <a:p>
+            <a:pPr>
+              <a:defRPr/>
+            </a:pPr>
+            <a:r>
+              <a:rPr lang="en" sz="1300" b="0" i="0" u="none" strike="noStrike" cap="none" spc="0" dirty="0">
                 <a:solidFill>
                   <a:schemeClr val="tx1"/>
                 </a:solidFill>
@@ -13990,20 +15777,20 @@
               </a:rPr>
               <a:t>public interface VolunteerAvailableDateRepositoryPort {</a:t>
             </a:r>
-            <a:endParaRPr sz="1300" b="0" i="0" u="none" strike="noStrike" cap="none" spc="0">
-              <a:solidFill>
-                <a:schemeClr val="tx1"/>
-              </a:solidFill>
-              <a:latin typeface="Liberation Mono"/>
-              <a:cs typeface="Liberation Mono"/>
-            </a:endParaRPr>
-          </a:p>
-          <a:p>
-            <a:pPr>
-              <a:defRPr/>
-            </a:pPr>
-            <a:r>
-              <a:rPr lang="en" sz="1300" b="0" i="0" u="none" strike="noStrike" cap="none" spc="0">
+            <a:endParaRPr sz="1300" b="0" i="0" u="none" strike="noStrike" cap="none" spc="0" dirty="0">
+              <a:solidFill>
+                <a:schemeClr val="tx1"/>
+              </a:solidFill>
+              <a:latin typeface="Liberation Mono"/>
+              <a:cs typeface="Liberation Mono"/>
+            </a:endParaRPr>
+          </a:p>
+          <a:p>
+            <a:pPr>
+              <a:defRPr/>
+            </a:pPr>
+            <a:r>
+              <a:rPr lang="en" sz="1300" b="0" i="0" u="none" strike="noStrike" cap="none" spc="0" dirty="0">
                 <a:solidFill>
                   <a:schemeClr val="tx1"/>
                 </a:solidFill>
@@ -14013,20 +15800,20 @@
               </a:rPr>
               <a:t>    void save(VolunteerAvailableDate availableDate);</a:t>
             </a:r>
-            <a:endParaRPr sz="1300" b="0" i="0" u="none" strike="noStrike" cap="none" spc="0">
-              <a:solidFill>
-                <a:schemeClr val="tx1"/>
-              </a:solidFill>
-              <a:latin typeface="Liberation Mono"/>
-              <a:cs typeface="Liberation Mono"/>
-            </a:endParaRPr>
-          </a:p>
-          <a:p>
-            <a:pPr>
-              <a:defRPr/>
-            </a:pPr>
-            <a:r>
-              <a:rPr lang="en" sz="1300" b="0" i="0" u="none" strike="noStrike" cap="none" spc="0">
+            <a:endParaRPr sz="1300" b="0" i="0" u="none" strike="noStrike" cap="none" spc="0" dirty="0">
+              <a:solidFill>
+                <a:schemeClr val="tx1"/>
+              </a:solidFill>
+              <a:latin typeface="Liberation Mono"/>
+              <a:cs typeface="Liberation Mono"/>
+            </a:endParaRPr>
+          </a:p>
+          <a:p>
+            <a:pPr>
+              <a:defRPr/>
+            </a:pPr>
+            <a:r>
+              <a:rPr lang="en" sz="1300" b="0" i="0" u="none" strike="noStrike" cap="none" spc="0" dirty="0">
                 <a:solidFill>
                   <a:schemeClr val="tx1"/>
                 </a:solidFill>
@@ -14036,20 +15823,20 @@
               </a:rPr>
               <a:t>    void delete(VolunteerAvailableDate availableDate);</a:t>
             </a:r>
-            <a:endParaRPr sz="1300" b="0" i="0" u="none" strike="noStrike" cap="none" spc="0">
-              <a:solidFill>
-                <a:schemeClr val="tx1"/>
-              </a:solidFill>
-              <a:latin typeface="Liberation Mono"/>
-              <a:cs typeface="Liberation Mono"/>
-            </a:endParaRPr>
-          </a:p>
-          <a:p>
-            <a:pPr>
-              <a:defRPr/>
-            </a:pPr>
-            <a:r>
-              <a:rPr lang="en" sz="1300" b="0" i="0" u="none" strike="noStrike" cap="none" spc="0">
+            <a:endParaRPr sz="1300" b="0" i="0" u="none" strike="noStrike" cap="none" spc="0" dirty="0">
+              <a:solidFill>
+                <a:schemeClr val="tx1"/>
+              </a:solidFill>
+              <a:latin typeface="Liberation Mono"/>
+              <a:cs typeface="Liberation Mono"/>
+            </a:endParaRPr>
+          </a:p>
+          <a:p>
+            <a:pPr>
+              <a:defRPr/>
+            </a:pPr>
+            <a:r>
+              <a:rPr lang="en" sz="1300" b="0" i="0" u="none" strike="noStrike" cap="none" spc="0" dirty="0">
                 <a:solidFill>
                   <a:schemeClr val="tx1"/>
                 </a:solidFill>
@@ -14059,20 +15846,20 @@
               </a:rPr>
               <a:t>    boolean exists(int volunteerId, LocalDate date);</a:t>
             </a:r>
-            <a:endParaRPr sz="1300" b="0" i="0" u="none" strike="noStrike" cap="none" spc="0">
-              <a:solidFill>
-                <a:schemeClr val="tx1"/>
-              </a:solidFill>
-              <a:latin typeface="Liberation Mono"/>
-              <a:cs typeface="Liberation Mono"/>
-            </a:endParaRPr>
-          </a:p>
-          <a:p>
-            <a:pPr>
-              <a:defRPr/>
-            </a:pPr>
-            <a:r>
-              <a:rPr lang="en" sz="1300" b="0" i="0" u="none" strike="noStrike" cap="none" spc="0">
+            <a:endParaRPr sz="1300" b="0" i="0" u="none" strike="noStrike" cap="none" spc="0" dirty="0">
+              <a:solidFill>
+                <a:schemeClr val="tx1"/>
+              </a:solidFill>
+              <a:latin typeface="Liberation Mono"/>
+              <a:cs typeface="Liberation Mono"/>
+            </a:endParaRPr>
+          </a:p>
+          <a:p>
+            <a:pPr>
+              <a:defRPr/>
+            </a:pPr>
+            <a:r>
+              <a:rPr lang="en" sz="1300" b="0" i="0" u="none" strike="noStrike" cap="none" spc="0" dirty="0">
                 <a:solidFill>
                   <a:schemeClr val="tx1"/>
                 </a:solidFill>
@@ -14082,20 +15869,20 @@
               </a:rPr>
               <a:t>    List&lt;VolunteerAvailableDate&gt; findByVolunteerId(int volunteerId);</a:t>
             </a:r>
-            <a:endParaRPr sz="1300" b="0" i="0" u="none" strike="noStrike" cap="none" spc="0">
-              <a:solidFill>
-                <a:schemeClr val="tx1"/>
-              </a:solidFill>
-              <a:latin typeface="Liberation Mono"/>
-              <a:cs typeface="Liberation Mono"/>
-            </a:endParaRPr>
-          </a:p>
-          <a:p>
-            <a:pPr>
-              <a:defRPr/>
-            </a:pPr>
-            <a:r>
-              <a:rPr lang="en" sz="1300" b="0" i="0" u="none" strike="noStrike" cap="none" spc="0">
+            <a:endParaRPr sz="1300" b="0" i="0" u="none" strike="noStrike" cap="none" spc="0" dirty="0">
+              <a:solidFill>
+                <a:schemeClr val="tx1"/>
+              </a:solidFill>
+              <a:latin typeface="Liberation Mono"/>
+              <a:cs typeface="Liberation Mono"/>
+            </a:endParaRPr>
+          </a:p>
+          <a:p>
+            <a:pPr>
+              <a:defRPr/>
+            </a:pPr>
+            <a:r>
+              <a:rPr lang="en" sz="1300" b="0" i="0" u="none" strike="noStrike" cap="none" spc="0" dirty="0">
                 <a:solidFill>
                   <a:schemeClr val="tx1"/>
                 </a:solidFill>
@@ -14105,20 +15892,20 @@
               </a:rPr>
               <a:t>    List&lt;VolunteerAvailableDate&gt; findByDate(LocalDate date);</a:t>
             </a:r>
-            <a:endParaRPr sz="1300" b="0" i="0" u="none" strike="noStrike" cap="none" spc="0">
-              <a:solidFill>
-                <a:schemeClr val="tx1"/>
-              </a:solidFill>
-              <a:latin typeface="Liberation Mono"/>
-              <a:cs typeface="Liberation Mono"/>
-            </a:endParaRPr>
-          </a:p>
-          <a:p>
-            <a:pPr>
-              <a:defRPr/>
-            </a:pPr>
-            <a:r>
-              <a:rPr lang="en" sz="1300" b="0" i="0" u="none" strike="noStrike" cap="none" spc="0">
+            <a:endParaRPr sz="1300" b="0" i="0" u="none" strike="noStrike" cap="none" spc="0" dirty="0">
+              <a:solidFill>
+                <a:schemeClr val="tx1"/>
+              </a:solidFill>
+              <a:latin typeface="Liberation Mono"/>
+              <a:cs typeface="Liberation Mono"/>
+            </a:endParaRPr>
+          </a:p>
+          <a:p>
+            <a:pPr>
+              <a:defRPr/>
+            </a:pPr>
+            <a:r>
+              <a:rPr lang="en" sz="1300" b="0" i="0" u="none" strike="noStrike" cap="none" spc="0" dirty="0">
                 <a:solidFill>
                   <a:schemeClr val="tx1"/>
                 </a:solidFill>
@@ -14129,7 +15916,7 @@
               <a:t>    </a:t>
             </a:r>
             <a:r>
-              <a:rPr lang="en" sz="1300" b="1" i="0" u="none" strike="noStrike" cap="none" spc="0">
+              <a:rPr lang="en" sz="1300" b="1" i="0" u="none" strike="noStrike" cap="none" spc="0" dirty="0">
                 <a:solidFill>
                   <a:schemeClr val="tx1"/>
                 </a:solidFill>
@@ -14139,20 +15926,20 @@
               </a:rPr>
               <a:t>List&lt;VolunteerAvailableDate&gt; findByYearMonth(YearMonth yearMonth);</a:t>
             </a:r>
-            <a:endParaRPr sz="1300" b="1" i="0" u="none" strike="noStrike" cap="none" spc="0">
-              <a:solidFill>
-                <a:schemeClr val="tx1"/>
-              </a:solidFill>
-              <a:latin typeface="Liberation Mono"/>
-              <a:cs typeface="Liberation Mono"/>
-            </a:endParaRPr>
-          </a:p>
-          <a:p>
-            <a:pPr>
-              <a:defRPr/>
-            </a:pPr>
-            <a:r>
-              <a:rPr lang="en" sz="1300" b="0" i="0" u="none" strike="noStrike" cap="none" spc="0">
+            <a:endParaRPr sz="1300" b="1" i="0" u="none" strike="noStrike" cap="none" spc="0" dirty="0">
+              <a:solidFill>
+                <a:schemeClr val="tx1"/>
+              </a:solidFill>
+              <a:latin typeface="Liberation Mono"/>
+              <a:cs typeface="Liberation Mono"/>
+            </a:endParaRPr>
+          </a:p>
+          <a:p>
+            <a:pPr>
+              <a:defRPr/>
+            </a:pPr>
+            <a:r>
+              <a:rPr lang="en" sz="1300" b="0" i="0" u="none" strike="noStrike" cap="none" spc="0" dirty="0">
                 <a:solidFill>
                   <a:schemeClr val="tx1"/>
                 </a:solidFill>
@@ -14162,18 +15949,18 @@
               </a:rPr>
               <a:t>}</a:t>
             </a:r>
-            <a:endParaRPr/>
-          </a:p>
-        </p:txBody>
-      </p:sp>
-      <p:sp>
-        <p:nvSpPr>
-          <p:cNvPr id="1145214106" name=""/>
+            <a:endParaRPr dirty="0"/>
+          </a:p>
+        </p:txBody>
+      </p:sp>
+      <p:sp>
+        <p:nvSpPr>
+          <p:cNvPr id="1145214106" name="CasellaDiTesto 1145214105"/>
           <p:cNvSpPr txBox="1"/>
           <p:nvPr/>
         </p:nvSpPr>
         <p:spPr bwMode="auto">
-          <a:xfrm rot="0" flipH="0" flipV="0">
+          <a:xfrm>
             <a:off x="9974624" y="309823"/>
             <a:ext cx="1998118" cy="640440"/>
           </a:xfrm>
@@ -14183,9 +15970,10 @@
           <a:noFill/>
         </p:spPr>
         <p:txBody>
-          <a:bodyPr vertOverflow="overflow" horzOverflow="overflow" vert="horz" wrap="square" lIns="91440" tIns="45720" rIns="91440" bIns="45720" numCol="1" spcCol="0" rtlCol="0" fromWordArt="0" anchor="ctr" anchorCtr="0" forceAA="0" upright="0" compatLnSpc="0">
+          <a:bodyPr vertOverflow="overflow" horzOverflow="overflow" vert="horz" wrap="square" lIns="91440" tIns="45720" rIns="91440" bIns="45720" numCol="1" spcCol="0" rtlCol="0" fromWordArt="0" anchor="ctr" anchorCtr="0" forceAA="0" compatLnSpc="0">
             <a:spAutoFit/>
           </a:bodyPr>
+          <a:lstStyle/>
           <a:p>
             <a:pPr algn="ctr">
               <a:defRPr/>
@@ -14223,20 +16011,12 @@
   <p:clrMapOvr>
     <a:masterClrMapping/>
   </p:clrMapOvr>
-  <mc:AlternateContent xmlns:mc="http://schemas.openxmlformats.org/markup-compatibility/2006">
-    <mc:Choice xmlns:p159="http://schemas.microsoft.com/office/powerpoint/2015/09/main" xmlns:p14="http://schemas.microsoft.com/office/powerpoint/2010/main" Requires="p159">
-      <p:transition p14:dur="2000" advClick="1"/>
-    </mc:Choice>
-    <mc:Fallback>
-      <p:transition advClick="1"/>
-    </mc:Fallback>
-  </mc:AlternateContent>
 </p:sld>
 </file>
 
 <file path=ppt/slides/slide8.xml><?xml version="1.0" encoding="utf-8"?>
-<p:sld xmlns:a="http://schemas.openxmlformats.org/drawingml/2006/main" xmlns:r="http://schemas.openxmlformats.org/officeDocument/2006/relationships" xmlns:p="http://schemas.openxmlformats.org/presentationml/2006/main" xmlns:m="http://schemas.openxmlformats.org/officeDocument/2006/math" xmlns:w="http://schemas.openxmlformats.org/wordprocessingml/2006/main" xmlns:mc="http://schemas.openxmlformats.org/markup-compatibility/2006" showMasterPhAnim="0" showMasterSp="1" show="1">
-  <p:cSld name="">
+<p:sld xmlns:a="http://schemas.openxmlformats.org/drawingml/2006/main" xmlns:r="http://schemas.openxmlformats.org/officeDocument/2006/relationships" xmlns:p="http://schemas.openxmlformats.org/presentationml/2006/main" showMasterPhAnim="0">
+  <p:cSld>
     <p:spTree>
       <p:nvGrpSpPr>
         <p:cNvPr id="1" name=""/>
@@ -14253,7 +16033,7 @@
       </p:grpSpPr>
       <p:sp>
         <p:nvSpPr>
-          <p:cNvPr id="1163515143" name="Titolo 1"/>
+          <p:cNvPr id="707966385" name="Titolo 1"/>
           <p:cNvSpPr>
             <a:spLocks noGrp="1"/>
           </p:cNvSpPr>
@@ -14270,7 +16050,7 @@
               <a:defRPr/>
             </a:pPr>
             <a:r>
-              <a:rPr lang="en" b="1">
+              <a:rPr lang="en" b="1" dirty="0">
                 <a:solidFill>
                   <a:srgbClr val="0070C0"/>
                 </a:solidFill>
@@ -14278,30 +16058,15 @@
                 <a:ea typeface="Noto Sans"/>
                 <a:cs typeface="Noto Sans"/>
               </a:rPr>
-              <a:t>GRASP 2</a:t>
-            </a:r>
-            <a:r>
-              <a:rPr lang="en"/>
-              <a:t> </a:t>
-            </a:r>
-            <a:r>
-              <a:rPr lang="en" b="1">
-                <a:solidFill>
-                  <a:srgbClr val="0070C0"/>
-                </a:solidFill>
-                <a:latin typeface="Noto Sans"/>
-                <a:ea typeface="Noto Sans"/>
-                <a:cs typeface="Noto Sans"/>
-              </a:rPr>
-              <a:t>– pure fabrication?</a:t>
-            </a:r>
-            <a:endParaRPr/>
-          </a:p>
-        </p:txBody>
-      </p:sp>
-      <p:sp>
-        <p:nvSpPr>
-          <p:cNvPr id="1259316431" name="Segnaposto contenuto 2"/>
+              <a:t>GRASP 2 - Controller</a:t>
+            </a:r>
+            <a:endParaRPr dirty="0"/>
+          </a:p>
+        </p:txBody>
+      </p:sp>
+      <p:sp>
+        <p:nvSpPr>
+          <p:cNvPr id="783455782" name="Segnaposto contenuto 2"/>
           <p:cNvSpPr>
             <a:spLocks noGrp="1"/>
           </p:cNvSpPr>
@@ -14320,10 +16085,77 @@
               <a:defRPr/>
             </a:pPr>
             <a:r>
-              <a:rPr lang="en"/>
-              <a:t>Parlare dei service in quanto classi non presenti nel modello di dominio ma dedicate ad ospitare la logica di funzionamento del programma, permettendo inoltre un basso accoppiamento tra le classi coninvolte (es in BookingService gli oggetti Model non si parlano mai tra loro, avviene tutto tramite il service) </a:t>
-            </a:r>
-            <a:endParaRPr/>
+              <a:rPr lang="it-IT" noProof="0" dirty="0"/>
+              <a:t>Il </a:t>
+            </a:r>
+            <a:r>
+              <a:rPr lang="it-IT" noProof="0" dirty="0" err="1"/>
+              <a:t>layer</a:t>
+            </a:r>
+            <a:r>
+              <a:rPr lang="it-IT" noProof="0" dirty="0"/>
+              <a:t> di </a:t>
+            </a:r>
+            <a:r>
+              <a:rPr lang="it-IT" noProof="0" dirty="0" err="1"/>
+              <a:t>Rest</a:t>
+            </a:r>
+            <a:r>
+              <a:rPr lang="it-IT" noProof="0" dirty="0"/>
+              <a:t> Controller riceve dalla </a:t>
+            </a:r>
+            <a:r>
+              <a:rPr lang="it-IT" noProof="0" dirty="0" err="1"/>
+              <a:t>View</a:t>
+            </a:r>
+            <a:r>
+              <a:rPr lang="it-IT" noProof="0" dirty="0"/>
+              <a:t> chiamate di API che lui definisce. Una volta che riceve la chiamata, il </a:t>
+            </a:r>
+            <a:r>
+              <a:rPr lang="it-IT" noProof="0" dirty="0" err="1"/>
+              <a:t>Rest</a:t>
+            </a:r>
+            <a:r>
+              <a:rPr lang="it-IT" noProof="0" dirty="0"/>
+              <a:t> controller delega lo svolgimento della operazione al </a:t>
+            </a:r>
+            <a:r>
+              <a:rPr lang="it-IT" noProof="0" dirty="0" err="1"/>
+              <a:t>layer</a:t>
+            </a:r>
+            <a:r>
+              <a:rPr lang="it-IT" noProof="0" dirty="0"/>
+              <a:t> dei Service, che si occupano di recuperare a loro volta i dati necessari dal DB e applicare la logica di business, che viene poi ritornata al controller. </a:t>
+            </a:r>
+            <a:r>
+              <a:rPr lang="it-IT" dirty="0"/>
+              <a:t>Viene poi fornita la risposta ricevuta all’utente che ha effettuato la richiesta.</a:t>
+            </a:r>
+          </a:p>
+          <a:p>
+            <a:pPr marL="0" indent="0">
+              <a:buFont typeface="Arial"/>
+              <a:buNone/>
+              <a:defRPr/>
+            </a:pPr>
+            <a:endParaRPr lang="it-IT" noProof="0" dirty="0"/>
+          </a:p>
+          <a:p>
+            <a:pPr marL="0" indent="0">
+              <a:buFont typeface="Arial"/>
+              <a:buNone/>
+              <a:defRPr/>
+            </a:pPr>
+            <a:endParaRPr lang="it-IT" dirty="0"/>
+          </a:p>
+          <a:p>
+            <a:pPr marL="0" indent="0">
+              <a:buFont typeface="Arial"/>
+              <a:buNone/>
+              <a:defRPr/>
+            </a:pPr>
+            <a:endParaRPr lang="it-IT" noProof="0" dirty="0"/>
           </a:p>
         </p:txBody>
       </p:sp>
@@ -14332,27 +16164,19 @@
   <p:clrMapOvr>
     <a:masterClrMapping/>
   </p:clrMapOvr>
-  <mc:AlternateContent xmlns:mc="http://schemas.openxmlformats.org/markup-compatibility/2006">
-    <mc:Choice xmlns:p159="http://schemas.microsoft.com/office/powerpoint/2015/09/main" xmlns:p14="http://schemas.microsoft.com/office/powerpoint/2010/main" Requires="p159">
-      <p:transition p14:dur="2000" advClick="1"/>
-    </mc:Choice>
-    <mc:Fallback>
-      <p:transition advClick="1"/>
-    </mc:Fallback>
-  </mc:AlternateContent>
 </p:sld>
 </file>
 
 <file path=ppt/slides/slide9.xml><?xml version="1.0" encoding="utf-8"?>
-<p:sld xmlns:a="http://schemas.openxmlformats.org/drawingml/2006/main" xmlns:r="http://schemas.openxmlformats.org/officeDocument/2006/relationships" xmlns:p="http://schemas.openxmlformats.org/presentationml/2006/main" xmlns:m="http://schemas.openxmlformats.org/officeDocument/2006/math" xmlns:w="http://schemas.openxmlformats.org/wordprocessingml/2006/main" xmlns:mc="http://schemas.openxmlformats.org/markup-compatibility/2006" showMasterPhAnim="0" showMasterSp="1" show="1">
-  <p:cSld name="">
+<p:sld xmlns:a="http://schemas.openxmlformats.org/drawingml/2006/main" xmlns:r="http://schemas.openxmlformats.org/officeDocument/2006/relationships" xmlns:p="http://schemas.openxmlformats.org/presentationml/2006/main">
+  <p:cSld>
     <p:spTree>
       <p:nvGrpSpPr>
         <p:cNvPr id="1" name=""/>
         <p:cNvGrpSpPr/>
         <p:nvPr/>
       </p:nvGrpSpPr>
-      <p:grpSpPr bwMode="auto">
+      <p:grpSpPr>
         <a:xfrm>
           <a:off x="0" y="0"/>
           <a:ext cx="0" cy="0"/>
@@ -14362,7 +16186,13 @@
       </p:grpSpPr>
       <p:sp>
         <p:nvSpPr>
-          <p:cNvPr id="707966385" name="Titolo 1"/>
+          <p:cNvPr id="2" name="Titolo 1">
+            <a:extLst>
+              <a:ext uri="{FF2B5EF4-FFF2-40B4-BE49-F238E27FC236}">
+                <a16:creationId xmlns:a16="http://schemas.microsoft.com/office/drawing/2014/main" id="{3AB6A9EC-0653-BF20-87C5-5B4516EC5BB9}"/>
+              </a:ext>
+            </a:extLst>
+          </p:cNvPr>
           <p:cNvSpPr>
             <a:spLocks noGrp="1"/>
           </p:cNvSpPr>
@@ -14370,16 +16200,13 @@
             <p:ph type="title"/>
           </p:nvPr>
         </p:nvSpPr>
-        <p:spPr bwMode="auto"/>
+        <p:spPr/>
         <p:txBody>
           <a:bodyPr/>
           <a:lstStyle/>
           <a:p>
-            <a:pPr>
-              <a:defRPr/>
-            </a:pPr>
-            <a:r>
-              <a:rPr lang="en" b="1">
+            <a:r>
+              <a:rPr lang="en" b="1" dirty="0">
                 <a:solidFill>
                   <a:srgbClr val="0070C0"/>
                 </a:solidFill>
@@ -14387,15 +16214,21 @@
                 <a:ea typeface="Noto Sans"/>
                 <a:cs typeface="Noto Sans"/>
               </a:rPr>
-              <a:t>GRASP Controller</a:t>
-            </a:r>
-            <a:endParaRPr/>
-          </a:p>
-        </p:txBody>
-      </p:sp>
-      <p:sp>
-        <p:nvSpPr>
-          <p:cNvPr id="783455782" name="Segnaposto contenuto 2"/>
+              <a:t>GRASP 2 - Controller</a:t>
+            </a:r>
+            <a:endParaRPr lang="it-IT" dirty="0"/>
+          </a:p>
+        </p:txBody>
+      </p:sp>
+      <p:sp>
+        <p:nvSpPr>
+          <p:cNvPr id="3" name="Segnaposto contenuto 2">
+            <a:extLst>
+              <a:ext uri="{FF2B5EF4-FFF2-40B4-BE49-F238E27FC236}">
+                <a16:creationId xmlns:a16="http://schemas.microsoft.com/office/drawing/2014/main" id="{4B61C465-83C7-EE10-10BA-E96D69FF6064}"/>
+              </a:ext>
+            </a:extLst>
+          </p:cNvPr>
           <p:cNvSpPr>
             <a:spLocks noGrp="1"/>
           </p:cNvSpPr>
@@ -14403,42 +16236,92 @@
             <p:ph idx="1"/>
           </p:nvPr>
         </p:nvSpPr>
-        <p:spPr bwMode="auto"/>
+        <p:spPr/>
         <p:txBody>
           <a:bodyPr/>
           <a:lstStyle/>
           <a:p>
             <a:pPr marL="0" indent="0">
-              <a:buFont typeface="Arial"/>
               <a:buNone/>
-              <a:defRPr/>
-            </a:pPr>
-            <a:r>
-              <a:rPr lang="en"/>
-              <a:t>Fare esempio con i Rest controller</a:t>
-            </a:r>
-            <a:endParaRPr/>
-          </a:p>
-        </p:txBody>
-      </p:sp>
+            </a:pPr>
+            <a:r>
+              <a:rPr lang="en-GB" dirty="0" err="1"/>
+              <a:t>Esempio</a:t>
+            </a:r>
+            <a:r>
+              <a:rPr lang="en-GB" dirty="0"/>
+              <a:t> </a:t>
+            </a:r>
+            <a:r>
+              <a:rPr lang="en-GB" dirty="0" err="1"/>
+              <a:t>chiamata</a:t>
+            </a:r>
+            <a:r>
+              <a:rPr lang="en-GB" dirty="0"/>
+              <a:t> GET da </a:t>
+            </a:r>
+            <a:r>
+              <a:rPr lang="en-GB" dirty="0" err="1"/>
+              <a:t>BookingController</a:t>
+            </a:r>
+            <a:endParaRPr lang="en-GB" dirty="0"/>
+          </a:p>
+          <a:p>
+            <a:pPr marL="0" indent="0">
+              <a:buNone/>
+            </a:pPr>
+            <a:br>
+              <a:rPr lang="en-GB" dirty="0"/>
+            </a:br>
+            <a:endParaRPr lang="it-IT" dirty="0"/>
+          </a:p>
+        </p:txBody>
+      </p:sp>
+      <p:pic>
+        <p:nvPicPr>
+          <p:cNvPr id="11" name="Immagine 10">
+            <a:extLst>
+              <a:ext uri="{FF2B5EF4-FFF2-40B4-BE49-F238E27FC236}">
+                <a16:creationId xmlns:a16="http://schemas.microsoft.com/office/drawing/2014/main" id="{67A9A17E-3C15-73F6-C3BA-7CFFC5415145}"/>
+              </a:ext>
+            </a:extLst>
+          </p:cNvPr>
+          <p:cNvPicPr>
+            <a:picLocks noChangeAspect="1"/>
+          </p:cNvPicPr>
+          <p:nvPr/>
+        </p:nvPicPr>
+        <p:blipFill>
+          <a:blip r:embed="rId2"/>
+          <a:stretch>
+            <a:fillRect/>
+          </a:stretch>
+        </p:blipFill>
+        <p:spPr>
+          <a:xfrm>
+            <a:off x="838200" y="2443739"/>
+            <a:ext cx="10536120" cy="3115110"/>
+          </a:xfrm>
+          <a:prstGeom prst="rect">
+            <a:avLst/>
+          </a:prstGeom>
+        </p:spPr>
+      </p:pic>
     </p:spTree>
+    <p:extLst>
+      <p:ext uri="{BB962C8B-B14F-4D97-AF65-F5344CB8AC3E}">
+        <p14:creationId xmlns:p14="http://schemas.microsoft.com/office/powerpoint/2010/main" val="1460049476"/>
+      </p:ext>
+    </p:extLst>
   </p:cSld>
   <p:clrMapOvr>
     <a:masterClrMapping/>
   </p:clrMapOvr>
-  <mc:AlternateContent xmlns:mc="http://schemas.openxmlformats.org/markup-compatibility/2006">
-    <mc:Choice xmlns:p159="http://schemas.microsoft.com/office/powerpoint/2015/09/main" xmlns:p14="http://schemas.microsoft.com/office/powerpoint/2010/main" Requires="p159">
-      <p:transition p14:dur="2000" advClick="1"/>
-    </mc:Choice>
-    <mc:Fallback>
-      <p:transition advClick="1"/>
-    </mc:Fallback>
-  </mc:AlternateContent>
 </p:sld>
 </file>
 
 <file path=ppt/theme/theme1.xml><?xml version="1.0" encoding="utf-8"?>
-<a:theme xmlns:a="http://schemas.openxmlformats.org/drawingml/2006/main" xmlns:r="http://schemas.openxmlformats.org/officeDocument/2006/relationships" xmlns:p="http://schemas.openxmlformats.org/presentationml/2006/main" name="Office Theme">
+<a:theme xmlns:a="http://schemas.openxmlformats.org/drawingml/2006/main" name="Office Theme">
   <a:themeElements>
     <a:clrScheme name="New Office">
       <a:dk1>
@@ -14629,11 +16512,12 @@
     </a:fmtScheme>
   </a:themeElements>
   <a:objectDefaults/>
+  <a:extraClrSchemeLst/>
 </a:theme>
 </file>
 
 <file path=ppt/theme/theme2.xml><?xml version="1.0" encoding="utf-8"?>
-<a:theme xmlns:a="http://schemas.openxmlformats.org/drawingml/2006/main" xmlns:r="http://schemas.openxmlformats.org/officeDocument/2006/relationships" xmlns:p="http://schemas.openxmlformats.org/presentationml/2006/main" name="Office Theme">
+<a:theme xmlns:a="http://schemas.openxmlformats.org/drawingml/2006/main" name="Office Theme">
   <a:themeElements>
     <a:clrScheme name="Office">
       <a:dk1>
@@ -14824,5 +16708,6 @@
     </a:fmtScheme>
   </a:themeElements>
   <a:objectDefaults/>
+  <a:extraClrSchemeLst/>
 </a:theme>
 </file>
--- a/doc/Presentazione/Presentazione_ingsw_parteB.pptx
+++ b/doc/Presentazione/Presentazione_ingsw_parteB.pptx
@@ -5,7 +5,7 @@
     <p:sldMasterId id="2147483648" r:id="rId1"/>
   </p:sldMasterIdLst>
   <p:notesMasterIdLst>
-    <p:notesMasterId r:id="rId28"/>
+    <p:notesMasterId r:id="rId29"/>
   </p:notesMasterIdLst>
   <p:sldIdLst>
     <p:sldId id="256" r:id="rId2"/>
@@ -28,12 +28,13 @@
     <p:sldId id="270" r:id="rId19"/>
     <p:sldId id="271" r:id="rId20"/>
     <p:sldId id="272" r:id="rId21"/>
-    <p:sldId id="273" r:id="rId22"/>
-    <p:sldId id="274" r:id="rId23"/>
-    <p:sldId id="275" r:id="rId24"/>
-    <p:sldId id="276" r:id="rId25"/>
-    <p:sldId id="277" r:id="rId26"/>
-    <p:sldId id="278" r:id="rId27"/>
+    <p:sldId id="283" r:id="rId22"/>
+    <p:sldId id="273" r:id="rId23"/>
+    <p:sldId id="274" r:id="rId24"/>
+    <p:sldId id="275" r:id="rId25"/>
+    <p:sldId id="276" r:id="rId26"/>
+    <p:sldId id="277" r:id="rId27"/>
+    <p:sldId id="278" r:id="rId28"/>
   </p:sldIdLst>
   <p:sldSz cx="12192000" cy="6858000"/>
   <p:notesSz cx="6858000" cy="9144000"/>
@@ -239,7 +240,7 @@
             </a:pPr>
             <a:fld id="{3632E96E-41F7-40C5-8419-297958CC00FA}" type="datetimeFigureOut">
               <a:rPr lang="it-IT"/>
-              <a:t>18/10/2025</a:t>
+              <a:t>21/10/2025</a:t>
             </a:fld>
             <a:endParaRPr lang="it-IT"/>
           </a:p>
@@ -1217,7 +1218,13 @@
   <p:cSld>
     <p:spTree>
       <p:nvGrpSpPr>
-        <p:cNvPr id="1" name=""/>
+        <p:cNvPr id="1" name="">
+          <a:extLst>
+            <a:ext uri="{FF2B5EF4-FFF2-40B4-BE49-F238E27FC236}">
+              <a16:creationId xmlns:a16="http://schemas.microsoft.com/office/drawing/2014/main" id="{B9954D92-08BB-8D32-AF05-DC8506BDB160}"/>
+            </a:ext>
+          </a:extLst>
+        </p:cNvPr>
         <p:cNvGrpSpPr/>
         <p:nvPr/>
       </p:nvGrpSpPr>
@@ -1231,7 +1238,13 @@
       </p:grpSpPr>
       <p:sp>
         <p:nvSpPr>
-          <p:cNvPr id="1040290452" name="Slide Image Placeholder 1"/>
+          <p:cNvPr id="826642841" name="Slide Image Placeholder 1">
+            <a:extLst>
+              <a:ext uri="{FF2B5EF4-FFF2-40B4-BE49-F238E27FC236}">
+                <a16:creationId xmlns:a16="http://schemas.microsoft.com/office/drawing/2014/main" id="{30BDA293-78D8-566E-8A49-8BE2EB08CDFA}"/>
+              </a:ext>
+            </a:extLst>
+          </p:cNvPr>
           <p:cNvSpPr>
             <a:spLocks noGrp="1" noRot="1" noChangeAspect="1"/>
           </p:cNvSpPr>
@@ -1243,7 +1256,13 @@
       </p:sp>
       <p:sp>
         <p:nvSpPr>
-          <p:cNvPr id="1677648333" name="Notes Placeholder 2"/>
+          <p:cNvPr id="170725483" name="Notes Placeholder 2">
+            <a:extLst>
+              <a:ext uri="{FF2B5EF4-FFF2-40B4-BE49-F238E27FC236}">
+                <a16:creationId xmlns:a16="http://schemas.microsoft.com/office/drawing/2014/main" id="{B38277C6-7785-DA60-E63B-D73F1E683ECF}"/>
+              </a:ext>
+            </a:extLst>
+          </p:cNvPr>
           <p:cNvSpPr>
             <a:spLocks noGrp="1"/>
           </p:cNvSpPr>
@@ -1265,7 +1284,13 @@
       </p:sp>
       <p:sp>
         <p:nvSpPr>
-          <p:cNvPr id="1466620103" name="Slide Number Placeholder 3"/>
+          <p:cNvPr id="599569182" name="Slide Number Placeholder 3">
+            <a:extLst>
+              <a:ext uri="{FF2B5EF4-FFF2-40B4-BE49-F238E27FC236}">
+                <a16:creationId xmlns:a16="http://schemas.microsoft.com/office/drawing/2014/main" id="{296C3905-55EB-5812-C962-20710D4A5712}"/>
+              </a:ext>
+            </a:extLst>
+          </p:cNvPr>
           <p:cNvSpPr>
             <a:spLocks noGrp="1"/>
           </p:cNvSpPr>
@@ -1281,7 +1306,7 @@
             <a:pPr>
               <a:defRPr/>
             </a:pPr>
-            <a:fld id="{C1B0ED42-154C-37AC-EA60-9CE5185831C2}" type="slidenum">
+            <a:fld id="{ECC01B90-6EF3-4614-96E6-28D52D163363}" type="slidenum">
               <a:rPr/>
               <a:t>21</a:t>
             </a:fld>
@@ -1290,6 +1315,11 @@
         </p:txBody>
       </p:sp>
     </p:spTree>
+    <p:extLst>
+      <p:ext uri="{BB962C8B-B14F-4D97-AF65-F5344CB8AC3E}">
+        <p14:creationId xmlns:p14="http://schemas.microsoft.com/office/powerpoint/2010/main" val="1030222392"/>
+      </p:ext>
+    </p:extLst>
   </p:cSld>
   <p:clrMapOvr>
     <a:masterClrMapping/>
@@ -1316,7 +1346,7 @@
       </p:grpSpPr>
       <p:sp>
         <p:nvSpPr>
-          <p:cNvPr id="361328429" name="Slide Image Placeholder 1"/>
+          <p:cNvPr id="1040290452" name="Slide Image Placeholder 1"/>
           <p:cNvSpPr>
             <a:spLocks noGrp="1" noRot="1" noChangeAspect="1"/>
           </p:cNvSpPr>
@@ -1328,7 +1358,7 @@
       </p:sp>
       <p:sp>
         <p:nvSpPr>
-          <p:cNvPr id="2076207588" name="Notes Placeholder 2"/>
+          <p:cNvPr id="1677648333" name="Notes Placeholder 2"/>
           <p:cNvSpPr>
             <a:spLocks noGrp="1"/>
           </p:cNvSpPr>
@@ -1350,7 +1380,7 @@
       </p:sp>
       <p:sp>
         <p:nvSpPr>
-          <p:cNvPr id="1342391195" name="Slide Number Placeholder 3"/>
+          <p:cNvPr id="1466620103" name="Slide Number Placeholder 3"/>
           <p:cNvSpPr>
             <a:spLocks noGrp="1"/>
           </p:cNvSpPr>
@@ -1366,7 +1396,7 @@
             <a:pPr>
               <a:defRPr/>
             </a:pPr>
-            <a:fld id="{97CE3B5A-C7B8-C31E-D05F-021B77FFEF0E}" type="slidenum">
+            <a:fld id="{C1B0ED42-154C-37AC-EA60-9CE5185831C2}" type="slidenum">
               <a:rPr/>
               <a:t>22</a:t>
             </a:fld>
@@ -1401,7 +1431,7 @@
       </p:grpSpPr>
       <p:sp>
         <p:nvSpPr>
-          <p:cNvPr id="304025030" name="Slide Image Placeholder 1"/>
+          <p:cNvPr id="361328429" name="Slide Image Placeholder 1"/>
           <p:cNvSpPr>
             <a:spLocks noGrp="1" noRot="1" noChangeAspect="1"/>
           </p:cNvSpPr>
@@ -1413,7 +1443,7 @@
       </p:sp>
       <p:sp>
         <p:nvSpPr>
-          <p:cNvPr id="1216711154" name="Notes Placeholder 2"/>
+          <p:cNvPr id="2076207588" name="Notes Placeholder 2"/>
           <p:cNvSpPr>
             <a:spLocks noGrp="1"/>
           </p:cNvSpPr>
@@ -1435,7 +1465,7 @@
       </p:sp>
       <p:sp>
         <p:nvSpPr>
-          <p:cNvPr id="1437157295" name="Slide Number Placeholder 3"/>
+          <p:cNvPr id="1342391195" name="Slide Number Placeholder 3"/>
           <p:cNvSpPr>
             <a:spLocks noGrp="1"/>
           </p:cNvSpPr>
@@ -1451,7 +1481,7 @@
             <a:pPr>
               <a:defRPr/>
             </a:pPr>
-            <a:fld id="{373A4F64-1DDB-898D-3141-351BAF57DA12}" type="slidenum">
+            <a:fld id="{97CE3B5A-C7B8-C31E-D05F-021B77FFEF0E}" type="slidenum">
               <a:rPr/>
               <a:t>23</a:t>
             </a:fld>
@@ -1571,7 +1601,7 @@
       </p:grpSpPr>
       <p:sp>
         <p:nvSpPr>
-          <p:cNvPr id="358610792" name="Slide Image Placeholder 1"/>
+          <p:cNvPr id="304025030" name="Slide Image Placeholder 1"/>
           <p:cNvSpPr>
             <a:spLocks noGrp="1" noRot="1" noChangeAspect="1"/>
           </p:cNvSpPr>
@@ -1583,7 +1613,7 @@
       </p:sp>
       <p:sp>
         <p:nvSpPr>
-          <p:cNvPr id="976864696" name="Notes Placeholder 2"/>
+          <p:cNvPr id="1216711154" name="Notes Placeholder 2"/>
           <p:cNvSpPr>
             <a:spLocks noGrp="1"/>
           </p:cNvSpPr>
@@ -1605,7 +1635,7 @@
       </p:sp>
       <p:sp>
         <p:nvSpPr>
-          <p:cNvPr id="515598540" name="Slide Number Placeholder 3"/>
+          <p:cNvPr id="1437157295" name="Slide Number Placeholder 3"/>
           <p:cNvSpPr>
             <a:spLocks noGrp="1"/>
           </p:cNvSpPr>
@@ -1621,7 +1651,7 @@
             <a:pPr>
               <a:defRPr/>
             </a:pPr>
-            <a:fld id="{E0EEA2AC-6940-83FF-9A62-FDE019F8CFBA}" type="slidenum">
+            <a:fld id="{373A4F64-1DDB-898D-3141-351BAF57DA12}" type="slidenum">
               <a:rPr/>
               <a:t>24</a:t>
             </a:fld>
@@ -1656,7 +1686,7 @@
       </p:grpSpPr>
       <p:sp>
         <p:nvSpPr>
-          <p:cNvPr id="661484407" name="Slide Image Placeholder 1"/>
+          <p:cNvPr id="358610792" name="Slide Image Placeholder 1"/>
           <p:cNvSpPr>
             <a:spLocks noGrp="1" noRot="1" noChangeAspect="1"/>
           </p:cNvSpPr>
@@ -1668,7 +1698,7 @@
       </p:sp>
       <p:sp>
         <p:nvSpPr>
-          <p:cNvPr id="1567864133" name="Notes Placeholder 2"/>
+          <p:cNvPr id="976864696" name="Notes Placeholder 2"/>
           <p:cNvSpPr>
             <a:spLocks noGrp="1"/>
           </p:cNvSpPr>
@@ -1690,7 +1720,7 @@
       </p:sp>
       <p:sp>
         <p:nvSpPr>
-          <p:cNvPr id="356777442" name="Slide Number Placeholder 3"/>
+          <p:cNvPr id="515598540" name="Slide Number Placeholder 3"/>
           <p:cNvSpPr>
             <a:spLocks noGrp="1"/>
           </p:cNvSpPr>
@@ -1706,7 +1736,7 @@
             <a:pPr>
               <a:defRPr/>
             </a:pPr>
-            <a:fld id="{34DDF272-15C9-97B8-0696-B071723A3A34}" type="slidenum">
+            <a:fld id="{E0EEA2AC-6940-83FF-9A62-FDE019F8CFBA}" type="slidenum">
               <a:rPr/>
               <a:t>25</a:t>
             </a:fld>
@@ -1741,6 +1771,91 @@
       </p:grpSpPr>
       <p:sp>
         <p:nvSpPr>
+          <p:cNvPr id="661484407" name="Slide Image Placeholder 1"/>
+          <p:cNvSpPr>
+            <a:spLocks noGrp="1" noRot="1" noChangeAspect="1"/>
+          </p:cNvSpPr>
+          <p:nvPr>
+            <p:ph type="sldImg"/>
+          </p:nvPr>
+        </p:nvSpPr>
+        <p:spPr bwMode="auto"/>
+      </p:sp>
+      <p:sp>
+        <p:nvSpPr>
+          <p:cNvPr id="1567864133" name="Notes Placeholder 2"/>
+          <p:cNvSpPr>
+            <a:spLocks noGrp="1"/>
+          </p:cNvSpPr>
+          <p:nvPr>
+            <p:ph type="body" idx="1"/>
+          </p:nvPr>
+        </p:nvSpPr>
+        <p:spPr bwMode="auto"/>
+        <p:txBody>
+          <a:bodyPr/>
+          <a:lstStyle/>
+          <a:p>
+            <a:pPr>
+              <a:defRPr/>
+            </a:pPr>
+            <a:endParaRPr/>
+          </a:p>
+        </p:txBody>
+      </p:sp>
+      <p:sp>
+        <p:nvSpPr>
+          <p:cNvPr id="356777442" name="Slide Number Placeholder 3"/>
+          <p:cNvSpPr>
+            <a:spLocks noGrp="1"/>
+          </p:cNvSpPr>
+          <p:nvPr>
+            <p:ph type="sldNum" sz="quarter" idx="10"/>
+          </p:nvPr>
+        </p:nvSpPr>
+        <p:spPr bwMode="auto"/>
+        <p:txBody>
+          <a:bodyPr/>
+          <a:lstStyle/>
+          <a:p>
+            <a:pPr>
+              <a:defRPr/>
+            </a:pPr>
+            <a:fld id="{34DDF272-15C9-97B8-0696-B071723A3A34}" type="slidenum">
+              <a:rPr/>
+              <a:t>26</a:t>
+            </a:fld>
+            <a:endParaRPr/>
+          </a:p>
+        </p:txBody>
+      </p:sp>
+    </p:spTree>
+  </p:cSld>
+  <p:clrMapOvr>
+    <a:masterClrMapping/>
+  </p:clrMapOvr>
+</p:notes>
+</file>
+
+<file path=ppt/notesSlides/notesSlide23.xml><?xml version="1.0" encoding="utf-8"?>
+<p:notes xmlns:a="http://schemas.openxmlformats.org/drawingml/2006/main" xmlns:r="http://schemas.openxmlformats.org/officeDocument/2006/relationships" xmlns:p="http://schemas.openxmlformats.org/presentationml/2006/main">
+  <p:cSld>
+    <p:spTree>
+      <p:nvGrpSpPr>
+        <p:cNvPr id="1" name=""/>
+        <p:cNvGrpSpPr/>
+        <p:nvPr/>
+      </p:nvGrpSpPr>
+      <p:grpSpPr bwMode="auto">
+        <a:xfrm>
+          <a:off x="0" y="0"/>
+          <a:ext cx="0" cy="0"/>
+          <a:chOff x="0" y="0"/>
+          <a:chExt cx="0" cy="0"/>
+        </a:xfrm>
+      </p:grpSpPr>
+      <p:sp>
+        <p:nvSpPr>
           <p:cNvPr id="1078166060" name="Slide Image Placeholder 1"/>
           <p:cNvSpPr>
             <a:spLocks noGrp="1" noRot="1" noChangeAspect="1"/>
@@ -1793,7 +1908,7 @@
             </a:pPr>
             <a:fld id="{63195650-B0F5-4319-E0B1-4A630F16C93D}" type="slidenum">
               <a:rPr/>
-              <a:t>26</a:t>
+              <a:t>27</a:t>
             </a:fld>
             <a:endParaRPr/>
           </a:p>
@@ -2540,7 +2655,7 @@
             </a:pPr>
             <a:fld id="{BCC18F51-09EC-435C-A3BA-64A766E099C0}" type="datetimeFigureOut">
               <a:rPr lang="it-IT"/>
-              <a:t>18/10/2025</a:t>
+              <a:t>21/10/2025</a:t>
             </a:fld>
             <a:endParaRPr lang="it-IT"/>
           </a:p>
@@ -2729,7 +2844,7 @@
             </a:pPr>
             <a:fld id="{BCC18F51-09EC-435C-A3BA-64A766E099C0}" type="datetimeFigureOut">
               <a:rPr lang="it-IT"/>
-              <a:t>18/10/2025</a:t>
+              <a:t>21/10/2025</a:t>
             </a:fld>
             <a:endParaRPr lang="it-IT"/>
           </a:p>
@@ -2928,7 +3043,7 @@
             </a:pPr>
             <a:fld id="{BCC18F51-09EC-435C-A3BA-64A766E099C0}" type="datetimeFigureOut">
               <a:rPr lang="it-IT"/>
-              <a:t>18/10/2025</a:t>
+              <a:t>21/10/2025</a:t>
             </a:fld>
             <a:endParaRPr lang="it-IT"/>
           </a:p>
@@ -3117,7 +3232,7 @@
             </a:pPr>
             <a:fld id="{BCC18F51-09EC-435C-A3BA-64A766E099C0}" type="datetimeFigureOut">
               <a:rPr lang="it-IT"/>
-              <a:t>18/10/2025</a:t>
+              <a:t>21/10/2025</a:t>
             </a:fld>
             <a:endParaRPr lang="it-IT"/>
           </a:p>
@@ -3372,7 +3487,7 @@
             </a:pPr>
             <a:fld id="{BCC18F51-09EC-435C-A3BA-64A766E099C0}" type="datetimeFigureOut">
               <a:rPr lang="it-IT"/>
-              <a:t>18/10/2025</a:t>
+              <a:t>21/10/2025</a:t>
             </a:fld>
             <a:endParaRPr lang="it-IT"/>
           </a:p>
@@ -3636,7 +3751,7 @@
             </a:pPr>
             <a:fld id="{BCC18F51-09EC-435C-A3BA-64A766E099C0}" type="datetimeFigureOut">
               <a:rPr lang="it-IT"/>
-              <a:t>18/10/2025</a:t>
+              <a:t>21/10/2025</a:t>
             </a:fld>
             <a:endParaRPr lang="it-IT"/>
           </a:p>
@@ -4041,7 +4156,7 @@
             </a:pPr>
             <a:fld id="{BCC18F51-09EC-435C-A3BA-64A766E099C0}" type="datetimeFigureOut">
               <a:rPr lang="it-IT"/>
-              <a:t>18/10/2025</a:t>
+              <a:t>21/10/2025</a:t>
             </a:fld>
             <a:endParaRPr lang="it-IT"/>
           </a:p>
@@ -4165,7 +4280,7 @@
             </a:pPr>
             <a:fld id="{BCC18F51-09EC-435C-A3BA-64A766E099C0}" type="datetimeFigureOut">
               <a:rPr lang="it-IT"/>
-              <a:t>18/10/2025</a:t>
+              <a:t>21/10/2025</a:t>
             </a:fld>
             <a:endParaRPr lang="it-IT"/>
           </a:p>
@@ -4264,7 +4379,7 @@
             </a:pPr>
             <a:fld id="{BCC18F51-09EC-435C-A3BA-64A766E099C0}" type="datetimeFigureOut">
               <a:rPr lang="it-IT"/>
-              <a:t>18/10/2025</a:t>
+              <a:t>21/10/2025</a:t>
             </a:fld>
             <a:endParaRPr lang="it-IT"/>
           </a:p>
@@ -4563,7 +4678,7 @@
             </a:pPr>
             <a:fld id="{BCC18F51-09EC-435C-A3BA-64A766E099C0}" type="datetimeFigureOut">
               <a:rPr lang="it-IT"/>
-              <a:t>18/10/2025</a:t>
+              <a:t>21/10/2025</a:t>
             </a:fld>
             <a:endParaRPr lang="it-IT"/>
           </a:p>
@@ -4831,7 +4946,7 @@
             </a:pPr>
             <a:fld id="{BCC18F51-09EC-435C-A3BA-64A766E099C0}" type="datetimeFigureOut">
               <a:rPr lang="it-IT"/>
-              <a:t>18/10/2025</a:t>
+              <a:t>21/10/2025</a:t>
             </a:fld>
             <a:endParaRPr lang="it-IT"/>
           </a:p>
@@ -5086,7 +5201,7 @@
             </a:pPr>
             <a:fld id="{BCC18F51-09EC-435C-A3BA-64A766E099C0}" type="datetimeFigureOut">
               <a:rPr lang="it-IT"/>
-              <a:t>18/10/2025</a:t>
+              <a:t>21/10/2025</a:t>
             </a:fld>
             <a:endParaRPr lang="it-IT"/>
           </a:p>
@@ -5936,6 +6051,111 @@
           </a:prstGeom>
         </p:spPr>
       </p:pic>
+      <p:sp>
+        <p:nvSpPr>
+          <p:cNvPr id="2" name="CasellaDiTesto 1">
+            <a:extLst>
+              <a:ext uri="{FF2B5EF4-FFF2-40B4-BE49-F238E27FC236}">
+                <a16:creationId xmlns:a16="http://schemas.microsoft.com/office/drawing/2014/main" id="{5CF7E812-58CE-C362-DE26-0E237B3B90CB}"/>
+              </a:ext>
+            </a:extLst>
+          </p:cNvPr>
+          <p:cNvSpPr txBox="1"/>
+          <p:nvPr/>
+        </p:nvSpPr>
+        <p:spPr>
+          <a:xfrm>
+            <a:off x="6654800" y="1517505"/>
+            <a:ext cx="4698999" cy="5078313"/>
+          </a:xfrm>
+          <a:prstGeom prst="rect">
+            <a:avLst/>
+          </a:prstGeom>
+          <a:noFill/>
+        </p:spPr>
+        <p:txBody>
+          <a:bodyPr wrap="square" rtlCol="0">
+            <a:spAutoFit/>
+          </a:bodyPr>
+          <a:lstStyle/>
+          <a:p>
+            <a:r>
+              <a:rPr lang="it-IT" dirty="0"/>
+              <a:t>L’interazione tra le classi dei diversi strati (dominio, persistenza) non avviene direttamente ma mediante delle interfacce che costituiscono un’astrazione delle implementazioni.</a:t>
+            </a:r>
+          </a:p>
+          <a:p>
+            <a:r>
+              <a:rPr lang="it-IT" dirty="0"/>
+              <a:t>In questo modo si evita di avere una dipendenza diretta tra una classe e l’altra.</a:t>
+            </a:r>
+          </a:p>
+          <a:p>
+            <a:r>
+              <a:rPr lang="it-IT" dirty="0"/>
+              <a:t>Un esempio sono le interfacce del package </a:t>
+            </a:r>
+            <a:r>
+              <a:rPr lang="it-IT" dirty="0" err="1"/>
+              <a:t>RepositoryPort</a:t>
+            </a:r>
+            <a:r>
+              <a:rPr lang="it-IT" dirty="0"/>
+              <a:t>.</a:t>
+            </a:r>
+          </a:p>
+          <a:p>
+            <a:r>
+              <a:rPr lang="it-IT" dirty="0"/>
+              <a:t>Le </a:t>
+            </a:r>
+            <a:r>
+              <a:rPr lang="it-IT" dirty="0" err="1"/>
+              <a:t>RepositoryPort</a:t>
+            </a:r>
+            <a:r>
+              <a:rPr lang="it-IT" dirty="0"/>
+              <a:t> permettono di avere un punto di stabilità per l’accesso ai dati dal DB da parte dei Services.</a:t>
+            </a:r>
+          </a:p>
+          <a:p>
+            <a:r>
+              <a:rPr lang="it-IT" dirty="0"/>
+              <a:t>Le </a:t>
+            </a:r>
+            <a:r>
+              <a:rPr lang="it-IT" dirty="0" err="1"/>
+              <a:t>jpaRepositoryAdapter</a:t>
+            </a:r>
+            <a:r>
+              <a:rPr lang="it-IT" dirty="0"/>
+              <a:t>, chiamate tramite le </a:t>
+            </a:r>
+            <a:r>
+              <a:rPr lang="it-IT" dirty="0" err="1"/>
+              <a:t>RepositoryPort</a:t>
+            </a:r>
+            <a:r>
+              <a:rPr lang="it-IT" dirty="0"/>
+              <a:t>, producono oggetti Model utilizzabili dai Services.</a:t>
+            </a:r>
+          </a:p>
+          <a:p>
+            <a:r>
+              <a:rPr lang="it-IT" dirty="0"/>
+              <a:t>Gli oggetti Model vengono prodotti a partire dagli oggetti </a:t>
+            </a:r>
+            <a:r>
+              <a:rPr lang="it-IT" dirty="0" err="1"/>
+              <a:t>Entity</a:t>
+            </a:r>
+            <a:r>
+              <a:rPr lang="it-IT" dirty="0"/>
+              <a:t> recuperati tramite le Repository.</a:t>
+            </a:r>
+          </a:p>
+        </p:txBody>
+      </p:sp>
     </p:spTree>
   </p:cSld>
   <p:clrMapOvr>
@@ -10211,7 +10431,13 @@
   <p:cSld>
     <p:spTree>
       <p:nvGrpSpPr>
-        <p:cNvPr id="1" name=""/>
+        <p:cNvPr id="1" name="">
+          <a:extLst>
+            <a:ext uri="{FF2B5EF4-FFF2-40B4-BE49-F238E27FC236}">
+              <a16:creationId xmlns:a16="http://schemas.microsoft.com/office/drawing/2014/main" id="{8A06FA70-2F8E-4AA2-E9F0-98BD87EF1E7E}"/>
+            </a:ext>
+          </a:extLst>
+        </p:cNvPr>
         <p:cNvGrpSpPr/>
         <p:nvPr/>
       </p:nvGrpSpPr>
@@ -10225,7 +10451,13 @@
       </p:grpSpPr>
       <p:sp>
         <p:nvSpPr>
-          <p:cNvPr id="59495650" name="Titolo 1"/>
+          <p:cNvPr id="492211538" name="Titolo 1">
+            <a:extLst>
+              <a:ext uri="{FF2B5EF4-FFF2-40B4-BE49-F238E27FC236}">
+                <a16:creationId xmlns:a16="http://schemas.microsoft.com/office/drawing/2014/main" id="{70C467B1-0892-6E05-CEF5-966133EE1DBC}"/>
+              </a:ext>
+            </a:extLst>
+          </p:cNvPr>
           <p:cNvSpPr>
             <a:spLocks noGrp="1"/>
           </p:cNvSpPr>
@@ -10235,8 +10467,8 @@
         </p:nvSpPr>
         <p:spPr bwMode="auto">
           <a:xfrm>
-            <a:off x="838198" y="365123"/>
-            <a:ext cx="5555216" cy="1325561"/>
+            <a:off x="838197" y="12697"/>
+            <a:ext cx="10515600" cy="1325560"/>
           </a:xfrm>
         </p:spPr>
         <p:txBody>
@@ -10255,88 +10487,84 @@
                 <a:ea typeface="Noto Sans"/>
                 <a:cs typeface="Noto Sans"/>
               </a:rPr>
-              <a:t>Refactoring</a:t>
-            </a:r>
-            <a:endParaRPr/>
-          </a:p>
-        </p:txBody>
-      </p:sp>
-      <p:sp>
-        <p:nvSpPr>
-          <p:cNvPr id="104998061" name="Segnaposto contenuto 2"/>
-          <p:cNvSpPr>
-            <a:spLocks noGrp="1"/>
-          </p:cNvSpPr>
-          <p:nvPr>
-            <p:ph idx="1"/>
-          </p:nvPr>
-        </p:nvSpPr>
-        <p:spPr bwMode="auto"/>
-        <p:txBody>
-          <a:bodyPr/>
-          <a:lstStyle/>
-          <a:p>
-            <a:pPr marL="0" indent="0">
-              <a:buFont typeface="Arial"/>
-              <a:buNone/>
-              <a:defRPr/>
-            </a:pPr>
-            <a:r>
-              <a:rPr lang="en"/>
-              <a:t>Il refactoring della classe VisitPlanService si é reso necessario perché:</a:t>
-            </a:r>
-          </a:p>
-          <a:p>
-            <a:pPr>
-              <a:defRPr/>
-            </a:pPr>
-            <a:r>
-              <a:rPr lang="en"/>
-              <a:t>contiene l’algoritmo fondamentale per il funzionamento del programma</a:t>
-            </a:r>
-          </a:p>
-          <a:p>
-            <a:pPr>
-              <a:defRPr/>
-            </a:pPr>
-            <a:r>
-              <a:rPr lang="en"/>
-              <a:t>é probabile che possa subire modifiche/aggiunte in futuro</a:t>
-            </a:r>
-          </a:p>
-          <a:p>
-            <a:pPr>
-              <a:defRPr/>
-            </a:pPr>
-            <a:r>
-              <a:rPr lang="en"/>
-              <a:t>combina molte informazioni diverse: visite, tipi di visite, date non disponibili, volontari e relative disponibilitá</a:t>
-            </a:r>
-          </a:p>
-          <a:p>
-            <a:pPr marL="0" indent="0">
-              <a:buFont typeface="Arial"/>
-              <a:buNone/>
-              <a:defRPr/>
-            </a:pPr>
-            <a:r>
-              <a:rPr lang="en"/>
-              <a:t>Di seguito i pattern di refactoring applicati</a:t>
-            </a:r>
-            <a:endParaRPr/>
-          </a:p>
-        </p:txBody>
-      </p:sp>
-      <p:sp>
-        <p:nvSpPr>
-          <p:cNvPr id="27321058" name="CasellaDiTesto 27321057"/>
+              <a:t>Testing White Box – createVisitPlan()</a:t>
+            </a:r>
+            <a:endParaRPr b="1">
+              <a:solidFill>
+                <a:srgbClr val="0070C0"/>
+              </a:solidFill>
+              <a:latin typeface="Noto Sans"/>
+              <a:cs typeface="Noto Sans"/>
+            </a:endParaRPr>
+          </a:p>
+        </p:txBody>
+      </p:sp>
+      <p:sp>
+        <p:nvSpPr>
+          <p:cNvPr id="564294578" name="CasellaDiTesto 564294577">
+            <a:extLst>
+              <a:ext uri="{FF2B5EF4-FFF2-40B4-BE49-F238E27FC236}">
+                <a16:creationId xmlns:a16="http://schemas.microsoft.com/office/drawing/2014/main" id="{00FBA261-03E8-C3A3-BCE1-C0A53EEBD92E}"/>
+              </a:ext>
+            </a:extLst>
+          </p:cNvPr>
           <p:cNvSpPr txBox="1"/>
           <p:nvPr/>
         </p:nvSpPr>
         <p:spPr bwMode="auto">
           <a:xfrm>
-            <a:off x="5753406" y="844844"/>
-            <a:ext cx="5851705" cy="518519"/>
+            <a:off x="4793024" y="1244131"/>
+            <a:ext cx="6958337" cy="214568"/>
+          </a:xfrm>
+          <a:prstGeom prst="roundRect">
+            <a:avLst>
+              <a:gd name="adj" fmla="val 5796"/>
+            </a:avLst>
+          </a:prstGeom>
+          <a:solidFill>
+            <a:schemeClr val="bg1">
+              <a:alpha val="49999"/>
+            </a:schemeClr>
+          </a:solidFill>
+          <a:ln w="12699">
+            <a:solidFill>
+              <a:schemeClr val="tx1"/>
+            </a:solidFill>
+            <a:prstDash val="solid"/>
+          </a:ln>
+        </p:spPr>
+        <p:txBody>
+          <a:bodyPr vertOverflow="overflow" horzOverflow="overflow" vert="horz" wrap="square" lIns="91440" tIns="45720" rIns="91440" bIns="45720" numCol="1" spcCol="0" rtlCol="0" fromWordArt="0" anchor="t" anchorCtr="0" forceAA="0" compatLnSpc="0">
+            <a:spAutoFit/>
+          </a:bodyPr>
+          <a:lstStyle/>
+          <a:p>
+            <a:pPr>
+              <a:defRPr/>
+            </a:pPr>
+            <a:endParaRPr sz="800" dirty="0">
+              <a:latin typeface="Liberation Mono"/>
+              <a:cs typeface="Liberation Mono"/>
+            </a:endParaRPr>
+          </a:p>
+        </p:txBody>
+      </p:sp>
+      <p:sp>
+        <p:nvSpPr>
+          <p:cNvPr id="1756827701" name="CasellaDiTesto 1756827700">
+            <a:extLst>
+              <a:ext uri="{FF2B5EF4-FFF2-40B4-BE49-F238E27FC236}">
+                <a16:creationId xmlns:a16="http://schemas.microsoft.com/office/drawing/2014/main" id="{E34BCAF3-7FC6-A198-8939-8B7E896EAC9D}"/>
+              </a:ext>
+            </a:extLst>
+          </p:cNvPr>
+          <p:cNvSpPr txBox="1"/>
+          <p:nvPr/>
+        </p:nvSpPr>
+        <p:spPr bwMode="auto">
+          <a:xfrm>
+            <a:off x="5230047" y="878011"/>
+            <a:ext cx="6150029" cy="366119"/>
           </a:xfrm>
           <a:prstGeom prst="rect">
             <a:avLst/>
@@ -10353,25 +10581,55 @@
               <a:defRPr/>
             </a:pPr>
             <a:r>
-              <a:rPr lang="en" sz="2800" b="1">
-                <a:solidFill>
-                  <a:srgbClr val="0070C0"/>
-                </a:solidFill>
-                <a:latin typeface="DejaVu Sans Condensed"/>
-                <a:ea typeface="DejaVu Sans Condensed"/>
-                <a:cs typeface="DejaVu Sans Condensed"/>
-              </a:rPr>
-              <a:t>Caso di VisitPlanService</a:t>
-            </a:r>
-            <a:endParaRPr b="1">
-              <a:solidFill>
-                <a:srgbClr val="0070C0"/>
-              </a:solidFill>
-            </a:endParaRPr>
-          </a:p>
-        </p:txBody>
-      </p:sp>
+              <a:rPr lang="en" dirty="0"/>
+              <a:t>Algoritmo eseguito correttamente – piano visita creato</a:t>
+            </a:r>
+            <a:endParaRPr dirty="0"/>
+          </a:p>
+        </p:txBody>
+      </p:sp>
+      <p:pic>
+        <p:nvPicPr>
+          <p:cNvPr id="5" name="Immagine 4">
+            <a:extLst>
+              <a:ext uri="{FF2B5EF4-FFF2-40B4-BE49-F238E27FC236}">
+                <a16:creationId xmlns:a16="http://schemas.microsoft.com/office/drawing/2014/main" id="{38EF49D9-D459-F0B0-9965-B9C41C14F5B0}"/>
+              </a:ext>
+            </a:extLst>
+          </p:cNvPr>
+          <p:cNvPicPr>
+            <a:picLocks noChangeAspect="1"/>
+          </p:cNvPicPr>
+          <p:nvPr/>
+        </p:nvPicPr>
+        <p:blipFill>
+          <a:blip r:embed="rId3">
+            <a:extLst>
+              <a:ext uri="{28A0092B-C50C-407E-A947-70E740481C1C}">
+                <a14:useLocalDpi xmlns:a14="http://schemas.microsoft.com/office/drawing/2010/main" val="0"/>
+              </a:ext>
+            </a:extLst>
+          </a:blip>
+          <a:stretch>
+            <a:fillRect/>
+          </a:stretch>
+        </p:blipFill>
+        <p:spPr>
+          <a:xfrm>
+            <a:off x="351733" y="1061070"/>
+            <a:ext cx="3857574" cy="5613399"/>
+          </a:xfrm>
+          <a:prstGeom prst="rect">
+            <a:avLst/>
+          </a:prstGeom>
+        </p:spPr>
+      </p:pic>
     </p:spTree>
+    <p:extLst>
+      <p:ext uri="{BB962C8B-B14F-4D97-AF65-F5344CB8AC3E}">
+        <p14:creationId xmlns:p14="http://schemas.microsoft.com/office/powerpoint/2010/main" val="1031557222"/>
+      </p:ext>
+    </p:extLst>
   </p:cSld>
   <p:clrMapOvr>
     <a:masterClrMapping/>
@@ -10398,7 +10656,7 @@
       </p:grpSpPr>
       <p:sp>
         <p:nvSpPr>
-          <p:cNvPr id="149416002" name="Titolo 1"/>
+          <p:cNvPr id="59495650" name="Titolo 1"/>
           <p:cNvSpPr>
             <a:spLocks noGrp="1"/>
           </p:cNvSpPr>
@@ -10408,8 +10666,8 @@
         </p:nvSpPr>
         <p:spPr bwMode="auto">
           <a:xfrm>
-            <a:off x="839459" y="37802"/>
-            <a:ext cx="10515600" cy="1325562"/>
+            <a:off x="838198" y="365123"/>
+            <a:ext cx="5555216" cy="1325561"/>
           </a:xfrm>
         </p:spPr>
         <p:txBody>
@@ -10430,26 +10688,86 @@
               </a:rPr>
               <a:t>Refactoring</a:t>
             </a:r>
-            <a:endParaRPr b="1">
-              <a:solidFill>
-                <a:srgbClr val="0070C0"/>
-              </a:solidFill>
-              <a:latin typeface="Noto Sans"/>
-              <a:cs typeface="Noto Sans"/>
-            </a:endParaRPr>
-          </a:p>
-        </p:txBody>
-      </p:sp>
-      <p:sp>
-        <p:nvSpPr>
-          <p:cNvPr id="1040471417" name="CasellaDiTesto 1040471416"/>
+            <a:endParaRPr/>
+          </a:p>
+        </p:txBody>
+      </p:sp>
+      <p:sp>
+        <p:nvSpPr>
+          <p:cNvPr id="104998061" name="Segnaposto contenuto 2"/>
+          <p:cNvSpPr>
+            <a:spLocks noGrp="1"/>
+          </p:cNvSpPr>
+          <p:nvPr>
+            <p:ph idx="1"/>
+          </p:nvPr>
+        </p:nvSpPr>
+        <p:spPr bwMode="auto"/>
+        <p:txBody>
+          <a:bodyPr/>
+          <a:lstStyle/>
+          <a:p>
+            <a:pPr marL="0" indent="0">
+              <a:buFont typeface="Arial"/>
+              <a:buNone/>
+              <a:defRPr/>
+            </a:pPr>
+            <a:r>
+              <a:rPr lang="en"/>
+              <a:t>Il refactoring della classe VisitPlanService si é reso necessario perché:</a:t>
+            </a:r>
+          </a:p>
+          <a:p>
+            <a:pPr>
+              <a:defRPr/>
+            </a:pPr>
+            <a:r>
+              <a:rPr lang="en"/>
+              <a:t>contiene l’algoritmo fondamentale per il funzionamento del programma</a:t>
+            </a:r>
+          </a:p>
+          <a:p>
+            <a:pPr>
+              <a:defRPr/>
+            </a:pPr>
+            <a:r>
+              <a:rPr lang="en"/>
+              <a:t>é probabile che possa subire modifiche/aggiunte in futuro</a:t>
+            </a:r>
+          </a:p>
+          <a:p>
+            <a:pPr>
+              <a:defRPr/>
+            </a:pPr>
+            <a:r>
+              <a:rPr lang="en"/>
+              <a:t>combina molte informazioni diverse: visite, tipi di visite, date non disponibili, volontari e relative disponibilitá</a:t>
+            </a:r>
+          </a:p>
+          <a:p>
+            <a:pPr marL="0" indent="0">
+              <a:buFont typeface="Arial"/>
+              <a:buNone/>
+              <a:defRPr/>
+            </a:pPr>
+            <a:r>
+              <a:rPr lang="en"/>
+              <a:t>Di seguito i pattern di refactoring applicati</a:t>
+            </a:r>
+            <a:endParaRPr/>
+          </a:p>
+        </p:txBody>
+      </p:sp>
+      <p:sp>
+        <p:nvSpPr>
+          <p:cNvPr id="27321058" name="CasellaDiTesto 27321057"/>
           <p:cNvSpPr txBox="1"/>
           <p:nvPr/>
         </p:nvSpPr>
         <p:spPr bwMode="auto">
           <a:xfrm>
-            <a:off x="4915206" y="441324"/>
-            <a:ext cx="5860344" cy="518519"/>
+            <a:off x="5753406" y="844844"/>
+            <a:ext cx="5851705" cy="518519"/>
           </a:xfrm>
           <a:prstGeom prst="rect">
             <a:avLst/>
@@ -10474,653 +10792,12 @@
                 <a:ea typeface="DejaVu Sans Condensed"/>
                 <a:cs typeface="DejaVu Sans Condensed"/>
               </a:rPr>
-              <a:t>Extract Method - 1</a:t>
+              <a:t>Caso di VisitPlanService</a:t>
             </a:r>
             <a:endParaRPr b="1">
               <a:solidFill>
                 <a:srgbClr val="0070C0"/>
               </a:solidFill>
-            </a:endParaRPr>
-          </a:p>
-        </p:txBody>
-      </p:sp>
-      <p:sp>
-        <p:nvSpPr>
-          <p:cNvPr id="1689386774" name="CasellaDiTesto 1689386773"/>
-          <p:cNvSpPr txBox="1"/>
-          <p:nvPr/>
-        </p:nvSpPr>
-        <p:spPr bwMode="auto">
-          <a:xfrm>
-            <a:off x="457916" y="1160462"/>
-            <a:ext cx="11276167" cy="2524456"/>
-          </a:xfrm>
-          <a:prstGeom prst="roundRect">
-            <a:avLst>
-              <a:gd name="adj" fmla="val 5796"/>
-            </a:avLst>
-          </a:prstGeom>
-          <a:solidFill>
-            <a:schemeClr val="bg1">
-              <a:alpha val="49999"/>
-            </a:schemeClr>
-          </a:solidFill>
-          <a:ln w="12699">
-            <a:solidFill>
-              <a:schemeClr val="tx1"/>
-            </a:solidFill>
-            <a:prstDash val="solid"/>
-          </a:ln>
-        </p:spPr>
-        <p:txBody>
-          <a:bodyPr vertOverflow="overflow" horzOverflow="overflow" vert="horz" wrap="square" lIns="91440" tIns="45720" rIns="91440" bIns="45720" numCol="1" spcCol="0" rtlCol="0" fromWordArt="0" anchor="t" anchorCtr="0" forceAA="0" compatLnSpc="0">
-            <a:spAutoFit/>
-          </a:bodyPr>
-          <a:lstStyle/>
-          <a:p>
-            <a:pPr>
-              <a:defRPr/>
-            </a:pPr>
-            <a:r>
-              <a:rPr lang="it-IT" sz="1400" b="0" i="0" u="none" strike="noStrike" cap="none" spc="0">
-                <a:solidFill>
-                  <a:schemeClr val="tx1"/>
-                </a:solidFill>
-                <a:latin typeface="Liberation Mono"/>
-                <a:ea typeface="Liberation Mono"/>
-                <a:cs typeface="Liberation Mono"/>
-              </a:rPr>
-              <a:t>for (Visit visit : monthVisits) {</a:t>
-            </a:r>
-            <a:endParaRPr sz="1400" b="0" i="0" u="none" strike="noStrike" cap="none" spc="0">
-              <a:solidFill>
-                <a:schemeClr val="tx1"/>
-              </a:solidFill>
-              <a:latin typeface="Liberation Mono"/>
-              <a:cs typeface="Liberation Mono"/>
-            </a:endParaRPr>
-          </a:p>
-          <a:p>
-            <a:pPr>
-              <a:defRPr/>
-            </a:pPr>
-            <a:r>
-              <a:rPr lang="it-IT" sz="1400" b="0" i="0" u="none" strike="noStrike" cap="none" spc="0">
-                <a:solidFill>
-                  <a:schemeClr val="tx1"/>
-                </a:solidFill>
-                <a:latin typeface="Liberation Mono"/>
-                <a:ea typeface="Liberation Mono"/>
-                <a:cs typeface="Liberation Mono"/>
-              </a:rPr>
-              <a:t>            LocalDate day = visit.getDate();</a:t>
-            </a:r>
-            <a:endParaRPr sz="1400" b="0" i="0" u="none" strike="noStrike" cap="none" spc="0">
-              <a:solidFill>
-                <a:schemeClr val="tx1"/>
-              </a:solidFill>
-              <a:latin typeface="Liberation Mono"/>
-              <a:cs typeface="Liberation Mono"/>
-            </a:endParaRPr>
-          </a:p>
-          <a:p>
-            <a:pPr>
-              <a:defRPr/>
-            </a:pPr>
-            <a:r>
-              <a:rPr lang="it-IT" sz="1400" b="0" i="0" u="none" strike="noStrike" cap="none" spc="0">
-                <a:solidFill>
-                  <a:schemeClr val="tx1"/>
-                </a:solidFill>
-                <a:latin typeface="Liberation Mono"/>
-                <a:ea typeface="Liberation Mono"/>
-                <a:cs typeface="Liberation Mono"/>
-              </a:rPr>
-              <a:t>            List&lt;User&gt; availableVolunteers = new ArrayList&lt;&gt;();</a:t>
-            </a:r>
-            <a:endParaRPr sz="1400" b="0" i="0" u="none" strike="noStrike" cap="none" spc="0">
-              <a:solidFill>
-                <a:schemeClr val="tx1"/>
-              </a:solidFill>
-              <a:latin typeface="Liberation Mono"/>
-              <a:cs typeface="Liberation Mono"/>
-            </a:endParaRPr>
-          </a:p>
-          <a:p>
-            <a:pPr>
-              <a:defRPr/>
-            </a:pPr>
-            <a:endParaRPr sz="1400" b="0" i="0" u="none" strike="noStrike" cap="none" spc="0">
-              <a:solidFill>
-                <a:schemeClr val="tx1"/>
-              </a:solidFill>
-              <a:latin typeface="Liberation Mono"/>
-              <a:cs typeface="Liberation Mono"/>
-            </a:endParaRPr>
-          </a:p>
-          <a:p>
-            <a:pPr>
-              <a:defRPr/>
-            </a:pPr>
-            <a:r>
-              <a:rPr lang="it-IT" sz="1400" b="0" i="0" u="none" strike="noStrike" cap="none" spc="0">
-                <a:solidFill>
-                  <a:schemeClr val="tx1"/>
-                </a:solidFill>
-                <a:latin typeface="Liberation Mono"/>
-                <a:ea typeface="Liberation Mono"/>
-                <a:cs typeface="Liberation Mono"/>
-              </a:rPr>
-              <a:t>            // aggiunge alla lista availableVolunteers tutti i volontari che hanno dato</a:t>
-            </a:r>
-            <a:endParaRPr sz="1400" b="0" i="0" u="none" strike="noStrike" cap="none" spc="0">
-              <a:solidFill>
-                <a:schemeClr val="tx1"/>
-              </a:solidFill>
-              <a:latin typeface="Liberation Mono"/>
-              <a:cs typeface="Liberation Mono"/>
-            </a:endParaRPr>
-          </a:p>
-          <a:p>
-            <a:pPr>
-              <a:defRPr/>
-            </a:pPr>
-            <a:r>
-              <a:rPr lang="it-IT" sz="1400" b="0" i="0" u="none" strike="noStrike" cap="none" spc="0">
-                <a:solidFill>
-                  <a:schemeClr val="tx1"/>
-                </a:solidFill>
-                <a:latin typeface="Liberation Mono"/>
-                <a:ea typeface="Liberation Mono"/>
-                <a:cs typeface="Liberation Mono"/>
-              </a:rPr>
-              <a:t>            // disponibilitá per il</a:t>
-            </a:r>
-            <a:endParaRPr sz="1400" b="0" i="0" u="none" strike="noStrike" cap="none" spc="0">
-              <a:solidFill>
-                <a:schemeClr val="tx1"/>
-              </a:solidFill>
-              <a:latin typeface="Liberation Mono"/>
-              <a:cs typeface="Liberation Mono"/>
-            </a:endParaRPr>
-          </a:p>
-          <a:p>
-            <a:pPr>
-              <a:defRPr/>
-            </a:pPr>
-            <a:r>
-              <a:rPr lang="it-IT" sz="1400" b="0" i="0" u="none" strike="noStrike" cap="none" spc="0">
-                <a:solidFill>
-                  <a:schemeClr val="tx1"/>
-                </a:solidFill>
-                <a:latin typeface="Liberation Mono"/>
-                <a:ea typeface="Liberation Mono"/>
-                <a:cs typeface="Liberation Mono"/>
-              </a:rPr>
-              <a:t>            // giorno 'day'</a:t>
-            </a:r>
-            <a:endParaRPr sz="1400" b="0" i="0" u="none" strike="noStrike" cap="none" spc="0">
-              <a:solidFill>
-                <a:schemeClr val="tx1"/>
-              </a:solidFill>
-              <a:latin typeface="Liberation Mono"/>
-              <a:cs typeface="Liberation Mono"/>
-            </a:endParaRPr>
-          </a:p>
-          <a:p>
-            <a:pPr>
-              <a:defRPr/>
-            </a:pPr>
-            <a:r>
-              <a:rPr lang="it-IT" sz="1400" b="0" i="0" u="none" strike="noStrike" cap="none" spc="0">
-                <a:solidFill>
-                  <a:schemeClr val="tx1"/>
-                </a:solidFill>
-                <a:latin typeface="Liberation Mono"/>
-                <a:ea typeface="Liberation Mono"/>
-                <a:cs typeface="Liberation Mono"/>
-              </a:rPr>
-              <a:t>            monthAvailabilities.stream().filter(av -&gt; av.getAvailableDate().equals(day)) //</a:t>
-            </a:r>
-            <a:endParaRPr sz="1400" b="0" i="0" u="none" strike="noStrike" cap="none" spc="0">
-              <a:solidFill>
-                <a:schemeClr val="tx1"/>
-              </a:solidFill>
-              <a:latin typeface="Liberation Mono"/>
-              <a:cs typeface="Liberation Mono"/>
-            </a:endParaRPr>
-          </a:p>
-          <a:p>
-            <a:pPr>
-              <a:defRPr/>
-            </a:pPr>
-            <a:r>
-              <a:rPr lang="it-IT" sz="1400" b="0" i="0" u="none" strike="noStrike" cap="none" spc="0">
-                <a:solidFill>
-                  <a:schemeClr val="tx1"/>
-                </a:solidFill>
-                <a:latin typeface="Liberation Mono"/>
-                <a:ea typeface="Liberation Mono"/>
-                <a:cs typeface="Liberation Mono"/>
-              </a:rPr>
-              <a:t>                    // mappa le disponibilitá VolunteerAvailableDate con gli oggetti USER volontari</a:t>
-            </a:r>
-            <a:endParaRPr sz="1400" b="0" i="0" u="none" strike="noStrike" cap="none" spc="0">
-              <a:solidFill>
-                <a:schemeClr val="tx1"/>
-              </a:solidFill>
-              <a:latin typeface="Liberation Mono"/>
-              <a:cs typeface="Liberation Mono"/>
-            </a:endParaRPr>
-          </a:p>
-          <a:p>
-            <a:pPr>
-              <a:defRPr/>
-            </a:pPr>
-            <a:r>
-              <a:rPr lang="it-IT" sz="1400" b="0" i="0" u="none" strike="noStrike" cap="none" spc="0">
-                <a:solidFill>
-                  <a:schemeClr val="tx1"/>
-                </a:solidFill>
-                <a:latin typeface="Liberation Mono"/>
-                <a:ea typeface="Liberation Mono"/>
-                <a:cs typeface="Liberation Mono"/>
-              </a:rPr>
-              <a:t>                    .map(av -&gt; volunteerById(av.getVolunteerId(), volunteers)) //</a:t>
-            </a:r>
-            <a:endParaRPr sz="1400" b="0" i="0" u="none" strike="noStrike" cap="none" spc="0">
-              <a:solidFill>
-                <a:schemeClr val="tx1"/>
-              </a:solidFill>
-              <a:latin typeface="Liberation Mono"/>
-              <a:cs typeface="Liberation Mono"/>
-            </a:endParaRPr>
-          </a:p>
-          <a:p>
-            <a:pPr>
-              <a:defRPr/>
-            </a:pPr>
-            <a:r>
-              <a:rPr lang="it-IT" sz="1400" b="0" i="0" u="none" strike="noStrike" cap="none" spc="0">
-                <a:solidFill>
-                  <a:schemeClr val="tx1"/>
-                </a:solidFill>
-                <a:latin typeface="Liberation Mono"/>
-                <a:ea typeface="Liberation Mono"/>
-                <a:cs typeface="Liberation Mono"/>
-              </a:rPr>
-              <a:t>                    .forEach(availableVolunteers::add);</a:t>
-            </a:r>
-            <a:endParaRPr/>
-          </a:p>
-        </p:txBody>
-      </p:sp>
-      <p:sp>
-        <p:nvSpPr>
-          <p:cNvPr id="58203512" name="CasellaDiTesto 58203511"/>
-          <p:cNvSpPr txBox="1"/>
-          <p:nvPr/>
-        </p:nvSpPr>
-        <p:spPr bwMode="auto">
-          <a:xfrm>
-            <a:off x="457916" y="3827462"/>
-            <a:ext cx="11278686" cy="2966174"/>
-          </a:xfrm>
-          <a:prstGeom prst="roundRect">
-            <a:avLst>
-              <a:gd name="adj" fmla="val 5796"/>
-            </a:avLst>
-          </a:prstGeom>
-          <a:solidFill>
-            <a:schemeClr val="bg1">
-              <a:alpha val="49999"/>
-            </a:schemeClr>
-          </a:solidFill>
-          <a:ln w="12699">
-            <a:solidFill>
-              <a:schemeClr val="tx1"/>
-            </a:solidFill>
-            <a:prstDash val="solid"/>
-          </a:ln>
-        </p:spPr>
-        <p:txBody>
-          <a:bodyPr vertOverflow="overflow" horzOverflow="overflow" vert="horz" wrap="square" lIns="91440" tIns="45720" rIns="91440" bIns="45720" numCol="1" spcCol="0" rtlCol="0" fromWordArt="0" anchor="t" anchorCtr="0" forceAA="0" compatLnSpc="0">
-            <a:spAutoFit/>
-          </a:bodyPr>
-          <a:lstStyle/>
-          <a:p>
-            <a:pPr>
-              <a:defRPr/>
-            </a:pPr>
-            <a:r>
-              <a:rPr lang="en" sz="1400" b="0" i="0" u="none" strike="noStrike" cap="none" spc="0">
-                <a:solidFill>
-                  <a:schemeClr val="tx1"/>
-                </a:solidFill>
-                <a:latin typeface="Liberation Mono"/>
-                <a:ea typeface="Liberation Mono"/>
-                <a:cs typeface="Liberation Mono"/>
-              </a:rPr>
-              <a:t>for (Visit visit : nextMonthSortedVisits) {</a:t>
-            </a:r>
-            <a:endParaRPr sz="1400" b="0" i="0" u="none" strike="noStrike" cap="none" spc="0">
-              <a:solidFill>
-                <a:schemeClr val="tx1"/>
-              </a:solidFill>
-              <a:latin typeface="Liberation Mono"/>
-              <a:cs typeface="Liberation Mono"/>
-            </a:endParaRPr>
-          </a:p>
-          <a:p>
-            <a:pPr>
-              <a:defRPr/>
-            </a:pPr>
-            <a:r>
-              <a:rPr lang="en" sz="1400" b="0" i="0" u="none" strike="noStrike" cap="none" spc="0">
-                <a:solidFill>
-                  <a:schemeClr val="tx1"/>
-                </a:solidFill>
-                <a:latin typeface="Liberation Mono"/>
-                <a:ea typeface="Liberation Mono"/>
-                <a:cs typeface="Liberation Mono"/>
-              </a:rPr>
-              <a:t>    List&lt;Integer&gt; availableVolunteerIds = </a:t>
-            </a:r>
-            <a:endParaRPr sz="1400" b="0" i="0" u="none" strike="noStrike" cap="none" spc="0">
-              <a:solidFill>
-                <a:schemeClr val="tx1"/>
-              </a:solidFill>
-              <a:latin typeface="Liberation Mono"/>
-              <a:cs typeface="Liberation Mono"/>
-            </a:endParaRPr>
-          </a:p>
-          <a:p>
-            <a:pPr>
-              <a:defRPr/>
-            </a:pPr>
-            <a:r>
-              <a:rPr lang="en" sz="1400" b="0" i="0" u="none" strike="noStrike" cap="none" spc="0">
-                <a:solidFill>
-                  <a:schemeClr val="tx1"/>
-                </a:solidFill>
-                <a:latin typeface="Liberation Mono"/>
-                <a:ea typeface="Liberation Mono"/>
-                <a:cs typeface="Liberation Mono"/>
-              </a:rPr>
-              <a:t>	getAvailableVolunteersForVisitDate(visit, volunteerAvailabilitiesNextMonth);</a:t>
-            </a:r>
-            <a:endParaRPr sz="1400">
-              <a:latin typeface="Liberation Mono"/>
-              <a:cs typeface="Liberation Mono"/>
-            </a:endParaRPr>
-          </a:p>
-          <a:p>
-            <a:pPr>
-              <a:defRPr/>
-            </a:pPr>
-            <a:r>
-              <a:rPr lang="en" sz="1400" b="0" i="0" u="none" strike="noStrike" cap="none" spc="0">
-                <a:solidFill>
-                  <a:schemeClr val="tx1"/>
-                </a:solidFill>
-                <a:latin typeface="Liberation Mono"/>
-                <a:ea typeface="Liberation Mono"/>
-                <a:cs typeface="Liberation Mono"/>
-              </a:rPr>
-              <a:t>...</a:t>
-            </a:r>
-            <a:endParaRPr sz="1400">
-              <a:latin typeface="Liberation Mono"/>
-              <a:cs typeface="Liberation Mono"/>
-            </a:endParaRPr>
-          </a:p>
-          <a:p>
-            <a:pPr>
-              <a:defRPr/>
-            </a:pPr>
-            <a:endParaRPr sz="1400">
-              <a:latin typeface="Liberation Mono"/>
-              <a:cs typeface="Liberation Mono"/>
-            </a:endParaRPr>
-          </a:p>
-          <a:p>
-            <a:pPr>
-              <a:defRPr/>
-            </a:pPr>
-            <a:r>
-              <a:rPr lang="en" sz="1400" b="0" i="0" u="none" strike="noStrike" cap="none" spc="0">
-                <a:solidFill>
-                  <a:schemeClr val="tx1"/>
-                </a:solidFill>
-                <a:latin typeface="Liberation Mono"/>
-                <a:ea typeface="Liberation Mono"/>
-                <a:cs typeface="Liberation Mono"/>
-              </a:rPr>
-              <a:t>private List&lt;Integer&gt; getAvailableVolunteersForVisitDate(Visit visit, List&lt;VolunteerAvailableDate&gt; volunteerAvailabilitiesNextMonth) {</a:t>
-            </a:r>
-            <a:endParaRPr sz="1400" b="0" i="0" u="none" strike="noStrike" cap="none" spc="0">
-              <a:solidFill>
-                <a:schemeClr val="tx1"/>
-              </a:solidFill>
-              <a:latin typeface="Liberation Mono"/>
-              <a:cs typeface="Liberation Mono"/>
-            </a:endParaRPr>
-          </a:p>
-          <a:p>
-            <a:pPr>
-              <a:defRPr/>
-            </a:pPr>
-            <a:r>
-              <a:rPr lang="en" sz="1400" b="0" i="0" u="none" strike="noStrike" cap="none" spc="0">
-                <a:solidFill>
-                  <a:schemeClr val="tx1"/>
-                </a:solidFill>
-                <a:latin typeface="Liberation Mono"/>
-                <a:ea typeface="Liberation Mono"/>
-                <a:cs typeface="Liberation Mono"/>
-              </a:rPr>
-              <a:t>        return volunteerAvailabilitiesNextMonth.stream() //</a:t>
-            </a:r>
-            <a:endParaRPr sz="1400" b="0" i="0" u="none" strike="noStrike" cap="none" spc="0">
-              <a:solidFill>
-                <a:schemeClr val="tx1"/>
-              </a:solidFill>
-              <a:latin typeface="Liberation Mono"/>
-              <a:cs typeface="Liberation Mono"/>
-            </a:endParaRPr>
-          </a:p>
-          <a:p>
-            <a:pPr>
-              <a:defRPr/>
-            </a:pPr>
-            <a:r>
-              <a:rPr lang="en" sz="1400" b="0" i="0" u="none" strike="noStrike" cap="none" spc="0">
-                <a:solidFill>
-                  <a:schemeClr val="tx1"/>
-                </a:solidFill>
-                <a:latin typeface="Liberation Mono"/>
-                <a:ea typeface="Liberation Mono"/>
-                <a:cs typeface="Liberation Mono"/>
-              </a:rPr>
-              <a:t>                .filter(volunteerAvailableDate -&gt; volunteerAvailableDate.getAvailableDate().equals(visit.getDate())) //</a:t>
-            </a:r>
-            <a:endParaRPr sz="1400" b="0" i="0" u="none" strike="noStrike" cap="none" spc="0">
-              <a:solidFill>
-                <a:schemeClr val="tx1"/>
-              </a:solidFill>
-              <a:latin typeface="Liberation Mono"/>
-              <a:cs typeface="Liberation Mono"/>
-            </a:endParaRPr>
-          </a:p>
-          <a:p>
-            <a:pPr>
-              <a:defRPr/>
-            </a:pPr>
-            <a:r>
-              <a:rPr lang="en" sz="1400" b="0" i="0" u="none" strike="noStrike" cap="none" spc="0">
-                <a:solidFill>
-                  <a:schemeClr val="tx1"/>
-                </a:solidFill>
-                <a:latin typeface="Liberation Mono"/>
-                <a:ea typeface="Liberation Mono"/>
-                <a:cs typeface="Liberation Mono"/>
-              </a:rPr>
-              <a:t>                .map(VolunteerAvailableDate::getVolunteerId) //</a:t>
-            </a:r>
-            <a:endParaRPr sz="1400" b="0" i="0" u="none" strike="noStrike" cap="none" spc="0">
-              <a:solidFill>
-                <a:schemeClr val="tx1"/>
-              </a:solidFill>
-              <a:latin typeface="Liberation Mono"/>
-              <a:cs typeface="Liberation Mono"/>
-            </a:endParaRPr>
-          </a:p>
-          <a:p>
-            <a:pPr>
-              <a:defRPr/>
-            </a:pPr>
-            <a:r>
-              <a:rPr lang="en" sz="1400" b="0" i="0" u="none" strike="noStrike" cap="none" spc="0">
-                <a:solidFill>
-                  <a:schemeClr val="tx1"/>
-                </a:solidFill>
-                <a:latin typeface="Liberation Mono"/>
-                <a:ea typeface="Liberation Mono"/>
-                <a:cs typeface="Liberation Mono"/>
-              </a:rPr>
-              <a:t>                .collect(Collectors.toList());</a:t>
-            </a:r>
-            <a:endParaRPr sz="1400" b="0" i="0" u="none" strike="noStrike" cap="none" spc="0">
-              <a:solidFill>
-                <a:schemeClr val="tx1"/>
-              </a:solidFill>
-              <a:latin typeface="Liberation Mono"/>
-              <a:cs typeface="Liberation Mono"/>
-            </a:endParaRPr>
-          </a:p>
-          <a:p>
-            <a:pPr>
-              <a:defRPr/>
-            </a:pPr>
-            <a:r>
-              <a:rPr lang="en" sz="1400" b="0" i="0" u="none" strike="noStrike" cap="none" spc="0">
-                <a:solidFill>
-                  <a:schemeClr val="tx1"/>
-                </a:solidFill>
-                <a:latin typeface="Liberation Mono"/>
-                <a:ea typeface="Liberation Mono"/>
-                <a:cs typeface="Liberation Mono"/>
-              </a:rPr>
-              <a:t>    }</a:t>
-            </a:r>
-            <a:endParaRPr sz="1800"/>
-          </a:p>
-        </p:txBody>
-      </p:sp>
-      <p:sp>
-        <p:nvSpPr>
-          <p:cNvPr id="1698375116" name="CasellaDiTesto 1698375115"/>
-          <p:cNvSpPr txBox="1"/>
-          <p:nvPr/>
-        </p:nvSpPr>
-        <p:spPr bwMode="auto">
-          <a:xfrm>
-            <a:off x="9679349" y="1269043"/>
-            <a:ext cx="1995238" cy="640440"/>
-          </a:xfrm>
-          <a:prstGeom prst="rect">
-            <a:avLst/>
-          </a:prstGeom>
-          <a:noFill/>
-        </p:spPr>
-        <p:txBody>
-          <a:bodyPr vertOverflow="overflow" horzOverflow="overflow" vert="horz" wrap="square" lIns="91440" tIns="45720" rIns="91440" bIns="45720" numCol="1" spcCol="0" rtlCol="0" fromWordArt="0" anchor="ctr" anchorCtr="0" forceAA="0" compatLnSpc="0">
-            <a:spAutoFit/>
-          </a:bodyPr>
-          <a:lstStyle/>
-          <a:p>
-            <a:pPr algn="ctr">
-              <a:defRPr/>
-            </a:pPr>
-            <a:r>
-              <a:rPr lang="en" sz="3600" b="1">
-                <a:ln w="6349">
-                  <a:solidFill>
-                    <a:srgbClr val="000000"/>
-                  </a:solidFill>
-                  <a:prstDash val="solid"/>
-                </a:ln>
-                <a:solidFill>
-                  <a:schemeClr val="accent2">
-                    <a:lumMod val="75000"/>
-                  </a:schemeClr>
-                </a:solidFill>
-                <a:latin typeface="Cantarell Extra Bold"/>
-                <a:ea typeface="Cantarell Extra Bold"/>
-                <a:cs typeface="Cantarell Extra Bold"/>
-              </a:rPr>
-              <a:t>PRIMA</a:t>
-            </a:r>
-            <a:endParaRPr>
-              <a:ln w="6349">
-                <a:solidFill>
-                  <a:schemeClr val="tx1"/>
-                </a:solidFill>
-                <a:prstDash val="solid"/>
-              </a:ln>
-            </a:endParaRPr>
-          </a:p>
-        </p:txBody>
-      </p:sp>
-      <p:sp>
-        <p:nvSpPr>
-          <p:cNvPr id="1482612164" name="CasellaDiTesto 1482612163"/>
-          <p:cNvSpPr txBox="1"/>
-          <p:nvPr/>
-        </p:nvSpPr>
-        <p:spPr bwMode="auto">
-          <a:xfrm>
-            <a:off x="9679349" y="3920157"/>
-            <a:ext cx="1998837" cy="640440"/>
-          </a:xfrm>
-          <a:prstGeom prst="rect">
-            <a:avLst/>
-          </a:prstGeom>
-          <a:noFill/>
-        </p:spPr>
-        <p:txBody>
-          <a:bodyPr vertOverflow="overflow" horzOverflow="overflow" vert="horz" wrap="square" lIns="91440" tIns="45720" rIns="91440" bIns="45720" numCol="1" spcCol="0" rtlCol="0" fromWordArt="0" anchor="ctr" anchorCtr="0" forceAA="0" compatLnSpc="0">
-            <a:spAutoFit/>
-          </a:bodyPr>
-          <a:lstStyle/>
-          <a:p>
-            <a:pPr algn="ctr">
-              <a:defRPr/>
-            </a:pPr>
-            <a:r>
-              <a:rPr lang="en" sz="3600" b="1">
-                <a:ln w="6349">
-                  <a:solidFill>
-                    <a:srgbClr val="000000"/>
-                  </a:solidFill>
-                  <a:prstDash val="solid"/>
-                </a:ln>
-                <a:solidFill>
-                  <a:srgbClr val="92D050"/>
-                </a:solidFill>
-                <a:latin typeface="Cantarell Extra Bold"/>
-                <a:ea typeface="Cantarell Extra Bold"/>
-                <a:cs typeface="Cantarell Extra Bold"/>
-              </a:rPr>
-              <a:t>DOPO</a:t>
-            </a:r>
-            <a:endParaRPr>
-              <a:ln w="6349">
-                <a:solidFill>
-                  <a:schemeClr val="tx1"/>
-                </a:solidFill>
-                <a:prstDash val="solid"/>
-              </a:ln>
             </a:endParaRPr>
           </a:p>
         </p:txBody>
@@ -11152,7 +10829,7 @@
       </p:grpSpPr>
       <p:sp>
         <p:nvSpPr>
-          <p:cNvPr id="2068409532" name="Titolo 1"/>
+          <p:cNvPr id="149416002" name="Titolo 1"/>
           <p:cNvSpPr>
             <a:spLocks noGrp="1"/>
           </p:cNvSpPr>
@@ -11162,7 +10839,7 @@
         </p:nvSpPr>
         <p:spPr bwMode="auto">
           <a:xfrm>
-            <a:off x="838198" y="37802"/>
+            <a:off x="839459" y="37802"/>
             <a:ext cx="10515600" cy="1325562"/>
           </a:xfrm>
         </p:spPr>
@@ -11196,14 +10873,14 @@
       </p:sp>
       <p:sp>
         <p:nvSpPr>
-          <p:cNvPr id="17675352" name="CasellaDiTesto 17675351"/>
+          <p:cNvPr id="1040471417" name="CasellaDiTesto 1040471416"/>
           <p:cNvSpPr txBox="1"/>
           <p:nvPr/>
         </p:nvSpPr>
         <p:spPr bwMode="auto">
           <a:xfrm>
-            <a:off x="4383448" y="471802"/>
-            <a:ext cx="7416345" cy="457559"/>
+            <a:off x="4915206" y="441324"/>
+            <a:ext cx="5860344" cy="518519"/>
           </a:xfrm>
           <a:prstGeom prst="rect">
             <a:avLst/>
@@ -11220,7 +10897,7 @@
               <a:defRPr/>
             </a:pPr>
             <a:r>
-              <a:rPr lang="en" sz="2400" b="1">
+              <a:rPr lang="en" sz="2800" b="1">
                 <a:solidFill>
                   <a:srgbClr val="0070C0"/>
                 </a:solidFill>
@@ -11228,9 +10905,9 @@
                 <a:ea typeface="DejaVu Sans Condensed"/>
                 <a:cs typeface="DejaVu Sans Condensed"/>
               </a:rPr>
-              <a:t>Extract Method - 2 + semplificazione logica</a:t>
-            </a:r>
-            <a:endParaRPr sz="1400" b="1">
+              <a:t>Extract Method - 1</a:t>
+            </a:r>
+            <a:endParaRPr b="1">
               <a:solidFill>
                 <a:srgbClr val="0070C0"/>
               </a:solidFill>
@@ -11240,14 +10917,14 @@
       </p:sp>
       <p:sp>
         <p:nvSpPr>
-          <p:cNvPr id="1873129134" name="CasellaDiTesto 1873129133"/>
+          <p:cNvPr id="1689386774" name="CasellaDiTesto 1689386773"/>
           <p:cNvSpPr txBox="1"/>
           <p:nvPr/>
         </p:nvSpPr>
         <p:spPr bwMode="auto">
           <a:xfrm>
-            <a:off x="457913" y="1160460"/>
-            <a:ext cx="11635248" cy="4291325"/>
+            <a:off x="457916" y="1160462"/>
+            <a:ext cx="11276167" cy="2524456"/>
           </a:xfrm>
           <a:prstGeom prst="roundRect">
             <a:avLst>
@@ -11284,7 +10961,7 @@
                 <a:ea typeface="Liberation Mono"/>
                 <a:cs typeface="Liberation Mono"/>
               </a:rPr>
-              <a:t>if (availableVolunteers.isEmpty()) {</a:t>
+              <a:t>for (Visit visit : monthVisits) {</a:t>
             </a:r>
             <a:endParaRPr sz="1400" b="0" i="0" u="none" strike="noStrike" cap="none" spc="0">
               <a:solidFill>
@@ -11307,7 +10984,7 @@
                 <a:ea typeface="Liberation Mono"/>
                 <a:cs typeface="Liberation Mono"/>
               </a:rPr>
-              <a:t>                visit.setVisitStatus(VisitStatus.CANCELLED);</a:t>
+              <a:t>            LocalDate day = visit.getDate();</a:t>
             </a:r>
             <a:endParaRPr sz="1400" b="0" i="0" u="none" strike="noStrike" cap="none" spc="0">
               <a:solidFill>
@@ -11330,7 +11007,7 @@
                 <a:ea typeface="Liberation Mono"/>
                 <a:cs typeface="Liberation Mono"/>
               </a:rPr>
-              <a:t>                visitRepository.save(visit);</a:t>
+              <a:t>            List&lt;User&gt; availableVolunteers = new ArrayList&lt;&gt;();</a:t>
             </a:r>
             <a:endParaRPr sz="1400" b="0" i="0" u="none" strike="noStrike" cap="none" spc="0">
               <a:solidFill>
@@ -11344,6 +11021,18 @@
             <a:pPr>
               <a:defRPr/>
             </a:pPr>
+            <a:endParaRPr sz="1400" b="0" i="0" u="none" strike="noStrike" cap="none" spc="0">
+              <a:solidFill>
+                <a:schemeClr val="tx1"/>
+              </a:solidFill>
+              <a:latin typeface="Liberation Mono"/>
+              <a:cs typeface="Liberation Mono"/>
+            </a:endParaRPr>
+          </a:p>
+          <a:p>
+            <a:pPr>
+              <a:defRPr/>
+            </a:pPr>
             <a:r>
               <a:rPr lang="it-IT" sz="1400" b="0" i="0" u="none" strike="noStrike" cap="none" spc="0">
                 <a:solidFill>
@@ -11353,7 +11042,7 @@
                 <a:ea typeface="Liberation Mono"/>
                 <a:cs typeface="Liberation Mono"/>
               </a:rPr>
-              <a:t>                continue; // passa alla visita successiva</a:t>
+              <a:t>            // aggiunge alla lista availableVolunteers tutti i volontari che hanno dato</a:t>
             </a:r>
             <a:endParaRPr sz="1400" b="0" i="0" u="none" strike="noStrike" cap="none" spc="0">
               <a:solidFill>
@@ -11376,7 +11065,7 @@
                 <a:ea typeface="Liberation Mono"/>
                 <a:cs typeface="Liberation Mono"/>
               </a:rPr>
-              <a:t>            } else if (availableVolunteers.size() == 1) {</a:t>
+              <a:t>            // disponibilitá per il</a:t>
             </a:r>
             <a:endParaRPr sz="1400" b="0" i="0" u="none" strike="noStrike" cap="none" spc="0">
               <a:solidFill>
@@ -11399,7 +11088,7 @@
                 <a:ea typeface="Liberation Mono"/>
                 <a:cs typeface="Liberation Mono"/>
               </a:rPr>
-              <a:t>                User volunteer = availableVolunteers.getFirst();</a:t>
+              <a:t>            // giorno 'day'</a:t>
             </a:r>
             <a:endParaRPr sz="1400" b="0" i="0" u="none" strike="noStrike" cap="none" spc="0">
               <a:solidFill>
@@ -11422,7 +11111,7 @@
                 <a:ea typeface="Liberation Mono"/>
                 <a:cs typeface="Liberation Mono"/>
               </a:rPr>
-              <a:t>                if (canDoVisitType(volunteer, visit.getVisitType().getId()))</a:t>
+              <a:t>            monthAvailabilities.stream().filter(av -&gt; av.getAvailableDate().equals(day)) //</a:t>
             </a:r>
             <a:endParaRPr sz="1400" b="0" i="0" u="none" strike="noStrike" cap="none" spc="0">
               <a:solidFill>
@@ -11445,7 +11134,7 @@
                 <a:ea typeface="Liberation Mono"/>
                 <a:cs typeface="Liberation Mono"/>
               </a:rPr>
-              <a:t>                    assignVolunteerToVisit(volunteer, visit, monthAvailabilities, volunteerVisitCounts);</a:t>
+              <a:t>                    // mappa le disponibilitá VolunteerAvailableDate con gli oggetti USER volontari</a:t>
             </a:r>
             <a:endParaRPr sz="1400" b="0" i="0" u="none" strike="noStrike" cap="none" spc="0">
               <a:solidFill>
@@ -11468,7 +11157,7 @@
                 <a:ea typeface="Liberation Mono"/>
                 <a:cs typeface="Liberation Mono"/>
               </a:rPr>
-              <a:t>                else {</a:t>
+              <a:t>                    .map(av -&gt; volunteerById(av.getVolunteerId(), volunteers)) //</a:t>
             </a:r>
             <a:endParaRPr sz="1400" b="0" i="0" u="none" strike="noStrike" cap="none" spc="0">
               <a:solidFill>
@@ -11491,207 +11180,7 @@
                 <a:ea typeface="Liberation Mono"/>
                 <a:cs typeface="Liberation Mono"/>
               </a:rPr>
-              <a:t>                    visit.setVisitStatus(VisitStatus.CANCELLED);</a:t>
-            </a:r>
-            <a:endParaRPr sz="1400" b="0" i="0" u="none" strike="noStrike" cap="none" spc="0">
-              <a:solidFill>
-                <a:schemeClr val="tx1"/>
-              </a:solidFill>
-              <a:latin typeface="Liberation Mono"/>
-              <a:cs typeface="Liberation Mono"/>
-            </a:endParaRPr>
-          </a:p>
-          <a:p>
-            <a:pPr>
-              <a:defRPr/>
-            </a:pPr>
-            <a:r>
-              <a:rPr lang="it-IT" sz="1400" b="0" i="0" u="none" strike="noStrike" cap="none" spc="0">
-                <a:solidFill>
-                  <a:schemeClr val="tx1"/>
-                </a:solidFill>
-                <a:latin typeface="Liberation Mono"/>
-                <a:ea typeface="Liberation Mono"/>
-                <a:cs typeface="Liberation Mono"/>
-              </a:rPr>
-              <a:t>                    visitRepository.save(visit);</a:t>
-            </a:r>
-            <a:endParaRPr sz="1400" b="0" i="0" u="none" strike="noStrike" cap="none" spc="0">
-              <a:solidFill>
-                <a:schemeClr val="tx1"/>
-              </a:solidFill>
-              <a:latin typeface="Liberation Mono"/>
-              <a:cs typeface="Liberation Mono"/>
-            </a:endParaRPr>
-          </a:p>
-          <a:p>
-            <a:pPr>
-              <a:defRPr/>
-            </a:pPr>
-            <a:r>
-              <a:rPr lang="it-IT" sz="1400" b="0" i="0" u="none" strike="noStrike" cap="none" spc="0">
-                <a:solidFill>
-                  <a:schemeClr val="tx1"/>
-                </a:solidFill>
-                <a:latin typeface="Liberation Mono"/>
-                <a:ea typeface="Liberation Mono"/>
-                <a:cs typeface="Liberation Mono"/>
-              </a:rPr>
-              <a:t>                }</a:t>
-            </a:r>
-            <a:endParaRPr sz="1400" b="0" i="0" u="none" strike="noStrike" cap="none" spc="0">
-              <a:solidFill>
-                <a:schemeClr val="tx1"/>
-              </a:solidFill>
-              <a:latin typeface="Liberation Mono"/>
-              <a:cs typeface="Liberation Mono"/>
-            </a:endParaRPr>
-          </a:p>
-          <a:p>
-            <a:pPr>
-              <a:defRPr/>
-            </a:pPr>
-            <a:r>
-              <a:rPr lang="it-IT" sz="1400" b="0" i="0" u="none" strike="noStrike" cap="none" spc="0">
-                <a:solidFill>
-                  <a:schemeClr val="tx1"/>
-                </a:solidFill>
-                <a:latin typeface="Liberation Mono"/>
-                <a:ea typeface="Liberation Mono"/>
-                <a:cs typeface="Liberation Mono"/>
-              </a:rPr>
-              <a:t>                continue; // passa alla visita successiva</a:t>
-            </a:r>
-            <a:endParaRPr sz="1400" b="0" i="0" u="none" strike="noStrike" cap="none" spc="0">
-              <a:solidFill>
-                <a:schemeClr val="tx1"/>
-              </a:solidFill>
-              <a:latin typeface="Liberation Mono"/>
-              <a:cs typeface="Liberation Mono"/>
-            </a:endParaRPr>
-          </a:p>
-          <a:p>
-            <a:pPr>
-              <a:defRPr/>
-            </a:pPr>
-            <a:r>
-              <a:rPr lang="it-IT" sz="1400" b="0" i="0" u="none" strike="noStrike" cap="none" spc="0">
-                <a:solidFill>
-                  <a:schemeClr val="tx1"/>
-                </a:solidFill>
-                <a:latin typeface="Liberation Mono"/>
-                <a:ea typeface="Liberation Mono"/>
-                <a:cs typeface="Liberation Mono"/>
-              </a:rPr>
-              <a:t>            }</a:t>
-            </a:r>
-            <a:endParaRPr sz="1400" b="0" i="0" u="none" strike="noStrike" cap="none" spc="0">
-              <a:solidFill>
-                <a:schemeClr val="tx1"/>
-              </a:solidFill>
-              <a:latin typeface="Liberation Mono"/>
-              <a:cs typeface="Liberation Mono"/>
-            </a:endParaRPr>
-          </a:p>
-          <a:p>
-            <a:pPr>
-              <a:defRPr/>
-            </a:pPr>
-            <a:r>
-              <a:rPr lang="it-IT" sz="1400" b="0" i="0" u="none" strike="noStrike" cap="none" spc="0">
-                <a:solidFill>
-                  <a:schemeClr val="tx1"/>
-                </a:solidFill>
-                <a:latin typeface="Liberation Mono"/>
-                <a:ea typeface="Liberation Mono"/>
-                <a:cs typeface="Liberation Mono"/>
-              </a:rPr>
-              <a:t>            // piú di 2 volontari con disponibilitá nel giorno considerato</a:t>
-            </a:r>
-            <a:endParaRPr sz="1400" b="0" i="0" u="none" strike="noStrike" cap="none" spc="0">
-              <a:solidFill>
-                <a:schemeClr val="tx1"/>
-              </a:solidFill>
-              <a:latin typeface="Liberation Mono"/>
-              <a:cs typeface="Liberation Mono"/>
-            </a:endParaRPr>
-          </a:p>
-          <a:p>
-            <a:pPr>
-              <a:defRPr/>
-            </a:pPr>
-            <a:r>
-              <a:rPr lang="it-IT" sz="1400" b="0" i="0" u="none" strike="noStrike" cap="none" spc="0">
-                <a:solidFill>
-                  <a:schemeClr val="tx1"/>
-                </a:solidFill>
-                <a:latin typeface="Liberation Mono"/>
-                <a:ea typeface="Liberation Mono"/>
-                <a:cs typeface="Liberation Mono"/>
-              </a:rPr>
-              <a:t>            User bestVolunteer = selectBestVolunteer(availableVolunteers, volunteerVisitCounts);</a:t>
-            </a:r>
-            <a:endParaRPr sz="1400" b="0" i="0" u="none" strike="noStrike" cap="none" spc="0">
-              <a:solidFill>
-                <a:schemeClr val="tx1"/>
-              </a:solidFill>
-              <a:latin typeface="Liberation Mono"/>
-              <a:cs typeface="Liberation Mono"/>
-            </a:endParaRPr>
-          </a:p>
-          <a:p>
-            <a:pPr>
-              <a:defRPr/>
-            </a:pPr>
-            <a:r>
-              <a:rPr lang="it-IT" sz="1400" b="0" i="0" u="none" strike="noStrike" cap="none" spc="0">
-                <a:solidFill>
-                  <a:schemeClr val="tx1"/>
-                </a:solidFill>
-                <a:latin typeface="Liberation Mono"/>
-                <a:ea typeface="Liberation Mono"/>
-                <a:cs typeface="Liberation Mono"/>
-              </a:rPr>
-              <a:t>            assignVolunteerToVisit(bestVolunteer, visit, monthAvailabilities, volunteerVisitCounts);</a:t>
-            </a:r>
-            <a:endParaRPr sz="1400" b="0" i="0" u="none" strike="noStrike" cap="none" spc="0">
-              <a:solidFill>
-                <a:schemeClr val="tx1"/>
-              </a:solidFill>
-              <a:latin typeface="Liberation Mono"/>
-              <a:cs typeface="Liberation Mono"/>
-            </a:endParaRPr>
-          </a:p>
-          <a:p>
-            <a:pPr>
-              <a:defRPr/>
-            </a:pPr>
-            <a:r>
-              <a:rPr lang="it-IT" sz="1400" b="0" i="0" u="none" strike="noStrike" cap="none" spc="0">
-                <a:solidFill>
-                  <a:schemeClr val="tx1"/>
-                </a:solidFill>
-                <a:latin typeface="Liberation Mono"/>
-                <a:ea typeface="Liberation Mono"/>
-                <a:cs typeface="Liberation Mono"/>
-              </a:rPr>
-              <a:t>        }</a:t>
-            </a:r>
-          </a:p>
-          <a:p>
-            <a:pPr>
-              <a:defRPr/>
-            </a:pPr>
-            <a:r>
-              <a:rPr lang="en" sz="1400" b="0" i="0" u="none" strike="noStrike" cap="none" spc="0">
-                <a:solidFill>
-                  <a:schemeClr val="tx1"/>
-                </a:solidFill>
-                <a:latin typeface="Liberation Mono"/>
-                <a:ea typeface="Liberation Mono"/>
-                <a:cs typeface="Liberation Mono"/>
-              </a:rPr>
-              <a:t>...</a:t>
+              <a:t>                    .forEach(availableVolunteers::add);</a:t>
             </a:r>
             <a:endParaRPr/>
           </a:p>
@@ -11699,14 +11188,276 @@
       </p:sp>
       <p:sp>
         <p:nvSpPr>
-          <p:cNvPr id="1625665772" name="CasellaDiTesto 1625665771"/>
+          <p:cNvPr id="58203512" name="CasellaDiTesto 58203511"/>
           <p:cNvSpPr txBox="1"/>
           <p:nvPr/>
         </p:nvSpPr>
         <p:spPr bwMode="auto">
           <a:xfrm>
-            <a:off x="9679349" y="1269223"/>
-            <a:ext cx="1995597" cy="640440"/>
+            <a:off x="457916" y="3827462"/>
+            <a:ext cx="11278686" cy="2966174"/>
+          </a:xfrm>
+          <a:prstGeom prst="roundRect">
+            <a:avLst>
+              <a:gd name="adj" fmla="val 5796"/>
+            </a:avLst>
+          </a:prstGeom>
+          <a:solidFill>
+            <a:schemeClr val="bg1">
+              <a:alpha val="49999"/>
+            </a:schemeClr>
+          </a:solidFill>
+          <a:ln w="12699">
+            <a:solidFill>
+              <a:schemeClr val="tx1"/>
+            </a:solidFill>
+            <a:prstDash val="solid"/>
+          </a:ln>
+        </p:spPr>
+        <p:txBody>
+          <a:bodyPr vertOverflow="overflow" horzOverflow="overflow" vert="horz" wrap="square" lIns="91440" tIns="45720" rIns="91440" bIns="45720" numCol="1" spcCol="0" rtlCol="0" fromWordArt="0" anchor="t" anchorCtr="0" forceAA="0" compatLnSpc="0">
+            <a:spAutoFit/>
+          </a:bodyPr>
+          <a:lstStyle/>
+          <a:p>
+            <a:pPr>
+              <a:defRPr/>
+            </a:pPr>
+            <a:r>
+              <a:rPr lang="en" sz="1400" b="0" i="0" u="none" strike="noStrike" cap="none" spc="0">
+                <a:solidFill>
+                  <a:schemeClr val="tx1"/>
+                </a:solidFill>
+                <a:latin typeface="Liberation Mono"/>
+                <a:ea typeface="Liberation Mono"/>
+                <a:cs typeface="Liberation Mono"/>
+              </a:rPr>
+              <a:t>for (Visit visit : nextMonthSortedVisits) {</a:t>
+            </a:r>
+            <a:endParaRPr sz="1400" b="0" i="0" u="none" strike="noStrike" cap="none" spc="0">
+              <a:solidFill>
+                <a:schemeClr val="tx1"/>
+              </a:solidFill>
+              <a:latin typeface="Liberation Mono"/>
+              <a:cs typeface="Liberation Mono"/>
+            </a:endParaRPr>
+          </a:p>
+          <a:p>
+            <a:pPr>
+              <a:defRPr/>
+            </a:pPr>
+            <a:r>
+              <a:rPr lang="en" sz="1400" b="0" i="0" u="none" strike="noStrike" cap="none" spc="0">
+                <a:solidFill>
+                  <a:schemeClr val="tx1"/>
+                </a:solidFill>
+                <a:latin typeface="Liberation Mono"/>
+                <a:ea typeface="Liberation Mono"/>
+                <a:cs typeface="Liberation Mono"/>
+              </a:rPr>
+              <a:t>    List&lt;Integer&gt; availableVolunteerIds = </a:t>
+            </a:r>
+            <a:endParaRPr sz="1400" b="0" i="0" u="none" strike="noStrike" cap="none" spc="0">
+              <a:solidFill>
+                <a:schemeClr val="tx1"/>
+              </a:solidFill>
+              <a:latin typeface="Liberation Mono"/>
+              <a:cs typeface="Liberation Mono"/>
+            </a:endParaRPr>
+          </a:p>
+          <a:p>
+            <a:pPr>
+              <a:defRPr/>
+            </a:pPr>
+            <a:r>
+              <a:rPr lang="en" sz="1400" b="0" i="0" u="none" strike="noStrike" cap="none" spc="0">
+                <a:solidFill>
+                  <a:schemeClr val="tx1"/>
+                </a:solidFill>
+                <a:latin typeface="Liberation Mono"/>
+                <a:ea typeface="Liberation Mono"/>
+                <a:cs typeface="Liberation Mono"/>
+              </a:rPr>
+              <a:t>	getAvailableVolunteersForVisitDate(visit, volunteerAvailabilitiesNextMonth);</a:t>
+            </a:r>
+            <a:endParaRPr sz="1400">
+              <a:latin typeface="Liberation Mono"/>
+              <a:cs typeface="Liberation Mono"/>
+            </a:endParaRPr>
+          </a:p>
+          <a:p>
+            <a:pPr>
+              <a:defRPr/>
+            </a:pPr>
+            <a:r>
+              <a:rPr lang="en" sz="1400" b="0" i="0" u="none" strike="noStrike" cap="none" spc="0">
+                <a:solidFill>
+                  <a:schemeClr val="tx1"/>
+                </a:solidFill>
+                <a:latin typeface="Liberation Mono"/>
+                <a:ea typeface="Liberation Mono"/>
+                <a:cs typeface="Liberation Mono"/>
+              </a:rPr>
+              <a:t>...</a:t>
+            </a:r>
+            <a:endParaRPr sz="1400">
+              <a:latin typeface="Liberation Mono"/>
+              <a:cs typeface="Liberation Mono"/>
+            </a:endParaRPr>
+          </a:p>
+          <a:p>
+            <a:pPr>
+              <a:defRPr/>
+            </a:pPr>
+            <a:endParaRPr sz="1400">
+              <a:latin typeface="Liberation Mono"/>
+              <a:cs typeface="Liberation Mono"/>
+            </a:endParaRPr>
+          </a:p>
+          <a:p>
+            <a:pPr>
+              <a:defRPr/>
+            </a:pPr>
+            <a:r>
+              <a:rPr lang="en" sz="1400" b="0" i="0" u="none" strike="noStrike" cap="none" spc="0">
+                <a:solidFill>
+                  <a:schemeClr val="tx1"/>
+                </a:solidFill>
+                <a:latin typeface="Liberation Mono"/>
+                <a:ea typeface="Liberation Mono"/>
+                <a:cs typeface="Liberation Mono"/>
+              </a:rPr>
+              <a:t>private List&lt;Integer&gt; getAvailableVolunteersForVisitDate(Visit visit, List&lt;VolunteerAvailableDate&gt; volunteerAvailabilitiesNextMonth) {</a:t>
+            </a:r>
+            <a:endParaRPr sz="1400" b="0" i="0" u="none" strike="noStrike" cap="none" spc="0">
+              <a:solidFill>
+                <a:schemeClr val="tx1"/>
+              </a:solidFill>
+              <a:latin typeface="Liberation Mono"/>
+              <a:cs typeface="Liberation Mono"/>
+            </a:endParaRPr>
+          </a:p>
+          <a:p>
+            <a:pPr>
+              <a:defRPr/>
+            </a:pPr>
+            <a:r>
+              <a:rPr lang="en" sz="1400" b="0" i="0" u="none" strike="noStrike" cap="none" spc="0">
+                <a:solidFill>
+                  <a:schemeClr val="tx1"/>
+                </a:solidFill>
+                <a:latin typeface="Liberation Mono"/>
+                <a:ea typeface="Liberation Mono"/>
+                <a:cs typeface="Liberation Mono"/>
+              </a:rPr>
+              <a:t>        return volunteerAvailabilitiesNextMonth.stream() //</a:t>
+            </a:r>
+            <a:endParaRPr sz="1400" b="0" i="0" u="none" strike="noStrike" cap="none" spc="0">
+              <a:solidFill>
+                <a:schemeClr val="tx1"/>
+              </a:solidFill>
+              <a:latin typeface="Liberation Mono"/>
+              <a:cs typeface="Liberation Mono"/>
+            </a:endParaRPr>
+          </a:p>
+          <a:p>
+            <a:pPr>
+              <a:defRPr/>
+            </a:pPr>
+            <a:r>
+              <a:rPr lang="en" sz="1400" b="0" i="0" u="none" strike="noStrike" cap="none" spc="0">
+                <a:solidFill>
+                  <a:schemeClr val="tx1"/>
+                </a:solidFill>
+                <a:latin typeface="Liberation Mono"/>
+                <a:ea typeface="Liberation Mono"/>
+                <a:cs typeface="Liberation Mono"/>
+              </a:rPr>
+              <a:t>                .filter(volunteerAvailableDate -&gt; volunteerAvailableDate.getAvailableDate().equals(visit.getDate())) //</a:t>
+            </a:r>
+            <a:endParaRPr sz="1400" b="0" i="0" u="none" strike="noStrike" cap="none" spc="0">
+              <a:solidFill>
+                <a:schemeClr val="tx1"/>
+              </a:solidFill>
+              <a:latin typeface="Liberation Mono"/>
+              <a:cs typeface="Liberation Mono"/>
+            </a:endParaRPr>
+          </a:p>
+          <a:p>
+            <a:pPr>
+              <a:defRPr/>
+            </a:pPr>
+            <a:r>
+              <a:rPr lang="en" sz="1400" b="0" i="0" u="none" strike="noStrike" cap="none" spc="0">
+                <a:solidFill>
+                  <a:schemeClr val="tx1"/>
+                </a:solidFill>
+                <a:latin typeface="Liberation Mono"/>
+                <a:ea typeface="Liberation Mono"/>
+                <a:cs typeface="Liberation Mono"/>
+              </a:rPr>
+              <a:t>                .map(VolunteerAvailableDate::getVolunteerId) //</a:t>
+            </a:r>
+            <a:endParaRPr sz="1400" b="0" i="0" u="none" strike="noStrike" cap="none" spc="0">
+              <a:solidFill>
+                <a:schemeClr val="tx1"/>
+              </a:solidFill>
+              <a:latin typeface="Liberation Mono"/>
+              <a:cs typeface="Liberation Mono"/>
+            </a:endParaRPr>
+          </a:p>
+          <a:p>
+            <a:pPr>
+              <a:defRPr/>
+            </a:pPr>
+            <a:r>
+              <a:rPr lang="en" sz="1400" b="0" i="0" u="none" strike="noStrike" cap="none" spc="0">
+                <a:solidFill>
+                  <a:schemeClr val="tx1"/>
+                </a:solidFill>
+                <a:latin typeface="Liberation Mono"/>
+                <a:ea typeface="Liberation Mono"/>
+                <a:cs typeface="Liberation Mono"/>
+              </a:rPr>
+              <a:t>                .collect(Collectors.toList());</a:t>
+            </a:r>
+            <a:endParaRPr sz="1400" b="0" i="0" u="none" strike="noStrike" cap="none" spc="0">
+              <a:solidFill>
+                <a:schemeClr val="tx1"/>
+              </a:solidFill>
+              <a:latin typeface="Liberation Mono"/>
+              <a:cs typeface="Liberation Mono"/>
+            </a:endParaRPr>
+          </a:p>
+          <a:p>
+            <a:pPr>
+              <a:defRPr/>
+            </a:pPr>
+            <a:r>
+              <a:rPr lang="en" sz="1400" b="0" i="0" u="none" strike="noStrike" cap="none" spc="0">
+                <a:solidFill>
+                  <a:schemeClr val="tx1"/>
+                </a:solidFill>
+                <a:latin typeface="Liberation Mono"/>
+                <a:ea typeface="Liberation Mono"/>
+                <a:cs typeface="Liberation Mono"/>
+              </a:rPr>
+              <a:t>    }</a:t>
+            </a:r>
+            <a:endParaRPr sz="1800"/>
+          </a:p>
+        </p:txBody>
+      </p:sp>
+      <p:sp>
+        <p:nvSpPr>
+          <p:cNvPr id="1698375116" name="CasellaDiTesto 1698375115"/>
+          <p:cNvSpPr txBox="1"/>
+          <p:nvPr/>
+        </p:nvSpPr>
+        <p:spPr bwMode="auto">
+          <a:xfrm>
+            <a:off x="9679349" y="1269043"/>
+            <a:ext cx="1995238" cy="640440"/>
           </a:xfrm>
           <a:prstGeom prst="rect">
             <a:avLst/>
@@ -11740,6 +11491,59 @@
                 <a:cs typeface="Cantarell Extra Bold"/>
               </a:rPr>
               <a:t>PRIMA</a:t>
+            </a:r>
+            <a:endParaRPr>
+              <a:ln w="6349">
+                <a:solidFill>
+                  <a:schemeClr val="tx1"/>
+                </a:solidFill>
+                <a:prstDash val="solid"/>
+              </a:ln>
+            </a:endParaRPr>
+          </a:p>
+        </p:txBody>
+      </p:sp>
+      <p:sp>
+        <p:nvSpPr>
+          <p:cNvPr id="1482612164" name="CasellaDiTesto 1482612163"/>
+          <p:cNvSpPr txBox="1"/>
+          <p:nvPr/>
+        </p:nvSpPr>
+        <p:spPr bwMode="auto">
+          <a:xfrm>
+            <a:off x="9679349" y="3920157"/>
+            <a:ext cx="1998837" cy="640440"/>
+          </a:xfrm>
+          <a:prstGeom prst="rect">
+            <a:avLst/>
+          </a:prstGeom>
+          <a:noFill/>
+        </p:spPr>
+        <p:txBody>
+          <a:bodyPr vertOverflow="overflow" horzOverflow="overflow" vert="horz" wrap="square" lIns="91440" tIns="45720" rIns="91440" bIns="45720" numCol="1" spcCol="0" rtlCol="0" fromWordArt="0" anchor="ctr" anchorCtr="0" forceAA="0" compatLnSpc="0">
+            <a:spAutoFit/>
+          </a:bodyPr>
+          <a:lstStyle/>
+          <a:p>
+            <a:pPr algn="ctr">
+              <a:defRPr/>
+            </a:pPr>
+            <a:r>
+              <a:rPr lang="en" sz="3600" b="1">
+                <a:ln w="6349">
+                  <a:solidFill>
+                    <a:srgbClr val="000000"/>
+                  </a:solidFill>
+                  <a:prstDash val="solid"/>
+                </a:ln>
+                <a:solidFill>
+                  <a:srgbClr val="92D050"/>
+                </a:solidFill>
+                <a:latin typeface="Cantarell Extra Bold"/>
+                <a:ea typeface="Cantarell Extra Bold"/>
+                <a:cs typeface="Cantarell Extra Bold"/>
+              </a:rPr>
+              <a:t>DOPO</a:t>
             </a:r>
             <a:endParaRPr>
               <a:ln w="6349">
@@ -11779,7 +11583,7 @@
       </p:grpSpPr>
       <p:sp>
         <p:nvSpPr>
-          <p:cNvPr id="449234049" name="Titolo 1"/>
+          <p:cNvPr id="2068409532" name="Titolo 1"/>
           <p:cNvSpPr>
             <a:spLocks noGrp="1"/>
           </p:cNvSpPr>
@@ -11789,8 +11593,8 @@
         </p:nvSpPr>
         <p:spPr bwMode="auto">
           <a:xfrm>
-            <a:off x="838198" y="37801"/>
-            <a:ext cx="10515600" cy="1325561"/>
+            <a:off x="838198" y="37802"/>
+            <a:ext cx="10515600" cy="1325562"/>
           </a:xfrm>
         </p:spPr>
         <p:txBody>
@@ -11811,20 +11615,70 @@
               </a:rPr>
               <a:t>Refactoring</a:t>
             </a:r>
-            <a:endParaRPr/>
-          </a:p>
-        </p:txBody>
-      </p:sp>
-      <p:sp>
-        <p:nvSpPr>
-          <p:cNvPr id="1225781845" name="CasellaDiTesto 1225781844"/>
+            <a:endParaRPr b="1">
+              <a:solidFill>
+                <a:srgbClr val="0070C0"/>
+              </a:solidFill>
+              <a:latin typeface="Noto Sans"/>
+              <a:cs typeface="Noto Sans"/>
+            </a:endParaRPr>
+          </a:p>
+        </p:txBody>
+      </p:sp>
+      <p:sp>
+        <p:nvSpPr>
+          <p:cNvPr id="17675352" name="CasellaDiTesto 17675351"/>
+          <p:cNvSpPr txBox="1"/>
+          <p:nvPr/>
+        </p:nvSpPr>
+        <p:spPr bwMode="auto">
+          <a:xfrm>
+            <a:off x="4383448" y="471802"/>
+            <a:ext cx="7416345" cy="457559"/>
+          </a:xfrm>
+          <a:prstGeom prst="rect">
+            <a:avLst/>
+          </a:prstGeom>
+          <a:noFill/>
+        </p:spPr>
+        <p:txBody>
+          <a:bodyPr vertOverflow="overflow" horzOverflow="overflow" vert="horz" wrap="square" lIns="91440" tIns="45720" rIns="91440" bIns="45720" numCol="1" spcCol="0" rtlCol="0" fromWordArt="0" anchor="t" anchorCtr="0" forceAA="0" compatLnSpc="0">
+            <a:spAutoFit/>
+          </a:bodyPr>
+          <a:lstStyle/>
+          <a:p>
+            <a:pPr algn="ctr">
+              <a:defRPr/>
+            </a:pPr>
+            <a:r>
+              <a:rPr lang="en" sz="2400" b="1">
+                <a:solidFill>
+                  <a:srgbClr val="0070C0"/>
+                </a:solidFill>
+                <a:latin typeface="DejaVu Sans Condensed"/>
+                <a:ea typeface="DejaVu Sans Condensed"/>
+                <a:cs typeface="DejaVu Sans Condensed"/>
+              </a:rPr>
+              <a:t>Extract Method - 2 + semplificazione logica</a:t>
+            </a:r>
+            <a:endParaRPr sz="1400" b="1">
+              <a:solidFill>
+                <a:srgbClr val="0070C0"/>
+              </a:solidFill>
+            </a:endParaRPr>
+          </a:p>
+        </p:txBody>
+      </p:sp>
+      <p:sp>
+        <p:nvSpPr>
+          <p:cNvPr id="1873129134" name="CasellaDiTesto 1873129133"/>
           <p:cNvSpPr txBox="1"/>
           <p:nvPr/>
         </p:nvSpPr>
         <p:spPr bwMode="auto">
           <a:xfrm>
             <a:off x="457913" y="1160460"/>
-            <a:ext cx="11637768" cy="3407891"/>
+            <a:ext cx="11635248" cy="4291325"/>
           </a:xfrm>
           <a:prstGeom prst="roundRect">
             <a:avLst>
@@ -11861,8 +11715,15 @@
                 <a:ea typeface="Liberation Mono"/>
                 <a:cs typeface="Liberation Mono"/>
               </a:rPr>
-              <a:t>for (Visit visit : nextMonthSortedVisits) {</a:t>
-            </a:r>
+              <a:t>if (availableVolunteers.isEmpty()) {</a:t>
+            </a:r>
+            <a:endParaRPr sz="1400" b="0" i="0" u="none" strike="noStrike" cap="none" spc="0">
+              <a:solidFill>
+                <a:schemeClr val="tx1"/>
+              </a:solidFill>
+              <a:latin typeface="Liberation Mono"/>
+              <a:cs typeface="Liberation Mono"/>
+            </a:endParaRPr>
           </a:p>
           <a:p>
             <a:pPr>
@@ -11877,7 +11738,7 @@
                 <a:ea typeface="Liberation Mono"/>
                 <a:cs typeface="Liberation Mono"/>
               </a:rPr>
-              <a:t>            List&lt;Integer&gt; availableVolunteerIds = getAvailableVolunteersForVisitDate(visit, volunteerAvailabilitiesNextMonth);</a:t>
+              <a:t>                visit.setVisitStatus(VisitStatus.CANCELLED);</a:t>
             </a:r>
             <a:endParaRPr sz="1400" b="0" i="0" u="none" strike="noStrike" cap="none" spc="0">
               <a:solidFill>
@@ -11891,6 +11752,17 @@
             <a:pPr>
               <a:defRPr/>
             </a:pPr>
+            <a:r>
+              <a:rPr lang="it-IT" sz="1400" b="0" i="0" u="none" strike="noStrike" cap="none" spc="0">
+                <a:solidFill>
+                  <a:schemeClr val="tx1"/>
+                </a:solidFill>
+                <a:latin typeface="Liberation Mono"/>
+                <a:ea typeface="Liberation Mono"/>
+                <a:cs typeface="Liberation Mono"/>
+              </a:rPr>
+              <a:t>                visitRepository.save(visit);</a:t>
+            </a:r>
             <a:endParaRPr sz="1400" b="0" i="0" u="none" strike="noStrike" cap="none" spc="0">
               <a:solidFill>
                 <a:schemeClr val="tx1"/>
@@ -11912,7 +11784,7 @@
                 <a:ea typeface="Liberation Mono"/>
                 <a:cs typeface="Liberation Mono"/>
               </a:rPr>
-              <a:t>            if (availableVolunteerIds.isEmpty()) {</a:t>
+              <a:t>                continue; // passa alla visita successiva</a:t>
             </a:r>
             <a:endParaRPr sz="1400" b="0" i="0" u="none" strike="noStrike" cap="none" spc="0">
               <a:solidFill>
@@ -11935,7 +11807,7 @@
                 <a:ea typeface="Liberation Mono"/>
                 <a:cs typeface="Liberation Mono"/>
               </a:rPr>
-              <a:t>                setVisitStatusToCancelled(visit);</a:t>
+              <a:t>            } else if (availableVolunteers.size() == 1) {</a:t>
             </a:r>
             <a:endParaRPr sz="1400" b="0" i="0" u="none" strike="noStrike" cap="none" spc="0">
               <a:solidFill>
@@ -11958,7 +11830,7 @@
                 <a:ea typeface="Liberation Mono"/>
                 <a:cs typeface="Liberation Mono"/>
               </a:rPr>
-              <a:t>            } else if (availableVolunteerIds.size() == 1) {</a:t>
+              <a:t>                User volunteer = availableVolunteers.getFirst();</a:t>
             </a:r>
             <a:endParaRPr sz="1400" b="0" i="0" u="none" strike="noStrike" cap="none" spc="0">
               <a:solidFill>
@@ -11981,7 +11853,7 @@
                 <a:ea typeface="Liberation Mono"/>
                 <a:cs typeface="Liberation Mono"/>
               </a:rPr>
-              <a:t>                assignAvailableVolunteerToVisitIfPossible(visit, availableVolunteerIds, volunteerAvailabilitiesNextMonth, volunteerIdWithVisitCounts);</a:t>
+              <a:t>                if (canDoVisitType(volunteer, visit.getVisitType().getId()))</a:t>
             </a:r>
             <a:endParaRPr sz="1400" b="0" i="0" u="none" strike="noStrike" cap="none" spc="0">
               <a:solidFill>
@@ -12004,7 +11876,7 @@
                 <a:ea typeface="Liberation Mono"/>
                 <a:cs typeface="Liberation Mono"/>
               </a:rPr>
-              <a:t>            } else {</a:t>
+              <a:t>                    assignVolunteerToVisit(volunteer, visit, monthAvailabilities, volunteerVisitCounts);</a:t>
             </a:r>
             <a:endParaRPr sz="1400" b="0" i="0" u="none" strike="noStrike" cap="none" spc="0">
               <a:solidFill>
@@ -12027,7 +11899,7 @@
                 <a:ea typeface="Liberation Mono"/>
                 <a:cs typeface="Liberation Mono"/>
               </a:rPr>
-              <a:t>                assignBestVolunteerAvailableToVisit(visit, availableVolunteerIds, volunteerIdWithVisitCounts, volunteerAvailabilitiesNextMonth);</a:t>
+              <a:t>                else {</a:t>
             </a:r>
             <a:endParaRPr sz="1400" b="0" i="0" u="none" strike="noStrike" cap="none" spc="0">
               <a:solidFill>
@@ -12050,6 +11922,98 @@
                 <a:ea typeface="Liberation Mono"/>
                 <a:cs typeface="Liberation Mono"/>
               </a:rPr>
+              <a:t>                    visit.setVisitStatus(VisitStatus.CANCELLED);</a:t>
+            </a:r>
+            <a:endParaRPr sz="1400" b="0" i="0" u="none" strike="noStrike" cap="none" spc="0">
+              <a:solidFill>
+                <a:schemeClr val="tx1"/>
+              </a:solidFill>
+              <a:latin typeface="Liberation Mono"/>
+              <a:cs typeface="Liberation Mono"/>
+            </a:endParaRPr>
+          </a:p>
+          <a:p>
+            <a:pPr>
+              <a:defRPr/>
+            </a:pPr>
+            <a:r>
+              <a:rPr lang="it-IT" sz="1400" b="0" i="0" u="none" strike="noStrike" cap="none" spc="0">
+                <a:solidFill>
+                  <a:schemeClr val="tx1"/>
+                </a:solidFill>
+                <a:latin typeface="Liberation Mono"/>
+                <a:ea typeface="Liberation Mono"/>
+                <a:cs typeface="Liberation Mono"/>
+              </a:rPr>
+              <a:t>                    visitRepository.save(visit);</a:t>
+            </a:r>
+            <a:endParaRPr sz="1400" b="0" i="0" u="none" strike="noStrike" cap="none" spc="0">
+              <a:solidFill>
+                <a:schemeClr val="tx1"/>
+              </a:solidFill>
+              <a:latin typeface="Liberation Mono"/>
+              <a:cs typeface="Liberation Mono"/>
+            </a:endParaRPr>
+          </a:p>
+          <a:p>
+            <a:pPr>
+              <a:defRPr/>
+            </a:pPr>
+            <a:r>
+              <a:rPr lang="it-IT" sz="1400" b="0" i="0" u="none" strike="noStrike" cap="none" spc="0">
+                <a:solidFill>
+                  <a:schemeClr val="tx1"/>
+                </a:solidFill>
+                <a:latin typeface="Liberation Mono"/>
+                <a:ea typeface="Liberation Mono"/>
+                <a:cs typeface="Liberation Mono"/>
+              </a:rPr>
+              <a:t>                }</a:t>
+            </a:r>
+            <a:endParaRPr sz="1400" b="0" i="0" u="none" strike="noStrike" cap="none" spc="0">
+              <a:solidFill>
+                <a:schemeClr val="tx1"/>
+              </a:solidFill>
+              <a:latin typeface="Liberation Mono"/>
+              <a:cs typeface="Liberation Mono"/>
+            </a:endParaRPr>
+          </a:p>
+          <a:p>
+            <a:pPr>
+              <a:defRPr/>
+            </a:pPr>
+            <a:r>
+              <a:rPr lang="it-IT" sz="1400" b="0" i="0" u="none" strike="noStrike" cap="none" spc="0">
+                <a:solidFill>
+                  <a:schemeClr val="tx1"/>
+                </a:solidFill>
+                <a:latin typeface="Liberation Mono"/>
+                <a:ea typeface="Liberation Mono"/>
+                <a:cs typeface="Liberation Mono"/>
+              </a:rPr>
+              <a:t>                continue; // passa alla visita successiva</a:t>
+            </a:r>
+            <a:endParaRPr sz="1400" b="0" i="0" u="none" strike="noStrike" cap="none" spc="0">
+              <a:solidFill>
+                <a:schemeClr val="tx1"/>
+              </a:solidFill>
+              <a:latin typeface="Liberation Mono"/>
+              <a:cs typeface="Liberation Mono"/>
+            </a:endParaRPr>
+          </a:p>
+          <a:p>
+            <a:pPr>
+              <a:defRPr/>
+            </a:pPr>
+            <a:r>
+              <a:rPr lang="it-IT" sz="1400" b="0" i="0" u="none" strike="noStrike" cap="none" spc="0">
+                <a:solidFill>
+                  <a:schemeClr val="tx1"/>
+                </a:solidFill>
+                <a:latin typeface="Liberation Mono"/>
+                <a:ea typeface="Liberation Mono"/>
+                <a:cs typeface="Liberation Mono"/>
+              </a:rPr>
               <a:t>            }</a:t>
             </a:r>
             <a:endParaRPr sz="1400" b="0" i="0" u="none" strike="noStrike" cap="none" spc="0">
@@ -12073,15 +12037,77 @@
                 <a:ea typeface="Liberation Mono"/>
                 <a:cs typeface="Liberation Mono"/>
               </a:rPr>
+              <a:t>            // piú di 2 volontari con disponibilitá nel giorno considerato</a:t>
+            </a:r>
+            <a:endParaRPr sz="1400" b="0" i="0" u="none" strike="noStrike" cap="none" spc="0">
+              <a:solidFill>
+                <a:schemeClr val="tx1"/>
+              </a:solidFill>
+              <a:latin typeface="Liberation Mono"/>
+              <a:cs typeface="Liberation Mono"/>
+            </a:endParaRPr>
+          </a:p>
+          <a:p>
+            <a:pPr>
+              <a:defRPr/>
+            </a:pPr>
+            <a:r>
+              <a:rPr lang="it-IT" sz="1400" b="0" i="0" u="none" strike="noStrike" cap="none" spc="0">
+                <a:solidFill>
+                  <a:schemeClr val="tx1"/>
+                </a:solidFill>
+                <a:latin typeface="Liberation Mono"/>
+                <a:ea typeface="Liberation Mono"/>
+                <a:cs typeface="Liberation Mono"/>
+              </a:rPr>
+              <a:t>            User bestVolunteer = selectBestVolunteer(availableVolunteers, volunteerVisitCounts);</a:t>
+            </a:r>
+            <a:endParaRPr sz="1400" b="0" i="0" u="none" strike="noStrike" cap="none" spc="0">
+              <a:solidFill>
+                <a:schemeClr val="tx1"/>
+              </a:solidFill>
+              <a:latin typeface="Liberation Mono"/>
+              <a:cs typeface="Liberation Mono"/>
+            </a:endParaRPr>
+          </a:p>
+          <a:p>
+            <a:pPr>
+              <a:defRPr/>
+            </a:pPr>
+            <a:r>
+              <a:rPr lang="it-IT" sz="1400" b="0" i="0" u="none" strike="noStrike" cap="none" spc="0">
+                <a:solidFill>
+                  <a:schemeClr val="tx1"/>
+                </a:solidFill>
+                <a:latin typeface="Liberation Mono"/>
+                <a:ea typeface="Liberation Mono"/>
+                <a:cs typeface="Liberation Mono"/>
+              </a:rPr>
+              <a:t>            assignVolunteerToVisit(bestVolunteer, visit, monthAvailabilities, volunteerVisitCounts);</a:t>
+            </a:r>
+            <a:endParaRPr sz="1400" b="0" i="0" u="none" strike="noStrike" cap="none" spc="0">
+              <a:solidFill>
+                <a:schemeClr val="tx1"/>
+              </a:solidFill>
+              <a:latin typeface="Liberation Mono"/>
+              <a:cs typeface="Liberation Mono"/>
+            </a:endParaRPr>
+          </a:p>
+          <a:p>
+            <a:pPr>
+              <a:defRPr/>
+            </a:pPr>
+            <a:r>
+              <a:rPr lang="it-IT" sz="1400" b="0" i="0" u="none" strike="noStrike" cap="none" spc="0">
+                <a:solidFill>
+                  <a:schemeClr val="tx1"/>
+                </a:solidFill>
+                <a:latin typeface="Liberation Mono"/>
+                <a:ea typeface="Liberation Mono"/>
+                <a:cs typeface="Liberation Mono"/>
+              </a:rPr>
               <a:t>        }</a:t>
             </a:r>
-            <a:endParaRPr sz="1400" b="0" i="0" u="none" strike="noStrike" cap="none" spc="0">
-              <a:solidFill>
-                <a:schemeClr val="tx1"/>
-              </a:solidFill>
-              <a:latin typeface="Liberation Mono"/>
-              <a:cs typeface="Liberation Mono"/>
-            </a:endParaRPr>
           </a:p>
           <a:p>
             <a:pPr>
@@ -12098,70 +12124,20 @@
               </a:rPr>
               <a:t>...</a:t>
             </a:r>
-            <a:endParaRPr sz="1400" b="0" i="0" u="none" strike="noStrike" cap="none" spc="0">
-              <a:solidFill>
-                <a:schemeClr val="tx1"/>
-              </a:solidFill>
-              <a:latin typeface="Liberation Mono"/>
-              <a:cs typeface="Liberation Mono"/>
-            </a:endParaRPr>
-          </a:p>
-        </p:txBody>
-      </p:sp>
-      <p:sp>
-        <p:nvSpPr>
-          <p:cNvPr id="1711987548" name="CasellaDiTesto 1711987547"/>
+            <a:endParaRPr/>
+          </a:p>
+        </p:txBody>
+      </p:sp>
+      <p:sp>
+        <p:nvSpPr>
+          <p:cNvPr id="1625665772" name="CasellaDiTesto 1625665771"/>
           <p:cNvSpPr txBox="1"/>
           <p:nvPr/>
         </p:nvSpPr>
         <p:spPr bwMode="auto">
           <a:xfrm>
-            <a:off x="4383448" y="471802"/>
-            <a:ext cx="7416703" cy="457559"/>
-          </a:xfrm>
-          <a:prstGeom prst="rect">
-            <a:avLst/>
-          </a:prstGeom>
-          <a:noFill/>
-        </p:spPr>
-        <p:txBody>
-          <a:bodyPr vertOverflow="overflow" horzOverflow="overflow" vert="horz" wrap="square" lIns="91440" tIns="45720" rIns="91440" bIns="45720" numCol="1" spcCol="0" rtlCol="0" fromWordArt="0" anchor="t" anchorCtr="0" forceAA="0" compatLnSpc="0">
-            <a:spAutoFit/>
-          </a:bodyPr>
-          <a:lstStyle/>
-          <a:p>
-            <a:pPr algn="ctr">
-              <a:defRPr/>
-            </a:pPr>
-            <a:r>
-              <a:rPr lang="en" sz="2400" b="1">
-                <a:solidFill>
-                  <a:srgbClr val="0070C0"/>
-                </a:solidFill>
-                <a:latin typeface="DejaVu Sans Condensed"/>
-                <a:ea typeface="DejaVu Sans Condensed"/>
-                <a:cs typeface="DejaVu Sans Condensed"/>
-              </a:rPr>
-              <a:t>Extract Method - 2 + semplificazione logica</a:t>
-            </a:r>
-            <a:endParaRPr sz="1400" b="1">
-              <a:solidFill>
-                <a:srgbClr val="0070C0"/>
-              </a:solidFill>
-            </a:endParaRPr>
-          </a:p>
-        </p:txBody>
-      </p:sp>
-      <p:sp>
-        <p:nvSpPr>
-          <p:cNvPr id="23320965" name="CasellaDiTesto 23320964"/>
-          <p:cNvSpPr txBox="1"/>
-          <p:nvPr/>
-        </p:nvSpPr>
-        <p:spPr bwMode="auto">
-          <a:xfrm>
-            <a:off x="10039335" y="1839611"/>
-            <a:ext cx="1999196" cy="640440"/>
+            <a:off x="9679349" y="1269223"/>
+            <a:ext cx="1995597" cy="640440"/>
           </a:xfrm>
           <a:prstGeom prst="rect">
             <a:avLst/>
@@ -12186,13 +12162,15 @@
                   <a:prstDash val="solid"/>
                 </a:ln>
                 <a:solidFill>
-                  <a:srgbClr val="92D050"/>
+                  <a:schemeClr val="accent2">
+                    <a:lumMod val="75000"/>
+                  </a:schemeClr>
                 </a:solidFill>
                 <a:latin typeface="Cantarell Extra Bold"/>
                 <a:ea typeface="Cantarell Extra Bold"/>
                 <a:cs typeface="Cantarell Extra Bold"/>
               </a:rPr>
-              <a:t>DOPO</a:t>
+              <a:t>PRIMA</a:t>
             </a:r>
             <a:endParaRPr>
               <a:ln w="6349">
@@ -12232,7 +12210,7 @@
       </p:grpSpPr>
       <p:sp>
         <p:nvSpPr>
-          <p:cNvPr id="1068862128" name="Titolo 1"/>
+          <p:cNvPr id="449234049" name="Titolo 1"/>
           <p:cNvSpPr>
             <a:spLocks noGrp="1"/>
           </p:cNvSpPr>
@@ -12242,8 +12220,8 @@
         </p:nvSpPr>
         <p:spPr bwMode="auto">
           <a:xfrm>
-            <a:off x="838198" y="37038"/>
-            <a:ext cx="10515600" cy="1325562"/>
+            <a:off x="838198" y="37801"/>
+            <a:ext cx="10515600" cy="1325561"/>
           </a:xfrm>
         </p:spPr>
         <p:txBody>
@@ -12270,58 +12248,14 @@
       </p:sp>
       <p:sp>
         <p:nvSpPr>
-          <p:cNvPr id="267580261" name="CasellaDiTesto 267580260"/>
+          <p:cNvPr id="1225781845" name="CasellaDiTesto 1225781844"/>
           <p:cNvSpPr txBox="1"/>
           <p:nvPr/>
         </p:nvSpPr>
         <p:spPr bwMode="auto">
           <a:xfrm>
-            <a:off x="5753405" y="471040"/>
-            <a:ext cx="5870424" cy="457559"/>
-          </a:xfrm>
-          <a:prstGeom prst="rect">
-            <a:avLst/>
-          </a:prstGeom>
-          <a:noFill/>
-        </p:spPr>
-        <p:txBody>
-          <a:bodyPr vertOverflow="overflow" horzOverflow="overflow" vert="horz" wrap="square" lIns="91440" tIns="45720" rIns="91440" bIns="45720" numCol="1" spcCol="0" rtlCol="0" fromWordArt="0" anchor="t" anchorCtr="0" forceAA="0" compatLnSpc="0">
-            <a:spAutoFit/>
-          </a:bodyPr>
-          <a:lstStyle/>
-          <a:p>
-            <a:pPr algn="ctr">
-              <a:defRPr/>
-            </a:pPr>
-            <a:r>
-              <a:rPr lang="en" sz="2400" b="1">
-                <a:solidFill>
-                  <a:srgbClr val="0070C0"/>
-                </a:solidFill>
-                <a:latin typeface="DejaVu Sans Condensed"/>
-                <a:ea typeface="DejaVu Sans Condensed"/>
-                <a:cs typeface="DejaVu Sans Condensed"/>
-              </a:rPr>
-              <a:t>Replace temporary with invocation</a:t>
-            </a:r>
-            <a:endParaRPr>
-              <a:solidFill>
-                <a:srgbClr val="0070C0"/>
-              </a:solidFill>
-            </a:endParaRPr>
-          </a:p>
-        </p:txBody>
-      </p:sp>
-      <p:sp>
-        <p:nvSpPr>
-          <p:cNvPr id="1437753394" name="CasellaDiTesto 1437753393"/>
-          <p:cNvSpPr txBox="1"/>
-          <p:nvPr/>
-        </p:nvSpPr>
-        <p:spPr bwMode="auto">
-          <a:xfrm>
-            <a:off x="351446" y="1362601"/>
-            <a:ext cx="11798655" cy="1641023"/>
+            <a:off x="457913" y="1160460"/>
+            <a:ext cx="11637768" cy="3407891"/>
           </a:xfrm>
           <a:prstGeom prst="roundRect">
             <a:avLst>
@@ -12358,7 +12292,23 @@
                 <a:ea typeface="Liberation Mono"/>
                 <a:cs typeface="Liberation Mono"/>
               </a:rPr>
-              <a:t>LocalDate today = LocalDate.now(clock);</a:t>
+              <a:t>for (Visit visit : nextMonthSortedVisits) {</a:t>
+            </a:r>
+          </a:p>
+          <a:p>
+            <a:pPr>
+              <a:defRPr/>
+            </a:pPr>
+            <a:r>
+              <a:rPr lang="it-IT" sz="1400" b="0" i="0" u="none" strike="noStrike" cap="none" spc="0">
+                <a:solidFill>
+                  <a:schemeClr val="tx1"/>
+                </a:solidFill>
+                <a:latin typeface="Liberation Mono"/>
+                <a:ea typeface="Liberation Mono"/>
+                <a:cs typeface="Liberation Mono"/>
+              </a:rPr>
+              <a:t>            List&lt;Integer&gt; availableVolunteerIds = getAvailableVolunteersForVisitDate(visit, volunteerAvailabilitiesNextMonth);</a:t>
             </a:r>
             <a:endParaRPr sz="1400" b="0" i="0" u="none" strike="noStrike" cap="none" spc="0">
               <a:solidFill>
@@ -12372,6 +12322,18 @@
             <a:pPr>
               <a:defRPr/>
             </a:pPr>
+            <a:endParaRPr sz="1400" b="0" i="0" u="none" strike="noStrike" cap="none" spc="0">
+              <a:solidFill>
+                <a:schemeClr val="tx1"/>
+              </a:solidFill>
+              <a:latin typeface="Liberation Mono"/>
+              <a:cs typeface="Liberation Mono"/>
+            </a:endParaRPr>
+          </a:p>
+          <a:p>
+            <a:pPr>
+              <a:defRPr/>
+            </a:pPr>
             <a:r>
               <a:rPr lang="it-IT" sz="1400" b="0" i="0" u="none" strike="noStrike" cap="none" spc="0">
                 <a:solidFill>
@@ -12381,7 +12343,7 @@
                 <a:ea typeface="Liberation Mono"/>
                 <a:cs typeface="Liberation Mono"/>
               </a:rPr>
-              <a:t>YearMonth nextMonth = YearMonth.from(today).plusMonths(1);</a:t>
+              <a:t>            if (availableVolunteerIds.isEmpty()) {</a:t>
             </a:r>
             <a:endParaRPr sz="1400" b="0" i="0" u="none" strike="noStrike" cap="none" spc="0">
               <a:solidFill>
@@ -12404,7 +12366,7 @@
                 <a:ea typeface="Liberation Mono"/>
                 <a:cs typeface="Liberation Mono"/>
               </a:rPr>
-              <a:t>int nextMonthValue = nextMonth.getMonthValue();</a:t>
+              <a:t>                setVisitStatusToCancelled(visit);</a:t>
             </a:r>
             <a:endParaRPr sz="1400" b="0" i="0" u="none" strike="noStrike" cap="none" spc="0">
               <a:solidFill>
@@ -12427,45 +12389,146 @@
                 <a:ea typeface="Liberation Mono"/>
                 <a:cs typeface="Liberation Mono"/>
               </a:rPr>
-              <a:t>int nextYear = nextMonth.getYear();</a:t>
-            </a:r>
-            <a:endParaRPr sz="1400">
-              <a:latin typeface="Liberation Mono"/>
-              <a:cs typeface="Liberation Mono"/>
-            </a:endParaRPr>
-          </a:p>
-          <a:p>
-            <a:pPr>
-              <a:defRPr/>
-            </a:pPr>
-            <a:r>
-              <a:rPr lang="en" sz="1400">
+              <a:t>            } else if (availableVolunteerIds.size() == 1) {</a:t>
+            </a:r>
+            <a:endParaRPr sz="1400" b="0" i="0" u="none" strike="noStrike" cap="none" spc="0">
+              <a:solidFill>
+                <a:schemeClr val="tx1"/>
+              </a:solidFill>
+              <a:latin typeface="Liberation Mono"/>
+              <a:cs typeface="Liberation Mono"/>
+            </a:endParaRPr>
+          </a:p>
+          <a:p>
+            <a:pPr>
+              <a:defRPr/>
+            </a:pPr>
+            <a:r>
+              <a:rPr lang="it-IT" sz="1400" b="0" i="0" u="none" strike="noStrike" cap="none" spc="0">
+                <a:solidFill>
+                  <a:schemeClr val="tx1"/>
+                </a:solidFill>
+                <a:latin typeface="Liberation Mono"/>
+                <a:ea typeface="Liberation Mono"/>
+                <a:cs typeface="Liberation Mono"/>
+              </a:rPr>
+              <a:t>                assignAvailableVolunteerToVisitIfPossible(visit, availableVolunteerIds, volunteerAvailabilitiesNextMonth, volunteerIdWithVisitCounts);</a:t>
+            </a:r>
+            <a:endParaRPr sz="1400" b="0" i="0" u="none" strike="noStrike" cap="none" spc="0">
+              <a:solidFill>
+                <a:schemeClr val="tx1"/>
+              </a:solidFill>
+              <a:latin typeface="Liberation Mono"/>
+              <a:cs typeface="Liberation Mono"/>
+            </a:endParaRPr>
+          </a:p>
+          <a:p>
+            <a:pPr>
+              <a:defRPr/>
+            </a:pPr>
+            <a:r>
+              <a:rPr lang="it-IT" sz="1400" b="0" i="0" u="none" strike="noStrike" cap="none" spc="0">
+                <a:solidFill>
+                  <a:schemeClr val="tx1"/>
+                </a:solidFill>
+                <a:latin typeface="Liberation Mono"/>
+                <a:ea typeface="Liberation Mono"/>
+                <a:cs typeface="Liberation Mono"/>
+              </a:rPr>
+              <a:t>            } else {</a:t>
+            </a:r>
+            <a:endParaRPr sz="1400" b="0" i="0" u="none" strike="noStrike" cap="none" spc="0">
+              <a:solidFill>
+                <a:schemeClr val="tx1"/>
+              </a:solidFill>
+              <a:latin typeface="Liberation Mono"/>
+              <a:cs typeface="Liberation Mono"/>
+            </a:endParaRPr>
+          </a:p>
+          <a:p>
+            <a:pPr>
+              <a:defRPr/>
+            </a:pPr>
+            <a:r>
+              <a:rPr lang="it-IT" sz="1400" b="0" i="0" u="none" strike="noStrike" cap="none" spc="0">
+                <a:solidFill>
+                  <a:schemeClr val="tx1"/>
+                </a:solidFill>
+                <a:latin typeface="Liberation Mono"/>
+                <a:ea typeface="Liberation Mono"/>
+                <a:cs typeface="Liberation Mono"/>
+              </a:rPr>
+              <a:t>                assignBestVolunteerAvailableToVisit(visit, availableVolunteerIds, volunteerIdWithVisitCounts, volunteerAvailabilitiesNextMonth);</a:t>
+            </a:r>
+            <a:endParaRPr sz="1400" b="0" i="0" u="none" strike="noStrike" cap="none" spc="0">
+              <a:solidFill>
+                <a:schemeClr val="tx1"/>
+              </a:solidFill>
+              <a:latin typeface="Liberation Mono"/>
+              <a:cs typeface="Liberation Mono"/>
+            </a:endParaRPr>
+          </a:p>
+          <a:p>
+            <a:pPr>
+              <a:defRPr/>
+            </a:pPr>
+            <a:r>
+              <a:rPr lang="it-IT" sz="1400" b="0" i="0" u="none" strike="noStrike" cap="none" spc="0">
+                <a:solidFill>
+                  <a:schemeClr val="tx1"/>
+                </a:solidFill>
+                <a:latin typeface="Liberation Mono"/>
+                <a:ea typeface="Liberation Mono"/>
+                <a:cs typeface="Liberation Mono"/>
+              </a:rPr>
+              <a:t>            }</a:t>
+            </a:r>
+            <a:endParaRPr sz="1400" b="0" i="0" u="none" strike="noStrike" cap="none" spc="0">
+              <a:solidFill>
+                <a:schemeClr val="tx1"/>
+              </a:solidFill>
+              <a:latin typeface="Liberation Mono"/>
+              <a:cs typeface="Liberation Mono"/>
+            </a:endParaRPr>
+          </a:p>
+          <a:p>
+            <a:pPr>
+              <a:defRPr/>
+            </a:pPr>
+            <a:r>
+              <a:rPr lang="it-IT" sz="1400" b="0" i="0" u="none" strike="noStrike" cap="none" spc="0">
+                <a:solidFill>
+                  <a:schemeClr val="tx1"/>
+                </a:solidFill>
+                <a:latin typeface="Liberation Mono"/>
+                <a:ea typeface="Liberation Mono"/>
+                <a:cs typeface="Liberation Mono"/>
+              </a:rPr>
+              <a:t>        }</a:t>
+            </a:r>
+            <a:endParaRPr sz="1400" b="0" i="0" u="none" strike="noStrike" cap="none" spc="0">
+              <a:solidFill>
+                <a:schemeClr val="tx1"/>
+              </a:solidFill>
+              <a:latin typeface="Liberation Mono"/>
+              <a:cs typeface="Liberation Mono"/>
+            </a:endParaRPr>
+          </a:p>
+          <a:p>
+            <a:pPr>
+              <a:defRPr/>
+            </a:pPr>
+            <a:r>
+              <a:rPr lang="en" sz="1400" b="0" i="0" u="none" strike="noStrike" cap="none" spc="0">
+                <a:solidFill>
+                  <a:schemeClr val="tx1"/>
+                </a:solidFill>
                 <a:latin typeface="Liberation Mono"/>
                 <a:ea typeface="Liberation Mono"/>
                 <a:cs typeface="Liberation Mono"/>
               </a:rPr>
               <a:t>...</a:t>
             </a:r>
-            <a:endParaRPr sz="1400">
-              <a:latin typeface="Liberation Mono"/>
-              <a:cs typeface="Liberation Mono"/>
-            </a:endParaRPr>
-          </a:p>
-          <a:p>
-            <a:pPr>
-              <a:defRPr/>
-            </a:pPr>
-            <a:r>
-              <a:rPr lang="en" sz="1400" b="0" i="0" u="none" strike="noStrike" cap="none" spc="0">
-                <a:solidFill>
-                  <a:schemeClr val="tx1"/>
-                </a:solidFill>
-                <a:latin typeface="Liberation Mono"/>
-                <a:ea typeface="Liberation Mono"/>
-                <a:cs typeface="Liberation Mono"/>
-              </a:rPr>
-              <a:t>removeBlockedDates(nextMonthValue, nextYear);</a:t>
-            </a:r>
             <a:endParaRPr sz="1400" b="0" i="0" u="none" strike="noStrike" cap="none" spc="0">
               <a:solidFill>
                 <a:schemeClr val="tx1"/>
@@ -12474,179 +12537,18 @@
               <a:cs typeface="Liberation Mono"/>
             </a:endParaRPr>
           </a:p>
-          <a:p>
-            <a:pPr>
-              <a:defRPr/>
-            </a:pPr>
-            <a:r>
-              <a:rPr lang="en" sz="1400" b="0" i="0" u="none" strike="noStrike" cap="none" spc="0">
-                <a:solidFill>
-                  <a:schemeClr val="tx1"/>
-                </a:solidFill>
-                <a:latin typeface="Liberation Mono"/>
-                <a:ea typeface="Liberation Mono"/>
-                <a:cs typeface="Liberation Mono"/>
-              </a:rPr>
-              <a:t>statePort.setVisitPlanCreated(nextMonthValue, nextYear, true);</a:t>
-            </a:r>
-            <a:endParaRPr/>
-          </a:p>
-        </p:txBody>
-      </p:sp>
-      <p:sp>
-        <p:nvSpPr>
-          <p:cNvPr id="711399983" name="CasellaDiTesto 711399982"/>
+        </p:txBody>
+      </p:sp>
+      <p:sp>
+        <p:nvSpPr>
+          <p:cNvPr id="1711987548" name="CasellaDiTesto 1711987547"/>
           <p:cNvSpPr txBox="1"/>
           <p:nvPr/>
         </p:nvSpPr>
         <p:spPr bwMode="auto">
           <a:xfrm>
-            <a:off x="351446" y="3553351"/>
-            <a:ext cx="11805134" cy="1199306"/>
-          </a:xfrm>
-          <a:prstGeom prst="roundRect">
-            <a:avLst>
-              <a:gd name="adj" fmla="val 5796"/>
-            </a:avLst>
-          </a:prstGeom>
-          <a:solidFill>
-            <a:schemeClr val="bg1">
-              <a:alpha val="49999"/>
-            </a:schemeClr>
-          </a:solidFill>
-          <a:ln w="12699">
-            <a:solidFill>
-              <a:schemeClr val="tx1"/>
-            </a:solidFill>
-            <a:prstDash val="solid"/>
-          </a:ln>
-        </p:spPr>
-        <p:txBody>
-          <a:bodyPr vertOverflow="overflow" horzOverflow="overflow" vert="horz" wrap="square" lIns="91440" tIns="45720" rIns="91440" bIns="45720" numCol="1" spcCol="0" rtlCol="0" fromWordArt="0" anchor="t" anchorCtr="0" forceAA="0" compatLnSpc="0">
-            <a:spAutoFit/>
-          </a:bodyPr>
-          <a:lstStyle/>
-          <a:p>
-            <a:pPr>
-              <a:defRPr/>
-            </a:pPr>
-            <a:r>
-              <a:rPr lang="it-IT" sz="1400" b="0" i="0" u="none" strike="noStrike" cap="none" spc="0">
-                <a:solidFill>
-                  <a:schemeClr val="tx1"/>
-                </a:solidFill>
-                <a:latin typeface="Liberation Mono"/>
-                <a:ea typeface="Liberation Mono"/>
-                <a:cs typeface="Liberation Mono"/>
-              </a:rPr>
-              <a:t>LocalDate today = LocalDate.now(clock);</a:t>
-            </a:r>
-            <a:endParaRPr sz="1400" b="0" i="0" u="none" strike="noStrike" cap="none" spc="0">
-              <a:solidFill>
-                <a:schemeClr val="tx1"/>
-              </a:solidFill>
-              <a:latin typeface="Liberation Mono"/>
-              <a:cs typeface="Liberation Mono"/>
-            </a:endParaRPr>
-          </a:p>
-          <a:p>
-            <a:pPr>
-              <a:defRPr/>
-            </a:pPr>
-            <a:r>
-              <a:rPr lang="it-IT" sz="1400" b="0" i="0" u="none" strike="noStrike" cap="none" spc="0">
-                <a:solidFill>
-                  <a:schemeClr val="tx1"/>
-                </a:solidFill>
-                <a:latin typeface="Liberation Mono"/>
-                <a:ea typeface="Liberation Mono"/>
-                <a:cs typeface="Liberation Mono"/>
-              </a:rPr>
-              <a:t>YearMonth nextMonth = YearMonth.from(today).plusMonths(1);</a:t>
-            </a:r>
-            <a:endParaRPr sz="1400" b="0" i="0" u="none" strike="noStrike" cap="none" spc="0">
-              <a:solidFill>
-                <a:schemeClr val="tx1"/>
-              </a:solidFill>
-              <a:latin typeface="Liberation Mono"/>
-              <a:cs typeface="Liberation Mono"/>
-            </a:endParaRPr>
-          </a:p>
-          <a:p>
-            <a:pPr>
-              <a:defRPr/>
-            </a:pPr>
-            <a:r>
-              <a:rPr lang="en" sz="1400" b="0" i="0" u="none" strike="noStrike" cap="none" spc="0">
-                <a:solidFill>
-                  <a:schemeClr val="tx1"/>
-                </a:solidFill>
-                <a:latin typeface="Liberation Mono"/>
-                <a:ea typeface="Liberation Mono"/>
-                <a:cs typeface="Liberation Mono"/>
-              </a:rPr>
-              <a:t>...</a:t>
-            </a:r>
-            <a:endParaRPr sz="1400" b="0" i="0" u="none" strike="noStrike" cap="none" spc="0">
-              <a:solidFill>
-                <a:schemeClr val="tx1"/>
-              </a:solidFill>
-              <a:latin typeface="Liberation Mono"/>
-              <a:cs typeface="Liberation Mono"/>
-            </a:endParaRPr>
-          </a:p>
-          <a:p>
-            <a:pPr>
-              <a:defRPr/>
-            </a:pPr>
-            <a:r>
-              <a:rPr lang="it-IT" sz="1400" b="0" i="0" u="none" strike="noStrike" cap="none" spc="0">
-                <a:solidFill>
-                  <a:schemeClr val="tx1"/>
-                </a:solidFill>
-                <a:latin typeface="Liberation Mono"/>
-                <a:ea typeface="Liberation Mono"/>
-                <a:cs typeface="Liberation Mono"/>
-              </a:rPr>
-              <a:t>removeBlockedDatesFromSelectedMonth(nextMonth);</a:t>
-            </a:r>
-            <a:endParaRPr sz="1400" b="0" i="0" u="none" strike="noStrike" cap="none" spc="0">
-              <a:solidFill>
-                <a:schemeClr val="tx1"/>
-              </a:solidFill>
-              <a:latin typeface="Liberation Mono"/>
-              <a:cs typeface="Liberation Mono"/>
-            </a:endParaRPr>
-          </a:p>
-          <a:p>
-            <a:pPr>
-              <a:defRPr/>
-            </a:pPr>
-            <a:r>
-              <a:rPr lang="it-IT" sz="1400" b="0" i="0" u="none" strike="noStrike" cap="none" spc="0">
-                <a:solidFill>
-                  <a:schemeClr val="tx1"/>
-                </a:solidFill>
-                <a:latin typeface="Liberation Mono"/>
-                <a:ea typeface="Liberation Mono"/>
-                <a:cs typeface="Liberation Mono"/>
-              </a:rPr>
-              <a:t>statePort.setVisitPlanCreated(nextMonth.getMonthValue(), nextMonth.getYear(), true);</a:t>
-            </a:r>
-            <a:endParaRPr/>
-          </a:p>
-        </p:txBody>
-      </p:sp>
-      <p:sp>
-        <p:nvSpPr>
-          <p:cNvPr id="1563974945" name="CasellaDiTesto 1563974944"/>
-          <p:cNvSpPr txBox="1"/>
-          <p:nvPr/>
-        </p:nvSpPr>
-        <p:spPr bwMode="auto">
-          <a:xfrm>
-            <a:off x="9679348" y="1459902"/>
-            <a:ext cx="1995957" cy="640440"/>
+            <a:off x="4383448" y="471802"/>
+            <a:ext cx="7416703" cy="457559"/>
           </a:xfrm>
           <a:prstGeom prst="rect">
             <a:avLst/>
@@ -12654,7 +12556,7 @@
           <a:noFill/>
         </p:spPr>
         <p:txBody>
-          <a:bodyPr vertOverflow="overflow" horzOverflow="overflow" vert="horz" wrap="square" lIns="91440" tIns="45720" rIns="91440" bIns="45720" numCol="1" spcCol="0" rtlCol="0" fromWordArt="0" anchor="ctr" anchorCtr="0" forceAA="0" compatLnSpc="0">
+          <a:bodyPr vertOverflow="overflow" horzOverflow="overflow" vert="horz" wrap="square" lIns="91440" tIns="45720" rIns="91440" bIns="45720" numCol="1" spcCol="0" rtlCol="0" fromWordArt="0" anchor="t" anchorCtr="0" forceAA="0" compatLnSpc="0">
             <a:spAutoFit/>
           </a:bodyPr>
           <a:lstStyle/>
@@ -12663,45 +12565,34 @@
               <a:defRPr/>
             </a:pPr>
             <a:r>
-              <a:rPr lang="en" sz="3600" b="1">
-                <a:ln w="6349">
-                  <a:solidFill>
-                    <a:srgbClr val="000000"/>
-                  </a:solidFill>
-                  <a:prstDash val="solid"/>
-                </a:ln>
-                <a:solidFill>
-                  <a:schemeClr val="accent2">
-                    <a:lumMod val="75000"/>
-                  </a:schemeClr>
-                </a:solidFill>
-                <a:latin typeface="Cantarell Extra Bold"/>
-                <a:ea typeface="Cantarell Extra Bold"/>
-                <a:cs typeface="Cantarell Extra Bold"/>
-              </a:rPr>
-              <a:t>PRIMA</a:t>
-            </a:r>
-            <a:endParaRPr>
-              <a:ln w="6349">
-                <a:solidFill>
-                  <a:schemeClr val="tx1"/>
-                </a:solidFill>
-                <a:prstDash val="solid"/>
-              </a:ln>
-            </a:endParaRPr>
-          </a:p>
-        </p:txBody>
-      </p:sp>
-      <p:sp>
-        <p:nvSpPr>
-          <p:cNvPr id="1990802124" name="CasellaDiTesto 1990802123"/>
+              <a:rPr lang="en" sz="2400" b="1">
+                <a:solidFill>
+                  <a:srgbClr val="0070C0"/>
+                </a:solidFill>
+                <a:latin typeface="DejaVu Sans Condensed"/>
+                <a:ea typeface="DejaVu Sans Condensed"/>
+                <a:cs typeface="DejaVu Sans Condensed"/>
+              </a:rPr>
+              <a:t>Extract Method - 2 + semplificazione logica</a:t>
+            </a:r>
+            <a:endParaRPr sz="1400" b="1">
+              <a:solidFill>
+                <a:srgbClr val="0070C0"/>
+              </a:solidFill>
+            </a:endParaRPr>
+          </a:p>
+        </p:txBody>
+      </p:sp>
+      <p:sp>
+        <p:nvSpPr>
+          <p:cNvPr id="23320965" name="CasellaDiTesto 23320964"/>
           <p:cNvSpPr txBox="1"/>
           <p:nvPr/>
         </p:nvSpPr>
         <p:spPr bwMode="auto">
           <a:xfrm>
-            <a:off x="9944084" y="3678115"/>
-            <a:ext cx="1999555" cy="640440"/>
+            <a:off x="10039335" y="1839611"/>
+            <a:ext cx="1999196" cy="640440"/>
           </a:xfrm>
           <a:prstGeom prst="rect">
             <a:avLst/>
@@ -12772,6 +12663,546 @@
       </p:grpSpPr>
       <p:sp>
         <p:nvSpPr>
+          <p:cNvPr id="1068862128" name="Titolo 1"/>
+          <p:cNvSpPr>
+            <a:spLocks noGrp="1"/>
+          </p:cNvSpPr>
+          <p:nvPr>
+            <p:ph type="title"/>
+          </p:nvPr>
+        </p:nvSpPr>
+        <p:spPr bwMode="auto">
+          <a:xfrm>
+            <a:off x="838198" y="37038"/>
+            <a:ext cx="10515600" cy="1325562"/>
+          </a:xfrm>
+        </p:spPr>
+        <p:txBody>
+          <a:bodyPr/>
+          <a:lstStyle/>
+          <a:p>
+            <a:pPr>
+              <a:defRPr/>
+            </a:pPr>
+            <a:r>
+              <a:rPr lang="en" b="1">
+                <a:solidFill>
+                  <a:srgbClr val="0070C0"/>
+                </a:solidFill>
+                <a:latin typeface="Noto Sans"/>
+                <a:ea typeface="Noto Sans"/>
+                <a:cs typeface="Noto Sans"/>
+              </a:rPr>
+              <a:t>Refactoring</a:t>
+            </a:r>
+            <a:endParaRPr/>
+          </a:p>
+        </p:txBody>
+      </p:sp>
+      <p:sp>
+        <p:nvSpPr>
+          <p:cNvPr id="267580261" name="CasellaDiTesto 267580260"/>
+          <p:cNvSpPr txBox="1"/>
+          <p:nvPr/>
+        </p:nvSpPr>
+        <p:spPr bwMode="auto">
+          <a:xfrm>
+            <a:off x="5753405" y="471040"/>
+            <a:ext cx="5870424" cy="457559"/>
+          </a:xfrm>
+          <a:prstGeom prst="rect">
+            <a:avLst/>
+          </a:prstGeom>
+          <a:noFill/>
+        </p:spPr>
+        <p:txBody>
+          <a:bodyPr vertOverflow="overflow" horzOverflow="overflow" vert="horz" wrap="square" lIns="91440" tIns="45720" rIns="91440" bIns="45720" numCol="1" spcCol="0" rtlCol="0" fromWordArt="0" anchor="t" anchorCtr="0" forceAA="0" compatLnSpc="0">
+            <a:spAutoFit/>
+          </a:bodyPr>
+          <a:lstStyle/>
+          <a:p>
+            <a:pPr algn="ctr">
+              <a:defRPr/>
+            </a:pPr>
+            <a:r>
+              <a:rPr lang="en" sz="2400" b="1">
+                <a:solidFill>
+                  <a:srgbClr val="0070C0"/>
+                </a:solidFill>
+                <a:latin typeface="DejaVu Sans Condensed"/>
+                <a:ea typeface="DejaVu Sans Condensed"/>
+                <a:cs typeface="DejaVu Sans Condensed"/>
+              </a:rPr>
+              <a:t>Replace temporary with invocation</a:t>
+            </a:r>
+            <a:endParaRPr>
+              <a:solidFill>
+                <a:srgbClr val="0070C0"/>
+              </a:solidFill>
+            </a:endParaRPr>
+          </a:p>
+        </p:txBody>
+      </p:sp>
+      <p:sp>
+        <p:nvSpPr>
+          <p:cNvPr id="1437753394" name="CasellaDiTesto 1437753393"/>
+          <p:cNvSpPr txBox="1"/>
+          <p:nvPr/>
+        </p:nvSpPr>
+        <p:spPr bwMode="auto">
+          <a:xfrm>
+            <a:off x="351446" y="1362601"/>
+            <a:ext cx="11798655" cy="1641023"/>
+          </a:xfrm>
+          <a:prstGeom prst="roundRect">
+            <a:avLst>
+              <a:gd name="adj" fmla="val 5796"/>
+            </a:avLst>
+          </a:prstGeom>
+          <a:solidFill>
+            <a:schemeClr val="bg1">
+              <a:alpha val="49999"/>
+            </a:schemeClr>
+          </a:solidFill>
+          <a:ln w="12699">
+            <a:solidFill>
+              <a:schemeClr val="tx1"/>
+            </a:solidFill>
+            <a:prstDash val="solid"/>
+          </a:ln>
+        </p:spPr>
+        <p:txBody>
+          <a:bodyPr vertOverflow="overflow" horzOverflow="overflow" vert="horz" wrap="square" lIns="91440" tIns="45720" rIns="91440" bIns="45720" numCol="1" spcCol="0" rtlCol="0" fromWordArt="0" anchor="t" anchorCtr="0" forceAA="0" compatLnSpc="0">
+            <a:spAutoFit/>
+          </a:bodyPr>
+          <a:lstStyle/>
+          <a:p>
+            <a:pPr>
+              <a:defRPr/>
+            </a:pPr>
+            <a:r>
+              <a:rPr lang="it-IT" sz="1400" b="0" i="0" u="none" strike="noStrike" cap="none" spc="0">
+                <a:solidFill>
+                  <a:schemeClr val="tx1"/>
+                </a:solidFill>
+                <a:latin typeface="Liberation Mono"/>
+                <a:ea typeface="Liberation Mono"/>
+                <a:cs typeface="Liberation Mono"/>
+              </a:rPr>
+              <a:t>LocalDate today = LocalDate.now(clock);</a:t>
+            </a:r>
+            <a:endParaRPr sz="1400" b="0" i="0" u="none" strike="noStrike" cap="none" spc="0">
+              <a:solidFill>
+                <a:schemeClr val="tx1"/>
+              </a:solidFill>
+              <a:latin typeface="Liberation Mono"/>
+              <a:cs typeface="Liberation Mono"/>
+            </a:endParaRPr>
+          </a:p>
+          <a:p>
+            <a:pPr>
+              <a:defRPr/>
+            </a:pPr>
+            <a:r>
+              <a:rPr lang="it-IT" sz="1400" b="0" i="0" u="none" strike="noStrike" cap="none" spc="0">
+                <a:solidFill>
+                  <a:schemeClr val="tx1"/>
+                </a:solidFill>
+                <a:latin typeface="Liberation Mono"/>
+                <a:ea typeface="Liberation Mono"/>
+                <a:cs typeface="Liberation Mono"/>
+              </a:rPr>
+              <a:t>YearMonth nextMonth = YearMonth.from(today).plusMonths(1);</a:t>
+            </a:r>
+            <a:endParaRPr sz="1400" b="0" i="0" u="none" strike="noStrike" cap="none" spc="0">
+              <a:solidFill>
+                <a:schemeClr val="tx1"/>
+              </a:solidFill>
+              <a:latin typeface="Liberation Mono"/>
+              <a:cs typeface="Liberation Mono"/>
+            </a:endParaRPr>
+          </a:p>
+          <a:p>
+            <a:pPr>
+              <a:defRPr/>
+            </a:pPr>
+            <a:r>
+              <a:rPr lang="it-IT" sz="1400" b="0" i="0" u="none" strike="noStrike" cap="none" spc="0">
+                <a:solidFill>
+                  <a:schemeClr val="tx1"/>
+                </a:solidFill>
+                <a:latin typeface="Liberation Mono"/>
+                <a:ea typeface="Liberation Mono"/>
+                <a:cs typeface="Liberation Mono"/>
+              </a:rPr>
+              <a:t>int nextMonthValue = nextMonth.getMonthValue();</a:t>
+            </a:r>
+            <a:endParaRPr sz="1400" b="0" i="0" u="none" strike="noStrike" cap="none" spc="0">
+              <a:solidFill>
+                <a:schemeClr val="tx1"/>
+              </a:solidFill>
+              <a:latin typeface="Liberation Mono"/>
+              <a:cs typeface="Liberation Mono"/>
+            </a:endParaRPr>
+          </a:p>
+          <a:p>
+            <a:pPr>
+              <a:defRPr/>
+            </a:pPr>
+            <a:r>
+              <a:rPr lang="it-IT" sz="1400" b="0" i="0" u="none" strike="noStrike" cap="none" spc="0">
+                <a:solidFill>
+                  <a:schemeClr val="tx1"/>
+                </a:solidFill>
+                <a:latin typeface="Liberation Mono"/>
+                <a:ea typeface="Liberation Mono"/>
+                <a:cs typeface="Liberation Mono"/>
+              </a:rPr>
+              <a:t>int nextYear = nextMonth.getYear();</a:t>
+            </a:r>
+            <a:endParaRPr sz="1400">
+              <a:latin typeface="Liberation Mono"/>
+              <a:cs typeface="Liberation Mono"/>
+            </a:endParaRPr>
+          </a:p>
+          <a:p>
+            <a:pPr>
+              <a:defRPr/>
+            </a:pPr>
+            <a:r>
+              <a:rPr lang="en" sz="1400">
+                <a:latin typeface="Liberation Mono"/>
+                <a:ea typeface="Liberation Mono"/>
+                <a:cs typeface="Liberation Mono"/>
+              </a:rPr>
+              <a:t>...</a:t>
+            </a:r>
+            <a:endParaRPr sz="1400">
+              <a:latin typeface="Liberation Mono"/>
+              <a:cs typeface="Liberation Mono"/>
+            </a:endParaRPr>
+          </a:p>
+          <a:p>
+            <a:pPr>
+              <a:defRPr/>
+            </a:pPr>
+            <a:r>
+              <a:rPr lang="en" sz="1400" b="0" i="0" u="none" strike="noStrike" cap="none" spc="0">
+                <a:solidFill>
+                  <a:schemeClr val="tx1"/>
+                </a:solidFill>
+                <a:latin typeface="Liberation Mono"/>
+                <a:ea typeface="Liberation Mono"/>
+                <a:cs typeface="Liberation Mono"/>
+              </a:rPr>
+              <a:t>removeBlockedDates(nextMonthValue, nextYear);</a:t>
+            </a:r>
+            <a:endParaRPr sz="1400" b="0" i="0" u="none" strike="noStrike" cap="none" spc="0">
+              <a:solidFill>
+                <a:schemeClr val="tx1"/>
+              </a:solidFill>
+              <a:latin typeface="Liberation Mono"/>
+              <a:cs typeface="Liberation Mono"/>
+            </a:endParaRPr>
+          </a:p>
+          <a:p>
+            <a:pPr>
+              <a:defRPr/>
+            </a:pPr>
+            <a:r>
+              <a:rPr lang="en" sz="1400" b="0" i="0" u="none" strike="noStrike" cap="none" spc="0">
+                <a:solidFill>
+                  <a:schemeClr val="tx1"/>
+                </a:solidFill>
+                <a:latin typeface="Liberation Mono"/>
+                <a:ea typeface="Liberation Mono"/>
+                <a:cs typeface="Liberation Mono"/>
+              </a:rPr>
+              <a:t>statePort.setVisitPlanCreated(nextMonthValue, nextYear, true);</a:t>
+            </a:r>
+            <a:endParaRPr/>
+          </a:p>
+        </p:txBody>
+      </p:sp>
+      <p:sp>
+        <p:nvSpPr>
+          <p:cNvPr id="711399983" name="CasellaDiTesto 711399982"/>
+          <p:cNvSpPr txBox="1"/>
+          <p:nvPr/>
+        </p:nvSpPr>
+        <p:spPr bwMode="auto">
+          <a:xfrm>
+            <a:off x="351446" y="3553351"/>
+            <a:ext cx="11805134" cy="1199306"/>
+          </a:xfrm>
+          <a:prstGeom prst="roundRect">
+            <a:avLst>
+              <a:gd name="adj" fmla="val 5796"/>
+            </a:avLst>
+          </a:prstGeom>
+          <a:solidFill>
+            <a:schemeClr val="bg1">
+              <a:alpha val="49999"/>
+            </a:schemeClr>
+          </a:solidFill>
+          <a:ln w="12699">
+            <a:solidFill>
+              <a:schemeClr val="tx1"/>
+            </a:solidFill>
+            <a:prstDash val="solid"/>
+          </a:ln>
+        </p:spPr>
+        <p:txBody>
+          <a:bodyPr vertOverflow="overflow" horzOverflow="overflow" vert="horz" wrap="square" lIns="91440" tIns="45720" rIns="91440" bIns="45720" numCol="1" spcCol="0" rtlCol="0" fromWordArt="0" anchor="t" anchorCtr="0" forceAA="0" compatLnSpc="0">
+            <a:spAutoFit/>
+          </a:bodyPr>
+          <a:lstStyle/>
+          <a:p>
+            <a:pPr>
+              <a:defRPr/>
+            </a:pPr>
+            <a:r>
+              <a:rPr lang="it-IT" sz="1400" b="0" i="0" u="none" strike="noStrike" cap="none" spc="0">
+                <a:solidFill>
+                  <a:schemeClr val="tx1"/>
+                </a:solidFill>
+                <a:latin typeface="Liberation Mono"/>
+                <a:ea typeface="Liberation Mono"/>
+                <a:cs typeface="Liberation Mono"/>
+              </a:rPr>
+              <a:t>LocalDate today = LocalDate.now(clock);</a:t>
+            </a:r>
+            <a:endParaRPr sz="1400" b="0" i="0" u="none" strike="noStrike" cap="none" spc="0">
+              <a:solidFill>
+                <a:schemeClr val="tx1"/>
+              </a:solidFill>
+              <a:latin typeface="Liberation Mono"/>
+              <a:cs typeface="Liberation Mono"/>
+            </a:endParaRPr>
+          </a:p>
+          <a:p>
+            <a:pPr>
+              <a:defRPr/>
+            </a:pPr>
+            <a:r>
+              <a:rPr lang="it-IT" sz="1400" b="0" i="0" u="none" strike="noStrike" cap="none" spc="0">
+                <a:solidFill>
+                  <a:schemeClr val="tx1"/>
+                </a:solidFill>
+                <a:latin typeface="Liberation Mono"/>
+                <a:ea typeface="Liberation Mono"/>
+                <a:cs typeface="Liberation Mono"/>
+              </a:rPr>
+              <a:t>YearMonth nextMonth = YearMonth.from(today).plusMonths(1);</a:t>
+            </a:r>
+            <a:endParaRPr sz="1400" b="0" i="0" u="none" strike="noStrike" cap="none" spc="0">
+              <a:solidFill>
+                <a:schemeClr val="tx1"/>
+              </a:solidFill>
+              <a:latin typeface="Liberation Mono"/>
+              <a:cs typeface="Liberation Mono"/>
+            </a:endParaRPr>
+          </a:p>
+          <a:p>
+            <a:pPr>
+              <a:defRPr/>
+            </a:pPr>
+            <a:r>
+              <a:rPr lang="en" sz="1400" b="0" i="0" u="none" strike="noStrike" cap="none" spc="0">
+                <a:solidFill>
+                  <a:schemeClr val="tx1"/>
+                </a:solidFill>
+                <a:latin typeface="Liberation Mono"/>
+                <a:ea typeface="Liberation Mono"/>
+                <a:cs typeface="Liberation Mono"/>
+              </a:rPr>
+              <a:t>...</a:t>
+            </a:r>
+            <a:endParaRPr sz="1400" b="0" i="0" u="none" strike="noStrike" cap="none" spc="0">
+              <a:solidFill>
+                <a:schemeClr val="tx1"/>
+              </a:solidFill>
+              <a:latin typeface="Liberation Mono"/>
+              <a:cs typeface="Liberation Mono"/>
+            </a:endParaRPr>
+          </a:p>
+          <a:p>
+            <a:pPr>
+              <a:defRPr/>
+            </a:pPr>
+            <a:r>
+              <a:rPr lang="it-IT" sz="1400" b="0" i="0" u="none" strike="noStrike" cap="none" spc="0">
+                <a:solidFill>
+                  <a:schemeClr val="tx1"/>
+                </a:solidFill>
+                <a:latin typeface="Liberation Mono"/>
+                <a:ea typeface="Liberation Mono"/>
+                <a:cs typeface="Liberation Mono"/>
+              </a:rPr>
+              <a:t>removeBlockedDatesFromSelectedMonth(nextMonth);</a:t>
+            </a:r>
+            <a:endParaRPr sz="1400" b="0" i="0" u="none" strike="noStrike" cap="none" spc="0">
+              <a:solidFill>
+                <a:schemeClr val="tx1"/>
+              </a:solidFill>
+              <a:latin typeface="Liberation Mono"/>
+              <a:cs typeface="Liberation Mono"/>
+            </a:endParaRPr>
+          </a:p>
+          <a:p>
+            <a:pPr>
+              <a:defRPr/>
+            </a:pPr>
+            <a:r>
+              <a:rPr lang="it-IT" sz="1400" b="0" i="0" u="none" strike="noStrike" cap="none" spc="0">
+                <a:solidFill>
+                  <a:schemeClr val="tx1"/>
+                </a:solidFill>
+                <a:latin typeface="Liberation Mono"/>
+                <a:ea typeface="Liberation Mono"/>
+                <a:cs typeface="Liberation Mono"/>
+              </a:rPr>
+              <a:t>statePort.setVisitPlanCreated(nextMonth.getMonthValue(), nextMonth.getYear(), true);</a:t>
+            </a:r>
+            <a:endParaRPr/>
+          </a:p>
+        </p:txBody>
+      </p:sp>
+      <p:sp>
+        <p:nvSpPr>
+          <p:cNvPr id="1563974945" name="CasellaDiTesto 1563974944"/>
+          <p:cNvSpPr txBox="1"/>
+          <p:nvPr/>
+        </p:nvSpPr>
+        <p:spPr bwMode="auto">
+          <a:xfrm>
+            <a:off x="9679348" y="1459902"/>
+            <a:ext cx="1995957" cy="640440"/>
+          </a:xfrm>
+          <a:prstGeom prst="rect">
+            <a:avLst/>
+          </a:prstGeom>
+          <a:noFill/>
+        </p:spPr>
+        <p:txBody>
+          <a:bodyPr vertOverflow="overflow" horzOverflow="overflow" vert="horz" wrap="square" lIns="91440" tIns="45720" rIns="91440" bIns="45720" numCol="1" spcCol="0" rtlCol="0" fromWordArt="0" anchor="ctr" anchorCtr="0" forceAA="0" compatLnSpc="0">
+            <a:spAutoFit/>
+          </a:bodyPr>
+          <a:lstStyle/>
+          <a:p>
+            <a:pPr algn="ctr">
+              <a:defRPr/>
+            </a:pPr>
+            <a:r>
+              <a:rPr lang="en" sz="3600" b="1">
+                <a:ln w="6349">
+                  <a:solidFill>
+                    <a:srgbClr val="000000"/>
+                  </a:solidFill>
+                  <a:prstDash val="solid"/>
+                </a:ln>
+                <a:solidFill>
+                  <a:schemeClr val="accent2">
+                    <a:lumMod val="75000"/>
+                  </a:schemeClr>
+                </a:solidFill>
+                <a:latin typeface="Cantarell Extra Bold"/>
+                <a:ea typeface="Cantarell Extra Bold"/>
+                <a:cs typeface="Cantarell Extra Bold"/>
+              </a:rPr>
+              <a:t>PRIMA</a:t>
+            </a:r>
+            <a:endParaRPr>
+              <a:ln w="6349">
+                <a:solidFill>
+                  <a:schemeClr val="tx1"/>
+                </a:solidFill>
+                <a:prstDash val="solid"/>
+              </a:ln>
+            </a:endParaRPr>
+          </a:p>
+        </p:txBody>
+      </p:sp>
+      <p:sp>
+        <p:nvSpPr>
+          <p:cNvPr id="1990802124" name="CasellaDiTesto 1990802123"/>
+          <p:cNvSpPr txBox="1"/>
+          <p:nvPr/>
+        </p:nvSpPr>
+        <p:spPr bwMode="auto">
+          <a:xfrm>
+            <a:off x="9944084" y="3678115"/>
+            <a:ext cx="1999555" cy="640440"/>
+          </a:xfrm>
+          <a:prstGeom prst="rect">
+            <a:avLst/>
+          </a:prstGeom>
+          <a:noFill/>
+        </p:spPr>
+        <p:txBody>
+          <a:bodyPr vertOverflow="overflow" horzOverflow="overflow" vert="horz" wrap="square" lIns="91440" tIns="45720" rIns="91440" bIns="45720" numCol="1" spcCol="0" rtlCol="0" fromWordArt="0" anchor="ctr" anchorCtr="0" forceAA="0" compatLnSpc="0">
+            <a:spAutoFit/>
+          </a:bodyPr>
+          <a:lstStyle/>
+          <a:p>
+            <a:pPr algn="ctr">
+              <a:defRPr/>
+            </a:pPr>
+            <a:r>
+              <a:rPr lang="en" sz="3600" b="1">
+                <a:ln w="6349">
+                  <a:solidFill>
+                    <a:srgbClr val="000000"/>
+                  </a:solidFill>
+                  <a:prstDash val="solid"/>
+                </a:ln>
+                <a:solidFill>
+                  <a:srgbClr val="92D050"/>
+                </a:solidFill>
+                <a:latin typeface="Cantarell Extra Bold"/>
+                <a:ea typeface="Cantarell Extra Bold"/>
+                <a:cs typeface="Cantarell Extra Bold"/>
+              </a:rPr>
+              <a:t>DOPO</a:t>
+            </a:r>
+            <a:endParaRPr>
+              <a:ln w="6349">
+                <a:solidFill>
+                  <a:schemeClr val="tx1"/>
+                </a:solidFill>
+                <a:prstDash val="solid"/>
+              </a:ln>
+            </a:endParaRPr>
+          </a:p>
+        </p:txBody>
+      </p:sp>
+    </p:spTree>
+  </p:cSld>
+  <p:clrMapOvr>
+    <a:masterClrMapping/>
+  </p:clrMapOvr>
+</p:sld>
+</file>
+
+<file path=ppt/slides/slide27.xml><?xml version="1.0" encoding="utf-8"?>
+<p:sld xmlns:a="http://schemas.openxmlformats.org/drawingml/2006/main" xmlns:r="http://schemas.openxmlformats.org/officeDocument/2006/relationships" xmlns:p="http://schemas.openxmlformats.org/presentationml/2006/main" showMasterPhAnim="0">
+  <p:cSld>
+    <p:spTree>
+      <p:nvGrpSpPr>
+        <p:cNvPr id="1" name=""/>
+        <p:cNvGrpSpPr/>
+        <p:nvPr/>
+      </p:nvGrpSpPr>
+      <p:grpSpPr bwMode="auto">
+        <a:xfrm>
+          <a:off x="0" y="0"/>
+          <a:ext cx="0" cy="0"/>
+          <a:chOff x="0" y="0"/>
+          <a:chExt cx="0" cy="0"/>
+        </a:xfrm>
+      </p:grpSpPr>
+      <p:sp>
+        <p:nvSpPr>
           <p:cNvPr id="312309608" name="Titolo 1"/>
           <p:cNvSpPr>
             <a:spLocks noGrp="1"/>
@@ -13371,7 +13802,13 @@
       </p:sp>
       <p:pic>
         <p:nvPicPr>
-          <p:cNvPr id="1268436596" name="Elemento grafico 1268436595"/>
+          <p:cNvPr id="5" name="Immagine 4">
+            <a:extLst>
+              <a:ext uri="{FF2B5EF4-FFF2-40B4-BE49-F238E27FC236}">
+                <a16:creationId xmlns:a16="http://schemas.microsoft.com/office/drawing/2014/main" id="{AA8BCC22-BCF4-CB06-0C83-2DAADC00ABC8}"/>
+              </a:ext>
+            </a:extLst>
+          </p:cNvPr>
           <p:cNvPicPr>
             <a:picLocks noChangeAspect="1"/>
           </p:cNvPicPr>
@@ -13380,17 +13817,19 @@
         <p:blipFill>
           <a:blip r:embed="rId3">
             <a:extLst>
-              <a:ext uri="{96DAC541-7B7A-43D3-8B79-37D633B846F1}">
-                <asvg:svgBlip xmlns:asvg="http://schemas.microsoft.com/office/drawing/2016/SVG/main" r:embed="rId4"/>
+              <a:ext uri="{28A0092B-C50C-407E-A947-70E740481C1C}">
+                <a14:useLocalDpi xmlns:a14="http://schemas.microsoft.com/office/drawing/2010/main" val="0"/>
               </a:ext>
             </a:extLst>
           </a:blip>
-          <a:stretch/>
+          <a:stretch>
+            <a:fillRect/>
+          </a:stretch>
         </p:blipFill>
-        <p:spPr bwMode="auto">
+        <p:spPr>
           <a:xfrm>
-            <a:off x="78818" y="1840019"/>
-            <a:ext cx="12001499" cy="3285315"/>
+            <a:off x="0" y="2478006"/>
+            <a:ext cx="12192000" cy="1901987"/>
           </a:xfrm>
           <a:prstGeom prst="rect">
             <a:avLst/>
@@ -13665,7 +14104,13 @@
       </p:sp>
       <p:pic>
         <p:nvPicPr>
-          <p:cNvPr id="1322616823" name="Elemento grafico 1322616822"/>
+          <p:cNvPr id="3" name="Immagine 2">
+            <a:extLst>
+              <a:ext uri="{FF2B5EF4-FFF2-40B4-BE49-F238E27FC236}">
+                <a16:creationId xmlns:a16="http://schemas.microsoft.com/office/drawing/2014/main" id="{D72A5632-1FE2-4412-3489-448B3DECEAF7}"/>
+              </a:ext>
+            </a:extLst>
+          </p:cNvPr>
           <p:cNvPicPr>
             <a:picLocks noChangeAspect="1"/>
           </p:cNvPicPr>
@@ -13674,17 +14119,19 @@
         <p:blipFill>
           <a:blip r:embed="rId3">
             <a:extLst>
-              <a:ext uri="{96DAC541-7B7A-43D3-8B79-37D633B846F1}">
-                <asvg:svgBlip xmlns:asvg="http://schemas.microsoft.com/office/drawing/2016/SVG/main" r:embed="rId4"/>
+              <a:ext uri="{28A0092B-C50C-407E-A947-70E740481C1C}">
+                <a14:useLocalDpi xmlns:a14="http://schemas.microsoft.com/office/drawing/2010/main" val="0"/>
               </a:ext>
             </a:extLst>
           </a:blip>
-          <a:stretch/>
+          <a:stretch>
+            <a:fillRect/>
+          </a:stretch>
         </p:blipFill>
-        <p:spPr bwMode="auto">
+        <p:spPr>
           <a:xfrm>
-            <a:off x="381886" y="1495497"/>
-            <a:ext cx="11542568" cy="5135727"/>
+            <a:off x="107950" y="1634304"/>
+            <a:ext cx="11976100" cy="4525557"/>
           </a:xfrm>
           <a:prstGeom prst="rect">
             <a:avLst/>

--- a/doc/Presentazione/Presentazione_ingsw_parteB.pptx
+++ b/doc/Presentazione/Presentazione_ingsw_parteB.pptx
@@ -5,7 +5,7 @@
     <p:sldMasterId id="2147483648" r:id="rId1"/>
   </p:sldMasterIdLst>
   <p:notesMasterIdLst>
-    <p:notesMasterId r:id="rId29"/>
+    <p:notesMasterId r:id="rId31"/>
   </p:notesMasterIdLst>
   <p:sldIdLst>
     <p:sldId id="256" r:id="rId2"/>
@@ -21,20 +21,22 @@
     <p:sldId id="265" r:id="rId12"/>
     <p:sldId id="266" r:id="rId13"/>
     <p:sldId id="267" r:id="rId14"/>
-    <p:sldId id="281" r:id="rId15"/>
-    <p:sldId id="282" r:id="rId16"/>
-    <p:sldId id="268" r:id="rId17"/>
-    <p:sldId id="269" r:id="rId18"/>
-    <p:sldId id="270" r:id="rId19"/>
-    <p:sldId id="271" r:id="rId20"/>
-    <p:sldId id="272" r:id="rId21"/>
-    <p:sldId id="283" r:id="rId22"/>
-    <p:sldId id="273" r:id="rId23"/>
-    <p:sldId id="274" r:id="rId24"/>
-    <p:sldId id="275" r:id="rId25"/>
-    <p:sldId id="276" r:id="rId26"/>
-    <p:sldId id="277" r:id="rId27"/>
-    <p:sldId id="278" r:id="rId28"/>
+    <p:sldId id="284" r:id="rId15"/>
+    <p:sldId id="285" r:id="rId16"/>
+    <p:sldId id="281" r:id="rId17"/>
+    <p:sldId id="282" r:id="rId18"/>
+    <p:sldId id="268" r:id="rId19"/>
+    <p:sldId id="269" r:id="rId20"/>
+    <p:sldId id="270" r:id="rId21"/>
+    <p:sldId id="271" r:id="rId22"/>
+    <p:sldId id="272" r:id="rId23"/>
+    <p:sldId id="283" r:id="rId24"/>
+    <p:sldId id="273" r:id="rId25"/>
+    <p:sldId id="274" r:id="rId26"/>
+    <p:sldId id="275" r:id="rId27"/>
+    <p:sldId id="276" r:id="rId28"/>
+    <p:sldId id="277" r:id="rId29"/>
+    <p:sldId id="278" r:id="rId30"/>
   </p:sldIdLst>
   <p:sldSz cx="12192000" cy="6858000"/>
   <p:notesSz cx="6858000" cy="9144000"/>
@@ -240,7 +242,7 @@
             </a:pPr>
             <a:fld id="{3632E96E-41F7-40C5-8419-297958CC00FA}" type="datetimeFigureOut">
               <a:rPr lang="it-IT"/>
-              <a:t>21/10/2025</a:t>
+              <a:t>23/10/2025</a:t>
             </a:fld>
             <a:endParaRPr lang="it-IT"/>
           </a:p>
@@ -859,7 +861,7 @@
             </a:pPr>
             <a:fld id="{1CD94749-6FDA-4E9C-36AB-734731960A87}" type="slidenum">
               <a:rPr/>
-              <a:t>16</a:t>
+              <a:t>18</a:t>
             </a:fld>
             <a:endParaRPr/>
           </a:p>
@@ -944,7 +946,7 @@
             </a:pPr>
             <a:fld id="{E2F52480-0813-D9C9-E145-46E7CB451224}" type="slidenum">
               <a:rPr/>
-              <a:t>17</a:t>
+              <a:t>19</a:t>
             </a:fld>
             <a:endParaRPr/>
           </a:p>
@@ -1029,7 +1031,7 @@
             </a:pPr>
             <a:fld id="{2CB3A339-E4F5-9849-5159-B780C46036EF}" type="slidenum">
               <a:rPr/>
-              <a:t>18</a:t>
+              <a:t>20</a:t>
             </a:fld>
             <a:endParaRPr/>
           </a:p>
@@ -1114,7 +1116,7 @@
             </a:pPr>
             <a:fld id="{7754AAF7-24FB-4C7D-56D0-9F6828B47495}" type="slidenum">
               <a:rPr/>
-              <a:t>19</a:t>
+              <a:t>21</a:t>
             </a:fld>
             <a:endParaRPr/>
           </a:p>
@@ -1199,7 +1201,7 @@
             </a:pPr>
             <a:fld id="{ECC01B90-6EF3-4614-96E6-28D52D163363}" type="slidenum">
               <a:rPr/>
-              <a:t>20</a:t>
+              <a:t>22</a:t>
             </a:fld>
             <a:endParaRPr/>
           </a:p>
@@ -1308,7 +1310,7 @@
             </a:pPr>
             <a:fld id="{ECC01B90-6EF3-4614-96E6-28D52D163363}" type="slidenum">
               <a:rPr/>
-              <a:t>21</a:t>
+              <a:t>23</a:t>
             </a:fld>
             <a:endParaRPr/>
           </a:p>
@@ -1398,7 +1400,7 @@
             </a:pPr>
             <a:fld id="{C1B0ED42-154C-37AC-EA60-9CE5185831C2}" type="slidenum">
               <a:rPr/>
-              <a:t>22</a:t>
+              <a:t>24</a:t>
             </a:fld>
             <a:endParaRPr/>
           </a:p>
@@ -1483,7 +1485,7 @@
             </a:pPr>
             <a:fld id="{97CE3B5A-C7B8-C31E-D05F-021B77FFEF0E}" type="slidenum">
               <a:rPr/>
-              <a:t>23</a:t>
+              <a:t>25</a:t>
             </a:fld>
             <a:endParaRPr/>
           </a:p>
@@ -1653,7 +1655,7 @@
             </a:pPr>
             <a:fld id="{373A4F64-1DDB-898D-3141-351BAF57DA12}" type="slidenum">
               <a:rPr/>
-              <a:t>24</a:t>
+              <a:t>26</a:t>
             </a:fld>
             <a:endParaRPr/>
           </a:p>
@@ -1738,7 +1740,7 @@
             </a:pPr>
             <a:fld id="{E0EEA2AC-6940-83FF-9A62-FDE019F8CFBA}" type="slidenum">
               <a:rPr/>
-              <a:t>25</a:t>
+              <a:t>27</a:t>
             </a:fld>
             <a:endParaRPr/>
           </a:p>
@@ -1823,7 +1825,7 @@
             </a:pPr>
             <a:fld id="{34DDF272-15C9-97B8-0696-B071723A3A34}" type="slidenum">
               <a:rPr/>
-              <a:t>26</a:t>
+              <a:t>28</a:t>
             </a:fld>
             <a:endParaRPr/>
           </a:p>
@@ -1908,7 +1910,7 @@
             </a:pPr>
             <a:fld id="{63195650-B0F5-4319-E0B1-4A630F16C93D}" type="slidenum">
               <a:rPr/>
-              <a:t>27</a:t>
+              <a:t>29</a:t>
             </a:fld>
             <a:endParaRPr/>
           </a:p>
@@ -2655,7 +2657,7 @@
             </a:pPr>
             <a:fld id="{BCC18F51-09EC-435C-A3BA-64A766E099C0}" type="datetimeFigureOut">
               <a:rPr lang="it-IT"/>
-              <a:t>21/10/2025</a:t>
+              <a:t>23/10/2025</a:t>
             </a:fld>
             <a:endParaRPr lang="it-IT"/>
           </a:p>
@@ -2844,7 +2846,7 @@
             </a:pPr>
             <a:fld id="{BCC18F51-09EC-435C-A3BA-64A766E099C0}" type="datetimeFigureOut">
               <a:rPr lang="it-IT"/>
-              <a:t>21/10/2025</a:t>
+              <a:t>23/10/2025</a:t>
             </a:fld>
             <a:endParaRPr lang="it-IT"/>
           </a:p>
@@ -3043,7 +3045,7 @@
             </a:pPr>
             <a:fld id="{BCC18F51-09EC-435C-A3BA-64A766E099C0}" type="datetimeFigureOut">
               <a:rPr lang="it-IT"/>
-              <a:t>21/10/2025</a:t>
+              <a:t>23/10/2025</a:t>
             </a:fld>
             <a:endParaRPr lang="it-IT"/>
           </a:p>
@@ -3232,7 +3234,7 @@
             </a:pPr>
             <a:fld id="{BCC18F51-09EC-435C-A3BA-64A766E099C0}" type="datetimeFigureOut">
               <a:rPr lang="it-IT"/>
-              <a:t>21/10/2025</a:t>
+              <a:t>23/10/2025</a:t>
             </a:fld>
             <a:endParaRPr lang="it-IT"/>
           </a:p>
@@ -3487,7 +3489,7 @@
             </a:pPr>
             <a:fld id="{BCC18F51-09EC-435C-A3BA-64A766E099C0}" type="datetimeFigureOut">
               <a:rPr lang="it-IT"/>
-              <a:t>21/10/2025</a:t>
+              <a:t>23/10/2025</a:t>
             </a:fld>
             <a:endParaRPr lang="it-IT"/>
           </a:p>
@@ -3751,7 +3753,7 @@
             </a:pPr>
             <a:fld id="{BCC18F51-09EC-435C-A3BA-64A766E099C0}" type="datetimeFigureOut">
               <a:rPr lang="it-IT"/>
-              <a:t>21/10/2025</a:t>
+              <a:t>23/10/2025</a:t>
             </a:fld>
             <a:endParaRPr lang="it-IT"/>
           </a:p>
@@ -4156,7 +4158,7 @@
             </a:pPr>
             <a:fld id="{BCC18F51-09EC-435C-A3BA-64A766E099C0}" type="datetimeFigureOut">
               <a:rPr lang="it-IT"/>
-              <a:t>21/10/2025</a:t>
+              <a:t>23/10/2025</a:t>
             </a:fld>
             <a:endParaRPr lang="it-IT"/>
           </a:p>
@@ -4280,7 +4282,7 @@
             </a:pPr>
             <a:fld id="{BCC18F51-09EC-435C-A3BA-64A766E099C0}" type="datetimeFigureOut">
               <a:rPr lang="it-IT"/>
-              <a:t>21/10/2025</a:t>
+              <a:t>23/10/2025</a:t>
             </a:fld>
             <a:endParaRPr lang="it-IT"/>
           </a:p>
@@ -4379,7 +4381,7 @@
             </a:pPr>
             <a:fld id="{BCC18F51-09EC-435C-A3BA-64A766E099C0}" type="datetimeFigureOut">
               <a:rPr lang="it-IT"/>
-              <a:t>21/10/2025</a:t>
+              <a:t>23/10/2025</a:t>
             </a:fld>
             <a:endParaRPr lang="it-IT"/>
           </a:p>
@@ -4678,7 +4680,7 @@
             </a:pPr>
             <a:fld id="{BCC18F51-09EC-435C-A3BA-64A766E099C0}" type="datetimeFigureOut">
               <a:rPr lang="it-IT"/>
-              <a:t>21/10/2025</a:t>
+              <a:t>23/10/2025</a:t>
             </a:fld>
             <a:endParaRPr lang="it-IT"/>
           </a:p>
@@ -4946,7 +4948,7 @@
             </a:pPr>
             <a:fld id="{BCC18F51-09EC-435C-A3BA-64A766E099C0}" type="datetimeFigureOut">
               <a:rPr lang="it-IT"/>
-              <a:t>21/10/2025</a:t>
+              <a:t>23/10/2025</a:t>
             </a:fld>
             <a:endParaRPr lang="it-IT"/>
           </a:p>
@@ -5201,7 +5203,7 @@
             </a:pPr>
             <a:fld id="{BCC18F51-09EC-435C-A3BA-64A766E099C0}" type="datetimeFigureOut">
               <a:rPr lang="it-IT"/>
-              <a:t>21/10/2025</a:t>
+              <a:t>23/10/2025</a:t>
             </a:fld>
             <a:endParaRPr lang="it-IT"/>
           </a:p>
@@ -6409,7 +6411,7 @@
               <a:defRPr/>
             </a:pPr>
             <a:r>
-              <a:rPr lang="en" b="1" dirty="0">
+              <a:rPr lang="it-IT" b="1">
                 <a:solidFill>
                   <a:srgbClr val="0070C0"/>
                 </a:solidFill>
@@ -6419,7 +6421,7 @@
               </a:rPr>
               <a:t>GoF 1 – Strategy</a:t>
             </a:r>
-            <a:endParaRPr dirty="0"/>
+            <a:endParaRPr lang="it-IT" dirty="0"/>
           </a:p>
         </p:txBody>
       </p:sp>
@@ -6433,24 +6435,135 @@
             <p:ph idx="1"/>
           </p:nvPr>
         </p:nvSpPr>
-        <p:spPr bwMode="auto"/>
-        <p:txBody>
-          <a:bodyPr/>
+        <p:spPr bwMode="auto">
+          <a:xfrm>
+            <a:off x="838200" y="1825625"/>
+            <a:ext cx="4912264" cy="4524376"/>
+          </a:xfrm>
+        </p:spPr>
+        <p:txBody>
+          <a:bodyPr>
+            <a:normAutofit lnSpcReduction="10000"/>
+          </a:bodyPr>
           <a:lstStyle/>
           <a:p>
             <a:pPr marL="0" indent="0">
-              <a:buFont typeface="Arial"/>
               <a:buNone/>
               <a:defRPr/>
             </a:pPr>
             <a:r>
-              <a:rPr lang="en-GB" dirty="0"/>
-              <a:t>TODO</a:t>
-            </a:r>
-            <a:endParaRPr dirty="0"/>
-          </a:p>
-        </p:txBody>
-      </p:sp>
+              <a:rPr lang="it-IT" sz="2400" dirty="0"/>
+              <a:t>Per ogni caso d’uso è stata definita una classe di eccezione dedicata che estende una base comune.</a:t>
+            </a:r>
+          </a:p>
+          <a:p>
+            <a:pPr marL="0" indent="0">
+              <a:buNone/>
+              <a:defRPr/>
+            </a:pPr>
+            <a:br>
+              <a:rPr lang="it-IT" sz="2400" dirty="0"/>
+            </a:br>
+            <a:r>
+              <a:rPr lang="it-IT" sz="2400" dirty="0"/>
+              <a:t>La classe </a:t>
+            </a:r>
+            <a:r>
+              <a:rPr lang="it-IT" sz="2400" i="1" dirty="0" err="1"/>
+              <a:t>BaseUseCaseException</a:t>
+            </a:r>
+            <a:r>
+              <a:rPr lang="it-IT" sz="2400" dirty="0"/>
+              <a:t> fornisce un’interfaccia uniforme per identificare il tipo di caso d’uso e il relativo codice di errore.</a:t>
+            </a:r>
+          </a:p>
+          <a:p>
+            <a:pPr marL="0" indent="0">
+              <a:buNone/>
+              <a:defRPr/>
+            </a:pPr>
+            <a:endParaRPr lang="it-IT" sz="2400" dirty="0"/>
+          </a:p>
+          <a:p>
+            <a:pPr marL="0" indent="0">
+              <a:buNone/>
+              <a:defRPr/>
+            </a:pPr>
+            <a:r>
+              <a:rPr lang="it-IT" sz="2400" dirty="0"/>
+              <a:t>Ogni caso d’uso (es. booking, </a:t>
+            </a:r>
+            <a:r>
+              <a:rPr lang="it-IT" sz="2400" dirty="0" err="1"/>
+              <a:t>visit</a:t>
+            </a:r>
+            <a:r>
+              <a:rPr lang="it-IT" sz="2400" dirty="0"/>
+              <a:t>, user, ecc.) definisce la propria eccezione specializzata.</a:t>
+            </a:r>
+          </a:p>
+        </p:txBody>
+      </p:sp>
+      <p:pic>
+        <p:nvPicPr>
+          <p:cNvPr id="11" name="Immagine 10">
+            <a:extLst>
+              <a:ext uri="{FF2B5EF4-FFF2-40B4-BE49-F238E27FC236}">
+                <a16:creationId xmlns:a16="http://schemas.microsoft.com/office/drawing/2014/main" id="{C0AF5EEF-562C-0541-539D-7D56F7A46931}"/>
+              </a:ext>
+            </a:extLst>
+          </p:cNvPr>
+          <p:cNvPicPr>
+            <a:picLocks noChangeAspect="1"/>
+          </p:cNvPicPr>
+          <p:nvPr/>
+        </p:nvPicPr>
+        <p:blipFill>
+          <a:blip r:embed="rId3"/>
+          <a:stretch>
+            <a:fillRect/>
+          </a:stretch>
+        </p:blipFill>
+        <p:spPr>
+          <a:xfrm>
+            <a:off x="6095999" y="2101850"/>
+            <a:ext cx="5476875" cy="1066800"/>
+          </a:xfrm>
+          <a:prstGeom prst="rect">
+            <a:avLst/>
+          </a:prstGeom>
+        </p:spPr>
+      </p:pic>
+      <p:pic>
+        <p:nvPicPr>
+          <p:cNvPr id="13" name="Immagine 12">
+            <a:extLst>
+              <a:ext uri="{FF2B5EF4-FFF2-40B4-BE49-F238E27FC236}">
+                <a16:creationId xmlns:a16="http://schemas.microsoft.com/office/drawing/2014/main" id="{34EABFE9-C4A2-27F3-A14D-14259F443AFF}"/>
+              </a:ext>
+            </a:extLst>
+          </p:cNvPr>
+          <p:cNvPicPr>
+            <a:picLocks noChangeAspect="1"/>
+          </p:cNvPicPr>
+          <p:nvPr/>
+        </p:nvPicPr>
+        <p:blipFill>
+          <a:blip r:embed="rId4"/>
+          <a:stretch>
+            <a:fillRect/>
+          </a:stretch>
+        </p:blipFill>
+        <p:spPr>
+          <a:xfrm>
+            <a:off x="6095999" y="3995449"/>
+            <a:ext cx="5476875" cy="1417926"/>
+          </a:xfrm>
+          <a:prstGeom prst="rect">
+            <a:avLst/>
+          </a:prstGeom>
+        </p:spPr>
+      </p:pic>
     </p:spTree>
   </p:cSld>
   <p:clrMapOvr>
@@ -6478,6 +6591,276 @@
       </p:grpSpPr>
       <p:sp>
         <p:nvSpPr>
+          <p:cNvPr id="3" name="Segnaposto contenuto 2">
+            <a:extLst>
+              <a:ext uri="{FF2B5EF4-FFF2-40B4-BE49-F238E27FC236}">
+                <a16:creationId xmlns:a16="http://schemas.microsoft.com/office/drawing/2014/main" id="{7EA6502C-420E-A491-1174-69EA9BBC4B55}"/>
+              </a:ext>
+            </a:extLst>
+          </p:cNvPr>
+          <p:cNvSpPr>
+            <a:spLocks noGrp="1"/>
+          </p:cNvSpPr>
+          <p:nvPr>
+            <p:ph idx="1"/>
+          </p:nvPr>
+        </p:nvSpPr>
+        <p:spPr>
+          <a:xfrm>
+            <a:off x="965200" y="1012825"/>
+            <a:ext cx="4152900" cy="2657475"/>
+          </a:xfrm>
+        </p:spPr>
+        <p:txBody>
+          <a:bodyPr>
+            <a:normAutofit/>
+          </a:bodyPr>
+          <a:lstStyle/>
+          <a:p>
+            <a:pPr marL="0" indent="0">
+              <a:buNone/>
+            </a:pPr>
+            <a:r>
+              <a:rPr lang="it-IT" sz="2000" dirty="0"/>
+              <a:t>L’architettura utilizza il pattern Strategy per delegare la gestione di ogni eccezione alla strategia corrispondente.</a:t>
+            </a:r>
+          </a:p>
+          <a:p>
+            <a:pPr marL="0" indent="0">
+              <a:buNone/>
+            </a:pPr>
+            <a:endParaRPr lang="it-IT" sz="2000" dirty="0"/>
+          </a:p>
+          <a:p>
+            <a:pPr marL="0" indent="0">
+              <a:buNone/>
+            </a:pPr>
+            <a:r>
+              <a:rPr lang="it-IT" sz="2000" dirty="0" err="1"/>
+              <a:t>GlobalExceptionHandler</a:t>
+            </a:r>
+            <a:r>
+              <a:rPr lang="it-IT" sz="2000" dirty="0"/>
+              <a:t> individua la strategia appropriata e ne invoca il metodo </a:t>
+            </a:r>
+            <a:r>
+              <a:rPr lang="it-IT" sz="2000" dirty="0" err="1"/>
+              <a:t>handleException</a:t>
+            </a:r>
+            <a:r>
+              <a:rPr lang="it-IT" sz="2000" dirty="0"/>
+              <a:t>().</a:t>
+            </a:r>
+          </a:p>
+        </p:txBody>
+      </p:sp>
+      <p:pic>
+        <p:nvPicPr>
+          <p:cNvPr id="1026" name="Picture 2">
+            <a:extLst>
+              <a:ext uri="{FF2B5EF4-FFF2-40B4-BE49-F238E27FC236}">
+                <a16:creationId xmlns:a16="http://schemas.microsoft.com/office/drawing/2014/main" id="{60622C8F-0C43-9356-8300-A51DCCD9E0B9}"/>
+              </a:ext>
+            </a:extLst>
+          </p:cNvPr>
+          <p:cNvPicPr>
+            <a:picLocks noChangeAspect="1" noChangeArrowheads="1"/>
+          </p:cNvPicPr>
+          <p:nvPr/>
+        </p:nvPicPr>
+        <p:blipFill>
+          <a:blip r:embed="rId2">
+            <a:extLst>
+              <a:ext uri="{28A0092B-C50C-407E-A947-70E740481C1C}">
+                <a14:useLocalDpi xmlns:a14="http://schemas.microsoft.com/office/drawing/2010/main" val="0"/>
+              </a:ext>
+            </a:extLst>
+          </a:blip>
+          <a:srcRect/>
+          <a:stretch>
+            <a:fillRect/>
+          </a:stretch>
+        </p:blipFill>
+        <p:spPr bwMode="auto">
+          <a:xfrm>
+            <a:off x="1414504" y="4106368"/>
+            <a:ext cx="9134391" cy="1772213"/>
+          </a:xfrm>
+          <a:prstGeom prst="rect">
+            <a:avLst/>
+          </a:prstGeom>
+          <a:noFill/>
+          <a:extLst>
+            <a:ext uri="{909E8E84-426E-40DD-AFC4-6F175D3DCCD1}">
+              <a14:hiddenFill xmlns:a14="http://schemas.microsoft.com/office/drawing/2010/main">
+                <a:solidFill>
+                  <a:srgbClr val="FFFFFF"/>
+                </a:solidFill>
+              </a14:hiddenFill>
+            </a:ext>
+          </a:extLst>
+        </p:spPr>
+      </p:pic>
+      <p:pic>
+        <p:nvPicPr>
+          <p:cNvPr id="9" name="Immagine 8">
+            <a:extLst>
+              <a:ext uri="{FF2B5EF4-FFF2-40B4-BE49-F238E27FC236}">
+                <a16:creationId xmlns:a16="http://schemas.microsoft.com/office/drawing/2014/main" id="{59BF2B24-0B25-3F28-FB61-A430468AE576}"/>
+              </a:ext>
+            </a:extLst>
+          </p:cNvPr>
+          <p:cNvPicPr>
+            <a:picLocks noChangeAspect="1"/>
+          </p:cNvPicPr>
+          <p:nvPr/>
+        </p:nvPicPr>
+        <p:blipFill>
+          <a:blip r:embed="rId3"/>
+          <a:stretch>
+            <a:fillRect/>
+          </a:stretch>
+        </p:blipFill>
+        <p:spPr>
+          <a:xfrm>
+            <a:off x="5219700" y="979419"/>
+            <a:ext cx="6007100" cy="2449581"/>
+          </a:xfrm>
+          <a:prstGeom prst="rect">
+            <a:avLst/>
+          </a:prstGeom>
+        </p:spPr>
+      </p:pic>
+    </p:spTree>
+    <p:extLst>
+      <p:ext uri="{BB962C8B-B14F-4D97-AF65-F5344CB8AC3E}">
+        <p14:creationId xmlns:p14="http://schemas.microsoft.com/office/powerpoint/2010/main" val="3951014746"/>
+      </p:ext>
+    </p:extLst>
+  </p:cSld>
+  <p:clrMapOvr>
+    <a:masterClrMapping/>
+  </p:clrMapOvr>
+</p:sld>
+</file>
+
+<file path=ppt/slides/slide15.xml><?xml version="1.0" encoding="utf-8"?>
+<p:sld xmlns:a="http://schemas.openxmlformats.org/drawingml/2006/main" xmlns:r="http://schemas.openxmlformats.org/officeDocument/2006/relationships" xmlns:p="http://schemas.openxmlformats.org/presentationml/2006/main">
+  <p:cSld>
+    <p:spTree>
+      <p:nvGrpSpPr>
+        <p:cNvPr id="1" name=""/>
+        <p:cNvGrpSpPr/>
+        <p:nvPr/>
+      </p:nvGrpSpPr>
+      <p:grpSpPr>
+        <a:xfrm>
+          <a:off x="0" y="0"/>
+          <a:ext cx="0" cy="0"/>
+          <a:chOff x="0" y="0"/>
+          <a:chExt cx="0" cy="0"/>
+        </a:xfrm>
+      </p:grpSpPr>
+      <p:sp>
+        <p:nvSpPr>
+          <p:cNvPr id="3" name="Segnaposto contenuto 2">
+            <a:extLst>
+              <a:ext uri="{FF2B5EF4-FFF2-40B4-BE49-F238E27FC236}">
+                <a16:creationId xmlns:a16="http://schemas.microsoft.com/office/drawing/2014/main" id="{0FD045B2-527F-D4E0-3BC2-34C356DC7FCC}"/>
+              </a:ext>
+            </a:extLst>
+          </p:cNvPr>
+          <p:cNvSpPr>
+            <a:spLocks noGrp="1"/>
+          </p:cNvSpPr>
+          <p:nvPr>
+            <p:ph idx="1"/>
+          </p:nvPr>
+        </p:nvSpPr>
+        <p:spPr>
+          <a:xfrm>
+            <a:off x="863600" y="1725612"/>
+            <a:ext cx="4648200" cy="3406775"/>
+          </a:xfrm>
+        </p:spPr>
+        <p:txBody>
+          <a:bodyPr>
+            <a:normAutofit/>
+          </a:bodyPr>
+          <a:lstStyle/>
+          <a:p>
+            <a:pPr marL="0" indent="0">
+              <a:buNone/>
+            </a:pPr>
+            <a:r>
+              <a:rPr lang="it-IT" sz="2400" dirty="0"/>
+              <a:t>In base al codice d’errore, la strategia seleziona lo status HTTP più appropriato (es. 400, 404) e costruisce un messaggio chiaro e non tecnico per l’utente. I dettagli interni vengono registrati nei log di sistema; al client viene restituita solo l’informazione utile all’azione successiva.</a:t>
+            </a:r>
+          </a:p>
+        </p:txBody>
+      </p:sp>
+      <p:pic>
+        <p:nvPicPr>
+          <p:cNvPr id="9" name="Immagine 8">
+            <a:extLst>
+              <a:ext uri="{FF2B5EF4-FFF2-40B4-BE49-F238E27FC236}">
+                <a16:creationId xmlns:a16="http://schemas.microsoft.com/office/drawing/2014/main" id="{3FCD7598-BE01-71AC-8AE4-BE6FA7849BAC}"/>
+              </a:ext>
+            </a:extLst>
+          </p:cNvPr>
+          <p:cNvPicPr>
+            <a:picLocks noChangeAspect="1"/>
+          </p:cNvPicPr>
+          <p:nvPr/>
+        </p:nvPicPr>
+        <p:blipFill>
+          <a:blip r:embed="rId2"/>
+          <a:stretch>
+            <a:fillRect/>
+          </a:stretch>
+        </p:blipFill>
+        <p:spPr>
+          <a:xfrm>
+            <a:off x="6096000" y="862805"/>
+            <a:ext cx="5725238" cy="5132388"/>
+          </a:xfrm>
+          <a:prstGeom prst="rect">
+            <a:avLst/>
+          </a:prstGeom>
+        </p:spPr>
+      </p:pic>
+    </p:spTree>
+    <p:extLst>
+      <p:ext uri="{BB962C8B-B14F-4D97-AF65-F5344CB8AC3E}">
+        <p14:creationId xmlns:p14="http://schemas.microsoft.com/office/powerpoint/2010/main" val="2868949747"/>
+      </p:ext>
+    </p:extLst>
+  </p:cSld>
+  <p:clrMapOvr>
+    <a:masterClrMapping/>
+  </p:clrMapOvr>
+</p:sld>
+</file>
+
+<file path=ppt/slides/slide16.xml><?xml version="1.0" encoding="utf-8"?>
+<p:sld xmlns:a="http://schemas.openxmlformats.org/drawingml/2006/main" xmlns:r="http://schemas.openxmlformats.org/officeDocument/2006/relationships" xmlns:p="http://schemas.openxmlformats.org/presentationml/2006/main">
+  <p:cSld>
+    <p:spTree>
+      <p:nvGrpSpPr>
+        <p:cNvPr id="1" name=""/>
+        <p:cNvGrpSpPr/>
+        <p:nvPr/>
+      </p:nvGrpSpPr>
+      <p:grpSpPr>
+        <a:xfrm>
+          <a:off x="0" y="0"/>
+          <a:ext cx="0" cy="0"/>
+          <a:chOff x="0" y="0"/>
+          <a:chExt cx="0" cy="0"/>
+        </a:xfrm>
+      </p:grpSpPr>
+      <p:sp>
+        <p:nvSpPr>
           <p:cNvPr id="2" name="Titolo 1">
             <a:extLst>
               <a:ext uri="{FF2B5EF4-FFF2-40B4-BE49-F238E27FC236}">
@@ -6595,7 +6978,7 @@
 </p:sld>
 </file>
 
-<file path=ppt/slides/slide15.xml><?xml version="1.0" encoding="utf-8"?>
+<file path=ppt/slides/slide17.xml><?xml version="1.0" encoding="utf-8"?>
 <p:sld xmlns:a="http://schemas.openxmlformats.org/drawingml/2006/main" xmlns:r="http://schemas.openxmlformats.org/officeDocument/2006/relationships" xmlns:p="http://schemas.openxmlformats.org/presentationml/2006/main">
   <p:cSld>
     <p:spTree>
@@ -7307,7 +7690,7 @@
 </p:sld>
 </file>
 
-<file path=ppt/slides/slide16.xml><?xml version="1.0" encoding="utf-8"?>
+<file path=ppt/slides/slide18.xml><?xml version="1.0" encoding="utf-8"?>
 <p:sld xmlns:a="http://schemas.openxmlformats.org/drawingml/2006/main" xmlns:r="http://schemas.openxmlformats.org/officeDocument/2006/relationships" xmlns:p="http://schemas.openxmlformats.org/presentationml/2006/main" showMasterPhAnim="0">
   <p:cSld>
     <p:spTree>
@@ -7420,7 +7803,7 @@
 </p:sld>
 </file>
 
-<file path=ppt/slides/slide17.xml><?xml version="1.0" encoding="utf-8"?>
+<file path=ppt/slides/slide19.xml><?xml version="1.0" encoding="utf-8"?>
 <p:sld xmlns:a="http://schemas.openxmlformats.org/drawingml/2006/main" xmlns:r="http://schemas.openxmlformats.org/officeDocument/2006/relationships" xmlns:p="http://schemas.openxmlformats.org/presentationml/2006/main" showMasterPhAnim="0">
   <p:cSld>
     <p:spTree>
@@ -8019,7 +8402,316 @@
 </p:sld>
 </file>
 
-<file path=ppt/slides/slide18.xml><?xml version="1.0" encoding="utf-8"?>
+<file path=ppt/slides/slide2.xml><?xml version="1.0" encoding="utf-8"?>
+<p:sld xmlns:a="http://schemas.openxmlformats.org/drawingml/2006/main" xmlns:r="http://schemas.openxmlformats.org/officeDocument/2006/relationships" xmlns:p="http://schemas.openxmlformats.org/presentationml/2006/main" showMasterPhAnim="0">
+  <p:cSld>
+    <p:spTree>
+      <p:nvGrpSpPr>
+        <p:cNvPr id="1" name=""/>
+        <p:cNvGrpSpPr/>
+        <p:nvPr/>
+      </p:nvGrpSpPr>
+      <p:grpSpPr bwMode="auto">
+        <a:xfrm>
+          <a:off x="0" y="0"/>
+          <a:ext cx="0" cy="0"/>
+          <a:chOff x="0" y="0"/>
+          <a:chExt cx="0" cy="0"/>
+        </a:xfrm>
+      </p:grpSpPr>
+      <p:sp>
+        <p:nvSpPr>
+          <p:cNvPr id="594542285" name="Titolo 1"/>
+          <p:cNvSpPr>
+            <a:spLocks noGrp="1"/>
+          </p:cNvSpPr>
+          <p:nvPr>
+            <p:ph type="title"/>
+          </p:nvPr>
+        </p:nvSpPr>
+        <p:spPr bwMode="auto">
+          <a:prstGeom prst="rect">
+            <a:avLst/>
+          </a:prstGeom>
+          <a:ln w="12699">
+            <a:noFill/>
+            <a:prstDash val="solid"/>
+          </a:ln>
+        </p:spPr>
+        <p:txBody>
+          <a:bodyPr/>
+          <a:lstStyle/>
+          <a:p>
+            <a:pPr>
+              <a:defRPr/>
+            </a:pPr>
+            <a:r>
+              <a:rPr lang="en" b="1" dirty="0">
+                <a:ln w="6349">
+                  <a:noFill/>
+                  <a:prstDash val="solid"/>
+                </a:ln>
+                <a:solidFill>
+                  <a:srgbClr val="0070C0"/>
+                </a:solidFill>
+                <a:latin typeface="Noto Sans"/>
+                <a:ea typeface="Noto Sans"/>
+                <a:cs typeface="Noto Sans"/>
+              </a:rPr>
+              <a:t>Indice dei contenuti</a:t>
+            </a:r>
+            <a:endParaRPr dirty="0"/>
+          </a:p>
+        </p:txBody>
+      </p:sp>
+      <p:sp>
+        <p:nvSpPr>
+          <p:cNvPr id="324859497" name="Segnaposto contenuto 2"/>
+          <p:cNvSpPr>
+            <a:spLocks noGrp="1"/>
+          </p:cNvSpPr>
+          <p:nvPr>
+            <p:ph idx="1"/>
+          </p:nvPr>
+        </p:nvSpPr>
+        <p:spPr bwMode="auto"/>
+        <p:txBody>
+          <a:bodyPr vertOverflow="overflow" horzOverflow="overflow" vert="horz" wrap="square" lIns="91440" tIns="45720" rIns="91440" bIns="45720" numCol="1" spcCol="0" rtlCol="0" fromWordArt="0" anchor="t" anchorCtr="0" forceAA="0" compatLnSpc="0">
+            <a:normAutofit lnSpcReduction="13000"/>
+          </a:bodyPr>
+          <a:lstStyle/>
+          <a:p>
+            <a:pPr marL="394023" indent="-394023">
+              <a:buFont typeface="Arial"/>
+              <a:buAutoNum type="alphaUcPeriod"/>
+              <a:defRPr/>
+            </a:pPr>
+            <a:r>
+              <a:rPr lang="en" sz="1800" dirty="0">
+                <a:latin typeface="DejaVu Sans Condensed"/>
+                <a:ea typeface="DejaVu Sans Condensed"/>
+                <a:cs typeface="DejaVu Sans Condensed"/>
+              </a:rPr>
+              <a:t>Separazione modello-vista			</a:t>
+            </a:r>
+            <a:r>
+              <a:rPr lang="en-GB" sz="1800" dirty="0">
+                <a:latin typeface="DejaVu Sans Condensed"/>
+                <a:ea typeface="DejaVu Sans Condensed"/>
+                <a:cs typeface="DejaVu Sans Condensed"/>
+              </a:rPr>
+              <a:t>n slide</a:t>
+            </a:r>
+            <a:endParaRPr sz="1800" dirty="0">
+              <a:latin typeface="DejaVu Sans Condensed"/>
+              <a:cs typeface="DejaVu Sans Condensed"/>
+            </a:endParaRPr>
+          </a:p>
+          <a:p>
+            <a:pPr marL="394023" indent="-394023">
+              <a:buFont typeface="Arial"/>
+              <a:buAutoNum type="alphaUcPeriod"/>
+              <a:defRPr/>
+            </a:pPr>
+            <a:r>
+              <a:rPr lang="en" sz="1800" dirty="0">
+                <a:latin typeface="DejaVu Sans Condensed"/>
+                <a:ea typeface="DejaVu Sans Condensed"/>
+                <a:cs typeface="DejaVu Sans Condensed"/>
+              </a:rPr>
+              <a:t>Esempi di pattern GRASP		</a:t>
+            </a:r>
+            <a:endParaRPr sz="1800" dirty="0">
+              <a:latin typeface="DejaVu Sans Condensed"/>
+              <a:cs typeface="DejaVu Sans Condensed"/>
+            </a:endParaRPr>
+          </a:p>
+          <a:p>
+            <a:pPr marL="794073" lvl="1" indent="-394023">
+              <a:buFont typeface="Arial"/>
+              <a:buAutoNum type="alphaUcPeriod"/>
+              <a:defRPr/>
+            </a:pPr>
+            <a:r>
+              <a:rPr lang="en" sz="1800" dirty="0">
+                <a:latin typeface="DejaVu Sans Condensed"/>
+                <a:ea typeface="DejaVu Sans Condensed"/>
+                <a:cs typeface="DejaVu Sans Condensed"/>
+              </a:rPr>
+              <a:t>GRASP 1 – Information Expert		n slide</a:t>
+            </a:r>
+            <a:endParaRPr sz="1800" dirty="0">
+              <a:latin typeface="DejaVu Sans Condensed"/>
+              <a:cs typeface="DejaVu Sans Condensed"/>
+            </a:endParaRPr>
+          </a:p>
+          <a:p>
+            <a:pPr marL="794073" lvl="1" indent="-394023">
+              <a:buFont typeface="Arial"/>
+              <a:buAutoNum type="alphaUcPeriod"/>
+              <a:defRPr/>
+            </a:pPr>
+            <a:r>
+              <a:rPr lang="en" sz="1800" dirty="0">
+                <a:latin typeface="DejaVu Sans Condensed"/>
+                <a:ea typeface="DejaVu Sans Condensed"/>
+                <a:cs typeface="DejaVu Sans Condensed"/>
+              </a:rPr>
+              <a:t>GRASP 2 – Controller				n slide</a:t>
+            </a:r>
+            <a:endParaRPr sz="1800" dirty="0">
+              <a:latin typeface="DejaVu Sans Condensed"/>
+              <a:cs typeface="DejaVu Sans Condensed"/>
+            </a:endParaRPr>
+          </a:p>
+          <a:p>
+            <a:pPr marL="394023" lvl="0" indent="-394023">
+              <a:buFont typeface="Arial"/>
+              <a:buAutoNum type="alphaUcPeriod"/>
+              <a:defRPr/>
+            </a:pPr>
+            <a:r>
+              <a:rPr lang="en" sz="1800" dirty="0">
+                <a:latin typeface="DejaVu Sans Condensed"/>
+                <a:ea typeface="DejaVu Sans Condensed"/>
+                <a:cs typeface="DejaVu Sans Condensed"/>
+              </a:rPr>
+              <a:t>Esempi di pattern SOLID			</a:t>
+            </a:r>
+            <a:endParaRPr sz="1800" dirty="0">
+              <a:latin typeface="DejaVu Sans Condensed"/>
+              <a:cs typeface="DejaVu Sans Condensed"/>
+            </a:endParaRPr>
+          </a:p>
+          <a:p>
+            <a:pPr marL="794073" lvl="1" indent="-394023">
+              <a:buFont typeface="Arial"/>
+              <a:buAutoNum type="alphaUcPeriod"/>
+              <a:defRPr/>
+            </a:pPr>
+            <a:r>
+              <a:rPr lang="en" sz="1800" dirty="0">
+                <a:latin typeface="DejaVu Sans Condensed"/>
+                <a:ea typeface="DejaVu Sans Condensed"/>
+                <a:cs typeface="DejaVu Sans Condensed"/>
+              </a:rPr>
+              <a:t>SOLID 1 – Dependency Inversion 		n slide</a:t>
+            </a:r>
+            <a:endParaRPr sz="1800" dirty="0">
+              <a:latin typeface="DejaVu Sans Condensed"/>
+              <a:cs typeface="DejaVu Sans Condensed"/>
+            </a:endParaRPr>
+          </a:p>
+          <a:p>
+            <a:pPr marL="794073" lvl="1" indent="-394023">
+              <a:buFont typeface="Arial"/>
+              <a:buAutoNum type="alphaUcPeriod"/>
+              <a:defRPr/>
+            </a:pPr>
+            <a:r>
+              <a:rPr lang="en" sz="1800" dirty="0">
+                <a:latin typeface="DejaVu Sans Condensed"/>
+                <a:ea typeface="DejaVu Sans Condensed"/>
+                <a:cs typeface="DejaVu Sans Condensed"/>
+              </a:rPr>
+              <a:t>SOLID 2 – Interface Segregation		n slide</a:t>
+            </a:r>
+          </a:p>
+          <a:p>
+            <a:pPr marL="336873" indent="-394023">
+              <a:buFont typeface="Arial"/>
+              <a:buAutoNum type="alphaUcPeriod"/>
+              <a:defRPr/>
+            </a:pPr>
+            <a:r>
+              <a:rPr lang="en" sz="1800" dirty="0">
+                <a:latin typeface="DejaVu Sans Condensed"/>
+                <a:cs typeface="DejaVu Sans Condensed"/>
+              </a:rPr>
+              <a:t>Esempi di pattern GoF</a:t>
+            </a:r>
+          </a:p>
+          <a:p>
+            <a:pPr marL="794073" lvl="1" indent="-394023">
+              <a:buFont typeface="Arial"/>
+              <a:buAutoNum type="alphaUcPeriod"/>
+              <a:defRPr/>
+            </a:pPr>
+            <a:r>
+              <a:rPr lang="en" sz="1800" dirty="0">
+                <a:latin typeface="DejaVu Sans Condensed"/>
+                <a:cs typeface="DejaVu Sans Condensed"/>
+              </a:rPr>
+              <a:t>GoF 1 – Strategy				n slide</a:t>
+            </a:r>
+          </a:p>
+          <a:p>
+            <a:pPr marL="794073" lvl="1" indent="-394023">
+              <a:buFont typeface="Arial"/>
+              <a:buAutoNum type="alphaUcPeriod"/>
+              <a:defRPr/>
+            </a:pPr>
+            <a:r>
+              <a:rPr lang="en" sz="1800" dirty="0">
+                <a:latin typeface="DejaVu Sans Condensed"/>
+                <a:cs typeface="DejaVu Sans Condensed"/>
+              </a:rPr>
+              <a:t>GoF 2 – Adapter				n slide</a:t>
+            </a:r>
+            <a:endParaRPr sz="1800" dirty="0">
+              <a:latin typeface="DejaVu Sans Condensed"/>
+              <a:cs typeface="DejaVu Sans Condensed"/>
+            </a:endParaRPr>
+          </a:p>
+          <a:p>
+            <a:pPr marL="394023" lvl="0" indent="-394023">
+              <a:buFont typeface="Arial"/>
+              <a:buAutoNum type="alphaUcPeriod"/>
+              <a:defRPr/>
+            </a:pPr>
+            <a:r>
+              <a:rPr lang="en" sz="1800" dirty="0">
+                <a:latin typeface="DejaVu Sans Condensed"/>
+                <a:ea typeface="DejaVu Sans Condensed"/>
+                <a:cs typeface="DejaVu Sans Condensed"/>
+              </a:rPr>
+              <a:t>Esempi di testing					n slide</a:t>
+            </a:r>
+            <a:endParaRPr sz="1800" dirty="0">
+              <a:latin typeface="DejaVu Sans Condensed"/>
+              <a:cs typeface="DejaVu Sans Condensed"/>
+            </a:endParaRPr>
+          </a:p>
+          <a:p>
+            <a:pPr marL="394023" lvl="0" indent="-394023">
+              <a:buFont typeface="Arial"/>
+              <a:buAutoNum type="alphaUcPeriod"/>
+              <a:defRPr/>
+            </a:pPr>
+            <a:r>
+              <a:rPr lang="en" sz="1800" dirty="0">
+                <a:latin typeface="DejaVu Sans Condensed"/>
+                <a:ea typeface="DejaVu Sans Condensed"/>
+                <a:cs typeface="DejaVu Sans Condensed"/>
+              </a:rPr>
+              <a:t>Esempi di refactoring				n slide</a:t>
+            </a:r>
+            <a:endParaRPr sz="1800" dirty="0">
+              <a:latin typeface="Cantarell"/>
+              <a:cs typeface="Cantarell"/>
+            </a:endParaRPr>
+          </a:p>
+        </p:txBody>
+      </p:sp>
+    </p:spTree>
+  </p:cSld>
+  <p:clrMapOvr>
+    <a:masterClrMapping/>
+  </p:clrMapOvr>
+</p:sld>
+</file>
+
+<file path=ppt/slides/slide20.xml><?xml version="1.0" encoding="utf-8"?>
 <p:sld xmlns:a="http://schemas.openxmlformats.org/drawingml/2006/main" xmlns:r="http://schemas.openxmlformats.org/officeDocument/2006/relationships" xmlns:p="http://schemas.openxmlformats.org/presentationml/2006/main" showMasterPhAnim="0">
   <p:cSld>
     <p:spTree>
@@ -8557,7 +9249,7 @@
 </p:sld>
 </file>
 
-<file path=ppt/slides/slide19.xml><?xml version="1.0" encoding="utf-8"?>
+<file path=ppt/slides/slide21.xml><?xml version="1.0" encoding="utf-8"?>
 <p:sld xmlns:a="http://schemas.openxmlformats.org/drawingml/2006/main" xmlns:r="http://schemas.openxmlformats.org/officeDocument/2006/relationships" xmlns:p="http://schemas.openxmlformats.org/presentationml/2006/main" showMasterPhAnim="0">
   <p:cSld>
     <p:spTree>
@@ -9245,316 +9937,7 @@
 </p:sld>
 </file>
 
-<file path=ppt/slides/slide2.xml><?xml version="1.0" encoding="utf-8"?>
-<p:sld xmlns:a="http://schemas.openxmlformats.org/drawingml/2006/main" xmlns:r="http://schemas.openxmlformats.org/officeDocument/2006/relationships" xmlns:p="http://schemas.openxmlformats.org/presentationml/2006/main" showMasterPhAnim="0">
-  <p:cSld>
-    <p:spTree>
-      <p:nvGrpSpPr>
-        <p:cNvPr id="1" name=""/>
-        <p:cNvGrpSpPr/>
-        <p:nvPr/>
-      </p:nvGrpSpPr>
-      <p:grpSpPr bwMode="auto">
-        <a:xfrm>
-          <a:off x="0" y="0"/>
-          <a:ext cx="0" cy="0"/>
-          <a:chOff x="0" y="0"/>
-          <a:chExt cx="0" cy="0"/>
-        </a:xfrm>
-      </p:grpSpPr>
-      <p:sp>
-        <p:nvSpPr>
-          <p:cNvPr id="594542285" name="Titolo 1"/>
-          <p:cNvSpPr>
-            <a:spLocks noGrp="1"/>
-          </p:cNvSpPr>
-          <p:nvPr>
-            <p:ph type="title"/>
-          </p:nvPr>
-        </p:nvSpPr>
-        <p:spPr bwMode="auto">
-          <a:prstGeom prst="rect">
-            <a:avLst/>
-          </a:prstGeom>
-          <a:ln w="12699">
-            <a:noFill/>
-            <a:prstDash val="solid"/>
-          </a:ln>
-        </p:spPr>
-        <p:txBody>
-          <a:bodyPr/>
-          <a:lstStyle/>
-          <a:p>
-            <a:pPr>
-              <a:defRPr/>
-            </a:pPr>
-            <a:r>
-              <a:rPr lang="en" b="1" dirty="0">
-                <a:ln w="6349">
-                  <a:noFill/>
-                  <a:prstDash val="solid"/>
-                </a:ln>
-                <a:solidFill>
-                  <a:srgbClr val="0070C0"/>
-                </a:solidFill>
-                <a:latin typeface="Noto Sans"/>
-                <a:ea typeface="Noto Sans"/>
-                <a:cs typeface="Noto Sans"/>
-              </a:rPr>
-              <a:t>Indice dei contenuti</a:t>
-            </a:r>
-            <a:endParaRPr dirty="0"/>
-          </a:p>
-        </p:txBody>
-      </p:sp>
-      <p:sp>
-        <p:nvSpPr>
-          <p:cNvPr id="324859497" name="Segnaposto contenuto 2"/>
-          <p:cNvSpPr>
-            <a:spLocks noGrp="1"/>
-          </p:cNvSpPr>
-          <p:nvPr>
-            <p:ph idx="1"/>
-          </p:nvPr>
-        </p:nvSpPr>
-        <p:spPr bwMode="auto"/>
-        <p:txBody>
-          <a:bodyPr vertOverflow="overflow" horzOverflow="overflow" vert="horz" wrap="square" lIns="91440" tIns="45720" rIns="91440" bIns="45720" numCol="1" spcCol="0" rtlCol="0" fromWordArt="0" anchor="t" anchorCtr="0" forceAA="0" compatLnSpc="0">
-            <a:normAutofit lnSpcReduction="13000"/>
-          </a:bodyPr>
-          <a:lstStyle/>
-          <a:p>
-            <a:pPr marL="394023" indent="-394023">
-              <a:buFont typeface="Arial"/>
-              <a:buAutoNum type="alphaUcPeriod"/>
-              <a:defRPr/>
-            </a:pPr>
-            <a:r>
-              <a:rPr lang="en" sz="1800" dirty="0">
-                <a:latin typeface="DejaVu Sans Condensed"/>
-                <a:ea typeface="DejaVu Sans Condensed"/>
-                <a:cs typeface="DejaVu Sans Condensed"/>
-              </a:rPr>
-              <a:t>Separazione modello-vista			</a:t>
-            </a:r>
-            <a:r>
-              <a:rPr lang="en-GB" sz="1800" dirty="0">
-                <a:latin typeface="DejaVu Sans Condensed"/>
-                <a:ea typeface="DejaVu Sans Condensed"/>
-                <a:cs typeface="DejaVu Sans Condensed"/>
-              </a:rPr>
-              <a:t>n slide</a:t>
-            </a:r>
-            <a:endParaRPr sz="1800" dirty="0">
-              <a:latin typeface="DejaVu Sans Condensed"/>
-              <a:cs typeface="DejaVu Sans Condensed"/>
-            </a:endParaRPr>
-          </a:p>
-          <a:p>
-            <a:pPr marL="394023" indent="-394023">
-              <a:buFont typeface="Arial"/>
-              <a:buAutoNum type="alphaUcPeriod"/>
-              <a:defRPr/>
-            </a:pPr>
-            <a:r>
-              <a:rPr lang="en" sz="1800" dirty="0">
-                <a:latin typeface="DejaVu Sans Condensed"/>
-                <a:ea typeface="DejaVu Sans Condensed"/>
-                <a:cs typeface="DejaVu Sans Condensed"/>
-              </a:rPr>
-              <a:t>Esempi di pattern GRASP		</a:t>
-            </a:r>
-            <a:endParaRPr sz="1800" dirty="0">
-              <a:latin typeface="DejaVu Sans Condensed"/>
-              <a:cs typeface="DejaVu Sans Condensed"/>
-            </a:endParaRPr>
-          </a:p>
-          <a:p>
-            <a:pPr marL="794073" lvl="1" indent="-394023">
-              <a:buFont typeface="Arial"/>
-              <a:buAutoNum type="alphaUcPeriod"/>
-              <a:defRPr/>
-            </a:pPr>
-            <a:r>
-              <a:rPr lang="en" sz="1800" dirty="0">
-                <a:latin typeface="DejaVu Sans Condensed"/>
-                <a:ea typeface="DejaVu Sans Condensed"/>
-                <a:cs typeface="DejaVu Sans Condensed"/>
-              </a:rPr>
-              <a:t>GRASP 1 – Information Expert		n slide</a:t>
-            </a:r>
-            <a:endParaRPr sz="1800" dirty="0">
-              <a:latin typeface="DejaVu Sans Condensed"/>
-              <a:cs typeface="DejaVu Sans Condensed"/>
-            </a:endParaRPr>
-          </a:p>
-          <a:p>
-            <a:pPr marL="794073" lvl="1" indent="-394023">
-              <a:buFont typeface="Arial"/>
-              <a:buAutoNum type="alphaUcPeriod"/>
-              <a:defRPr/>
-            </a:pPr>
-            <a:r>
-              <a:rPr lang="en" sz="1800" dirty="0">
-                <a:latin typeface="DejaVu Sans Condensed"/>
-                <a:ea typeface="DejaVu Sans Condensed"/>
-                <a:cs typeface="DejaVu Sans Condensed"/>
-              </a:rPr>
-              <a:t>GRASP 2 – Controller				n slide</a:t>
-            </a:r>
-            <a:endParaRPr sz="1800" dirty="0">
-              <a:latin typeface="DejaVu Sans Condensed"/>
-              <a:cs typeface="DejaVu Sans Condensed"/>
-            </a:endParaRPr>
-          </a:p>
-          <a:p>
-            <a:pPr marL="394023" lvl="0" indent="-394023">
-              <a:buFont typeface="Arial"/>
-              <a:buAutoNum type="alphaUcPeriod"/>
-              <a:defRPr/>
-            </a:pPr>
-            <a:r>
-              <a:rPr lang="en" sz="1800" dirty="0">
-                <a:latin typeface="DejaVu Sans Condensed"/>
-                <a:ea typeface="DejaVu Sans Condensed"/>
-                <a:cs typeface="DejaVu Sans Condensed"/>
-              </a:rPr>
-              <a:t>Esempi di pattern SOLID			</a:t>
-            </a:r>
-            <a:endParaRPr sz="1800" dirty="0">
-              <a:latin typeface="DejaVu Sans Condensed"/>
-              <a:cs typeface="DejaVu Sans Condensed"/>
-            </a:endParaRPr>
-          </a:p>
-          <a:p>
-            <a:pPr marL="794073" lvl="1" indent="-394023">
-              <a:buFont typeface="Arial"/>
-              <a:buAutoNum type="alphaUcPeriod"/>
-              <a:defRPr/>
-            </a:pPr>
-            <a:r>
-              <a:rPr lang="en" sz="1800" dirty="0">
-                <a:latin typeface="DejaVu Sans Condensed"/>
-                <a:ea typeface="DejaVu Sans Condensed"/>
-                <a:cs typeface="DejaVu Sans Condensed"/>
-              </a:rPr>
-              <a:t>SOLID 1 – Dependency Inversion 		n slide</a:t>
-            </a:r>
-            <a:endParaRPr sz="1800" dirty="0">
-              <a:latin typeface="DejaVu Sans Condensed"/>
-              <a:cs typeface="DejaVu Sans Condensed"/>
-            </a:endParaRPr>
-          </a:p>
-          <a:p>
-            <a:pPr marL="794073" lvl="1" indent="-394023">
-              <a:buFont typeface="Arial"/>
-              <a:buAutoNum type="alphaUcPeriod"/>
-              <a:defRPr/>
-            </a:pPr>
-            <a:r>
-              <a:rPr lang="en" sz="1800" dirty="0">
-                <a:latin typeface="DejaVu Sans Condensed"/>
-                <a:ea typeface="DejaVu Sans Condensed"/>
-                <a:cs typeface="DejaVu Sans Condensed"/>
-              </a:rPr>
-              <a:t>SOLID 2 – Interface Segregation		n slide</a:t>
-            </a:r>
-          </a:p>
-          <a:p>
-            <a:pPr marL="336873" indent="-394023">
-              <a:buFont typeface="Arial"/>
-              <a:buAutoNum type="alphaUcPeriod"/>
-              <a:defRPr/>
-            </a:pPr>
-            <a:r>
-              <a:rPr lang="en" sz="1800" dirty="0">
-                <a:latin typeface="DejaVu Sans Condensed"/>
-                <a:cs typeface="DejaVu Sans Condensed"/>
-              </a:rPr>
-              <a:t>Esempi di pattern GoF</a:t>
-            </a:r>
-          </a:p>
-          <a:p>
-            <a:pPr marL="794073" lvl="1" indent="-394023">
-              <a:buFont typeface="Arial"/>
-              <a:buAutoNum type="alphaUcPeriod"/>
-              <a:defRPr/>
-            </a:pPr>
-            <a:r>
-              <a:rPr lang="en" sz="1800" dirty="0">
-                <a:latin typeface="DejaVu Sans Condensed"/>
-                <a:cs typeface="DejaVu Sans Condensed"/>
-              </a:rPr>
-              <a:t>GoF 1 – Strategy				n slide</a:t>
-            </a:r>
-          </a:p>
-          <a:p>
-            <a:pPr marL="794073" lvl="1" indent="-394023">
-              <a:buFont typeface="Arial"/>
-              <a:buAutoNum type="alphaUcPeriod"/>
-              <a:defRPr/>
-            </a:pPr>
-            <a:r>
-              <a:rPr lang="en" sz="1800" dirty="0">
-                <a:latin typeface="DejaVu Sans Condensed"/>
-                <a:cs typeface="DejaVu Sans Condensed"/>
-              </a:rPr>
-              <a:t>GoF 2 – Adapter				n slide</a:t>
-            </a:r>
-            <a:endParaRPr sz="1800" dirty="0">
-              <a:latin typeface="DejaVu Sans Condensed"/>
-              <a:cs typeface="DejaVu Sans Condensed"/>
-            </a:endParaRPr>
-          </a:p>
-          <a:p>
-            <a:pPr marL="394023" lvl="0" indent="-394023">
-              <a:buFont typeface="Arial"/>
-              <a:buAutoNum type="alphaUcPeriod"/>
-              <a:defRPr/>
-            </a:pPr>
-            <a:r>
-              <a:rPr lang="en" sz="1800" dirty="0">
-                <a:latin typeface="DejaVu Sans Condensed"/>
-                <a:ea typeface="DejaVu Sans Condensed"/>
-                <a:cs typeface="DejaVu Sans Condensed"/>
-              </a:rPr>
-              <a:t>Esempi di testing					n slide</a:t>
-            </a:r>
-            <a:endParaRPr sz="1800" dirty="0">
-              <a:latin typeface="DejaVu Sans Condensed"/>
-              <a:cs typeface="DejaVu Sans Condensed"/>
-            </a:endParaRPr>
-          </a:p>
-          <a:p>
-            <a:pPr marL="394023" lvl="0" indent="-394023">
-              <a:buFont typeface="Arial"/>
-              <a:buAutoNum type="alphaUcPeriod"/>
-              <a:defRPr/>
-            </a:pPr>
-            <a:r>
-              <a:rPr lang="en" sz="1800" dirty="0">
-                <a:latin typeface="DejaVu Sans Condensed"/>
-                <a:ea typeface="DejaVu Sans Condensed"/>
-                <a:cs typeface="DejaVu Sans Condensed"/>
-              </a:rPr>
-              <a:t>Esempi di refactoring				n slide</a:t>
-            </a:r>
-            <a:endParaRPr sz="1800" dirty="0">
-              <a:latin typeface="Cantarell"/>
-              <a:cs typeface="Cantarell"/>
-            </a:endParaRPr>
-          </a:p>
-        </p:txBody>
-      </p:sp>
-    </p:spTree>
-  </p:cSld>
-  <p:clrMapOvr>
-    <a:masterClrMapping/>
-  </p:clrMapOvr>
-</p:sld>
-</file>
-
-<file path=ppt/slides/slide20.xml><?xml version="1.0" encoding="utf-8"?>
+<file path=ppt/slides/slide22.xml><?xml version="1.0" encoding="utf-8"?>
 <p:sld xmlns:a="http://schemas.openxmlformats.org/drawingml/2006/main" xmlns:r="http://schemas.openxmlformats.org/officeDocument/2006/relationships" xmlns:p="http://schemas.openxmlformats.org/presentationml/2006/main" showMasterPhAnim="0">
   <p:cSld>
     <p:spTree>
@@ -10426,7 +10809,7 @@
 </p:sld>
 </file>
 
-<file path=ppt/slides/slide21.xml><?xml version="1.0" encoding="utf-8"?>
+<file path=ppt/slides/slide23.xml><?xml version="1.0" encoding="utf-8"?>
 <p:sld xmlns:a="http://schemas.openxmlformats.org/drawingml/2006/main" xmlns:r="http://schemas.openxmlformats.org/officeDocument/2006/relationships" xmlns:p="http://schemas.openxmlformats.org/presentationml/2006/main" showMasterPhAnim="0">
   <p:cSld>
     <p:spTree>
@@ -10637,933 +11020,6 @@
 </p:sld>
 </file>
 
-<file path=ppt/slides/slide22.xml><?xml version="1.0" encoding="utf-8"?>
-<p:sld xmlns:a="http://schemas.openxmlformats.org/drawingml/2006/main" xmlns:r="http://schemas.openxmlformats.org/officeDocument/2006/relationships" xmlns:p="http://schemas.openxmlformats.org/presentationml/2006/main" showMasterPhAnim="0">
-  <p:cSld>
-    <p:spTree>
-      <p:nvGrpSpPr>
-        <p:cNvPr id="1" name=""/>
-        <p:cNvGrpSpPr/>
-        <p:nvPr/>
-      </p:nvGrpSpPr>
-      <p:grpSpPr bwMode="auto">
-        <a:xfrm>
-          <a:off x="0" y="0"/>
-          <a:ext cx="0" cy="0"/>
-          <a:chOff x="0" y="0"/>
-          <a:chExt cx="0" cy="0"/>
-        </a:xfrm>
-      </p:grpSpPr>
-      <p:sp>
-        <p:nvSpPr>
-          <p:cNvPr id="59495650" name="Titolo 1"/>
-          <p:cNvSpPr>
-            <a:spLocks noGrp="1"/>
-          </p:cNvSpPr>
-          <p:nvPr>
-            <p:ph type="title"/>
-          </p:nvPr>
-        </p:nvSpPr>
-        <p:spPr bwMode="auto">
-          <a:xfrm>
-            <a:off x="838198" y="365123"/>
-            <a:ext cx="5555216" cy="1325561"/>
-          </a:xfrm>
-        </p:spPr>
-        <p:txBody>
-          <a:bodyPr/>
-          <a:lstStyle/>
-          <a:p>
-            <a:pPr>
-              <a:defRPr/>
-            </a:pPr>
-            <a:r>
-              <a:rPr lang="en" b="1">
-                <a:solidFill>
-                  <a:srgbClr val="0070C0"/>
-                </a:solidFill>
-                <a:latin typeface="Noto Sans"/>
-                <a:ea typeface="Noto Sans"/>
-                <a:cs typeface="Noto Sans"/>
-              </a:rPr>
-              <a:t>Refactoring</a:t>
-            </a:r>
-            <a:endParaRPr/>
-          </a:p>
-        </p:txBody>
-      </p:sp>
-      <p:sp>
-        <p:nvSpPr>
-          <p:cNvPr id="104998061" name="Segnaposto contenuto 2"/>
-          <p:cNvSpPr>
-            <a:spLocks noGrp="1"/>
-          </p:cNvSpPr>
-          <p:nvPr>
-            <p:ph idx="1"/>
-          </p:nvPr>
-        </p:nvSpPr>
-        <p:spPr bwMode="auto"/>
-        <p:txBody>
-          <a:bodyPr/>
-          <a:lstStyle/>
-          <a:p>
-            <a:pPr marL="0" indent="0">
-              <a:buFont typeface="Arial"/>
-              <a:buNone/>
-              <a:defRPr/>
-            </a:pPr>
-            <a:r>
-              <a:rPr lang="en"/>
-              <a:t>Il refactoring della classe VisitPlanService si é reso necessario perché:</a:t>
-            </a:r>
-          </a:p>
-          <a:p>
-            <a:pPr>
-              <a:defRPr/>
-            </a:pPr>
-            <a:r>
-              <a:rPr lang="en"/>
-              <a:t>contiene l’algoritmo fondamentale per il funzionamento del programma</a:t>
-            </a:r>
-          </a:p>
-          <a:p>
-            <a:pPr>
-              <a:defRPr/>
-            </a:pPr>
-            <a:r>
-              <a:rPr lang="en"/>
-              <a:t>é probabile che possa subire modifiche/aggiunte in futuro</a:t>
-            </a:r>
-          </a:p>
-          <a:p>
-            <a:pPr>
-              <a:defRPr/>
-            </a:pPr>
-            <a:r>
-              <a:rPr lang="en"/>
-              <a:t>combina molte informazioni diverse: visite, tipi di visite, date non disponibili, volontari e relative disponibilitá</a:t>
-            </a:r>
-          </a:p>
-          <a:p>
-            <a:pPr marL="0" indent="0">
-              <a:buFont typeface="Arial"/>
-              <a:buNone/>
-              <a:defRPr/>
-            </a:pPr>
-            <a:r>
-              <a:rPr lang="en"/>
-              <a:t>Di seguito i pattern di refactoring applicati</a:t>
-            </a:r>
-            <a:endParaRPr/>
-          </a:p>
-        </p:txBody>
-      </p:sp>
-      <p:sp>
-        <p:nvSpPr>
-          <p:cNvPr id="27321058" name="CasellaDiTesto 27321057"/>
-          <p:cNvSpPr txBox="1"/>
-          <p:nvPr/>
-        </p:nvSpPr>
-        <p:spPr bwMode="auto">
-          <a:xfrm>
-            <a:off x="5753406" y="844844"/>
-            <a:ext cx="5851705" cy="518519"/>
-          </a:xfrm>
-          <a:prstGeom prst="rect">
-            <a:avLst/>
-          </a:prstGeom>
-          <a:noFill/>
-        </p:spPr>
-        <p:txBody>
-          <a:bodyPr vertOverflow="overflow" horzOverflow="overflow" vert="horz" wrap="square" lIns="91440" tIns="45720" rIns="91440" bIns="45720" numCol="1" spcCol="0" rtlCol="0" fromWordArt="0" anchor="t" anchorCtr="0" forceAA="0" compatLnSpc="0">
-            <a:spAutoFit/>
-          </a:bodyPr>
-          <a:lstStyle/>
-          <a:p>
-            <a:pPr algn="ctr">
-              <a:defRPr/>
-            </a:pPr>
-            <a:r>
-              <a:rPr lang="en" sz="2800" b="1">
-                <a:solidFill>
-                  <a:srgbClr val="0070C0"/>
-                </a:solidFill>
-                <a:latin typeface="DejaVu Sans Condensed"/>
-                <a:ea typeface="DejaVu Sans Condensed"/>
-                <a:cs typeface="DejaVu Sans Condensed"/>
-              </a:rPr>
-              <a:t>Caso di VisitPlanService</a:t>
-            </a:r>
-            <a:endParaRPr b="1">
-              <a:solidFill>
-                <a:srgbClr val="0070C0"/>
-              </a:solidFill>
-            </a:endParaRPr>
-          </a:p>
-        </p:txBody>
-      </p:sp>
-    </p:spTree>
-  </p:cSld>
-  <p:clrMapOvr>
-    <a:masterClrMapping/>
-  </p:clrMapOvr>
-</p:sld>
-</file>
-
-<file path=ppt/slides/slide23.xml><?xml version="1.0" encoding="utf-8"?>
-<p:sld xmlns:a="http://schemas.openxmlformats.org/drawingml/2006/main" xmlns:r="http://schemas.openxmlformats.org/officeDocument/2006/relationships" xmlns:p="http://schemas.openxmlformats.org/presentationml/2006/main" showMasterPhAnim="0">
-  <p:cSld>
-    <p:spTree>
-      <p:nvGrpSpPr>
-        <p:cNvPr id="1" name=""/>
-        <p:cNvGrpSpPr/>
-        <p:nvPr/>
-      </p:nvGrpSpPr>
-      <p:grpSpPr bwMode="auto">
-        <a:xfrm>
-          <a:off x="0" y="0"/>
-          <a:ext cx="0" cy="0"/>
-          <a:chOff x="0" y="0"/>
-          <a:chExt cx="0" cy="0"/>
-        </a:xfrm>
-      </p:grpSpPr>
-      <p:sp>
-        <p:nvSpPr>
-          <p:cNvPr id="149416002" name="Titolo 1"/>
-          <p:cNvSpPr>
-            <a:spLocks noGrp="1"/>
-          </p:cNvSpPr>
-          <p:nvPr>
-            <p:ph type="title"/>
-          </p:nvPr>
-        </p:nvSpPr>
-        <p:spPr bwMode="auto">
-          <a:xfrm>
-            <a:off x="839459" y="37802"/>
-            <a:ext cx="10515600" cy="1325562"/>
-          </a:xfrm>
-        </p:spPr>
-        <p:txBody>
-          <a:bodyPr/>
-          <a:lstStyle/>
-          <a:p>
-            <a:pPr>
-              <a:defRPr/>
-            </a:pPr>
-            <a:r>
-              <a:rPr lang="en" b="1">
-                <a:solidFill>
-                  <a:srgbClr val="0070C0"/>
-                </a:solidFill>
-                <a:latin typeface="Noto Sans"/>
-                <a:ea typeface="Noto Sans"/>
-                <a:cs typeface="Noto Sans"/>
-              </a:rPr>
-              <a:t>Refactoring</a:t>
-            </a:r>
-            <a:endParaRPr b="1">
-              <a:solidFill>
-                <a:srgbClr val="0070C0"/>
-              </a:solidFill>
-              <a:latin typeface="Noto Sans"/>
-              <a:cs typeface="Noto Sans"/>
-            </a:endParaRPr>
-          </a:p>
-        </p:txBody>
-      </p:sp>
-      <p:sp>
-        <p:nvSpPr>
-          <p:cNvPr id="1040471417" name="CasellaDiTesto 1040471416"/>
-          <p:cNvSpPr txBox="1"/>
-          <p:nvPr/>
-        </p:nvSpPr>
-        <p:spPr bwMode="auto">
-          <a:xfrm>
-            <a:off x="4915206" y="441324"/>
-            <a:ext cx="5860344" cy="518519"/>
-          </a:xfrm>
-          <a:prstGeom prst="rect">
-            <a:avLst/>
-          </a:prstGeom>
-          <a:noFill/>
-        </p:spPr>
-        <p:txBody>
-          <a:bodyPr vertOverflow="overflow" horzOverflow="overflow" vert="horz" wrap="square" lIns="91440" tIns="45720" rIns="91440" bIns="45720" numCol="1" spcCol="0" rtlCol="0" fromWordArt="0" anchor="t" anchorCtr="0" forceAA="0" compatLnSpc="0">
-            <a:spAutoFit/>
-          </a:bodyPr>
-          <a:lstStyle/>
-          <a:p>
-            <a:pPr algn="ctr">
-              <a:defRPr/>
-            </a:pPr>
-            <a:r>
-              <a:rPr lang="en" sz="2800" b="1">
-                <a:solidFill>
-                  <a:srgbClr val="0070C0"/>
-                </a:solidFill>
-                <a:latin typeface="DejaVu Sans Condensed"/>
-                <a:ea typeface="DejaVu Sans Condensed"/>
-                <a:cs typeface="DejaVu Sans Condensed"/>
-              </a:rPr>
-              <a:t>Extract Method - 1</a:t>
-            </a:r>
-            <a:endParaRPr b="1">
-              <a:solidFill>
-                <a:srgbClr val="0070C0"/>
-              </a:solidFill>
-            </a:endParaRPr>
-          </a:p>
-        </p:txBody>
-      </p:sp>
-      <p:sp>
-        <p:nvSpPr>
-          <p:cNvPr id="1689386774" name="CasellaDiTesto 1689386773"/>
-          <p:cNvSpPr txBox="1"/>
-          <p:nvPr/>
-        </p:nvSpPr>
-        <p:spPr bwMode="auto">
-          <a:xfrm>
-            <a:off x="457916" y="1160462"/>
-            <a:ext cx="11276167" cy="2524456"/>
-          </a:xfrm>
-          <a:prstGeom prst="roundRect">
-            <a:avLst>
-              <a:gd name="adj" fmla="val 5796"/>
-            </a:avLst>
-          </a:prstGeom>
-          <a:solidFill>
-            <a:schemeClr val="bg1">
-              <a:alpha val="49999"/>
-            </a:schemeClr>
-          </a:solidFill>
-          <a:ln w="12699">
-            <a:solidFill>
-              <a:schemeClr val="tx1"/>
-            </a:solidFill>
-            <a:prstDash val="solid"/>
-          </a:ln>
-        </p:spPr>
-        <p:txBody>
-          <a:bodyPr vertOverflow="overflow" horzOverflow="overflow" vert="horz" wrap="square" lIns="91440" tIns="45720" rIns="91440" bIns="45720" numCol="1" spcCol="0" rtlCol="0" fromWordArt="0" anchor="t" anchorCtr="0" forceAA="0" compatLnSpc="0">
-            <a:spAutoFit/>
-          </a:bodyPr>
-          <a:lstStyle/>
-          <a:p>
-            <a:pPr>
-              <a:defRPr/>
-            </a:pPr>
-            <a:r>
-              <a:rPr lang="it-IT" sz="1400" b="0" i="0" u="none" strike="noStrike" cap="none" spc="0">
-                <a:solidFill>
-                  <a:schemeClr val="tx1"/>
-                </a:solidFill>
-                <a:latin typeface="Liberation Mono"/>
-                <a:ea typeface="Liberation Mono"/>
-                <a:cs typeface="Liberation Mono"/>
-              </a:rPr>
-              <a:t>for (Visit visit : monthVisits) {</a:t>
-            </a:r>
-            <a:endParaRPr sz="1400" b="0" i="0" u="none" strike="noStrike" cap="none" spc="0">
-              <a:solidFill>
-                <a:schemeClr val="tx1"/>
-              </a:solidFill>
-              <a:latin typeface="Liberation Mono"/>
-              <a:cs typeface="Liberation Mono"/>
-            </a:endParaRPr>
-          </a:p>
-          <a:p>
-            <a:pPr>
-              <a:defRPr/>
-            </a:pPr>
-            <a:r>
-              <a:rPr lang="it-IT" sz="1400" b="0" i="0" u="none" strike="noStrike" cap="none" spc="0">
-                <a:solidFill>
-                  <a:schemeClr val="tx1"/>
-                </a:solidFill>
-                <a:latin typeface="Liberation Mono"/>
-                <a:ea typeface="Liberation Mono"/>
-                <a:cs typeface="Liberation Mono"/>
-              </a:rPr>
-              <a:t>            LocalDate day = visit.getDate();</a:t>
-            </a:r>
-            <a:endParaRPr sz="1400" b="0" i="0" u="none" strike="noStrike" cap="none" spc="0">
-              <a:solidFill>
-                <a:schemeClr val="tx1"/>
-              </a:solidFill>
-              <a:latin typeface="Liberation Mono"/>
-              <a:cs typeface="Liberation Mono"/>
-            </a:endParaRPr>
-          </a:p>
-          <a:p>
-            <a:pPr>
-              <a:defRPr/>
-            </a:pPr>
-            <a:r>
-              <a:rPr lang="it-IT" sz="1400" b="0" i="0" u="none" strike="noStrike" cap="none" spc="0">
-                <a:solidFill>
-                  <a:schemeClr val="tx1"/>
-                </a:solidFill>
-                <a:latin typeface="Liberation Mono"/>
-                <a:ea typeface="Liberation Mono"/>
-                <a:cs typeface="Liberation Mono"/>
-              </a:rPr>
-              <a:t>            List&lt;User&gt; availableVolunteers = new ArrayList&lt;&gt;();</a:t>
-            </a:r>
-            <a:endParaRPr sz="1400" b="0" i="0" u="none" strike="noStrike" cap="none" spc="0">
-              <a:solidFill>
-                <a:schemeClr val="tx1"/>
-              </a:solidFill>
-              <a:latin typeface="Liberation Mono"/>
-              <a:cs typeface="Liberation Mono"/>
-            </a:endParaRPr>
-          </a:p>
-          <a:p>
-            <a:pPr>
-              <a:defRPr/>
-            </a:pPr>
-            <a:endParaRPr sz="1400" b="0" i="0" u="none" strike="noStrike" cap="none" spc="0">
-              <a:solidFill>
-                <a:schemeClr val="tx1"/>
-              </a:solidFill>
-              <a:latin typeface="Liberation Mono"/>
-              <a:cs typeface="Liberation Mono"/>
-            </a:endParaRPr>
-          </a:p>
-          <a:p>
-            <a:pPr>
-              <a:defRPr/>
-            </a:pPr>
-            <a:r>
-              <a:rPr lang="it-IT" sz="1400" b="0" i="0" u="none" strike="noStrike" cap="none" spc="0">
-                <a:solidFill>
-                  <a:schemeClr val="tx1"/>
-                </a:solidFill>
-                <a:latin typeface="Liberation Mono"/>
-                <a:ea typeface="Liberation Mono"/>
-                <a:cs typeface="Liberation Mono"/>
-              </a:rPr>
-              <a:t>            // aggiunge alla lista availableVolunteers tutti i volontari che hanno dato</a:t>
-            </a:r>
-            <a:endParaRPr sz="1400" b="0" i="0" u="none" strike="noStrike" cap="none" spc="0">
-              <a:solidFill>
-                <a:schemeClr val="tx1"/>
-              </a:solidFill>
-              <a:latin typeface="Liberation Mono"/>
-              <a:cs typeface="Liberation Mono"/>
-            </a:endParaRPr>
-          </a:p>
-          <a:p>
-            <a:pPr>
-              <a:defRPr/>
-            </a:pPr>
-            <a:r>
-              <a:rPr lang="it-IT" sz="1400" b="0" i="0" u="none" strike="noStrike" cap="none" spc="0">
-                <a:solidFill>
-                  <a:schemeClr val="tx1"/>
-                </a:solidFill>
-                <a:latin typeface="Liberation Mono"/>
-                <a:ea typeface="Liberation Mono"/>
-                <a:cs typeface="Liberation Mono"/>
-              </a:rPr>
-              <a:t>            // disponibilitá per il</a:t>
-            </a:r>
-            <a:endParaRPr sz="1400" b="0" i="0" u="none" strike="noStrike" cap="none" spc="0">
-              <a:solidFill>
-                <a:schemeClr val="tx1"/>
-              </a:solidFill>
-              <a:latin typeface="Liberation Mono"/>
-              <a:cs typeface="Liberation Mono"/>
-            </a:endParaRPr>
-          </a:p>
-          <a:p>
-            <a:pPr>
-              <a:defRPr/>
-            </a:pPr>
-            <a:r>
-              <a:rPr lang="it-IT" sz="1400" b="0" i="0" u="none" strike="noStrike" cap="none" spc="0">
-                <a:solidFill>
-                  <a:schemeClr val="tx1"/>
-                </a:solidFill>
-                <a:latin typeface="Liberation Mono"/>
-                <a:ea typeface="Liberation Mono"/>
-                <a:cs typeface="Liberation Mono"/>
-              </a:rPr>
-              <a:t>            // giorno 'day'</a:t>
-            </a:r>
-            <a:endParaRPr sz="1400" b="0" i="0" u="none" strike="noStrike" cap="none" spc="0">
-              <a:solidFill>
-                <a:schemeClr val="tx1"/>
-              </a:solidFill>
-              <a:latin typeface="Liberation Mono"/>
-              <a:cs typeface="Liberation Mono"/>
-            </a:endParaRPr>
-          </a:p>
-          <a:p>
-            <a:pPr>
-              <a:defRPr/>
-            </a:pPr>
-            <a:r>
-              <a:rPr lang="it-IT" sz="1400" b="0" i="0" u="none" strike="noStrike" cap="none" spc="0">
-                <a:solidFill>
-                  <a:schemeClr val="tx1"/>
-                </a:solidFill>
-                <a:latin typeface="Liberation Mono"/>
-                <a:ea typeface="Liberation Mono"/>
-                <a:cs typeface="Liberation Mono"/>
-              </a:rPr>
-              <a:t>            monthAvailabilities.stream().filter(av -&gt; av.getAvailableDate().equals(day)) //</a:t>
-            </a:r>
-            <a:endParaRPr sz="1400" b="0" i="0" u="none" strike="noStrike" cap="none" spc="0">
-              <a:solidFill>
-                <a:schemeClr val="tx1"/>
-              </a:solidFill>
-              <a:latin typeface="Liberation Mono"/>
-              <a:cs typeface="Liberation Mono"/>
-            </a:endParaRPr>
-          </a:p>
-          <a:p>
-            <a:pPr>
-              <a:defRPr/>
-            </a:pPr>
-            <a:r>
-              <a:rPr lang="it-IT" sz="1400" b="0" i="0" u="none" strike="noStrike" cap="none" spc="0">
-                <a:solidFill>
-                  <a:schemeClr val="tx1"/>
-                </a:solidFill>
-                <a:latin typeface="Liberation Mono"/>
-                <a:ea typeface="Liberation Mono"/>
-                <a:cs typeface="Liberation Mono"/>
-              </a:rPr>
-              <a:t>                    // mappa le disponibilitá VolunteerAvailableDate con gli oggetti USER volontari</a:t>
-            </a:r>
-            <a:endParaRPr sz="1400" b="0" i="0" u="none" strike="noStrike" cap="none" spc="0">
-              <a:solidFill>
-                <a:schemeClr val="tx1"/>
-              </a:solidFill>
-              <a:latin typeface="Liberation Mono"/>
-              <a:cs typeface="Liberation Mono"/>
-            </a:endParaRPr>
-          </a:p>
-          <a:p>
-            <a:pPr>
-              <a:defRPr/>
-            </a:pPr>
-            <a:r>
-              <a:rPr lang="it-IT" sz="1400" b="0" i="0" u="none" strike="noStrike" cap="none" spc="0">
-                <a:solidFill>
-                  <a:schemeClr val="tx1"/>
-                </a:solidFill>
-                <a:latin typeface="Liberation Mono"/>
-                <a:ea typeface="Liberation Mono"/>
-                <a:cs typeface="Liberation Mono"/>
-              </a:rPr>
-              <a:t>                    .map(av -&gt; volunteerById(av.getVolunteerId(), volunteers)) //</a:t>
-            </a:r>
-            <a:endParaRPr sz="1400" b="0" i="0" u="none" strike="noStrike" cap="none" spc="0">
-              <a:solidFill>
-                <a:schemeClr val="tx1"/>
-              </a:solidFill>
-              <a:latin typeface="Liberation Mono"/>
-              <a:cs typeface="Liberation Mono"/>
-            </a:endParaRPr>
-          </a:p>
-          <a:p>
-            <a:pPr>
-              <a:defRPr/>
-            </a:pPr>
-            <a:r>
-              <a:rPr lang="it-IT" sz="1400" b="0" i="0" u="none" strike="noStrike" cap="none" spc="0">
-                <a:solidFill>
-                  <a:schemeClr val="tx1"/>
-                </a:solidFill>
-                <a:latin typeface="Liberation Mono"/>
-                <a:ea typeface="Liberation Mono"/>
-                <a:cs typeface="Liberation Mono"/>
-              </a:rPr>
-              <a:t>                    .forEach(availableVolunteers::add);</a:t>
-            </a:r>
-            <a:endParaRPr/>
-          </a:p>
-        </p:txBody>
-      </p:sp>
-      <p:sp>
-        <p:nvSpPr>
-          <p:cNvPr id="58203512" name="CasellaDiTesto 58203511"/>
-          <p:cNvSpPr txBox="1"/>
-          <p:nvPr/>
-        </p:nvSpPr>
-        <p:spPr bwMode="auto">
-          <a:xfrm>
-            <a:off x="457916" y="3827462"/>
-            <a:ext cx="11278686" cy="2966174"/>
-          </a:xfrm>
-          <a:prstGeom prst="roundRect">
-            <a:avLst>
-              <a:gd name="adj" fmla="val 5796"/>
-            </a:avLst>
-          </a:prstGeom>
-          <a:solidFill>
-            <a:schemeClr val="bg1">
-              <a:alpha val="49999"/>
-            </a:schemeClr>
-          </a:solidFill>
-          <a:ln w="12699">
-            <a:solidFill>
-              <a:schemeClr val="tx1"/>
-            </a:solidFill>
-            <a:prstDash val="solid"/>
-          </a:ln>
-        </p:spPr>
-        <p:txBody>
-          <a:bodyPr vertOverflow="overflow" horzOverflow="overflow" vert="horz" wrap="square" lIns="91440" tIns="45720" rIns="91440" bIns="45720" numCol="1" spcCol="0" rtlCol="0" fromWordArt="0" anchor="t" anchorCtr="0" forceAA="0" compatLnSpc="0">
-            <a:spAutoFit/>
-          </a:bodyPr>
-          <a:lstStyle/>
-          <a:p>
-            <a:pPr>
-              <a:defRPr/>
-            </a:pPr>
-            <a:r>
-              <a:rPr lang="en" sz="1400" b="0" i="0" u="none" strike="noStrike" cap="none" spc="0">
-                <a:solidFill>
-                  <a:schemeClr val="tx1"/>
-                </a:solidFill>
-                <a:latin typeface="Liberation Mono"/>
-                <a:ea typeface="Liberation Mono"/>
-                <a:cs typeface="Liberation Mono"/>
-              </a:rPr>
-              <a:t>for (Visit visit : nextMonthSortedVisits) {</a:t>
-            </a:r>
-            <a:endParaRPr sz="1400" b="0" i="0" u="none" strike="noStrike" cap="none" spc="0">
-              <a:solidFill>
-                <a:schemeClr val="tx1"/>
-              </a:solidFill>
-              <a:latin typeface="Liberation Mono"/>
-              <a:cs typeface="Liberation Mono"/>
-            </a:endParaRPr>
-          </a:p>
-          <a:p>
-            <a:pPr>
-              <a:defRPr/>
-            </a:pPr>
-            <a:r>
-              <a:rPr lang="en" sz="1400" b="0" i="0" u="none" strike="noStrike" cap="none" spc="0">
-                <a:solidFill>
-                  <a:schemeClr val="tx1"/>
-                </a:solidFill>
-                <a:latin typeface="Liberation Mono"/>
-                <a:ea typeface="Liberation Mono"/>
-                <a:cs typeface="Liberation Mono"/>
-              </a:rPr>
-              <a:t>    List&lt;Integer&gt; availableVolunteerIds = </a:t>
-            </a:r>
-            <a:endParaRPr sz="1400" b="0" i="0" u="none" strike="noStrike" cap="none" spc="0">
-              <a:solidFill>
-                <a:schemeClr val="tx1"/>
-              </a:solidFill>
-              <a:latin typeface="Liberation Mono"/>
-              <a:cs typeface="Liberation Mono"/>
-            </a:endParaRPr>
-          </a:p>
-          <a:p>
-            <a:pPr>
-              <a:defRPr/>
-            </a:pPr>
-            <a:r>
-              <a:rPr lang="en" sz="1400" b="0" i="0" u="none" strike="noStrike" cap="none" spc="0">
-                <a:solidFill>
-                  <a:schemeClr val="tx1"/>
-                </a:solidFill>
-                <a:latin typeface="Liberation Mono"/>
-                <a:ea typeface="Liberation Mono"/>
-                <a:cs typeface="Liberation Mono"/>
-              </a:rPr>
-              <a:t>	getAvailableVolunteersForVisitDate(visit, volunteerAvailabilitiesNextMonth);</a:t>
-            </a:r>
-            <a:endParaRPr sz="1400">
-              <a:latin typeface="Liberation Mono"/>
-              <a:cs typeface="Liberation Mono"/>
-            </a:endParaRPr>
-          </a:p>
-          <a:p>
-            <a:pPr>
-              <a:defRPr/>
-            </a:pPr>
-            <a:r>
-              <a:rPr lang="en" sz="1400" b="0" i="0" u="none" strike="noStrike" cap="none" spc="0">
-                <a:solidFill>
-                  <a:schemeClr val="tx1"/>
-                </a:solidFill>
-                <a:latin typeface="Liberation Mono"/>
-                <a:ea typeface="Liberation Mono"/>
-                <a:cs typeface="Liberation Mono"/>
-              </a:rPr>
-              <a:t>...</a:t>
-            </a:r>
-            <a:endParaRPr sz="1400">
-              <a:latin typeface="Liberation Mono"/>
-              <a:cs typeface="Liberation Mono"/>
-            </a:endParaRPr>
-          </a:p>
-          <a:p>
-            <a:pPr>
-              <a:defRPr/>
-            </a:pPr>
-            <a:endParaRPr sz="1400">
-              <a:latin typeface="Liberation Mono"/>
-              <a:cs typeface="Liberation Mono"/>
-            </a:endParaRPr>
-          </a:p>
-          <a:p>
-            <a:pPr>
-              <a:defRPr/>
-            </a:pPr>
-            <a:r>
-              <a:rPr lang="en" sz="1400" b="0" i="0" u="none" strike="noStrike" cap="none" spc="0">
-                <a:solidFill>
-                  <a:schemeClr val="tx1"/>
-                </a:solidFill>
-                <a:latin typeface="Liberation Mono"/>
-                <a:ea typeface="Liberation Mono"/>
-                <a:cs typeface="Liberation Mono"/>
-              </a:rPr>
-              <a:t>private List&lt;Integer&gt; getAvailableVolunteersForVisitDate(Visit visit, List&lt;VolunteerAvailableDate&gt; volunteerAvailabilitiesNextMonth) {</a:t>
-            </a:r>
-            <a:endParaRPr sz="1400" b="0" i="0" u="none" strike="noStrike" cap="none" spc="0">
-              <a:solidFill>
-                <a:schemeClr val="tx1"/>
-              </a:solidFill>
-              <a:latin typeface="Liberation Mono"/>
-              <a:cs typeface="Liberation Mono"/>
-            </a:endParaRPr>
-          </a:p>
-          <a:p>
-            <a:pPr>
-              <a:defRPr/>
-            </a:pPr>
-            <a:r>
-              <a:rPr lang="en" sz="1400" b="0" i="0" u="none" strike="noStrike" cap="none" spc="0">
-                <a:solidFill>
-                  <a:schemeClr val="tx1"/>
-                </a:solidFill>
-                <a:latin typeface="Liberation Mono"/>
-                <a:ea typeface="Liberation Mono"/>
-                <a:cs typeface="Liberation Mono"/>
-              </a:rPr>
-              <a:t>        return volunteerAvailabilitiesNextMonth.stream() //</a:t>
-            </a:r>
-            <a:endParaRPr sz="1400" b="0" i="0" u="none" strike="noStrike" cap="none" spc="0">
-              <a:solidFill>
-                <a:schemeClr val="tx1"/>
-              </a:solidFill>
-              <a:latin typeface="Liberation Mono"/>
-              <a:cs typeface="Liberation Mono"/>
-            </a:endParaRPr>
-          </a:p>
-          <a:p>
-            <a:pPr>
-              <a:defRPr/>
-            </a:pPr>
-            <a:r>
-              <a:rPr lang="en" sz="1400" b="0" i="0" u="none" strike="noStrike" cap="none" spc="0">
-                <a:solidFill>
-                  <a:schemeClr val="tx1"/>
-                </a:solidFill>
-                <a:latin typeface="Liberation Mono"/>
-                <a:ea typeface="Liberation Mono"/>
-                <a:cs typeface="Liberation Mono"/>
-              </a:rPr>
-              <a:t>                .filter(volunteerAvailableDate -&gt; volunteerAvailableDate.getAvailableDate().equals(visit.getDate())) //</a:t>
-            </a:r>
-            <a:endParaRPr sz="1400" b="0" i="0" u="none" strike="noStrike" cap="none" spc="0">
-              <a:solidFill>
-                <a:schemeClr val="tx1"/>
-              </a:solidFill>
-              <a:latin typeface="Liberation Mono"/>
-              <a:cs typeface="Liberation Mono"/>
-            </a:endParaRPr>
-          </a:p>
-          <a:p>
-            <a:pPr>
-              <a:defRPr/>
-            </a:pPr>
-            <a:r>
-              <a:rPr lang="en" sz="1400" b="0" i="0" u="none" strike="noStrike" cap="none" spc="0">
-                <a:solidFill>
-                  <a:schemeClr val="tx1"/>
-                </a:solidFill>
-                <a:latin typeface="Liberation Mono"/>
-                <a:ea typeface="Liberation Mono"/>
-                <a:cs typeface="Liberation Mono"/>
-              </a:rPr>
-              <a:t>                .map(VolunteerAvailableDate::getVolunteerId) //</a:t>
-            </a:r>
-            <a:endParaRPr sz="1400" b="0" i="0" u="none" strike="noStrike" cap="none" spc="0">
-              <a:solidFill>
-                <a:schemeClr val="tx1"/>
-              </a:solidFill>
-              <a:latin typeface="Liberation Mono"/>
-              <a:cs typeface="Liberation Mono"/>
-            </a:endParaRPr>
-          </a:p>
-          <a:p>
-            <a:pPr>
-              <a:defRPr/>
-            </a:pPr>
-            <a:r>
-              <a:rPr lang="en" sz="1400" b="0" i="0" u="none" strike="noStrike" cap="none" spc="0">
-                <a:solidFill>
-                  <a:schemeClr val="tx1"/>
-                </a:solidFill>
-                <a:latin typeface="Liberation Mono"/>
-                <a:ea typeface="Liberation Mono"/>
-                <a:cs typeface="Liberation Mono"/>
-              </a:rPr>
-              <a:t>                .collect(Collectors.toList());</a:t>
-            </a:r>
-            <a:endParaRPr sz="1400" b="0" i="0" u="none" strike="noStrike" cap="none" spc="0">
-              <a:solidFill>
-                <a:schemeClr val="tx1"/>
-              </a:solidFill>
-              <a:latin typeface="Liberation Mono"/>
-              <a:cs typeface="Liberation Mono"/>
-            </a:endParaRPr>
-          </a:p>
-          <a:p>
-            <a:pPr>
-              <a:defRPr/>
-            </a:pPr>
-            <a:r>
-              <a:rPr lang="en" sz="1400" b="0" i="0" u="none" strike="noStrike" cap="none" spc="0">
-                <a:solidFill>
-                  <a:schemeClr val="tx1"/>
-                </a:solidFill>
-                <a:latin typeface="Liberation Mono"/>
-                <a:ea typeface="Liberation Mono"/>
-                <a:cs typeface="Liberation Mono"/>
-              </a:rPr>
-              <a:t>    }</a:t>
-            </a:r>
-            <a:endParaRPr sz="1800"/>
-          </a:p>
-        </p:txBody>
-      </p:sp>
-      <p:sp>
-        <p:nvSpPr>
-          <p:cNvPr id="1698375116" name="CasellaDiTesto 1698375115"/>
-          <p:cNvSpPr txBox="1"/>
-          <p:nvPr/>
-        </p:nvSpPr>
-        <p:spPr bwMode="auto">
-          <a:xfrm>
-            <a:off x="9679349" y="1269043"/>
-            <a:ext cx="1995238" cy="640440"/>
-          </a:xfrm>
-          <a:prstGeom prst="rect">
-            <a:avLst/>
-          </a:prstGeom>
-          <a:noFill/>
-        </p:spPr>
-        <p:txBody>
-          <a:bodyPr vertOverflow="overflow" horzOverflow="overflow" vert="horz" wrap="square" lIns="91440" tIns="45720" rIns="91440" bIns="45720" numCol="1" spcCol="0" rtlCol="0" fromWordArt="0" anchor="ctr" anchorCtr="0" forceAA="0" compatLnSpc="0">
-            <a:spAutoFit/>
-          </a:bodyPr>
-          <a:lstStyle/>
-          <a:p>
-            <a:pPr algn="ctr">
-              <a:defRPr/>
-            </a:pPr>
-            <a:r>
-              <a:rPr lang="en" sz="3600" b="1">
-                <a:ln w="6349">
-                  <a:solidFill>
-                    <a:srgbClr val="000000"/>
-                  </a:solidFill>
-                  <a:prstDash val="solid"/>
-                </a:ln>
-                <a:solidFill>
-                  <a:schemeClr val="accent2">
-                    <a:lumMod val="75000"/>
-                  </a:schemeClr>
-                </a:solidFill>
-                <a:latin typeface="Cantarell Extra Bold"/>
-                <a:ea typeface="Cantarell Extra Bold"/>
-                <a:cs typeface="Cantarell Extra Bold"/>
-              </a:rPr>
-              <a:t>PRIMA</a:t>
-            </a:r>
-            <a:endParaRPr>
-              <a:ln w="6349">
-                <a:solidFill>
-                  <a:schemeClr val="tx1"/>
-                </a:solidFill>
-                <a:prstDash val="solid"/>
-              </a:ln>
-            </a:endParaRPr>
-          </a:p>
-        </p:txBody>
-      </p:sp>
-      <p:sp>
-        <p:nvSpPr>
-          <p:cNvPr id="1482612164" name="CasellaDiTesto 1482612163"/>
-          <p:cNvSpPr txBox="1"/>
-          <p:nvPr/>
-        </p:nvSpPr>
-        <p:spPr bwMode="auto">
-          <a:xfrm>
-            <a:off x="9679349" y="3920157"/>
-            <a:ext cx="1998837" cy="640440"/>
-          </a:xfrm>
-          <a:prstGeom prst="rect">
-            <a:avLst/>
-          </a:prstGeom>
-          <a:noFill/>
-        </p:spPr>
-        <p:txBody>
-          <a:bodyPr vertOverflow="overflow" horzOverflow="overflow" vert="horz" wrap="square" lIns="91440" tIns="45720" rIns="91440" bIns="45720" numCol="1" spcCol="0" rtlCol="0" fromWordArt="0" anchor="ctr" anchorCtr="0" forceAA="0" compatLnSpc="0">
-            <a:spAutoFit/>
-          </a:bodyPr>
-          <a:lstStyle/>
-          <a:p>
-            <a:pPr algn="ctr">
-              <a:defRPr/>
-            </a:pPr>
-            <a:r>
-              <a:rPr lang="en" sz="3600" b="1">
-                <a:ln w="6349">
-                  <a:solidFill>
-                    <a:srgbClr val="000000"/>
-                  </a:solidFill>
-                  <a:prstDash val="solid"/>
-                </a:ln>
-                <a:solidFill>
-                  <a:srgbClr val="92D050"/>
-                </a:solidFill>
-                <a:latin typeface="Cantarell Extra Bold"/>
-                <a:ea typeface="Cantarell Extra Bold"/>
-                <a:cs typeface="Cantarell Extra Bold"/>
-              </a:rPr>
-              <a:t>DOPO</a:t>
-            </a:r>
-            <a:endParaRPr>
-              <a:ln w="6349">
-                <a:solidFill>
-                  <a:schemeClr val="tx1"/>
-                </a:solidFill>
-                <a:prstDash val="solid"/>
-              </a:ln>
-            </a:endParaRPr>
-          </a:p>
-        </p:txBody>
-      </p:sp>
-    </p:spTree>
-  </p:cSld>
-  <p:clrMapOvr>
-    <a:masterClrMapping/>
-  </p:clrMapOvr>
-</p:sld>
-</file>
-
 <file path=ppt/slides/slide24.xml><?xml version="1.0" encoding="utf-8"?>
 <p:sld xmlns:a="http://schemas.openxmlformats.org/drawingml/2006/main" xmlns:r="http://schemas.openxmlformats.org/officeDocument/2006/relationships" xmlns:p="http://schemas.openxmlformats.org/presentationml/2006/main" showMasterPhAnim="0">
   <p:cSld>
@@ -11583,7 +11039,7 @@
       </p:grpSpPr>
       <p:sp>
         <p:nvSpPr>
-          <p:cNvPr id="2068409532" name="Titolo 1"/>
+          <p:cNvPr id="59495650" name="Titolo 1"/>
           <p:cNvSpPr>
             <a:spLocks noGrp="1"/>
           </p:cNvSpPr>
@@ -11593,8 +11049,8 @@
         </p:nvSpPr>
         <p:spPr bwMode="auto">
           <a:xfrm>
-            <a:off x="838198" y="37802"/>
-            <a:ext cx="10515600" cy="1325562"/>
+            <a:off x="838198" y="365123"/>
+            <a:ext cx="5555216" cy="1325561"/>
           </a:xfrm>
         </p:spPr>
         <p:txBody>
@@ -11615,26 +11071,86 @@
               </a:rPr>
               <a:t>Refactoring</a:t>
             </a:r>
-            <a:endParaRPr b="1">
-              <a:solidFill>
-                <a:srgbClr val="0070C0"/>
-              </a:solidFill>
-              <a:latin typeface="Noto Sans"/>
-              <a:cs typeface="Noto Sans"/>
-            </a:endParaRPr>
-          </a:p>
-        </p:txBody>
-      </p:sp>
-      <p:sp>
-        <p:nvSpPr>
-          <p:cNvPr id="17675352" name="CasellaDiTesto 17675351"/>
+            <a:endParaRPr/>
+          </a:p>
+        </p:txBody>
+      </p:sp>
+      <p:sp>
+        <p:nvSpPr>
+          <p:cNvPr id="104998061" name="Segnaposto contenuto 2"/>
+          <p:cNvSpPr>
+            <a:spLocks noGrp="1"/>
+          </p:cNvSpPr>
+          <p:nvPr>
+            <p:ph idx="1"/>
+          </p:nvPr>
+        </p:nvSpPr>
+        <p:spPr bwMode="auto"/>
+        <p:txBody>
+          <a:bodyPr/>
+          <a:lstStyle/>
+          <a:p>
+            <a:pPr marL="0" indent="0">
+              <a:buFont typeface="Arial"/>
+              <a:buNone/>
+              <a:defRPr/>
+            </a:pPr>
+            <a:r>
+              <a:rPr lang="en"/>
+              <a:t>Il refactoring della classe VisitPlanService si é reso necessario perché:</a:t>
+            </a:r>
+          </a:p>
+          <a:p>
+            <a:pPr>
+              <a:defRPr/>
+            </a:pPr>
+            <a:r>
+              <a:rPr lang="en"/>
+              <a:t>contiene l’algoritmo fondamentale per il funzionamento del programma</a:t>
+            </a:r>
+          </a:p>
+          <a:p>
+            <a:pPr>
+              <a:defRPr/>
+            </a:pPr>
+            <a:r>
+              <a:rPr lang="en"/>
+              <a:t>é probabile che possa subire modifiche/aggiunte in futuro</a:t>
+            </a:r>
+          </a:p>
+          <a:p>
+            <a:pPr>
+              <a:defRPr/>
+            </a:pPr>
+            <a:r>
+              <a:rPr lang="en"/>
+              <a:t>combina molte informazioni diverse: visite, tipi di visite, date non disponibili, volontari e relative disponibilitá</a:t>
+            </a:r>
+          </a:p>
+          <a:p>
+            <a:pPr marL="0" indent="0">
+              <a:buFont typeface="Arial"/>
+              <a:buNone/>
+              <a:defRPr/>
+            </a:pPr>
+            <a:r>
+              <a:rPr lang="en"/>
+              <a:t>Di seguito i pattern di refactoring applicati</a:t>
+            </a:r>
+            <a:endParaRPr/>
+          </a:p>
+        </p:txBody>
+      </p:sp>
+      <p:sp>
+        <p:nvSpPr>
+          <p:cNvPr id="27321058" name="CasellaDiTesto 27321057"/>
           <p:cNvSpPr txBox="1"/>
           <p:nvPr/>
         </p:nvSpPr>
         <p:spPr bwMode="auto">
           <a:xfrm>
-            <a:off x="4383448" y="471802"/>
-            <a:ext cx="7416345" cy="457559"/>
+            <a:off x="5753406" y="844844"/>
+            <a:ext cx="5851705" cy="518519"/>
           </a:xfrm>
           <a:prstGeom prst="rect">
             <a:avLst/>
@@ -11651,7 +11167,7 @@
               <a:defRPr/>
             </a:pPr>
             <a:r>
-              <a:rPr lang="en" sz="2400" b="1">
+              <a:rPr lang="en" sz="2800" b="1">
                 <a:solidFill>
                   <a:srgbClr val="0070C0"/>
                 </a:solidFill>
@@ -11659,526 +11175,12 @@
                 <a:ea typeface="DejaVu Sans Condensed"/>
                 <a:cs typeface="DejaVu Sans Condensed"/>
               </a:rPr>
-              <a:t>Extract Method - 2 + semplificazione logica</a:t>
-            </a:r>
-            <a:endParaRPr sz="1400" b="1">
+              <a:t>Caso di VisitPlanService</a:t>
+            </a:r>
+            <a:endParaRPr b="1">
               <a:solidFill>
                 <a:srgbClr val="0070C0"/>
               </a:solidFill>
-            </a:endParaRPr>
-          </a:p>
-        </p:txBody>
-      </p:sp>
-      <p:sp>
-        <p:nvSpPr>
-          <p:cNvPr id="1873129134" name="CasellaDiTesto 1873129133"/>
-          <p:cNvSpPr txBox="1"/>
-          <p:nvPr/>
-        </p:nvSpPr>
-        <p:spPr bwMode="auto">
-          <a:xfrm>
-            <a:off x="457913" y="1160460"/>
-            <a:ext cx="11635248" cy="4291325"/>
-          </a:xfrm>
-          <a:prstGeom prst="roundRect">
-            <a:avLst>
-              <a:gd name="adj" fmla="val 5796"/>
-            </a:avLst>
-          </a:prstGeom>
-          <a:solidFill>
-            <a:schemeClr val="bg1">
-              <a:alpha val="49999"/>
-            </a:schemeClr>
-          </a:solidFill>
-          <a:ln w="12699">
-            <a:solidFill>
-              <a:schemeClr val="tx1"/>
-            </a:solidFill>
-            <a:prstDash val="solid"/>
-          </a:ln>
-        </p:spPr>
-        <p:txBody>
-          <a:bodyPr vertOverflow="overflow" horzOverflow="overflow" vert="horz" wrap="square" lIns="91440" tIns="45720" rIns="91440" bIns="45720" numCol="1" spcCol="0" rtlCol="0" fromWordArt="0" anchor="t" anchorCtr="0" forceAA="0" compatLnSpc="0">
-            <a:spAutoFit/>
-          </a:bodyPr>
-          <a:lstStyle/>
-          <a:p>
-            <a:pPr>
-              <a:defRPr/>
-            </a:pPr>
-            <a:r>
-              <a:rPr lang="it-IT" sz="1400" b="0" i="0" u="none" strike="noStrike" cap="none" spc="0">
-                <a:solidFill>
-                  <a:schemeClr val="tx1"/>
-                </a:solidFill>
-                <a:latin typeface="Liberation Mono"/>
-                <a:ea typeface="Liberation Mono"/>
-                <a:cs typeface="Liberation Mono"/>
-              </a:rPr>
-              <a:t>if (availableVolunteers.isEmpty()) {</a:t>
-            </a:r>
-            <a:endParaRPr sz="1400" b="0" i="0" u="none" strike="noStrike" cap="none" spc="0">
-              <a:solidFill>
-                <a:schemeClr val="tx1"/>
-              </a:solidFill>
-              <a:latin typeface="Liberation Mono"/>
-              <a:cs typeface="Liberation Mono"/>
-            </a:endParaRPr>
-          </a:p>
-          <a:p>
-            <a:pPr>
-              <a:defRPr/>
-            </a:pPr>
-            <a:r>
-              <a:rPr lang="it-IT" sz="1400" b="0" i="0" u="none" strike="noStrike" cap="none" spc="0">
-                <a:solidFill>
-                  <a:schemeClr val="tx1"/>
-                </a:solidFill>
-                <a:latin typeface="Liberation Mono"/>
-                <a:ea typeface="Liberation Mono"/>
-                <a:cs typeface="Liberation Mono"/>
-              </a:rPr>
-              <a:t>                visit.setVisitStatus(VisitStatus.CANCELLED);</a:t>
-            </a:r>
-            <a:endParaRPr sz="1400" b="0" i="0" u="none" strike="noStrike" cap="none" spc="0">
-              <a:solidFill>
-                <a:schemeClr val="tx1"/>
-              </a:solidFill>
-              <a:latin typeface="Liberation Mono"/>
-              <a:cs typeface="Liberation Mono"/>
-            </a:endParaRPr>
-          </a:p>
-          <a:p>
-            <a:pPr>
-              <a:defRPr/>
-            </a:pPr>
-            <a:r>
-              <a:rPr lang="it-IT" sz="1400" b="0" i="0" u="none" strike="noStrike" cap="none" spc="0">
-                <a:solidFill>
-                  <a:schemeClr val="tx1"/>
-                </a:solidFill>
-                <a:latin typeface="Liberation Mono"/>
-                <a:ea typeface="Liberation Mono"/>
-                <a:cs typeface="Liberation Mono"/>
-              </a:rPr>
-              <a:t>                visitRepository.save(visit);</a:t>
-            </a:r>
-            <a:endParaRPr sz="1400" b="0" i="0" u="none" strike="noStrike" cap="none" spc="0">
-              <a:solidFill>
-                <a:schemeClr val="tx1"/>
-              </a:solidFill>
-              <a:latin typeface="Liberation Mono"/>
-              <a:cs typeface="Liberation Mono"/>
-            </a:endParaRPr>
-          </a:p>
-          <a:p>
-            <a:pPr>
-              <a:defRPr/>
-            </a:pPr>
-            <a:r>
-              <a:rPr lang="it-IT" sz="1400" b="0" i="0" u="none" strike="noStrike" cap="none" spc="0">
-                <a:solidFill>
-                  <a:schemeClr val="tx1"/>
-                </a:solidFill>
-                <a:latin typeface="Liberation Mono"/>
-                <a:ea typeface="Liberation Mono"/>
-                <a:cs typeface="Liberation Mono"/>
-              </a:rPr>
-              <a:t>                continue; // passa alla visita successiva</a:t>
-            </a:r>
-            <a:endParaRPr sz="1400" b="0" i="0" u="none" strike="noStrike" cap="none" spc="0">
-              <a:solidFill>
-                <a:schemeClr val="tx1"/>
-              </a:solidFill>
-              <a:latin typeface="Liberation Mono"/>
-              <a:cs typeface="Liberation Mono"/>
-            </a:endParaRPr>
-          </a:p>
-          <a:p>
-            <a:pPr>
-              <a:defRPr/>
-            </a:pPr>
-            <a:r>
-              <a:rPr lang="it-IT" sz="1400" b="0" i="0" u="none" strike="noStrike" cap="none" spc="0">
-                <a:solidFill>
-                  <a:schemeClr val="tx1"/>
-                </a:solidFill>
-                <a:latin typeface="Liberation Mono"/>
-                <a:ea typeface="Liberation Mono"/>
-                <a:cs typeface="Liberation Mono"/>
-              </a:rPr>
-              <a:t>            } else if (availableVolunteers.size() == 1) {</a:t>
-            </a:r>
-            <a:endParaRPr sz="1400" b="0" i="0" u="none" strike="noStrike" cap="none" spc="0">
-              <a:solidFill>
-                <a:schemeClr val="tx1"/>
-              </a:solidFill>
-              <a:latin typeface="Liberation Mono"/>
-              <a:cs typeface="Liberation Mono"/>
-            </a:endParaRPr>
-          </a:p>
-          <a:p>
-            <a:pPr>
-              <a:defRPr/>
-            </a:pPr>
-            <a:r>
-              <a:rPr lang="it-IT" sz="1400" b="0" i="0" u="none" strike="noStrike" cap="none" spc="0">
-                <a:solidFill>
-                  <a:schemeClr val="tx1"/>
-                </a:solidFill>
-                <a:latin typeface="Liberation Mono"/>
-                <a:ea typeface="Liberation Mono"/>
-                <a:cs typeface="Liberation Mono"/>
-              </a:rPr>
-              <a:t>                User volunteer = availableVolunteers.getFirst();</a:t>
-            </a:r>
-            <a:endParaRPr sz="1400" b="0" i="0" u="none" strike="noStrike" cap="none" spc="0">
-              <a:solidFill>
-                <a:schemeClr val="tx1"/>
-              </a:solidFill>
-              <a:latin typeface="Liberation Mono"/>
-              <a:cs typeface="Liberation Mono"/>
-            </a:endParaRPr>
-          </a:p>
-          <a:p>
-            <a:pPr>
-              <a:defRPr/>
-            </a:pPr>
-            <a:r>
-              <a:rPr lang="it-IT" sz="1400" b="0" i="0" u="none" strike="noStrike" cap="none" spc="0">
-                <a:solidFill>
-                  <a:schemeClr val="tx1"/>
-                </a:solidFill>
-                <a:latin typeface="Liberation Mono"/>
-                <a:ea typeface="Liberation Mono"/>
-                <a:cs typeface="Liberation Mono"/>
-              </a:rPr>
-              <a:t>                if (canDoVisitType(volunteer, visit.getVisitType().getId()))</a:t>
-            </a:r>
-            <a:endParaRPr sz="1400" b="0" i="0" u="none" strike="noStrike" cap="none" spc="0">
-              <a:solidFill>
-                <a:schemeClr val="tx1"/>
-              </a:solidFill>
-              <a:latin typeface="Liberation Mono"/>
-              <a:cs typeface="Liberation Mono"/>
-            </a:endParaRPr>
-          </a:p>
-          <a:p>
-            <a:pPr>
-              <a:defRPr/>
-            </a:pPr>
-            <a:r>
-              <a:rPr lang="it-IT" sz="1400" b="0" i="0" u="none" strike="noStrike" cap="none" spc="0">
-                <a:solidFill>
-                  <a:schemeClr val="tx1"/>
-                </a:solidFill>
-                <a:latin typeface="Liberation Mono"/>
-                <a:ea typeface="Liberation Mono"/>
-                <a:cs typeface="Liberation Mono"/>
-              </a:rPr>
-              <a:t>                    assignVolunteerToVisit(volunteer, visit, monthAvailabilities, volunteerVisitCounts);</a:t>
-            </a:r>
-            <a:endParaRPr sz="1400" b="0" i="0" u="none" strike="noStrike" cap="none" spc="0">
-              <a:solidFill>
-                <a:schemeClr val="tx1"/>
-              </a:solidFill>
-              <a:latin typeface="Liberation Mono"/>
-              <a:cs typeface="Liberation Mono"/>
-            </a:endParaRPr>
-          </a:p>
-          <a:p>
-            <a:pPr>
-              <a:defRPr/>
-            </a:pPr>
-            <a:r>
-              <a:rPr lang="it-IT" sz="1400" b="0" i="0" u="none" strike="noStrike" cap="none" spc="0">
-                <a:solidFill>
-                  <a:schemeClr val="tx1"/>
-                </a:solidFill>
-                <a:latin typeface="Liberation Mono"/>
-                <a:ea typeface="Liberation Mono"/>
-                <a:cs typeface="Liberation Mono"/>
-              </a:rPr>
-              <a:t>                else {</a:t>
-            </a:r>
-            <a:endParaRPr sz="1400" b="0" i="0" u="none" strike="noStrike" cap="none" spc="0">
-              <a:solidFill>
-                <a:schemeClr val="tx1"/>
-              </a:solidFill>
-              <a:latin typeface="Liberation Mono"/>
-              <a:cs typeface="Liberation Mono"/>
-            </a:endParaRPr>
-          </a:p>
-          <a:p>
-            <a:pPr>
-              <a:defRPr/>
-            </a:pPr>
-            <a:r>
-              <a:rPr lang="it-IT" sz="1400" b="0" i="0" u="none" strike="noStrike" cap="none" spc="0">
-                <a:solidFill>
-                  <a:schemeClr val="tx1"/>
-                </a:solidFill>
-                <a:latin typeface="Liberation Mono"/>
-                <a:ea typeface="Liberation Mono"/>
-                <a:cs typeface="Liberation Mono"/>
-              </a:rPr>
-              <a:t>                    visit.setVisitStatus(VisitStatus.CANCELLED);</a:t>
-            </a:r>
-            <a:endParaRPr sz="1400" b="0" i="0" u="none" strike="noStrike" cap="none" spc="0">
-              <a:solidFill>
-                <a:schemeClr val="tx1"/>
-              </a:solidFill>
-              <a:latin typeface="Liberation Mono"/>
-              <a:cs typeface="Liberation Mono"/>
-            </a:endParaRPr>
-          </a:p>
-          <a:p>
-            <a:pPr>
-              <a:defRPr/>
-            </a:pPr>
-            <a:r>
-              <a:rPr lang="it-IT" sz="1400" b="0" i="0" u="none" strike="noStrike" cap="none" spc="0">
-                <a:solidFill>
-                  <a:schemeClr val="tx1"/>
-                </a:solidFill>
-                <a:latin typeface="Liberation Mono"/>
-                <a:ea typeface="Liberation Mono"/>
-                <a:cs typeface="Liberation Mono"/>
-              </a:rPr>
-              <a:t>                    visitRepository.save(visit);</a:t>
-            </a:r>
-            <a:endParaRPr sz="1400" b="0" i="0" u="none" strike="noStrike" cap="none" spc="0">
-              <a:solidFill>
-                <a:schemeClr val="tx1"/>
-              </a:solidFill>
-              <a:latin typeface="Liberation Mono"/>
-              <a:cs typeface="Liberation Mono"/>
-            </a:endParaRPr>
-          </a:p>
-          <a:p>
-            <a:pPr>
-              <a:defRPr/>
-            </a:pPr>
-            <a:r>
-              <a:rPr lang="it-IT" sz="1400" b="0" i="0" u="none" strike="noStrike" cap="none" spc="0">
-                <a:solidFill>
-                  <a:schemeClr val="tx1"/>
-                </a:solidFill>
-                <a:latin typeface="Liberation Mono"/>
-                <a:ea typeface="Liberation Mono"/>
-                <a:cs typeface="Liberation Mono"/>
-              </a:rPr>
-              <a:t>                }</a:t>
-            </a:r>
-            <a:endParaRPr sz="1400" b="0" i="0" u="none" strike="noStrike" cap="none" spc="0">
-              <a:solidFill>
-                <a:schemeClr val="tx1"/>
-              </a:solidFill>
-              <a:latin typeface="Liberation Mono"/>
-              <a:cs typeface="Liberation Mono"/>
-            </a:endParaRPr>
-          </a:p>
-          <a:p>
-            <a:pPr>
-              <a:defRPr/>
-            </a:pPr>
-            <a:r>
-              <a:rPr lang="it-IT" sz="1400" b="0" i="0" u="none" strike="noStrike" cap="none" spc="0">
-                <a:solidFill>
-                  <a:schemeClr val="tx1"/>
-                </a:solidFill>
-                <a:latin typeface="Liberation Mono"/>
-                <a:ea typeface="Liberation Mono"/>
-                <a:cs typeface="Liberation Mono"/>
-              </a:rPr>
-              <a:t>                continue; // passa alla visita successiva</a:t>
-            </a:r>
-            <a:endParaRPr sz="1400" b="0" i="0" u="none" strike="noStrike" cap="none" spc="0">
-              <a:solidFill>
-                <a:schemeClr val="tx1"/>
-              </a:solidFill>
-              <a:latin typeface="Liberation Mono"/>
-              <a:cs typeface="Liberation Mono"/>
-            </a:endParaRPr>
-          </a:p>
-          <a:p>
-            <a:pPr>
-              <a:defRPr/>
-            </a:pPr>
-            <a:r>
-              <a:rPr lang="it-IT" sz="1400" b="0" i="0" u="none" strike="noStrike" cap="none" spc="0">
-                <a:solidFill>
-                  <a:schemeClr val="tx1"/>
-                </a:solidFill>
-                <a:latin typeface="Liberation Mono"/>
-                <a:ea typeface="Liberation Mono"/>
-                <a:cs typeface="Liberation Mono"/>
-              </a:rPr>
-              <a:t>            }</a:t>
-            </a:r>
-            <a:endParaRPr sz="1400" b="0" i="0" u="none" strike="noStrike" cap="none" spc="0">
-              <a:solidFill>
-                <a:schemeClr val="tx1"/>
-              </a:solidFill>
-              <a:latin typeface="Liberation Mono"/>
-              <a:cs typeface="Liberation Mono"/>
-            </a:endParaRPr>
-          </a:p>
-          <a:p>
-            <a:pPr>
-              <a:defRPr/>
-            </a:pPr>
-            <a:r>
-              <a:rPr lang="it-IT" sz="1400" b="0" i="0" u="none" strike="noStrike" cap="none" spc="0">
-                <a:solidFill>
-                  <a:schemeClr val="tx1"/>
-                </a:solidFill>
-                <a:latin typeface="Liberation Mono"/>
-                <a:ea typeface="Liberation Mono"/>
-                <a:cs typeface="Liberation Mono"/>
-              </a:rPr>
-              <a:t>            // piú di 2 volontari con disponibilitá nel giorno considerato</a:t>
-            </a:r>
-            <a:endParaRPr sz="1400" b="0" i="0" u="none" strike="noStrike" cap="none" spc="0">
-              <a:solidFill>
-                <a:schemeClr val="tx1"/>
-              </a:solidFill>
-              <a:latin typeface="Liberation Mono"/>
-              <a:cs typeface="Liberation Mono"/>
-            </a:endParaRPr>
-          </a:p>
-          <a:p>
-            <a:pPr>
-              <a:defRPr/>
-            </a:pPr>
-            <a:r>
-              <a:rPr lang="it-IT" sz="1400" b="0" i="0" u="none" strike="noStrike" cap="none" spc="0">
-                <a:solidFill>
-                  <a:schemeClr val="tx1"/>
-                </a:solidFill>
-                <a:latin typeface="Liberation Mono"/>
-                <a:ea typeface="Liberation Mono"/>
-                <a:cs typeface="Liberation Mono"/>
-              </a:rPr>
-              <a:t>            User bestVolunteer = selectBestVolunteer(availableVolunteers, volunteerVisitCounts);</a:t>
-            </a:r>
-            <a:endParaRPr sz="1400" b="0" i="0" u="none" strike="noStrike" cap="none" spc="0">
-              <a:solidFill>
-                <a:schemeClr val="tx1"/>
-              </a:solidFill>
-              <a:latin typeface="Liberation Mono"/>
-              <a:cs typeface="Liberation Mono"/>
-            </a:endParaRPr>
-          </a:p>
-          <a:p>
-            <a:pPr>
-              <a:defRPr/>
-            </a:pPr>
-            <a:r>
-              <a:rPr lang="it-IT" sz="1400" b="0" i="0" u="none" strike="noStrike" cap="none" spc="0">
-                <a:solidFill>
-                  <a:schemeClr val="tx1"/>
-                </a:solidFill>
-                <a:latin typeface="Liberation Mono"/>
-                <a:ea typeface="Liberation Mono"/>
-                <a:cs typeface="Liberation Mono"/>
-              </a:rPr>
-              <a:t>            assignVolunteerToVisit(bestVolunteer, visit, monthAvailabilities, volunteerVisitCounts);</a:t>
-            </a:r>
-            <a:endParaRPr sz="1400" b="0" i="0" u="none" strike="noStrike" cap="none" spc="0">
-              <a:solidFill>
-                <a:schemeClr val="tx1"/>
-              </a:solidFill>
-              <a:latin typeface="Liberation Mono"/>
-              <a:cs typeface="Liberation Mono"/>
-            </a:endParaRPr>
-          </a:p>
-          <a:p>
-            <a:pPr>
-              <a:defRPr/>
-            </a:pPr>
-            <a:r>
-              <a:rPr lang="it-IT" sz="1400" b="0" i="0" u="none" strike="noStrike" cap="none" spc="0">
-                <a:solidFill>
-                  <a:schemeClr val="tx1"/>
-                </a:solidFill>
-                <a:latin typeface="Liberation Mono"/>
-                <a:ea typeface="Liberation Mono"/>
-                <a:cs typeface="Liberation Mono"/>
-              </a:rPr>
-              <a:t>        }</a:t>
-            </a:r>
-          </a:p>
-          <a:p>
-            <a:pPr>
-              <a:defRPr/>
-            </a:pPr>
-            <a:r>
-              <a:rPr lang="en" sz="1400" b="0" i="0" u="none" strike="noStrike" cap="none" spc="0">
-                <a:solidFill>
-                  <a:schemeClr val="tx1"/>
-                </a:solidFill>
-                <a:latin typeface="Liberation Mono"/>
-                <a:ea typeface="Liberation Mono"/>
-                <a:cs typeface="Liberation Mono"/>
-              </a:rPr>
-              <a:t>...</a:t>
-            </a:r>
-            <a:endParaRPr/>
-          </a:p>
-        </p:txBody>
-      </p:sp>
-      <p:sp>
-        <p:nvSpPr>
-          <p:cNvPr id="1625665772" name="CasellaDiTesto 1625665771"/>
-          <p:cNvSpPr txBox="1"/>
-          <p:nvPr/>
-        </p:nvSpPr>
-        <p:spPr bwMode="auto">
-          <a:xfrm>
-            <a:off x="9679349" y="1269223"/>
-            <a:ext cx="1995597" cy="640440"/>
-          </a:xfrm>
-          <a:prstGeom prst="rect">
-            <a:avLst/>
-          </a:prstGeom>
-          <a:noFill/>
-        </p:spPr>
-        <p:txBody>
-          <a:bodyPr vertOverflow="overflow" horzOverflow="overflow" vert="horz" wrap="square" lIns="91440" tIns="45720" rIns="91440" bIns="45720" numCol="1" spcCol="0" rtlCol="0" fromWordArt="0" anchor="ctr" anchorCtr="0" forceAA="0" compatLnSpc="0">
-            <a:spAutoFit/>
-          </a:bodyPr>
-          <a:lstStyle/>
-          <a:p>
-            <a:pPr algn="ctr">
-              <a:defRPr/>
-            </a:pPr>
-            <a:r>
-              <a:rPr lang="en" sz="3600" b="1">
-                <a:ln w="6349">
-                  <a:solidFill>
-                    <a:srgbClr val="000000"/>
-                  </a:solidFill>
-                  <a:prstDash val="solid"/>
-                </a:ln>
-                <a:solidFill>
-                  <a:schemeClr val="accent2">
-                    <a:lumMod val="75000"/>
-                  </a:schemeClr>
-                </a:solidFill>
-                <a:latin typeface="Cantarell Extra Bold"/>
-                <a:ea typeface="Cantarell Extra Bold"/>
-                <a:cs typeface="Cantarell Extra Bold"/>
-              </a:rPr>
-              <a:t>PRIMA</a:t>
-            </a:r>
-            <a:endParaRPr>
-              <a:ln w="6349">
-                <a:solidFill>
-                  <a:schemeClr val="tx1"/>
-                </a:solidFill>
-                <a:prstDash val="solid"/>
-              </a:ln>
             </a:endParaRPr>
           </a:p>
         </p:txBody>
@@ -12210,7 +11212,7 @@
       </p:grpSpPr>
       <p:sp>
         <p:nvSpPr>
-          <p:cNvPr id="449234049" name="Titolo 1"/>
+          <p:cNvPr id="149416002" name="Titolo 1"/>
           <p:cNvSpPr>
             <a:spLocks noGrp="1"/>
           </p:cNvSpPr>
@@ -12220,8 +11222,8 @@
         </p:nvSpPr>
         <p:spPr bwMode="auto">
           <a:xfrm>
-            <a:off x="838198" y="37801"/>
-            <a:ext cx="10515600" cy="1325561"/>
+            <a:off x="839459" y="37802"/>
+            <a:ext cx="10515600" cy="1325562"/>
           </a:xfrm>
         </p:spPr>
         <p:txBody>
@@ -12242,20 +11244,70 @@
               </a:rPr>
               <a:t>Refactoring</a:t>
             </a:r>
-            <a:endParaRPr/>
-          </a:p>
-        </p:txBody>
-      </p:sp>
-      <p:sp>
-        <p:nvSpPr>
-          <p:cNvPr id="1225781845" name="CasellaDiTesto 1225781844"/>
+            <a:endParaRPr b="1">
+              <a:solidFill>
+                <a:srgbClr val="0070C0"/>
+              </a:solidFill>
+              <a:latin typeface="Noto Sans"/>
+              <a:cs typeface="Noto Sans"/>
+            </a:endParaRPr>
+          </a:p>
+        </p:txBody>
+      </p:sp>
+      <p:sp>
+        <p:nvSpPr>
+          <p:cNvPr id="1040471417" name="CasellaDiTesto 1040471416"/>
           <p:cNvSpPr txBox="1"/>
           <p:nvPr/>
         </p:nvSpPr>
         <p:spPr bwMode="auto">
           <a:xfrm>
-            <a:off x="457913" y="1160460"/>
-            <a:ext cx="11637768" cy="3407891"/>
+            <a:off x="4915206" y="441324"/>
+            <a:ext cx="5860344" cy="518519"/>
+          </a:xfrm>
+          <a:prstGeom prst="rect">
+            <a:avLst/>
+          </a:prstGeom>
+          <a:noFill/>
+        </p:spPr>
+        <p:txBody>
+          <a:bodyPr vertOverflow="overflow" horzOverflow="overflow" vert="horz" wrap="square" lIns="91440" tIns="45720" rIns="91440" bIns="45720" numCol="1" spcCol="0" rtlCol="0" fromWordArt="0" anchor="t" anchorCtr="0" forceAA="0" compatLnSpc="0">
+            <a:spAutoFit/>
+          </a:bodyPr>
+          <a:lstStyle/>
+          <a:p>
+            <a:pPr algn="ctr">
+              <a:defRPr/>
+            </a:pPr>
+            <a:r>
+              <a:rPr lang="en" sz="2800" b="1">
+                <a:solidFill>
+                  <a:srgbClr val="0070C0"/>
+                </a:solidFill>
+                <a:latin typeface="DejaVu Sans Condensed"/>
+                <a:ea typeface="DejaVu Sans Condensed"/>
+                <a:cs typeface="DejaVu Sans Condensed"/>
+              </a:rPr>
+              <a:t>Extract Method - 1</a:t>
+            </a:r>
+            <a:endParaRPr b="1">
+              <a:solidFill>
+                <a:srgbClr val="0070C0"/>
+              </a:solidFill>
+            </a:endParaRPr>
+          </a:p>
+        </p:txBody>
+      </p:sp>
+      <p:sp>
+        <p:nvSpPr>
+          <p:cNvPr id="1689386774" name="CasellaDiTesto 1689386773"/>
+          <p:cNvSpPr txBox="1"/>
+          <p:nvPr/>
+        </p:nvSpPr>
+        <p:spPr bwMode="auto">
+          <a:xfrm>
+            <a:off x="457916" y="1160462"/>
+            <a:ext cx="11276167" cy="2524456"/>
           </a:xfrm>
           <a:prstGeom prst="roundRect">
             <a:avLst>
@@ -12292,8 +11344,15 @@
                 <a:ea typeface="Liberation Mono"/>
                 <a:cs typeface="Liberation Mono"/>
               </a:rPr>
-              <a:t>for (Visit visit : nextMonthSortedVisits) {</a:t>
-            </a:r>
+              <a:t>for (Visit visit : monthVisits) {</a:t>
+            </a:r>
+            <a:endParaRPr sz="1400" b="0" i="0" u="none" strike="noStrike" cap="none" spc="0">
+              <a:solidFill>
+                <a:schemeClr val="tx1"/>
+              </a:solidFill>
+              <a:latin typeface="Liberation Mono"/>
+              <a:cs typeface="Liberation Mono"/>
+            </a:endParaRPr>
           </a:p>
           <a:p>
             <a:pPr>
@@ -12308,7 +11367,7 @@
                 <a:ea typeface="Liberation Mono"/>
                 <a:cs typeface="Liberation Mono"/>
               </a:rPr>
-              <a:t>            List&lt;Integer&gt; availableVolunteerIds = getAvailableVolunteersForVisitDate(visit, volunteerAvailabilitiesNextMonth);</a:t>
+              <a:t>            LocalDate day = visit.getDate();</a:t>
             </a:r>
             <a:endParaRPr sz="1400" b="0" i="0" u="none" strike="noStrike" cap="none" spc="0">
               <a:solidFill>
@@ -12322,6 +11381,17 @@
             <a:pPr>
               <a:defRPr/>
             </a:pPr>
+            <a:r>
+              <a:rPr lang="it-IT" sz="1400" b="0" i="0" u="none" strike="noStrike" cap="none" spc="0">
+                <a:solidFill>
+                  <a:schemeClr val="tx1"/>
+                </a:solidFill>
+                <a:latin typeface="Liberation Mono"/>
+                <a:ea typeface="Liberation Mono"/>
+                <a:cs typeface="Liberation Mono"/>
+              </a:rPr>
+              <a:t>            List&lt;User&gt; availableVolunteers = new ArrayList&lt;&gt;();</a:t>
+            </a:r>
             <a:endParaRPr sz="1400" b="0" i="0" u="none" strike="noStrike" cap="none" spc="0">
               <a:solidFill>
                 <a:schemeClr val="tx1"/>
@@ -12334,6 +11404,18 @@
             <a:pPr>
               <a:defRPr/>
             </a:pPr>
+            <a:endParaRPr sz="1400" b="0" i="0" u="none" strike="noStrike" cap="none" spc="0">
+              <a:solidFill>
+                <a:schemeClr val="tx1"/>
+              </a:solidFill>
+              <a:latin typeface="Liberation Mono"/>
+              <a:cs typeface="Liberation Mono"/>
+            </a:endParaRPr>
+          </a:p>
+          <a:p>
+            <a:pPr>
+              <a:defRPr/>
+            </a:pPr>
             <a:r>
               <a:rPr lang="it-IT" sz="1400" b="0" i="0" u="none" strike="noStrike" cap="none" spc="0">
                 <a:solidFill>
@@ -12343,7 +11425,7 @@
                 <a:ea typeface="Liberation Mono"/>
                 <a:cs typeface="Liberation Mono"/>
               </a:rPr>
-              <a:t>            if (availableVolunteerIds.isEmpty()) {</a:t>
+              <a:t>            // aggiunge alla lista availableVolunteers tutti i volontari che hanno dato</a:t>
             </a:r>
             <a:endParaRPr sz="1400" b="0" i="0" u="none" strike="noStrike" cap="none" spc="0">
               <a:solidFill>
@@ -12366,7 +11448,7 @@
                 <a:ea typeface="Liberation Mono"/>
                 <a:cs typeface="Liberation Mono"/>
               </a:rPr>
-              <a:t>                setVisitStatusToCancelled(visit);</a:t>
+              <a:t>            // disponibilitá per il</a:t>
             </a:r>
             <a:endParaRPr sz="1400" b="0" i="0" u="none" strike="noStrike" cap="none" spc="0">
               <a:solidFill>
@@ -12389,7 +11471,7 @@
                 <a:ea typeface="Liberation Mono"/>
                 <a:cs typeface="Liberation Mono"/>
               </a:rPr>
-              <a:t>            } else if (availableVolunteerIds.size() == 1) {</a:t>
+              <a:t>            // giorno 'day'</a:t>
             </a:r>
             <a:endParaRPr sz="1400" b="0" i="0" u="none" strike="noStrike" cap="none" spc="0">
               <a:solidFill>
@@ -12412,7 +11494,7 @@
                 <a:ea typeface="Liberation Mono"/>
                 <a:cs typeface="Liberation Mono"/>
               </a:rPr>
-              <a:t>                assignAvailableVolunteerToVisitIfPossible(visit, availableVolunteerIds, volunteerAvailabilitiesNextMonth, volunteerIdWithVisitCounts);</a:t>
+              <a:t>            monthAvailabilities.stream().filter(av -&gt; av.getAvailableDate().equals(day)) //</a:t>
             </a:r>
             <a:endParaRPr sz="1400" b="0" i="0" u="none" strike="noStrike" cap="none" spc="0">
               <a:solidFill>
@@ -12435,7 +11517,7 @@
                 <a:ea typeface="Liberation Mono"/>
                 <a:cs typeface="Liberation Mono"/>
               </a:rPr>
-              <a:t>            } else {</a:t>
+              <a:t>                    // mappa le disponibilitá VolunteerAvailableDate con gli oggetti USER volontari</a:t>
             </a:r>
             <a:endParaRPr sz="1400" b="0" i="0" u="none" strike="noStrike" cap="none" spc="0">
               <a:solidFill>
@@ -12458,7 +11540,7 @@
                 <a:ea typeface="Liberation Mono"/>
                 <a:cs typeface="Liberation Mono"/>
               </a:rPr>
-              <a:t>                assignBestVolunteerAvailableToVisit(visit, availableVolunteerIds, volunteerIdWithVisitCounts, volunteerAvailabilitiesNextMonth);</a:t>
+              <a:t>                    .map(av -&gt; volunteerById(av.getVolunteerId(), volunteers)) //</a:t>
             </a:r>
             <a:endParaRPr sz="1400" b="0" i="0" u="none" strike="noStrike" cap="none" spc="0">
               <a:solidFill>
@@ -12481,74 +11563,284 @@
                 <a:ea typeface="Liberation Mono"/>
                 <a:cs typeface="Liberation Mono"/>
               </a:rPr>
-              <a:t>            }</a:t>
-            </a:r>
-            <a:endParaRPr sz="1400" b="0" i="0" u="none" strike="noStrike" cap="none" spc="0">
-              <a:solidFill>
-                <a:schemeClr val="tx1"/>
-              </a:solidFill>
-              <a:latin typeface="Liberation Mono"/>
-              <a:cs typeface="Liberation Mono"/>
-            </a:endParaRPr>
-          </a:p>
-          <a:p>
-            <a:pPr>
-              <a:defRPr/>
-            </a:pPr>
-            <a:r>
-              <a:rPr lang="it-IT" sz="1400" b="0" i="0" u="none" strike="noStrike" cap="none" spc="0">
-                <a:solidFill>
-                  <a:schemeClr val="tx1"/>
-                </a:solidFill>
-                <a:latin typeface="Liberation Mono"/>
-                <a:ea typeface="Liberation Mono"/>
-                <a:cs typeface="Liberation Mono"/>
-              </a:rPr>
-              <a:t>        }</a:t>
-            </a:r>
-            <a:endParaRPr sz="1400" b="0" i="0" u="none" strike="noStrike" cap="none" spc="0">
-              <a:solidFill>
-                <a:schemeClr val="tx1"/>
-              </a:solidFill>
-              <a:latin typeface="Liberation Mono"/>
-              <a:cs typeface="Liberation Mono"/>
-            </a:endParaRPr>
-          </a:p>
-          <a:p>
-            <a:pPr>
-              <a:defRPr/>
-            </a:pPr>
-            <a:r>
-              <a:rPr lang="en" sz="1400" b="0" i="0" u="none" strike="noStrike" cap="none" spc="0">
-                <a:solidFill>
-                  <a:schemeClr val="tx1"/>
-                </a:solidFill>
-                <a:latin typeface="Liberation Mono"/>
-                <a:ea typeface="Liberation Mono"/>
-                <a:cs typeface="Liberation Mono"/>
-              </a:rPr>
-              <a:t>...</a:t>
-            </a:r>
-            <a:endParaRPr sz="1400" b="0" i="0" u="none" strike="noStrike" cap="none" spc="0">
-              <a:solidFill>
-                <a:schemeClr val="tx1"/>
-              </a:solidFill>
-              <a:latin typeface="Liberation Mono"/>
-              <a:cs typeface="Liberation Mono"/>
-            </a:endParaRPr>
-          </a:p>
-        </p:txBody>
-      </p:sp>
-      <p:sp>
-        <p:nvSpPr>
-          <p:cNvPr id="1711987548" name="CasellaDiTesto 1711987547"/>
+              <a:t>                    .forEach(availableVolunteers::add);</a:t>
+            </a:r>
+            <a:endParaRPr/>
+          </a:p>
+        </p:txBody>
+      </p:sp>
+      <p:sp>
+        <p:nvSpPr>
+          <p:cNvPr id="58203512" name="CasellaDiTesto 58203511"/>
           <p:cNvSpPr txBox="1"/>
           <p:nvPr/>
         </p:nvSpPr>
         <p:spPr bwMode="auto">
           <a:xfrm>
-            <a:off x="4383448" y="471802"/>
-            <a:ext cx="7416703" cy="457559"/>
+            <a:off x="457916" y="3827462"/>
+            <a:ext cx="11278686" cy="2966174"/>
+          </a:xfrm>
+          <a:prstGeom prst="roundRect">
+            <a:avLst>
+              <a:gd name="adj" fmla="val 5796"/>
+            </a:avLst>
+          </a:prstGeom>
+          <a:solidFill>
+            <a:schemeClr val="bg1">
+              <a:alpha val="49999"/>
+            </a:schemeClr>
+          </a:solidFill>
+          <a:ln w="12699">
+            <a:solidFill>
+              <a:schemeClr val="tx1"/>
+            </a:solidFill>
+            <a:prstDash val="solid"/>
+          </a:ln>
+        </p:spPr>
+        <p:txBody>
+          <a:bodyPr vertOverflow="overflow" horzOverflow="overflow" vert="horz" wrap="square" lIns="91440" tIns="45720" rIns="91440" bIns="45720" numCol="1" spcCol="0" rtlCol="0" fromWordArt="0" anchor="t" anchorCtr="0" forceAA="0" compatLnSpc="0">
+            <a:spAutoFit/>
+          </a:bodyPr>
+          <a:lstStyle/>
+          <a:p>
+            <a:pPr>
+              <a:defRPr/>
+            </a:pPr>
+            <a:r>
+              <a:rPr lang="en" sz="1400" b="0" i="0" u="none" strike="noStrike" cap="none" spc="0">
+                <a:solidFill>
+                  <a:schemeClr val="tx1"/>
+                </a:solidFill>
+                <a:latin typeface="Liberation Mono"/>
+                <a:ea typeface="Liberation Mono"/>
+                <a:cs typeface="Liberation Mono"/>
+              </a:rPr>
+              <a:t>for (Visit visit : nextMonthSortedVisits) {</a:t>
+            </a:r>
+            <a:endParaRPr sz="1400" b="0" i="0" u="none" strike="noStrike" cap="none" spc="0">
+              <a:solidFill>
+                <a:schemeClr val="tx1"/>
+              </a:solidFill>
+              <a:latin typeface="Liberation Mono"/>
+              <a:cs typeface="Liberation Mono"/>
+            </a:endParaRPr>
+          </a:p>
+          <a:p>
+            <a:pPr>
+              <a:defRPr/>
+            </a:pPr>
+            <a:r>
+              <a:rPr lang="en" sz="1400" b="0" i="0" u="none" strike="noStrike" cap="none" spc="0">
+                <a:solidFill>
+                  <a:schemeClr val="tx1"/>
+                </a:solidFill>
+                <a:latin typeface="Liberation Mono"/>
+                <a:ea typeface="Liberation Mono"/>
+                <a:cs typeface="Liberation Mono"/>
+              </a:rPr>
+              <a:t>    List&lt;Integer&gt; availableVolunteerIds = </a:t>
+            </a:r>
+            <a:endParaRPr sz="1400" b="0" i="0" u="none" strike="noStrike" cap="none" spc="0">
+              <a:solidFill>
+                <a:schemeClr val="tx1"/>
+              </a:solidFill>
+              <a:latin typeface="Liberation Mono"/>
+              <a:cs typeface="Liberation Mono"/>
+            </a:endParaRPr>
+          </a:p>
+          <a:p>
+            <a:pPr>
+              <a:defRPr/>
+            </a:pPr>
+            <a:r>
+              <a:rPr lang="en" sz="1400" b="0" i="0" u="none" strike="noStrike" cap="none" spc="0">
+                <a:solidFill>
+                  <a:schemeClr val="tx1"/>
+                </a:solidFill>
+                <a:latin typeface="Liberation Mono"/>
+                <a:ea typeface="Liberation Mono"/>
+                <a:cs typeface="Liberation Mono"/>
+              </a:rPr>
+              <a:t>	getAvailableVolunteersForVisitDate(visit, volunteerAvailabilitiesNextMonth);</a:t>
+            </a:r>
+            <a:endParaRPr sz="1400">
+              <a:latin typeface="Liberation Mono"/>
+              <a:cs typeface="Liberation Mono"/>
+            </a:endParaRPr>
+          </a:p>
+          <a:p>
+            <a:pPr>
+              <a:defRPr/>
+            </a:pPr>
+            <a:r>
+              <a:rPr lang="en" sz="1400" b="0" i="0" u="none" strike="noStrike" cap="none" spc="0">
+                <a:solidFill>
+                  <a:schemeClr val="tx1"/>
+                </a:solidFill>
+                <a:latin typeface="Liberation Mono"/>
+                <a:ea typeface="Liberation Mono"/>
+                <a:cs typeface="Liberation Mono"/>
+              </a:rPr>
+              <a:t>...</a:t>
+            </a:r>
+            <a:endParaRPr sz="1400">
+              <a:latin typeface="Liberation Mono"/>
+              <a:cs typeface="Liberation Mono"/>
+            </a:endParaRPr>
+          </a:p>
+          <a:p>
+            <a:pPr>
+              <a:defRPr/>
+            </a:pPr>
+            <a:endParaRPr sz="1400">
+              <a:latin typeface="Liberation Mono"/>
+              <a:cs typeface="Liberation Mono"/>
+            </a:endParaRPr>
+          </a:p>
+          <a:p>
+            <a:pPr>
+              <a:defRPr/>
+            </a:pPr>
+            <a:r>
+              <a:rPr lang="en" sz="1400" b="0" i="0" u="none" strike="noStrike" cap="none" spc="0">
+                <a:solidFill>
+                  <a:schemeClr val="tx1"/>
+                </a:solidFill>
+                <a:latin typeface="Liberation Mono"/>
+                <a:ea typeface="Liberation Mono"/>
+                <a:cs typeface="Liberation Mono"/>
+              </a:rPr>
+              <a:t>private List&lt;Integer&gt; getAvailableVolunteersForVisitDate(Visit visit, List&lt;VolunteerAvailableDate&gt; volunteerAvailabilitiesNextMonth) {</a:t>
+            </a:r>
+            <a:endParaRPr sz="1400" b="0" i="0" u="none" strike="noStrike" cap="none" spc="0">
+              <a:solidFill>
+                <a:schemeClr val="tx1"/>
+              </a:solidFill>
+              <a:latin typeface="Liberation Mono"/>
+              <a:cs typeface="Liberation Mono"/>
+            </a:endParaRPr>
+          </a:p>
+          <a:p>
+            <a:pPr>
+              <a:defRPr/>
+            </a:pPr>
+            <a:r>
+              <a:rPr lang="en" sz="1400" b="0" i="0" u="none" strike="noStrike" cap="none" spc="0">
+                <a:solidFill>
+                  <a:schemeClr val="tx1"/>
+                </a:solidFill>
+                <a:latin typeface="Liberation Mono"/>
+                <a:ea typeface="Liberation Mono"/>
+                <a:cs typeface="Liberation Mono"/>
+              </a:rPr>
+              <a:t>        return volunteerAvailabilitiesNextMonth.stream() //</a:t>
+            </a:r>
+            <a:endParaRPr sz="1400" b="0" i="0" u="none" strike="noStrike" cap="none" spc="0">
+              <a:solidFill>
+                <a:schemeClr val="tx1"/>
+              </a:solidFill>
+              <a:latin typeface="Liberation Mono"/>
+              <a:cs typeface="Liberation Mono"/>
+            </a:endParaRPr>
+          </a:p>
+          <a:p>
+            <a:pPr>
+              <a:defRPr/>
+            </a:pPr>
+            <a:r>
+              <a:rPr lang="en" sz="1400" b="0" i="0" u="none" strike="noStrike" cap="none" spc="0">
+                <a:solidFill>
+                  <a:schemeClr val="tx1"/>
+                </a:solidFill>
+                <a:latin typeface="Liberation Mono"/>
+                <a:ea typeface="Liberation Mono"/>
+                <a:cs typeface="Liberation Mono"/>
+              </a:rPr>
+              <a:t>                .filter(volunteerAvailableDate -&gt; volunteerAvailableDate.getAvailableDate().equals(visit.getDate())) //</a:t>
+            </a:r>
+            <a:endParaRPr sz="1400" b="0" i="0" u="none" strike="noStrike" cap="none" spc="0">
+              <a:solidFill>
+                <a:schemeClr val="tx1"/>
+              </a:solidFill>
+              <a:latin typeface="Liberation Mono"/>
+              <a:cs typeface="Liberation Mono"/>
+            </a:endParaRPr>
+          </a:p>
+          <a:p>
+            <a:pPr>
+              <a:defRPr/>
+            </a:pPr>
+            <a:r>
+              <a:rPr lang="en" sz="1400" b="0" i="0" u="none" strike="noStrike" cap="none" spc="0">
+                <a:solidFill>
+                  <a:schemeClr val="tx1"/>
+                </a:solidFill>
+                <a:latin typeface="Liberation Mono"/>
+                <a:ea typeface="Liberation Mono"/>
+                <a:cs typeface="Liberation Mono"/>
+              </a:rPr>
+              <a:t>                .map(VolunteerAvailableDate::getVolunteerId) //</a:t>
+            </a:r>
+            <a:endParaRPr sz="1400" b="0" i="0" u="none" strike="noStrike" cap="none" spc="0">
+              <a:solidFill>
+                <a:schemeClr val="tx1"/>
+              </a:solidFill>
+              <a:latin typeface="Liberation Mono"/>
+              <a:cs typeface="Liberation Mono"/>
+            </a:endParaRPr>
+          </a:p>
+          <a:p>
+            <a:pPr>
+              <a:defRPr/>
+            </a:pPr>
+            <a:r>
+              <a:rPr lang="en" sz="1400" b="0" i="0" u="none" strike="noStrike" cap="none" spc="0">
+                <a:solidFill>
+                  <a:schemeClr val="tx1"/>
+                </a:solidFill>
+                <a:latin typeface="Liberation Mono"/>
+                <a:ea typeface="Liberation Mono"/>
+                <a:cs typeface="Liberation Mono"/>
+              </a:rPr>
+              <a:t>                .collect(Collectors.toList());</a:t>
+            </a:r>
+            <a:endParaRPr sz="1400" b="0" i="0" u="none" strike="noStrike" cap="none" spc="0">
+              <a:solidFill>
+                <a:schemeClr val="tx1"/>
+              </a:solidFill>
+              <a:latin typeface="Liberation Mono"/>
+              <a:cs typeface="Liberation Mono"/>
+            </a:endParaRPr>
+          </a:p>
+          <a:p>
+            <a:pPr>
+              <a:defRPr/>
+            </a:pPr>
+            <a:r>
+              <a:rPr lang="en" sz="1400" b="0" i="0" u="none" strike="noStrike" cap="none" spc="0">
+                <a:solidFill>
+                  <a:schemeClr val="tx1"/>
+                </a:solidFill>
+                <a:latin typeface="Liberation Mono"/>
+                <a:ea typeface="Liberation Mono"/>
+                <a:cs typeface="Liberation Mono"/>
+              </a:rPr>
+              <a:t>    }</a:t>
+            </a:r>
+            <a:endParaRPr sz="1800"/>
+          </a:p>
+        </p:txBody>
+      </p:sp>
+      <p:sp>
+        <p:nvSpPr>
+          <p:cNvPr id="1698375116" name="CasellaDiTesto 1698375115"/>
+          <p:cNvSpPr txBox="1"/>
+          <p:nvPr/>
+        </p:nvSpPr>
+        <p:spPr bwMode="auto">
+          <a:xfrm>
+            <a:off x="9679349" y="1269043"/>
+            <a:ext cx="1995238" cy="640440"/>
           </a:xfrm>
           <a:prstGeom prst="rect">
             <a:avLst/>
@@ -12556,7 +11848,7 @@
           <a:noFill/>
         </p:spPr>
         <p:txBody>
-          <a:bodyPr vertOverflow="overflow" horzOverflow="overflow" vert="horz" wrap="square" lIns="91440" tIns="45720" rIns="91440" bIns="45720" numCol="1" spcCol="0" rtlCol="0" fromWordArt="0" anchor="t" anchorCtr="0" forceAA="0" compatLnSpc="0">
+          <a:bodyPr vertOverflow="overflow" horzOverflow="overflow" vert="horz" wrap="square" lIns="91440" tIns="45720" rIns="91440" bIns="45720" numCol="1" spcCol="0" rtlCol="0" fromWordArt="0" anchor="ctr" anchorCtr="0" forceAA="0" compatLnSpc="0">
             <a:spAutoFit/>
           </a:bodyPr>
           <a:lstStyle/>
@@ -12565,34 +11857,45 @@
               <a:defRPr/>
             </a:pPr>
             <a:r>
-              <a:rPr lang="en" sz="2400" b="1">
-                <a:solidFill>
-                  <a:srgbClr val="0070C0"/>
-                </a:solidFill>
-                <a:latin typeface="DejaVu Sans Condensed"/>
-                <a:ea typeface="DejaVu Sans Condensed"/>
-                <a:cs typeface="DejaVu Sans Condensed"/>
-              </a:rPr>
-              <a:t>Extract Method - 2 + semplificazione logica</a:t>
-            </a:r>
-            <a:endParaRPr sz="1400" b="1">
-              <a:solidFill>
-                <a:srgbClr val="0070C0"/>
-              </a:solidFill>
-            </a:endParaRPr>
-          </a:p>
-        </p:txBody>
-      </p:sp>
-      <p:sp>
-        <p:nvSpPr>
-          <p:cNvPr id="23320965" name="CasellaDiTesto 23320964"/>
+              <a:rPr lang="en" sz="3600" b="1">
+                <a:ln w="6349">
+                  <a:solidFill>
+                    <a:srgbClr val="000000"/>
+                  </a:solidFill>
+                  <a:prstDash val="solid"/>
+                </a:ln>
+                <a:solidFill>
+                  <a:schemeClr val="accent2">
+                    <a:lumMod val="75000"/>
+                  </a:schemeClr>
+                </a:solidFill>
+                <a:latin typeface="Cantarell Extra Bold"/>
+                <a:ea typeface="Cantarell Extra Bold"/>
+                <a:cs typeface="Cantarell Extra Bold"/>
+              </a:rPr>
+              <a:t>PRIMA</a:t>
+            </a:r>
+            <a:endParaRPr>
+              <a:ln w="6349">
+                <a:solidFill>
+                  <a:schemeClr val="tx1"/>
+                </a:solidFill>
+                <a:prstDash val="solid"/>
+              </a:ln>
+            </a:endParaRPr>
+          </a:p>
+        </p:txBody>
+      </p:sp>
+      <p:sp>
+        <p:nvSpPr>
+          <p:cNvPr id="1482612164" name="CasellaDiTesto 1482612163"/>
           <p:cNvSpPr txBox="1"/>
           <p:nvPr/>
         </p:nvSpPr>
         <p:spPr bwMode="auto">
           <a:xfrm>
-            <a:off x="10039335" y="1839611"/>
-            <a:ext cx="1999196" cy="640440"/>
+            <a:off x="9679349" y="3920157"/>
+            <a:ext cx="1998837" cy="640440"/>
           </a:xfrm>
           <a:prstGeom prst="rect">
             <a:avLst/>
@@ -12663,6 +11966,1086 @@
       </p:grpSpPr>
       <p:sp>
         <p:nvSpPr>
+          <p:cNvPr id="2068409532" name="Titolo 1"/>
+          <p:cNvSpPr>
+            <a:spLocks noGrp="1"/>
+          </p:cNvSpPr>
+          <p:nvPr>
+            <p:ph type="title"/>
+          </p:nvPr>
+        </p:nvSpPr>
+        <p:spPr bwMode="auto">
+          <a:xfrm>
+            <a:off x="838198" y="37802"/>
+            <a:ext cx="10515600" cy="1325562"/>
+          </a:xfrm>
+        </p:spPr>
+        <p:txBody>
+          <a:bodyPr/>
+          <a:lstStyle/>
+          <a:p>
+            <a:pPr>
+              <a:defRPr/>
+            </a:pPr>
+            <a:r>
+              <a:rPr lang="en" b="1">
+                <a:solidFill>
+                  <a:srgbClr val="0070C0"/>
+                </a:solidFill>
+                <a:latin typeface="Noto Sans"/>
+                <a:ea typeface="Noto Sans"/>
+                <a:cs typeface="Noto Sans"/>
+              </a:rPr>
+              <a:t>Refactoring</a:t>
+            </a:r>
+            <a:endParaRPr b="1">
+              <a:solidFill>
+                <a:srgbClr val="0070C0"/>
+              </a:solidFill>
+              <a:latin typeface="Noto Sans"/>
+              <a:cs typeface="Noto Sans"/>
+            </a:endParaRPr>
+          </a:p>
+        </p:txBody>
+      </p:sp>
+      <p:sp>
+        <p:nvSpPr>
+          <p:cNvPr id="17675352" name="CasellaDiTesto 17675351"/>
+          <p:cNvSpPr txBox="1"/>
+          <p:nvPr/>
+        </p:nvSpPr>
+        <p:spPr bwMode="auto">
+          <a:xfrm>
+            <a:off x="4383448" y="471802"/>
+            <a:ext cx="7416345" cy="457559"/>
+          </a:xfrm>
+          <a:prstGeom prst="rect">
+            <a:avLst/>
+          </a:prstGeom>
+          <a:noFill/>
+        </p:spPr>
+        <p:txBody>
+          <a:bodyPr vertOverflow="overflow" horzOverflow="overflow" vert="horz" wrap="square" lIns="91440" tIns="45720" rIns="91440" bIns="45720" numCol="1" spcCol="0" rtlCol="0" fromWordArt="0" anchor="t" anchorCtr="0" forceAA="0" compatLnSpc="0">
+            <a:spAutoFit/>
+          </a:bodyPr>
+          <a:lstStyle/>
+          <a:p>
+            <a:pPr algn="ctr">
+              <a:defRPr/>
+            </a:pPr>
+            <a:r>
+              <a:rPr lang="en" sz="2400" b="1">
+                <a:solidFill>
+                  <a:srgbClr val="0070C0"/>
+                </a:solidFill>
+                <a:latin typeface="DejaVu Sans Condensed"/>
+                <a:ea typeface="DejaVu Sans Condensed"/>
+                <a:cs typeface="DejaVu Sans Condensed"/>
+              </a:rPr>
+              <a:t>Extract Method - 2 + semplificazione logica</a:t>
+            </a:r>
+            <a:endParaRPr sz="1400" b="1">
+              <a:solidFill>
+                <a:srgbClr val="0070C0"/>
+              </a:solidFill>
+            </a:endParaRPr>
+          </a:p>
+        </p:txBody>
+      </p:sp>
+      <p:sp>
+        <p:nvSpPr>
+          <p:cNvPr id="1873129134" name="CasellaDiTesto 1873129133"/>
+          <p:cNvSpPr txBox="1"/>
+          <p:nvPr/>
+        </p:nvSpPr>
+        <p:spPr bwMode="auto">
+          <a:xfrm>
+            <a:off x="457913" y="1160460"/>
+            <a:ext cx="11635248" cy="4291325"/>
+          </a:xfrm>
+          <a:prstGeom prst="roundRect">
+            <a:avLst>
+              <a:gd name="adj" fmla="val 5796"/>
+            </a:avLst>
+          </a:prstGeom>
+          <a:solidFill>
+            <a:schemeClr val="bg1">
+              <a:alpha val="49999"/>
+            </a:schemeClr>
+          </a:solidFill>
+          <a:ln w="12699">
+            <a:solidFill>
+              <a:schemeClr val="tx1"/>
+            </a:solidFill>
+            <a:prstDash val="solid"/>
+          </a:ln>
+        </p:spPr>
+        <p:txBody>
+          <a:bodyPr vertOverflow="overflow" horzOverflow="overflow" vert="horz" wrap="square" lIns="91440" tIns="45720" rIns="91440" bIns="45720" numCol="1" spcCol="0" rtlCol="0" fromWordArt="0" anchor="t" anchorCtr="0" forceAA="0" compatLnSpc="0">
+            <a:spAutoFit/>
+          </a:bodyPr>
+          <a:lstStyle/>
+          <a:p>
+            <a:pPr>
+              <a:defRPr/>
+            </a:pPr>
+            <a:r>
+              <a:rPr lang="it-IT" sz="1400" b="0" i="0" u="none" strike="noStrike" cap="none" spc="0">
+                <a:solidFill>
+                  <a:schemeClr val="tx1"/>
+                </a:solidFill>
+                <a:latin typeface="Liberation Mono"/>
+                <a:ea typeface="Liberation Mono"/>
+                <a:cs typeface="Liberation Mono"/>
+              </a:rPr>
+              <a:t>if (availableVolunteers.isEmpty()) {</a:t>
+            </a:r>
+            <a:endParaRPr sz="1400" b="0" i="0" u="none" strike="noStrike" cap="none" spc="0">
+              <a:solidFill>
+                <a:schemeClr val="tx1"/>
+              </a:solidFill>
+              <a:latin typeface="Liberation Mono"/>
+              <a:cs typeface="Liberation Mono"/>
+            </a:endParaRPr>
+          </a:p>
+          <a:p>
+            <a:pPr>
+              <a:defRPr/>
+            </a:pPr>
+            <a:r>
+              <a:rPr lang="it-IT" sz="1400" b="0" i="0" u="none" strike="noStrike" cap="none" spc="0">
+                <a:solidFill>
+                  <a:schemeClr val="tx1"/>
+                </a:solidFill>
+                <a:latin typeface="Liberation Mono"/>
+                <a:ea typeface="Liberation Mono"/>
+                <a:cs typeface="Liberation Mono"/>
+              </a:rPr>
+              <a:t>                visit.setVisitStatus(VisitStatus.CANCELLED);</a:t>
+            </a:r>
+            <a:endParaRPr sz="1400" b="0" i="0" u="none" strike="noStrike" cap="none" spc="0">
+              <a:solidFill>
+                <a:schemeClr val="tx1"/>
+              </a:solidFill>
+              <a:latin typeface="Liberation Mono"/>
+              <a:cs typeface="Liberation Mono"/>
+            </a:endParaRPr>
+          </a:p>
+          <a:p>
+            <a:pPr>
+              <a:defRPr/>
+            </a:pPr>
+            <a:r>
+              <a:rPr lang="it-IT" sz="1400" b="0" i="0" u="none" strike="noStrike" cap="none" spc="0">
+                <a:solidFill>
+                  <a:schemeClr val="tx1"/>
+                </a:solidFill>
+                <a:latin typeface="Liberation Mono"/>
+                <a:ea typeface="Liberation Mono"/>
+                <a:cs typeface="Liberation Mono"/>
+              </a:rPr>
+              <a:t>                visitRepository.save(visit);</a:t>
+            </a:r>
+            <a:endParaRPr sz="1400" b="0" i="0" u="none" strike="noStrike" cap="none" spc="0">
+              <a:solidFill>
+                <a:schemeClr val="tx1"/>
+              </a:solidFill>
+              <a:latin typeface="Liberation Mono"/>
+              <a:cs typeface="Liberation Mono"/>
+            </a:endParaRPr>
+          </a:p>
+          <a:p>
+            <a:pPr>
+              <a:defRPr/>
+            </a:pPr>
+            <a:r>
+              <a:rPr lang="it-IT" sz="1400" b="0" i="0" u="none" strike="noStrike" cap="none" spc="0">
+                <a:solidFill>
+                  <a:schemeClr val="tx1"/>
+                </a:solidFill>
+                <a:latin typeface="Liberation Mono"/>
+                <a:ea typeface="Liberation Mono"/>
+                <a:cs typeface="Liberation Mono"/>
+              </a:rPr>
+              <a:t>                continue; // passa alla visita successiva</a:t>
+            </a:r>
+            <a:endParaRPr sz="1400" b="0" i="0" u="none" strike="noStrike" cap="none" spc="0">
+              <a:solidFill>
+                <a:schemeClr val="tx1"/>
+              </a:solidFill>
+              <a:latin typeface="Liberation Mono"/>
+              <a:cs typeface="Liberation Mono"/>
+            </a:endParaRPr>
+          </a:p>
+          <a:p>
+            <a:pPr>
+              <a:defRPr/>
+            </a:pPr>
+            <a:r>
+              <a:rPr lang="it-IT" sz="1400" b="0" i="0" u="none" strike="noStrike" cap="none" spc="0">
+                <a:solidFill>
+                  <a:schemeClr val="tx1"/>
+                </a:solidFill>
+                <a:latin typeface="Liberation Mono"/>
+                <a:ea typeface="Liberation Mono"/>
+                <a:cs typeface="Liberation Mono"/>
+              </a:rPr>
+              <a:t>            } else if (availableVolunteers.size() == 1) {</a:t>
+            </a:r>
+            <a:endParaRPr sz="1400" b="0" i="0" u="none" strike="noStrike" cap="none" spc="0">
+              <a:solidFill>
+                <a:schemeClr val="tx1"/>
+              </a:solidFill>
+              <a:latin typeface="Liberation Mono"/>
+              <a:cs typeface="Liberation Mono"/>
+            </a:endParaRPr>
+          </a:p>
+          <a:p>
+            <a:pPr>
+              <a:defRPr/>
+            </a:pPr>
+            <a:r>
+              <a:rPr lang="it-IT" sz="1400" b="0" i="0" u="none" strike="noStrike" cap="none" spc="0">
+                <a:solidFill>
+                  <a:schemeClr val="tx1"/>
+                </a:solidFill>
+                <a:latin typeface="Liberation Mono"/>
+                <a:ea typeface="Liberation Mono"/>
+                <a:cs typeface="Liberation Mono"/>
+              </a:rPr>
+              <a:t>                User volunteer = availableVolunteers.getFirst();</a:t>
+            </a:r>
+            <a:endParaRPr sz="1400" b="0" i="0" u="none" strike="noStrike" cap="none" spc="0">
+              <a:solidFill>
+                <a:schemeClr val="tx1"/>
+              </a:solidFill>
+              <a:latin typeface="Liberation Mono"/>
+              <a:cs typeface="Liberation Mono"/>
+            </a:endParaRPr>
+          </a:p>
+          <a:p>
+            <a:pPr>
+              <a:defRPr/>
+            </a:pPr>
+            <a:r>
+              <a:rPr lang="it-IT" sz="1400" b="0" i="0" u="none" strike="noStrike" cap="none" spc="0">
+                <a:solidFill>
+                  <a:schemeClr val="tx1"/>
+                </a:solidFill>
+                <a:latin typeface="Liberation Mono"/>
+                <a:ea typeface="Liberation Mono"/>
+                <a:cs typeface="Liberation Mono"/>
+              </a:rPr>
+              <a:t>                if (canDoVisitType(volunteer, visit.getVisitType().getId()))</a:t>
+            </a:r>
+            <a:endParaRPr sz="1400" b="0" i="0" u="none" strike="noStrike" cap="none" spc="0">
+              <a:solidFill>
+                <a:schemeClr val="tx1"/>
+              </a:solidFill>
+              <a:latin typeface="Liberation Mono"/>
+              <a:cs typeface="Liberation Mono"/>
+            </a:endParaRPr>
+          </a:p>
+          <a:p>
+            <a:pPr>
+              <a:defRPr/>
+            </a:pPr>
+            <a:r>
+              <a:rPr lang="it-IT" sz="1400" b="0" i="0" u="none" strike="noStrike" cap="none" spc="0">
+                <a:solidFill>
+                  <a:schemeClr val="tx1"/>
+                </a:solidFill>
+                <a:latin typeface="Liberation Mono"/>
+                <a:ea typeface="Liberation Mono"/>
+                <a:cs typeface="Liberation Mono"/>
+              </a:rPr>
+              <a:t>                    assignVolunteerToVisit(volunteer, visit, monthAvailabilities, volunteerVisitCounts);</a:t>
+            </a:r>
+            <a:endParaRPr sz="1400" b="0" i="0" u="none" strike="noStrike" cap="none" spc="0">
+              <a:solidFill>
+                <a:schemeClr val="tx1"/>
+              </a:solidFill>
+              <a:latin typeface="Liberation Mono"/>
+              <a:cs typeface="Liberation Mono"/>
+            </a:endParaRPr>
+          </a:p>
+          <a:p>
+            <a:pPr>
+              <a:defRPr/>
+            </a:pPr>
+            <a:r>
+              <a:rPr lang="it-IT" sz="1400" b="0" i="0" u="none" strike="noStrike" cap="none" spc="0">
+                <a:solidFill>
+                  <a:schemeClr val="tx1"/>
+                </a:solidFill>
+                <a:latin typeface="Liberation Mono"/>
+                <a:ea typeface="Liberation Mono"/>
+                <a:cs typeface="Liberation Mono"/>
+              </a:rPr>
+              <a:t>                else {</a:t>
+            </a:r>
+            <a:endParaRPr sz="1400" b="0" i="0" u="none" strike="noStrike" cap="none" spc="0">
+              <a:solidFill>
+                <a:schemeClr val="tx1"/>
+              </a:solidFill>
+              <a:latin typeface="Liberation Mono"/>
+              <a:cs typeface="Liberation Mono"/>
+            </a:endParaRPr>
+          </a:p>
+          <a:p>
+            <a:pPr>
+              <a:defRPr/>
+            </a:pPr>
+            <a:r>
+              <a:rPr lang="it-IT" sz="1400" b="0" i="0" u="none" strike="noStrike" cap="none" spc="0">
+                <a:solidFill>
+                  <a:schemeClr val="tx1"/>
+                </a:solidFill>
+                <a:latin typeface="Liberation Mono"/>
+                <a:ea typeface="Liberation Mono"/>
+                <a:cs typeface="Liberation Mono"/>
+              </a:rPr>
+              <a:t>                    visit.setVisitStatus(VisitStatus.CANCELLED);</a:t>
+            </a:r>
+            <a:endParaRPr sz="1400" b="0" i="0" u="none" strike="noStrike" cap="none" spc="0">
+              <a:solidFill>
+                <a:schemeClr val="tx1"/>
+              </a:solidFill>
+              <a:latin typeface="Liberation Mono"/>
+              <a:cs typeface="Liberation Mono"/>
+            </a:endParaRPr>
+          </a:p>
+          <a:p>
+            <a:pPr>
+              <a:defRPr/>
+            </a:pPr>
+            <a:r>
+              <a:rPr lang="it-IT" sz="1400" b="0" i="0" u="none" strike="noStrike" cap="none" spc="0">
+                <a:solidFill>
+                  <a:schemeClr val="tx1"/>
+                </a:solidFill>
+                <a:latin typeface="Liberation Mono"/>
+                <a:ea typeface="Liberation Mono"/>
+                <a:cs typeface="Liberation Mono"/>
+              </a:rPr>
+              <a:t>                    visitRepository.save(visit);</a:t>
+            </a:r>
+            <a:endParaRPr sz="1400" b="0" i="0" u="none" strike="noStrike" cap="none" spc="0">
+              <a:solidFill>
+                <a:schemeClr val="tx1"/>
+              </a:solidFill>
+              <a:latin typeface="Liberation Mono"/>
+              <a:cs typeface="Liberation Mono"/>
+            </a:endParaRPr>
+          </a:p>
+          <a:p>
+            <a:pPr>
+              <a:defRPr/>
+            </a:pPr>
+            <a:r>
+              <a:rPr lang="it-IT" sz="1400" b="0" i="0" u="none" strike="noStrike" cap="none" spc="0">
+                <a:solidFill>
+                  <a:schemeClr val="tx1"/>
+                </a:solidFill>
+                <a:latin typeface="Liberation Mono"/>
+                <a:ea typeface="Liberation Mono"/>
+                <a:cs typeface="Liberation Mono"/>
+              </a:rPr>
+              <a:t>                }</a:t>
+            </a:r>
+            <a:endParaRPr sz="1400" b="0" i="0" u="none" strike="noStrike" cap="none" spc="0">
+              <a:solidFill>
+                <a:schemeClr val="tx1"/>
+              </a:solidFill>
+              <a:latin typeface="Liberation Mono"/>
+              <a:cs typeface="Liberation Mono"/>
+            </a:endParaRPr>
+          </a:p>
+          <a:p>
+            <a:pPr>
+              <a:defRPr/>
+            </a:pPr>
+            <a:r>
+              <a:rPr lang="it-IT" sz="1400" b="0" i="0" u="none" strike="noStrike" cap="none" spc="0">
+                <a:solidFill>
+                  <a:schemeClr val="tx1"/>
+                </a:solidFill>
+                <a:latin typeface="Liberation Mono"/>
+                <a:ea typeface="Liberation Mono"/>
+                <a:cs typeface="Liberation Mono"/>
+              </a:rPr>
+              <a:t>                continue; // passa alla visita successiva</a:t>
+            </a:r>
+            <a:endParaRPr sz="1400" b="0" i="0" u="none" strike="noStrike" cap="none" spc="0">
+              <a:solidFill>
+                <a:schemeClr val="tx1"/>
+              </a:solidFill>
+              <a:latin typeface="Liberation Mono"/>
+              <a:cs typeface="Liberation Mono"/>
+            </a:endParaRPr>
+          </a:p>
+          <a:p>
+            <a:pPr>
+              <a:defRPr/>
+            </a:pPr>
+            <a:r>
+              <a:rPr lang="it-IT" sz="1400" b="0" i="0" u="none" strike="noStrike" cap="none" spc="0">
+                <a:solidFill>
+                  <a:schemeClr val="tx1"/>
+                </a:solidFill>
+                <a:latin typeface="Liberation Mono"/>
+                <a:ea typeface="Liberation Mono"/>
+                <a:cs typeface="Liberation Mono"/>
+              </a:rPr>
+              <a:t>            }</a:t>
+            </a:r>
+            <a:endParaRPr sz="1400" b="0" i="0" u="none" strike="noStrike" cap="none" spc="0">
+              <a:solidFill>
+                <a:schemeClr val="tx1"/>
+              </a:solidFill>
+              <a:latin typeface="Liberation Mono"/>
+              <a:cs typeface="Liberation Mono"/>
+            </a:endParaRPr>
+          </a:p>
+          <a:p>
+            <a:pPr>
+              <a:defRPr/>
+            </a:pPr>
+            <a:r>
+              <a:rPr lang="it-IT" sz="1400" b="0" i="0" u="none" strike="noStrike" cap="none" spc="0">
+                <a:solidFill>
+                  <a:schemeClr val="tx1"/>
+                </a:solidFill>
+                <a:latin typeface="Liberation Mono"/>
+                <a:ea typeface="Liberation Mono"/>
+                <a:cs typeface="Liberation Mono"/>
+              </a:rPr>
+              <a:t>            // piú di 2 volontari con disponibilitá nel giorno considerato</a:t>
+            </a:r>
+            <a:endParaRPr sz="1400" b="0" i="0" u="none" strike="noStrike" cap="none" spc="0">
+              <a:solidFill>
+                <a:schemeClr val="tx1"/>
+              </a:solidFill>
+              <a:latin typeface="Liberation Mono"/>
+              <a:cs typeface="Liberation Mono"/>
+            </a:endParaRPr>
+          </a:p>
+          <a:p>
+            <a:pPr>
+              <a:defRPr/>
+            </a:pPr>
+            <a:r>
+              <a:rPr lang="it-IT" sz="1400" b="0" i="0" u="none" strike="noStrike" cap="none" spc="0">
+                <a:solidFill>
+                  <a:schemeClr val="tx1"/>
+                </a:solidFill>
+                <a:latin typeface="Liberation Mono"/>
+                <a:ea typeface="Liberation Mono"/>
+                <a:cs typeface="Liberation Mono"/>
+              </a:rPr>
+              <a:t>            User bestVolunteer = selectBestVolunteer(availableVolunteers, volunteerVisitCounts);</a:t>
+            </a:r>
+            <a:endParaRPr sz="1400" b="0" i="0" u="none" strike="noStrike" cap="none" spc="0">
+              <a:solidFill>
+                <a:schemeClr val="tx1"/>
+              </a:solidFill>
+              <a:latin typeface="Liberation Mono"/>
+              <a:cs typeface="Liberation Mono"/>
+            </a:endParaRPr>
+          </a:p>
+          <a:p>
+            <a:pPr>
+              <a:defRPr/>
+            </a:pPr>
+            <a:r>
+              <a:rPr lang="it-IT" sz="1400" b="0" i="0" u="none" strike="noStrike" cap="none" spc="0">
+                <a:solidFill>
+                  <a:schemeClr val="tx1"/>
+                </a:solidFill>
+                <a:latin typeface="Liberation Mono"/>
+                <a:ea typeface="Liberation Mono"/>
+                <a:cs typeface="Liberation Mono"/>
+              </a:rPr>
+              <a:t>            assignVolunteerToVisit(bestVolunteer, visit, monthAvailabilities, volunteerVisitCounts);</a:t>
+            </a:r>
+            <a:endParaRPr sz="1400" b="0" i="0" u="none" strike="noStrike" cap="none" spc="0">
+              <a:solidFill>
+                <a:schemeClr val="tx1"/>
+              </a:solidFill>
+              <a:latin typeface="Liberation Mono"/>
+              <a:cs typeface="Liberation Mono"/>
+            </a:endParaRPr>
+          </a:p>
+          <a:p>
+            <a:pPr>
+              <a:defRPr/>
+            </a:pPr>
+            <a:r>
+              <a:rPr lang="it-IT" sz="1400" b="0" i="0" u="none" strike="noStrike" cap="none" spc="0">
+                <a:solidFill>
+                  <a:schemeClr val="tx1"/>
+                </a:solidFill>
+                <a:latin typeface="Liberation Mono"/>
+                <a:ea typeface="Liberation Mono"/>
+                <a:cs typeface="Liberation Mono"/>
+              </a:rPr>
+              <a:t>        }</a:t>
+            </a:r>
+          </a:p>
+          <a:p>
+            <a:pPr>
+              <a:defRPr/>
+            </a:pPr>
+            <a:r>
+              <a:rPr lang="en" sz="1400" b="0" i="0" u="none" strike="noStrike" cap="none" spc="0">
+                <a:solidFill>
+                  <a:schemeClr val="tx1"/>
+                </a:solidFill>
+                <a:latin typeface="Liberation Mono"/>
+                <a:ea typeface="Liberation Mono"/>
+                <a:cs typeface="Liberation Mono"/>
+              </a:rPr>
+              <a:t>...</a:t>
+            </a:r>
+            <a:endParaRPr/>
+          </a:p>
+        </p:txBody>
+      </p:sp>
+      <p:sp>
+        <p:nvSpPr>
+          <p:cNvPr id="1625665772" name="CasellaDiTesto 1625665771"/>
+          <p:cNvSpPr txBox="1"/>
+          <p:nvPr/>
+        </p:nvSpPr>
+        <p:spPr bwMode="auto">
+          <a:xfrm>
+            <a:off x="9679349" y="1269223"/>
+            <a:ext cx="1995597" cy="640440"/>
+          </a:xfrm>
+          <a:prstGeom prst="rect">
+            <a:avLst/>
+          </a:prstGeom>
+          <a:noFill/>
+        </p:spPr>
+        <p:txBody>
+          <a:bodyPr vertOverflow="overflow" horzOverflow="overflow" vert="horz" wrap="square" lIns="91440" tIns="45720" rIns="91440" bIns="45720" numCol="1" spcCol="0" rtlCol="0" fromWordArt="0" anchor="ctr" anchorCtr="0" forceAA="0" compatLnSpc="0">
+            <a:spAutoFit/>
+          </a:bodyPr>
+          <a:lstStyle/>
+          <a:p>
+            <a:pPr algn="ctr">
+              <a:defRPr/>
+            </a:pPr>
+            <a:r>
+              <a:rPr lang="en" sz="3600" b="1">
+                <a:ln w="6349">
+                  <a:solidFill>
+                    <a:srgbClr val="000000"/>
+                  </a:solidFill>
+                  <a:prstDash val="solid"/>
+                </a:ln>
+                <a:solidFill>
+                  <a:schemeClr val="accent2">
+                    <a:lumMod val="75000"/>
+                  </a:schemeClr>
+                </a:solidFill>
+                <a:latin typeface="Cantarell Extra Bold"/>
+                <a:ea typeface="Cantarell Extra Bold"/>
+                <a:cs typeface="Cantarell Extra Bold"/>
+              </a:rPr>
+              <a:t>PRIMA</a:t>
+            </a:r>
+            <a:endParaRPr>
+              <a:ln w="6349">
+                <a:solidFill>
+                  <a:schemeClr val="tx1"/>
+                </a:solidFill>
+                <a:prstDash val="solid"/>
+              </a:ln>
+            </a:endParaRPr>
+          </a:p>
+        </p:txBody>
+      </p:sp>
+    </p:spTree>
+  </p:cSld>
+  <p:clrMapOvr>
+    <a:masterClrMapping/>
+  </p:clrMapOvr>
+</p:sld>
+</file>
+
+<file path=ppt/slides/slide27.xml><?xml version="1.0" encoding="utf-8"?>
+<p:sld xmlns:a="http://schemas.openxmlformats.org/drawingml/2006/main" xmlns:r="http://schemas.openxmlformats.org/officeDocument/2006/relationships" xmlns:p="http://schemas.openxmlformats.org/presentationml/2006/main" showMasterPhAnim="0">
+  <p:cSld>
+    <p:spTree>
+      <p:nvGrpSpPr>
+        <p:cNvPr id="1" name=""/>
+        <p:cNvGrpSpPr/>
+        <p:nvPr/>
+      </p:nvGrpSpPr>
+      <p:grpSpPr bwMode="auto">
+        <a:xfrm>
+          <a:off x="0" y="0"/>
+          <a:ext cx="0" cy="0"/>
+          <a:chOff x="0" y="0"/>
+          <a:chExt cx="0" cy="0"/>
+        </a:xfrm>
+      </p:grpSpPr>
+      <p:sp>
+        <p:nvSpPr>
+          <p:cNvPr id="449234049" name="Titolo 1"/>
+          <p:cNvSpPr>
+            <a:spLocks noGrp="1"/>
+          </p:cNvSpPr>
+          <p:nvPr>
+            <p:ph type="title"/>
+          </p:nvPr>
+        </p:nvSpPr>
+        <p:spPr bwMode="auto">
+          <a:xfrm>
+            <a:off x="838198" y="37801"/>
+            <a:ext cx="10515600" cy="1325561"/>
+          </a:xfrm>
+        </p:spPr>
+        <p:txBody>
+          <a:bodyPr/>
+          <a:lstStyle/>
+          <a:p>
+            <a:pPr>
+              <a:defRPr/>
+            </a:pPr>
+            <a:r>
+              <a:rPr lang="en" b="1">
+                <a:solidFill>
+                  <a:srgbClr val="0070C0"/>
+                </a:solidFill>
+                <a:latin typeface="Noto Sans"/>
+                <a:ea typeface="Noto Sans"/>
+                <a:cs typeface="Noto Sans"/>
+              </a:rPr>
+              <a:t>Refactoring</a:t>
+            </a:r>
+            <a:endParaRPr/>
+          </a:p>
+        </p:txBody>
+      </p:sp>
+      <p:sp>
+        <p:nvSpPr>
+          <p:cNvPr id="1225781845" name="CasellaDiTesto 1225781844"/>
+          <p:cNvSpPr txBox="1"/>
+          <p:nvPr/>
+        </p:nvSpPr>
+        <p:spPr bwMode="auto">
+          <a:xfrm>
+            <a:off x="457913" y="1160460"/>
+            <a:ext cx="11637768" cy="3407891"/>
+          </a:xfrm>
+          <a:prstGeom prst="roundRect">
+            <a:avLst>
+              <a:gd name="adj" fmla="val 5796"/>
+            </a:avLst>
+          </a:prstGeom>
+          <a:solidFill>
+            <a:schemeClr val="bg1">
+              <a:alpha val="49999"/>
+            </a:schemeClr>
+          </a:solidFill>
+          <a:ln w="12699">
+            <a:solidFill>
+              <a:schemeClr val="tx1"/>
+            </a:solidFill>
+            <a:prstDash val="solid"/>
+          </a:ln>
+        </p:spPr>
+        <p:txBody>
+          <a:bodyPr vertOverflow="overflow" horzOverflow="overflow" vert="horz" wrap="square" lIns="91440" tIns="45720" rIns="91440" bIns="45720" numCol="1" spcCol="0" rtlCol="0" fromWordArt="0" anchor="t" anchorCtr="0" forceAA="0" compatLnSpc="0">
+            <a:spAutoFit/>
+          </a:bodyPr>
+          <a:lstStyle/>
+          <a:p>
+            <a:pPr>
+              <a:defRPr/>
+            </a:pPr>
+            <a:r>
+              <a:rPr lang="it-IT" sz="1400" b="0" i="0" u="none" strike="noStrike" cap="none" spc="0">
+                <a:solidFill>
+                  <a:schemeClr val="tx1"/>
+                </a:solidFill>
+                <a:latin typeface="Liberation Mono"/>
+                <a:ea typeface="Liberation Mono"/>
+                <a:cs typeface="Liberation Mono"/>
+              </a:rPr>
+              <a:t>for (Visit visit : nextMonthSortedVisits) {</a:t>
+            </a:r>
+          </a:p>
+          <a:p>
+            <a:pPr>
+              <a:defRPr/>
+            </a:pPr>
+            <a:r>
+              <a:rPr lang="it-IT" sz="1400" b="0" i="0" u="none" strike="noStrike" cap="none" spc="0">
+                <a:solidFill>
+                  <a:schemeClr val="tx1"/>
+                </a:solidFill>
+                <a:latin typeface="Liberation Mono"/>
+                <a:ea typeface="Liberation Mono"/>
+                <a:cs typeface="Liberation Mono"/>
+              </a:rPr>
+              <a:t>            List&lt;Integer&gt; availableVolunteerIds = getAvailableVolunteersForVisitDate(visit, volunteerAvailabilitiesNextMonth);</a:t>
+            </a:r>
+            <a:endParaRPr sz="1400" b="0" i="0" u="none" strike="noStrike" cap="none" spc="0">
+              <a:solidFill>
+                <a:schemeClr val="tx1"/>
+              </a:solidFill>
+              <a:latin typeface="Liberation Mono"/>
+              <a:cs typeface="Liberation Mono"/>
+            </a:endParaRPr>
+          </a:p>
+          <a:p>
+            <a:pPr>
+              <a:defRPr/>
+            </a:pPr>
+            <a:endParaRPr sz="1400" b="0" i="0" u="none" strike="noStrike" cap="none" spc="0">
+              <a:solidFill>
+                <a:schemeClr val="tx1"/>
+              </a:solidFill>
+              <a:latin typeface="Liberation Mono"/>
+              <a:cs typeface="Liberation Mono"/>
+            </a:endParaRPr>
+          </a:p>
+          <a:p>
+            <a:pPr>
+              <a:defRPr/>
+            </a:pPr>
+            <a:r>
+              <a:rPr lang="it-IT" sz="1400" b="0" i="0" u="none" strike="noStrike" cap="none" spc="0">
+                <a:solidFill>
+                  <a:schemeClr val="tx1"/>
+                </a:solidFill>
+                <a:latin typeface="Liberation Mono"/>
+                <a:ea typeface="Liberation Mono"/>
+                <a:cs typeface="Liberation Mono"/>
+              </a:rPr>
+              <a:t>            if (availableVolunteerIds.isEmpty()) {</a:t>
+            </a:r>
+            <a:endParaRPr sz="1400" b="0" i="0" u="none" strike="noStrike" cap="none" spc="0">
+              <a:solidFill>
+                <a:schemeClr val="tx1"/>
+              </a:solidFill>
+              <a:latin typeface="Liberation Mono"/>
+              <a:cs typeface="Liberation Mono"/>
+            </a:endParaRPr>
+          </a:p>
+          <a:p>
+            <a:pPr>
+              <a:defRPr/>
+            </a:pPr>
+            <a:r>
+              <a:rPr lang="it-IT" sz="1400" b="0" i="0" u="none" strike="noStrike" cap="none" spc="0">
+                <a:solidFill>
+                  <a:schemeClr val="tx1"/>
+                </a:solidFill>
+                <a:latin typeface="Liberation Mono"/>
+                <a:ea typeface="Liberation Mono"/>
+                <a:cs typeface="Liberation Mono"/>
+              </a:rPr>
+              <a:t>                setVisitStatusToCancelled(visit);</a:t>
+            </a:r>
+            <a:endParaRPr sz="1400" b="0" i="0" u="none" strike="noStrike" cap="none" spc="0">
+              <a:solidFill>
+                <a:schemeClr val="tx1"/>
+              </a:solidFill>
+              <a:latin typeface="Liberation Mono"/>
+              <a:cs typeface="Liberation Mono"/>
+            </a:endParaRPr>
+          </a:p>
+          <a:p>
+            <a:pPr>
+              <a:defRPr/>
+            </a:pPr>
+            <a:r>
+              <a:rPr lang="it-IT" sz="1400" b="0" i="0" u="none" strike="noStrike" cap="none" spc="0">
+                <a:solidFill>
+                  <a:schemeClr val="tx1"/>
+                </a:solidFill>
+                <a:latin typeface="Liberation Mono"/>
+                <a:ea typeface="Liberation Mono"/>
+                <a:cs typeface="Liberation Mono"/>
+              </a:rPr>
+              <a:t>            } else if (availableVolunteerIds.size() == 1) {</a:t>
+            </a:r>
+            <a:endParaRPr sz="1400" b="0" i="0" u="none" strike="noStrike" cap="none" spc="0">
+              <a:solidFill>
+                <a:schemeClr val="tx1"/>
+              </a:solidFill>
+              <a:latin typeface="Liberation Mono"/>
+              <a:cs typeface="Liberation Mono"/>
+            </a:endParaRPr>
+          </a:p>
+          <a:p>
+            <a:pPr>
+              <a:defRPr/>
+            </a:pPr>
+            <a:r>
+              <a:rPr lang="it-IT" sz="1400" b="0" i="0" u="none" strike="noStrike" cap="none" spc="0">
+                <a:solidFill>
+                  <a:schemeClr val="tx1"/>
+                </a:solidFill>
+                <a:latin typeface="Liberation Mono"/>
+                <a:ea typeface="Liberation Mono"/>
+                <a:cs typeface="Liberation Mono"/>
+              </a:rPr>
+              <a:t>                assignAvailableVolunteerToVisitIfPossible(visit, availableVolunteerIds, volunteerAvailabilitiesNextMonth, volunteerIdWithVisitCounts);</a:t>
+            </a:r>
+            <a:endParaRPr sz="1400" b="0" i="0" u="none" strike="noStrike" cap="none" spc="0">
+              <a:solidFill>
+                <a:schemeClr val="tx1"/>
+              </a:solidFill>
+              <a:latin typeface="Liberation Mono"/>
+              <a:cs typeface="Liberation Mono"/>
+            </a:endParaRPr>
+          </a:p>
+          <a:p>
+            <a:pPr>
+              <a:defRPr/>
+            </a:pPr>
+            <a:r>
+              <a:rPr lang="it-IT" sz="1400" b="0" i="0" u="none" strike="noStrike" cap="none" spc="0">
+                <a:solidFill>
+                  <a:schemeClr val="tx1"/>
+                </a:solidFill>
+                <a:latin typeface="Liberation Mono"/>
+                <a:ea typeface="Liberation Mono"/>
+                <a:cs typeface="Liberation Mono"/>
+              </a:rPr>
+              <a:t>            } else {</a:t>
+            </a:r>
+            <a:endParaRPr sz="1400" b="0" i="0" u="none" strike="noStrike" cap="none" spc="0">
+              <a:solidFill>
+                <a:schemeClr val="tx1"/>
+              </a:solidFill>
+              <a:latin typeface="Liberation Mono"/>
+              <a:cs typeface="Liberation Mono"/>
+            </a:endParaRPr>
+          </a:p>
+          <a:p>
+            <a:pPr>
+              <a:defRPr/>
+            </a:pPr>
+            <a:r>
+              <a:rPr lang="it-IT" sz="1400" b="0" i="0" u="none" strike="noStrike" cap="none" spc="0">
+                <a:solidFill>
+                  <a:schemeClr val="tx1"/>
+                </a:solidFill>
+                <a:latin typeface="Liberation Mono"/>
+                <a:ea typeface="Liberation Mono"/>
+                <a:cs typeface="Liberation Mono"/>
+              </a:rPr>
+              <a:t>                assignBestVolunteerAvailableToVisit(visit, availableVolunteerIds, volunteerIdWithVisitCounts, volunteerAvailabilitiesNextMonth);</a:t>
+            </a:r>
+            <a:endParaRPr sz="1400" b="0" i="0" u="none" strike="noStrike" cap="none" spc="0">
+              <a:solidFill>
+                <a:schemeClr val="tx1"/>
+              </a:solidFill>
+              <a:latin typeface="Liberation Mono"/>
+              <a:cs typeface="Liberation Mono"/>
+            </a:endParaRPr>
+          </a:p>
+          <a:p>
+            <a:pPr>
+              <a:defRPr/>
+            </a:pPr>
+            <a:r>
+              <a:rPr lang="it-IT" sz="1400" b="0" i="0" u="none" strike="noStrike" cap="none" spc="0">
+                <a:solidFill>
+                  <a:schemeClr val="tx1"/>
+                </a:solidFill>
+                <a:latin typeface="Liberation Mono"/>
+                <a:ea typeface="Liberation Mono"/>
+                <a:cs typeface="Liberation Mono"/>
+              </a:rPr>
+              <a:t>            }</a:t>
+            </a:r>
+            <a:endParaRPr sz="1400" b="0" i="0" u="none" strike="noStrike" cap="none" spc="0">
+              <a:solidFill>
+                <a:schemeClr val="tx1"/>
+              </a:solidFill>
+              <a:latin typeface="Liberation Mono"/>
+              <a:cs typeface="Liberation Mono"/>
+            </a:endParaRPr>
+          </a:p>
+          <a:p>
+            <a:pPr>
+              <a:defRPr/>
+            </a:pPr>
+            <a:r>
+              <a:rPr lang="it-IT" sz="1400" b="0" i="0" u="none" strike="noStrike" cap="none" spc="0">
+                <a:solidFill>
+                  <a:schemeClr val="tx1"/>
+                </a:solidFill>
+                <a:latin typeface="Liberation Mono"/>
+                <a:ea typeface="Liberation Mono"/>
+                <a:cs typeface="Liberation Mono"/>
+              </a:rPr>
+              <a:t>        }</a:t>
+            </a:r>
+            <a:endParaRPr sz="1400" b="0" i="0" u="none" strike="noStrike" cap="none" spc="0">
+              <a:solidFill>
+                <a:schemeClr val="tx1"/>
+              </a:solidFill>
+              <a:latin typeface="Liberation Mono"/>
+              <a:cs typeface="Liberation Mono"/>
+            </a:endParaRPr>
+          </a:p>
+          <a:p>
+            <a:pPr>
+              <a:defRPr/>
+            </a:pPr>
+            <a:r>
+              <a:rPr lang="en" sz="1400" b="0" i="0" u="none" strike="noStrike" cap="none" spc="0">
+                <a:solidFill>
+                  <a:schemeClr val="tx1"/>
+                </a:solidFill>
+                <a:latin typeface="Liberation Mono"/>
+                <a:ea typeface="Liberation Mono"/>
+                <a:cs typeface="Liberation Mono"/>
+              </a:rPr>
+              <a:t>...</a:t>
+            </a:r>
+            <a:endParaRPr sz="1400" b="0" i="0" u="none" strike="noStrike" cap="none" spc="0">
+              <a:solidFill>
+                <a:schemeClr val="tx1"/>
+              </a:solidFill>
+              <a:latin typeface="Liberation Mono"/>
+              <a:cs typeface="Liberation Mono"/>
+            </a:endParaRPr>
+          </a:p>
+        </p:txBody>
+      </p:sp>
+      <p:sp>
+        <p:nvSpPr>
+          <p:cNvPr id="1711987548" name="CasellaDiTesto 1711987547"/>
+          <p:cNvSpPr txBox="1"/>
+          <p:nvPr/>
+        </p:nvSpPr>
+        <p:spPr bwMode="auto">
+          <a:xfrm>
+            <a:off x="4383448" y="471802"/>
+            <a:ext cx="7416703" cy="457559"/>
+          </a:xfrm>
+          <a:prstGeom prst="rect">
+            <a:avLst/>
+          </a:prstGeom>
+          <a:noFill/>
+        </p:spPr>
+        <p:txBody>
+          <a:bodyPr vertOverflow="overflow" horzOverflow="overflow" vert="horz" wrap="square" lIns="91440" tIns="45720" rIns="91440" bIns="45720" numCol="1" spcCol="0" rtlCol="0" fromWordArt="0" anchor="t" anchorCtr="0" forceAA="0" compatLnSpc="0">
+            <a:spAutoFit/>
+          </a:bodyPr>
+          <a:lstStyle/>
+          <a:p>
+            <a:pPr algn="ctr">
+              <a:defRPr/>
+            </a:pPr>
+            <a:r>
+              <a:rPr lang="en" sz="2400" b="1">
+                <a:solidFill>
+                  <a:srgbClr val="0070C0"/>
+                </a:solidFill>
+                <a:latin typeface="DejaVu Sans Condensed"/>
+                <a:ea typeface="DejaVu Sans Condensed"/>
+                <a:cs typeface="DejaVu Sans Condensed"/>
+              </a:rPr>
+              <a:t>Extract Method - 2 + semplificazione logica</a:t>
+            </a:r>
+            <a:endParaRPr sz="1400" b="1">
+              <a:solidFill>
+                <a:srgbClr val="0070C0"/>
+              </a:solidFill>
+            </a:endParaRPr>
+          </a:p>
+        </p:txBody>
+      </p:sp>
+      <p:sp>
+        <p:nvSpPr>
+          <p:cNvPr id="23320965" name="CasellaDiTesto 23320964"/>
+          <p:cNvSpPr txBox="1"/>
+          <p:nvPr/>
+        </p:nvSpPr>
+        <p:spPr bwMode="auto">
+          <a:xfrm>
+            <a:off x="10039335" y="1839611"/>
+            <a:ext cx="1999196" cy="640440"/>
+          </a:xfrm>
+          <a:prstGeom prst="rect">
+            <a:avLst/>
+          </a:prstGeom>
+          <a:noFill/>
+        </p:spPr>
+        <p:txBody>
+          <a:bodyPr vertOverflow="overflow" horzOverflow="overflow" vert="horz" wrap="square" lIns="91440" tIns="45720" rIns="91440" bIns="45720" numCol="1" spcCol="0" rtlCol="0" fromWordArt="0" anchor="ctr" anchorCtr="0" forceAA="0" compatLnSpc="0">
+            <a:spAutoFit/>
+          </a:bodyPr>
+          <a:lstStyle/>
+          <a:p>
+            <a:pPr algn="ctr">
+              <a:defRPr/>
+            </a:pPr>
+            <a:r>
+              <a:rPr lang="en" sz="3600" b="1">
+                <a:ln w="6349">
+                  <a:solidFill>
+                    <a:srgbClr val="000000"/>
+                  </a:solidFill>
+                  <a:prstDash val="solid"/>
+                </a:ln>
+                <a:solidFill>
+                  <a:srgbClr val="92D050"/>
+                </a:solidFill>
+                <a:latin typeface="Cantarell Extra Bold"/>
+                <a:ea typeface="Cantarell Extra Bold"/>
+                <a:cs typeface="Cantarell Extra Bold"/>
+              </a:rPr>
+              <a:t>DOPO</a:t>
+            </a:r>
+            <a:endParaRPr>
+              <a:ln w="6349">
+                <a:solidFill>
+                  <a:schemeClr val="tx1"/>
+                </a:solidFill>
+                <a:prstDash val="solid"/>
+              </a:ln>
+            </a:endParaRPr>
+          </a:p>
+        </p:txBody>
+      </p:sp>
+    </p:spTree>
+  </p:cSld>
+  <p:clrMapOvr>
+    <a:masterClrMapping/>
+  </p:clrMapOvr>
+</p:sld>
+</file>
+
+<file path=ppt/slides/slide28.xml><?xml version="1.0" encoding="utf-8"?>
+<p:sld xmlns:a="http://schemas.openxmlformats.org/drawingml/2006/main" xmlns:r="http://schemas.openxmlformats.org/officeDocument/2006/relationships" xmlns:p="http://schemas.openxmlformats.org/presentationml/2006/main" showMasterPhAnim="0">
+  <p:cSld>
+    <p:spTree>
+      <p:nvGrpSpPr>
+        <p:cNvPr id="1" name=""/>
+        <p:cNvGrpSpPr/>
+        <p:nvPr/>
+      </p:nvGrpSpPr>
+      <p:grpSpPr bwMode="auto">
+        <a:xfrm>
+          <a:off x="0" y="0"/>
+          <a:ext cx="0" cy="0"/>
+          <a:chOff x="0" y="0"/>
+          <a:chExt cx="0" cy="0"/>
+        </a:xfrm>
+      </p:grpSpPr>
+      <p:sp>
+        <p:nvSpPr>
           <p:cNvPr id="1068862128" name="Titolo 1"/>
           <p:cNvSpPr>
             <a:spLocks noGrp="1"/>
@@ -13184,7 +13567,7 @@
 </p:sld>
 </file>
 
-<file path=ppt/slides/slide27.xml><?xml version="1.0" encoding="utf-8"?>
+<file path=ppt/slides/slide29.xml><?xml version="1.0" encoding="utf-8"?>
 <p:sld xmlns:a="http://schemas.openxmlformats.org/drawingml/2006/main" xmlns:r="http://schemas.openxmlformats.org/officeDocument/2006/relationships" xmlns:p="http://schemas.openxmlformats.org/presentationml/2006/main" showMasterPhAnim="0">
   <p:cSld>
     <p:spTree>

--- a/doc/Presentazione/Presentazione_ingsw_parteB.pptx
+++ b/doc/Presentazione/Presentazione_ingsw_parteB.pptx
@@ -14492,7 +14492,9 @@
         </p:nvSpPr>
         <p:spPr bwMode="auto"/>
         <p:txBody>
-          <a:bodyPr/>
+          <a:bodyPr>
+            <a:normAutofit lnSpcReduction="10000"/>
+          </a:bodyPr>
           <a:lstStyle/>
           <a:p>
             <a:pPr marL="0" indent="0">
@@ -14536,8 +14538,29 @@
             </a:r>
             <a:r>
               <a:rPr lang="en" dirty="0"/>
-              <a:t> sono i REST controller, utilizzati per fornire le API per recuperare/inviare dati dal backend.</a:t>
-            </a:r>
+              <a:t> </a:t>
+            </a:r>
+            <a:r>
+              <a:rPr lang="it-IT" dirty="0"/>
+              <a:t>comprendono sia i </a:t>
+            </a:r>
+            <a:r>
+              <a:rPr lang="it-IT" dirty="0" err="1"/>
+              <a:t>View</a:t>
+            </a:r>
+            <a:r>
+              <a:rPr lang="it-IT" dirty="0"/>
+              <a:t> Controller (per la parte di interfaccia) sia i REST Controller, che espongono le API per l’invio e il recupero dei dati dal </a:t>
+            </a:r>
+            <a:r>
+              <a:rPr lang="it-IT" dirty="0" err="1"/>
+              <a:t>backend</a:t>
+            </a:r>
+            <a:r>
+              <a:rPr lang="it-IT" dirty="0"/>
+              <a:t>.</a:t>
+            </a:r>
+            <a:endParaRPr lang="en" dirty="0"/>
           </a:p>
           <a:p>
             <a:pPr lvl="0">
@@ -14553,7 +14576,7 @@
             </a:r>
             <a:r>
               <a:rPr lang="en" dirty="0"/>
-              <a:t>consiste nei service che svolgono la logica di business.</a:t>
+              <a:t>è costituitodai Service che svolgono la logica di business, dal layer di persistence che si interfaccia con il DB tramite le repository, e dagli oggetti di dominio come entity, che vengono poi trasformati dagli adapter in domain objects per essere utilizzati nei service. </a:t>
             </a:r>
           </a:p>
         </p:txBody>

--- a/doc/Presentazione/Presentazione_ingsw_parteB.pptx
+++ b/doc/Presentazione/Presentazione_ingsw_parteB.pptx
@@ -241,7 +241,7 @@
             </a:pPr>
             <a:fld id="{3632E96E-41F7-40C5-8419-297958CC00FA}" type="datetimeFigureOut">
               <a:rPr lang="it-IT"/>
-              <a:t>25/10/2025</a:t>
+              <a:t>26/10/2025</a:t>
             </a:fld>
             <a:endParaRPr lang="it-IT"/>
           </a:p>
@@ -2571,7 +2571,7 @@
             </a:pPr>
             <a:fld id="{BCC18F51-09EC-435C-A3BA-64A766E099C0}" type="datetimeFigureOut">
               <a:rPr lang="it-IT"/>
-              <a:t>25/10/2025</a:t>
+              <a:t>26/10/2025</a:t>
             </a:fld>
             <a:endParaRPr lang="it-IT"/>
           </a:p>
@@ -2760,7 +2760,7 @@
             </a:pPr>
             <a:fld id="{BCC18F51-09EC-435C-A3BA-64A766E099C0}" type="datetimeFigureOut">
               <a:rPr lang="it-IT"/>
-              <a:t>25/10/2025</a:t>
+              <a:t>26/10/2025</a:t>
             </a:fld>
             <a:endParaRPr lang="it-IT"/>
           </a:p>
@@ -2959,7 +2959,7 @@
             </a:pPr>
             <a:fld id="{BCC18F51-09EC-435C-A3BA-64A766E099C0}" type="datetimeFigureOut">
               <a:rPr lang="it-IT"/>
-              <a:t>25/10/2025</a:t>
+              <a:t>26/10/2025</a:t>
             </a:fld>
             <a:endParaRPr lang="it-IT"/>
           </a:p>
@@ -3148,7 +3148,7 @@
             </a:pPr>
             <a:fld id="{BCC18F51-09EC-435C-A3BA-64A766E099C0}" type="datetimeFigureOut">
               <a:rPr lang="it-IT"/>
-              <a:t>25/10/2025</a:t>
+              <a:t>26/10/2025</a:t>
             </a:fld>
             <a:endParaRPr lang="it-IT"/>
           </a:p>
@@ -3403,7 +3403,7 @@
             </a:pPr>
             <a:fld id="{BCC18F51-09EC-435C-A3BA-64A766E099C0}" type="datetimeFigureOut">
               <a:rPr lang="it-IT"/>
-              <a:t>25/10/2025</a:t>
+              <a:t>26/10/2025</a:t>
             </a:fld>
             <a:endParaRPr lang="it-IT"/>
           </a:p>
@@ -3667,7 +3667,7 @@
             </a:pPr>
             <a:fld id="{BCC18F51-09EC-435C-A3BA-64A766E099C0}" type="datetimeFigureOut">
               <a:rPr lang="it-IT"/>
-              <a:t>25/10/2025</a:t>
+              <a:t>26/10/2025</a:t>
             </a:fld>
             <a:endParaRPr lang="it-IT"/>
           </a:p>
@@ -4072,7 +4072,7 @@
             </a:pPr>
             <a:fld id="{BCC18F51-09EC-435C-A3BA-64A766E099C0}" type="datetimeFigureOut">
               <a:rPr lang="it-IT"/>
-              <a:t>25/10/2025</a:t>
+              <a:t>26/10/2025</a:t>
             </a:fld>
             <a:endParaRPr lang="it-IT"/>
           </a:p>
@@ -4196,7 +4196,7 @@
             </a:pPr>
             <a:fld id="{BCC18F51-09EC-435C-A3BA-64A766E099C0}" type="datetimeFigureOut">
               <a:rPr lang="it-IT"/>
-              <a:t>25/10/2025</a:t>
+              <a:t>26/10/2025</a:t>
             </a:fld>
             <a:endParaRPr lang="it-IT"/>
           </a:p>
@@ -4295,7 +4295,7 @@
             </a:pPr>
             <a:fld id="{BCC18F51-09EC-435C-A3BA-64A766E099C0}" type="datetimeFigureOut">
               <a:rPr lang="it-IT"/>
-              <a:t>25/10/2025</a:t>
+              <a:t>26/10/2025</a:t>
             </a:fld>
             <a:endParaRPr lang="it-IT"/>
           </a:p>
@@ -4594,7 +4594,7 @@
             </a:pPr>
             <a:fld id="{BCC18F51-09EC-435C-A3BA-64A766E099C0}" type="datetimeFigureOut">
               <a:rPr lang="it-IT"/>
-              <a:t>25/10/2025</a:t>
+              <a:t>26/10/2025</a:t>
             </a:fld>
             <a:endParaRPr lang="it-IT"/>
           </a:p>
@@ -4862,7 +4862,7 @@
             </a:pPr>
             <a:fld id="{BCC18F51-09EC-435C-A3BA-64A766E099C0}" type="datetimeFigureOut">
               <a:rPr lang="it-IT"/>
-              <a:t>25/10/2025</a:t>
+              <a:t>26/10/2025</a:t>
             </a:fld>
             <a:endParaRPr lang="it-IT"/>
           </a:p>
@@ -5118,7 +5118,7 @@
             </a:pPr>
             <a:fld id="{BCC18F51-09EC-435C-A3BA-64A766E099C0}" type="datetimeFigureOut">
               <a:rPr lang="it-IT"/>
-              <a:t>25/10/2025</a:t>
+              <a:t>26/10/2025</a:t>
             </a:fld>
             <a:endParaRPr lang="it-IT"/>
           </a:p>
@@ -5667,7 +5667,7 @@
                 <a:ea typeface="DejaVu Sans Condensed"/>
                 <a:cs typeface="DejaVu Sans Condensed"/>
               </a:rPr>
-              <a:t>Khater Abdelaziz	</a:t>
+              <a:t>Khater Abdelaziz		</a:t>
             </a:r>
             <a:r>
               <a:rPr lang="en" sz="1800" b="0" i="0" u="none" strike="noStrike" cap="none" spc="0" dirty="0">
@@ -8618,7 +8618,7 @@
                 <a:ea typeface="DejaVu Sans Condensed"/>
                 <a:cs typeface="DejaVu Sans Condensed"/>
               </a:rPr>
-              <a:t>SOLID 1 – Dependency Inversion 		11</a:t>
+              <a:t>SOLID 1 – Dependency Inversion 			11</a:t>
             </a:r>
             <a:endParaRPr sz="1800" dirty="0">
               <a:latin typeface="DejaVu Sans Condensed"/>
@@ -8665,7 +8665,7 @@
                 <a:latin typeface="DejaVu Sans Condensed"/>
                 <a:cs typeface="DejaVu Sans Condensed"/>
               </a:rPr>
-              <a:t>GoF 1 – Strategy				13-15</a:t>
+              <a:t>GoF 1 – Strategy					13-15</a:t>
             </a:r>
           </a:p>
           <a:p>
@@ -8717,7 +8717,7 @@
                 <a:ea typeface="DejaVu Sans Condensed"/>
                 <a:cs typeface="DejaVu Sans Condensed"/>
               </a:rPr>
-              <a:t>Esempi di refactoring				24-28</a:t>
+              <a:t>Esempi di refactoring					24-28</a:t>
             </a:r>
             <a:endParaRPr sz="1800" dirty="0">
               <a:latin typeface="Cantarell"/>
@@ -14576,7 +14576,7 @@
             </a:r>
             <a:r>
               <a:rPr lang="en" dirty="0"/>
-              <a:t>è costituitodai Service che svolgono la logica di business, dal layer di persistence che si interfaccia con il DB tramite le repository, e dagli oggetti di dominio come entity, che vengono poi trasformati dagli adapter in domain objects per essere utilizzati nei service. </a:t>
+              <a:t>è costituito dai Service che svolgono la logica di business, dal layer di persistence che si interfaccia con il DB tramite le repository, e dagli oggetti di dominio come entity, che vengono poi trasformati dagli adapter in domain objects per essere utilizzati nei service. </a:t>
             </a:r>
           </a:p>
         </p:txBody>
@@ -14715,14 +14715,13 @@
               </a:ext>
             </a:extLst>
           </a:blip>
-          <a:stretch>
-            <a:fillRect/>
-          </a:stretch>
+          <a:srcRect/>
+          <a:stretch/>
         </p:blipFill>
         <p:spPr>
           <a:xfrm>
-            <a:off x="107950" y="1634304"/>
-            <a:ext cx="11976100" cy="4525557"/>
+            <a:off x="316668" y="1634304"/>
+            <a:ext cx="11558664" cy="4525557"/>
           </a:xfrm>
           <a:prstGeom prst="rect">
             <a:avLst/>

--- a/doc/Presentazione/Presentazione_ingsw_parteB.pptx
+++ b/doc/Presentazione/Presentazione_ingsw_parteB.pptx
@@ -2,7 +2,7 @@
 <file path=ppt/presentation.xml><?xml version="1.0" encoding="utf-8"?>
 <p:presentation xmlns:a="http://schemas.openxmlformats.org/drawingml/2006/main" xmlns:r="http://schemas.openxmlformats.org/officeDocument/2006/relationships" xmlns:p="http://schemas.openxmlformats.org/presentationml/2006/main" saveSubsetFonts="1">
   <p:sldMasterIdLst>
-    <p:sldMasterId id="2147483648" r:id="rId1"/>
+    <p:sldMasterId id="2147483759" r:id="rId1"/>
   </p:sldMasterIdLst>
   <p:notesMasterIdLst>
     <p:notesMasterId r:id="rId30"/>
@@ -38,13 +38,13 @@
     <p:sldId id="287" r:id="rId29"/>
   </p:sldIdLst>
   <p:sldSz cx="12192000" cy="6858000"/>
-  <p:notesSz cx="6858000" cy="9144000"/>
+  <p:notesSz cx="7104063" cy="10234613"/>
   <p:defaultTextStyle>
     <a:defPPr>
       <a:defRPr lang="it-IT"/>
     </a:defPPr>
-    <a:lvl1pPr marL="0" algn="l" defTabSz="914400" rtl="0">
-      <a:defRPr sz="1800">
+    <a:lvl1pPr marL="0" algn="l" defTabSz="914400" rtl="0" eaLnBrk="1" latinLnBrk="0" hangingPunct="1">
+      <a:defRPr sz="1800" kern="1200">
         <a:solidFill>
           <a:schemeClr val="tx1"/>
         </a:solidFill>
@@ -53,8 +53,8 @@
         <a:cs typeface="+mn-cs"/>
       </a:defRPr>
     </a:lvl1pPr>
-    <a:lvl2pPr marL="457200" algn="l" defTabSz="914400" rtl="0">
-      <a:defRPr sz="1800">
+    <a:lvl2pPr marL="457200" algn="l" defTabSz="914400" rtl="0" eaLnBrk="1" latinLnBrk="0" hangingPunct="1">
+      <a:defRPr sz="1800" kern="1200">
         <a:solidFill>
           <a:schemeClr val="tx1"/>
         </a:solidFill>
@@ -63,8 +63,8 @@
         <a:cs typeface="+mn-cs"/>
       </a:defRPr>
     </a:lvl2pPr>
-    <a:lvl3pPr marL="914400" algn="l" defTabSz="914400" rtl="0">
-      <a:defRPr sz="1800">
+    <a:lvl3pPr marL="914400" algn="l" defTabSz="914400" rtl="0" eaLnBrk="1" latinLnBrk="0" hangingPunct="1">
+      <a:defRPr sz="1800" kern="1200">
         <a:solidFill>
           <a:schemeClr val="tx1"/>
         </a:solidFill>
@@ -73,8 +73,8 @@
         <a:cs typeface="+mn-cs"/>
       </a:defRPr>
     </a:lvl3pPr>
-    <a:lvl4pPr marL="1371600" algn="l" defTabSz="914400" rtl="0">
-      <a:defRPr sz="1800">
+    <a:lvl4pPr marL="1371600" algn="l" defTabSz="914400" rtl="0" eaLnBrk="1" latinLnBrk="0" hangingPunct="1">
+      <a:defRPr sz="1800" kern="1200">
         <a:solidFill>
           <a:schemeClr val="tx1"/>
         </a:solidFill>
@@ -83,8 +83,8 @@
         <a:cs typeface="+mn-cs"/>
       </a:defRPr>
     </a:lvl4pPr>
-    <a:lvl5pPr marL="1828800" algn="l" defTabSz="914400" rtl="0">
-      <a:defRPr sz="1800">
+    <a:lvl5pPr marL="1828800" algn="l" defTabSz="914400" rtl="0" eaLnBrk="1" latinLnBrk="0" hangingPunct="1">
+      <a:defRPr sz="1800" kern="1200">
         <a:solidFill>
           <a:schemeClr val="tx1"/>
         </a:solidFill>
@@ -93,8 +93,8 @@
         <a:cs typeface="+mn-cs"/>
       </a:defRPr>
     </a:lvl5pPr>
-    <a:lvl6pPr marL="2286000" algn="l" defTabSz="914400" rtl="0">
-      <a:defRPr sz="1800">
+    <a:lvl6pPr marL="2286000" algn="l" defTabSz="914400" rtl="0" eaLnBrk="1" latinLnBrk="0" hangingPunct="1">
+      <a:defRPr sz="1800" kern="1200">
         <a:solidFill>
           <a:schemeClr val="tx1"/>
         </a:solidFill>
@@ -103,8 +103,8 @@
         <a:cs typeface="+mn-cs"/>
       </a:defRPr>
     </a:lvl6pPr>
-    <a:lvl7pPr marL="2743200" algn="l" defTabSz="914400" rtl="0">
-      <a:defRPr sz="1800">
+    <a:lvl7pPr marL="2743200" algn="l" defTabSz="914400" rtl="0" eaLnBrk="1" latinLnBrk="0" hangingPunct="1">
+      <a:defRPr sz="1800" kern="1200">
         <a:solidFill>
           <a:schemeClr val="tx1"/>
         </a:solidFill>
@@ -113,8 +113,8 @@
         <a:cs typeface="+mn-cs"/>
       </a:defRPr>
     </a:lvl7pPr>
-    <a:lvl8pPr marL="3200400" algn="l" defTabSz="914400" rtl="0">
-      <a:defRPr sz="1800">
+    <a:lvl8pPr marL="3200400" algn="l" defTabSz="914400" rtl="0" eaLnBrk="1" latinLnBrk="0" hangingPunct="1">
+      <a:defRPr sz="1800" kern="1200">
         <a:solidFill>
           <a:schemeClr val="tx1"/>
         </a:solidFill>
@@ -123,8 +123,8 @@
         <a:cs typeface="+mn-cs"/>
       </a:defRPr>
     </a:lvl8pPr>
-    <a:lvl9pPr marL="3657600" algn="l" defTabSz="914400" rtl="0">
-      <a:defRPr sz="1800">
+    <a:lvl9pPr marL="3657600" algn="l" defTabSz="914400" rtl="0" eaLnBrk="1" latinLnBrk="0" hangingPunct="1">
+      <a:defRPr sz="1800" kern="1200">
         <a:solidFill>
           <a:schemeClr val="tx1"/>
         </a:solidFill>
@@ -188,17 +188,17 @@
         <p:spPr bwMode="auto">
           <a:xfrm>
             <a:off x="0" y="0"/>
-            <a:ext cx="2971800" cy="458788"/>
+            <a:ext cx="3078427" cy="513508"/>
           </a:xfrm>
           <a:prstGeom prst="rect">
             <a:avLst/>
           </a:prstGeom>
         </p:spPr>
         <p:txBody>
-          <a:bodyPr vert="horz" lIns="91440" tIns="45720" rIns="91440" bIns="45720" rtlCol="0"/>
+          <a:bodyPr vert="horz" lIns="99075" tIns="49538" rIns="99075" bIns="49538" rtlCol="0"/>
           <a:lstStyle>
             <a:lvl1pPr algn="l">
-              <a:defRPr sz="1200"/>
+              <a:defRPr sz="1300"/>
             </a:lvl1pPr>
           </a:lstStyle>
           <a:p>
@@ -221,18 +221,18 @@
         </p:nvSpPr>
         <p:spPr bwMode="auto">
           <a:xfrm>
-            <a:off x="3884613" y="0"/>
-            <a:ext cx="2971800" cy="458788"/>
+            <a:off x="4023992" y="0"/>
+            <a:ext cx="3078427" cy="513508"/>
           </a:xfrm>
           <a:prstGeom prst="rect">
             <a:avLst/>
           </a:prstGeom>
         </p:spPr>
         <p:txBody>
-          <a:bodyPr vert="horz" lIns="91440" tIns="45720" rIns="91440" bIns="45720" rtlCol="0"/>
+          <a:bodyPr vert="horz" lIns="99075" tIns="49538" rIns="99075" bIns="49538" rtlCol="0"/>
           <a:lstStyle>
             <a:lvl1pPr algn="r">
-              <a:defRPr sz="1200"/>
+              <a:defRPr sz="1300"/>
             </a:lvl1pPr>
           </a:lstStyle>
           <a:p>
@@ -241,7 +241,7 @@
             </a:pPr>
             <a:fld id="{3632E96E-41F7-40C5-8419-297958CC00FA}" type="datetimeFigureOut">
               <a:rPr lang="it-IT"/>
-              <a:t>26/10/2025</a:t>
+              <a:t>30/10/2025</a:t>
             </a:fld>
             <a:endParaRPr lang="it-IT"/>
           </a:p>
@@ -259,8 +259,8 @@
         </p:nvSpPr>
         <p:spPr bwMode="auto">
           <a:xfrm>
-            <a:off x="685800" y="1143000"/>
-            <a:ext cx="5486400" cy="3086100"/>
+            <a:off x="482600" y="1279525"/>
+            <a:ext cx="6140450" cy="3454400"/>
           </a:xfrm>
           <a:prstGeom prst="rect">
             <a:avLst/>
@@ -273,7 +273,7 @@
           </a:ln>
         </p:spPr>
         <p:txBody>
-          <a:bodyPr vert="horz" lIns="91440" tIns="45720" rIns="91440" bIns="45720" rtlCol="0" anchor="ctr"/>
+          <a:bodyPr vert="horz" lIns="99075" tIns="49538" rIns="99075" bIns="49538" rtlCol="0" anchor="ctr"/>
           <a:lstStyle/>
           <a:p>
             <a:pPr>
@@ -295,15 +295,15 @@
         </p:nvSpPr>
         <p:spPr bwMode="auto">
           <a:xfrm>
-            <a:off x="685800" y="4400550"/>
-            <a:ext cx="5486400" cy="3600450"/>
+            <a:off x="710407" y="4925407"/>
+            <a:ext cx="5683250" cy="4029879"/>
           </a:xfrm>
           <a:prstGeom prst="rect">
             <a:avLst/>
           </a:prstGeom>
         </p:spPr>
         <p:txBody>
-          <a:bodyPr vert="horz" lIns="91440" tIns="45720" rIns="91440" bIns="45720" rtlCol="0"/>
+          <a:bodyPr vert="horz" lIns="99075" tIns="49538" rIns="99075" bIns="49538" rtlCol="0"/>
           <a:lstStyle/>
           <a:p>
             <a:pPr lvl="0">
@@ -368,18 +368,18 @@
         </p:nvSpPr>
         <p:spPr bwMode="auto">
           <a:xfrm>
-            <a:off x="0" y="8685213"/>
-            <a:ext cx="2971800" cy="458787"/>
+            <a:off x="0" y="9721107"/>
+            <a:ext cx="3078427" cy="513507"/>
           </a:xfrm>
           <a:prstGeom prst="rect">
             <a:avLst/>
           </a:prstGeom>
         </p:spPr>
         <p:txBody>
-          <a:bodyPr vert="horz" lIns="91440" tIns="45720" rIns="91440" bIns="45720" rtlCol="0" anchor="b"/>
+          <a:bodyPr vert="horz" lIns="99075" tIns="49538" rIns="99075" bIns="49538" rtlCol="0" anchor="b"/>
           <a:lstStyle>
             <a:lvl1pPr algn="l">
-              <a:defRPr sz="1200"/>
+              <a:defRPr sz="1300"/>
             </a:lvl1pPr>
           </a:lstStyle>
           <a:p>
@@ -402,18 +402,18 @@
         </p:nvSpPr>
         <p:spPr bwMode="auto">
           <a:xfrm>
-            <a:off x="3884613" y="8685213"/>
-            <a:ext cx="2971800" cy="458787"/>
+            <a:off x="4023992" y="9721107"/>
+            <a:ext cx="3078427" cy="513507"/>
           </a:xfrm>
           <a:prstGeom prst="rect">
             <a:avLst/>
           </a:prstGeom>
         </p:spPr>
         <p:txBody>
-          <a:bodyPr vert="horz" lIns="91440" tIns="45720" rIns="91440" bIns="45720" rtlCol="0" anchor="b"/>
+          <a:bodyPr vert="horz" lIns="99075" tIns="49538" rIns="99075" bIns="49538" rtlCol="0" anchor="b"/>
           <a:lstStyle>
             <a:lvl1pPr algn="r">
-              <a:defRPr sz="1200"/>
+              <a:defRPr sz="1300"/>
             </a:lvl1pPr>
           </a:lstStyle>
           <a:p>
@@ -555,8 +555,8 @@
         </p:nvSpPr>
         <p:spPr bwMode="auto">
           <a:xfrm>
-            <a:off x="685800" y="1143000"/>
-            <a:ext cx="5486400" cy="3086100"/>
+            <a:off x="482600" y="1279525"/>
+            <a:ext cx="6140450" cy="3454400"/>
           </a:xfrm>
         </p:spPr>
       </p:sp>
@@ -2434,7 +2434,7 @@
 </file>
 
 <file path=ppt/slideLayouts/slideLayout1.xml><?xml version="1.0" encoding="utf-8"?>
-<p:sldLayout xmlns:a="http://schemas.openxmlformats.org/drawingml/2006/main" xmlns:r="http://schemas.openxmlformats.org/officeDocument/2006/relationships" xmlns:p="http://schemas.openxmlformats.org/presentationml/2006/main" showMasterPhAnim="0" type="title" preserve="1" userDrawn="1">
+<p:sldLayout xmlns:a="http://schemas.openxmlformats.org/drawingml/2006/main" xmlns:r="http://schemas.openxmlformats.org/officeDocument/2006/relationships" xmlns:p="http://schemas.openxmlformats.org/presentationml/2006/main" type="title" preserve="1">
   <p:cSld name="Diapositiva titolo">
     <p:spTree>
       <p:nvGrpSpPr>
@@ -2442,7 +2442,7 @@
         <p:cNvGrpSpPr/>
         <p:nvPr/>
       </p:nvGrpSpPr>
-      <p:grpSpPr bwMode="auto">
+      <p:grpSpPr>
         <a:xfrm>
           <a:off x="0" y="0"/>
           <a:ext cx="0" cy="0"/>
@@ -2452,7 +2452,13 @@
       </p:grpSpPr>
       <p:sp>
         <p:nvSpPr>
-          <p:cNvPr id="1495173846" name="Titolo 1"/>
+          <p:cNvPr id="2" name="Titolo 1">
+            <a:extLst>
+              <a:ext uri="{FF2B5EF4-FFF2-40B4-BE49-F238E27FC236}">
+                <a16:creationId xmlns:a16="http://schemas.microsoft.com/office/drawing/2014/main" id="{663EC611-F647-8A10-3790-FDC597B7F843}"/>
+              </a:ext>
+            </a:extLst>
+          </p:cNvPr>
           <p:cNvSpPr>
             <a:spLocks noGrp="1"/>
           </p:cNvSpPr>
@@ -2460,7 +2466,7 @@
             <p:ph type="ctrTitle"/>
           </p:nvPr>
         </p:nvSpPr>
-        <p:spPr bwMode="auto">
+        <p:spPr>
           <a:xfrm>
             <a:off x="1524000" y="1122363"/>
             <a:ext cx="9144000" cy="2387600"/>
@@ -2474,19 +2480,22 @@
             </a:lvl1pPr>
           </a:lstStyle>
           <a:p>
-            <a:pPr>
-              <a:defRPr/>
-            </a:pPr>
             <a:r>
               <a:rPr lang="it-IT"/>
-              <a:t>Fare clic per modificare lo stile del titolo</a:t>
-            </a:r>
-          </a:p>
-        </p:txBody>
-      </p:sp>
-      <p:sp>
-        <p:nvSpPr>
-          <p:cNvPr id="2096900696" name="Sottotitolo 2"/>
+              <a:t>Fare clic per modificare lo stile del titolo dello schema</a:t>
+            </a:r>
+          </a:p>
+        </p:txBody>
+      </p:sp>
+      <p:sp>
+        <p:nvSpPr>
+          <p:cNvPr id="3" name="Sottotitolo 2">
+            <a:extLst>
+              <a:ext uri="{FF2B5EF4-FFF2-40B4-BE49-F238E27FC236}">
+                <a16:creationId xmlns:a16="http://schemas.microsoft.com/office/drawing/2014/main" id="{F17CDBE8-89D1-0B33-EE1C-3E2C66E69EF8}"/>
+              </a:ext>
+            </a:extLst>
+          </p:cNvPr>
           <p:cNvSpPr>
             <a:spLocks noGrp="1"/>
           </p:cNvSpPr>
@@ -2494,7 +2503,7 @@
             <p:ph type="subTitle" idx="1"/>
           </p:nvPr>
         </p:nvSpPr>
-        <p:spPr bwMode="auto">
+        <p:spPr>
           <a:xfrm>
             <a:off x="1524000" y="3602038"/>
             <a:ext cx="9144000" cy="1655762"/>
@@ -2541,9 +2550,6 @@
             </a:lvl9pPr>
           </a:lstStyle>
           <a:p>
-            <a:pPr>
-              <a:defRPr/>
-            </a:pPr>
             <a:r>
               <a:rPr lang="it-IT"/>
               <a:t>Fare clic per modificare lo stile del sottotitolo dello schema</a:t>
@@ -2553,7 +2559,13 @@
       </p:sp>
       <p:sp>
         <p:nvSpPr>
-          <p:cNvPr id="2098076908" name="Segnaposto data 3"/>
+          <p:cNvPr id="4" name="Segnaposto data 3">
+            <a:extLst>
+              <a:ext uri="{FF2B5EF4-FFF2-40B4-BE49-F238E27FC236}">
+                <a16:creationId xmlns:a16="http://schemas.microsoft.com/office/drawing/2014/main" id="{90D42303-FC39-0DE7-BC2C-666AACCE63A2}"/>
+              </a:ext>
+            </a:extLst>
+          </p:cNvPr>
           <p:cNvSpPr>
             <a:spLocks noGrp="1"/>
           </p:cNvSpPr>
@@ -2561,7 +2573,7 @@
             <p:ph type="dt" sz="half" idx="10"/>
           </p:nvPr>
         </p:nvSpPr>
-        <p:spPr bwMode="auto"/>
+        <p:spPr/>
         <p:txBody>
           <a:bodyPr/>
           <a:lstStyle/>
@@ -2570,8 +2582,8 @@
               <a:defRPr/>
             </a:pPr>
             <a:fld id="{BCC18F51-09EC-435C-A3BA-64A766E099C0}" type="datetimeFigureOut">
-              <a:rPr lang="it-IT"/>
-              <a:t>26/10/2025</a:t>
+              <a:rPr lang="it-IT" smtClean="0"/>
+              <a:t>30/10/2025</a:t>
             </a:fld>
             <a:endParaRPr lang="it-IT"/>
           </a:p>
@@ -2579,7 +2591,13 @@
       </p:sp>
       <p:sp>
         <p:nvSpPr>
-          <p:cNvPr id="1451742043" name="Segnaposto piè di pagina 4"/>
+          <p:cNvPr id="5" name="Segnaposto piè di pagina 4">
+            <a:extLst>
+              <a:ext uri="{FF2B5EF4-FFF2-40B4-BE49-F238E27FC236}">
+                <a16:creationId xmlns:a16="http://schemas.microsoft.com/office/drawing/2014/main" id="{15D1F217-1207-F29B-4E27-3E7E536D9FB1}"/>
+              </a:ext>
+            </a:extLst>
+          </p:cNvPr>
           <p:cNvSpPr>
             <a:spLocks noGrp="1"/>
           </p:cNvSpPr>
@@ -2587,7 +2605,7 @@
             <p:ph type="ftr" sz="quarter" idx="11"/>
           </p:nvPr>
         </p:nvSpPr>
-        <p:spPr bwMode="auto"/>
+        <p:spPr/>
         <p:txBody>
           <a:bodyPr/>
           <a:lstStyle/>
@@ -2601,7 +2619,13 @@
       </p:sp>
       <p:sp>
         <p:nvSpPr>
-          <p:cNvPr id="378279587" name="Segnaposto numero diapositiva 5"/>
+          <p:cNvPr id="6" name="Segnaposto numero diapositiva 5">
+            <a:extLst>
+              <a:ext uri="{FF2B5EF4-FFF2-40B4-BE49-F238E27FC236}">
+                <a16:creationId xmlns:a16="http://schemas.microsoft.com/office/drawing/2014/main" id="{DCF5E8C4-8999-2D82-878F-757C7514B064}"/>
+              </a:ext>
+            </a:extLst>
+          </p:cNvPr>
           <p:cNvSpPr>
             <a:spLocks noGrp="1"/>
           </p:cNvSpPr>
@@ -2609,7 +2633,7 @@
             <p:ph type="sldNum" sz="quarter" idx="12"/>
           </p:nvPr>
         </p:nvSpPr>
-        <p:spPr bwMode="auto"/>
+        <p:spPr/>
         <p:txBody>
           <a:bodyPr/>
           <a:lstStyle/>
@@ -2618,7 +2642,7 @@
               <a:defRPr/>
             </a:pPr>
             <a:fld id="{08395586-F03A-48D1-94DF-16B239DF4FB5}" type="slidenum">
-              <a:rPr lang="it-IT"/>
+              <a:rPr lang="it-IT" smtClean="0"/>
               <a:t>‹N›</a:t>
             </a:fld>
             <a:endParaRPr lang="it-IT"/>
@@ -2626,6 +2650,11 @@
         </p:txBody>
       </p:sp>
     </p:spTree>
+    <p:extLst>
+      <p:ext uri="{BB962C8B-B14F-4D97-AF65-F5344CB8AC3E}">
+        <p14:creationId xmlns:p14="http://schemas.microsoft.com/office/powerpoint/2010/main" val="597168283"/>
+      </p:ext>
+    </p:extLst>
   </p:cSld>
   <p:clrMapOvr>
     <a:masterClrMapping/>
@@ -2634,8 +2663,432 @@
 </file>
 
 <file path=ppt/slideLayouts/slideLayout10.xml><?xml version="1.0" encoding="utf-8"?>
-<p:sldLayout xmlns:a="http://schemas.openxmlformats.org/drawingml/2006/main" xmlns:r="http://schemas.openxmlformats.org/officeDocument/2006/relationships" xmlns:p="http://schemas.openxmlformats.org/presentationml/2006/main" showMasterPhAnim="0" type="vertTx" preserve="1" userDrawn="1">
+<p:sldLayout xmlns:a="http://schemas.openxmlformats.org/drawingml/2006/main" xmlns:r="http://schemas.openxmlformats.org/officeDocument/2006/relationships" xmlns:p="http://schemas.openxmlformats.org/presentationml/2006/main" type="vertTx" preserve="1">
   <p:cSld name="Titolo e testo verticale">
+    <p:spTree>
+      <p:nvGrpSpPr>
+        <p:cNvPr id="1" name=""/>
+        <p:cNvGrpSpPr/>
+        <p:nvPr/>
+      </p:nvGrpSpPr>
+      <p:grpSpPr>
+        <a:xfrm>
+          <a:off x="0" y="0"/>
+          <a:ext cx="0" cy="0"/>
+          <a:chOff x="0" y="0"/>
+          <a:chExt cx="0" cy="0"/>
+        </a:xfrm>
+      </p:grpSpPr>
+      <p:sp>
+        <p:nvSpPr>
+          <p:cNvPr id="2" name="Titolo 1">
+            <a:extLst>
+              <a:ext uri="{FF2B5EF4-FFF2-40B4-BE49-F238E27FC236}">
+                <a16:creationId xmlns:a16="http://schemas.microsoft.com/office/drawing/2014/main" id="{57295804-2020-2C32-0749-B4BC8C284119}"/>
+              </a:ext>
+            </a:extLst>
+          </p:cNvPr>
+          <p:cNvSpPr>
+            <a:spLocks noGrp="1"/>
+          </p:cNvSpPr>
+          <p:nvPr>
+            <p:ph type="title"/>
+          </p:nvPr>
+        </p:nvSpPr>
+        <p:spPr/>
+        <p:txBody>
+          <a:bodyPr/>
+          <a:lstStyle/>
+          <a:p>
+            <a:r>
+              <a:rPr lang="it-IT"/>
+              <a:t>Fare clic per modificare lo stile del titolo dello schema</a:t>
+            </a:r>
+          </a:p>
+        </p:txBody>
+      </p:sp>
+      <p:sp>
+        <p:nvSpPr>
+          <p:cNvPr id="3" name="Segnaposto testo verticale 2">
+            <a:extLst>
+              <a:ext uri="{FF2B5EF4-FFF2-40B4-BE49-F238E27FC236}">
+                <a16:creationId xmlns:a16="http://schemas.microsoft.com/office/drawing/2014/main" id="{0D8D5978-D404-5194-9A75-3896A3E1BA1B}"/>
+              </a:ext>
+            </a:extLst>
+          </p:cNvPr>
+          <p:cNvSpPr>
+            <a:spLocks noGrp="1"/>
+          </p:cNvSpPr>
+          <p:nvPr>
+            <p:ph type="body" orient="vert" idx="1"/>
+          </p:nvPr>
+        </p:nvSpPr>
+        <p:spPr/>
+        <p:txBody>
+          <a:bodyPr vert="eaVert"/>
+          <a:lstStyle/>
+          <a:p>
+            <a:pPr lvl="0"/>
+            <a:r>
+              <a:rPr lang="it-IT"/>
+              <a:t>Fare clic per modificare gli stili del testo dello schema</a:t>
+            </a:r>
+          </a:p>
+          <a:p>
+            <a:pPr lvl="1"/>
+            <a:r>
+              <a:rPr lang="it-IT"/>
+              <a:t>Secondo livello</a:t>
+            </a:r>
+          </a:p>
+          <a:p>
+            <a:pPr lvl="2"/>
+            <a:r>
+              <a:rPr lang="it-IT"/>
+              <a:t>Terzo livello</a:t>
+            </a:r>
+          </a:p>
+          <a:p>
+            <a:pPr lvl="3"/>
+            <a:r>
+              <a:rPr lang="it-IT"/>
+              <a:t>Quarto livello</a:t>
+            </a:r>
+          </a:p>
+          <a:p>
+            <a:pPr lvl="4"/>
+            <a:r>
+              <a:rPr lang="it-IT"/>
+              <a:t>Quinto livello</a:t>
+            </a:r>
+          </a:p>
+        </p:txBody>
+      </p:sp>
+      <p:sp>
+        <p:nvSpPr>
+          <p:cNvPr id="4" name="Segnaposto data 3">
+            <a:extLst>
+              <a:ext uri="{FF2B5EF4-FFF2-40B4-BE49-F238E27FC236}">
+                <a16:creationId xmlns:a16="http://schemas.microsoft.com/office/drawing/2014/main" id="{BF294432-F6A3-75DB-97D1-A6AA6F472F7E}"/>
+              </a:ext>
+            </a:extLst>
+          </p:cNvPr>
+          <p:cNvSpPr>
+            <a:spLocks noGrp="1"/>
+          </p:cNvSpPr>
+          <p:nvPr>
+            <p:ph type="dt" sz="half" idx="10"/>
+          </p:nvPr>
+        </p:nvSpPr>
+        <p:spPr/>
+        <p:txBody>
+          <a:bodyPr/>
+          <a:lstStyle/>
+          <a:p>
+            <a:pPr>
+              <a:defRPr/>
+            </a:pPr>
+            <a:fld id="{BCC18F51-09EC-435C-A3BA-64A766E099C0}" type="datetimeFigureOut">
+              <a:rPr lang="it-IT" smtClean="0"/>
+              <a:t>30/10/2025</a:t>
+            </a:fld>
+            <a:endParaRPr lang="it-IT"/>
+          </a:p>
+        </p:txBody>
+      </p:sp>
+      <p:sp>
+        <p:nvSpPr>
+          <p:cNvPr id="5" name="Segnaposto piè di pagina 4">
+            <a:extLst>
+              <a:ext uri="{FF2B5EF4-FFF2-40B4-BE49-F238E27FC236}">
+                <a16:creationId xmlns:a16="http://schemas.microsoft.com/office/drawing/2014/main" id="{386A4BAD-A8A4-C8BE-46F0-43C2ECBCF378}"/>
+              </a:ext>
+            </a:extLst>
+          </p:cNvPr>
+          <p:cNvSpPr>
+            <a:spLocks noGrp="1"/>
+          </p:cNvSpPr>
+          <p:nvPr>
+            <p:ph type="ftr" sz="quarter" idx="11"/>
+          </p:nvPr>
+        </p:nvSpPr>
+        <p:spPr/>
+        <p:txBody>
+          <a:bodyPr/>
+          <a:lstStyle/>
+          <a:p>
+            <a:pPr>
+              <a:defRPr/>
+            </a:pPr>
+            <a:endParaRPr lang="it-IT"/>
+          </a:p>
+        </p:txBody>
+      </p:sp>
+      <p:sp>
+        <p:nvSpPr>
+          <p:cNvPr id="6" name="Segnaposto numero diapositiva 5">
+            <a:extLst>
+              <a:ext uri="{FF2B5EF4-FFF2-40B4-BE49-F238E27FC236}">
+                <a16:creationId xmlns:a16="http://schemas.microsoft.com/office/drawing/2014/main" id="{DE19785A-48F8-4B3D-809A-6B575672F193}"/>
+              </a:ext>
+            </a:extLst>
+          </p:cNvPr>
+          <p:cNvSpPr>
+            <a:spLocks noGrp="1"/>
+          </p:cNvSpPr>
+          <p:nvPr>
+            <p:ph type="sldNum" sz="quarter" idx="12"/>
+          </p:nvPr>
+        </p:nvSpPr>
+        <p:spPr/>
+        <p:txBody>
+          <a:bodyPr/>
+          <a:lstStyle/>
+          <a:p>
+            <a:pPr>
+              <a:defRPr/>
+            </a:pPr>
+            <a:fld id="{08395586-F03A-48D1-94DF-16B239DF4FB5}" type="slidenum">
+              <a:rPr lang="it-IT" smtClean="0"/>
+              <a:t>‹N›</a:t>
+            </a:fld>
+            <a:endParaRPr lang="it-IT"/>
+          </a:p>
+        </p:txBody>
+      </p:sp>
+    </p:spTree>
+    <p:extLst>
+      <p:ext uri="{BB962C8B-B14F-4D97-AF65-F5344CB8AC3E}">
+        <p14:creationId xmlns:p14="http://schemas.microsoft.com/office/powerpoint/2010/main" val="1378586524"/>
+      </p:ext>
+    </p:extLst>
+  </p:cSld>
+  <p:clrMapOvr>
+    <a:masterClrMapping/>
+  </p:clrMapOvr>
+</p:sldLayout>
+</file>
+
+<file path=ppt/slideLayouts/slideLayout11.xml><?xml version="1.0" encoding="utf-8"?>
+<p:sldLayout xmlns:a="http://schemas.openxmlformats.org/drawingml/2006/main" xmlns:r="http://schemas.openxmlformats.org/officeDocument/2006/relationships" xmlns:p="http://schemas.openxmlformats.org/presentationml/2006/main" type="vertTitleAndTx" preserve="1">
+  <p:cSld name="1_Titolo e testo verticale">
+    <p:spTree>
+      <p:nvGrpSpPr>
+        <p:cNvPr id="1" name=""/>
+        <p:cNvGrpSpPr/>
+        <p:nvPr/>
+      </p:nvGrpSpPr>
+      <p:grpSpPr>
+        <a:xfrm>
+          <a:off x="0" y="0"/>
+          <a:ext cx="0" cy="0"/>
+          <a:chOff x="0" y="0"/>
+          <a:chExt cx="0" cy="0"/>
+        </a:xfrm>
+      </p:grpSpPr>
+      <p:sp>
+        <p:nvSpPr>
+          <p:cNvPr id="2" name="Titolo verticale 1">
+            <a:extLst>
+              <a:ext uri="{FF2B5EF4-FFF2-40B4-BE49-F238E27FC236}">
+                <a16:creationId xmlns:a16="http://schemas.microsoft.com/office/drawing/2014/main" id="{2818ADBA-1092-62D9-2D4A-45F438E40203}"/>
+              </a:ext>
+            </a:extLst>
+          </p:cNvPr>
+          <p:cNvSpPr>
+            <a:spLocks noGrp="1"/>
+          </p:cNvSpPr>
+          <p:nvPr>
+            <p:ph type="title" orient="vert"/>
+          </p:nvPr>
+        </p:nvSpPr>
+        <p:spPr>
+          <a:xfrm>
+            <a:off x="8724900" y="365125"/>
+            <a:ext cx="2628900" cy="5811838"/>
+          </a:xfrm>
+        </p:spPr>
+        <p:txBody>
+          <a:bodyPr vert="eaVert"/>
+          <a:lstStyle/>
+          <a:p>
+            <a:r>
+              <a:rPr lang="it-IT"/>
+              <a:t>Fare clic per modificare lo stile del titolo dello schema</a:t>
+            </a:r>
+          </a:p>
+        </p:txBody>
+      </p:sp>
+      <p:sp>
+        <p:nvSpPr>
+          <p:cNvPr id="3" name="Segnaposto testo verticale 2">
+            <a:extLst>
+              <a:ext uri="{FF2B5EF4-FFF2-40B4-BE49-F238E27FC236}">
+                <a16:creationId xmlns:a16="http://schemas.microsoft.com/office/drawing/2014/main" id="{E8B69738-F9EC-EF0B-90A4-FC133F2B0E08}"/>
+              </a:ext>
+            </a:extLst>
+          </p:cNvPr>
+          <p:cNvSpPr>
+            <a:spLocks noGrp="1"/>
+          </p:cNvSpPr>
+          <p:nvPr>
+            <p:ph type="body" orient="vert" idx="1"/>
+          </p:nvPr>
+        </p:nvSpPr>
+        <p:spPr>
+          <a:xfrm>
+            <a:off x="838200" y="365125"/>
+            <a:ext cx="7734300" cy="5811838"/>
+          </a:xfrm>
+        </p:spPr>
+        <p:txBody>
+          <a:bodyPr vert="eaVert"/>
+          <a:lstStyle/>
+          <a:p>
+            <a:pPr lvl="0"/>
+            <a:r>
+              <a:rPr lang="it-IT"/>
+              <a:t>Fare clic per modificare gli stili del testo dello schema</a:t>
+            </a:r>
+          </a:p>
+          <a:p>
+            <a:pPr lvl="1"/>
+            <a:r>
+              <a:rPr lang="it-IT"/>
+              <a:t>Secondo livello</a:t>
+            </a:r>
+          </a:p>
+          <a:p>
+            <a:pPr lvl="2"/>
+            <a:r>
+              <a:rPr lang="it-IT"/>
+              <a:t>Terzo livello</a:t>
+            </a:r>
+          </a:p>
+          <a:p>
+            <a:pPr lvl="3"/>
+            <a:r>
+              <a:rPr lang="it-IT"/>
+              <a:t>Quarto livello</a:t>
+            </a:r>
+          </a:p>
+          <a:p>
+            <a:pPr lvl="4"/>
+            <a:r>
+              <a:rPr lang="it-IT"/>
+              <a:t>Quinto livello</a:t>
+            </a:r>
+          </a:p>
+        </p:txBody>
+      </p:sp>
+      <p:sp>
+        <p:nvSpPr>
+          <p:cNvPr id="4" name="Segnaposto data 3">
+            <a:extLst>
+              <a:ext uri="{FF2B5EF4-FFF2-40B4-BE49-F238E27FC236}">
+                <a16:creationId xmlns:a16="http://schemas.microsoft.com/office/drawing/2014/main" id="{D15D6061-DA22-23DE-F76F-0BF6D743E121}"/>
+              </a:ext>
+            </a:extLst>
+          </p:cNvPr>
+          <p:cNvSpPr>
+            <a:spLocks noGrp="1"/>
+          </p:cNvSpPr>
+          <p:nvPr>
+            <p:ph type="dt" sz="half" idx="10"/>
+          </p:nvPr>
+        </p:nvSpPr>
+        <p:spPr/>
+        <p:txBody>
+          <a:bodyPr/>
+          <a:lstStyle/>
+          <a:p>
+            <a:pPr>
+              <a:defRPr/>
+            </a:pPr>
+            <a:fld id="{BCC18F51-09EC-435C-A3BA-64A766E099C0}" type="datetimeFigureOut">
+              <a:rPr lang="it-IT" smtClean="0"/>
+              <a:t>30/10/2025</a:t>
+            </a:fld>
+            <a:endParaRPr lang="it-IT"/>
+          </a:p>
+        </p:txBody>
+      </p:sp>
+      <p:sp>
+        <p:nvSpPr>
+          <p:cNvPr id="5" name="Segnaposto piè di pagina 4">
+            <a:extLst>
+              <a:ext uri="{FF2B5EF4-FFF2-40B4-BE49-F238E27FC236}">
+                <a16:creationId xmlns:a16="http://schemas.microsoft.com/office/drawing/2014/main" id="{50233555-A149-47AE-52EF-F62469CCBAC2}"/>
+              </a:ext>
+            </a:extLst>
+          </p:cNvPr>
+          <p:cNvSpPr>
+            <a:spLocks noGrp="1"/>
+          </p:cNvSpPr>
+          <p:nvPr>
+            <p:ph type="ftr" sz="quarter" idx="11"/>
+          </p:nvPr>
+        </p:nvSpPr>
+        <p:spPr/>
+        <p:txBody>
+          <a:bodyPr/>
+          <a:lstStyle/>
+          <a:p>
+            <a:pPr>
+              <a:defRPr/>
+            </a:pPr>
+            <a:endParaRPr lang="it-IT"/>
+          </a:p>
+        </p:txBody>
+      </p:sp>
+      <p:sp>
+        <p:nvSpPr>
+          <p:cNvPr id="6" name="Segnaposto numero diapositiva 5">
+            <a:extLst>
+              <a:ext uri="{FF2B5EF4-FFF2-40B4-BE49-F238E27FC236}">
+                <a16:creationId xmlns:a16="http://schemas.microsoft.com/office/drawing/2014/main" id="{96C10690-56B1-5EFF-C49B-7E1D1BFB4940}"/>
+              </a:ext>
+            </a:extLst>
+          </p:cNvPr>
+          <p:cNvSpPr>
+            <a:spLocks noGrp="1"/>
+          </p:cNvSpPr>
+          <p:nvPr>
+            <p:ph type="sldNum" sz="quarter" idx="12"/>
+          </p:nvPr>
+        </p:nvSpPr>
+        <p:spPr/>
+        <p:txBody>
+          <a:bodyPr/>
+          <a:lstStyle/>
+          <a:p>
+            <a:pPr>
+              <a:defRPr/>
+            </a:pPr>
+            <a:fld id="{08395586-F03A-48D1-94DF-16B239DF4FB5}" type="slidenum">
+              <a:rPr lang="it-IT" smtClean="0"/>
+              <a:t>‹N›</a:t>
+            </a:fld>
+            <a:endParaRPr lang="it-IT"/>
+          </a:p>
+        </p:txBody>
+      </p:sp>
+    </p:spTree>
+    <p:extLst>
+      <p:ext uri="{BB962C8B-B14F-4D97-AF65-F5344CB8AC3E}">
+        <p14:creationId xmlns:p14="http://schemas.microsoft.com/office/powerpoint/2010/main" val="4116172078"/>
+      </p:ext>
+    </p:extLst>
+  </p:cSld>
+  <p:clrMapOvr>
+    <a:masterClrMapping/>
+  </p:clrMapOvr>
+</p:sldLayout>
+</file>
+
+<file path=ppt/slideLayouts/slideLayout12.xml><?xml version="1.0" encoding="utf-8"?>
+<p:sldLayout xmlns:a="http://schemas.openxmlformats.org/drawingml/2006/main" xmlns:r="http://schemas.openxmlformats.org/officeDocument/2006/relationships" xmlns:p="http://schemas.openxmlformats.org/presentationml/2006/main" showMasterPhAnim="0" type="title" preserve="1" userDrawn="1">
+  <p:cSld name="1_Diapositiva titolo">
     <p:spTree>
       <p:nvGrpSpPr>
         <p:cNvPr id="1" name=""/>
@@ -2652,18 +3105,27 @@
       </p:grpSpPr>
       <p:sp>
         <p:nvSpPr>
-          <p:cNvPr id="2055484018" name="Titolo 1"/>
-          <p:cNvSpPr>
-            <a:spLocks noGrp="1"/>
-          </p:cNvSpPr>
-          <p:nvPr>
-            <p:ph type="title"/>
-          </p:nvPr>
-        </p:nvSpPr>
-        <p:spPr bwMode="auto"/>
-        <p:txBody>
-          <a:bodyPr/>
-          <a:lstStyle/>
+          <p:cNvPr id="1495173846" name="Titolo 1"/>
+          <p:cNvSpPr>
+            <a:spLocks noGrp="1"/>
+          </p:cNvSpPr>
+          <p:nvPr>
+            <p:ph type="ctrTitle"/>
+          </p:nvPr>
+        </p:nvSpPr>
+        <p:spPr bwMode="auto">
+          <a:xfrm>
+            <a:off x="1524000" y="1122363"/>
+            <a:ext cx="9144000" cy="2387600"/>
+          </a:xfrm>
+        </p:spPr>
+        <p:txBody>
+          <a:bodyPr anchor="b"/>
+          <a:lstStyle>
+            <a:lvl1pPr algn="ctr">
+              <a:defRPr sz="6000"/>
+            </a:lvl1pPr>
+          </a:lstStyle>
           <a:p>
             <a:pPr>
               <a:defRPr/>
@@ -2677,72 +3139,74 @@
       </p:sp>
       <p:sp>
         <p:nvSpPr>
-          <p:cNvPr id="1867211462" name="Segnaposto testo verticale 2"/>
-          <p:cNvSpPr>
-            <a:spLocks noGrp="1"/>
-          </p:cNvSpPr>
-          <p:nvPr>
-            <p:ph type="body" orient="vert" idx="1"/>
-          </p:nvPr>
-        </p:nvSpPr>
-        <p:spPr bwMode="auto"/>
-        <p:txBody>
-          <a:bodyPr vert="eaVert"/>
-          <a:lstStyle/>
-          <a:p>
-            <a:pPr lvl="0">
+          <p:cNvPr id="2096900696" name="Sottotitolo 2"/>
+          <p:cNvSpPr>
+            <a:spLocks noGrp="1"/>
+          </p:cNvSpPr>
+          <p:nvPr>
+            <p:ph type="subTitle" idx="1"/>
+          </p:nvPr>
+        </p:nvSpPr>
+        <p:spPr bwMode="auto">
+          <a:xfrm>
+            <a:off x="1524000" y="3602038"/>
+            <a:ext cx="9144000" cy="1655762"/>
+          </a:xfrm>
+        </p:spPr>
+        <p:txBody>
+          <a:bodyPr/>
+          <a:lstStyle>
+            <a:lvl1pPr marL="0" indent="0" algn="ctr">
+              <a:buNone/>
+              <a:defRPr sz="2400"/>
+            </a:lvl1pPr>
+            <a:lvl2pPr marL="457200" indent="0" algn="ctr">
+              <a:buNone/>
+              <a:defRPr sz="2000"/>
+            </a:lvl2pPr>
+            <a:lvl3pPr marL="914400" indent="0" algn="ctr">
+              <a:buNone/>
+              <a:defRPr sz="1800"/>
+            </a:lvl3pPr>
+            <a:lvl4pPr marL="1371600" indent="0" algn="ctr">
+              <a:buNone/>
+              <a:defRPr sz="1600"/>
+            </a:lvl4pPr>
+            <a:lvl5pPr marL="1828800" indent="0" algn="ctr">
+              <a:buNone/>
+              <a:defRPr sz="1600"/>
+            </a:lvl5pPr>
+            <a:lvl6pPr marL="2286000" indent="0" algn="ctr">
+              <a:buNone/>
+              <a:defRPr sz="1600"/>
+            </a:lvl6pPr>
+            <a:lvl7pPr marL="2743200" indent="0" algn="ctr">
+              <a:buNone/>
+              <a:defRPr sz="1600"/>
+            </a:lvl7pPr>
+            <a:lvl8pPr marL="3200400" indent="0" algn="ctr">
+              <a:buNone/>
+              <a:defRPr sz="1600"/>
+            </a:lvl8pPr>
+            <a:lvl9pPr marL="3657600" indent="0" algn="ctr">
+              <a:buNone/>
+              <a:defRPr sz="1600"/>
+            </a:lvl9pPr>
+          </a:lstStyle>
+          <a:p>
+            <a:pPr>
               <a:defRPr/>
             </a:pPr>
             <a:r>
               <a:rPr lang="it-IT"/>
-              <a:t>Fare clic per modificare stili del testo dello schema</a:t>
-            </a:r>
-            <a:endParaRPr/>
-          </a:p>
-          <a:p>
-            <a:pPr lvl="1">
-              <a:defRPr/>
-            </a:pPr>
-            <a:r>
-              <a:rPr lang="it-IT"/>
-              <a:t>Secondo livello</a:t>
-            </a:r>
-            <a:endParaRPr/>
-          </a:p>
-          <a:p>
-            <a:pPr lvl="2">
-              <a:defRPr/>
-            </a:pPr>
-            <a:r>
-              <a:rPr lang="it-IT"/>
-              <a:t>Terzo livello</a:t>
-            </a:r>
-            <a:endParaRPr/>
-          </a:p>
-          <a:p>
-            <a:pPr lvl="3">
-              <a:defRPr/>
-            </a:pPr>
-            <a:r>
-              <a:rPr lang="it-IT"/>
-              <a:t>Quarto livello</a:t>
-            </a:r>
-            <a:endParaRPr/>
-          </a:p>
-          <a:p>
-            <a:pPr lvl="4">
-              <a:defRPr/>
-            </a:pPr>
-            <a:r>
-              <a:rPr lang="it-IT"/>
-              <a:t>Quinto livello</a:t>
-            </a:r>
-          </a:p>
-        </p:txBody>
-      </p:sp>
-      <p:sp>
-        <p:nvSpPr>
-          <p:cNvPr id="429115142" name="Segnaposto data 3"/>
+              <a:t>Fare clic per modificare lo stile del sottotitolo dello schema</a:t>
+            </a:r>
+          </a:p>
+        </p:txBody>
+      </p:sp>
+      <p:sp>
+        <p:nvSpPr>
+          <p:cNvPr id="2098076908" name="Segnaposto data 3"/>
           <p:cNvSpPr>
             <a:spLocks noGrp="1"/>
           </p:cNvSpPr>
@@ -2760,7 +3224,7 @@
             </a:pPr>
             <a:fld id="{BCC18F51-09EC-435C-A3BA-64A766E099C0}" type="datetimeFigureOut">
               <a:rPr lang="it-IT"/>
-              <a:t>26/10/2025</a:t>
+              <a:t>30/10/2025</a:t>
             </a:fld>
             <a:endParaRPr lang="it-IT"/>
           </a:p>
@@ -2768,7 +3232,7 @@
       </p:sp>
       <p:sp>
         <p:nvSpPr>
-          <p:cNvPr id="1219216710" name="Segnaposto piè di pagina 4"/>
+          <p:cNvPr id="1451742043" name="Segnaposto piè di pagina 4"/>
           <p:cNvSpPr>
             <a:spLocks noGrp="1"/>
           </p:cNvSpPr>
@@ -2790,7 +3254,7 @@
       </p:sp>
       <p:sp>
         <p:nvSpPr>
-          <p:cNvPr id="2085903573" name="Segnaposto numero diapositiva 5"/>
+          <p:cNvPr id="378279587" name="Segnaposto numero diapositiva 5"/>
           <p:cNvSpPr>
             <a:spLocks noGrp="1"/>
           </p:cNvSpPr>
@@ -2822,9 +3286,9 @@
 </p:sldLayout>
 </file>
 
-<file path=ppt/slideLayouts/slideLayout11.xml><?xml version="1.0" encoding="utf-8"?>
-<p:sldLayout xmlns:a="http://schemas.openxmlformats.org/drawingml/2006/main" xmlns:r="http://schemas.openxmlformats.org/officeDocument/2006/relationships" xmlns:p="http://schemas.openxmlformats.org/presentationml/2006/main" showMasterPhAnim="0" type="vertTitleAndTx" preserve="1" userDrawn="1">
-  <p:cSld name="Titolo e testo verticale">
+<file path=ppt/slideLayouts/slideLayout13.xml><?xml version="1.0" encoding="utf-8"?>
+<p:sldLayout xmlns:a="http://schemas.openxmlformats.org/drawingml/2006/main" xmlns:r="http://schemas.openxmlformats.org/officeDocument/2006/relationships" xmlns:p="http://schemas.openxmlformats.org/presentationml/2006/main" showMasterPhAnim="0" type="obj" preserve="1" userDrawn="1">
+  <p:cSld name="1_Titolo e contenuto">
     <p:spTree>
       <p:nvGrpSpPr>
         <p:cNvPr id="1" name=""/>
@@ -2841,22 +3305,17 @@
       </p:grpSpPr>
       <p:sp>
         <p:nvSpPr>
-          <p:cNvPr id="1744356999" name="Titolo verticale 1"/>
-          <p:cNvSpPr>
-            <a:spLocks noGrp="1"/>
-          </p:cNvSpPr>
-          <p:nvPr>
-            <p:ph type="title" orient="vert"/>
-          </p:nvPr>
-        </p:nvSpPr>
-        <p:spPr bwMode="auto">
-          <a:xfrm>
-            <a:off x="8724900" y="365125"/>
-            <a:ext cx="2628900" cy="5811838"/>
-          </a:xfrm>
-        </p:spPr>
-        <p:txBody>
-          <a:bodyPr vert="eaVert"/>
+          <p:cNvPr id="571728749" name="Titolo 1"/>
+          <p:cNvSpPr>
+            <a:spLocks noGrp="1"/>
+          </p:cNvSpPr>
+          <p:nvPr>
+            <p:ph type="title"/>
+          </p:nvPr>
+        </p:nvSpPr>
+        <p:spPr bwMode="auto"/>
+        <p:txBody>
+          <a:bodyPr/>
           <a:lstStyle/>
           <a:p>
             <a:pPr>
@@ -2871,22 +3330,17 @@
       </p:sp>
       <p:sp>
         <p:nvSpPr>
-          <p:cNvPr id="1437053011" name="Segnaposto testo verticale 2"/>
-          <p:cNvSpPr>
-            <a:spLocks noGrp="1"/>
-          </p:cNvSpPr>
-          <p:nvPr>
-            <p:ph type="body" orient="vert" idx="1"/>
-          </p:nvPr>
-        </p:nvSpPr>
-        <p:spPr bwMode="auto">
-          <a:xfrm>
-            <a:off x="838200" y="365125"/>
-            <a:ext cx="7734300" cy="5811838"/>
-          </a:xfrm>
-        </p:spPr>
-        <p:txBody>
-          <a:bodyPr vert="eaVert"/>
+          <p:cNvPr id="473187805" name="Segnaposto contenuto 2"/>
+          <p:cNvSpPr>
+            <a:spLocks noGrp="1"/>
+          </p:cNvSpPr>
+          <p:nvPr>
+            <p:ph idx="1"/>
+          </p:nvPr>
+        </p:nvSpPr>
+        <p:spPr bwMode="auto"/>
+        <p:txBody>
+          <a:bodyPr/>
           <a:lstStyle/>
           <a:p>
             <a:pPr lvl="0">
@@ -2941,7 +3395,7 @@
       </p:sp>
       <p:sp>
         <p:nvSpPr>
-          <p:cNvPr id="729347285" name="Segnaposto data 3"/>
+          <p:cNvPr id="1042055707" name="Segnaposto data 3"/>
           <p:cNvSpPr>
             <a:spLocks noGrp="1"/>
           </p:cNvSpPr>
@@ -2959,7 +3413,7 @@
             </a:pPr>
             <a:fld id="{BCC18F51-09EC-435C-A3BA-64A766E099C0}" type="datetimeFigureOut">
               <a:rPr lang="it-IT"/>
-              <a:t>26/10/2025</a:t>
+              <a:t>30/10/2025</a:t>
             </a:fld>
             <a:endParaRPr lang="it-IT"/>
           </a:p>
@@ -2967,7 +3421,7 @@
       </p:sp>
       <p:sp>
         <p:nvSpPr>
-          <p:cNvPr id="1905350434" name="Segnaposto piè di pagina 4"/>
+          <p:cNvPr id="636313684" name="Segnaposto piè di pagina 4"/>
           <p:cNvSpPr>
             <a:spLocks noGrp="1"/>
           </p:cNvSpPr>
@@ -2989,7 +3443,7 @@
       </p:sp>
       <p:sp>
         <p:nvSpPr>
-          <p:cNvPr id="576792246" name="Segnaposto numero diapositiva 5"/>
+          <p:cNvPr id="1113051459" name="Segnaposto numero diapositiva 5"/>
           <p:cNvSpPr>
             <a:spLocks noGrp="1"/>
           </p:cNvSpPr>
@@ -3021,198 +3475,9 @@
 </p:sldLayout>
 </file>
 
-<file path=ppt/slideLayouts/slideLayout2.xml><?xml version="1.0" encoding="utf-8"?>
-<p:sldLayout xmlns:a="http://schemas.openxmlformats.org/drawingml/2006/main" xmlns:r="http://schemas.openxmlformats.org/officeDocument/2006/relationships" xmlns:p="http://schemas.openxmlformats.org/presentationml/2006/main" showMasterPhAnim="0" type="obj" preserve="1" userDrawn="1">
-  <p:cSld name="Titolo e contenuto">
-    <p:spTree>
-      <p:nvGrpSpPr>
-        <p:cNvPr id="1" name=""/>
-        <p:cNvGrpSpPr/>
-        <p:nvPr/>
-      </p:nvGrpSpPr>
-      <p:grpSpPr bwMode="auto">
-        <a:xfrm>
-          <a:off x="0" y="0"/>
-          <a:ext cx="0" cy="0"/>
-          <a:chOff x="0" y="0"/>
-          <a:chExt cx="0" cy="0"/>
-        </a:xfrm>
-      </p:grpSpPr>
-      <p:sp>
-        <p:nvSpPr>
-          <p:cNvPr id="571728749" name="Titolo 1"/>
-          <p:cNvSpPr>
-            <a:spLocks noGrp="1"/>
-          </p:cNvSpPr>
-          <p:nvPr>
-            <p:ph type="title"/>
-          </p:nvPr>
-        </p:nvSpPr>
-        <p:spPr bwMode="auto"/>
-        <p:txBody>
-          <a:bodyPr/>
-          <a:lstStyle/>
-          <a:p>
-            <a:pPr>
-              <a:defRPr/>
-            </a:pPr>
-            <a:r>
-              <a:rPr lang="it-IT"/>
-              <a:t>Fare clic per modificare lo stile del titolo</a:t>
-            </a:r>
-          </a:p>
-        </p:txBody>
-      </p:sp>
-      <p:sp>
-        <p:nvSpPr>
-          <p:cNvPr id="473187805" name="Segnaposto contenuto 2"/>
-          <p:cNvSpPr>
-            <a:spLocks noGrp="1"/>
-          </p:cNvSpPr>
-          <p:nvPr>
-            <p:ph idx="1"/>
-          </p:nvPr>
-        </p:nvSpPr>
-        <p:spPr bwMode="auto"/>
-        <p:txBody>
-          <a:bodyPr/>
-          <a:lstStyle/>
-          <a:p>
-            <a:pPr lvl="0">
-              <a:defRPr/>
-            </a:pPr>
-            <a:r>
-              <a:rPr lang="it-IT"/>
-              <a:t>Fare clic per modificare stili del testo dello schema</a:t>
-            </a:r>
-            <a:endParaRPr/>
-          </a:p>
-          <a:p>
-            <a:pPr lvl="1">
-              <a:defRPr/>
-            </a:pPr>
-            <a:r>
-              <a:rPr lang="it-IT"/>
-              <a:t>Secondo livello</a:t>
-            </a:r>
-            <a:endParaRPr/>
-          </a:p>
-          <a:p>
-            <a:pPr lvl="2">
-              <a:defRPr/>
-            </a:pPr>
-            <a:r>
-              <a:rPr lang="it-IT"/>
-              <a:t>Terzo livello</a:t>
-            </a:r>
-            <a:endParaRPr/>
-          </a:p>
-          <a:p>
-            <a:pPr lvl="3">
-              <a:defRPr/>
-            </a:pPr>
-            <a:r>
-              <a:rPr lang="it-IT"/>
-              <a:t>Quarto livello</a:t>
-            </a:r>
-            <a:endParaRPr/>
-          </a:p>
-          <a:p>
-            <a:pPr lvl="4">
-              <a:defRPr/>
-            </a:pPr>
-            <a:r>
-              <a:rPr lang="it-IT"/>
-              <a:t>Quinto livello</a:t>
-            </a:r>
-          </a:p>
-        </p:txBody>
-      </p:sp>
-      <p:sp>
-        <p:nvSpPr>
-          <p:cNvPr id="1042055707" name="Segnaposto data 3"/>
-          <p:cNvSpPr>
-            <a:spLocks noGrp="1"/>
-          </p:cNvSpPr>
-          <p:nvPr>
-            <p:ph type="dt" sz="half" idx="10"/>
-          </p:nvPr>
-        </p:nvSpPr>
-        <p:spPr bwMode="auto"/>
-        <p:txBody>
-          <a:bodyPr/>
-          <a:lstStyle/>
-          <a:p>
-            <a:pPr>
-              <a:defRPr/>
-            </a:pPr>
-            <a:fld id="{BCC18F51-09EC-435C-A3BA-64A766E099C0}" type="datetimeFigureOut">
-              <a:rPr lang="it-IT"/>
-              <a:t>26/10/2025</a:t>
-            </a:fld>
-            <a:endParaRPr lang="it-IT"/>
-          </a:p>
-        </p:txBody>
-      </p:sp>
-      <p:sp>
-        <p:nvSpPr>
-          <p:cNvPr id="636313684" name="Segnaposto piè di pagina 4"/>
-          <p:cNvSpPr>
-            <a:spLocks noGrp="1"/>
-          </p:cNvSpPr>
-          <p:nvPr>
-            <p:ph type="ftr" sz="quarter" idx="11"/>
-          </p:nvPr>
-        </p:nvSpPr>
-        <p:spPr bwMode="auto"/>
-        <p:txBody>
-          <a:bodyPr/>
-          <a:lstStyle/>
-          <a:p>
-            <a:pPr>
-              <a:defRPr/>
-            </a:pPr>
-            <a:endParaRPr lang="it-IT"/>
-          </a:p>
-        </p:txBody>
-      </p:sp>
-      <p:sp>
-        <p:nvSpPr>
-          <p:cNvPr id="1113051459" name="Segnaposto numero diapositiva 5"/>
-          <p:cNvSpPr>
-            <a:spLocks noGrp="1"/>
-          </p:cNvSpPr>
-          <p:nvPr>
-            <p:ph type="sldNum" sz="quarter" idx="12"/>
-          </p:nvPr>
-        </p:nvSpPr>
-        <p:spPr bwMode="auto"/>
-        <p:txBody>
-          <a:bodyPr/>
-          <a:lstStyle/>
-          <a:p>
-            <a:pPr>
-              <a:defRPr/>
-            </a:pPr>
-            <a:fld id="{08395586-F03A-48D1-94DF-16B239DF4FB5}" type="slidenum">
-              <a:rPr lang="it-IT"/>
-              <a:t>‹N›</a:t>
-            </a:fld>
-            <a:endParaRPr lang="it-IT"/>
-          </a:p>
-        </p:txBody>
-      </p:sp>
-    </p:spTree>
-  </p:cSld>
-  <p:clrMapOvr>
-    <a:masterClrMapping/>
-  </p:clrMapOvr>
-</p:sldLayout>
-</file>
-
-<file path=ppt/slideLayouts/slideLayout3.xml><?xml version="1.0" encoding="utf-8"?>
+<file path=ppt/slideLayouts/slideLayout14.xml><?xml version="1.0" encoding="utf-8"?>
 <p:sldLayout xmlns:a="http://schemas.openxmlformats.org/drawingml/2006/main" xmlns:r="http://schemas.openxmlformats.org/officeDocument/2006/relationships" xmlns:p="http://schemas.openxmlformats.org/presentationml/2006/main" showMasterPhAnim="0" type="secHead" preserve="1" userDrawn="1">
-  <p:cSld name="Intestazione sezione">
+  <p:cSld name="1_Intestazione sezione">
     <p:spTree>
       <p:nvGrpSpPr>
         <p:cNvPr id="1" name=""/>
@@ -3403,7 +3668,7 @@
             </a:pPr>
             <a:fld id="{BCC18F51-09EC-435C-A3BA-64A766E099C0}" type="datetimeFigureOut">
               <a:rPr lang="it-IT"/>
-              <a:t>26/10/2025</a:t>
+              <a:t>30/10/2025</a:t>
             </a:fld>
             <a:endParaRPr lang="it-IT"/>
           </a:p>
@@ -3465,9 +3730,9 @@
 </p:sldLayout>
 </file>
 
-<file path=ppt/slideLayouts/slideLayout4.xml><?xml version="1.0" encoding="utf-8"?>
+<file path=ppt/slideLayouts/slideLayout15.xml><?xml version="1.0" encoding="utf-8"?>
 <p:sldLayout xmlns:a="http://schemas.openxmlformats.org/drawingml/2006/main" xmlns:r="http://schemas.openxmlformats.org/officeDocument/2006/relationships" xmlns:p="http://schemas.openxmlformats.org/presentationml/2006/main" showMasterPhAnim="0" type="twoObj" preserve="1" userDrawn="1">
-  <p:cSld name="Due contenuti">
+  <p:cSld name="1_Due contenuti">
     <p:spTree>
       <p:nvGrpSpPr>
         <p:cNvPr id="1" name=""/>
@@ -3667,7 +3932,7 @@
             </a:pPr>
             <a:fld id="{BCC18F51-09EC-435C-A3BA-64A766E099C0}" type="datetimeFigureOut">
               <a:rPr lang="it-IT"/>
-              <a:t>26/10/2025</a:t>
+              <a:t>30/10/2025</a:t>
             </a:fld>
             <a:endParaRPr lang="it-IT"/>
           </a:p>
@@ -3729,9 +3994,9 @@
 </p:sldLayout>
 </file>
 
-<file path=ppt/slideLayouts/slideLayout5.xml><?xml version="1.0" encoding="utf-8"?>
+<file path=ppt/slideLayouts/slideLayout16.xml><?xml version="1.0" encoding="utf-8"?>
 <p:sldLayout xmlns:a="http://schemas.openxmlformats.org/drawingml/2006/main" xmlns:r="http://schemas.openxmlformats.org/officeDocument/2006/relationships" xmlns:p="http://schemas.openxmlformats.org/presentationml/2006/main" showMasterPhAnim="0" type="twoTxTwoObj" preserve="1" userDrawn="1">
-  <p:cSld name="Confronto">
+  <p:cSld name="1_Confronto">
     <p:spTree>
       <p:nvGrpSpPr>
         <p:cNvPr id="1" name=""/>
@@ -4072,7 +4337,7 @@
             </a:pPr>
             <a:fld id="{BCC18F51-09EC-435C-A3BA-64A766E099C0}" type="datetimeFigureOut">
               <a:rPr lang="it-IT"/>
-              <a:t>26/10/2025</a:t>
+              <a:t>30/10/2025</a:t>
             </a:fld>
             <a:endParaRPr lang="it-IT"/>
           </a:p>
@@ -4134,9 +4399,9 @@
 </p:sldLayout>
 </file>
 
-<file path=ppt/slideLayouts/slideLayout6.xml><?xml version="1.0" encoding="utf-8"?>
+<file path=ppt/slideLayouts/slideLayout17.xml><?xml version="1.0" encoding="utf-8"?>
 <p:sldLayout xmlns:a="http://schemas.openxmlformats.org/drawingml/2006/main" xmlns:r="http://schemas.openxmlformats.org/officeDocument/2006/relationships" xmlns:p="http://schemas.openxmlformats.org/presentationml/2006/main" showMasterPhAnim="0" type="titleOnly" preserve="1" userDrawn="1">
-  <p:cSld name="Solo titolo">
+  <p:cSld name="1_Solo titolo">
     <p:spTree>
       <p:nvGrpSpPr>
         <p:cNvPr id="1" name=""/>
@@ -4196,7 +4461,7 @@
             </a:pPr>
             <a:fld id="{BCC18F51-09EC-435C-A3BA-64A766E099C0}" type="datetimeFigureOut">
               <a:rPr lang="it-IT"/>
-              <a:t>26/10/2025</a:t>
+              <a:t>30/10/2025</a:t>
             </a:fld>
             <a:endParaRPr lang="it-IT"/>
           </a:p>
@@ -4258,9 +4523,9 @@
 </p:sldLayout>
 </file>
 
-<file path=ppt/slideLayouts/slideLayout7.xml><?xml version="1.0" encoding="utf-8"?>
+<file path=ppt/slideLayouts/slideLayout18.xml><?xml version="1.0" encoding="utf-8"?>
 <p:sldLayout xmlns:a="http://schemas.openxmlformats.org/drawingml/2006/main" xmlns:r="http://schemas.openxmlformats.org/officeDocument/2006/relationships" xmlns:p="http://schemas.openxmlformats.org/presentationml/2006/main" showMasterPhAnim="0" type="blank" preserve="1" userDrawn="1">
-  <p:cSld name="Vuota">
+  <p:cSld name="1_Vuota">
     <p:spTree>
       <p:nvGrpSpPr>
         <p:cNvPr id="1" name=""/>
@@ -4295,7 +4560,7 @@
             </a:pPr>
             <a:fld id="{BCC18F51-09EC-435C-A3BA-64A766E099C0}" type="datetimeFigureOut">
               <a:rPr lang="it-IT"/>
-              <a:t>26/10/2025</a:t>
+              <a:t>30/10/2025</a:t>
             </a:fld>
             <a:endParaRPr lang="it-IT"/>
           </a:p>
@@ -4357,9 +4622,9 @@
 </p:sldLayout>
 </file>
 
-<file path=ppt/slideLayouts/slideLayout8.xml><?xml version="1.0" encoding="utf-8"?>
+<file path=ppt/slideLayouts/slideLayout19.xml><?xml version="1.0" encoding="utf-8"?>
 <p:sldLayout xmlns:a="http://schemas.openxmlformats.org/drawingml/2006/main" xmlns:r="http://schemas.openxmlformats.org/officeDocument/2006/relationships" xmlns:p="http://schemas.openxmlformats.org/presentationml/2006/main" showMasterPhAnim="0" type="objTx" preserve="1" userDrawn="1">
-  <p:cSld name="Contenuto con didascalia">
+  <p:cSld name="1_Contenuto con didascalia">
     <p:spTree>
       <p:nvGrpSpPr>
         <p:cNvPr id="1" name=""/>
@@ -4594,7 +4859,7 @@
             </a:pPr>
             <a:fld id="{BCC18F51-09EC-435C-A3BA-64A766E099C0}" type="datetimeFigureOut">
               <a:rPr lang="it-IT"/>
-              <a:t>26/10/2025</a:t>
+              <a:t>30/10/2025</a:t>
             </a:fld>
             <a:endParaRPr lang="it-IT"/>
           </a:p>
@@ -4656,9 +4921,216 @@
 </p:sldLayout>
 </file>
 
-<file path=ppt/slideLayouts/slideLayout9.xml><?xml version="1.0" encoding="utf-8"?>
+<file path=ppt/slideLayouts/slideLayout2.xml><?xml version="1.0" encoding="utf-8"?>
+<p:sldLayout xmlns:a="http://schemas.openxmlformats.org/drawingml/2006/main" xmlns:r="http://schemas.openxmlformats.org/officeDocument/2006/relationships" xmlns:p="http://schemas.openxmlformats.org/presentationml/2006/main" type="obj" preserve="1">
+  <p:cSld name="Titolo e contenuto">
+    <p:spTree>
+      <p:nvGrpSpPr>
+        <p:cNvPr id="1" name=""/>
+        <p:cNvGrpSpPr/>
+        <p:nvPr/>
+      </p:nvGrpSpPr>
+      <p:grpSpPr>
+        <a:xfrm>
+          <a:off x="0" y="0"/>
+          <a:ext cx="0" cy="0"/>
+          <a:chOff x="0" y="0"/>
+          <a:chExt cx="0" cy="0"/>
+        </a:xfrm>
+      </p:grpSpPr>
+      <p:sp>
+        <p:nvSpPr>
+          <p:cNvPr id="2" name="Titolo 1">
+            <a:extLst>
+              <a:ext uri="{FF2B5EF4-FFF2-40B4-BE49-F238E27FC236}">
+                <a16:creationId xmlns:a16="http://schemas.microsoft.com/office/drawing/2014/main" id="{FCF5DDC6-06AA-3B97-D925-E3EA3EE6C60C}"/>
+              </a:ext>
+            </a:extLst>
+          </p:cNvPr>
+          <p:cNvSpPr>
+            <a:spLocks noGrp="1"/>
+          </p:cNvSpPr>
+          <p:nvPr>
+            <p:ph type="title"/>
+          </p:nvPr>
+        </p:nvSpPr>
+        <p:spPr/>
+        <p:txBody>
+          <a:bodyPr/>
+          <a:lstStyle/>
+          <a:p>
+            <a:r>
+              <a:rPr lang="it-IT"/>
+              <a:t>Fare clic per modificare lo stile del titolo dello schema</a:t>
+            </a:r>
+          </a:p>
+        </p:txBody>
+      </p:sp>
+      <p:sp>
+        <p:nvSpPr>
+          <p:cNvPr id="3" name="Segnaposto contenuto 2">
+            <a:extLst>
+              <a:ext uri="{FF2B5EF4-FFF2-40B4-BE49-F238E27FC236}">
+                <a16:creationId xmlns:a16="http://schemas.microsoft.com/office/drawing/2014/main" id="{E046DDBC-1972-AEF4-295A-122EB9B3B58A}"/>
+              </a:ext>
+            </a:extLst>
+          </p:cNvPr>
+          <p:cNvSpPr>
+            <a:spLocks noGrp="1"/>
+          </p:cNvSpPr>
+          <p:nvPr>
+            <p:ph idx="1"/>
+          </p:nvPr>
+        </p:nvSpPr>
+        <p:spPr/>
+        <p:txBody>
+          <a:bodyPr/>
+          <a:lstStyle/>
+          <a:p>
+            <a:pPr lvl="0"/>
+            <a:r>
+              <a:rPr lang="it-IT"/>
+              <a:t>Fare clic per modificare gli stili del testo dello schema</a:t>
+            </a:r>
+          </a:p>
+          <a:p>
+            <a:pPr lvl="1"/>
+            <a:r>
+              <a:rPr lang="it-IT"/>
+              <a:t>Secondo livello</a:t>
+            </a:r>
+          </a:p>
+          <a:p>
+            <a:pPr lvl="2"/>
+            <a:r>
+              <a:rPr lang="it-IT"/>
+              <a:t>Terzo livello</a:t>
+            </a:r>
+          </a:p>
+          <a:p>
+            <a:pPr lvl="3"/>
+            <a:r>
+              <a:rPr lang="it-IT"/>
+              <a:t>Quarto livello</a:t>
+            </a:r>
+          </a:p>
+          <a:p>
+            <a:pPr lvl="4"/>
+            <a:r>
+              <a:rPr lang="it-IT"/>
+              <a:t>Quinto livello</a:t>
+            </a:r>
+          </a:p>
+        </p:txBody>
+      </p:sp>
+      <p:sp>
+        <p:nvSpPr>
+          <p:cNvPr id="4" name="Segnaposto data 3">
+            <a:extLst>
+              <a:ext uri="{FF2B5EF4-FFF2-40B4-BE49-F238E27FC236}">
+                <a16:creationId xmlns:a16="http://schemas.microsoft.com/office/drawing/2014/main" id="{A32B0191-A772-5EE0-E2B7-42B0E2E42D40}"/>
+              </a:ext>
+            </a:extLst>
+          </p:cNvPr>
+          <p:cNvSpPr>
+            <a:spLocks noGrp="1"/>
+          </p:cNvSpPr>
+          <p:nvPr>
+            <p:ph type="dt" sz="half" idx="10"/>
+          </p:nvPr>
+        </p:nvSpPr>
+        <p:spPr/>
+        <p:txBody>
+          <a:bodyPr/>
+          <a:lstStyle/>
+          <a:p>
+            <a:pPr>
+              <a:defRPr/>
+            </a:pPr>
+            <a:fld id="{BCC18F51-09EC-435C-A3BA-64A766E099C0}" type="datetimeFigureOut">
+              <a:rPr lang="it-IT" smtClean="0"/>
+              <a:t>30/10/2025</a:t>
+            </a:fld>
+            <a:endParaRPr lang="it-IT"/>
+          </a:p>
+        </p:txBody>
+      </p:sp>
+      <p:sp>
+        <p:nvSpPr>
+          <p:cNvPr id="5" name="Segnaposto piè di pagina 4">
+            <a:extLst>
+              <a:ext uri="{FF2B5EF4-FFF2-40B4-BE49-F238E27FC236}">
+                <a16:creationId xmlns:a16="http://schemas.microsoft.com/office/drawing/2014/main" id="{D8F59717-C4D9-4202-F038-570C8FF44D9D}"/>
+              </a:ext>
+            </a:extLst>
+          </p:cNvPr>
+          <p:cNvSpPr>
+            <a:spLocks noGrp="1"/>
+          </p:cNvSpPr>
+          <p:nvPr>
+            <p:ph type="ftr" sz="quarter" idx="11"/>
+          </p:nvPr>
+        </p:nvSpPr>
+        <p:spPr/>
+        <p:txBody>
+          <a:bodyPr/>
+          <a:lstStyle/>
+          <a:p>
+            <a:pPr>
+              <a:defRPr/>
+            </a:pPr>
+            <a:endParaRPr lang="it-IT"/>
+          </a:p>
+        </p:txBody>
+      </p:sp>
+      <p:sp>
+        <p:nvSpPr>
+          <p:cNvPr id="6" name="Segnaposto numero diapositiva 5">
+            <a:extLst>
+              <a:ext uri="{FF2B5EF4-FFF2-40B4-BE49-F238E27FC236}">
+                <a16:creationId xmlns:a16="http://schemas.microsoft.com/office/drawing/2014/main" id="{F40CFCEC-A352-F0BD-6916-8892473DD3BC}"/>
+              </a:ext>
+            </a:extLst>
+          </p:cNvPr>
+          <p:cNvSpPr>
+            <a:spLocks noGrp="1"/>
+          </p:cNvSpPr>
+          <p:nvPr>
+            <p:ph type="sldNum" sz="quarter" idx="12"/>
+          </p:nvPr>
+        </p:nvSpPr>
+        <p:spPr/>
+        <p:txBody>
+          <a:bodyPr/>
+          <a:lstStyle/>
+          <a:p>
+            <a:pPr>
+              <a:defRPr/>
+            </a:pPr>
+            <a:fld id="{08395586-F03A-48D1-94DF-16B239DF4FB5}" type="slidenum">
+              <a:rPr lang="it-IT" smtClean="0"/>
+              <a:t>‹N›</a:t>
+            </a:fld>
+            <a:endParaRPr lang="it-IT"/>
+          </a:p>
+        </p:txBody>
+      </p:sp>
+    </p:spTree>
+    <p:extLst>
+      <p:ext uri="{BB962C8B-B14F-4D97-AF65-F5344CB8AC3E}">
+        <p14:creationId xmlns:p14="http://schemas.microsoft.com/office/powerpoint/2010/main" val="2298701365"/>
+      </p:ext>
+    </p:extLst>
+  </p:cSld>
+  <p:clrMapOvr>
+    <a:masterClrMapping/>
+  </p:clrMapOvr>
+</p:sldLayout>
+</file>
+
+<file path=ppt/slideLayouts/slideLayout20.xml><?xml version="1.0" encoding="utf-8"?>
 <p:sldLayout xmlns:a="http://schemas.openxmlformats.org/drawingml/2006/main" xmlns:r="http://schemas.openxmlformats.org/officeDocument/2006/relationships" xmlns:p="http://schemas.openxmlformats.org/presentationml/2006/main" showMasterPhAnim="0" type="picTx" preserve="1" userDrawn="1">
-  <p:cSld name="Immagine con didascalia">
+  <p:cSld name="1_Immagine con didascalia">
     <p:spTree>
       <p:nvGrpSpPr>
         <p:cNvPr id="1" name=""/>
@@ -4862,7 +5334,7 @@
             </a:pPr>
             <a:fld id="{BCC18F51-09EC-435C-A3BA-64A766E099C0}" type="datetimeFigureOut">
               <a:rPr lang="it-IT"/>
-              <a:t>26/10/2025</a:t>
+              <a:t>30/10/2025</a:t>
             </a:fld>
             <a:endParaRPr lang="it-IT"/>
           </a:p>
@@ -4924,38 +5396,9 @@
 </p:sldLayout>
 </file>
 
-<file path=ppt/slideMasters/slideMaster1.xml><?xml version="1.0" encoding="utf-8"?>
-<p:sldMaster xmlns:a="http://schemas.openxmlformats.org/drawingml/2006/main" xmlns:r="http://schemas.openxmlformats.org/officeDocument/2006/relationships" xmlns:p="http://schemas.openxmlformats.org/presentationml/2006/main">
-  <p:cSld>
-    <p:bg>
-      <p:bgPr>
-        <a:gradFill flip="none" rotWithShape="1">
-          <a:gsLst>
-            <a:gs pos="0">
-              <a:schemeClr val="accent1">
-                <a:lumMod val="20000"/>
-                <a:lumOff val="80000"/>
-              </a:schemeClr>
-            </a:gs>
-            <a:gs pos="23000">
-              <a:schemeClr val="bg1"/>
-            </a:gs>
-            <a:gs pos="88000">
-              <a:schemeClr val="bg1"/>
-            </a:gs>
-            <a:gs pos="100000">
-              <a:schemeClr val="accent5">
-                <a:lumMod val="40000"/>
-                <a:lumOff val="60000"/>
-              </a:schemeClr>
-            </a:gs>
-          </a:gsLst>
-          <a:lin ang="10800000" scaled="1"/>
-          <a:tileRect/>
-        </a:gradFill>
-        <a:effectLst/>
-      </p:bgPr>
-    </p:bg>
+<file path=ppt/slideLayouts/slideLayout21.xml><?xml version="1.0" encoding="utf-8"?>
+<p:sldLayout xmlns:a="http://schemas.openxmlformats.org/drawingml/2006/main" xmlns:r="http://schemas.openxmlformats.org/officeDocument/2006/relationships" xmlns:p="http://schemas.openxmlformats.org/presentationml/2006/main" showMasterPhAnim="0" type="vertTx" preserve="1" userDrawn="1">
+  <p:cSld name="2_Titolo e testo verticale">
     <p:spTree>
       <p:nvGrpSpPr>
         <p:cNvPr id="1" name=""/>
@@ -4972,7 +5415,7 @@
       </p:grpSpPr>
       <p:sp>
         <p:nvSpPr>
-          <p:cNvPr id="397120540" name="Segnaposto titolo 1"/>
+          <p:cNvPr id="2055484018" name="Titolo 1"/>
           <p:cNvSpPr>
             <a:spLocks noGrp="1"/>
           </p:cNvSpPr>
@@ -4980,7 +5423,2289 @@
             <p:ph type="title"/>
           </p:nvPr>
         </p:nvSpPr>
+        <p:spPr bwMode="auto"/>
+        <p:txBody>
+          <a:bodyPr/>
+          <a:lstStyle/>
+          <a:p>
+            <a:pPr>
+              <a:defRPr/>
+            </a:pPr>
+            <a:r>
+              <a:rPr lang="it-IT"/>
+              <a:t>Fare clic per modificare lo stile del titolo</a:t>
+            </a:r>
+          </a:p>
+        </p:txBody>
+      </p:sp>
+      <p:sp>
+        <p:nvSpPr>
+          <p:cNvPr id="1867211462" name="Segnaposto testo verticale 2"/>
+          <p:cNvSpPr>
+            <a:spLocks noGrp="1"/>
+          </p:cNvSpPr>
+          <p:nvPr>
+            <p:ph type="body" orient="vert" idx="1"/>
+          </p:nvPr>
+        </p:nvSpPr>
+        <p:spPr bwMode="auto"/>
+        <p:txBody>
+          <a:bodyPr vert="eaVert"/>
+          <a:lstStyle/>
+          <a:p>
+            <a:pPr lvl="0">
+              <a:defRPr/>
+            </a:pPr>
+            <a:r>
+              <a:rPr lang="it-IT"/>
+              <a:t>Fare clic per modificare stili del testo dello schema</a:t>
+            </a:r>
+            <a:endParaRPr/>
+          </a:p>
+          <a:p>
+            <a:pPr lvl="1">
+              <a:defRPr/>
+            </a:pPr>
+            <a:r>
+              <a:rPr lang="it-IT"/>
+              <a:t>Secondo livello</a:t>
+            </a:r>
+            <a:endParaRPr/>
+          </a:p>
+          <a:p>
+            <a:pPr lvl="2">
+              <a:defRPr/>
+            </a:pPr>
+            <a:r>
+              <a:rPr lang="it-IT"/>
+              <a:t>Terzo livello</a:t>
+            </a:r>
+            <a:endParaRPr/>
+          </a:p>
+          <a:p>
+            <a:pPr lvl="3">
+              <a:defRPr/>
+            </a:pPr>
+            <a:r>
+              <a:rPr lang="it-IT"/>
+              <a:t>Quarto livello</a:t>
+            </a:r>
+            <a:endParaRPr/>
+          </a:p>
+          <a:p>
+            <a:pPr lvl="4">
+              <a:defRPr/>
+            </a:pPr>
+            <a:r>
+              <a:rPr lang="it-IT"/>
+              <a:t>Quinto livello</a:t>
+            </a:r>
+          </a:p>
+        </p:txBody>
+      </p:sp>
+      <p:sp>
+        <p:nvSpPr>
+          <p:cNvPr id="429115142" name="Segnaposto data 3"/>
+          <p:cNvSpPr>
+            <a:spLocks noGrp="1"/>
+          </p:cNvSpPr>
+          <p:nvPr>
+            <p:ph type="dt" sz="half" idx="10"/>
+          </p:nvPr>
+        </p:nvSpPr>
+        <p:spPr bwMode="auto"/>
+        <p:txBody>
+          <a:bodyPr/>
+          <a:lstStyle/>
+          <a:p>
+            <a:pPr>
+              <a:defRPr/>
+            </a:pPr>
+            <a:fld id="{BCC18F51-09EC-435C-A3BA-64A766E099C0}" type="datetimeFigureOut">
+              <a:rPr lang="it-IT"/>
+              <a:t>30/10/2025</a:t>
+            </a:fld>
+            <a:endParaRPr lang="it-IT"/>
+          </a:p>
+        </p:txBody>
+      </p:sp>
+      <p:sp>
+        <p:nvSpPr>
+          <p:cNvPr id="1219216710" name="Segnaposto piè di pagina 4"/>
+          <p:cNvSpPr>
+            <a:spLocks noGrp="1"/>
+          </p:cNvSpPr>
+          <p:nvPr>
+            <p:ph type="ftr" sz="quarter" idx="11"/>
+          </p:nvPr>
+        </p:nvSpPr>
+        <p:spPr bwMode="auto"/>
+        <p:txBody>
+          <a:bodyPr/>
+          <a:lstStyle/>
+          <a:p>
+            <a:pPr>
+              <a:defRPr/>
+            </a:pPr>
+            <a:endParaRPr lang="it-IT"/>
+          </a:p>
+        </p:txBody>
+      </p:sp>
+      <p:sp>
+        <p:nvSpPr>
+          <p:cNvPr id="2085903573" name="Segnaposto numero diapositiva 5"/>
+          <p:cNvSpPr>
+            <a:spLocks noGrp="1"/>
+          </p:cNvSpPr>
+          <p:nvPr>
+            <p:ph type="sldNum" sz="quarter" idx="12"/>
+          </p:nvPr>
+        </p:nvSpPr>
+        <p:spPr bwMode="auto"/>
+        <p:txBody>
+          <a:bodyPr/>
+          <a:lstStyle/>
+          <a:p>
+            <a:pPr>
+              <a:defRPr/>
+            </a:pPr>
+            <a:fld id="{08395586-F03A-48D1-94DF-16B239DF4FB5}" type="slidenum">
+              <a:rPr lang="it-IT"/>
+              <a:t>‹N›</a:t>
+            </a:fld>
+            <a:endParaRPr lang="it-IT"/>
+          </a:p>
+        </p:txBody>
+      </p:sp>
+    </p:spTree>
+  </p:cSld>
+  <p:clrMapOvr>
+    <a:masterClrMapping/>
+  </p:clrMapOvr>
+</p:sldLayout>
+</file>
+
+<file path=ppt/slideLayouts/slideLayout22.xml><?xml version="1.0" encoding="utf-8"?>
+<p:sldLayout xmlns:a="http://schemas.openxmlformats.org/drawingml/2006/main" xmlns:r="http://schemas.openxmlformats.org/officeDocument/2006/relationships" xmlns:p="http://schemas.openxmlformats.org/presentationml/2006/main" showMasterPhAnim="0" type="vertTitleAndTx" preserve="1" userDrawn="1">
+  <p:cSld name="3_Titolo e testo verticale">
+    <p:spTree>
+      <p:nvGrpSpPr>
+        <p:cNvPr id="1" name=""/>
+        <p:cNvGrpSpPr/>
+        <p:nvPr/>
+      </p:nvGrpSpPr>
+      <p:grpSpPr bwMode="auto">
+        <a:xfrm>
+          <a:off x="0" y="0"/>
+          <a:ext cx="0" cy="0"/>
+          <a:chOff x="0" y="0"/>
+          <a:chExt cx="0" cy="0"/>
+        </a:xfrm>
+      </p:grpSpPr>
+      <p:sp>
+        <p:nvSpPr>
+          <p:cNvPr id="1744356999" name="Titolo verticale 1"/>
+          <p:cNvSpPr>
+            <a:spLocks noGrp="1"/>
+          </p:cNvSpPr>
+          <p:nvPr>
+            <p:ph type="title" orient="vert"/>
+          </p:nvPr>
+        </p:nvSpPr>
         <p:spPr bwMode="auto">
+          <a:xfrm>
+            <a:off x="8724900" y="365125"/>
+            <a:ext cx="2628900" cy="5811838"/>
+          </a:xfrm>
+        </p:spPr>
+        <p:txBody>
+          <a:bodyPr vert="eaVert"/>
+          <a:lstStyle/>
+          <a:p>
+            <a:pPr>
+              <a:defRPr/>
+            </a:pPr>
+            <a:r>
+              <a:rPr lang="it-IT"/>
+              <a:t>Fare clic per modificare lo stile del titolo</a:t>
+            </a:r>
+          </a:p>
+        </p:txBody>
+      </p:sp>
+      <p:sp>
+        <p:nvSpPr>
+          <p:cNvPr id="1437053011" name="Segnaposto testo verticale 2"/>
+          <p:cNvSpPr>
+            <a:spLocks noGrp="1"/>
+          </p:cNvSpPr>
+          <p:nvPr>
+            <p:ph type="body" orient="vert" idx="1"/>
+          </p:nvPr>
+        </p:nvSpPr>
+        <p:spPr bwMode="auto">
+          <a:xfrm>
+            <a:off x="838200" y="365125"/>
+            <a:ext cx="7734300" cy="5811838"/>
+          </a:xfrm>
+        </p:spPr>
+        <p:txBody>
+          <a:bodyPr vert="eaVert"/>
+          <a:lstStyle/>
+          <a:p>
+            <a:pPr lvl="0">
+              <a:defRPr/>
+            </a:pPr>
+            <a:r>
+              <a:rPr lang="it-IT"/>
+              <a:t>Fare clic per modificare stili del testo dello schema</a:t>
+            </a:r>
+            <a:endParaRPr/>
+          </a:p>
+          <a:p>
+            <a:pPr lvl="1">
+              <a:defRPr/>
+            </a:pPr>
+            <a:r>
+              <a:rPr lang="it-IT"/>
+              <a:t>Secondo livello</a:t>
+            </a:r>
+            <a:endParaRPr/>
+          </a:p>
+          <a:p>
+            <a:pPr lvl="2">
+              <a:defRPr/>
+            </a:pPr>
+            <a:r>
+              <a:rPr lang="it-IT"/>
+              <a:t>Terzo livello</a:t>
+            </a:r>
+            <a:endParaRPr/>
+          </a:p>
+          <a:p>
+            <a:pPr lvl="3">
+              <a:defRPr/>
+            </a:pPr>
+            <a:r>
+              <a:rPr lang="it-IT"/>
+              <a:t>Quarto livello</a:t>
+            </a:r>
+            <a:endParaRPr/>
+          </a:p>
+          <a:p>
+            <a:pPr lvl="4">
+              <a:defRPr/>
+            </a:pPr>
+            <a:r>
+              <a:rPr lang="it-IT"/>
+              <a:t>Quinto livello</a:t>
+            </a:r>
+          </a:p>
+        </p:txBody>
+      </p:sp>
+      <p:sp>
+        <p:nvSpPr>
+          <p:cNvPr id="729347285" name="Segnaposto data 3"/>
+          <p:cNvSpPr>
+            <a:spLocks noGrp="1"/>
+          </p:cNvSpPr>
+          <p:nvPr>
+            <p:ph type="dt" sz="half" idx="10"/>
+          </p:nvPr>
+        </p:nvSpPr>
+        <p:spPr bwMode="auto"/>
+        <p:txBody>
+          <a:bodyPr/>
+          <a:lstStyle/>
+          <a:p>
+            <a:pPr>
+              <a:defRPr/>
+            </a:pPr>
+            <a:fld id="{BCC18F51-09EC-435C-A3BA-64A766E099C0}" type="datetimeFigureOut">
+              <a:rPr lang="it-IT"/>
+              <a:t>30/10/2025</a:t>
+            </a:fld>
+            <a:endParaRPr lang="it-IT"/>
+          </a:p>
+        </p:txBody>
+      </p:sp>
+      <p:sp>
+        <p:nvSpPr>
+          <p:cNvPr id="1905350434" name="Segnaposto piè di pagina 4"/>
+          <p:cNvSpPr>
+            <a:spLocks noGrp="1"/>
+          </p:cNvSpPr>
+          <p:nvPr>
+            <p:ph type="ftr" sz="quarter" idx="11"/>
+          </p:nvPr>
+        </p:nvSpPr>
+        <p:spPr bwMode="auto"/>
+        <p:txBody>
+          <a:bodyPr/>
+          <a:lstStyle/>
+          <a:p>
+            <a:pPr>
+              <a:defRPr/>
+            </a:pPr>
+            <a:endParaRPr lang="it-IT"/>
+          </a:p>
+        </p:txBody>
+      </p:sp>
+      <p:sp>
+        <p:nvSpPr>
+          <p:cNvPr id="576792246" name="Segnaposto numero diapositiva 5"/>
+          <p:cNvSpPr>
+            <a:spLocks noGrp="1"/>
+          </p:cNvSpPr>
+          <p:nvPr>
+            <p:ph type="sldNum" sz="quarter" idx="12"/>
+          </p:nvPr>
+        </p:nvSpPr>
+        <p:spPr bwMode="auto"/>
+        <p:txBody>
+          <a:bodyPr/>
+          <a:lstStyle/>
+          <a:p>
+            <a:pPr>
+              <a:defRPr/>
+            </a:pPr>
+            <a:fld id="{08395586-F03A-48D1-94DF-16B239DF4FB5}" type="slidenum">
+              <a:rPr lang="it-IT"/>
+              <a:t>‹N›</a:t>
+            </a:fld>
+            <a:endParaRPr lang="it-IT"/>
+          </a:p>
+        </p:txBody>
+      </p:sp>
+    </p:spTree>
+  </p:cSld>
+  <p:clrMapOvr>
+    <a:masterClrMapping/>
+  </p:clrMapOvr>
+</p:sldLayout>
+</file>
+
+<file path=ppt/slideLayouts/slideLayout3.xml><?xml version="1.0" encoding="utf-8"?>
+<p:sldLayout xmlns:a="http://schemas.openxmlformats.org/drawingml/2006/main" xmlns:r="http://schemas.openxmlformats.org/officeDocument/2006/relationships" xmlns:p="http://schemas.openxmlformats.org/presentationml/2006/main" type="secHead" preserve="1">
+  <p:cSld name="Intestazione sezione">
+    <p:spTree>
+      <p:nvGrpSpPr>
+        <p:cNvPr id="1" name=""/>
+        <p:cNvGrpSpPr/>
+        <p:nvPr/>
+      </p:nvGrpSpPr>
+      <p:grpSpPr>
+        <a:xfrm>
+          <a:off x="0" y="0"/>
+          <a:ext cx="0" cy="0"/>
+          <a:chOff x="0" y="0"/>
+          <a:chExt cx="0" cy="0"/>
+        </a:xfrm>
+      </p:grpSpPr>
+      <p:sp>
+        <p:nvSpPr>
+          <p:cNvPr id="2" name="Titolo 1">
+            <a:extLst>
+              <a:ext uri="{FF2B5EF4-FFF2-40B4-BE49-F238E27FC236}">
+                <a16:creationId xmlns:a16="http://schemas.microsoft.com/office/drawing/2014/main" id="{24662F8D-1950-5A18-36FE-D1811C8A3BBB}"/>
+              </a:ext>
+            </a:extLst>
+          </p:cNvPr>
+          <p:cNvSpPr>
+            <a:spLocks noGrp="1"/>
+          </p:cNvSpPr>
+          <p:nvPr>
+            <p:ph type="title"/>
+          </p:nvPr>
+        </p:nvSpPr>
+        <p:spPr>
+          <a:xfrm>
+            <a:off x="831850" y="1709738"/>
+            <a:ext cx="10515600" cy="2852737"/>
+          </a:xfrm>
+        </p:spPr>
+        <p:txBody>
+          <a:bodyPr anchor="b"/>
+          <a:lstStyle>
+            <a:lvl1pPr>
+              <a:defRPr sz="6000"/>
+            </a:lvl1pPr>
+          </a:lstStyle>
+          <a:p>
+            <a:r>
+              <a:rPr lang="it-IT"/>
+              <a:t>Fare clic per modificare lo stile del titolo dello schema</a:t>
+            </a:r>
+          </a:p>
+        </p:txBody>
+      </p:sp>
+      <p:sp>
+        <p:nvSpPr>
+          <p:cNvPr id="3" name="Segnaposto testo 2">
+            <a:extLst>
+              <a:ext uri="{FF2B5EF4-FFF2-40B4-BE49-F238E27FC236}">
+                <a16:creationId xmlns:a16="http://schemas.microsoft.com/office/drawing/2014/main" id="{2F2AFF67-0C7B-E15E-6863-11AC1D52831E}"/>
+              </a:ext>
+            </a:extLst>
+          </p:cNvPr>
+          <p:cNvSpPr>
+            <a:spLocks noGrp="1"/>
+          </p:cNvSpPr>
+          <p:nvPr>
+            <p:ph type="body" idx="1"/>
+          </p:nvPr>
+        </p:nvSpPr>
+        <p:spPr>
+          <a:xfrm>
+            <a:off x="831850" y="4589463"/>
+            <a:ext cx="10515600" cy="1500187"/>
+          </a:xfrm>
+        </p:spPr>
+        <p:txBody>
+          <a:bodyPr/>
+          <a:lstStyle>
+            <a:lvl1pPr marL="0" indent="0">
+              <a:buNone/>
+              <a:defRPr sz="2400">
+                <a:solidFill>
+                  <a:schemeClr val="tx1">
+                    <a:tint val="82000"/>
+                  </a:schemeClr>
+                </a:solidFill>
+              </a:defRPr>
+            </a:lvl1pPr>
+            <a:lvl2pPr marL="457200" indent="0">
+              <a:buNone/>
+              <a:defRPr sz="2000">
+                <a:solidFill>
+                  <a:schemeClr val="tx1">
+                    <a:tint val="82000"/>
+                  </a:schemeClr>
+                </a:solidFill>
+              </a:defRPr>
+            </a:lvl2pPr>
+            <a:lvl3pPr marL="914400" indent="0">
+              <a:buNone/>
+              <a:defRPr sz="1800">
+                <a:solidFill>
+                  <a:schemeClr val="tx1">
+                    <a:tint val="82000"/>
+                  </a:schemeClr>
+                </a:solidFill>
+              </a:defRPr>
+            </a:lvl3pPr>
+            <a:lvl4pPr marL="1371600" indent="0">
+              <a:buNone/>
+              <a:defRPr sz="1600">
+                <a:solidFill>
+                  <a:schemeClr val="tx1">
+                    <a:tint val="82000"/>
+                  </a:schemeClr>
+                </a:solidFill>
+              </a:defRPr>
+            </a:lvl4pPr>
+            <a:lvl5pPr marL="1828800" indent="0">
+              <a:buNone/>
+              <a:defRPr sz="1600">
+                <a:solidFill>
+                  <a:schemeClr val="tx1">
+                    <a:tint val="82000"/>
+                  </a:schemeClr>
+                </a:solidFill>
+              </a:defRPr>
+            </a:lvl5pPr>
+            <a:lvl6pPr marL="2286000" indent="0">
+              <a:buNone/>
+              <a:defRPr sz="1600">
+                <a:solidFill>
+                  <a:schemeClr val="tx1">
+                    <a:tint val="82000"/>
+                  </a:schemeClr>
+                </a:solidFill>
+              </a:defRPr>
+            </a:lvl6pPr>
+            <a:lvl7pPr marL="2743200" indent="0">
+              <a:buNone/>
+              <a:defRPr sz="1600">
+                <a:solidFill>
+                  <a:schemeClr val="tx1">
+                    <a:tint val="82000"/>
+                  </a:schemeClr>
+                </a:solidFill>
+              </a:defRPr>
+            </a:lvl7pPr>
+            <a:lvl8pPr marL="3200400" indent="0">
+              <a:buNone/>
+              <a:defRPr sz="1600">
+                <a:solidFill>
+                  <a:schemeClr val="tx1">
+                    <a:tint val="82000"/>
+                  </a:schemeClr>
+                </a:solidFill>
+              </a:defRPr>
+            </a:lvl8pPr>
+            <a:lvl9pPr marL="3657600" indent="0">
+              <a:buNone/>
+              <a:defRPr sz="1600">
+                <a:solidFill>
+                  <a:schemeClr val="tx1">
+                    <a:tint val="82000"/>
+                  </a:schemeClr>
+                </a:solidFill>
+              </a:defRPr>
+            </a:lvl9pPr>
+          </a:lstStyle>
+          <a:p>
+            <a:pPr lvl="0"/>
+            <a:r>
+              <a:rPr lang="it-IT"/>
+              <a:t>Fare clic per modificare gli stili del testo dello schema</a:t>
+            </a:r>
+          </a:p>
+        </p:txBody>
+      </p:sp>
+      <p:sp>
+        <p:nvSpPr>
+          <p:cNvPr id="4" name="Segnaposto data 3">
+            <a:extLst>
+              <a:ext uri="{FF2B5EF4-FFF2-40B4-BE49-F238E27FC236}">
+                <a16:creationId xmlns:a16="http://schemas.microsoft.com/office/drawing/2014/main" id="{837FCA8D-D223-3434-BDFF-95B3BABD000F}"/>
+              </a:ext>
+            </a:extLst>
+          </p:cNvPr>
+          <p:cNvSpPr>
+            <a:spLocks noGrp="1"/>
+          </p:cNvSpPr>
+          <p:nvPr>
+            <p:ph type="dt" sz="half" idx="10"/>
+          </p:nvPr>
+        </p:nvSpPr>
+        <p:spPr/>
+        <p:txBody>
+          <a:bodyPr/>
+          <a:lstStyle/>
+          <a:p>
+            <a:pPr>
+              <a:defRPr/>
+            </a:pPr>
+            <a:fld id="{BCC18F51-09EC-435C-A3BA-64A766E099C0}" type="datetimeFigureOut">
+              <a:rPr lang="it-IT" smtClean="0"/>
+              <a:t>30/10/2025</a:t>
+            </a:fld>
+            <a:endParaRPr lang="it-IT"/>
+          </a:p>
+        </p:txBody>
+      </p:sp>
+      <p:sp>
+        <p:nvSpPr>
+          <p:cNvPr id="5" name="Segnaposto piè di pagina 4">
+            <a:extLst>
+              <a:ext uri="{FF2B5EF4-FFF2-40B4-BE49-F238E27FC236}">
+                <a16:creationId xmlns:a16="http://schemas.microsoft.com/office/drawing/2014/main" id="{B8C93A81-3CD2-74A1-3E1C-20563534385B}"/>
+              </a:ext>
+            </a:extLst>
+          </p:cNvPr>
+          <p:cNvSpPr>
+            <a:spLocks noGrp="1"/>
+          </p:cNvSpPr>
+          <p:nvPr>
+            <p:ph type="ftr" sz="quarter" idx="11"/>
+          </p:nvPr>
+        </p:nvSpPr>
+        <p:spPr/>
+        <p:txBody>
+          <a:bodyPr/>
+          <a:lstStyle/>
+          <a:p>
+            <a:pPr>
+              <a:defRPr/>
+            </a:pPr>
+            <a:endParaRPr lang="it-IT"/>
+          </a:p>
+        </p:txBody>
+      </p:sp>
+      <p:sp>
+        <p:nvSpPr>
+          <p:cNvPr id="6" name="Segnaposto numero diapositiva 5">
+            <a:extLst>
+              <a:ext uri="{FF2B5EF4-FFF2-40B4-BE49-F238E27FC236}">
+                <a16:creationId xmlns:a16="http://schemas.microsoft.com/office/drawing/2014/main" id="{4CFEE8A2-736A-570F-4E4E-E5FA3936DFEF}"/>
+              </a:ext>
+            </a:extLst>
+          </p:cNvPr>
+          <p:cNvSpPr>
+            <a:spLocks noGrp="1"/>
+          </p:cNvSpPr>
+          <p:nvPr>
+            <p:ph type="sldNum" sz="quarter" idx="12"/>
+          </p:nvPr>
+        </p:nvSpPr>
+        <p:spPr/>
+        <p:txBody>
+          <a:bodyPr/>
+          <a:lstStyle/>
+          <a:p>
+            <a:pPr>
+              <a:defRPr/>
+            </a:pPr>
+            <a:fld id="{08395586-F03A-48D1-94DF-16B239DF4FB5}" type="slidenum">
+              <a:rPr lang="it-IT" smtClean="0"/>
+              <a:t>‹N›</a:t>
+            </a:fld>
+            <a:endParaRPr lang="it-IT"/>
+          </a:p>
+        </p:txBody>
+      </p:sp>
+    </p:spTree>
+    <p:extLst>
+      <p:ext uri="{BB962C8B-B14F-4D97-AF65-F5344CB8AC3E}">
+        <p14:creationId xmlns:p14="http://schemas.microsoft.com/office/powerpoint/2010/main" val="1178868406"/>
+      </p:ext>
+    </p:extLst>
+  </p:cSld>
+  <p:clrMapOvr>
+    <a:masterClrMapping/>
+  </p:clrMapOvr>
+</p:sldLayout>
+</file>
+
+<file path=ppt/slideLayouts/slideLayout4.xml><?xml version="1.0" encoding="utf-8"?>
+<p:sldLayout xmlns:a="http://schemas.openxmlformats.org/drawingml/2006/main" xmlns:r="http://schemas.openxmlformats.org/officeDocument/2006/relationships" xmlns:p="http://schemas.openxmlformats.org/presentationml/2006/main" type="twoObj" preserve="1">
+  <p:cSld name="Due contenuti">
+    <p:spTree>
+      <p:nvGrpSpPr>
+        <p:cNvPr id="1" name=""/>
+        <p:cNvGrpSpPr/>
+        <p:nvPr/>
+      </p:nvGrpSpPr>
+      <p:grpSpPr>
+        <a:xfrm>
+          <a:off x="0" y="0"/>
+          <a:ext cx="0" cy="0"/>
+          <a:chOff x="0" y="0"/>
+          <a:chExt cx="0" cy="0"/>
+        </a:xfrm>
+      </p:grpSpPr>
+      <p:sp>
+        <p:nvSpPr>
+          <p:cNvPr id="2" name="Titolo 1">
+            <a:extLst>
+              <a:ext uri="{FF2B5EF4-FFF2-40B4-BE49-F238E27FC236}">
+                <a16:creationId xmlns:a16="http://schemas.microsoft.com/office/drawing/2014/main" id="{7A9DCE65-9B75-FF80-9E6A-785DD9FF4237}"/>
+              </a:ext>
+            </a:extLst>
+          </p:cNvPr>
+          <p:cNvSpPr>
+            <a:spLocks noGrp="1"/>
+          </p:cNvSpPr>
+          <p:nvPr>
+            <p:ph type="title"/>
+          </p:nvPr>
+        </p:nvSpPr>
+        <p:spPr/>
+        <p:txBody>
+          <a:bodyPr/>
+          <a:lstStyle/>
+          <a:p>
+            <a:r>
+              <a:rPr lang="it-IT"/>
+              <a:t>Fare clic per modificare lo stile del titolo dello schema</a:t>
+            </a:r>
+          </a:p>
+        </p:txBody>
+      </p:sp>
+      <p:sp>
+        <p:nvSpPr>
+          <p:cNvPr id="3" name="Segnaposto contenuto 2">
+            <a:extLst>
+              <a:ext uri="{FF2B5EF4-FFF2-40B4-BE49-F238E27FC236}">
+                <a16:creationId xmlns:a16="http://schemas.microsoft.com/office/drawing/2014/main" id="{D6161A5F-2E25-F188-7B82-8EEECB7F8C10}"/>
+              </a:ext>
+            </a:extLst>
+          </p:cNvPr>
+          <p:cNvSpPr>
+            <a:spLocks noGrp="1"/>
+          </p:cNvSpPr>
+          <p:nvPr>
+            <p:ph sz="half" idx="1"/>
+          </p:nvPr>
+        </p:nvSpPr>
+        <p:spPr>
+          <a:xfrm>
+            <a:off x="838200" y="1825625"/>
+            <a:ext cx="5181600" cy="4351338"/>
+          </a:xfrm>
+        </p:spPr>
+        <p:txBody>
+          <a:bodyPr/>
+          <a:lstStyle/>
+          <a:p>
+            <a:pPr lvl="0"/>
+            <a:r>
+              <a:rPr lang="it-IT"/>
+              <a:t>Fare clic per modificare gli stili del testo dello schema</a:t>
+            </a:r>
+          </a:p>
+          <a:p>
+            <a:pPr lvl="1"/>
+            <a:r>
+              <a:rPr lang="it-IT"/>
+              <a:t>Secondo livello</a:t>
+            </a:r>
+          </a:p>
+          <a:p>
+            <a:pPr lvl="2"/>
+            <a:r>
+              <a:rPr lang="it-IT"/>
+              <a:t>Terzo livello</a:t>
+            </a:r>
+          </a:p>
+          <a:p>
+            <a:pPr lvl="3"/>
+            <a:r>
+              <a:rPr lang="it-IT"/>
+              <a:t>Quarto livello</a:t>
+            </a:r>
+          </a:p>
+          <a:p>
+            <a:pPr lvl="4"/>
+            <a:r>
+              <a:rPr lang="it-IT"/>
+              <a:t>Quinto livello</a:t>
+            </a:r>
+          </a:p>
+        </p:txBody>
+      </p:sp>
+      <p:sp>
+        <p:nvSpPr>
+          <p:cNvPr id="4" name="Segnaposto contenuto 3">
+            <a:extLst>
+              <a:ext uri="{FF2B5EF4-FFF2-40B4-BE49-F238E27FC236}">
+                <a16:creationId xmlns:a16="http://schemas.microsoft.com/office/drawing/2014/main" id="{D999C3D5-BB66-C25F-356A-ABE6BEE3C936}"/>
+              </a:ext>
+            </a:extLst>
+          </p:cNvPr>
+          <p:cNvSpPr>
+            <a:spLocks noGrp="1"/>
+          </p:cNvSpPr>
+          <p:nvPr>
+            <p:ph sz="half" idx="2"/>
+          </p:nvPr>
+        </p:nvSpPr>
+        <p:spPr>
+          <a:xfrm>
+            <a:off x="6172200" y="1825625"/>
+            <a:ext cx="5181600" cy="4351338"/>
+          </a:xfrm>
+        </p:spPr>
+        <p:txBody>
+          <a:bodyPr/>
+          <a:lstStyle/>
+          <a:p>
+            <a:pPr lvl="0"/>
+            <a:r>
+              <a:rPr lang="it-IT"/>
+              <a:t>Fare clic per modificare gli stili del testo dello schema</a:t>
+            </a:r>
+          </a:p>
+          <a:p>
+            <a:pPr lvl="1"/>
+            <a:r>
+              <a:rPr lang="it-IT"/>
+              <a:t>Secondo livello</a:t>
+            </a:r>
+          </a:p>
+          <a:p>
+            <a:pPr lvl="2"/>
+            <a:r>
+              <a:rPr lang="it-IT"/>
+              <a:t>Terzo livello</a:t>
+            </a:r>
+          </a:p>
+          <a:p>
+            <a:pPr lvl="3"/>
+            <a:r>
+              <a:rPr lang="it-IT"/>
+              <a:t>Quarto livello</a:t>
+            </a:r>
+          </a:p>
+          <a:p>
+            <a:pPr lvl="4"/>
+            <a:r>
+              <a:rPr lang="it-IT"/>
+              <a:t>Quinto livello</a:t>
+            </a:r>
+          </a:p>
+        </p:txBody>
+      </p:sp>
+      <p:sp>
+        <p:nvSpPr>
+          <p:cNvPr id="5" name="Segnaposto data 4">
+            <a:extLst>
+              <a:ext uri="{FF2B5EF4-FFF2-40B4-BE49-F238E27FC236}">
+                <a16:creationId xmlns:a16="http://schemas.microsoft.com/office/drawing/2014/main" id="{76A58F3A-0490-60C9-D687-499DBBA54C65}"/>
+              </a:ext>
+            </a:extLst>
+          </p:cNvPr>
+          <p:cNvSpPr>
+            <a:spLocks noGrp="1"/>
+          </p:cNvSpPr>
+          <p:nvPr>
+            <p:ph type="dt" sz="half" idx="10"/>
+          </p:nvPr>
+        </p:nvSpPr>
+        <p:spPr/>
+        <p:txBody>
+          <a:bodyPr/>
+          <a:lstStyle/>
+          <a:p>
+            <a:pPr>
+              <a:defRPr/>
+            </a:pPr>
+            <a:fld id="{BCC18F51-09EC-435C-A3BA-64A766E099C0}" type="datetimeFigureOut">
+              <a:rPr lang="it-IT" smtClean="0"/>
+              <a:t>30/10/2025</a:t>
+            </a:fld>
+            <a:endParaRPr lang="it-IT"/>
+          </a:p>
+        </p:txBody>
+      </p:sp>
+      <p:sp>
+        <p:nvSpPr>
+          <p:cNvPr id="6" name="Segnaposto piè di pagina 5">
+            <a:extLst>
+              <a:ext uri="{FF2B5EF4-FFF2-40B4-BE49-F238E27FC236}">
+                <a16:creationId xmlns:a16="http://schemas.microsoft.com/office/drawing/2014/main" id="{2CBAAA6A-3369-AF3E-87F3-1F6ABB34F2D9}"/>
+              </a:ext>
+            </a:extLst>
+          </p:cNvPr>
+          <p:cNvSpPr>
+            <a:spLocks noGrp="1"/>
+          </p:cNvSpPr>
+          <p:nvPr>
+            <p:ph type="ftr" sz="quarter" idx="11"/>
+          </p:nvPr>
+        </p:nvSpPr>
+        <p:spPr/>
+        <p:txBody>
+          <a:bodyPr/>
+          <a:lstStyle/>
+          <a:p>
+            <a:pPr>
+              <a:defRPr/>
+            </a:pPr>
+            <a:endParaRPr lang="it-IT"/>
+          </a:p>
+        </p:txBody>
+      </p:sp>
+      <p:sp>
+        <p:nvSpPr>
+          <p:cNvPr id="7" name="Segnaposto numero diapositiva 6">
+            <a:extLst>
+              <a:ext uri="{FF2B5EF4-FFF2-40B4-BE49-F238E27FC236}">
+                <a16:creationId xmlns:a16="http://schemas.microsoft.com/office/drawing/2014/main" id="{1BB2254A-2C43-4354-6011-9FAA6B4505D6}"/>
+              </a:ext>
+            </a:extLst>
+          </p:cNvPr>
+          <p:cNvSpPr>
+            <a:spLocks noGrp="1"/>
+          </p:cNvSpPr>
+          <p:nvPr>
+            <p:ph type="sldNum" sz="quarter" idx="12"/>
+          </p:nvPr>
+        </p:nvSpPr>
+        <p:spPr/>
+        <p:txBody>
+          <a:bodyPr/>
+          <a:lstStyle/>
+          <a:p>
+            <a:pPr>
+              <a:defRPr/>
+            </a:pPr>
+            <a:fld id="{08395586-F03A-48D1-94DF-16B239DF4FB5}" type="slidenum">
+              <a:rPr lang="it-IT" smtClean="0"/>
+              <a:t>‹N›</a:t>
+            </a:fld>
+            <a:endParaRPr lang="it-IT"/>
+          </a:p>
+        </p:txBody>
+      </p:sp>
+    </p:spTree>
+    <p:extLst>
+      <p:ext uri="{BB962C8B-B14F-4D97-AF65-F5344CB8AC3E}">
+        <p14:creationId xmlns:p14="http://schemas.microsoft.com/office/powerpoint/2010/main" val="1568284514"/>
+      </p:ext>
+    </p:extLst>
+  </p:cSld>
+  <p:clrMapOvr>
+    <a:masterClrMapping/>
+  </p:clrMapOvr>
+  <p:extLst>
+    <p:ext uri="{DCECCB84-F9BA-43D5-87BE-67443E8EF086}">
+      <p15:sldGuideLst xmlns:p15="http://schemas.microsoft.com/office/powerpoint/2012/main"/>
+    </p:ext>
+  </p:extLst>
+</p:sldLayout>
+</file>
+
+<file path=ppt/slideLayouts/slideLayout5.xml><?xml version="1.0" encoding="utf-8"?>
+<p:sldLayout xmlns:a="http://schemas.openxmlformats.org/drawingml/2006/main" xmlns:r="http://schemas.openxmlformats.org/officeDocument/2006/relationships" xmlns:p="http://schemas.openxmlformats.org/presentationml/2006/main" type="twoTxTwoObj" preserve="1">
+  <p:cSld name="Confronto">
+    <p:spTree>
+      <p:nvGrpSpPr>
+        <p:cNvPr id="1" name=""/>
+        <p:cNvGrpSpPr/>
+        <p:nvPr/>
+      </p:nvGrpSpPr>
+      <p:grpSpPr>
+        <a:xfrm>
+          <a:off x="0" y="0"/>
+          <a:ext cx="0" cy="0"/>
+          <a:chOff x="0" y="0"/>
+          <a:chExt cx="0" cy="0"/>
+        </a:xfrm>
+      </p:grpSpPr>
+      <p:sp>
+        <p:nvSpPr>
+          <p:cNvPr id="2" name="Titolo 1">
+            <a:extLst>
+              <a:ext uri="{FF2B5EF4-FFF2-40B4-BE49-F238E27FC236}">
+                <a16:creationId xmlns:a16="http://schemas.microsoft.com/office/drawing/2014/main" id="{39D8E4D0-1F9E-907F-8B3B-048D05939346}"/>
+              </a:ext>
+            </a:extLst>
+          </p:cNvPr>
+          <p:cNvSpPr>
+            <a:spLocks noGrp="1"/>
+          </p:cNvSpPr>
+          <p:nvPr>
+            <p:ph type="title"/>
+          </p:nvPr>
+        </p:nvSpPr>
+        <p:spPr>
+          <a:xfrm>
+            <a:off x="839788" y="365125"/>
+            <a:ext cx="10515600" cy="1325563"/>
+          </a:xfrm>
+        </p:spPr>
+        <p:txBody>
+          <a:bodyPr/>
+          <a:lstStyle/>
+          <a:p>
+            <a:r>
+              <a:rPr lang="it-IT"/>
+              <a:t>Fare clic per modificare lo stile del titolo dello schema</a:t>
+            </a:r>
+          </a:p>
+        </p:txBody>
+      </p:sp>
+      <p:sp>
+        <p:nvSpPr>
+          <p:cNvPr id="3" name="Segnaposto testo 2">
+            <a:extLst>
+              <a:ext uri="{FF2B5EF4-FFF2-40B4-BE49-F238E27FC236}">
+                <a16:creationId xmlns:a16="http://schemas.microsoft.com/office/drawing/2014/main" id="{EE74B17E-FA01-E2F2-FCC4-57361B49E8EF}"/>
+              </a:ext>
+            </a:extLst>
+          </p:cNvPr>
+          <p:cNvSpPr>
+            <a:spLocks noGrp="1"/>
+          </p:cNvSpPr>
+          <p:nvPr>
+            <p:ph type="body" idx="1"/>
+          </p:nvPr>
+        </p:nvSpPr>
+        <p:spPr>
+          <a:xfrm>
+            <a:off x="839788" y="1681163"/>
+            <a:ext cx="5157787" cy="823912"/>
+          </a:xfrm>
+        </p:spPr>
+        <p:txBody>
+          <a:bodyPr anchor="b"/>
+          <a:lstStyle>
+            <a:lvl1pPr marL="0" indent="0">
+              <a:buNone/>
+              <a:defRPr sz="2400" b="1"/>
+            </a:lvl1pPr>
+            <a:lvl2pPr marL="457200" indent="0">
+              <a:buNone/>
+              <a:defRPr sz="2000" b="1"/>
+            </a:lvl2pPr>
+            <a:lvl3pPr marL="914400" indent="0">
+              <a:buNone/>
+              <a:defRPr sz="1800" b="1"/>
+            </a:lvl3pPr>
+            <a:lvl4pPr marL="1371600" indent="0">
+              <a:buNone/>
+              <a:defRPr sz="1600" b="1"/>
+            </a:lvl4pPr>
+            <a:lvl5pPr marL="1828800" indent="0">
+              <a:buNone/>
+              <a:defRPr sz="1600" b="1"/>
+            </a:lvl5pPr>
+            <a:lvl6pPr marL="2286000" indent="0">
+              <a:buNone/>
+              <a:defRPr sz="1600" b="1"/>
+            </a:lvl6pPr>
+            <a:lvl7pPr marL="2743200" indent="0">
+              <a:buNone/>
+              <a:defRPr sz="1600" b="1"/>
+            </a:lvl7pPr>
+            <a:lvl8pPr marL="3200400" indent="0">
+              <a:buNone/>
+              <a:defRPr sz="1600" b="1"/>
+            </a:lvl8pPr>
+            <a:lvl9pPr marL="3657600" indent="0">
+              <a:buNone/>
+              <a:defRPr sz="1600" b="1"/>
+            </a:lvl9pPr>
+          </a:lstStyle>
+          <a:p>
+            <a:pPr lvl="0"/>
+            <a:r>
+              <a:rPr lang="it-IT"/>
+              <a:t>Fare clic per modificare gli stili del testo dello schema</a:t>
+            </a:r>
+          </a:p>
+        </p:txBody>
+      </p:sp>
+      <p:sp>
+        <p:nvSpPr>
+          <p:cNvPr id="4" name="Segnaposto contenuto 3">
+            <a:extLst>
+              <a:ext uri="{FF2B5EF4-FFF2-40B4-BE49-F238E27FC236}">
+                <a16:creationId xmlns:a16="http://schemas.microsoft.com/office/drawing/2014/main" id="{4DF93750-0DF0-1567-FE9E-1226FBC33D2E}"/>
+              </a:ext>
+            </a:extLst>
+          </p:cNvPr>
+          <p:cNvSpPr>
+            <a:spLocks noGrp="1"/>
+          </p:cNvSpPr>
+          <p:nvPr>
+            <p:ph sz="half" idx="2"/>
+          </p:nvPr>
+        </p:nvSpPr>
+        <p:spPr>
+          <a:xfrm>
+            <a:off x="839788" y="2505075"/>
+            <a:ext cx="5157787" cy="3684588"/>
+          </a:xfrm>
+        </p:spPr>
+        <p:txBody>
+          <a:bodyPr/>
+          <a:lstStyle/>
+          <a:p>
+            <a:pPr lvl="0"/>
+            <a:r>
+              <a:rPr lang="it-IT"/>
+              <a:t>Fare clic per modificare gli stili del testo dello schema</a:t>
+            </a:r>
+          </a:p>
+          <a:p>
+            <a:pPr lvl="1"/>
+            <a:r>
+              <a:rPr lang="it-IT"/>
+              <a:t>Secondo livello</a:t>
+            </a:r>
+          </a:p>
+          <a:p>
+            <a:pPr lvl="2"/>
+            <a:r>
+              <a:rPr lang="it-IT"/>
+              <a:t>Terzo livello</a:t>
+            </a:r>
+          </a:p>
+          <a:p>
+            <a:pPr lvl="3"/>
+            <a:r>
+              <a:rPr lang="it-IT"/>
+              <a:t>Quarto livello</a:t>
+            </a:r>
+          </a:p>
+          <a:p>
+            <a:pPr lvl="4"/>
+            <a:r>
+              <a:rPr lang="it-IT"/>
+              <a:t>Quinto livello</a:t>
+            </a:r>
+          </a:p>
+        </p:txBody>
+      </p:sp>
+      <p:sp>
+        <p:nvSpPr>
+          <p:cNvPr id="5" name="Segnaposto testo 4">
+            <a:extLst>
+              <a:ext uri="{FF2B5EF4-FFF2-40B4-BE49-F238E27FC236}">
+                <a16:creationId xmlns:a16="http://schemas.microsoft.com/office/drawing/2014/main" id="{A4C8C399-63D4-CCF3-4A9B-0A2EBAB1E0CD}"/>
+              </a:ext>
+            </a:extLst>
+          </p:cNvPr>
+          <p:cNvSpPr>
+            <a:spLocks noGrp="1"/>
+          </p:cNvSpPr>
+          <p:nvPr>
+            <p:ph type="body" sz="quarter" idx="3"/>
+          </p:nvPr>
+        </p:nvSpPr>
+        <p:spPr>
+          <a:xfrm>
+            <a:off x="6172200" y="1681163"/>
+            <a:ext cx="5183188" cy="823912"/>
+          </a:xfrm>
+        </p:spPr>
+        <p:txBody>
+          <a:bodyPr anchor="b"/>
+          <a:lstStyle>
+            <a:lvl1pPr marL="0" indent="0">
+              <a:buNone/>
+              <a:defRPr sz="2400" b="1"/>
+            </a:lvl1pPr>
+            <a:lvl2pPr marL="457200" indent="0">
+              <a:buNone/>
+              <a:defRPr sz="2000" b="1"/>
+            </a:lvl2pPr>
+            <a:lvl3pPr marL="914400" indent="0">
+              <a:buNone/>
+              <a:defRPr sz="1800" b="1"/>
+            </a:lvl3pPr>
+            <a:lvl4pPr marL="1371600" indent="0">
+              <a:buNone/>
+              <a:defRPr sz="1600" b="1"/>
+            </a:lvl4pPr>
+            <a:lvl5pPr marL="1828800" indent="0">
+              <a:buNone/>
+              <a:defRPr sz="1600" b="1"/>
+            </a:lvl5pPr>
+            <a:lvl6pPr marL="2286000" indent="0">
+              <a:buNone/>
+              <a:defRPr sz="1600" b="1"/>
+            </a:lvl6pPr>
+            <a:lvl7pPr marL="2743200" indent="0">
+              <a:buNone/>
+              <a:defRPr sz="1600" b="1"/>
+            </a:lvl7pPr>
+            <a:lvl8pPr marL="3200400" indent="0">
+              <a:buNone/>
+              <a:defRPr sz="1600" b="1"/>
+            </a:lvl8pPr>
+            <a:lvl9pPr marL="3657600" indent="0">
+              <a:buNone/>
+              <a:defRPr sz="1600" b="1"/>
+            </a:lvl9pPr>
+          </a:lstStyle>
+          <a:p>
+            <a:pPr lvl="0"/>
+            <a:r>
+              <a:rPr lang="it-IT"/>
+              <a:t>Fare clic per modificare gli stili del testo dello schema</a:t>
+            </a:r>
+          </a:p>
+        </p:txBody>
+      </p:sp>
+      <p:sp>
+        <p:nvSpPr>
+          <p:cNvPr id="6" name="Segnaposto contenuto 5">
+            <a:extLst>
+              <a:ext uri="{FF2B5EF4-FFF2-40B4-BE49-F238E27FC236}">
+                <a16:creationId xmlns:a16="http://schemas.microsoft.com/office/drawing/2014/main" id="{5571731C-2BBE-096A-97A1-ED19F0DF7EF7}"/>
+              </a:ext>
+            </a:extLst>
+          </p:cNvPr>
+          <p:cNvSpPr>
+            <a:spLocks noGrp="1"/>
+          </p:cNvSpPr>
+          <p:nvPr>
+            <p:ph sz="quarter" idx="4"/>
+          </p:nvPr>
+        </p:nvSpPr>
+        <p:spPr>
+          <a:xfrm>
+            <a:off x="6172200" y="2505075"/>
+            <a:ext cx="5183188" cy="3684588"/>
+          </a:xfrm>
+        </p:spPr>
+        <p:txBody>
+          <a:bodyPr/>
+          <a:lstStyle/>
+          <a:p>
+            <a:pPr lvl="0"/>
+            <a:r>
+              <a:rPr lang="it-IT"/>
+              <a:t>Fare clic per modificare gli stili del testo dello schema</a:t>
+            </a:r>
+          </a:p>
+          <a:p>
+            <a:pPr lvl="1"/>
+            <a:r>
+              <a:rPr lang="it-IT"/>
+              <a:t>Secondo livello</a:t>
+            </a:r>
+          </a:p>
+          <a:p>
+            <a:pPr lvl="2"/>
+            <a:r>
+              <a:rPr lang="it-IT"/>
+              <a:t>Terzo livello</a:t>
+            </a:r>
+          </a:p>
+          <a:p>
+            <a:pPr lvl="3"/>
+            <a:r>
+              <a:rPr lang="it-IT"/>
+              <a:t>Quarto livello</a:t>
+            </a:r>
+          </a:p>
+          <a:p>
+            <a:pPr lvl="4"/>
+            <a:r>
+              <a:rPr lang="it-IT"/>
+              <a:t>Quinto livello</a:t>
+            </a:r>
+          </a:p>
+        </p:txBody>
+      </p:sp>
+      <p:sp>
+        <p:nvSpPr>
+          <p:cNvPr id="7" name="Segnaposto data 6">
+            <a:extLst>
+              <a:ext uri="{FF2B5EF4-FFF2-40B4-BE49-F238E27FC236}">
+                <a16:creationId xmlns:a16="http://schemas.microsoft.com/office/drawing/2014/main" id="{E523C077-9660-DECC-A09F-F007148B9B01}"/>
+              </a:ext>
+            </a:extLst>
+          </p:cNvPr>
+          <p:cNvSpPr>
+            <a:spLocks noGrp="1"/>
+          </p:cNvSpPr>
+          <p:nvPr>
+            <p:ph type="dt" sz="half" idx="10"/>
+          </p:nvPr>
+        </p:nvSpPr>
+        <p:spPr/>
+        <p:txBody>
+          <a:bodyPr/>
+          <a:lstStyle/>
+          <a:p>
+            <a:pPr>
+              <a:defRPr/>
+            </a:pPr>
+            <a:fld id="{BCC18F51-09EC-435C-A3BA-64A766E099C0}" type="datetimeFigureOut">
+              <a:rPr lang="it-IT" smtClean="0"/>
+              <a:t>30/10/2025</a:t>
+            </a:fld>
+            <a:endParaRPr lang="it-IT"/>
+          </a:p>
+        </p:txBody>
+      </p:sp>
+      <p:sp>
+        <p:nvSpPr>
+          <p:cNvPr id="8" name="Segnaposto piè di pagina 7">
+            <a:extLst>
+              <a:ext uri="{FF2B5EF4-FFF2-40B4-BE49-F238E27FC236}">
+                <a16:creationId xmlns:a16="http://schemas.microsoft.com/office/drawing/2014/main" id="{983F6190-C23E-9A33-3E78-32EC8B3C80E2}"/>
+              </a:ext>
+            </a:extLst>
+          </p:cNvPr>
+          <p:cNvSpPr>
+            <a:spLocks noGrp="1"/>
+          </p:cNvSpPr>
+          <p:nvPr>
+            <p:ph type="ftr" sz="quarter" idx="11"/>
+          </p:nvPr>
+        </p:nvSpPr>
+        <p:spPr/>
+        <p:txBody>
+          <a:bodyPr/>
+          <a:lstStyle/>
+          <a:p>
+            <a:pPr>
+              <a:defRPr/>
+            </a:pPr>
+            <a:endParaRPr lang="it-IT"/>
+          </a:p>
+        </p:txBody>
+      </p:sp>
+      <p:sp>
+        <p:nvSpPr>
+          <p:cNvPr id="9" name="Segnaposto numero diapositiva 8">
+            <a:extLst>
+              <a:ext uri="{FF2B5EF4-FFF2-40B4-BE49-F238E27FC236}">
+                <a16:creationId xmlns:a16="http://schemas.microsoft.com/office/drawing/2014/main" id="{1D33FFE5-25D8-22C1-86E5-7E9D191A6613}"/>
+              </a:ext>
+            </a:extLst>
+          </p:cNvPr>
+          <p:cNvSpPr>
+            <a:spLocks noGrp="1"/>
+          </p:cNvSpPr>
+          <p:nvPr>
+            <p:ph type="sldNum" sz="quarter" idx="12"/>
+          </p:nvPr>
+        </p:nvSpPr>
+        <p:spPr/>
+        <p:txBody>
+          <a:bodyPr/>
+          <a:lstStyle/>
+          <a:p>
+            <a:pPr>
+              <a:defRPr/>
+            </a:pPr>
+            <a:fld id="{08395586-F03A-48D1-94DF-16B239DF4FB5}" type="slidenum">
+              <a:rPr lang="it-IT" smtClean="0"/>
+              <a:t>‹N›</a:t>
+            </a:fld>
+            <a:endParaRPr lang="it-IT"/>
+          </a:p>
+        </p:txBody>
+      </p:sp>
+    </p:spTree>
+    <p:extLst>
+      <p:ext uri="{BB962C8B-B14F-4D97-AF65-F5344CB8AC3E}">
+        <p14:creationId xmlns:p14="http://schemas.microsoft.com/office/powerpoint/2010/main" val="3201153808"/>
+      </p:ext>
+    </p:extLst>
+  </p:cSld>
+  <p:clrMapOvr>
+    <a:masterClrMapping/>
+  </p:clrMapOvr>
+  <p:extLst>
+    <p:ext uri="{DCECCB84-F9BA-43D5-87BE-67443E8EF086}">
+      <p15:sldGuideLst xmlns:p15="http://schemas.microsoft.com/office/powerpoint/2012/main"/>
+    </p:ext>
+  </p:extLst>
+</p:sldLayout>
+</file>
+
+<file path=ppt/slideLayouts/slideLayout6.xml><?xml version="1.0" encoding="utf-8"?>
+<p:sldLayout xmlns:a="http://schemas.openxmlformats.org/drawingml/2006/main" xmlns:r="http://schemas.openxmlformats.org/officeDocument/2006/relationships" xmlns:p="http://schemas.openxmlformats.org/presentationml/2006/main" type="titleOnly" preserve="1">
+  <p:cSld name="Solo titolo">
+    <p:spTree>
+      <p:nvGrpSpPr>
+        <p:cNvPr id="1" name=""/>
+        <p:cNvGrpSpPr/>
+        <p:nvPr/>
+      </p:nvGrpSpPr>
+      <p:grpSpPr>
+        <a:xfrm>
+          <a:off x="0" y="0"/>
+          <a:ext cx="0" cy="0"/>
+          <a:chOff x="0" y="0"/>
+          <a:chExt cx="0" cy="0"/>
+        </a:xfrm>
+      </p:grpSpPr>
+      <p:sp>
+        <p:nvSpPr>
+          <p:cNvPr id="2" name="Titolo 1">
+            <a:extLst>
+              <a:ext uri="{FF2B5EF4-FFF2-40B4-BE49-F238E27FC236}">
+                <a16:creationId xmlns:a16="http://schemas.microsoft.com/office/drawing/2014/main" id="{A096320F-28C1-14FA-0222-29B07E117AC0}"/>
+              </a:ext>
+            </a:extLst>
+          </p:cNvPr>
+          <p:cNvSpPr>
+            <a:spLocks noGrp="1"/>
+          </p:cNvSpPr>
+          <p:nvPr>
+            <p:ph type="title"/>
+          </p:nvPr>
+        </p:nvSpPr>
+        <p:spPr/>
+        <p:txBody>
+          <a:bodyPr/>
+          <a:lstStyle/>
+          <a:p>
+            <a:r>
+              <a:rPr lang="it-IT"/>
+              <a:t>Fare clic per modificare lo stile del titolo dello schema</a:t>
+            </a:r>
+          </a:p>
+        </p:txBody>
+      </p:sp>
+      <p:sp>
+        <p:nvSpPr>
+          <p:cNvPr id="3" name="Segnaposto data 2">
+            <a:extLst>
+              <a:ext uri="{FF2B5EF4-FFF2-40B4-BE49-F238E27FC236}">
+                <a16:creationId xmlns:a16="http://schemas.microsoft.com/office/drawing/2014/main" id="{1DD63EA2-5641-E005-C007-8971E663C184}"/>
+              </a:ext>
+            </a:extLst>
+          </p:cNvPr>
+          <p:cNvSpPr>
+            <a:spLocks noGrp="1"/>
+          </p:cNvSpPr>
+          <p:nvPr>
+            <p:ph type="dt" sz="half" idx="10"/>
+          </p:nvPr>
+        </p:nvSpPr>
+        <p:spPr/>
+        <p:txBody>
+          <a:bodyPr/>
+          <a:lstStyle/>
+          <a:p>
+            <a:pPr>
+              <a:defRPr/>
+            </a:pPr>
+            <a:fld id="{BCC18F51-09EC-435C-A3BA-64A766E099C0}" type="datetimeFigureOut">
+              <a:rPr lang="it-IT" smtClean="0"/>
+              <a:t>30/10/2025</a:t>
+            </a:fld>
+            <a:endParaRPr lang="it-IT"/>
+          </a:p>
+        </p:txBody>
+      </p:sp>
+      <p:sp>
+        <p:nvSpPr>
+          <p:cNvPr id="4" name="Segnaposto piè di pagina 3">
+            <a:extLst>
+              <a:ext uri="{FF2B5EF4-FFF2-40B4-BE49-F238E27FC236}">
+                <a16:creationId xmlns:a16="http://schemas.microsoft.com/office/drawing/2014/main" id="{D5030C9B-C0B0-721F-4E86-3D82082705FC}"/>
+              </a:ext>
+            </a:extLst>
+          </p:cNvPr>
+          <p:cNvSpPr>
+            <a:spLocks noGrp="1"/>
+          </p:cNvSpPr>
+          <p:nvPr>
+            <p:ph type="ftr" sz="quarter" idx="11"/>
+          </p:nvPr>
+        </p:nvSpPr>
+        <p:spPr/>
+        <p:txBody>
+          <a:bodyPr/>
+          <a:lstStyle/>
+          <a:p>
+            <a:pPr>
+              <a:defRPr/>
+            </a:pPr>
+            <a:endParaRPr lang="it-IT"/>
+          </a:p>
+        </p:txBody>
+      </p:sp>
+      <p:sp>
+        <p:nvSpPr>
+          <p:cNvPr id="5" name="Segnaposto numero diapositiva 4">
+            <a:extLst>
+              <a:ext uri="{FF2B5EF4-FFF2-40B4-BE49-F238E27FC236}">
+                <a16:creationId xmlns:a16="http://schemas.microsoft.com/office/drawing/2014/main" id="{BFDAD31F-BB81-9989-5238-9213135235A2}"/>
+              </a:ext>
+            </a:extLst>
+          </p:cNvPr>
+          <p:cNvSpPr>
+            <a:spLocks noGrp="1"/>
+          </p:cNvSpPr>
+          <p:nvPr>
+            <p:ph type="sldNum" sz="quarter" idx="12"/>
+          </p:nvPr>
+        </p:nvSpPr>
+        <p:spPr/>
+        <p:txBody>
+          <a:bodyPr/>
+          <a:lstStyle/>
+          <a:p>
+            <a:pPr>
+              <a:defRPr/>
+            </a:pPr>
+            <a:fld id="{08395586-F03A-48D1-94DF-16B239DF4FB5}" type="slidenum">
+              <a:rPr lang="it-IT" smtClean="0"/>
+              <a:t>‹N›</a:t>
+            </a:fld>
+            <a:endParaRPr lang="it-IT"/>
+          </a:p>
+        </p:txBody>
+      </p:sp>
+    </p:spTree>
+    <p:extLst>
+      <p:ext uri="{BB962C8B-B14F-4D97-AF65-F5344CB8AC3E}">
+        <p14:creationId xmlns:p14="http://schemas.microsoft.com/office/powerpoint/2010/main" val="1298863065"/>
+      </p:ext>
+    </p:extLst>
+  </p:cSld>
+  <p:clrMapOvr>
+    <a:masterClrMapping/>
+  </p:clrMapOvr>
+</p:sldLayout>
+</file>
+
+<file path=ppt/slideLayouts/slideLayout7.xml><?xml version="1.0" encoding="utf-8"?>
+<p:sldLayout xmlns:a="http://schemas.openxmlformats.org/drawingml/2006/main" xmlns:r="http://schemas.openxmlformats.org/officeDocument/2006/relationships" xmlns:p="http://schemas.openxmlformats.org/presentationml/2006/main" type="blank" preserve="1">
+  <p:cSld name="Vuota">
+    <p:spTree>
+      <p:nvGrpSpPr>
+        <p:cNvPr id="1" name=""/>
+        <p:cNvGrpSpPr/>
+        <p:nvPr/>
+      </p:nvGrpSpPr>
+      <p:grpSpPr>
+        <a:xfrm>
+          <a:off x="0" y="0"/>
+          <a:ext cx="0" cy="0"/>
+          <a:chOff x="0" y="0"/>
+          <a:chExt cx="0" cy="0"/>
+        </a:xfrm>
+      </p:grpSpPr>
+      <p:sp>
+        <p:nvSpPr>
+          <p:cNvPr id="2" name="Segnaposto data 1">
+            <a:extLst>
+              <a:ext uri="{FF2B5EF4-FFF2-40B4-BE49-F238E27FC236}">
+                <a16:creationId xmlns:a16="http://schemas.microsoft.com/office/drawing/2014/main" id="{4B826A46-170C-D69C-C276-B9A16C6DBA5E}"/>
+              </a:ext>
+            </a:extLst>
+          </p:cNvPr>
+          <p:cNvSpPr>
+            <a:spLocks noGrp="1"/>
+          </p:cNvSpPr>
+          <p:nvPr>
+            <p:ph type="dt" sz="half" idx="10"/>
+          </p:nvPr>
+        </p:nvSpPr>
+        <p:spPr/>
+        <p:txBody>
+          <a:bodyPr/>
+          <a:lstStyle/>
+          <a:p>
+            <a:pPr>
+              <a:defRPr/>
+            </a:pPr>
+            <a:fld id="{BCC18F51-09EC-435C-A3BA-64A766E099C0}" type="datetimeFigureOut">
+              <a:rPr lang="it-IT" smtClean="0"/>
+              <a:t>30/10/2025</a:t>
+            </a:fld>
+            <a:endParaRPr lang="it-IT"/>
+          </a:p>
+        </p:txBody>
+      </p:sp>
+      <p:sp>
+        <p:nvSpPr>
+          <p:cNvPr id="3" name="Segnaposto piè di pagina 2">
+            <a:extLst>
+              <a:ext uri="{FF2B5EF4-FFF2-40B4-BE49-F238E27FC236}">
+                <a16:creationId xmlns:a16="http://schemas.microsoft.com/office/drawing/2014/main" id="{061B4495-22AF-E7ED-9C19-629B21C0BF46}"/>
+              </a:ext>
+            </a:extLst>
+          </p:cNvPr>
+          <p:cNvSpPr>
+            <a:spLocks noGrp="1"/>
+          </p:cNvSpPr>
+          <p:nvPr>
+            <p:ph type="ftr" sz="quarter" idx="11"/>
+          </p:nvPr>
+        </p:nvSpPr>
+        <p:spPr/>
+        <p:txBody>
+          <a:bodyPr/>
+          <a:lstStyle/>
+          <a:p>
+            <a:pPr>
+              <a:defRPr/>
+            </a:pPr>
+            <a:endParaRPr lang="it-IT"/>
+          </a:p>
+        </p:txBody>
+      </p:sp>
+      <p:sp>
+        <p:nvSpPr>
+          <p:cNvPr id="4" name="Segnaposto numero diapositiva 3">
+            <a:extLst>
+              <a:ext uri="{FF2B5EF4-FFF2-40B4-BE49-F238E27FC236}">
+                <a16:creationId xmlns:a16="http://schemas.microsoft.com/office/drawing/2014/main" id="{B6C3F4BA-DD00-88BF-0945-E4F4FCFADE5F}"/>
+              </a:ext>
+            </a:extLst>
+          </p:cNvPr>
+          <p:cNvSpPr>
+            <a:spLocks noGrp="1"/>
+          </p:cNvSpPr>
+          <p:nvPr>
+            <p:ph type="sldNum" sz="quarter" idx="12"/>
+          </p:nvPr>
+        </p:nvSpPr>
+        <p:spPr/>
+        <p:txBody>
+          <a:bodyPr/>
+          <a:lstStyle/>
+          <a:p>
+            <a:pPr>
+              <a:defRPr/>
+            </a:pPr>
+            <a:fld id="{08395586-F03A-48D1-94DF-16B239DF4FB5}" type="slidenum">
+              <a:rPr lang="it-IT" smtClean="0"/>
+              <a:t>‹N›</a:t>
+            </a:fld>
+            <a:endParaRPr lang="it-IT"/>
+          </a:p>
+        </p:txBody>
+      </p:sp>
+    </p:spTree>
+    <p:extLst>
+      <p:ext uri="{BB962C8B-B14F-4D97-AF65-F5344CB8AC3E}">
+        <p14:creationId xmlns:p14="http://schemas.microsoft.com/office/powerpoint/2010/main" val="500918290"/>
+      </p:ext>
+    </p:extLst>
+  </p:cSld>
+  <p:clrMapOvr>
+    <a:masterClrMapping/>
+  </p:clrMapOvr>
+</p:sldLayout>
+</file>
+
+<file path=ppt/slideLayouts/slideLayout8.xml><?xml version="1.0" encoding="utf-8"?>
+<p:sldLayout xmlns:a="http://schemas.openxmlformats.org/drawingml/2006/main" xmlns:r="http://schemas.openxmlformats.org/officeDocument/2006/relationships" xmlns:p="http://schemas.openxmlformats.org/presentationml/2006/main" type="objTx" preserve="1">
+  <p:cSld name="Contenuto con didascalia">
+    <p:spTree>
+      <p:nvGrpSpPr>
+        <p:cNvPr id="1" name=""/>
+        <p:cNvGrpSpPr/>
+        <p:nvPr/>
+      </p:nvGrpSpPr>
+      <p:grpSpPr>
+        <a:xfrm>
+          <a:off x="0" y="0"/>
+          <a:ext cx="0" cy="0"/>
+          <a:chOff x="0" y="0"/>
+          <a:chExt cx="0" cy="0"/>
+        </a:xfrm>
+      </p:grpSpPr>
+      <p:sp>
+        <p:nvSpPr>
+          <p:cNvPr id="2" name="Titolo 1">
+            <a:extLst>
+              <a:ext uri="{FF2B5EF4-FFF2-40B4-BE49-F238E27FC236}">
+                <a16:creationId xmlns:a16="http://schemas.microsoft.com/office/drawing/2014/main" id="{7DD97471-687A-5B89-86FD-0785F22D33F4}"/>
+              </a:ext>
+            </a:extLst>
+          </p:cNvPr>
+          <p:cNvSpPr>
+            <a:spLocks noGrp="1"/>
+          </p:cNvSpPr>
+          <p:nvPr>
+            <p:ph type="title"/>
+          </p:nvPr>
+        </p:nvSpPr>
+        <p:spPr>
+          <a:xfrm>
+            <a:off x="839788" y="457200"/>
+            <a:ext cx="3932237" cy="1600200"/>
+          </a:xfrm>
+        </p:spPr>
+        <p:txBody>
+          <a:bodyPr anchor="b"/>
+          <a:lstStyle>
+            <a:lvl1pPr>
+              <a:defRPr sz="3200"/>
+            </a:lvl1pPr>
+          </a:lstStyle>
+          <a:p>
+            <a:r>
+              <a:rPr lang="it-IT"/>
+              <a:t>Fare clic per modificare lo stile del titolo dello schema</a:t>
+            </a:r>
+          </a:p>
+        </p:txBody>
+      </p:sp>
+      <p:sp>
+        <p:nvSpPr>
+          <p:cNvPr id="3" name="Segnaposto contenuto 2">
+            <a:extLst>
+              <a:ext uri="{FF2B5EF4-FFF2-40B4-BE49-F238E27FC236}">
+                <a16:creationId xmlns:a16="http://schemas.microsoft.com/office/drawing/2014/main" id="{5C18161C-3756-FBB9-5B19-00738B46A096}"/>
+              </a:ext>
+            </a:extLst>
+          </p:cNvPr>
+          <p:cNvSpPr>
+            <a:spLocks noGrp="1"/>
+          </p:cNvSpPr>
+          <p:nvPr>
+            <p:ph idx="1"/>
+          </p:nvPr>
+        </p:nvSpPr>
+        <p:spPr>
+          <a:xfrm>
+            <a:off x="5183188" y="987425"/>
+            <a:ext cx="6172200" cy="4873625"/>
+          </a:xfrm>
+        </p:spPr>
+        <p:txBody>
+          <a:bodyPr/>
+          <a:lstStyle>
+            <a:lvl1pPr>
+              <a:defRPr sz="3200"/>
+            </a:lvl1pPr>
+            <a:lvl2pPr>
+              <a:defRPr sz="2800"/>
+            </a:lvl2pPr>
+            <a:lvl3pPr>
+              <a:defRPr sz="2400"/>
+            </a:lvl3pPr>
+            <a:lvl4pPr>
+              <a:defRPr sz="2000"/>
+            </a:lvl4pPr>
+            <a:lvl5pPr>
+              <a:defRPr sz="2000"/>
+            </a:lvl5pPr>
+            <a:lvl6pPr>
+              <a:defRPr sz="2000"/>
+            </a:lvl6pPr>
+            <a:lvl7pPr>
+              <a:defRPr sz="2000"/>
+            </a:lvl7pPr>
+            <a:lvl8pPr>
+              <a:defRPr sz="2000"/>
+            </a:lvl8pPr>
+            <a:lvl9pPr>
+              <a:defRPr sz="2000"/>
+            </a:lvl9pPr>
+          </a:lstStyle>
+          <a:p>
+            <a:pPr lvl="0"/>
+            <a:r>
+              <a:rPr lang="it-IT"/>
+              <a:t>Fare clic per modificare gli stili del testo dello schema</a:t>
+            </a:r>
+          </a:p>
+          <a:p>
+            <a:pPr lvl="1"/>
+            <a:r>
+              <a:rPr lang="it-IT"/>
+              <a:t>Secondo livello</a:t>
+            </a:r>
+          </a:p>
+          <a:p>
+            <a:pPr lvl="2"/>
+            <a:r>
+              <a:rPr lang="it-IT"/>
+              <a:t>Terzo livello</a:t>
+            </a:r>
+          </a:p>
+          <a:p>
+            <a:pPr lvl="3"/>
+            <a:r>
+              <a:rPr lang="it-IT"/>
+              <a:t>Quarto livello</a:t>
+            </a:r>
+          </a:p>
+          <a:p>
+            <a:pPr lvl="4"/>
+            <a:r>
+              <a:rPr lang="it-IT"/>
+              <a:t>Quinto livello</a:t>
+            </a:r>
+          </a:p>
+        </p:txBody>
+      </p:sp>
+      <p:sp>
+        <p:nvSpPr>
+          <p:cNvPr id="4" name="Segnaposto testo 3">
+            <a:extLst>
+              <a:ext uri="{FF2B5EF4-FFF2-40B4-BE49-F238E27FC236}">
+                <a16:creationId xmlns:a16="http://schemas.microsoft.com/office/drawing/2014/main" id="{E4002277-24EA-375C-D60D-7493D0213F27}"/>
+              </a:ext>
+            </a:extLst>
+          </p:cNvPr>
+          <p:cNvSpPr>
+            <a:spLocks noGrp="1"/>
+          </p:cNvSpPr>
+          <p:nvPr>
+            <p:ph type="body" sz="half" idx="2"/>
+          </p:nvPr>
+        </p:nvSpPr>
+        <p:spPr>
+          <a:xfrm>
+            <a:off x="839788" y="2057400"/>
+            <a:ext cx="3932237" cy="3811588"/>
+          </a:xfrm>
+        </p:spPr>
+        <p:txBody>
+          <a:bodyPr/>
+          <a:lstStyle>
+            <a:lvl1pPr marL="0" indent="0">
+              <a:buNone/>
+              <a:defRPr sz="1600"/>
+            </a:lvl1pPr>
+            <a:lvl2pPr marL="457200" indent="0">
+              <a:buNone/>
+              <a:defRPr sz="1400"/>
+            </a:lvl2pPr>
+            <a:lvl3pPr marL="914400" indent="0">
+              <a:buNone/>
+              <a:defRPr sz="1200"/>
+            </a:lvl3pPr>
+            <a:lvl4pPr marL="1371600" indent="0">
+              <a:buNone/>
+              <a:defRPr sz="1000"/>
+            </a:lvl4pPr>
+            <a:lvl5pPr marL="1828800" indent="0">
+              <a:buNone/>
+              <a:defRPr sz="1000"/>
+            </a:lvl5pPr>
+            <a:lvl6pPr marL="2286000" indent="0">
+              <a:buNone/>
+              <a:defRPr sz="1000"/>
+            </a:lvl6pPr>
+            <a:lvl7pPr marL="2743200" indent="0">
+              <a:buNone/>
+              <a:defRPr sz="1000"/>
+            </a:lvl7pPr>
+            <a:lvl8pPr marL="3200400" indent="0">
+              <a:buNone/>
+              <a:defRPr sz="1000"/>
+            </a:lvl8pPr>
+            <a:lvl9pPr marL="3657600" indent="0">
+              <a:buNone/>
+              <a:defRPr sz="1000"/>
+            </a:lvl9pPr>
+          </a:lstStyle>
+          <a:p>
+            <a:pPr lvl="0"/>
+            <a:r>
+              <a:rPr lang="it-IT"/>
+              <a:t>Fare clic per modificare gli stili del testo dello schema</a:t>
+            </a:r>
+          </a:p>
+        </p:txBody>
+      </p:sp>
+      <p:sp>
+        <p:nvSpPr>
+          <p:cNvPr id="5" name="Segnaposto data 4">
+            <a:extLst>
+              <a:ext uri="{FF2B5EF4-FFF2-40B4-BE49-F238E27FC236}">
+                <a16:creationId xmlns:a16="http://schemas.microsoft.com/office/drawing/2014/main" id="{53783C82-07BB-43E7-84AA-CF6CA0FEBB9C}"/>
+              </a:ext>
+            </a:extLst>
+          </p:cNvPr>
+          <p:cNvSpPr>
+            <a:spLocks noGrp="1"/>
+          </p:cNvSpPr>
+          <p:nvPr>
+            <p:ph type="dt" sz="half" idx="10"/>
+          </p:nvPr>
+        </p:nvSpPr>
+        <p:spPr/>
+        <p:txBody>
+          <a:bodyPr/>
+          <a:lstStyle/>
+          <a:p>
+            <a:pPr>
+              <a:defRPr/>
+            </a:pPr>
+            <a:fld id="{BCC18F51-09EC-435C-A3BA-64A766E099C0}" type="datetimeFigureOut">
+              <a:rPr lang="it-IT" smtClean="0"/>
+              <a:t>30/10/2025</a:t>
+            </a:fld>
+            <a:endParaRPr lang="it-IT"/>
+          </a:p>
+        </p:txBody>
+      </p:sp>
+      <p:sp>
+        <p:nvSpPr>
+          <p:cNvPr id="6" name="Segnaposto piè di pagina 5">
+            <a:extLst>
+              <a:ext uri="{FF2B5EF4-FFF2-40B4-BE49-F238E27FC236}">
+                <a16:creationId xmlns:a16="http://schemas.microsoft.com/office/drawing/2014/main" id="{B8795168-0568-FAAA-6D65-662AEB210647}"/>
+              </a:ext>
+            </a:extLst>
+          </p:cNvPr>
+          <p:cNvSpPr>
+            <a:spLocks noGrp="1"/>
+          </p:cNvSpPr>
+          <p:nvPr>
+            <p:ph type="ftr" sz="quarter" idx="11"/>
+          </p:nvPr>
+        </p:nvSpPr>
+        <p:spPr/>
+        <p:txBody>
+          <a:bodyPr/>
+          <a:lstStyle/>
+          <a:p>
+            <a:pPr>
+              <a:defRPr/>
+            </a:pPr>
+            <a:endParaRPr lang="it-IT"/>
+          </a:p>
+        </p:txBody>
+      </p:sp>
+      <p:sp>
+        <p:nvSpPr>
+          <p:cNvPr id="7" name="Segnaposto numero diapositiva 6">
+            <a:extLst>
+              <a:ext uri="{FF2B5EF4-FFF2-40B4-BE49-F238E27FC236}">
+                <a16:creationId xmlns:a16="http://schemas.microsoft.com/office/drawing/2014/main" id="{8829B62D-C971-E9B6-E72E-E2BB0DC891E0}"/>
+              </a:ext>
+            </a:extLst>
+          </p:cNvPr>
+          <p:cNvSpPr>
+            <a:spLocks noGrp="1"/>
+          </p:cNvSpPr>
+          <p:nvPr>
+            <p:ph type="sldNum" sz="quarter" idx="12"/>
+          </p:nvPr>
+        </p:nvSpPr>
+        <p:spPr/>
+        <p:txBody>
+          <a:bodyPr/>
+          <a:lstStyle/>
+          <a:p>
+            <a:pPr>
+              <a:defRPr/>
+            </a:pPr>
+            <a:fld id="{08395586-F03A-48D1-94DF-16B239DF4FB5}" type="slidenum">
+              <a:rPr lang="it-IT" smtClean="0"/>
+              <a:t>‹N›</a:t>
+            </a:fld>
+            <a:endParaRPr lang="it-IT"/>
+          </a:p>
+        </p:txBody>
+      </p:sp>
+    </p:spTree>
+    <p:extLst>
+      <p:ext uri="{BB962C8B-B14F-4D97-AF65-F5344CB8AC3E}">
+        <p14:creationId xmlns:p14="http://schemas.microsoft.com/office/powerpoint/2010/main" val="6214673"/>
+      </p:ext>
+    </p:extLst>
+  </p:cSld>
+  <p:clrMapOvr>
+    <a:masterClrMapping/>
+  </p:clrMapOvr>
+  <p:extLst>
+    <p:ext uri="{DCECCB84-F9BA-43D5-87BE-67443E8EF086}">
+      <p15:sldGuideLst xmlns:p15="http://schemas.microsoft.com/office/powerpoint/2012/main"/>
+    </p:ext>
+  </p:extLst>
+</p:sldLayout>
+</file>
+
+<file path=ppt/slideLayouts/slideLayout9.xml><?xml version="1.0" encoding="utf-8"?>
+<p:sldLayout xmlns:a="http://schemas.openxmlformats.org/drawingml/2006/main" xmlns:r="http://schemas.openxmlformats.org/officeDocument/2006/relationships" xmlns:p="http://schemas.openxmlformats.org/presentationml/2006/main" type="picTx" preserve="1">
+  <p:cSld name="Immagine con didascalia">
+    <p:spTree>
+      <p:nvGrpSpPr>
+        <p:cNvPr id="1" name=""/>
+        <p:cNvGrpSpPr/>
+        <p:nvPr/>
+      </p:nvGrpSpPr>
+      <p:grpSpPr>
+        <a:xfrm>
+          <a:off x="0" y="0"/>
+          <a:ext cx="0" cy="0"/>
+          <a:chOff x="0" y="0"/>
+          <a:chExt cx="0" cy="0"/>
+        </a:xfrm>
+      </p:grpSpPr>
+      <p:sp>
+        <p:nvSpPr>
+          <p:cNvPr id="2" name="Titolo 1">
+            <a:extLst>
+              <a:ext uri="{FF2B5EF4-FFF2-40B4-BE49-F238E27FC236}">
+                <a16:creationId xmlns:a16="http://schemas.microsoft.com/office/drawing/2014/main" id="{BAC43BD7-2093-69A4-5B7B-0740C48E8B3E}"/>
+              </a:ext>
+            </a:extLst>
+          </p:cNvPr>
+          <p:cNvSpPr>
+            <a:spLocks noGrp="1"/>
+          </p:cNvSpPr>
+          <p:nvPr>
+            <p:ph type="title"/>
+          </p:nvPr>
+        </p:nvSpPr>
+        <p:spPr>
+          <a:xfrm>
+            <a:off x="839788" y="457200"/>
+            <a:ext cx="3932237" cy="1600200"/>
+          </a:xfrm>
+        </p:spPr>
+        <p:txBody>
+          <a:bodyPr anchor="b"/>
+          <a:lstStyle>
+            <a:lvl1pPr>
+              <a:defRPr sz="3200"/>
+            </a:lvl1pPr>
+          </a:lstStyle>
+          <a:p>
+            <a:r>
+              <a:rPr lang="it-IT"/>
+              <a:t>Fare clic per modificare lo stile del titolo dello schema</a:t>
+            </a:r>
+          </a:p>
+        </p:txBody>
+      </p:sp>
+      <p:sp>
+        <p:nvSpPr>
+          <p:cNvPr id="3" name="Segnaposto immagine 2">
+            <a:extLst>
+              <a:ext uri="{FF2B5EF4-FFF2-40B4-BE49-F238E27FC236}">
+                <a16:creationId xmlns:a16="http://schemas.microsoft.com/office/drawing/2014/main" id="{8C884921-2E70-BB47-5563-D782F5EF84D3}"/>
+              </a:ext>
+            </a:extLst>
+          </p:cNvPr>
+          <p:cNvSpPr>
+            <a:spLocks noGrp="1"/>
+          </p:cNvSpPr>
+          <p:nvPr>
+            <p:ph type="pic" idx="1"/>
+          </p:nvPr>
+        </p:nvSpPr>
+        <p:spPr>
+          <a:xfrm>
+            <a:off x="5183188" y="987425"/>
+            <a:ext cx="6172200" cy="4873625"/>
+          </a:xfrm>
+        </p:spPr>
+        <p:txBody>
+          <a:bodyPr/>
+          <a:lstStyle>
+            <a:lvl1pPr marL="0" indent="0">
+              <a:buNone/>
+              <a:defRPr sz="3200"/>
+            </a:lvl1pPr>
+            <a:lvl2pPr marL="457200" indent="0">
+              <a:buNone/>
+              <a:defRPr sz="2800"/>
+            </a:lvl2pPr>
+            <a:lvl3pPr marL="914400" indent="0">
+              <a:buNone/>
+              <a:defRPr sz="2400"/>
+            </a:lvl3pPr>
+            <a:lvl4pPr marL="1371600" indent="0">
+              <a:buNone/>
+              <a:defRPr sz="2000"/>
+            </a:lvl4pPr>
+            <a:lvl5pPr marL="1828800" indent="0">
+              <a:buNone/>
+              <a:defRPr sz="2000"/>
+            </a:lvl5pPr>
+            <a:lvl6pPr marL="2286000" indent="0">
+              <a:buNone/>
+              <a:defRPr sz="2000"/>
+            </a:lvl6pPr>
+            <a:lvl7pPr marL="2743200" indent="0">
+              <a:buNone/>
+              <a:defRPr sz="2000"/>
+            </a:lvl7pPr>
+            <a:lvl8pPr marL="3200400" indent="0">
+              <a:buNone/>
+              <a:defRPr sz="2000"/>
+            </a:lvl8pPr>
+            <a:lvl9pPr marL="3657600" indent="0">
+              <a:buNone/>
+              <a:defRPr sz="2000"/>
+            </a:lvl9pPr>
+          </a:lstStyle>
+          <a:p>
+            <a:endParaRPr lang="it-IT"/>
+          </a:p>
+        </p:txBody>
+      </p:sp>
+      <p:sp>
+        <p:nvSpPr>
+          <p:cNvPr id="4" name="Segnaposto testo 3">
+            <a:extLst>
+              <a:ext uri="{FF2B5EF4-FFF2-40B4-BE49-F238E27FC236}">
+                <a16:creationId xmlns:a16="http://schemas.microsoft.com/office/drawing/2014/main" id="{59A9F77F-8989-71D9-D0C7-10DBD728DBA0}"/>
+              </a:ext>
+            </a:extLst>
+          </p:cNvPr>
+          <p:cNvSpPr>
+            <a:spLocks noGrp="1"/>
+          </p:cNvSpPr>
+          <p:nvPr>
+            <p:ph type="body" sz="half" idx="2"/>
+          </p:nvPr>
+        </p:nvSpPr>
+        <p:spPr>
+          <a:xfrm>
+            <a:off x="839788" y="2057400"/>
+            <a:ext cx="3932237" cy="3811588"/>
+          </a:xfrm>
+        </p:spPr>
+        <p:txBody>
+          <a:bodyPr/>
+          <a:lstStyle>
+            <a:lvl1pPr marL="0" indent="0">
+              <a:buNone/>
+              <a:defRPr sz="1600"/>
+            </a:lvl1pPr>
+            <a:lvl2pPr marL="457200" indent="0">
+              <a:buNone/>
+              <a:defRPr sz="1400"/>
+            </a:lvl2pPr>
+            <a:lvl3pPr marL="914400" indent="0">
+              <a:buNone/>
+              <a:defRPr sz="1200"/>
+            </a:lvl3pPr>
+            <a:lvl4pPr marL="1371600" indent="0">
+              <a:buNone/>
+              <a:defRPr sz="1000"/>
+            </a:lvl4pPr>
+            <a:lvl5pPr marL="1828800" indent="0">
+              <a:buNone/>
+              <a:defRPr sz="1000"/>
+            </a:lvl5pPr>
+            <a:lvl6pPr marL="2286000" indent="0">
+              <a:buNone/>
+              <a:defRPr sz="1000"/>
+            </a:lvl6pPr>
+            <a:lvl7pPr marL="2743200" indent="0">
+              <a:buNone/>
+              <a:defRPr sz="1000"/>
+            </a:lvl7pPr>
+            <a:lvl8pPr marL="3200400" indent="0">
+              <a:buNone/>
+              <a:defRPr sz="1000"/>
+            </a:lvl8pPr>
+            <a:lvl9pPr marL="3657600" indent="0">
+              <a:buNone/>
+              <a:defRPr sz="1000"/>
+            </a:lvl9pPr>
+          </a:lstStyle>
+          <a:p>
+            <a:pPr lvl="0"/>
+            <a:r>
+              <a:rPr lang="it-IT"/>
+              <a:t>Fare clic per modificare gli stili del testo dello schema</a:t>
+            </a:r>
+          </a:p>
+        </p:txBody>
+      </p:sp>
+      <p:sp>
+        <p:nvSpPr>
+          <p:cNvPr id="5" name="Segnaposto data 4">
+            <a:extLst>
+              <a:ext uri="{FF2B5EF4-FFF2-40B4-BE49-F238E27FC236}">
+                <a16:creationId xmlns:a16="http://schemas.microsoft.com/office/drawing/2014/main" id="{B0365336-2A81-B526-28BF-08DE6CFD9123}"/>
+              </a:ext>
+            </a:extLst>
+          </p:cNvPr>
+          <p:cNvSpPr>
+            <a:spLocks noGrp="1"/>
+          </p:cNvSpPr>
+          <p:nvPr>
+            <p:ph type="dt" sz="half" idx="10"/>
+          </p:nvPr>
+        </p:nvSpPr>
+        <p:spPr/>
+        <p:txBody>
+          <a:bodyPr/>
+          <a:lstStyle/>
+          <a:p>
+            <a:pPr>
+              <a:defRPr/>
+            </a:pPr>
+            <a:fld id="{BCC18F51-09EC-435C-A3BA-64A766E099C0}" type="datetimeFigureOut">
+              <a:rPr lang="it-IT" smtClean="0"/>
+              <a:t>30/10/2025</a:t>
+            </a:fld>
+            <a:endParaRPr lang="it-IT"/>
+          </a:p>
+        </p:txBody>
+      </p:sp>
+      <p:sp>
+        <p:nvSpPr>
+          <p:cNvPr id="6" name="Segnaposto piè di pagina 5">
+            <a:extLst>
+              <a:ext uri="{FF2B5EF4-FFF2-40B4-BE49-F238E27FC236}">
+                <a16:creationId xmlns:a16="http://schemas.microsoft.com/office/drawing/2014/main" id="{B4284296-802F-A2D3-A03A-3BDC26A42225}"/>
+              </a:ext>
+            </a:extLst>
+          </p:cNvPr>
+          <p:cNvSpPr>
+            <a:spLocks noGrp="1"/>
+          </p:cNvSpPr>
+          <p:nvPr>
+            <p:ph type="ftr" sz="quarter" idx="11"/>
+          </p:nvPr>
+        </p:nvSpPr>
+        <p:spPr/>
+        <p:txBody>
+          <a:bodyPr/>
+          <a:lstStyle/>
+          <a:p>
+            <a:pPr>
+              <a:defRPr/>
+            </a:pPr>
+            <a:endParaRPr lang="it-IT"/>
+          </a:p>
+        </p:txBody>
+      </p:sp>
+      <p:sp>
+        <p:nvSpPr>
+          <p:cNvPr id="7" name="Segnaposto numero diapositiva 6">
+            <a:extLst>
+              <a:ext uri="{FF2B5EF4-FFF2-40B4-BE49-F238E27FC236}">
+                <a16:creationId xmlns:a16="http://schemas.microsoft.com/office/drawing/2014/main" id="{8305C5C8-B415-C6FF-8EF6-DBFF8DDB5C8B}"/>
+              </a:ext>
+            </a:extLst>
+          </p:cNvPr>
+          <p:cNvSpPr>
+            <a:spLocks noGrp="1"/>
+          </p:cNvSpPr>
+          <p:nvPr>
+            <p:ph type="sldNum" sz="quarter" idx="12"/>
+          </p:nvPr>
+        </p:nvSpPr>
+        <p:spPr/>
+        <p:txBody>
+          <a:bodyPr/>
+          <a:lstStyle/>
+          <a:p>
+            <a:pPr>
+              <a:defRPr/>
+            </a:pPr>
+            <a:fld id="{08395586-F03A-48D1-94DF-16B239DF4FB5}" type="slidenum">
+              <a:rPr lang="it-IT" smtClean="0"/>
+              <a:t>‹N›</a:t>
+            </a:fld>
+            <a:endParaRPr lang="it-IT"/>
+          </a:p>
+        </p:txBody>
+      </p:sp>
+    </p:spTree>
+    <p:extLst>
+      <p:ext uri="{BB962C8B-B14F-4D97-AF65-F5344CB8AC3E}">
+        <p14:creationId xmlns:p14="http://schemas.microsoft.com/office/powerpoint/2010/main" val="3306204815"/>
+      </p:ext>
+    </p:extLst>
+  </p:cSld>
+  <p:clrMapOvr>
+    <a:masterClrMapping/>
+  </p:clrMapOvr>
+</p:sldLayout>
+</file>
+
+<file path=ppt/slideMasters/slideMaster1.xml><?xml version="1.0" encoding="utf-8"?>
+<p:sldMaster xmlns:a="http://schemas.openxmlformats.org/drawingml/2006/main" xmlns:r="http://schemas.openxmlformats.org/officeDocument/2006/relationships" xmlns:p="http://schemas.openxmlformats.org/presentationml/2006/main">
+  <p:cSld>
+    <p:bg>
+      <p:bgRef idx="1001">
+        <a:schemeClr val="bg1"/>
+      </p:bgRef>
+    </p:bg>
+    <p:spTree>
+      <p:nvGrpSpPr>
+        <p:cNvPr id="1" name=""/>
+        <p:cNvGrpSpPr/>
+        <p:nvPr/>
+      </p:nvGrpSpPr>
+      <p:grpSpPr>
+        <a:xfrm>
+          <a:off x="0" y="0"/>
+          <a:ext cx="0" cy="0"/>
+          <a:chOff x="0" y="0"/>
+          <a:chExt cx="0" cy="0"/>
+        </a:xfrm>
+      </p:grpSpPr>
+      <p:sp>
+        <p:nvSpPr>
+          <p:cNvPr id="2" name="Segnaposto titolo 1">
+            <a:extLst>
+              <a:ext uri="{FF2B5EF4-FFF2-40B4-BE49-F238E27FC236}">
+                <a16:creationId xmlns:a16="http://schemas.microsoft.com/office/drawing/2014/main" id="{7FD68F0B-416C-F1B3-AB07-FE570600E4A0}"/>
+              </a:ext>
+            </a:extLst>
+          </p:cNvPr>
+          <p:cNvSpPr>
+            <a:spLocks noGrp="1"/>
+          </p:cNvSpPr>
+          <p:nvPr>
+            <p:ph type="title"/>
+          </p:nvPr>
+        </p:nvSpPr>
+        <p:spPr>
           <a:xfrm>
             <a:off x="838200" y="365125"/>
             <a:ext cx="10515600" cy="1325563"/>
@@ -4995,19 +7720,22 @@
           </a:bodyPr>
           <a:lstStyle/>
           <a:p>
-            <a:pPr>
-              <a:defRPr/>
-            </a:pPr>
             <a:r>
               <a:rPr lang="it-IT"/>
-              <a:t>Fare clic per modificare lo stile del titolo</a:t>
-            </a:r>
-          </a:p>
-        </p:txBody>
-      </p:sp>
-      <p:sp>
-        <p:nvSpPr>
-          <p:cNvPr id="1841652565" name="Segnaposto testo 2"/>
+              <a:t>Fare clic per modificare lo stile del titolo dello schema</a:t>
+            </a:r>
+          </a:p>
+        </p:txBody>
+      </p:sp>
+      <p:sp>
+        <p:nvSpPr>
+          <p:cNvPr id="3" name="Segnaposto testo 2">
+            <a:extLst>
+              <a:ext uri="{FF2B5EF4-FFF2-40B4-BE49-F238E27FC236}">
+                <a16:creationId xmlns:a16="http://schemas.microsoft.com/office/drawing/2014/main" id="{394938B2-0EB4-AEEA-37AD-1FD10B082344}"/>
+              </a:ext>
+            </a:extLst>
+          </p:cNvPr>
           <p:cNvSpPr>
             <a:spLocks noGrp="1"/>
           </p:cNvSpPr>
@@ -5015,7 +7743,7 @@
             <p:ph type="body" idx="1"/>
           </p:nvPr>
         </p:nvSpPr>
-        <p:spPr bwMode="auto">
+        <p:spPr>
           <a:xfrm>
             <a:off x="838200" y="1825625"/>
             <a:ext cx="10515600" cy="4351338"/>
@@ -5030,49 +7758,35 @@
           </a:bodyPr>
           <a:lstStyle/>
           <a:p>
-            <a:pPr lvl="0">
-              <a:defRPr/>
-            </a:pPr>
+            <a:pPr lvl="0"/>
             <a:r>
               <a:rPr lang="it-IT"/>
-              <a:t>Fare clic per modificare stili del testo dello schema</a:t>
-            </a:r>
-            <a:endParaRPr/>
-          </a:p>
-          <a:p>
-            <a:pPr lvl="1">
-              <a:defRPr/>
-            </a:pPr>
+              <a:t>Fare clic per modificare gli stili del testo dello schema</a:t>
+            </a:r>
+          </a:p>
+          <a:p>
+            <a:pPr lvl="1"/>
             <a:r>
               <a:rPr lang="it-IT"/>
               <a:t>Secondo livello</a:t>
             </a:r>
-            <a:endParaRPr/>
-          </a:p>
-          <a:p>
-            <a:pPr lvl="2">
-              <a:defRPr/>
-            </a:pPr>
+          </a:p>
+          <a:p>
+            <a:pPr lvl="2"/>
             <a:r>
               <a:rPr lang="it-IT"/>
               <a:t>Terzo livello</a:t>
             </a:r>
-            <a:endParaRPr/>
-          </a:p>
-          <a:p>
-            <a:pPr lvl="3">
-              <a:defRPr/>
-            </a:pPr>
+          </a:p>
+          <a:p>
+            <a:pPr lvl="3"/>
             <a:r>
               <a:rPr lang="it-IT"/>
               <a:t>Quarto livello</a:t>
             </a:r>
-            <a:endParaRPr/>
-          </a:p>
-          <a:p>
-            <a:pPr lvl="4">
-              <a:defRPr/>
-            </a:pPr>
+          </a:p>
+          <a:p>
+            <a:pPr lvl="4"/>
             <a:r>
               <a:rPr lang="it-IT"/>
               <a:t>Quinto livello</a:t>
@@ -5082,7 +7796,13 @@
       </p:sp>
       <p:sp>
         <p:nvSpPr>
-          <p:cNvPr id="190234425" name="Segnaposto data 3"/>
+          <p:cNvPr id="4" name="Segnaposto data 3">
+            <a:extLst>
+              <a:ext uri="{FF2B5EF4-FFF2-40B4-BE49-F238E27FC236}">
+                <a16:creationId xmlns:a16="http://schemas.microsoft.com/office/drawing/2014/main" id="{71AC173B-D876-66BE-DC43-D86D75D225F7}"/>
+              </a:ext>
+            </a:extLst>
+          </p:cNvPr>
           <p:cNvSpPr>
             <a:spLocks noGrp="1"/>
           </p:cNvSpPr>
@@ -5090,7 +7810,7 @@
             <p:ph type="dt" sz="half" idx="2"/>
           </p:nvPr>
         </p:nvSpPr>
-        <p:spPr bwMode="auto">
+        <p:spPr>
           <a:xfrm>
             <a:off x="838200" y="6356350"/>
             <a:ext cx="2743200" cy="365125"/>
@@ -5106,7 +7826,7 @@
               <a:defRPr sz="1200">
                 <a:solidFill>
                   <a:schemeClr val="tx1">
-                    <a:tint val="75000"/>
+                    <a:tint val="82000"/>
                   </a:schemeClr>
                 </a:solidFill>
               </a:defRPr>
@@ -5117,8 +7837,8 @@
               <a:defRPr/>
             </a:pPr>
             <a:fld id="{BCC18F51-09EC-435C-A3BA-64A766E099C0}" type="datetimeFigureOut">
-              <a:rPr lang="it-IT"/>
-              <a:t>26/10/2025</a:t>
+              <a:rPr lang="it-IT" smtClean="0"/>
+              <a:t>30/10/2025</a:t>
             </a:fld>
             <a:endParaRPr lang="it-IT"/>
           </a:p>
@@ -5126,7 +7846,13 @@
       </p:sp>
       <p:sp>
         <p:nvSpPr>
-          <p:cNvPr id="1459486652" name="Segnaposto piè di pagina 4"/>
+          <p:cNvPr id="5" name="Segnaposto piè di pagina 4">
+            <a:extLst>
+              <a:ext uri="{FF2B5EF4-FFF2-40B4-BE49-F238E27FC236}">
+                <a16:creationId xmlns:a16="http://schemas.microsoft.com/office/drawing/2014/main" id="{473E8FFF-3E66-9B39-2A91-C01C79D6B439}"/>
+              </a:ext>
+            </a:extLst>
+          </p:cNvPr>
           <p:cNvSpPr>
             <a:spLocks noGrp="1"/>
           </p:cNvSpPr>
@@ -5134,7 +7860,7 @@
             <p:ph type="ftr" sz="quarter" idx="3"/>
           </p:nvPr>
         </p:nvSpPr>
-        <p:spPr bwMode="auto">
+        <p:spPr>
           <a:xfrm>
             <a:off x="4038600" y="6356350"/>
             <a:ext cx="4114800" cy="365125"/>
@@ -5150,7 +7876,7 @@
               <a:defRPr sz="1200">
                 <a:solidFill>
                   <a:schemeClr val="tx1">
-                    <a:tint val="75000"/>
+                    <a:tint val="82000"/>
                   </a:schemeClr>
                 </a:solidFill>
               </a:defRPr>
@@ -5166,7 +7892,13 @@
       </p:sp>
       <p:sp>
         <p:nvSpPr>
-          <p:cNvPr id="1778475728" name="Segnaposto numero diapositiva 5"/>
+          <p:cNvPr id="6" name="Segnaposto numero diapositiva 5">
+            <a:extLst>
+              <a:ext uri="{FF2B5EF4-FFF2-40B4-BE49-F238E27FC236}">
+                <a16:creationId xmlns:a16="http://schemas.microsoft.com/office/drawing/2014/main" id="{958874AF-2C8E-4994-CE16-FCD5FDE8E614}"/>
+              </a:ext>
+            </a:extLst>
+          </p:cNvPr>
           <p:cNvSpPr>
             <a:spLocks noGrp="1"/>
           </p:cNvSpPr>
@@ -5174,7 +7906,7 @@
             <p:ph type="sldNum" sz="quarter" idx="4"/>
           </p:nvPr>
         </p:nvSpPr>
-        <p:spPr bwMode="auto">
+        <p:spPr>
           <a:xfrm>
             <a:off x="8610600" y="6356350"/>
             <a:ext cx="2743200" cy="365125"/>
@@ -5190,7 +7922,7 @@
               <a:defRPr sz="1200">
                 <a:solidFill>
                   <a:schemeClr val="tx1">
-                    <a:tint val="75000"/>
+                    <a:tint val="82000"/>
                   </a:schemeClr>
                 </a:solidFill>
               </a:defRPr>
@@ -5201,7 +7933,7 @@
               <a:defRPr/>
             </a:pPr>
             <a:fld id="{08395586-F03A-48D1-94DF-16B239DF4FB5}" type="slidenum">
-              <a:rPr lang="it-IT"/>
+              <a:rPr lang="it-IT" smtClean="0"/>
               <a:t>‹N›</a:t>
             </a:fld>
             <a:endParaRPr lang="it-IT"/>
@@ -5209,32 +7941,48 @@
         </p:txBody>
       </p:sp>
     </p:spTree>
+    <p:extLst>
+      <p:ext uri="{BB962C8B-B14F-4D97-AF65-F5344CB8AC3E}">
+        <p14:creationId xmlns:p14="http://schemas.microsoft.com/office/powerpoint/2010/main" val="566033698"/>
+      </p:ext>
+    </p:extLst>
   </p:cSld>
   <p:clrMap bg1="lt1" tx1="dk1" bg2="lt2" tx2="dk2" accent1="accent1" accent2="accent2" accent3="accent3" accent4="accent4" accent5="accent5" accent6="accent6" hlink="hlink" folHlink="folHlink"/>
   <p:sldLayoutIdLst>
-    <p:sldLayoutId id="2147483649" r:id="rId1"/>
-    <p:sldLayoutId id="2147483650" r:id="rId2"/>
-    <p:sldLayoutId id="2147483651" r:id="rId3"/>
-    <p:sldLayoutId id="2147483652" r:id="rId4"/>
-    <p:sldLayoutId id="2147483653" r:id="rId5"/>
-    <p:sldLayoutId id="2147483654" r:id="rId6"/>
-    <p:sldLayoutId id="2147483655" r:id="rId7"/>
-    <p:sldLayoutId id="2147483656" r:id="rId8"/>
-    <p:sldLayoutId id="2147483657" r:id="rId9"/>
-    <p:sldLayoutId id="2147483658" r:id="rId10"/>
-    <p:sldLayoutId id="2147483659" r:id="rId11"/>
+    <p:sldLayoutId id="2147483760" r:id="rId1"/>
+    <p:sldLayoutId id="2147483761" r:id="rId2"/>
+    <p:sldLayoutId id="2147483762" r:id="rId3"/>
+    <p:sldLayoutId id="2147483763" r:id="rId4"/>
+    <p:sldLayoutId id="2147483764" r:id="rId5"/>
+    <p:sldLayoutId id="2147483765" r:id="rId6"/>
+    <p:sldLayoutId id="2147483766" r:id="rId7"/>
+    <p:sldLayoutId id="2147483767" r:id="rId8"/>
+    <p:sldLayoutId id="2147483768" r:id="rId9"/>
+    <p:sldLayoutId id="2147483769" r:id="rId10"/>
+    <p:sldLayoutId id="2147483770" r:id="rId11"/>
+    <p:sldLayoutId id="2147483649" r:id="rId12"/>
+    <p:sldLayoutId id="2147483650" r:id="rId13"/>
+    <p:sldLayoutId id="2147483651" r:id="rId14"/>
+    <p:sldLayoutId id="2147483652" r:id="rId15"/>
+    <p:sldLayoutId id="2147483653" r:id="rId16"/>
+    <p:sldLayoutId id="2147483654" r:id="rId17"/>
+    <p:sldLayoutId id="2147483655" r:id="rId18"/>
+    <p:sldLayoutId id="2147483656" r:id="rId19"/>
+    <p:sldLayoutId id="2147483657" r:id="rId20"/>
+    <p:sldLayoutId id="2147483658" r:id="rId21"/>
+    <p:sldLayoutId id="2147483659" r:id="rId22"/>
   </p:sldLayoutIdLst>
   <p:txStyles>
     <p:titleStyle>
-      <a:lvl1pPr algn="l" defTabSz="914400" rtl="0">
+      <a:lvl1pPr algn="l" defTabSz="914400" rtl="0" eaLnBrk="1" latinLnBrk="0" hangingPunct="1">
         <a:lnSpc>
           <a:spcPct val="90000"/>
         </a:lnSpc>
         <a:spcBef>
-          <a:spcPts val="0"/>
+          <a:spcPct val="0"/>
         </a:spcBef>
         <a:buNone/>
-        <a:defRPr sz="4400">
+        <a:defRPr sz="4400" kern="1200">
           <a:solidFill>
             <a:schemeClr val="tx1"/>
           </a:solidFill>
@@ -5245,16 +7993,16 @@
       </a:lvl1pPr>
     </p:titleStyle>
     <p:bodyStyle>
-      <a:lvl1pPr marL="228600" indent="-228600" algn="l" defTabSz="914400" rtl="0">
+      <a:lvl1pPr marL="228600" indent="-228600" algn="l" defTabSz="914400" rtl="0" eaLnBrk="1" latinLnBrk="0" hangingPunct="1">
         <a:lnSpc>
           <a:spcPct val="90000"/>
         </a:lnSpc>
         <a:spcBef>
           <a:spcPts val="1000"/>
         </a:spcBef>
-        <a:buFont typeface="Arial"/>
+        <a:buFont typeface="Arial" panose="020B0604020202020204" pitchFamily="34" charset="0"/>
         <a:buChar char="•"/>
-        <a:defRPr sz="2800">
+        <a:defRPr sz="2800" kern="1200">
           <a:solidFill>
             <a:schemeClr val="tx1"/>
           </a:solidFill>
@@ -5263,16 +8011,16 @@
           <a:cs typeface="+mn-cs"/>
         </a:defRPr>
       </a:lvl1pPr>
-      <a:lvl2pPr marL="685800" indent="-228600" algn="l" defTabSz="914400" rtl="0">
+      <a:lvl2pPr marL="685800" indent="-228600" algn="l" defTabSz="914400" rtl="0" eaLnBrk="1" latinLnBrk="0" hangingPunct="1">
         <a:lnSpc>
           <a:spcPct val="90000"/>
         </a:lnSpc>
         <a:spcBef>
           <a:spcPts val="500"/>
         </a:spcBef>
-        <a:buFont typeface="Arial"/>
+        <a:buFont typeface="Arial" panose="020B0604020202020204" pitchFamily="34" charset="0"/>
         <a:buChar char="•"/>
-        <a:defRPr sz="2400">
+        <a:defRPr sz="2400" kern="1200">
           <a:solidFill>
             <a:schemeClr val="tx1"/>
           </a:solidFill>
@@ -5281,16 +8029,16 @@
           <a:cs typeface="+mn-cs"/>
         </a:defRPr>
       </a:lvl2pPr>
-      <a:lvl3pPr marL="1143000" indent="-228600" algn="l" defTabSz="914400" rtl="0">
+      <a:lvl3pPr marL="1143000" indent="-228600" algn="l" defTabSz="914400" rtl="0" eaLnBrk="1" latinLnBrk="0" hangingPunct="1">
         <a:lnSpc>
           <a:spcPct val="90000"/>
         </a:lnSpc>
         <a:spcBef>
           <a:spcPts val="500"/>
         </a:spcBef>
-        <a:buFont typeface="Arial"/>
+        <a:buFont typeface="Arial" panose="020B0604020202020204" pitchFamily="34" charset="0"/>
         <a:buChar char="•"/>
-        <a:defRPr sz="2000">
+        <a:defRPr sz="2000" kern="1200">
           <a:solidFill>
             <a:schemeClr val="tx1"/>
           </a:solidFill>
@@ -5299,16 +8047,16 @@
           <a:cs typeface="+mn-cs"/>
         </a:defRPr>
       </a:lvl3pPr>
-      <a:lvl4pPr marL="1600200" indent="-228600" algn="l" defTabSz="914400" rtl="0">
+      <a:lvl4pPr marL="1600200" indent="-228600" algn="l" defTabSz="914400" rtl="0" eaLnBrk="1" latinLnBrk="0" hangingPunct="1">
         <a:lnSpc>
           <a:spcPct val="90000"/>
         </a:lnSpc>
         <a:spcBef>
           <a:spcPts val="500"/>
         </a:spcBef>
-        <a:buFont typeface="Arial"/>
+        <a:buFont typeface="Arial" panose="020B0604020202020204" pitchFamily="34" charset="0"/>
         <a:buChar char="•"/>
-        <a:defRPr sz="1800">
+        <a:defRPr sz="1800" kern="1200">
           <a:solidFill>
             <a:schemeClr val="tx1"/>
           </a:solidFill>
@@ -5317,16 +8065,16 @@
           <a:cs typeface="+mn-cs"/>
         </a:defRPr>
       </a:lvl4pPr>
-      <a:lvl5pPr marL="2057400" indent="-228600" algn="l" defTabSz="914400" rtl="0">
+      <a:lvl5pPr marL="2057400" indent="-228600" algn="l" defTabSz="914400" rtl="0" eaLnBrk="1" latinLnBrk="0" hangingPunct="1">
         <a:lnSpc>
           <a:spcPct val="90000"/>
         </a:lnSpc>
         <a:spcBef>
           <a:spcPts val="500"/>
         </a:spcBef>
-        <a:buFont typeface="Arial"/>
+        <a:buFont typeface="Arial" panose="020B0604020202020204" pitchFamily="34" charset="0"/>
         <a:buChar char="•"/>
-        <a:defRPr sz="1800">
+        <a:defRPr sz="1800" kern="1200">
           <a:solidFill>
             <a:schemeClr val="tx1"/>
           </a:solidFill>
@@ -5335,16 +8083,16 @@
           <a:cs typeface="+mn-cs"/>
         </a:defRPr>
       </a:lvl5pPr>
-      <a:lvl6pPr marL="2514600" indent="-228600" algn="l" defTabSz="914400" rtl="0">
+      <a:lvl6pPr marL="2514600" indent="-228600" algn="l" defTabSz="914400" rtl="0" eaLnBrk="1" latinLnBrk="0" hangingPunct="1">
         <a:lnSpc>
           <a:spcPct val="90000"/>
         </a:lnSpc>
         <a:spcBef>
           <a:spcPts val="500"/>
         </a:spcBef>
-        <a:buFont typeface="Arial"/>
+        <a:buFont typeface="Arial" panose="020B0604020202020204" pitchFamily="34" charset="0"/>
         <a:buChar char="•"/>
-        <a:defRPr sz="1800">
+        <a:defRPr sz="1800" kern="1200">
           <a:solidFill>
             <a:schemeClr val="tx1"/>
           </a:solidFill>
@@ -5353,16 +8101,16 @@
           <a:cs typeface="+mn-cs"/>
         </a:defRPr>
       </a:lvl6pPr>
-      <a:lvl7pPr marL="2971800" indent="-228600" algn="l" defTabSz="914400" rtl="0">
+      <a:lvl7pPr marL="2971800" indent="-228600" algn="l" defTabSz="914400" rtl="0" eaLnBrk="1" latinLnBrk="0" hangingPunct="1">
         <a:lnSpc>
           <a:spcPct val="90000"/>
         </a:lnSpc>
         <a:spcBef>
           <a:spcPts val="500"/>
         </a:spcBef>
-        <a:buFont typeface="Arial"/>
+        <a:buFont typeface="Arial" panose="020B0604020202020204" pitchFamily="34" charset="0"/>
         <a:buChar char="•"/>
-        <a:defRPr sz="1800">
+        <a:defRPr sz="1800" kern="1200">
           <a:solidFill>
             <a:schemeClr val="tx1"/>
           </a:solidFill>
@@ -5371,16 +8119,16 @@
           <a:cs typeface="+mn-cs"/>
         </a:defRPr>
       </a:lvl7pPr>
-      <a:lvl8pPr marL="3429000" indent="-228600" algn="l" defTabSz="914400" rtl="0">
+      <a:lvl8pPr marL="3429000" indent="-228600" algn="l" defTabSz="914400" rtl="0" eaLnBrk="1" latinLnBrk="0" hangingPunct="1">
         <a:lnSpc>
           <a:spcPct val="90000"/>
         </a:lnSpc>
         <a:spcBef>
           <a:spcPts val="500"/>
         </a:spcBef>
-        <a:buFont typeface="Arial"/>
+        <a:buFont typeface="Arial" panose="020B0604020202020204" pitchFamily="34" charset="0"/>
         <a:buChar char="•"/>
-        <a:defRPr sz="1800">
+        <a:defRPr sz="1800" kern="1200">
           <a:solidFill>
             <a:schemeClr val="tx1"/>
           </a:solidFill>
@@ -5389,16 +8137,16 @@
           <a:cs typeface="+mn-cs"/>
         </a:defRPr>
       </a:lvl8pPr>
-      <a:lvl9pPr marL="3886200" indent="-228600" algn="l" defTabSz="914400" rtl="0">
+      <a:lvl9pPr marL="3886200" indent="-228600" algn="l" defTabSz="914400" rtl="0" eaLnBrk="1" latinLnBrk="0" hangingPunct="1">
         <a:lnSpc>
           <a:spcPct val="90000"/>
         </a:lnSpc>
         <a:spcBef>
           <a:spcPts val="500"/>
         </a:spcBef>
-        <a:buFont typeface="Arial"/>
+        <a:buFont typeface="Arial" panose="020B0604020202020204" pitchFamily="34" charset="0"/>
         <a:buChar char="•"/>
-        <a:defRPr sz="1800">
+        <a:defRPr sz="1800" kern="1200">
           <a:solidFill>
             <a:schemeClr val="tx1"/>
           </a:solidFill>
@@ -5412,8 +8160,8 @@
       <a:defPPr>
         <a:defRPr lang="it-IT"/>
       </a:defPPr>
-      <a:lvl1pPr marL="0" algn="l" defTabSz="914400" rtl="0">
-        <a:defRPr sz="1800">
+      <a:lvl1pPr marL="0" algn="l" defTabSz="914400" rtl="0" eaLnBrk="1" latinLnBrk="0" hangingPunct="1">
+        <a:defRPr sz="1800" kern="1200">
           <a:solidFill>
             <a:schemeClr val="tx1"/>
           </a:solidFill>
@@ -5422,8 +8170,8 @@
           <a:cs typeface="+mn-cs"/>
         </a:defRPr>
       </a:lvl1pPr>
-      <a:lvl2pPr marL="457200" algn="l" defTabSz="914400" rtl="0">
-        <a:defRPr sz="1800">
+      <a:lvl2pPr marL="457200" algn="l" defTabSz="914400" rtl="0" eaLnBrk="1" latinLnBrk="0" hangingPunct="1">
+        <a:defRPr sz="1800" kern="1200">
           <a:solidFill>
             <a:schemeClr val="tx1"/>
           </a:solidFill>
@@ -5432,8 +8180,8 @@
           <a:cs typeface="+mn-cs"/>
         </a:defRPr>
       </a:lvl2pPr>
-      <a:lvl3pPr marL="914400" algn="l" defTabSz="914400" rtl="0">
-        <a:defRPr sz="1800">
+      <a:lvl3pPr marL="914400" algn="l" defTabSz="914400" rtl="0" eaLnBrk="1" latinLnBrk="0" hangingPunct="1">
+        <a:defRPr sz="1800" kern="1200">
           <a:solidFill>
             <a:schemeClr val="tx1"/>
           </a:solidFill>
@@ -5442,8 +8190,8 @@
           <a:cs typeface="+mn-cs"/>
         </a:defRPr>
       </a:lvl3pPr>
-      <a:lvl4pPr marL="1371600" algn="l" defTabSz="914400" rtl="0">
-        <a:defRPr sz="1800">
+      <a:lvl4pPr marL="1371600" algn="l" defTabSz="914400" rtl="0" eaLnBrk="1" latinLnBrk="0" hangingPunct="1">
+        <a:defRPr sz="1800" kern="1200">
           <a:solidFill>
             <a:schemeClr val="tx1"/>
           </a:solidFill>
@@ -5452,8 +8200,8 @@
           <a:cs typeface="+mn-cs"/>
         </a:defRPr>
       </a:lvl4pPr>
-      <a:lvl5pPr marL="1828800" algn="l" defTabSz="914400" rtl="0">
-        <a:defRPr sz="1800">
+      <a:lvl5pPr marL="1828800" algn="l" defTabSz="914400" rtl="0" eaLnBrk="1" latinLnBrk="0" hangingPunct="1">
+        <a:defRPr sz="1800" kern="1200">
           <a:solidFill>
             <a:schemeClr val="tx1"/>
           </a:solidFill>
@@ -5462,8 +8210,8 @@
           <a:cs typeface="+mn-cs"/>
         </a:defRPr>
       </a:lvl5pPr>
-      <a:lvl6pPr marL="2286000" algn="l" defTabSz="914400" rtl="0">
-        <a:defRPr sz="1800">
+      <a:lvl6pPr marL="2286000" algn="l" defTabSz="914400" rtl="0" eaLnBrk="1" latinLnBrk="0" hangingPunct="1">
+        <a:defRPr sz="1800" kern="1200">
           <a:solidFill>
             <a:schemeClr val="tx1"/>
           </a:solidFill>
@@ -5472,8 +8220,8 @@
           <a:cs typeface="+mn-cs"/>
         </a:defRPr>
       </a:lvl6pPr>
-      <a:lvl7pPr marL="2743200" algn="l" defTabSz="914400" rtl="0">
-        <a:defRPr sz="1800">
+      <a:lvl7pPr marL="2743200" algn="l" defTabSz="914400" rtl="0" eaLnBrk="1" latinLnBrk="0" hangingPunct="1">
+        <a:defRPr sz="1800" kern="1200">
           <a:solidFill>
             <a:schemeClr val="tx1"/>
           </a:solidFill>
@@ -5482,8 +8230,8 @@
           <a:cs typeface="+mn-cs"/>
         </a:defRPr>
       </a:lvl7pPr>
-      <a:lvl8pPr marL="3200400" algn="l" defTabSz="914400" rtl="0">
-        <a:defRPr sz="1800">
+      <a:lvl8pPr marL="3200400" algn="l" defTabSz="914400" rtl="0" eaLnBrk="1" latinLnBrk="0" hangingPunct="1">
+        <a:defRPr sz="1800" kern="1200">
           <a:solidFill>
             <a:schemeClr val="tx1"/>
           </a:solidFill>
@@ -5492,8 +8240,8 @@
           <a:cs typeface="+mn-cs"/>
         </a:defRPr>
       </a:lvl8pPr>
-      <a:lvl9pPr marL="3657600" algn="l" defTabSz="914400" rtl="0">
-        <a:defRPr sz="1800">
+      <a:lvl9pPr marL="3657600" algn="l" defTabSz="914400" rtl="0" eaLnBrk="1" latinLnBrk="0" hangingPunct="1">
+        <a:defRPr sz="1800" kern="1200">
           <a:solidFill>
             <a:schemeClr val="tx1"/>
           </a:solidFill>
@@ -5504,6 +8252,11 @@
       </a:lvl9pPr>
     </p:otherStyle>
   </p:txStyles>
+  <p:extLst>
+    <p:ext uri="{27BBF7A9-308A-43DC-89C8-2F10F3537804}">
+      <p15:sldGuideLst xmlns:p15="http://schemas.microsoft.com/office/powerpoint/2012/main"/>
+    </p:ext>
+  </p:extLst>
 </p:sldMaster>
 </file>
 
@@ -5667,7 +8420,7 @@
                 <a:ea typeface="DejaVu Sans Condensed"/>
                 <a:cs typeface="DejaVu Sans Condensed"/>
               </a:rPr>
-              <a:t>Khater Abdelaziz		</a:t>
+              <a:t>Khater Abdelaziz	</a:t>
             </a:r>
             <a:r>
               <a:rPr lang="en" sz="1800" b="0" i="0" u="none" strike="noStrike" cap="none" spc="0" dirty="0">
@@ -5927,7 +8680,9 @@
           </a:xfrm>
         </p:spPr>
         <p:txBody>
-          <a:bodyPr/>
+          <a:bodyPr>
+            <a:normAutofit/>
+          </a:bodyPr>
           <a:lstStyle/>
           <a:p>
             <a:pPr>
@@ -5991,7 +8746,7 @@
         <p:spPr>
           <a:xfrm>
             <a:off x="6654800" y="1517505"/>
-            <a:ext cx="4698999" cy="5078313"/>
+            <a:ext cx="4698999" cy="3970318"/>
           </a:xfrm>
           <a:prstGeom prst="rect">
             <a:avLst/>
@@ -6006,7 +8761,7 @@
           <a:p>
             <a:r>
               <a:rPr lang="it-IT" dirty="0"/>
-              <a:t>L’interazione tra le classi dei diversi strati (dominio, persistenza) non avviene direttamente ma mediante delle interfacce che costituiscono un’astrazione delle implementazioni.</a:t>
+              <a:t>L’interazione tra le classi dei diversi strati (dominio, persistenza) avviene mediante delle interfacce che costituiscono un’astrazione delle implementazioni.</a:t>
             </a:r>
           </a:p>
           <a:p>
@@ -6029,26 +8784,12 @@
               <a:t>RepositoryPort</a:t>
             </a:r>
             <a:r>
-              <a:rPr lang="it-IT" dirty="0"/>
-              <a:t>.</a:t>
-            </a:r>
-          </a:p>
-          <a:p>
-            <a:r>
-              <a:rPr lang="it-IT" dirty="0"/>
-              <a:t>Le </a:t>
-            </a:r>
-            <a:r>
-              <a:rPr lang="it-IT" sz="1600" dirty="0" err="1">
+              <a:rPr lang="it-IT" sz="1600" dirty="0">
                 <a:latin typeface="Cascadia Code" panose="020B0609020000020004" pitchFamily="49" charset="0"/>
                 <a:ea typeface="Cascadia Code" panose="020B0609020000020004" pitchFamily="49" charset="0"/>
                 <a:cs typeface="Cascadia Code" panose="020B0609020000020004" pitchFamily="49" charset="0"/>
               </a:rPr>
-              <a:t>RepositoryPort</a:t>
-            </a:r>
-            <a:r>
-              <a:rPr lang="it-IT" dirty="0"/>
-              <a:t> permettono di avere un punto di stabilità per l’accesso ai dati dal DB da parte dei Services.</a:t>
+              <a:t>.</a:t>
             </a:r>
           </a:p>
           <a:p>
@@ -6139,7 +8880,9 @@
           </a:xfrm>
         </p:spPr>
         <p:txBody>
-          <a:bodyPr/>
+          <a:bodyPr>
+            <a:normAutofit/>
+          </a:bodyPr>
           <a:lstStyle/>
           <a:p>
             <a:pPr>
@@ -6382,7 +9125,7 @@
         </p:spPr>
         <p:txBody>
           <a:bodyPr>
-            <a:normAutofit lnSpcReduction="10000"/>
+            <a:normAutofit/>
           </a:bodyPr>
           <a:lstStyle/>
           <a:p>
@@ -8500,7 +11243,7 @@
         <p:spPr bwMode="auto"/>
         <p:txBody>
           <a:bodyPr vertOverflow="overflow" horzOverflow="overflow" vert="horz" wrap="square" lIns="91440" tIns="45720" rIns="91440" bIns="45720" numCol="1" spcCol="0" rtlCol="0" fromWordArt="0" anchor="t" anchorCtr="0" forceAA="0" compatLnSpc="0">
-            <a:normAutofit lnSpcReduction="13000"/>
+            <a:normAutofit/>
           </a:bodyPr>
           <a:lstStyle/>
           <a:p>
@@ -8618,7 +11361,7 @@
                 <a:ea typeface="DejaVu Sans Condensed"/>
                 <a:cs typeface="DejaVu Sans Condensed"/>
               </a:rPr>
-              <a:t>SOLID 1 – Dependency Inversion 			11</a:t>
+              <a:t>SOLID 1 – Dependency Inversion 		11</a:t>
             </a:r>
             <a:endParaRPr sz="1800" dirty="0">
               <a:latin typeface="DejaVu Sans Condensed"/>
@@ -8665,7 +11408,7 @@
                 <a:latin typeface="DejaVu Sans Condensed"/>
                 <a:cs typeface="DejaVu Sans Condensed"/>
               </a:rPr>
-              <a:t>GoF 1 – Strategy					13-15</a:t>
+              <a:t>GoF 1 – Strategy				13-15</a:t>
             </a:r>
           </a:p>
           <a:p>
@@ -8717,7 +11460,7 @@
                 <a:ea typeface="DejaVu Sans Condensed"/>
                 <a:cs typeface="DejaVu Sans Condensed"/>
               </a:rPr>
-              <a:t>Esempi di refactoring					24-28</a:t>
+              <a:t>Esempi di refactoring				24-28</a:t>
             </a:r>
             <a:endParaRPr sz="1800" dirty="0">
               <a:latin typeface="Cantarell"/>
@@ -13420,6 +16163,89 @@
       </p:sp>
       <p:sp>
         <p:nvSpPr>
+          <p:cNvPr id="11" name="Segnaposto contenuto 2">
+            <a:extLst>
+              <a:ext uri="{FF2B5EF4-FFF2-40B4-BE49-F238E27FC236}">
+                <a16:creationId xmlns:a16="http://schemas.microsoft.com/office/drawing/2014/main" id="{4F013A84-0B59-9A05-519B-9D3A095B5DD6}"/>
+              </a:ext>
+            </a:extLst>
+          </p:cNvPr>
+          <p:cNvSpPr>
+            <a:spLocks noGrp="1"/>
+          </p:cNvSpPr>
+          <p:nvPr>
+            <p:ph idx="1"/>
+          </p:nvPr>
+        </p:nvSpPr>
+        <p:spPr bwMode="auto">
+          <a:xfrm>
+            <a:off x="7915829" y="1541557"/>
+            <a:ext cx="4200868" cy="4897574"/>
+          </a:xfrm>
+        </p:spPr>
+        <p:txBody>
+          <a:bodyPr>
+            <a:normAutofit fontScale="92500" lnSpcReduction="20000"/>
+          </a:bodyPr>
+          <a:lstStyle/>
+          <a:p>
+            <a:pPr>
+              <a:buFontTx/>
+              <a:buChar char="-"/>
+              <a:defRPr/>
+            </a:pPr>
+            <a:r>
+              <a:rPr lang="en" dirty="0"/>
+              <a:t>Da 59 a 27 righe di codice</a:t>
+            </a:r>
+          </a:p>
+          <a:p>
+            <a:pPr>
+              <a:buFontTx/>
+              <a:buChar char="-"/>
+              <a:defRPr/>
+            </a:pPr>
+            <a:r>
+              <a:rPr lang="en" dirty="0"/>
+              <a:t>Rimosso commenti superflui, sostituendoli con metodi con nomi esplicativi</a:t>
+            </a:r>
+          </a:p>
+          <a:p>
+            <a:pPr>
+              <a:buFontTx/>
+              <a:buChar char="-"/>
+              <a:defRPr/>
+            </a:pPr>
+            <a:r>
+              <a:rPr lang="en" dirty="0"/>
+              <a:t>Migliorato </a:t>
+            </a:r>
+            <a:r>
+              <a:rPr lang="it-IT" dirty="0"/>
+              <a:t>i nomi delle variabili temporanee, rimuovendole se non strettamente necessarie</a:t>
+            </a:r>
+            <a:endParaRPr lang="en" dirty="0"/>
+          </a:p>
+          <a:p>
+            <a:pPr>
+              <a:buFontTx/>
+              <a:buChar char="-"/>
+              <a:defRPr/>
+            </a:pPr>
+            <a:r>
+              <a:rPr lang="en" dirty="0"/>
+              <a:t>Snellito la logica di calcolo dei dati, assegnando responsabilità a classi più adatte e passando ai metodi solo </a:t>
+            </a:r>
+            <a:r>
+              <a:rPr lang="it-IT" dirty="0"/>
+              <a:t>i parametri necessari</a:t>
+            </a:r>
+            <a:endParaRPr dirty="0"/>
+          </a:p>
+        </p:txBody>
+      </p:sp>
+      <p:sp>
+        <p:nvSpPr>
           <p:cNvPr id="17675352" name="CasellaDiTesto 17675351">
             <a:extLst>
               <a:ext uri="{FF2B5EF4-FFF2-40B4-BE49-F238E27FC236}">
@@ -14236,89 +17062,6 @@
           </a:prstGeom>
         </p:spPr>
       </p:pic>
-      <p:sp>
-        <p:nvSpPr>
-          <p:cNvPr id="11" name="Segnaposto contenuto 2">
-            <a:extLst>
-              <a:ext uri="{FF2B5EF4-FFF2-40B4-BE49-F238E27FC236}">
-                <a16:creationId xmlns:a16="http://schemas.microsoft.com/office/drawing/2014/main" id="{4F013A84-0B59-9A05-519B-9D3A095B5DD6}"/>
-              </a:ext>
-            </a:extLst>
-          </p:cNvPr>
-          <p:cNvSpPr>
-            <a:spLocks noGrp="1"/>
-          </p:cNvSpPr>
-          <p:nvPr>
-            <p:ph idx="1"/>
-          </p:nvPr>
-        </p:nvSpPr>
-        <p:spPr bwMode="auto">
-          <a:xfrm>
-            <a:off x="7915829" y="1541557"/>
-            <a:ext cx="4200868" cy="4897574"/>
-          </a:xfrm>
-        </p:spPr>
-        <p:txBody>
-          <a:bodyPr>
-            <a:normAutofit fontScale="85000" lnSpcReduction="10000"/>
-          </a:bodyPr>
-          <a:lstStyle/>
-          <a:p>
-            <a:pPr>
-              <a:buFontTx/>
-              <a:buChar char="-"/>
-              <a:defRPr/>
-            </a:pPr>
-            <a:r>
-              <a:rPr lang="en" dirty="0"/>
-              <a:t>Da 59 a 27 righe di codice</a:t>
-            </a:r>
-          </a:p>
-          <a:p>
-            <a:pPr>
-              <a:buFontTx/>
-              <a:buChar char="-"/>
-              <a:defRPr/>
-            </a:pPr>
-            <a:r>
-              <a:rPr lang="en" dirty="0"/>
-              <a:t>Rimosso commenti superflui, sostituendoli con metodi con nomi esplicativi</a:t>
-            </a:r>
-          </a:p>
-          <a:p>
-            <a:pPr>
-              <a:buFontTx/>
-              <a:buChar char="-"/>
-              <a:defRPr/>
-            </a:pPr>
-            <a:r>
-              <a:rPr lang="en" dirty="0"/>
-              <a:t>Migliorato </a:t>
-            </a:r>
-            <a:r>
-              <a:rPr lang="it-IT" dirty="0"/>
-              <a:t>i nomi delle variabili temporanee, rimuovendole se non strettamente necessarie</a:t>
-            </a:r>
-            <a:endParaRPr lang="en" dirty="0"/>
-          </a:p>
-          <a:p>
-            <a:pPr>
-              <a:buFontTx/>
-              <a:buChar char="-"/>
-              <a:defRPr/>
-            </a:pPr>
-            <a:r>
-              <a:rPr lang="en" dirty="0"/>
-              <a:t>Snellito la logica di calcolo dei dati, assegnando responsabilità a classi più adatte e passando ai metodi solo </a:t>
-            </a:r>
-            <a:r>
-              <a:rPr lang="it-IT" dirty="0"/>
-              <a:t>i parametri necessari</a:t>
-            </a:r>
-            <a:endParaRPr dirty="0"/>
-          </a:p>
-        </p:txBody>
-      </p:sp>
     </p:spTree>
     <p:extLst>
       <p:ext uri="{BB962C8B-B14F-4D97-AF65-F5344CB8AC3E}">
@@ -14493,7 +17236,7 @@
         <p:spPr bwMode="auto"/>
         <p:txBody>
           <a:bodyPr>
-            <a:normAutofit lnSpcReduction="10000"/>
+            <a:normAutofit/>
           </a:bodyPr>
           <a:lstStyle/>
           <a:p>
@@ -14521,7 +17264,7 @@
             </a:r>
             <a:r>
               <a:rPr lang="en" dirty="0"/>
-              <a:t> é contenuta nei template HTML in Thymeleaf, gestita tramite View controller utilizzati per inviare i template all’utente.</a:t>
+              <a:t> é contenuta nei template HTML in Thymeleaf.</a:t>
             </a:r>
           </a:p>
           <a:p>
@@ -14542,15 +17285,7 @@
             </a:r>
             <a:r>
               <a:rPr lang="it-IT" dirty="0"/>
-              <a:t>comprendono sia i </a:t>
-            </a:r>
-            <a:r>
-              <a:rPr lang="it-IT" dirty="0" err="1"/>
-              <a:t>View</a:t>
-            </a:r>
-            <a:r>
-              <a:rPr lang="it-IT" dirty="0"/>
-              <a:t> Controller (per la parte di interfaccia) sia i REST Controller, che espongono le API per l’invio e il recupero dei dati dal </a:t>
+              <a:t>sono i REST Controller, che espongono le API per l’invio e il recupero dei dati dal </a:t>
             </a:r>
             <a:r>
               <a:rPr lang="it-IT" dirty="0" err="1"/>
@@ -14576,7 +17311,7 @@
             </a:r>
             <a:r>
               <a:rPr lang="en" dirty="0"/>
-              <a:t>è costituito dai Service che svolgono la logica di business, dal layer di persistence che si interfaccia con il DB tramite le repository, e dagli oggetti di dominio come entity, che vengono poi trasformati dagli adapter in domain objects per essere utilizzati nei service. </a:t>
+              <a:t>è costituito dai Service che svolgono la logica di business, dal layer di persistence che si interfaccia con il DB tramite le repository.</a:t>
             </a:r>
           </a:p>
         </p:txBody>
@@ -14770,7 +17505,9 @@
           </a:xfrm>
         </p:spPr>
         <p:txBody>
-          <a:bodyPr/>
+          <a:bodyPr>
+            <a:normAutofit/>
+          </a:bodyPr>
           <a:lstStyle/>
           <a:p>
             <a:pPr>
@@ -15179,7 +17916,9 @@
           </a:xfrm>
         </p:spPr>
         <p:txBody>
-          <a:bodyPr/>
+          <a:bodyPr>
+            <a:normAutofit/>
+          </a:bodyPr>
           <a:lstStyle/>
           <a:p>
             <a:pPr>
@@ -15885,15 +18624,7 @@
             </a:r>
             <a:r>
               <a:rPr lang="it-IT" noProof="0" dirty="0"/>
-              <a:t> di </a:t>
-            </a:r>
-            <a:r>
-              <a:rPr lang="it-IT" noProof="0" dirty="0" err="1"/>
-              <a:t>Rest</a:t>
-            </a:r>
-            <a:r>
-              <a:rPr lang="it-IT" noProof="0" dirty="0"/>
-              <a:t> Controller riceve dalla </a:t>
+              <a:t> di REST Controller espone API da lui definite, che vengono chiamate dalla </a:t>
             </a:r>
             <a:r>
               <a:rPr lang="it-IT" noProof="0" dirty="0" err="1"/>
@@ -15901,15 +18632,7 @@
             </a:r>
             <a:r>
               <a:rPr lang="it-IT" noProof="0" dirty="0"/>
-              <a:t> chiamate di API che lui definisce. Una volta che riceve la chiamata, il </a:t>
-            </a:r>
-            <a:r>
-              <a:rPr lang="it-IT" noProof="0" dirty="0" err="1"/>
-              <a:t>Rest</a:t>
-            </a:r>
-            <a:r>
-              <a:rPr lang="it-IT" noProof="0" dirty="0"/>
-              <a:t> controller delega lo svolgimento della operazione al </a:t>
+              <a:t>. Una volta che riceve la chiamata, il Controller delega lo svolgimento della operazione al </a:t>
             </a:r>
             <a:r>
               <a:rPr lang="it-IT" noProof="0" dirty="0" err="1"/>
@@ -15917,7 +18640,7 @@
             </a:r>
             <a:r>
               <a:rPr lang="it-IT" noProof="0" dirty="0"/>
-              <a:t> dei Service, che si occupano di recuperare a loro volta i dati necessari dal DB e applicare la logica di business, che viene poi ritornata al controller. </a:t>
+              <a:t> dei Service, che si occupano di applicare la logica di business. </a:t>
             </a:r>
             <a:r>
               <a:rPr lang="it-IT" dirty="0"/>
@@ -16120,9 +18843,9 @@
 </file>
 
 <file path=ppt/theme/theme1.xml><?xml version="1.0" encoding="utf-8"?>
-<a:theme xmlns:a="http://schemas.openxmlformats.org/drawingml/2006/main" name="Office Theme">
+<a:theme xmlns:a="http://schemas.openxmlformats.org/drawingml/2006/main" name="Tema di Office">
   <a:themeElements>
-    <a:clrScheme name="New Office">
+    <a:clrScheme name="Office">
       <a:dk1>
         <a:sysClr val="windowText" lastClr="000000"/>
       </a:dk1>
@@ -16130,54 +18853,148 @@
         <a:sysClr val="window" lastClr="FFFFFF"/>
       </a:lt1>
       <a:dk2>
-        <a:srgbClr val="44546A"/>
+        <a:srgbClr val="0E2841"/>
       </a:dk2>
       <a:lt2>
-        <a:srgbClr val="E7E6E6"/>
+        <a:srgbClr val="E8E8E8"/>
       </a:lt2>
       <a:accent1>
-        <a:srgbClr val="5B9BD5"/>
+        <a:srgbClr val="156082"/>
       </a:accent1>
       <a:accent2>
-        <a:srgbClr val="ED7D31"/>
+        <a:srgbClr val="E97132"/>
       </a:accent2>
       <a:accent3>
-        <a:srgbClr val="A5A5A5"/>
+        <a:srgbClr val="196B24"/>
       </a:accent3>
       <a:accent4>
-        <a:srgbClr val="FFC000"/>
+        <a:srgbClr val="0F9ED5"/>
       </a:accent4>
       <a:accent5>
-        <a:srgbClr val="4472C4"/>
+        <a:srgbClr val="A02B93"/>
       </a:accent5>
       <a:accent6>
-        <a:srgbClr val="70AD47"/>
+        <a:srgbClr val="4EA72E"/>
       </a:accent6>
       <a:hlink>
-        <a:srgbClr val="0563C1"/>
+        <a:srgbClr val="467886"/>
       </a:hlink>
       <a:folHlink>
-        <a:srgbClr val="954F72"/>
+        <a:srgbClr val="96607D"/>
       </a:folHlink>
     </a:clrScheme>
-    <a:fontScheme name="Office Theme">
+    <a:fontScheme name="Office">
       <a:majorFont>
-        <a:latin typeface="Arial"/>
-        <a:ea typeface="Arial"/>
-        <a:cs typeface="Arial"/>
+        <a:latin typeface="Aptos Display" panose="02110004020202020204"/>
+        <a:ea typeface=""/>
+        <a:cs typeface=""/>
+        <a:font script="Jpan" typeface="游ゴシック Light"/>
+        <a:font script="Hang" typeface="맑은 고딕"/>
+        <a:font script="Hans" typeface="等线 Light"/>
+        <a:font script="Hant" typeface="新細明體"/>
+        <a:font script="Arab" typeface="Times New Roman"/>
+        <a:font script="Hebr" typeface="Times New Roman"/>
+        <a:font script="Thai" typeface="Angsana New"/>
+        <a:font script="Ethi" typeface="Nyala"/>
+        <a:font script="Beng" typeface="Vrinda"/>
+        <a:font script="Gujr" typeface="Shruti"/>
+        <a:font script="Khmr" typeface="MoolBoran"/>
+        <a:font script="Knda" typeface="Tunga"/>
+        <a:font script="Guru" typeface="Raavi"/>
+        <a:font script="Cans" typeface="Euphemia"/>
+        <a:font script="Cher" typeface="Plantagenet Cherokee"/>
+        <a:font script="Yiii" typeface="Microsoft Yi Baiti"/>
+        <a:font script="Tibt" typeface="Microsoft Himalaya"/>
+        <a:font script="Thaa" typeface="MV Boli"/>
+        <a:font script="Deva" typeface="Mangal"/>
+        <a:font script="Telu" typeface="Gautami"/>
+        <a:font script="Taml" typeface="Latha"/>
+        <a:font script="Syrc" typeface="Estrangelo Edessa"/>
+        <a:font script="Orya" typeface="Kalinga"/>
+        <a:font script="Mlym" typeface="Kartika"/>
+        <a:font script="Laoo" typeface="DokChampa"/>
+        <a:font script="Sinh" typeface="Iskoola Pota"/>
+        <a:font script="Mong" typeface="Mongolian Baiti"/>
+        <a:font script="Viet" typeface="Times New Roman"/>
+        <a:font script="Uigh" typeface="Microsoft Uighur"/>
+        <a:font script="Geor" typeface="Sylfaen"/>
+        <a:font script="Armn" typeface="Arial"/>
+        <a:font script="Bugi" typeface="Leelawadee UI"/>
+        <a:font script="Bopo" typeface="Microsoft JhengHei"/>
+        <a:font script="Java" typeface="Javanese Text"/>
+        <a:font script="Lisu" typeface="Segoe UI"/>
+        <a:font script="Mymr" typeface="Myanmar Text"/>
+        <a:font script="Nkoo" typeface="Ebrima"/>
+        <a:font script="Olck" typeface="Nirmala UI"/>
+        <a:font script="Osma" typeface="Ebrima"/>
+        <a:font script="Phag" typeface="Phagspa"/>
+        <a:font script="Syrn" typeface="Estrangelo Edessa"/>
+        <a:font script="Syrj" typeface="Estrangelo Edessa"/>
+        <a:font script="Syre" typeface="Estrangelo Edessa"/>
+        <a:font script="Sora" typeface="Nirmala UI"/>
+        <a:font script="Tale" typeface="Microsoft Tai Le"/>
+        <a:font script="Talu" typeface="Microsoft New Tai Lue"/>
+        <a:font script="Tfng" typeface="Ebrima"/>
       </a:majorFont>
       <a:minorFont>
-        <a:latin typeface="Arial"/>
-        <a:ea typeface="Arial"/>
-        <a:cs typeface="Arial"/>
+        <a:latin typeface="Aptos" panose="02110004020202020204"/>
+        <a:ea typeface=""/>
+        <a:cs typeface=""/>
+        <a:font script="Jpan" typeface="游ゴシック"/>
+        <a:font script="Hang" typeface="맑은 고딕"/>
+        <a:font script="Hans" typeface="等线"/>
+        <a:font script="Hant" typeface="新細明體"/>
+        <a:font script="Arab" typeface="Arial"/>
+        <a:font script="Hebr" typeface="Arial"/>
+        <a:font script="Thai" typeface="Cordia New"/>
+        <a:font script="Ethi" typeface="Nyala"/>
+        <a:font script="Beng" typeface="Vrinda"/>
+        <a:font script="Gujr" typeface="Shruti"/>
+        <a:font script="Khmr" typeface="DaunPenh"/>
+        <a:font script="Knda" typeface="Tunga"/>
+        <a:font script="Guru" typeface="Raavi"/>
+        <a:font script="Cans" typeface="Euphemia"/>
+        <a:font script="Cher" typeface="Plantagenet Cherokee"/>
+        <a:font script="Yiii" typeface="Microsoft Yi Baiti"/>
+        <a:font script="Tibt" typeface="Microsoft Himalaya"/>
+        <a:font script="Thaa" typeface="MV Boli"/>
+        <a:font script="Deva" typeface="Mangal"/>
+        <a:font script="Telu" typeface="Gautami"/>
+        <a:font script="Taml" typeface="Latha"/>
+        <a:font script="Syrc" typeface="Estrangelo Edessa"/>
+        <a:font script="Orya" typeface="Kalinga"/>
+        <a:font script="Mlym" typeface="Kartika"/>
+        <a:font script="Laoo" typeface="DokChampa"/>
+        <a:font script="Sinh" typeface="Iskoola Pota"/>
+        <a:font script="Mong" typeface="Mongolian Baiti"/>
+        <a:font script="Viet" typeface="Arial"/>
+        <a:font script="Uigh" typeface="Microsoft Uighur"/>
+        <a:font script="Geor" typeface="Sylfaen"/>
+        <a:font script="Armn" typeface="Arial"/>
+        <a:font script="Bugi" typeface="Leelawadee UI"/>
+        <a:font script="Bopo" typeface="Microsoft JhengHei"/>
+        <a:font script="Java" typeface="Javanese Text"/>
+        <a:font script="Lisu" typeface="Segoe UI"/>
+        <a:font script="Mymr" typeface="Myanmar Text"/>
+        <a:font script="Nkoo" typeface="Ebrima"/>
+        <a:font script="Olck" typeface="Nirmala UI"/>
+        <a:font script="Osma" typeface="Ebrima"/>
+        <a:font script="Phag" typeface="Phagspa"/>
+        <a:font script="Syrn" typeface="Estrangelo Edessa"/>
+        <a:font script="Syrj" typeface="Estrangelo Edessa"/>
+        <a:font script="Syre" typeface="Estrangelo Edessa"/>
+        <a:font script="Sora" typeface="Nirmala UI"/>
+        <a:font script="Tale" typeface="Microsoft Tai Le"/>
+        <a:font script="Talu" typeface="Microsoft New Tai Lue"/>
+        <a:font script="Tfng" typeface="Ebrima"/>
       </a:minorFont>
     </a:fontScheme>
-    <a:fmtScheme name="Office Theme">
+    <a:fmtScheme name="Office">
       <a:fillStyleLst>
         <a:solidFill>
           <a:schemeClr val="phClr"/>
         </a:solidFill>
-        <a:gradFill>
+        <a:gradFill rotWithShape="1">
           <a:gsLst>
             <a:gs pos="0">
               <a:schemeClr val="phClr">
@@ -16203,7 +19020,7 @@
           </a:gsLst>
           <a:lin ang="5400000" scaled="0"/>
         </a:gradFill>
-        <a:gradFill>
+        <a:gradFill rotWithShape="1">
           <a:gsLst>
             <a:gs pos="0">
               <a:schemeClr val="phClr">
@@ -16231,13 +19048,6 @@
         </a:gradFill>
       </a:fillStyleLst>
       <a:lnStyleLst>
-        <a:ln w="6350" cap="flat" cmpd="sng" algn="ctr">
-          <a:solidFill>
-            <a:schemeClr val="phClr"/>
-          </a:solidFill>
-          <a:prstDash val="solid"/>
-          <a:miter lim="800000"/>
-        </a:ln>
         <a:ln w="12700" cap="flat" cmpd="sng" algn="ctr">
           <a:solidFill>
             <a:schemeClr val="phClr"/>
@@ -16246,6 +19056,13 @@
           <a:miter lim="800000"/>
         </a:ln>
         <a:ln w="19050" cap="flat" cmpd="sng" algn="ctr">
+          <a:solidFill>
+            <a:schemeClr val="phClr"/>
+          </a:solidFill>
+          <a:prstDash val="solid"/>
+          <a:miter lim="800000"/>
+        </a:ln>
+        <a:ln w="25400" cap="flat" cmpd="sng" algn="ctr">
           <a:solidFill>
             <a:schemeClr val="phClr"/>
           </a:solidFill>
@@ -16280,7 +19097,7 @@
             <a:satMod val="170000"/>
           </a:schemeClr>
         </a:solidFill>
-        <a:gradFill>
+        <a:gradFill rotWithShape="1">
           <a:gsLst>
             <a:gs pos="0">
               <a:schemeClr val="phClr">
@@ -16310,8 +19127,33 @@
       </a:bgFillStyleLst>
     </a:fmtScheme>
   </a:themeElements>
-  <a:objectDefaults/>
+  <a:objectDefaults>
+    <a:lnDef>
+      <a:spPr/>
+      <a:bodyPr/>
+      <a:lstStyle/>
+      <a:style>
+        <a:lnRef idx="2">
+          <a:schemeClr val="accent1"/>
+        </a:lnRef>
+        <a:fillRef idx="0">
+          <a:schemeClr val="accent1"/>
+        </a:fillRef>
+        <a:effectRef idx="1">
+          <a:schemeClr val="accent1"/>
+        </a:effectRef>
+        <a:fontRef idx="minor">
+          <a:schemeClr val="tx1"/>
+        </a:fontRef>
+      </a:style>
+    </a:lnDef>
+  </a:objectDefaults>
   <a:extraClrSchemeLst/>
+  <a:extLst>
+    <a:ext uri="{05A4C25C-085E-4340-85A3-A5531E510DB2}">
+      <thm15:themeFamily xmlns:thm15="http://schemas.microsoft.com/office/thememl/2012/main" name="Office Theme" id="{2E142A2C-CD16-42D6-873A-C26D2A0506FA}" vid="{1BDDFF52-6CD6-40A5-AB3C-68EB2F1E4D0A}"/>
+    </a:ext>
+  </a:extLst>
 </a:theme>
 </file>
 

--- a/doc/Presentazione/Presentazione_ingsw_parteB.pptx
+++ b/doc/Presentazione/Presentazione_ingsw_parteB.pptx
@@ -5,7 +5,7 @@
     <p:sldMasterId id="2147483759" r:id="rId1"/>
   </p:sldMasterIdLst>
   <p:notesMasterIdLst>
-    <p:notesMasterId r:id="rId30"/>
+    <p:notesMasterId r:id="rId31"/>
   </p:notesMasterIdLst>
   <p:sldIdLst>
     <p:sldId id="256" r:id="rId2"/>
@@ -13,29 +13,30 @@
     <p:sldId id="258" r:id="rId4"/>
     <p:sldId id="259" r:id="rId5"/>
     <p:sldId id="260" r:id="rId6"/>
-    <p:sldId id="261" r:id="rId7"/>
-    <p:sldId id="262" r:id="rId8"/>
-    <p:sldId id="264" r:id="rId9"/>
-    <p:sldId id="279" r:id="rId10"/>
-    <p:sldId id="280" r:id="rId11"/>
-    <p:sldId id="265" r:id="rId12"/>
-    <p:sldId id="266" r:id="rId13"/>
-    <p:sldId id="267" r:id="rId14"/>
-    <p:sldId id="284" r:id="rId15"/>
-    <p:sldId id="285" r:id="rId16"/>
-    <p:sldId id="281" r:id="rId17"/>
-    <p:sldId id="282" r:id="rId18"/>
-    <p:sldId id="268" r:id="rId19"/>
-    <p:sldId id="269" r:id="rId20"/>
-    <p:sldId id="270" r:id="rId21"/>
-    <p:sldId id="271" r:id="rId22"/>
-    <p:sldId id="272" r:id="rId23"/>
-    <p:sldId id="273" r:id="rId24"/>
-    <p:sldId id="274" r:id="rId25"/>
-    <p:sldId id="275" r:id="rId26"/>
-    <p:sldId id="277" r:id="rId27"/>
-    <p:sldId id="278" r:id="rId28"/>
-    <p:sldId id="287" r:id="rId29"/>
+    <p:sldId id="289" r:id="rId7"/>
+    <p:sldId id="261" r:id="rId8"/>
+    <p:sldId id="262" r:id="rId9"/>
+    <p:sldId id="264" r:id="rId10"/>
+    <p:sldId id="279" r:id="rId11"/>
+    <p:sldId id="280" r:id="rId12"/>
+    <p:sldId id="265" r:id="rId13"/>
+    <p:sldId id="266" r:id="rId14"/>
+    <p:sldId id="267" r:id="rId15"/>
+    <p:sldId id="284" r:id="rId16"/>
+    <p:sldId id="285" r:id="rId17"/>
+    <p:sldId id="281" r:id="rId18"/>
+    <p:sldId id="282" r:id="rId19"/>
+    <p:sldId id="268" r:id="rId20"/>
+    <p:sldId id="269" r:id="rId21"/>
+    <p:sldId id="270" r:id="rId22"/>
+    <p:sldId id="271" r:id="rId23"/>
+    <p:sldId id="272" r:id="rId24"/>
+    <p:sldId id="273" r:id="rId25"/>
+    <p:sldId id="274" r:id="rId26"/>
+    <p:sldId id="275" r:id="rId27"/>
+    <p:sldId id="277" r:id="rId28"/>
+    <p:sldId id="278" r:id="rId29"/>
+    <p:sldId id="287" r:id="rId30"/>
   </p:sldIdLst>
   <p:sldSz cx="12192000" cy="6858000"/>
   <p:notesSz cx="7104063" cy="10234613"/>
@@ -153,6 +154,97 @@
 </p:presentation>
 </file>
 
+<file path=ppt/revisionInfo.xml><?xml version="1.0" encoding="utf-8"?>
+<p1510:revInfo xmlns:a="http://schemas.openxmlformats.org/drawingml/2006/main" xmlns:r="http://schemas.openxmlformats.org/officeDocument/2006/relationships" xmlns:p1510="http://schemas.microsoft.com/office/powerpoint/2015/10/main">
+  <p1510:revLst>
+    <p1510:client id="{136F0AEC-018D-460A-AFB1-86F6C0EDFE5A}" v="1" dt="2025-11-10T14:33:44.216"/>
+  </p1510:revLst>
+</p1510:revInfo>
+</file>
+
+<file path=ppt/changesInfos/changesInfo1.xml><?xml version="1.0" encoding="utf-8"?>
+<pc:chgInfo xmlns:a="http://schemas.openxmlformats.org/drawingml/2006/main" xmlns:r="http://schemas.openxmlformats.org/officeDocument/2006/relationships" xmlns:ac="http://schemas.microsoft.com/office/drawing/2013/main/command" xmlns:pc="http://schemas.microsoft.com/office/powerpoint/2013/main/command">
+  <pc:docChgLst>
+    <pc:chgData name="Lorenzo Dolzanelli" userId="dff1ab91afad8a33" providerId="LiveId" clId="{E4438C63-D726-4254-B5C1-0731AF93BC5F}"/>
+    <pc:docChg chg="custSel addSld delSld modSld sldOrd">
+      <pc:chgData name="Lorenzo Dolzanelli" userId="dff1ab91afad8a33" providerId="LiveId" clId="{E4438C63-D726-4254-B5C1-0731AF93BC5F}" dt="2025-11-10T14:40:48.876" v="468" actId="20577"/>
+      <pc:docMkLst>
+        <pc:docMk/>
+      </pc:docMkLst>
+      <pc:sldChg chg="modSp mod">
+        <pc:chgData name="Lorenzo Dolzanelli" userId="dff1ab91afad8a33" providerId="LiveId" clId="{E4438C63-D726-4254-B5C1-0731AF93BC5F}" dt="2025-11-10T14:33:39.322" v="32" actId="20577"/>
+        <pc:sldMkLst>
+          <pc:docMk/>
+          <pc:sldMk cId="0" sldId="261"/>
+        </pc:sldMkLst>
+        <pc:spChg chg="mod">
+          <ac:chgData name="Lorenzo Dolzanelli" userId="dff1ab91afad8a33" providerId="LiveId" clId="{E4438C63-D726-4254-B5C1-0731AF93BC5F}" dt="2025-11-10T14:33:39.322" v="32" actId="20577"/>
+          <ac:spMkLst>
+            <pc:docMk/>
+            <pc:sldMk cId="0" sldId="261"/>
+            <ac:spMk id="69616992" creationId="{00000000-0000-0000-0000-000000000000}"/>
+          </ac:spMkLst>
+        </pc:spChg>
+      </pc:sldChg>
+      <pc:sldChg chg="new del ord">
+        <pc:chgData name="Lorenzo Dolzanelli" userId="dff1ab91afad8a33" providerId="LiveId" clId="{E4438C63-D726-4254-B5C1-0731AF93BC5F}" dt="2025-11-10T14:33:45.350" v="34" actId="47"/>
+        <pc:sldMkLst>
+          <pc:docMk/>
+          <pc:sldMk cId="3501456837" sldId="288"/>
+        </pc:sldMkLst>
+      </pc:sldChg>
+      <pc:sldChg chg="addSp delSp modSp add mod">
+        <pc:chgData name="Lorenzo Dolzanelli" userId="dff1ab91afad8a33" providerId="LiveId" clId="{E4438C63-D726-4254-B5C1-0731AF93BC5F}" dt="2025-11-10T14:40:48.876" v="468" actId="20577"/>
+        <pc:sldMkLst>
+          <pc:docMk/>
+          <pc:sldMk cId="2601686502" sldId="289"/>
+        </pc:sldMkLst>
+        <pc:spChg chg="mod">
+          <ac:chgData name="Lorenzo Dolzanelli" userId="dff1ab91afad8a33" providerId="LiveId" clId="{E4438C63-D726-4254-B5C1-0731AF93BC5F}" dt="2025-11-10T14:40:48.876" v="468" actId="20577"/>
+          <ac:spMkLst>
+            <pc:docMk/>
+            <pc:sldMk cId="2601686502" sldId="289"/>
+            <ac:spMk id="69616992" creationId="{FA1687BD-3474-1735-378F-450A88F65A0F}"/>
+          </ac:spMkLst>
+        </pc:spChg>
+        <pc:spChg chg="del mod">
+          <ac:chgData name="Lorenzo Dolzanelli" userId="dff1ab91afad8a33" providerId="LiveId" clId="{E4438C63-D726-4254-B5C1-0731AF93BC5F}" dt="2025-11-10T14:33:51.436" v="40" actId="478"/>
+          <ac:spMkLst>
+            <pc:docMk/>
+            <pc:sldMk cId="2601686502" sldId="289"/>
+            <ac:spMk id="1746594648" creationId="{2A257B06-3DC0-E403-4D70-61C485B3E103}"/>
+          </ac:spMkLst>
+        </pc:spChg>
+        <pc:spChg chg="mod">
+          <ac:chgData name="Lorenzo Dolzanelli" userId="dff1ab91afad8a33" providerId="LiveId" clId="{E4438C63-D726-4254-B5C1-0731AF93BC5F}" dt="2025-11-10T14:34:35.712" v="74" actId="20577"/>
+          <ac:spMkLst>
+            <pc:docMk/>
+            <pc:sldMk cId="2601686502" sldId="289"/>
+            <ac:spMk id="2040059782" creationId="{57FC49AB-1AA5-366A-5FD4-21B5B02E3769}"/>
+          </ac:spMkLst>
+        </pc:spChg>
+        <pc:picChg chg="add mod">
+          <ac:chgData name="Lorenzo Dolzanelli" userId="dff1ab91afad8a33" providerId="LiveId" clId="{E4438C63-D726-4254-B5C1-0731AF93BC5F}" dt="2025-11-10T14:34:44.701" v="78" actId="1076"/>
+          <ac:picMkLst>
+            <pc:docMk/>
+            <pc:sldMk cId="2601686502" sldId="289"/>
+            <ac:picMk id="3" creationId="{4A476B5F-3FA8-11CF-EC18-054D8ADD0597}"/>
+          </ac:picMkLst>
+        </pc:picChg>
+        <pc:picChg chg="del">
+          <ac:chgData name="Lorenzo Dolzanelli" userId="dff1ab91afad8a33" providerId="LiveId" clId="{E4438C63-D726-4254-B5C1-0731AF93BC5F}" dt="2025-11-10T14:34:02.001" v="41" actId="478"/>
+          <ac:picMkLst>
+            <pc:docMk/>
+            <pc:sldMk cId="2601686502" sldId="289"/>
+            <ac:picMk id="5" creationId="{BF621B33-B3D6-379F-4E74-87317850203B}"/>
+          </ac:picMkLst>
+        </pc:picChg>
+      </pc:sldChg>
+    </pc:docChg>
+  </pc:docChgLst>
+</pc:chgInfo>
+</file>
+
 <file path=ppt/notesMasters/notesMaster1.xml><?xml version="1.0" encoding="utf-8"?>
 <p:notesMaster xmlns:a="http://schemas.openxmlformats.org/drawingml/2006/main" xmlns:r="http://schemas.openxmlformats.org/officeDocument/2006/relationships" xmlns:p="http://schemas.openxmlformats.org/presentationml/2006/main">
   <p:cSld>
@@ -241,7 +333,7 @@
             </a:pPr>
             <a:fld id="{3632E96E-41F7-40C5-8419-297958CC00FA}" type="datetimeFigureOut">
               <a:rPr lang="it-IT"/>
-              <a:t>30/10/2025</a:t>
+              <a:t>10/11/2025</a:t>
             </a:fld>
             <a:endParaRPr lang="it-IT"/>
           </a:p>
@@ -422,7 +514,7 @@
             </a:pPr>
             <a:fld id="{2E6999B8-B6B4-4561-A3CD-BBCDAB9FC9D9}" type="slidenum">
               <a:rPr lang="it-IT"/>
-              <a:t>‹N›</a:t>
+              <a:t>‹#›</a:t>
             </a:fld>
             <a:endParaRPr lang="it-IT"/>
           </a:p>
@@ -638,7 +730,7 @@
       </p:grpSpPr>
       <p:sp>
         <p:nvSpPr>
-          <p:cNvPr id="1997200584" name="Slide Image Placeholder 1"/>
+          <p:cNvPr id="1172904136" name="Slide Image Placeholder 1"/>
           <p:cNvSpPr>
             <a:spLocks noGrp="1" noRot="1" noChangeAspect="1"/>
           </p:cNvSpPr>
@@ -650,7 +742,7 @@
       </p:sp>
       <p:sp>
         <p:nvSpPr>
-          <p:cNvPr id="1154652169" name="Notes Placeholder 2"/>
+          <p:cNvPr id="167403374" name="Notes Placeholder 2"/>
           <p:cNvSpPr>
             <a:spLocks noGrp="1"/>
           </p:cNvSpPr>
@@ -672,7 +764,7 @@
       </p:sp>
       <p:sp>
         <p:nvSpPr>
-          <p:cNvPr id="1893709921" name="Slide Number Placeholder 3"/>
+          <p:cNvPr id="297425978" name="Slide Number Placeholder 3"/>
           <p:cNvSpPr>
             <a:spLocks noGrp="1"/>
           </p:cNvSpPr>
@@ -688,7 +780,7 @@
             <a:pPr>
               <a:defRPr/>
             </a:pPr>
-            <a:fld id="{0A354E2A-FD91-BE13-31E5-F9D7895BA612}" type="slidenum">
+            <a:fld id="{5F6D550A-33FF-F345-33F7-C626DCFF7893}" type="slidenum">
               <a:rPr/>
               <a:t>12</a:t>
             </a:fld>
@@ -723,7 +815,7 @@
       </p:grpSpPr>
       <p:sp>
         <p:nvSpPr>
-          <p:cNvPr id="1348156743" name="Slide Image Placeholder 1"/>
+          <p:cNvPr id="1997200584" name="Slide Image Placeholder 1"/>
           <p:cNvSpPr>
             <a:spLocks noGrp="1" noRot="1" noChangeAspect="1"/>
           </p:cNvSpPr>
@@ -735,7 +827,7 @@
       </p:sp>
       <p:sp>
         <p:nvSpPr>
-          <p:cNvPr id="1598776959" name="Notes Placeholder 2"/>
+          <p:cNvPr id="1154652169" name="Notes Placeholder 2"/>
           <p:cNvSpPr>
             <a:spLocks noGrp="1"/>
           </p:cNvSpPr>
@@ -757,7 +849,7 @@
       </p:sp>
       <p:sp>
         <p:nvSpPr>
-          <p:cNvPr id="1403810376" name="Slide Number Placeholder 3"/>
+          <p:cNvPr id="1893709921" name="Slide Number Placeholder 3"/>
           <p:cNvSpPr>
             <a:spLocks noGrp="1"/>
           </p:cNvSpPr>
@@ -773,7 +865,7 @@
             <a:pPr>
               <a:defRPr/>
             </a:pPr>
-            <a:fld id="{B753592B-FCDD-6163-0739-6BAACF3A1F45}" type="slidenum">
+            <a:fld id="{0A354E2A-FD91-BE13-31E5-F9D7895BA612}" type="slidenum">
               <a:rPr/>
               <a:t>13</a:t>
             </a:fld>
@@ -808,7 +900,7 @@
       </p:grpSpPr>
       <p:sp>
         <p:nvSpPr>
-          <p:cNvPr id="1087923633" name="Slide Image Placeholder 1"/>
+          <p:cNvPr id="1348156743" name="Slide Image Placeholder 1"/>
           <p:cNvSpPr>
             <a:spLocks noGrp="1" noRot="1" noChangeAspect="1"/>
           </p:cNvSpPr>
@@ -820,7 +912,7 @@
       </p:sp>
       <p:sp>
         <p:nvSpPr>
-          <p:cNvPr id="1530696377" name="Notes Placeholder 2"/>
+          <p:cNvPr id="1598776959" name="Notes Placeholder 2"/>
           <p:cNvSpPr>
             <a:spLocks noGrp="1"/>
           </p:cNvSpPr>
@@ -842,7 +934,7 @@
       </p:sp>
       <p:sp>
         <p:nvSpPr>
-          <p:cNvPr id="267858865" name="Slide Number Placeholder 3"/>
+          <p:cNvPr id="1403810376" name="Slide Number Placeholder 3"/>
           <p:cNvSpPr>
             <a:spLocks noGrp="1"/>
           </p:cNvSpPr>
@@ -858,9 +950,9 @@
             <a:pPr>
               <a:defRPr/>
             </a:pPr>
-            <a:fld id="{1CD94749-6FDA-4E9C-36AB-734731960A87}" type="slidenum">
+            <a:fld id="{B753592B-FCDD-6163-0739-6BAACF3A1F45}" type="slidenum">
               <a:rPr/>
-              <a:t>18</a:t>
+              <a:t>14</a:t>
             </a:fld>
             <a:endParaRPr/>
           </a:p>
@@ -893,7 +985,7 @@
       </p:grpSpPr>
       <p:sp>
         <p:nvSpPr>
-          <p:cNvPr id="1286070024" name="Slide Image Placeholder 1"/>
+          <p:cNvPr id="1087923633" name="Slide Image Placeholder 1"/>
           <p:cNvSpPr>
             <a:spLocks noGrp="1" noRot="1" noChangeAspect="1"/>
           </p:cNvSpPr>
@@ -905,7 +997,7 @@
       </p:sp>
       <p:sp>
         <p:nvSpPr>
-          <p:cNvPr id="2087769782" name="Notes Placeholder 2"/>
+          <p:cNvPr id="1530696377" name="Notes Placeholder 2"/>
           <p:cNvSpPr>
             <a:spLocks noGrp="1"/>
           </p:cNvSpPr>
@@ -927,7 +1019,7 @@
       </p:sp>
       <p:sp>
         <p:nvSpPr>
-          <p:cNvPr id="66322064" name="Slide Number Placeholder 3"/>
+          <p:cNvPr id="267858865" name="Slide Number Placeholder 3"/>
           <p:cNvSpPr>
             <a:spLocks noGrp="1"/>
           </p:cNvSpPr>
@@ -943,7 +1035,7 @@
             <a:pPr>
               <a:defRPr/>
             </a:pPr>
-            <a:fld id="{E2F52480-0813-D9C9-E145-46E7CB451224}" type="slidenum">
+            <a:fld id="{1CD94749-6FDA-4E9C-36AB-734731960A87}" type="slidenum">
               <a:rPr/>
               <a:t>19</a:t>
             </a:fld>
@@ -978,7 +1070,7 @@
       </p:grpSpPr>
       <p:sp>
         <p:nvSpPr>
-          <p:cNvPr id="695136953" name="Slide Image Placeholder 1"/>
+          <p:cNvPr id="1286070024" name="Slide Image Placeholder 1"/>
           <p:cNvSpPr>
             <a:spLocks noGrp="1" noRot="1" noChangeAspect="1"/>
           </p:cNvSpPr>
@@ -990,7 +1082,7 @@
       </p:sp>
       <p:sp>
         <p:nvSpPr>
-          <p:cNvPr id="1993756006" name="Notes Placeholder 2"/>
+          <p:cNvPr id="2087769782" name="Notes Placeholder 2"/>
           <p:cNvSpPr>
             <a:spLocks noGrp="1"/>
           </p:cNvSpPr>
@@ -1012,7 +1104,7 @@
       </p:sp>
       <p:sp>
         <p:nvSpPr>
-          <p:cNvPr id="1801450287" name="Slide Number Placeholder 3"/>
+          <p:cNvPr id="66322064" name="Slide Number Placeholder 3"/>
           <p:cNvSpPr>
             <a:spLocks noGrp="1"/>
           </p:cNvSpPr>
@@ -1028,7 +1120,7 @@
             <a:pPr>
               <a:defRPr/>
             </a:pPr>
-            <a:fld id="{2CB3A339-E4F5-9849-5159-B780C46036EF}" type="slidenum">
+            <a:fld id="{E2F52480-0813-D9C9-E145-46E7CB451224}" type="slidenum">
               <a:rPr/>
               <a:t>20</a:t>
             </a:fld>
@@ -1063,7 +1155,7 @@
       </p:grpSpPr>
       <p:sp>
         <p:nvSpPr>
-          <p:cNvPr id="1833777513" name="Slide Image Placeholder 1"/>
+          <p:cNvPr id="695136953" name="Slide Image Placeholder 1"/>
           <p:cNvSpPr>
             <a:spLocks noGrp="1" noRot="1" noChangeAspect="1"/>
           </p:cNvSpPr>
@@ -1075,7 +1167,7 @@
       </p:sp>
       <p:sp>
         <p:nvSpPr>
-          <p:cNvPr id="1452218426" name="Notes Placeholder 2"/>
+          <p:cNvPr id="1993756006" name="Notes Placeholder 2"/>
           <p:cNvSpPr>
             <a:spLocks noGrp="1"/>
           </p:cNvSpPr>
@@ -1097,7 +1189,7 @@
       </p:sp>
       <p:sp>
         <p:nvSpPr>
-          <p:cNvPr id="2023098653" name="Slide Number Placeholder 3"/>
+          <p:cNvPr id="1801450287" name="Slide Number Placeholder 3"/>
           <p:cNvSpPr>
             <a:spLocks noGrp="1"/>
           </p:cNvSpPr>
@@ -1113,7 +1205,7 @@
             <a:pPr>
               <a:defRPr/>
             </a:pPr>
-            <a:fld id="{7754AAF7-24FB-4C7D-56D0-9F6828B47495}" type="slidenum">
+            <a:fld id="{2CB3A339-E4F5-9849-5159-B780C46036EF}" type="slidenum">
               <a:rPr/>
               <a:t>21</a:t>
             </a:fld>
@@ -1148,7 +1240,7 @@
       </p:grpSpPr>
       <p:sp>
         <p:nvSpPr>
-          <p:cNvPr id="826642841" name="Slide Image Placeholder 1"/>
+          <p:cNvPr id="1833777513" name="Slide Image Placeholder 1"/>
           <p:cNvSpPr>
             <a:spLocks noGrp="1" noRot="1" noChangeAspect="1"/>
           </p:cNvSpPr>
@@ -1160,7 +1252,7 @@
       </p:sp>
       <p:sp>
         <p:nvSpPr>
-          <p:cNvPr id="170725483" name="Notes Placeholder 2"/>
+          <p:cNvPr id="1452218426" name="Notes Placeholder 2"/>
           <p:cNvSpPr>
             <a:spLocks noGrp="1"/>
           </p:cNvSpPr>
@@ -1182,7 +1274,7 @@
       </p:sp>
       <p:sp>
         <p:nvSpPr>
-          <p:cNvPr id="599569182" name="Slide Number Placeholder 3"/>
+          <p:cNvPr id="2023098653" name="Slide Number Placeholder 3"/>
           <p:cNvSpPr>
             <a:spLocks noGrp="1"/>
           </p:cNvSpPr>
@@ -1198,7 +1290,7 @@
             <a:pPr>
               <a:defRPr/>
             </a:pPr>
-            <a:fld id="{ECC01B90-6EF3-4614-96E6-28D52D163363}" type="slidenum">
+            <a:fld id="{7754AAF7-24FB-4C7D-56D0-9F6828B47495}" type="slidenum">
               <a:rPr/>
               <a:t>22</a:t>
             </a:fld>
@@ -1233,7 +1325,7 @@
       </p:grpSpPr>
       <p:sp>
         <p:nvSpPr>
-          <p:cNvPr id="1040290452" name="Slide Image Placeholder 1"/>
+          <p:cNvPr id="826642841" name="Slide Image Placeholder 1"/>
           <p:cNvSpPr>
             <a:spLocks noGrp="1" noRot="1" noChangeAspect="1"/>
           </p:cNvSpPr>
@@ -1245,7 +1337,7 @@
       </p:sp>
       <p:sp>
         <p:nvSpPr>
-          <p:cNvPr id="1677648333" name="Notes Placeholder 2"/>
+          <p:cNvPr id="170725483" name="Notes Placeholder 2"/>
           <p:cNvSpPr>
             <a:spLocks noGrp="1"/>
           </p:cNvSpPr>
@@ -1267,7 +1359,7 @@
       </p:sp>
       <p:sp>
         <p:nvSpPr>
-          <p:cNvPr id="1466620103" name="Slide Number Placeholder 3"/>
+          <p:cNvPr id="599569182" name="Slide Number Placeholder 3"/>
           <p:cNvSpPr>
             <a:spLocks noGrp="1"/>
           </p:cNvSpPr>
@@ -1283,7 +1375,7 @@
             <a:pPr>
               <a:defRPr/>
             </a:pPr>
-            <a:fld id="{C1B0ED42-154C-37AC-EA60-9CE5185831C2}" type="slidenum">
+            <a:fld id="{ECC01B90-6EF3-4614-96E6-28D52D163363}" type="slidenum">
               <a:rPr/>
               <a:t>23</a:t>
             </a:fld>
@@ -1318,7 +1410,7 @@
       </p:grpSpPr>
       <p:sp>
         <p:nvSpPr>
-          <p:cNvPr id="361328429" name="Slide Image Placeholder 1"/>
+          <p:cNvPr id="1040290452" name="Slide Image Placeholder 1"/>
           <p:cNvSpPr>
             <a:spLocks noGrp="1" noRot="1" noChangeAspect="1"/>
           </p:cNvSpPr>
@@ -1330,7 +1422,7 @@
       </p:sp>
       <p:sp>
         <p:nvSpPr>
-          <p:cNvPr id="2076207588" name="Notes Placeholder 2"/>
+          <p:cNvPr id="1677648333" name="Notes Placeholder 2"/>
           <p:cNvSpPr>
             <a:spLocks noGrp="1"/>
           </p:cNvSpPr>
@@ -1352,7 +1444,7 @@
       </p:sp>
       <p:sp>
         <p:nvSpPr>
-          <p:cNvPr id="1342391195" name="Slide Number Placeholder 3"/>
+          <p:cNvPr id="1466620103" name="Slide Number Placeholder 3"/>
           <p:cNvSpPr>
             <a:spLocks noGrp="1"/>
           </p:cNvSpPr>
@@ -1368,7 +1460,7 @@
             <a:pPr>
               <a:defRPr/>
             </a:pPr>
-            <a:fld id="{97CE3B5A-C7B8-C31E-D05F-021B77FFEF0E}" type="slidenum">
+            <a:fld id="{C1B0ED42-154C-37AC-EA60-9CE5185831C2}" type="slidenum">
               <a:rPr/>
               <a:t>24</a:t>
             </a:fld>
@@ -1403,7 +1495,7 @@
       </p:grpSpPr>
       <p:sp>
         <p:nvSpPr>
-          <p:cNvPr id="304025030" name="Slide Image Placeholder 1"/>
+          <p:cNvPr id="361328429" name="Slide Image Placeholder 1"/>
           <p:cNvSpPr>
             <a:spLocks noGrp="1" noRot="1" noChangeAspect="1"/>
           </p:cNvSpPr>
@@ -1415,7 +1507,7 @@
       </p:sp>
       <p:sp>
         <p:nvSpPr>
-          <p:cNvPr id="1216711154" name="Notes Placeholder 2"/>
+          <p:cNvPr id="2076207588" name="Notes Placeholder 2"/>
           <p:cNvSpPr>
             <a:spLocks noGrp="1"/>
           </p:cNvSpPr>
@@ -1437,7 +1529,7 @@
       </p:sp>
       <p:sp>
         <p:nvSpPr>
-          <p:cNvPr id="1437157295" name="Slide Number Placeholder 3"/>
+          <p:cNvPr id="1342391195" name="Slide Number Placeholder 3"/>
           <p:cNvSpPr>
             <a:spLocks noGrp="1"/>
           </p:cNvSpPr>
@@ -1453,7 +1545,7 @@
             <a:pPr>
               <a:defRPr/>
             </a:pPr>
-            <a:fld id="{373A4F64-1DDB-898D-3141-351BAF57DA12}" type="slidenum">
+            <a:fld id="{97CE3B5A-C7B8-C31E-D05F-021B77FFEF0E}" type="slidenum">
               <a:rPr/>
               <a:t>25</a:t>
             </a:fld>
@@ -1573,7 +1665,7 @@
       </p:grpSpPr>
       <p:sp>
         <p:nvSpPr>
-          <p:cNvPr id="661484407" name="Slide Image Placeholder 1"/>
+          <p:cNvPr id="304025030" name="Slide Image Placeholder 1"/>
           <p:cNvSpPr>
             <a:spLocks noGrp="1" noRot="1" noChangeAspect="1"/>
           </p:cNvSpPr>
@@ -1585,7 +1677,7 @@
       </p:sp>
       <p:sp>
         <p:nvSpPr>
-          <p:cNvPr id="1567864133" name="Notes Placeholder 2"/>
+          <p:cNvPr id="1216711154" name="Notes Placeholder 2"/>
           <p:cNvSpPr>
             <a:spLocks noGrp="1"/>
           </p:cNvSpPr>
@@ -1607,7 +1699,7 @@
       </p:sp>
       <p:sp>
         <p:nvSpPr>
-          <p:cNvPr id="356777442" name="Slide Number Placeholder 3"/>
+          <p:cNvPr id="1437157295" name="Slide Number Placeholder 3"/>
           <p:cNvSpPr>
             <a:spLocks noGrp="1"/>
           </p:cNvSpPr>
@@ -1623,7 +1715,7 @@
             <a:pPr>
               <a:defRPr/>
             </a:pPr>
-            <a:fld id="{34DDF272-15C9-97B8-0696-B071723A3A34}" type="slidenum">
+            <a:fld id="{373A4F64-1DDB-898D-3141-351BAF57DA12}" type="slidenum">
               <a:rPr/>
               <a:t>26</a:t>
             </a:fld>
@@ -1658,7 +1750,7 @@
       </p:grpSpPr>
       <p:sp>
         <p:nvSpPr>
-          <p:cNvPr id="1078166060" name="Slide Image Placeholder 1"/>
+          <p:cNvPr id="661484407" name="Slide Image Placeholder 1"/>
           <p:cNvSpPr>
             <a:spLocks noGrp="1" noRot="1" noChangeAspect="1"/>
           </p:cNvSpPr>
@@ -1670,7 +1762,7 @@
       </p:sp>
       <p:sp>
         <p:nvSpPr>
-          <p:cNvPr id="1274845390" name="Notes Placeholder 2"/>
+          <p:cNvPr id="1567864133" name="Notes Placeholder 2"/>
           <p:cNvSpPr>
             <a:spLocks noGrp="1"/>
           </p:cNvSpPr>
@@ -1692,7 +1784,7 @@
       </p:sp>
       <p:sp>
         <p:nvSpPr>
-          <p:cNvPr id="340640237" name="Slide Number Placeholder 3"/>
+          <p:cNvPr id="356777442" name="Slide Number Placeholder 3"/>
           <p:cNvSpPr>
             <a:spLocks noGrp="1"/>
           </p:cNvSpPr>
@@ -1708,7 +1800,7 @@
             <a:pPr>
               <a:defRPr/>
             </a:pPr>
-            <a:fld id="{63195650-B0F5-4319-E0B1-4A630F16C93D}" type="slidenum">
+            <a:fld id="{34DDF272-15C9-97B8-0696-B071723A3A34}" type="slidenum">
               <a:rPr/>
               <a:t>27</a:t>
             </a:fld>
@@ -1725,6 +1817,91 @@
 </file>
 
 <file path=ppt/notesSlides/notesSlide22.xml><?xml version="1.0" encoding="utf-8"?>
+<p:notes xmlns:a="http://schemas.openxmlformats.org/drawingml/2006/main" xmlns:r="http://schemas.openxmlformats.org/officeDocument/2006/relationships" xmlns:p="http://schemas.openxmlformats.org/presentationml/2006/main">
+  <p:cSld>
+    <p:spTree>
+      <p:nvGrpSpPr>
+        <p:cNvPr id="1" name=""/>
+        <p:cNvGrpSpPr/>
+        <p:nvPr/>
+      </p:nvGrpSpPr>
+      <p:grpSpPr bwMode="auto">
+        <a:xfrm>
+          <a:off x="0" y="0"/>
+          <a:ext cx="0" cy="0"/>
+          <a:chOff x="0" y="0"/>
+          <a:chExt cx="0" cy="0"/>
+        </a:xfrm>
+      </p:grpSpPr>
+      <p:sp>
+        <p:nvSpPr>
+          <p:cNvPr id="1078166060" name="Slide Image Placeholder 1"/>
+          <p:cNvSpPr>
+            <a:spLocks noGrp="1" noRot="1" noChangeAspect="1"/>
+          </p:cNvSpPr>
+          <p:nvPr>
+            <p:ph type="sldImg"/>
+          </p:nvPr>
+        </p:nvSpPr>
+        <p:spPr bwMode="auto"/>
+      </p:sp>
+      <p:sp>
+        <p:nvSpPr>
+          <p:cNvPr id="1274845390" name="Notes Placeholder 2"/>
+          <p:cNvSpPr>
+            <a:spLocks noGrp="1"/>
+          </p:cNvSpPr>
+          <p:nvPr>
+            <p:ph type="body" idx="1"/>
+          </p:nvPr>
+        </p:nvSpPr>
+        <p:spPr bwMode="auto"/>
+        <p:txBody>
+          <a:bodyPr/>
+          <a:lstStyle/>
+          <a:p>
+            <a:pPr>
+              <a:defRPr/>
+            </a:pPr>
+            <a:endParaRPr/>
+          </a:p>
+        </p:txBody>
+      </p:sp>
+      <p:sp>
+        <p:nvSpPr>
+          <p:cNvPr id="340640237" name="Slide Number Placeholder 3"/>
+          <p:cNvSpPr>
+            <a:spLocks noGrp="1"/>
+          </p:cNvSpPr>
+          <p:nvPr>
+            <p:ph type="sldNum" sz="quarter" idx="10"/>
+          </p:nvPr>
+        </p:nvSpPr>
+        <p:spPr bwMode="auto"/>
+        <p:txBody>
+          <a:bodyPr/>
+          <a:lstStyle/>
+          <a:p>
+            <a:pPr>
+              <a:defRPr/>
+            </a:pPr>
+            <a:fld id="{63195650-B0F5-4319-E0B1-4A630F16C93D}" type="slidenum">
+              <a:rPr/>
+              <a:t>28</a:t>
+            </a:fld>
+            <a:endParaRPr/>
+          </a:p>
+        </p:txBody>
+      </p:sp>
+    </p:spTree>
+  </p:cSld>
+  <p:clrMapOvr>
+    <a:masterClrMapping/>
+  </p:clrMapOvr>
+</p:notes>
+</file>
+
+<file path=ppt/notesSlides/notesSlide23.xml><?xml version="1.0" encoding="utf-8"?>
 <p:notes xmlns:a="http://schemas.openxmlformats.org/drawingml/2006/main" xmlns:r="http://schemas.openxmlformats.org/officeDocument/2006/relationships" xmlns:p="http://schemas.openxmlformats.org/presentationml/2006/main">
   <p:cSld>
     <p:spTree>
@@ -1819,7 +1996,7 @@
             </a:pPr>
             <a:fld id="{373A4F64-1DDB-898D-3141-351BAF57DA12}" type="slidenum">
               <a:rPr/>
-              <a:t>28</a:t>
+              <a:t>29</a:t>
             </a:fld>
             <a:endParaRPr/>
           </a:p>
@@ -2098,7 +2275,13 @@
   <p:cSld>
     <p:spTree>
       <p:nvGrpSpPr>
-        <p:cNvPr id="1" name=""/>
+        <p:cNvPr id="1" name="">
+          <a:extLst>
+            <a:ext uri="{FF2B5EF4-FFF2-40B4-BE49-F238E27FC236}">
+              <a16:creationId xmlns:a16="http://schemas.microsoft.com/office/drawing/2014/main" id="{D3B093F9-9819-2EC0-F00D-E24FE3086434}"/>
+            </a:ext>
+          </a:extLst>
+        </p:cNvPr>
         <p:cNvGrpSpPr/>
         <p:nvPr/>
       </p:nvGrpSpPr>
@@ -2112,7 +2295,13 @@
       </p:grpSpPr>
       <p:sp>
         <p:nvSpPr>
-          <p:cNvPr id="1637556594" name="Slide Image Placeholder 1"/>
+          <p:cNvPr id="1637556594" name="Slide Image Placeholder 1">
+            <a:extLst>
+              <a:ext uri="{FF2B5EF4-FFF2-40B4-BE49-F238E27FC236}">
+                <a16:creationId xmlns:a16="http://schemas.microsoft.com/office/drawing/2014/main" id="{236D9D3F-4418-2B5F-A393-3D272F513BA4}"/>
+              </a:ext>
+            </a:extLst>
+          </p:cNvPr>
           <p:cNvSpPr>
             <a:spLocks noGrp="1" noRot="1" noChangeAspect="1"/>
           </p:cNvSpPr>
@@ -2124,7 +2313,13 @@
       </p:sp>
       <p:sp>
         <p:nvSpPr>
-          <p:cNvPr id="2099664211" name="Notes Placeholder 2"/>
+          <p:cNvPr id="2099664211" name="Notes Placeholder 2">
+            <a:extLst>
+              <a:ext uri="{FF2B5EF4-FFF2-40B4-BE49-F238E27FC236}">
+                <a16:creationId xmlns:a16="http://schemas.microsoft.com/office/drawing/2014/main" id="{4EAB2B7A-A819-651A-708A-ED463609958F}"/>
+              </a:ext>
+            </a:extLst>
+          </p:cNvPr>
           <p:cNvSpPr>
             <a:spLocks noGrp="1"/>
           </p:cNvSpPr>
@@ -2146,7 +2341,13 @@
       </p:sp>
       <p:sp>
         <p:nvSpPr>
-          <p:cNvPr id="863438736" name="Slide Number Placeholder 3"/>
+          <p:cNvPr id="863438736" name="Slide Number Placeholder 3">
+            <a:extLst>
+              <a:ext uri="{FF2B5EF4-FFF2-40B4-BE49-F238E27FC236}">
+                <a16:creationId xmlns:a16="http://schemas.microsoft.com/office/drawing/2014/main" id="{F055B5B0-C21C-6CCA-333E-ED4FD6018D60}"/>
+              </a:ext>
+            </a:extLst>
+          </p:cNvPr>
           <p:cNvSpPr>
             <a:spLocks noGrp="1"/>
           </p:cNvSpPr>
@@ -2171,6 +2372,11 @@
         </p:txBody>
       </p:sp>
     </p:spTree>
+    <p:extLst>
+      <p:ext uri="{BB962C8B-B14F-4D97-AF65-F5344CB8AC3E}">
+        <p14:creationId xmlns:p14="http://schemas.microsoft.com/office/powerpoint/2010/main" val="2972883750"/>
+      </p:ext>
+    </p:extLst>
   </p:cSld>
   <p:clrMapOvr>
     <a:masterClrMapping/>
@@ -2197,7 +2403,7 @@
       </p:grpSpPr>
       <p:sp>
         <p:nvSpPr>
-          <p:cNvPr id="1866783340" name="Slide Image Placeholder 1"/>
+          <p:cNvPr id="1637556594" name="Slide Image Placeholder 1"/>
           <p:cNvSpPr>
             <a:spLocks noGrp="1" noRot="1" noChangeAspect="1"/>
           </p:cNvSpPr>
@@ -2209,7 +2415,7 @@
       </p:sp>
       <p:sp>
         <p:nvSpPr>
-          <p:cNvPr id="438746694" name="Notes Placeholder 2"/>
+          <p:cNvPr id="2099664211" name="Notes Placeholder 2"/>
           <p:cNvSpPr>
             <a:spLocks noGrp="1"/>
           </p:cNvSpPr>
@@ -2231,7 +2437,7 @@
       </p:sp>
       <p:sp>
         <p:nvSpPr>
-          <p:cNvPr id="1825001365" name="Slide Number Placeholder 3"/>
+          <p:cNvPr id="863438736" name="Slide Number Placeholder 3"/>
           <p:cNvSpPr>
             <a:spLocks noGrp="1"/>
           </p:cNvSpPr>
@@ -2247,7 +2453,7 @@
             <a:pPr>
               <a:defRPr/>
             </a:pPr>
-            <a:fld id="{CFCBDFB4-5DE2-4395-7D2B-3F76437FF0D3}" type="slidenum">
+            <a:fld id="{2C2480C3-7ECA-BEA5-1D8D-6A196042D57D}" type="slidenum">
               <a:rPr/>
               <a:t>7</a:t>
             </a:fld>
@@ -2282,7 +2488,7 @@
       </p:grpSpPr>
       <p:sp>
         <p:nvSpPr>
-          <p:cNvPr id="1279749026" name="Slide Image Placeholder 1"/>
+          <p:cNvPr id="1866783340" name="Slide Image Placeholder 1"/>
           <p:cNvSpPr>
             <a:spLocks noGrp="1" noRot="1" noChangeAspect="1"/>
           </p:cNvSpPr>
@@ -2294,7 +2500,7 @@
       </p:sp>
       <p:sp>
         <p:nvSpPr>
-          <p:cNvPr id="1443393291" name="Notes Placeholder 2"/>
+          <p:cNvPr id="438746694" name="Notes Placeholder 2"/>
           <p:cNvSpPr>
             <a:spLocks noGrp="1"/>
           </p:cNvSpPr>
@@ -2316,7 +2522,7 @@
       </p:sp>
       <p:sp>
         <p:nvSpPr>
-          <p:cNvPr id="816317407" name="Slide Number Placeholder 3"/>
+          <p:cNvPr id="1825001365" name="Slide Number Placeholder 3"/>
           <p:cNvSpPr>
             <a:spLocks noGrp="1"/>
           </p:cNvSpPr>
@@ -2332,7 +2538,7 @@
             <a:pPr>
               <a:defRPr/>
             </a:pPr>
-            <a:fld id="{17F3189F-EC7B-F6F2-E7B6-A1DC7CF396BE}" type="slidenum">
+            <a:fld id="{CFCBDFB4-5DE2-4395-7D2B-3F76437FF0D3}" type="slidenum">
               <a:rPr/>
               <a:t>8</a:t>
             </a:fld>
@@ -2367,7 +2573,7 @@
       </p:grpSpPr>
       <p:sp>
         <p:nvSpPr>
-          <p:cNvPr id="1172904136" name="Slide Image Placeholder 1"/>
+          <p:cNvPr id="1279749026" name="Slide Image Placeholder 1"/>
           <p:cNvSpPr>
             <a:spLocks noGrp="1" noRot="1" noChangeAspect="1"/>
           </p:cNvSpPr>
@@ -2379,7 +2585,7 @@
       </p:sp>
       <p:sp>
         <p:nvSpPr>
-          <p:cNvPr id="167403374" name="Notes Placeholder 2"/>
+          <p:cNvPr id="1443393291" name="Notes Placeholder 2"/>
           <p:cNvSpPr>
             <a:spLocks noGrp="1"/>
           </p:cNvSpPr>
@@ -2401,7 +2607,7 @@
       </p:sp>
       <p:sp>
         <p:nvSpPr>
-          <p:cNvPr id="297425978" name="Slide Number Placeholder 3"/>
+          <p:cNvPr id="816317407" name="Slide Number Placeholder 3"/>
           <p:cNvSpPr>
             <a:spLocks noGrp="1"/>
           </p:cNvSpPr>
@@ -2417,9 +2623,9 @@
             <a:pPr>
               <a:defRPr/>
             </a:pPr>
-            <a:fld id="{5F6D550A-33FF-F345-33F7-C626DCFF7893}" type="slidenum">
+            <a:fld id="{17F3189F-EC7B-F6F2-E7B6-A1DC7CF396BE}" type="slidenum">
               <a:rPr/>
-              <a:t>11</a:t>
+              <a:t>9</a:t>
             </a:fld>
             <a:endParaRPr/>
           </a:p>
@@ -2583,7 +2789,7 @@
             </a:pPr>
             <a:fld id="{BCC18F51-09EC-435C-A3BA-64A766E099C0}" type="datetimeFigureOut">
               <a:rPr lang="it-IT" smtClean="0"/>
-              <a:t>30/10/2025</a:t>
+              <a:t>10/11/2025</a:t>
             </a:fld>
             <a:endParaRPr lang="it-IT"/>
           </a:p>
@@ -2643,7 +2849,7 @@
             </a:pPr>
             <a:fld id="{08395586-F03A-48D1-94DF-16B239DF4FB5}" type="slidenum">
               <a:rPr lang="it-IT" smtClean="0"/>
-              <a:t>‹N›</a:t>
+              <a:t>‹#›</a:t>
             </a:fld>
             <a:endParaRPr lang="it-IT"/>
           </a:p>
@@ -2790,7 +2996,7 @@
             </a:pPr>
             <a:fld id="{BCC18F51-09EC-435C-A3BA-64A766E099C0}" type="datetimeFigureOut">
               <a:rPr lang="it-IT" smtClean="0"/>
-              <a:t>30/10/2025</a:t>
+              <a:t>10/11/2025</a:t>
             </a:fld>
             <a:endParaRPr lang="it-IT"/>
           </a:p>
@@ -2850,7 +3056,7 @@
             </a:pPr>
             <a:fld id="{08395586-F03A-48D1-94DF-16B239DF4FB5}" type="slidenum">
               <a:rPr lang="it-IT" smtClean="0"/>
-              <a:t>‹N›</a:t>
+              <a:t>‹#›</a:t>
             </a:fld>
             <a:endParaRPr lang="it-IT"/>
           </a:p>
@@ -3007,7 +3213,7 @@
             </a:pPr>
             <a:fld id="{BCC18F51-09EC-435C-A3BA-64A766E099C0}" type="datetimeFigureOut">
               <a:rPr lang="it-IT" smtClean="0"/>
-              <a:t>30/10/2025</a:t>
+              <a:t>10/11/2025</a:t>
             </a:fld>
             <a:endParaRPr lang="it-IT"/>
           </a:p>
@@ -3067,7 +3273,7 @@
             </a:pPr>
             <a:fld id="{08395586-F03A-48D1-94DF-16B239DF4FB5}" type="slidenum">
               <a:rPr lang="it-IT" smtClean="0"/>
-              <a:t>‹N›</a:t>
+              <a:t>‹#›</a:t>
             </a:fld>
             <a:endParaRPr lang="it-IT"/>
           </a:p>
@@ -3224,7 +3430,7 @@
             </a:pPr>
             <a:fld id="{BCC18F51-09EC-435C-A3BA-64A766E099C0}" type="datetimeFigureOut">
               <a:rPr lang="it-IT"/>
-              <a:t>30/10/2025</a:t>
+              <a:t>10/11/2025</a:t>
             </a:fld>
             <a:endParaRPr lang="it-IT"/>
           </a:p>
@@ -3272,7 +3478,7 @@
             </a:pPr>
             <a:fld id="{08395586-F03A-48D1-94DF-16B239DF4FB5}" type="slidenum">
               <a:rPr lang="it-IT"/>
-              <a:t>‹N›</a:t>
+              <a:t>‹#›</a:t>
             </a:fld>
             <a:endParaRPr lang="it-IT"/>
           </a:p>
@@ -3413,7 +3619,7 @@
             </a:pPr>
             <a:fld id="{BCC18F51-09EC-435C-A3BA-64A766E099C0}" type="datetimeFigureOut">
               <a:rPr lang="it-IT"/>
-              <a:t>30/10/2025</a:t>
+              <a:t>10/11/2025</a:t>
             </a:fld>
             <a:endParaRPr lang="it-IT"/>
           </a:p>
@@ -3461,7 +3667,7 @@
             </a:pPr>
             <a:fld id="{08395586-F03A-48D1-94DF-16B239DF4FB5}" type="slidenum">
               <a:rPr lang="it-IT"/>
-              <a:t>‹N›</a:t>
+              <a:t>‹#›</a:t>
             </a:fld>
             <a:endParaRPr lang="it-IT"/>
           </a:p>
@@ -3668,7 +3874,7 @@
             </a:pPr>
             <a:fld id="{BCC18F51-09EC-435C-A3BA-64A766E099C0}" type="datetimeFigureOut">
               <a:rPr lang="it-IT"/>
-              <a:t>30/10/2025</a:t>
+              <a:t>10/11/2025</a:t>
             </a:fld>
             <a:endParaRPr lang="it-IT"/>
           </a:p>
@@ -3716,7 +3922,7 @@
             </a:pPr>
             <a:fld id="{08395586-F03A-48D1-94DF-16B239DF4FB5}" type="slidenum">
               <a:rPr lang="it-IT"/>
-              <a:t>‹N›</a:t>
+              <a:t>‹#›</a:t>
             </a:fld>
             <a:endParaRPr lang="it-IT"/>
           </a:p>
@@ -3932,7 +4138,7 @@
             </a:pPr>
             <a:fld id="{BCC18F51-09EC-435C-A3BA-64A766E099C0}" type="datetimeFigureOut">
               <a:rPr lang="it-IT"/>
-              <a:t>30/10/2025</a:t>
+              <a:t>10/11/2025</a:t>
             </a:fld>
             <a:endParaRPr lang="it-IT"/>
           </a:p>
@@ -3980,7 +4186,7 @@
             </a:pPr>
             <a:fld id="{08395586-F03A-48D1-94DF-16B239DF4FB5}" type="slidenum">
               <a:rPr lang="it-IT"/>
-              <a:t>‹N›</a:t>
+              <a:t>‹#›</a:t>
             </a:fld>
             <a:endParaRPr lang="it-IT"/>
           </a:p>
@@ -4337,7 +4543,7 @@
             </a:pPr>
             <a:fld id="{BCC18F51-09EC-435C-A3BA-64A766E099C0}" type="datetimeFigureOut">
               <a:rPr lang="it-IT"/>
-              <a:t>30/10/2025</a:t>
+              <a:t>10/11/2025</a:t>
             </a:fld>
             <a:endParaRPr lang="it-IT"/>
           </a:p>
@@ -4385,7 +4591,7 @@
             </a:pPr>
             <a:fld id="{08395586-F03A-48D1-94DF-16B239DF4FB5}" type="slidenum">
               <a:rPr lang="it-IT"/>
-              <a:t>‹N›</a:t>
+              <a:t>‹#›</a:t>
             </a:fld>
             <a:endParaRPr lang="it-IT"/>
           </a:p>
@@ -4461,7 +4667,7 @@
             </a:pPr>
             <a:fld id="{BCC18F51-09EC-435C-A3BA-64A766E099C0}" type="datetimeFigureOut">
               <a:rPr lang="it-IT"/>
-              <a:t>30/10/2025</a:t>
+              <a:t>10/11/2025</a:t>
             </a:fld>
             <a:endParaRPr lang="it-IT"/>
           </a:p>
@@ -4509,7 +4715,7 @@
             </a:pPr>
             <a:fld id="{08395586-F03A-48D1-94DF-16B239DF4FB5}" type="slidenum">
               <a:rPr lang="it-IT"/>
-              <a:t>‹N›</a:t>
+              <a:t>‹#›</a:t>
             </a:fld>
             <a:endParaRPr lang="it-IT"/>
           </a:p>
@@ -4560,7 +4766,7 @@
             </a:pPr>
             <a:fld id="{BCC18F51-09EC-435C-A3BA-64A766E099C0}" type="datetimeFigureOut">
               <a:rPr lang="it-IT"/>
-              <a:t>30/10/2025</a:t>
+              <a:t>10/11/2025</a:t>
             </a:fld>
             <a:endParaRPr lang="it-IT"/>
           </a:p>
@@ -4608,7 +4814,7 @@
             </a:pPr>
             <a:fld id="{08395586-F03A-48D1-94DF-16B239DF4FB5}" type="slidenum">
               <a:rPr lang="it-IT"/>
-              <a:t>‹N›</a:t>
+              <a:t>‹#›</a:t>
             </a:fld>
             <a:endParaRPr lang="it-IT"/>
           </a:p>
@@ -4859,7 +5065,7 @@
             </a:pPr>
             <a:fld id="{BCC18F51-09EC-435C-A3BA-64A766E099C0}" type="datetimeFigureOut">
               <a:rPr lang="it-IT"/>
-              <a:t>30/10/2025</a:t>
+              <a:t>10/11/2025</a:t>
             </a:fld>
             <a:endParaRPr lang="it-IT"/>
           </a:p>
@@ -4907,7 +5113,7 @@
             </a:pPr>
             <a:fld id="{08395586-F03A-48D1-94DF-16B239DF4FB5}" type="slidenum">
               <a:rPr lang="it-IT"/>
-              <a:t>‹N›</a:t>
+              <a:t>‹#›</a:t>
             </a:fld>
             <a:endParaRPr lang="it-IT"/>
           </a:p>
@@ -5049,7 +5255,7 @@
             </a:pPr>
             <a:fld id="{BCC18F51-09EC-435C-A3BA-64A766E099C0}" type="datetimeFigureOut">
               <a:rPr lang="it-IT" smtClean="0"/>
-              <a:t>30/10/2025</a:t>
+              <a:t>10/11/2025</a:t>
             </a:fld>
             <a:endParaRPr lang="it-IT"/>
           </a:p>
@@ -5109,7 +5315,7 @@
             </a:pPr>
             <a:fld id="{08395586-F03A-48D1-94DF-16B239DF4FB5}" type="slidenum">
               <a:rPr lang="it-IT" smtClean="0"/>
-              <a:t>‹N›</a:t>
+              <a:t>‹#›</a:t>
             </a:fld>
             <a:endParaRPr lang="it-IT"/>
           </a:p>
@@ -5334,7 +5540,7 @@
             </a:pPr>
             <a:fld id="{BCC18F51-09EC-435C-A3BA-64A766E099C0}" type="datetimeFigureOut">
               <a:rPr lang="it-IT"/>
-              <a:t>30/10/2025</a:t>
+              <a:t>10/11/2025</a:t>
             </a:fld>
             <a:endParaRPr lang="it-IT"/>
           </a:p>
@@ -5382,7 +5588,7 @@
             </a:pPr>
             <a:fld id="{08395586-F03A-48D1-94DF-16B239DF4FB5}" type="slidenum">
               <a:rPr lang="it-IT"/>
-              <a:t>‹N›</a:t>
+              <a:t>‹#›</a:t>
             </a:fld>
             <a:endParaRPr lang="it-IT"/>
           </a:p>
@@ -5523,7 +5729,7 @@
             </a:pPr>
             <a:fld id="{BCC18F51-09EC-435C-A3BA-64A766E099C0}" type="datetimeFigureOut">
               <a:rPr lang="it-IT"/>
-              <a:t>30/10/2025</a:t>
+              <a:t>10/11/2025</a:t>
             </a:fld>
             <a:endParaRPr lang="it-IT"/>
           </a:p>
@@ -5571,7 +5777,7 @@
             </a:pPr>
             <a:fld id="{08395586-F03A-48D1-94DF-16B239DF4FB5}" type="slidenum">
               <a:rPr lang="it-IT"/>
-              <a:t>‹N›</a:t>
+              <a:t>‹#›</a:t>
             </a:fld>
             <a:endParaRPr lang="it-IT"/>
           </a:p>
@@ -5722,7 +5928,7 @@
             </a:pPr>
             <a:fld id="{BCC18F51-09EC-435C-A3BA-64A766E099C0}" type="datetimeFigureOut">
               <a:rPr lang="it-IT"/>
-              <a:t>30/10/2025</a:t>
+              <a:t>10/11/2025</a:t>
             </a:fld>
             <a:endParaRPr lang="it-IT"/>
           </a:p>
@@ -5770,7 +5976,7 @@
             </a:pPr>
             <a:fld id="{08395586-F03A-48D1-94DF-16B239DF4FB5}" type="slidenum">
               <a:rPr lang="it-IT"/>
-              <a:t>‹N›</a:t>
+              <a:t>‹#›</a:t>
             </a:fld>
             <a:endParaRPr lang="it-IT"/>
           </a:p>
@@ -5989,7 +6195,7 @@
             </a:pPr>
             <a:fld id="{BCC18F51-09EC-435C-A3BA-64A766E099C0}" type="datetimeFigureOut">
               <a:rPr lang="it-IT" smtClean="0"/>
-              <a:t>30/10/2025</a:t>
+              <a:t>10/11/2025</a:t>
             </a:fld>
             <a:endParaRPr lang="it-IT"/>
           </a:p>
@@ -6049,7 +6255,7 @@
             </a:pPr>
             <a:fld id="{08395586-F03A-48D1-94DF-16B239DF4FB5}" type="slidenum">
               <a:rPr lang="it-IT" smtClean="0"/>
-              <a:t>‹N›</a:t>
+              <a:t>‹#›</a:t>
             </a:fld>
             <a:endParaRPr lang="it-IT"/>
           </a:p>
@@ -6263,7 +6469,7 @@
             </a:pPr>
             <a:fld id="{BCC18F51-09EC-435C-A3BA-64A766E099C0}" type="datetimeFigureOut">
               <a:rPr lang="it-IT" smtClean="0"/>
-              <a:t>30/10/2025</a:t>
+              <a:t>10/11/2025</a:t>
             </a:fld>
             <a:endParaRPr lang="it-IT"/>
           </a:p>
@@ -6323,7 +6529,7 @@
             </a:pPr>
             <a:fld id="{08395586-F03A-48D1-94DF-16B239DF4FB5}" type="slidenum">
               <a:rPr lang="it-IT" smtClean="0"/>
-              <a:t>‹N›</a:t>
+              <a:t>‹#›</a:t>
             </a:fld>
             <a:endParaRPr lang="it-IT"/>
           </a:p>
@@ -6689,7 +6895,7 @@
             </a:pPr>
             <a:fld id="{BCC18F51-09EC-435C-A3BA-64A766E099C0}" type="datetimeFigureOut">
               <a:rPr lang="it-IT" smtClean="0"/>
-              <a:t>30/10/2025</a:t>
+              <a:t>10/11/2025</a:t>
             </a:fld>
             <a:endParaRPr lang="it-IT"/>
           </a:p>
@@ -6749,7 +6955,7 @@
             </a:pPr>
             <a:fld id="{08395586-F03A-48D1-94DF-16B239DF4FB5}" type="slidenum">
               <a:rPr lang="it-IT" smtClean="0"/>
-              <a:t>‹N›</a:t>
+              <a:t>‹#›</a:t>
             </a:fld>
             <a:endParaRPr lang="it-IT"/>
           </a:p>
@@ -6844,7 +7050,7 @@
             </a:pPr>
             <a:fld id="{BCC18F51-09EC-435C-A3BA-64A766E099C0}" type="datetimeFigureOut">
               <a:rPr lang="it-IT" smtClean="0"/>
-              <a:t>30/10/2025</a:t>
+              <a:t>10/11/2025</a:t>
             </a:fld>
             <a:endParaRPr lang="it-IT"/>
           </a:p>
@@ -6904,7 +7110,7 @@
             </a:pPr>
             <a:fld id="{08395586-F03A-48D1-94DF-16B239DF4FB5}" type="slidenum">
               <a:rPr lang="it-IT" smtClean="0"/>
-              <a:t>‹N›</a:t>
+              <a:t>‹#›</a:t>
             </a:fld>
             <a:endParaRPr lang="it-IT"/>
           </a:p>
@@ -6966,7 +7172,7 @@
             </a:pPr>
             <a:fld id="{BCC18F51-09EC-435C-A3BA-64A766E099C0}" type="datetimeFigureOut">
               <a:rPr lang="it-IT" smtClean="0"/>
-              <a:t>30/10/2025</a:t>
+              <a:t>10/11/2025</a:t>
             </a:fld>
             <a:endParaRPr lang="it-IT"/>
           </a:p>
@@ -7026,7 +7232,7 @@
             </a:pPr>
             <a:fld id="{08395586-F03A-48D1-94DF-16B239DF4FB5}" type="slidenum">
               <a:rPr lang="it-IT" smtClean="0"/>
-              <a:t>‹N›</a:t>
+              <a:t>‹#›</a:t>
             </a:fld>
             <a:endParaRPr lang="it-IT"/>
           </a:p>
@@ -7286,7 +7492,7 @@
             </a:pPr>
             <a:fld id="{BCC18F51-09EC-435C-A3BA-64A766E099C0}" type="datetimeFigureOut">
               <a:rPr lang="it-IT" smtClean="0"/>
-              <a:t>30/10/2025</a:t>
+              <a:t>10/11/2025</a:t>
             </a:fld>
             <a:endParaRPr lang="it-IT"/>
           </a:p>
@@ -7346,7 +7552,7 @@
             </a:pPr>
             <a:fld id="{08395586-F03A-48D1-94DF-16B239DF4FB5}" type="slidenum">
               <a:rPr lang="it-IT" smtClean="0"/>
-              <a:t>‹N›</a:t>
+              <a:t>‹#›</a:t>
             </a:fld>
             <a:endParaRPr lang="it-IT"/>
           </a:p>
@@ -7588,7 +7794,7 @@
             </a:pPr>
             <a:fld id="{BCC18F51-09EC-435C-A3BA-64A766E099C0}" type="datetimeFigureOut">
               <a:rPr lang="it-IT" smtClean="0"/>
-              <a:t>30/10/2025</a:t>
+              <a:t>10/11/2025</a:t>
             </a:fld>
             <a:endParaRPr lang="it-IT"/>
           </a:p>
@@ -7648,7 +7854,7 @@
             </a:pPr>
             <a:fld id="{08395586-F03A-48D1-94DF-16B239DF4FB5}" type="slidenum">
               <a:rPr lang="it-IT" smtClean="0"/>
-              <a:t>‹N›</a:t>
+              <a:t>‹#›</a:t>
             </a:fld>
             <a:endParaRPr lang="it-IT"/>
           </a:p>
@@ -7838,7 +8044,7 @@
             </a:pPr>
             <a:fld id="{BCC18F51-09EC-435C-A3BA-64A766E099C0}" type="datetimeFigureOut">
               <a:rPr lang="it-IT" smtClean="0"/>
-              <a:t>30/10/2025</a:t>
+              <a:t>10/11/2025</a:t>
             </a:fld>
             <a:endParaRPr lang="it-IT"/>
           </a:p>
@@ -7934,7 +8140,7 @@
             </a:pPr>
             <a:fld id="{08395586-F03A-48D1-94DF-16B239DF4FB5}" type="slidenum">
               <a:rPr lang="it-IT" smtClean="0"/>
-              <a:t>‹N›</a:t>
+              <a:t>‹#›</a:t>
             </a:fld>
             <a:endParaRPr lang="it-IT"/>
           </a:p>
@@ -8484,6 +8690,167 @@
   <p:cSld>
     <p:spTree>
       <p:nvGrpSpPr>
+        <p:cNvPr id="1" name=""/>
+        <p:cNvGrpSpPr/>
+        <p:nvPr/>
+      </p:nvGrpSpPr>
+      <p:grpSpPr>
+        <a:xfrm>
+          <a:off x="0" y="0"/>
+          <a:ext cx="0" cy="0"/>
+          <a:chOff x="0" y="0"/>
+          <a:chExt cx="0" cy="0"/>
+        </a:xfrm>
+      </p:grpSpPr>
+      <p:sp>
+        <p:nvSpPr>
+          <p:cNvPr id="2" name="Titolo 1">
+            <a:extLst>
+              <a:ext uri="{FF2B5EF4-FFF2-40B4-BE49-F238E27FC236}">
+                <a16:creationId xmlns:a16="http://schemas.microsoft.com/office/drawing/2014/main" id="{3AB6A9EC-0653-BF20-87C5-5B4516EC5BB9}"/>
+              </a:ext>
+            </a:extLst>
+          </p:cNvPr>
+          <p:cNvSpPr>
+            <a:spLocks noGrp="1"/>
+          </p:cNvSpPr>
+          <p:nvPr>
+            <p:ph type="title"/>
+          </p:nvPr>
+        </p:nvSpPr>
+        <p:spPr/>
+        <p:txBody>
+          <a:bodyPr/>
+          <a:lstStyle/>
+          <a:p>
+            <a:r>
+              <a:rPr lang="en" b="1" dirty="0">
+                <a:solidFill>
+                  <a:srgbClr val="0070C0"/>
+                </a:solidFill>
+                <a:latin typeface="Noto Sans"/>
+                <a:ea typeface="Noto Sans"/>
+                <a:cs typeface="Noto Sans"/>
+              </a:rPr>
+              <a:t>GRASP 2 - Controller</a:t>
+            </a:r>
+            <a:endParaRPr lang="it-IT" dirty="0"/>
+          </a:p>
+        </p:txBody>
+      </p:sp>
+      <p:sp>
+        <p:nvSpPr>
+          <p:cNvPr id="3" name="Segnaposto contenuto 2">
+            <a:extLst>
+              <a:ext uri="{FF2B5EF4-FFF2-40B4-BE49-F238E27FC236}">
+                <a16:creationId xmlns:a16="http://schemas.microsoft.com/office/drawing/2014/main" id="{4B61C465-83C7-EE10-10BA-E96D69FF6064}"/>
+              </a:ext>
+            </a:extLst>
+          </p:cNvPr>
+          <p:cNvSpPr>
+            <a:spLocks noGrp="1"/>
+          </p:cNvSpPr>
+          <p:nvPr>
+            <p:ph idx="1"/>
+          </p:nvPr>
+        </p:nvSpPr>
+        <p:spPr/>
+        <p:txBody>
+          <a:bodyPr/>
+          <a:lstStyle/>
+          <a:p>
+            <a:pPr marL="0" indent="0">
+              <a:buNone/>
+            </a:pPr>
+            <a:r>
+              <a:rPr lang="en-GB" dirty="0" err="1"/>
+              <a:t>Esempio</a:t>
+            </a:r>
+            <a:r>
+              <a:rPr lang="en-GB" dirty="0"/>
+              <a:t> </a:t>
+            </a:r>
+            <a:r>
+              <a:rPr lang="en-GB" dirty="0" err="1"/>
+              <a:t>chiamata</a:t>
+            </a:r>
+            <a:r>
+              <a:rPr lang="en-GB" dirty="0"/>
+              <a:t> GET da </a:t>
+            </a:r>
+            <a:r>
+              <a:rPr lang="en-GB" sz="2400" dirty="0" err="1">
+                <a:latin typeface="Cascadia Code" panose="020B0609020000020004" pitchFamily="49" charset="0"/>
+                <a:ea typeface="Cascadia Code" panose="020B0609020000020004" pitchFamily="49" charset="0"/>
+                <a:cs typeface="Cascadia Code" panose="020B0609020000020004" pitchFamily="49" charset="0"/>
+              </a:rPr>
+              <a:t>BookingController</a:t>
+            </a:r>
+            <a:endParaRPr lang="en-GB" dirty="0">
+              <a:latin typeface="Cascadia Code" panose="020B0609020000020004" pitchFamily="49" charset="0"/>
+              <a:ea typeface="Cascadia Code" panose="020B0609020000020004" pitchFamily="49" charset="0"/>
+              <a:cs typeface="Cascadia Code" panose="020B0609020000020004" pitchFamily="49" charset="0"/>
+            </a:endParaRPr>
+          </a:p>
+          <a:p>
+            <a:pPr marL="0" indent="0">
+              <a:buNone/>
+            </a:pPr>
+            <a:br>
+              <a:rPr lang="en-GB" dirty="0"/>
+            </a:br>
+            <a:endParaRPr lang="it-IT" dirty="0"/>
+          </a:p>
+        </p:txBody>
+      </p:sp>
+      <p:pic>
+        <p:nvPicPr>
+          <p:cNvPr id="11" name="Immagine 10">
+            <a:extLst>
+              <a:ext uri="{FF2B5EF4-FFF2-40B4-BE49-F238E27FC236}">
+                <a16:creationId xmlns:a16="http://schemas.microsoft.com/office/drawing/2014/main" id="{67A9A17E-3C15-73F6-C3BA-7CFFC5415145}"/>
+              </a:ext>
+            </a:extLst>
+          </p:cNvPr>
+          <p:cNvPicPr>
+            <a:picLocks noChangeAspect="1"/>
+          </p:cNvPicPr>
+          <p:nvPr/>
+        </p:nvPicPr>
+        <p:blipFill>
+          <a:blip r:embed="rId2"/>
+          <a:stretch>
+            <a:fillRect/>
+          </a:stretch>
+        </p:blipFill>
+        <p:spPr>
+          <a:xfrm>
+            <a:off x="838200" y="2443739"/>
+            <a:ext cx="10536120" cy="3115110"/>
+          </a:xfrm>
+          <a:prstGeom prst="rect">
+            <a:avLst/>
+          </a:prstGeom>
+        </p:spPr>
+      </p:pic>
+    </p:spTree>
+    <p:extLst>
+      <p:ext uri="{BB962C8B-B14F-4D97-AF65-F5344CB8AC3E}">
+        <p14:creationId xmlns:p14="http://schemas.microsoft.com/office/powerpoint/2010/main" val="1460049476"/>
+      </p:ext>
+    </p:extLst>
+  </p:cSld>
+  <p:clrMapOvr>
+    <a:masterClrMapping/>
+  </p:clrMapOvr>
+</p:sld>
+</file>
+
+<file path=ppt/slides/slide11.xml><?xml version="1.0" encoding="utf-8"?>
+<p:sld xmlns:a="http://schemas.openxmlformats.org/drawingml/2006/main" xmlns:r="http://schemas.openxmlformats.org/officeDocument/2006/relationships" xmlns:p="http://schemas.openxmlformats.org/presentationml/2006/main">
+  <p:cSld>
+    <p:spTree>
+      <p:nvGrpSpPr>
         <p:cNvPr id="1" name="">
           <a:extLst>
             <a:ext uri="{FF2B5EF4-FFF2-40B4-BE49-F238E27FC236}">
@@ -8646,7 +9013,7 @@
 </p:sld>
 </file>
 
-<file path=ppt/slides/slide11.xml><?xml version="1.0" encoding="utf-8"?>
+<file path=ppt/slides/slide12.xml><?xml version="1.0" encoding="utf-8"?>
 <p:sld xmlns:a="http://schemas.openxmlformats.org/drawingml/2006/main" xmlns:r="http://schemas.openxmlformats.org/officeDocument/2006/relationships" xmlns:p="http://schemas.openxmlformats.org/presentationml/2006/main" showMasterPhAnim="0">
   <p:cSld>
     <p:spTree>
@@ -8846,7 +9213,7 @@
 </p:sld>
 </file>
 
-<file path=ppt/slides/slide12.xml><?xml version="1.0" encoding="utf-8"?>
+<file path=ppt/slides/slide13.xml><?xml version="1.0" encoding="utf-8"?>
 <p:sld xmlns:a="http://schemas.openxmlformats.org/drawingml/2006/main" xmlns:r="http://schemas.openxmlformats.org/officeDocument/2006/relationships" xmlns:p="http://schemas.openxmlformats.org/presentationml/2006/main" showMasterPhAnim="0">
   <p:cSld>
     <p:spTree>
@@ -9057,7 +9424,7 @@
 </p:sld>
 </file>
 
-<file path=ppt/slides/slide13.xml><?xml version="1.0" encoding="utf-8"?>
+<file path=ppt/slides/slide14.xml><?xml version="1.0" encoding="utf-8"?>
 <p:sld xmlns:a="http://schemas.openxmlformats.org/drawingml/2006/main" xmlns:r="http://schemas.openxmlformats.org/officeDocument/2006/relationships" xmlns:p="http://schemas.openxmlformats.org/presentationml/2006/main" showMasterPhAnim="0">
   <p:cSld>
     <p:spTree>
@@ -9266,7 +9633,7 @@
 </p:sld>
 </file>
 
-<file path=ppt/slides/slide14.xml><?xml version="1.0" encoding="utf-8"?>
+<file path=ppt/slides/slide15.xml><?xml version="1.0" encoding="utf-8"?>
 <p:sld xmlns:a="http://schemas.openxmlformats.org/drawingml/2006/main" xmlns:r="http://schemas.openxmlformats.org/officeDocument/2006/relationships" xmlns:p="http://schemas.openxmlformats.org/presentationml/2006/main">
   <p:cSld>
     <p:spTree>
@@ -9455,7 +9822,7 @@
 </p:sld>
 </file>
 
-<file path=ppt/slides/slide15.xml><?xml version="1.0" encoding="utf-8"?>
+<file path=ppt/slides/slide16.xml><?xml version="1.0" encoding="utf-8"?>
 <p:sld xmlns:a="http://schemas.openxmlformats.org/drawingml/2006/main" xmlns:r="http://schemas.openxmlformats.org/officeDocument/2006/relationships" xmlns:p="http://schemas.openxmlformats.org/presentationml/2006/main">
   <p:cSld>
     <p:spTree>
@@ -9553,7 +9920,7 @@
 </p:sld>
 </file>
 
-<file path=ppt/slides/slide16.xml><?xml version="1.0" encoding="utf-8"?>
+<file path=ppt/slides/slide17.xml><?xml version="1.0" encoding="utf-8"?>
 <p:sld xmlns:a="http://schemas.openxmlformats.org/drawingml/2006/main" xmlns:r="http://schemas.openxmlformats.org/officeDocument/2006/relationships" xmlns:p="http://schemas.openxmlformats.org/presentationml/2006/main">
   <p:cSld>
     <p:spTree>
@@ -9693,7 +10060,7 @@
 </p:sld>
 </file>
 
-<file path=ppt/slides/slide17.xml><?xml version="1.0" encoding="utf-8"?>
+<file path=ppt/slides/slide18.xml><?xml version="1.0" encoding="utf-8"?>
 <p:sld xmlns:a="http://schemas.openxmlformats.org/drawingml/2006/main" xmlns:r="http://schemas.openxmlformats.org/officeDocument/2006/relationships" xmlns:p="http://schemas.openxmlformats.org/presentationml/2006/main">
   <p:cSld>
     <p:spTree>
@@ -10405,7 +10772,7 @@
 </p:sld>
 </file>
 
-<file path=ppt/slides/slide18.xml><?xml version="1.0" encoding="utf-8"?>
+<file path=ppt/slides/slide19.xml><?xml version="1.0" encoding="utf-8"?>
 <p:sld xmlns:a="http://schemas.openxmlformats.org/drawingml/2006/main" xmlns:r="http://schemas.openxmlformats.org/officeDocument/2006/relationships" xmlns:p="http://schemas.openxmlformats.org/presentationml/2006/main" showMasterPhAnim="0">
   <p:cSld>
     <p:spTree>
@@ -10554,7 +10921,316 @@
 </p:sld>
 </file>
 
-<file path=ppt/slides/slide19.xml><?xml version="1.0" encoding="utf-8"?>
+<file path=ppt/slides/slide2.xml><?xml version="1.0" encoding="utf-8"?>
+<p:sld xmlns:a="http://schemas.openxmlformats.org/drawingml/2006/main" xmlns:r="http://schemas.openxmlformats.org/officeDocument/2006/relationships" xmlns:p="http://schemas.openxmlformats.org/presentationml/2006/main" showMasterPhAnim="0">
+  <p:cSld>
+    <p:spTree>
+      <p:nvGrpSpPr>
+        <p:cNvPr id="1" name=""/>
+        <p:cNvGrpSpPr/>
+        <p:nvPr/>
+      </p:nvGrpSpPr>
+      <p:grpSpPr bwMode="auto">
+        <a:xfrm>
+          <a:off x="0" y="0"/>
+          <a:ext cx="0" cy="0"/>
+          <a:chOff x="0" y="0"/>
+          <a:chExt cx="0" cy="0"/>
+        </a:xfrm>
+      </p:grpSpPr>
+      <p:sp>
+        <p:nvSpPr>
+          <p:cNvPr id="594542285" name="Titolo 1"/>
+          <p:cNvSpPr>
+            <a:spLocks noGrp="1"/>
+          </p:cNvSpPr>
+          <p:nvPr>
+            <p:ph type="title"/>
+          </p:nvPr>
+        </p:nvSpPr>
+        <p:spPr bwMode="auto">
+          <a:prstGeom prst="rect">
+            <a:avLst/>
+          </a:prstGeom>
+          <a:ln w="12699">
+            <a:noFill/>
+            <a:prstDash val="solid"/>
+          </a:ln>
+        </p:spPr>
+        <p:txBody>
+          <a:bodyPr/>
+          <a:lstStyle/>
+          <a:p>
+            <a:pPr>
+              <a:defRPr/>
+            </a:pPr>
+            <a:r>
+              <a:rPr lang="en" b="1" dirty="0">
+                <a:ln w="6349">
+                  <a:noFill/>
+                  <a:prstDash val="solid"/>
+                </a:ln>
+                <a:solidFill>
+                  <a:srgbClr val="0070C0"/>
+                </a:solidFill>
+                <a:latin typeface="Noto Sans"/>
+                <a:ea typeface="Noto Sans"/>
+                <a:cs typeface="Noto Sans"/>
+              </a:rPr>
+              <a:t>Indice dei contenuti</a:t>
+            </a:r>
+            <a:endParaRPr dirty="0"/>
+          </a:p>
+        </p:txBody>
+      </p:sp>
+      <p:sp>
+        <p:nvSpPr>
+          <p:cNvPr id="324859497" name="Segnaposto contenuto 2"/>
+          <p:cNvSpPr>
+            <a:spLocks noGrp="1"/>
+          </p:cNvSpPr>
+          <p:nvPr>
+            <p:ph idx="1"/>
+          </p:nvPr>
+        </p:nvSpPr>
+        <p:spPr bwMode="auto"/>
+        <p:txBody>
+          <a:bodyPr vertOverflow="overflow" horzOverflow="overflow" vert="horz" wrap="square" lIns="91440" tIns="45720" rIns="91440" bIns="45720" numCol="1" spcCol="0" rtlCol="0" fromWordArt="0" anchor="t" anchorCtr="0" forceAA="0" compatLnSpc="0">
+            <a:normAutofit/>
+          </a:bodyPr>
+          <a:lstStyle/>
+          <a:p>
+            <a:pPr marL="394023" indent="-394023">
+              <a:buFont typeface="Arial"/>
+              <a:buAutoNum type="alphaUcPeriod"/>
+              <a:defRPr/>
+            </a:pPr>
+            <a:r>
+              <a:rPr lang="en" sz="1800" dirty="0">
+                <a:latin typeface="DejaVu Sans Condensed"/>
+                <a:ea typeface="DejaVu Sans Condensed"/>
+                <a:cs typeface="DejaVu Sans Condensed"/>
+              </a:rPr>
+              <a:t>Separazione modello-vista				</a:t>
+            </a:r>
+            <a:r>
+              <a:rPr lang="en-GB" sz="1800" dirty="0">
+                <a:latin typeface="DejaVu Sans Condensed"/>
+                <a:ea typeface="DejaVu Sans Condensed"/>
+                <a:cs typeface="DejaVu Sans Condensed"/>
+              </a:rPr>
+              <a:t>3-5</a:t>
+            </a:r>
+            <a:endParaRPr sz="1800" dirty="0">
+              <a:latin typeface="DejaVu Sans Condensed"/>
+              <a:cs typeface="DejaVu Sans Condensed"/>
+            </a:endParaRPr>
+          </a:p>
+          <a:p>
+            <a:pPr marL="394023" indent="-394023">
+              <a:buFont typeface="Arial"/>
+              <a:buAutoNum type="alphaUcPeriod"/>
+              <a:defRPr/>
+            </a:pPr>
+            <a:r>
+              <a:rPr lang="en" sz="1800" dirty="0">
+                <a:latin typeface="DejaVu Sans Condensed"/>
+                <a:ea typeface="DejaVu Sans Condensed"/>
+                <a:cs typeface="DejaVu Sans Condensed"/>
+              </a:rPr>
+              <a:t>Esempi di pattern GRASP		</a:t>
+            </a:r>
+            <a:endParaRPr sz="1800" dirty="0">
+              <a:latin typeface="DejaVu Sans Condensed"/>
+              <a:cs typeface="DejaVu Sans Condensed"/>
+            </a:endParaRPr>
+          </a:p>
+          <a:p>
+            <a:pPr marL="794073" lvl="1" indent="-394023">
+              <a:buFont typeface="Arial"/>
+              <a:buAutoNum type="alphaUcPeriod"/>
+              <a:defRPr/>
+            </a:pPr>
+            <a:r>
+              <a:rPr lang="en" sz="1800" dirty="0">
+                <a:latin typeface="DejaVu Sans Condensed"/>
+                <a:ea typeface="DejaVu Sans Condensed"/>
+                <a:cs typeface="DejaVu Sans Condensed"/>
+              </a:rPr>
+              <a:t>GRASP 1 – Information Expert			6-7</a:t>
+            </a:r>
+            <a:endParaRPr sz="1800" dirty="0">
+              <a:latin typeface="DejaVu Sans Condensed"/>
+              <a:cs typeface="DejaVu Sans Condensed"/>
+            </a:endParaRPr>
+          </a:p>
+          <a:p>
+            <a:pPr marL="794073" lvl="1" indent="-394023">
+              <a:buFont typeface="Arial"/>
+              <a:buAutoNum type="alphaUcPeriod"/>
+              <a:defRPr/>
+            </a:pPr>
+            <a:r>
+              <a:rPr lang="en" sz="1800" dirty="0">
+                <a:latin typeface="DejaVu Sans Condensed"/>
+                <a:ea typeface="DejaVu Sans Condensed"/>
+                <a:cs typeface="DejaVu Sans Condensed"/>
+              </a:rPr>
+              <a:t>GRASP 2 – Controller				8-10</a:t>
+            </a:r>
+            <a:endParaRPr sz="1800" dirty="0">
+              <a:latin typeface="DejaVu Sans Condensed"/>
+              <a:cs typeface="DejaVu Sans Condensed"/>
+            </a:endParaRPr>
+          </a:p>
+          <a:p>
+            <a:pPr marL="394023" lvl="0" indent="-394023">
+              <a:buFont typeface="Arial"/>
+              <a:buAutoNum type="alphaUcPeriod"/>
+              <a:defRPr/>
+            </a:pPr>
+            <a:r>
+              <a:rPr lang="en" sz="1800" dirty="0">
+                <a:latin typeface="DejaVu Sans Condensed"/>
+                <a:ea typeface="DejaVu Sans Condensed"/>
+                <a:cs typeface="DejaVu Sans Condensed"/>
+              </a:rPr>
+              <a:t>Esempi di pattern SOLID			</a:t>
+            </a:r>
+            <a:endParaRPr sz="1800" dirty="0">
+              <a:latin typeface="DejaVu Sans Condensed"/>
+              <a:cs typeface="DejaVu Sans Condensed"/>
+            </a:endParaRPr>
+          </a:p>
+          <a:p>
+            <a:pPr marL="794073" lvl="1" indent="-394023">
+              <a:buFont typeface="Arial"/>
+              <a:buAutoNum type="alphaUcPeriod"/>
+              <a:defRPr/>
+            </a:pPr>
+            <a:r>
+              <a:rPr lang="en" sz="1800" dirty="0">
+                <a:latin typeface="DejaVu Sans Condensed"/>
+                <a:ea typeface="DejaVu Sans Condensed"/>
+                <a:cs typeface="DejaVu Sans Condensed"/>
+              </a:rPr>
+              <a:t>SOLID 1 – Dependency Inversion 		11</a:t>
+            </a:r>
+            <a:endParaRPr sz="1800" dirty="0">
+              <a:latin typeface="DejaVu Sans Condensed"/>
+              <a:cs typeface="DejaVu Sans Condensed"/>
+            </a:endParaRPr>
+          </a:p>
+          <a:p>
+            <a:pPr marL="794073" lvl="1" indent="-394023">
+              <a:buFont typeface="Arial"/>
+              <a:buAutoNum type="alphaUcPeriod"/>
+              <a:defRPr/>
+            </a:pPr>
+            <a:r>
+              <a:rPr lang="en" sz="1800" dirty="0">
+                <a:latin typeface="DejaVu Sans Condensed"/>
+                <a:ea typeface="DejaVu Sans Condensed"/>
+                <a:cs typeface="DejaVu Sans Condensed"/>
+              </a:rPr>
+              <a:t>SOLID 2 – Interface Segregation			12</a:t>
+            </a:r>
+          </a:p>
+          <a:p>
+            <a:pPr marL="336873" indent="-394023">
+              <a:buFont typeface="Arial"/>
+              <a:buAutoNum type="alphaUcPeriod"/>
+              <a:defRPr/>
+            </a:pPr>
+            <a:r>
+              <a:rPr lang="en" sz="1800" dirty="0">
+                <a:latin typeface="DejaVu Sans Condensed"/>
+                <a:cs typeface="DejaVu Sans Condensed"/>
+              </a:rPr>
+              <a:t>Esempi di pattern GoF</a:t>
+            </a:r>
+          </a:p>
+          <a:p>
+            <a:pPr marL="794073" lvl="1" indent="-394023">
+              <a:buFont typeface="Arial"/>
+              <a:buAutoNum type="alphaUcPeriod"/>
+              <a:defRPr/>
+            </a:pPr>
+            <a:r>
+              <a:rPr lang="en" sz="1800" dirty="0">
+                <a:latin typeface="DejaVu Sans Condensed"/>
+                <a:cs typeface="DejaVu Sans Condensed"/>
+              </a:rPr>
+              <a:t>GoF 1 – Strategy				13-15</a:t>
+            </a:r>
+          </a:p>
+          <a:p>
+            <a:pPr marL="794073" lvl="1" indent="-394023">
+              <a:buFont typeface="Arial"/>
+              <a:buAutoNum type="alphaUcPeriod"/>
+              <a:defRPr/>
+            </a:pPr>
+            <a:r>
+              <a:rPr lang="en" sz="1800" dirty="0">
+                <a:latin typeface="DejaVu Sans Condensed"/>
+                <a:cs typeface="DejaVu Sans Condensed"/>
+              </a:rPr>
+              <a:t>GoF 2 – Adapter					16-17</a:t>
+            </a:r>
+            <a:endParaRPr sz="1800" dirty="0">
+              <a:latin typeface="DejaVu Sans Condensed"/>
+              <a:cs typeface="DejaVu Sans Condensed"/>
+            </a:endParaRPr>
+          </a:p>
+          <a:p>
+            <a:pPr marL="394023" lvl="0" indent="-394023">
+              <a:buFont typeface="Arial"/>
+              <a:buAutoNum type="alphaUcPeriod"/>
+              <a:defRPr/>
+            </a:pPr>
+            <a:r>
+              <a:rPr lang="en" sz="1800" dirty="0">
+                <a:latin typeface="DejaVu Sans Condensed"/>
+                <a:ea typeface="DejaVu Sans Condensed"/>
+                <a:cs typeface="DejaVu Sans Condensed"/>
+              </a:rPr>
+              <a:t>Esempi di testing					18-22</a:t>
+            </a:r>
+            <a:endParaRPr sz="1800" dirty="0">
+              <a:latin typeface="DejaVu Sans Condensed"/>
+              <a:cs typeface="DejaVu Sans Condensed"/>
+            </a:endParaRPr>
+          </a:p>
+          <a:p>
+            <a:pPr marL="394023" lvl="0" indent="-394023">
+              <a:buFont typeface="Arial"/>
+              <a:buAutoNum type="alphaUcPeriod"/>
+              <a:defRPr/>
+            </a:pPr>
+            <a:r>
+              <a:rPr lang="en" sz="1800" dirty="0">
+                <a:latin typeface="DejaVu Sans Condensed"/>
+                <a:ea typeface="DejaVu Sans Condensed"/>
+                <a:cs typeface="DejaVu Sans Condensed"/>
+              </a:rPr>
+              <a:t>Esempi di refactoring				24-28</a:t>
+            </a:r>
+            <a:endParaRPr sz="1800" dirty="0">
+              <a:latin typeface="Cantarell"/>
+              <a:cs typeface="Cantarell"/>
+            </a:endParaRPr>
+          </a:p>
+        </p:txBody>
+      </p:sp>
+    </p:spTree>
+  </p:cSld>
+  <p:clrMapOvr>
+    <a:masterClrMapping/>
+  </p:clrMapOvr>
+</p:sld>
+</file>
+
+<file path=ppt/slides/slide20.xml><?xml version="1.0" encoding="utf-8"?>
 <p:sld xmlns:a="http://schemas.openxmlformats.org/drawingml/2006/main" xmlns:r="http://schemas.openxmlformats.org/officeDocument/2006/relationships" xmlns:p="http://schemas.openxmlformats.org/presentationml/2006/main" showMasterPhAnim="0">
   <p:cSld>
     <p:spTree>
@@ -11168,316 +11844,7 @@
 </p:sld>
 </file>
 
-<file path=ppt/slides/slide2.xml><?xml version="1.0" encoding="utf-8"?>
-<p:sld xmlns:a="http://schemas.openxmlformats.org/drawingml/2006/main" xmlns:r="http://schemas.openxmlformats.org/officeDocument/2006/relationships" xmlns:p="http://schemas.openxmlformats.org/presentationml/2006/main" showMasterPhAnim="0">
-  <p:cSld>
-    <p:spTree>
-      <p:nvGrpSpPr>
-        <p:cNvPr id="1" name=""/>
-        <p:cNvGrpSpPr/>
-        <p:nvPr/>
-      </p:nvGrpSpPr>
-      <p:grpSpPr bwMode="auto">
-        <a:xfrm>
-          <a:off x="0" y="0"/>
-          <a:ext cx="0" cy="0"/>
-          <a:chOff x="0" y="0"/>
-          <a:chExt cx="0" cy="0"/>
-        </a:xfrm>
-      </p:grpSpPr>
-      <p:sp>
-        <p:nvSpPr>
-          <p:cNvPr id="594542285" name="Titolo 1"/>
-          <p:cNvSpPr>
-            <a:spLocks noGrp="1"/>
-          </p:cNvSpPr>
-          <p:nvPr>
-            <p:ph type="title"/>
-          </p:nvPr>
-        </p:nvSpPr>
-        <p:spPr bwMode="auto">
-          <a:prstGeom prst="rect">
-            <a:avLst/>
-          </a:prstGeom>
-          <a:ln w="12699">
-            <a:noFill/>
-            <a:prstDash val="solid"/>
-          </a:ln>
-        </p:spPr>
-        <p:txBody>
-          <a:bodyPr/>
-          <a:lstStyle/>
-          <a:p>
-            <a:pPr>
-              <a:defRPr/>
-            </a:pPr>
-            <a:r>
-              <a:rPr lang="en" b="1" dirty="0">
-                <a:ln w="6349">
-                  <a:noFill/>
-                  <a:prstDash val="solid"/>
-                </a:ln>
-                <a:solidFill>
-                  <a:srgbClr val="0070C0"/>
-                </a:solidFill>
-                <a:latin typeface="Noto Sans"/>
-                <a:ea typeface="Noto Sans"/>
-                <a:cs typeface="Noto Sans"/>
-              </a:rPr>
-              <a:t>Indice dei contenuti</a:t>
-            </a:r>
-            <a:endParaRPr dirty="0"/>
-          </a:p>
-        </p:txBody>
-      </p:sp>
-      <p:sp>
-        <p:nvSpPr>
-          <p:cNvPr id="324859497" name="Segnaposto contenuto 2"/>
-          <p:cNvSpPr>
-            <a:spLocks noGrp="1"/>
-          </p:cNvSpPr>
-          <p:nvPr>
-            <p:ph idx="1"/>
-          </p:nvPr>
-        </p:nvSpPr>
-        <p:spPr bwMode="auto"/>
-        <p:txBody>
-          <a:bodyPr vertOverflow="overflow" horzOverflow="overflow" vert="horz" wrap="square" lIns="91440" tIns="45720" rIns="91440" bIns="45720" numCol="1" spcCol="0" rtlCol="0" fromWordArt="0" anchor="t" anchorCtr="0" forceAA="0" compatLnSpc="0">
-            <a:normAutofit/>
-          </a:bodyPr>
-          <a:lstStyle/>
-          <a:p>
-            <a:pPr marL="394023" indent="-394023">
-              <a:buFont typeface="Arial"/>
-              <a:buAutoNum type="alphaUcPeriod"/>
-              <a:defRPr/>
-            </a:pPr>
-            <a:r>
-              <a:rPr lang="en" sz="1800" dirty="0">
-                <a:latin typeface="DejaVu Sans Condensed"/>
-                <a:ea typeface="DejaVu Sans Condensed"/>
-                <a:cs typeface="DejaVu Sans Condensed"/>
-              </a:rPr>
-              <a:t>Separazione modello-vista				</a:t>
-            </a:r>
-            <a:r>
-              <a:rPr lang="en-GB" sz="1800" dirty="0">
-                <a:latin typeface="DejaVu Sans Condensed"/>
-                <a:ea typeface="DejaVu Sans Condensed"/>
-                <a:cs typeface="DejaVu Sans Condensed"/>
-              </a:rPr>
-              <a:t>3-5</a:t>
-            </a:r>
-            <a:endParaRPr sz="1800" dirty="0">
-              <a:latin typeface="DejaVu Sans Condensed"/>
-              <a:cs typeface="DejaVu Sans Condensed"/>
-            </a:endParaRPr>
-          </a:p>
-          <a:p>
-            <a:pPr marL="394023" indent="-394023">
-              <a:buFont typeface="Arial"/>
-              <a:buAutoNum type="alphaUcPeriod"/>
-              <a:defRPr/>
-            </a:pPr>
-            <a:r>
-              <a:rPr lang="en" sz="1800" dirty="0">
-                <a:latin typeface="DejaVu Sans Condensed"/>
-                <a:ea typeface="DejaVu Sans Condensed"/>
-                <a:cs typeface="DejaVu Sans Condensed"/>
-              </a:rPr>
-              <a:t>Esempi di pattern GRASP		</a:t>
-            </a:r>
-            <a:endParaRPr sz="1800" dirty="0">
-              <a:latin typeface="DejaVu Sans Condensed"/>
-              <a:cs typeface="DejaVu Sans Condensed"/>
-            </a:endParaRPr>
-          </a:p>
-          <a:p>
-            <a:pPr marL="794073" lvl="1" indent="-394023">
-              <a:buFont typeface="Arial"/>
-              <a:buAutoNum type="alphaUcPeriod"/>
-              <a:defRPr/>
-            </a:pPr>
-            <a:r>
-              <a:rPr lang="en" sz="1800" dirty="0">
-                <a:latin typeface="DejaVu Sans Condensed"/>
-                <a:ea typeface="DejaVu Sans Condensed"/>
-                <a:cs typeface="DejaVu Sans Condensed"/>
-              </a:rPr>
-              <a:t>GRASP 1 – Information Expert			6-7</a:t>
-            </a:r>
-            <a:endParaRPr sz="1800" dirty="0">
-              <a:latin typeface="DejaVu Sans Condensed"/>
-              <a:cs typeface="DejaVu Sans Condensed"/>
-            </a:endParaRPr>
-          </a:p>
-          <a:p>
-            <a:pPr marL="794073" lvl="1" indent="-394023">
-              <a:buFont typeface="Arial"/>
-              <a:buAutoNum type="alphaUcPeriod"/>
-              <a:defRPr/>
-            </a:pPr>
-            <a:r>
-              <a:rPr lang="en" sz="1800" dirty="0">
-                <a:latin typeface="DejaVu Sans Condensed"/>
-                <a:ea typeface="DejaVu Sans Condensed"/>
-                <a:cs typeface="DejaVu Sans Condensed"/>
-              </a:rPr>
-              <a:t>GRASP 2 – Controller				8-10</a:t>
-            </a:r>
-            <a:endParaRPr sz="1800" dirty="0">
-              <a:latin typeface="DejaVu Sans Condensed"/>
-              <a:cs typeface="DejaVu Sans Condensed"/>
-            </a:endParaRPr>
-          </a:p>
-          <a:p>
-            <a:pPr marL="394023" lvl="0" indent="-394023">
-              <a:buFont typeface="Arial"/>
-              <a:buAutoNum type="alphaUcPeriod"/>
-              <a:defRPr/>
-            </a:pPr>
-            <a:r>
-              <a:rPr lang="en" sz="1800" dirty="0">
-                <a:latin typeface="DejaVu Sans Condensed"/>
-                <a:ea typeface="DejaVu Sans Condensed"/>
-                <a:cs typeface="DejaVu Sans Condensed"/>
-              </a:rPr>
-              <a:t>Esempi di pattern SOLID			</a:t>
-            </a:r>
-            <a:endParaRPr sz="1800" dirty="0">
-              <a:latin typeface="DejaVu Sans Condensed"/>
-              <a:cs typeface="DejaVu Sans Condensed"/>
-            </a:endParaRPr>
-          </a:p>
-          <a:p>
-            <a:pPr marL="794073" lvl="1" indent="-394023">
-              <a:buFont typeface="Arial"/>
-              <a:buAutoNum type="alphaUcPeriod"/>
-              <a:defRPr/>
-            </a:pPr>
-            <a:r>
-              <a:rPr lang="en" sz="1800" dirty="0">
-                <a:latin typeface="DejaVu Sans Condensed"/>
-                <a:ea typeface="DejaVu Sans Condensed"/>
-                <a:cs typeface="DejaVu Sans Condensed"/>
-              </a:rPr>
-              <a:t>SOLID 1 – Dependency Inversion 		11</a:t>
-            </a:r>
-            <a:endParaRPr sz="1800" dirty="0">
-              <a:latin typeface="DejaVu Sans Condensed"/>
-              <a:cs typeface="DejaVu Sans Condensed"/>
-            </a:endParaRPr>
-          </a:p>
-          <a:p>
-            <a:pPr marL="794073" lvl="1" indent="-394023">
-              <a:buFont typeface="Arial"/>
-              <a:buAutoNum type="alphaUcPeriod"/>
-              <a:defRPr/>
-            </a:pPr>
-            <a:r>
-              <a:rPr lang="en" sz="1800" dirty="0">
-                <a:latin typeface="DejaVu Sans Condensed"/>
-                <a:ea typeface="DejaVu Sans Condensed"/>
-                <a:cs typeface="DejaVu Sans Condensed"/>
-              </a:rPr>
-              <a:t>SOLID 2 – Interface Segregation			12</a:t>
-            </a:r>
-          </a:p>
-          <a:p>
-            <a:pPr marL="336873" indent="-394023">
-              <a:buFont typeface="Arial"/>
-              <a:buAutoNum type="alphaUcPeriod"/>
-              <a:defRPr/>
-            </a:pPr>
-            <a:r>
-              <a:rPr lang="en" sz="1800" dirty="0">
-                <a:latin typeface="DejaVu Sans Condensed"/>
-                <a:cs typeface="DejaVu Sans Condensed"/>
-              </a:rPr>
-              <a:t>Esempi di pattern GoF</a:t>
-            </a:r>
-          </a:p>
-          <a:p>
-            <a:pPr marL="794073" lvl="1" indent="-394023">
-              <a:buFont typeface="Arial"/>
-              <a:buAutoNum type="alphaUcPeriod"/>
-              <a:defRPr/>
-            </a:pPr>
-            <a:r>
-              <a:rPr lang="en" sz="1800" dirty="0">
-                <a:latin typeface="DejaVu Sans Condensed"/>
-                <a:cs typeface="DejaVu Sans Condensed"/>
-              </a:rPr>
-              <a:t>GoF 1 – Strategy				13-15</a:t>
-            </a:r>
-          </a:p>
-          <a:p>
-            <a:pPr marL="794073" lvl="1" indent="-394023">
-              <a:buFont typeface="Arial"/>
-              <a:buAutoNum type="alphaUcPeriod"/>
-              <a:defRPr/>
-            </a:pPr>
-            <a:r>
-              <a:rPr lang="en" sz="1800" dirty="0">
-                <a:latin typeface="DejaVu Sans Condensed"/>
-                <a:cs typeface="DejaVu Sans Condensed"/>
-              </a:rPr>
-              <a:t>GoF 2 – Adapter					16-17</a:t>
-            </a:r>
-            <a:endParaRPr sz="1800" dirty="0">
-              <a:latin typeface="DejaVu Sans Condensed"/>
-              <a:cs typeface="DejaVu Sans Condensed"/>
-            </a:endParaRPr>
-          </a:p>
-          <a:p>
-            <a:pPr marL="394023" lvl="0" indent="-394023">
-              <a:buFont typeface="Arial"/>
-              <a:buAutoNum type="alphaUcPeriod"/>
-              <a:defRPr/>
-            </a:pPr>
-            <a:r>
-              <a:rPr lang="en" sz="1800" dirty="0">
-                <a:latin typeface="DejaVu Sans Condensed"/>
-                <a:ea typeface="DejaVu Sans Condensed"/>
-                <a:cs typeface="DejaVu Sans Condensed"/>
-              </a:rPr>
-              <a:t>Esempi di testing					18-22</a:t>
-            </a:r>
-            <a:endParaRPr sz="1800" dirty="0">
-              <a:latin typeface="DejaVu Sans Condensed"/>
-              <a:cs typeface="DejaVu Sans Condensed"/>
-            </a:endParaRPr>
-          </a:p>
-          <a:p>
-            <a:pPr marL="394023" lvl="0" indent="-394023">
-              <a:buFont typeface="Arial"/>
-              <a:buAutoNum type="alphaUcPeriod"/>
-              <a:defRPr/>
-            </a:pPr>
-            <a:r>
-              <a:rPr lang="en" sz="1800" dirty="0">
-                <a:latin typeface="DejaVu Sans Condensed"/>
-                <a:ea typeface="DejaVu Sans Condensed"/>
-                <a:cs typeface="DejaVu Sans Condensed"/>
-              </a:rPr>
-              <a:t>Esempi di refactoring				24-28</a:t>
-            </a:r>
-            <a:endParaRPr sz="1800" dirty="0">
-              <a:latin typeface="Cantarell"/>
-              <a:cs typeface="Cantarell"/>
-            </a:endParaRPr>
-          </a:p>
-        </p:txBody>
-      </p:sp>
-    </p:spTree>
-  </p:cSld>
-  <p:clrMapOvr>
-    <a:masterClrMapping/>
-  </p:clrMapOvr>
-</p:sld>
-</file>
-
-<file path=ppt/slides/slide20.xml><?xml version="1.0" encoding="utf-8"?>
+<file path=ppt/slides/slide21.xml><?xml version="1.0" encoding="utf-8"?>
 <p:sld xmlns:a="http://schemas.openxmlformats.org/drawingml/2006/main" xmlns:r="http://schemas.openxmlformats.org/officeDocument/2006/relationships" xmlns:p="http://schemas.openxmlformats.org/presentationml/2006/main" showMasterPhAnim="0">
   <p:cSld>
     <p:spTree>
@@ -11876,7 +12243,7 @@
 </p:sld>
 </file>
 
-<file path=ppt/slides/slide21.xml><?xml version="1.0" encoding="utf-8"?>
+<file path=ppt/slides/slide22.xml><?xml version="1.0" encoding="utf-8"?>
 <p:sld xmlns:a="http://schemas.openxmlformats.org/drawingml/2006/main" xmlns:r="http://schemas.openxmlformats.org/officeDocument/2006/relationships" xmlns:p="http://schemas.openxmlformats.org/presentationml/2006/main" showMasterPhAnim="0">
   <p:cSld>
     <p:spTree>
@@ -12402,7 +12769,7 @@
 </p:sld>
 </file>
 
-<file path=ppt/slides/slide22.xml><?xml version="1.0" encoding="utf-8"?>
+<file path=ppt/slides/slide23.xml><?xml version="1.0" encoding="utf-8"?>
 <p:sld xmlns:a="http://schemas.openxmlformats.org/drawingml/2006/main" xmlns:r="http://schemas.openxmlformats.org/officeDocument/2006/relationships" xmlns:p="http://schemas.openxmlformats.org/presentationml/2006/main" showMasterPhAnim="0">
   <p:cSld>
     <p:spTree>
@@ -13067,7 +13434,7 @@
 </p:sld>
 </file>
 
-<file path=ppt/slides/slide23.xml><?xml version="1.0" encoding="utf-8"?>
+<file path=ppt/slides/slide24.xml><?xml version="1.0" encoding="utf-8"?>
 <p:sld xmlns:a="http://schemas.openxmlformats.org/drawingml/2006/main" xmlns:r="http://schemas.openxmlformats.org/officeDocument/2006/relationships" xmlns:p="http://schemas.openxmlformats.org/presentationml/2006/main" showMasterPhAnim="0">
   <p:cSld>
     <p:spTree>
@@ -13266,7 +13633,7 @@
 </p:sld>
 </file>
 
-<file path=ppt/slides/slide24.xml><?xml version="1.0" encoding="utf-8"?>
+<file path=ppt/slides/slide25.xml><?xml version="1.0" encoding="utf-8"?>
 <p:sld xmlns:a="http://schemas.openxmlformats.org/drawingml/2006/main" xmlns:r="http://schemas.openxmlformats.org/officeDocument/2006/relationships" xmlns:p="http://schemas.openxmlformats.org/presentationml/2006/main" showMasterPhAnim="0">
   <p:cSld>
     <p:spTree>
@@ -13901,7 +14268,7 @@
 </p:sld>
 </file>
 
-<file path=ppt/slides/slide25.xml><?xml version="1.0" encoding="utf-8"?>
+<file path=ppt/slides/slide26.xml><?xml version="1.0" encoding="utf-8"?>
 <p:sld xmlns:a="http://schemas.openxmlformats.org/drawingml/2006/main" xmlns:r="http://schemas.openxmlformats.org/officeDocument/2006/relationships" xmlns:p="http://schemas.openxmlformats.org/presentationml/2006/main" showMasterPhAnim="0">
   <p:cSld>
     <p:spTree>
@@ -14755,7 +15122,7 @@
 </p:sld>
 </file>
 
-<file path=ppt/slides/slide26.xml><?xml version="1.0" encoding="utf-8"?>
+<file path=ppt/slides/slide27.xml><?xml version="1.0" encoding="utf-8"?>
 <p:sld xmlns:a="http://schemas.openxmlformats.org/drawingml/2006/main" xmlns:r="http://schemas.openxmlformats.org/officeDocument/2006/relationships" xmlns:p="http://schemas.openxmlformats.org/presentationml/2006/main" showMasterPhAnim="0">
   <p:cSld>
     <p:spTree>
@@ -15487,7 +15854,7 @@
 </p:sld>
 </file>
 
-<file path=ppt/slides/slide27.xml><?xml version="1.0" encoding="utf-8"?>
+<file path=ppt/slides/slide28.xml><?xml version="1.0" encoding="utf-8"?>
 <p:sld xmlns:a="http://schemas.openxmlformats.org/drawingml/2006/main" xmlns:r="http://schemas.openxmlformats.org/officeDocument/2006/relationships" xmlns:p="http://schemas.openxmlformats.org/presentationml/2006/main" showMasterPhAnim="0">
   <p:cSld>
     <p:spTree>
@@ -16088,7 +16455,7 @@
 </p:sld>
 </file>
 
-<file path=ppt/slides/slide28.xml><?xml version="1.0" encoding="utf-8"?>
+<file path=ppt/slides/slide29.xml><?xml version="1.0" encoding="utf-8"?>
 <p:sld xmlns:a="http://schemas.openxmlformats.org/drawingml/2006/main" xmlns:r="http://schemas.openxmlformats.org/officeDocument/2006/relationships" xmlns:p="http://schemas.openxmlformats.org/presentationml/2006/main" showMasterPhAnim="0">
   <p:cSld>
     <p:spTree>
@@ -17476,6 +17843,449 @@
   <p:cSld>
     <p:spTree>
       <p:nvGrpSpPr>
+        <p:cNvPr id="1" name="">
+          <a:extLst>
+            <a:ext uri="{FF2B5EF4-FFF2-40B4-BE49-F238E27FC236}">
+              <a16:creationId xmlns:a16="http://schemas.microsoft.com/office/drawing/2014/main" id="{32958852-0552-32FC-B003-D5D2FBD49825}"/>
+            </a:ext>
+          </a:extLst>
+        </p:cNvPr>
+        <p:cNvGrpSpPr/>
+        <p:nvPr/>
+      </p:nvGrpSpPr>
+      <p:grpSpPr bwMode="auto">
+        <a:xfrm>
+          <a:off x="0" y="0"/>
+          <a:ext cx="0" cy="0"/>
+          <a:chOff x="0" y="0"/>
+          <a:chExt cx="0" cy="0"/>
+        </a:xfrm>
+      </p:grpSpPr>
+      <p:sp>
+        <p:nvSpPr>
+          <p:cNvPr id="1792949901" name="Titolo 1">
+            <a:extLst>
+              <a:ext uri="{FF2B5EF4-FFF2-40B4-BE49-F238E27FC236}">
+                <a16:creationId xmlns:a16="http://schemas.microsoft.com/office/drawing/2014/main" id="{2BC9D21F-3598-1604-7351-DE53E11E3170}"/>
+              </a:ext>
+            </a:extLst>
+          </p:cNvPr>
+          <p:cNvSpPr>
+            <a:spLocks noGrp="1"/>
+          </p:cNvSpPr>
+          <p:nvPr>
+            <p:ph type="title"/>
+          </p:nvPr>
+        </p:nvSpPr>
+        <p:spPr bwMode="auto">
+          <a:xfrm>
+            <a:off x="838198" y="193674"/>
+            <a:ext cx="10515600" cy="1325562"/>
+          </a:xfrm>
+        </p:spPr>
+        <p:txBody>
+          <a:bodyPr>
+            <a:normAutofit/>
+          </a:bodyPr>
+          <a:lstStyle/>
+          <a:p>
+            <a:pPr>
+              <a:defRPr/>
+            </a:pPr>
+            <a:r>
+              <a:rPr lang="en" b="1">
+                <a:solidFill>
+                  <a:srgbClr val="0070C0"/>
+                </a:solidFill>
+                <a:latin typeface="Noto Sans"/>
+                <a:ea typeface="Noto Sans"/>
+                <a:cs typeface="Noto Sans"/>
+              </a:rPr>
+              <a:t>GRASP 1 – information expert</a:t>
+            </a:r>
+            <a:endParaRPr b="1">
+              <a:solidFill>
+                <a:srgbClr val="0070C0"/>
+              </a:solidFill>
+              <a:latin typeface="Noto Sans"/>
+              <a:cs typeface="Noto Sans"/>
+            </a:endParaRPr>
+          </a:p>
+        </p:txBody>
+      </p:sp>
+      <p:sp>
+        <p:nvSpPr>
+          <p:cNvPr id="2040059782" name="CasellaDiTesto 2040059781">
+            <a:extLst>
+              <a:ext uri="{FF2B5EF4-FFF2-40B4-BE49-F238E27FC236}">
+                <a16:creationId xmlns:a16="http://schemas.microsoft.com/office/drawing/2014/main" id="{57FC49AB-1AA5-366A-5FD4-21B5B02E3769}"/>
+              </a:ext>
+            </a:extLst>
+          </p:cNvPr>
+          <p:cNvSpPr txBox="1"/>
+          <p:nvPr/>
+        </p:nvSpPr>
+        <p:spPr bwMode="auto">
+          <a:xfrm>
+            <a:off x="351446" y="1731960"/>
+            <a:ext cx="5945445" cy="4605437"/>
+          </a:xfrm>
+          <a:prstGeom prst="roundRect">
+            <a:avLst>
+              <a:gd name="adj" fmla="val 5796"/>
+            </a:avLst>
+          </a:prstGeom>
+          <a:solidFill>
+            <a:schemeClr val="bg1">
+              <a:alpha val="49999"/>
+            </a:schemeClr>
+          </a:solidFill>
+          <a:ln w="12699">
+            <a:solidFill>
+              <a:schemeClr val="tx1"/>
+            </a:solidFill>
+            <a:prstDash val="solid"/>
+          </a:ln>
+        </p:spPr>
+        <p:txBody>
+          <a:bodyPr vertOverflow="overflow" horzOverflow="overflow" vert="horz" wrap="square" lIns="91440" tIns="45720" rIns="91440" bIns="45720" numCol="1" spcCol="0" rtlCol="0" fromWordArt="0" anchor="t" anchorCtr="0" forceAA="0" compatLnSpc="0">
+            <a:spAutoFit/>
+          </a:bodyPr>
+          <a:lstStyle/>
+          <a:p>
+            <a:pPr>
+              <a:defRPr/>
+            </a:pPr>
+            <a:r>
+              <a:rPr lang="en" sz="1400" b="0" i="0" u="none" strike="noStrike" cap="none" spc="0" dirty="0">
+                <a:solidFill>
+                  <a:schemeClr val="tx1"/>
+                </a:solidFill>
+                <a:latin typeface="Liberation Mono"/>
+                <a:ea typeface="Liberation Mono"/>
+                <a:cs typeface="Liberation Mono"/>
+              </a:rPr>
+              <a:t>// Visit</a:t>
+            </a:r>
+            <a:endParaRPr lang="en" sz="1400" dirty="0">
+              <a:latin typeface="Liberation Mono"/>
+              <a:ea typeface="Liberation Mono"/>
+              <a:cs typeface="Liberation Mono"/>
+            </a:endParaRPr>
+          </a:p>
+          <a:p>
+            <a:pPr>
+              <a:defRPr/>
+            </a:pPr>
+            <a:endParaRPr lang="en" sz="1400" b="0" i="0" u="none" strike="noStrike" cap="none" spc="0" dirty="0">
+              <a:solidFill>
+                <a:schemeClr val="tx1"/>
+              </a:solidFill>
+              <a:latin typeface="Liberation Mono"/>
+              <a:ea typeface="Liberation Mono"/>
+              <a:cs typeface="Liberation Mono"/>
+            </a:endParaRPr>
+          </a:p>
+          <a:p>
+            <a:pPr>
+              <a:defRPr/>
+            </a:pPr>
+            <a:endParaRPr lang="en" sz="1400" dirty="0">
+              <a:latin typeface="Liberation Mono"/>
+              <a:ea typeface="Liberation Mono"/>
+              <a:cs typeface="Liberation Mono"/>
+            </a:endParaRPr>
+          </a:p>
+          <a:p>
+            <a:pPr>
+              <a:defRPr/>
+            </a:pPr>
+            <a:endParaRPr lang="en" sz="1400" b="0" i="0" u="none" strike="noStrike" cap="none" spc="0" dirty="0">
+              <a:solidFill>
+                <a:schemeClr val="tx1"/>
+              </a:solidFill>
+              <a:latin typeface="Liberation Mono"/>
+              <a:ea typeface="Liberation Mono"/>
+              <a:cs typeface="Liberation Mono"/>
+            </a:endParaRPr>
+          </a:p>
+          <a:p>
+            <a:pPr>
+              <a:defRPr/>
+            </a:pPr>
+            <a:endParaRPr lang="en" sz="1400" dirty="0">
+              <a:latin typeface="Liberation Mono"/>
+              <a:ea typeface="Liberation Mono"/>
+              <a:cs typeface="Liberation Mono"/>
+            </a:endParaRPr>
+          </a:p>
+          <a:p>
+            <a:pPr>
+              <a:defRPr/>
+            </a:pPr>
+            <a:endParaRPr lang="en" sz="1400" dirty="0">
+              <a:latin typeface="Liberation Mono"/>
+              <a:ea typeface="Liberation Mono"/>
+              <a:cs typeface="Liberation Mono"/>
+            </a:endParaRPr>
+          </a:p>
+          <a:p>
+            <a:pPr>
+              <a:defRPr/>
+            </a:pPr>
+            <a:endParaRPr lang="en" sz="1400" b="0" i="0" u="none" strike="noStrike" cap="none" spc="0" dirty="0">
+              <a:solidFill>
+                <a:schemeClr val="tx1"/>
+              </a:solidFill>
+              <a:latin typeface="Liberation Mono"/>
+              <a:ea typeface="Liberation Mono"/>
+              <a:cs typeface="Liberation Mono"/>
+            </a:endParaRPr>
+          </a:p>
+          <a:p>
+            <a:pPr>
+              <a:defRPr/>
+            </a:pPr>
+            <a:endParaRPr lang="en" sz="1400" b="0" i="0" u="none" strike="noStrike" cap="none" spc="0" dirty="0">
+              <a:solidFill>
+                <a:schemeClr val="tx1"/>
+              </a:solidFill>
+              <a:latin typeface="Liberation Mono"/>
+              <a:ea typeface="Liberation Mono"/>
+              <a:cs typeface="Liberation Mono"/>
+            </a:endParaRPr>
+          </a:p>
+          <a:p>
+            <a:pPr>
+              <a:defRPr/>
+            </a:pPr>
+            <a:endParaRPr lang="en" sz="1400" dirty="0">
+              <a:latin typeface="Liberation Mono"/>
+              <a:cs typeface="Liberation Mono"/>
+            </a:endParaRPr>
+          </a:p>
+          <a:p>
+            <a:pPr>
+              <a:defRPr/>
+            </a:pPr>
+            <a:endParaRPr lang="en" sz="1400" b="0" i="0" u="none" strike="noStrike" cap="none" spc="0" dirty="0">
+              <a:solidFill>
+                <a:schemeClr val="tx1"/>
+              </a:solidFill>
+              <a:latin typeface="Liberation Mono"/>
+              <a:cs typeface="Liberation Mono"/>
+            </a:endParaRPr>
+          </a:p>
+          <a:p>
+            <a:pPr>
+              <a:defRPr/>
+            </a:pPr>
+            <a:endParaRPr lang="en" sz="1400" dirty="0">
+              <a:latin typeface="Liberation Mono"/>
+              <a:cs typeface="Liberation Mono"/>
+            </a:endParaRPr>
+          </a:p>
+          <a:p>
+            <a:pPr>
+              <a:defRPr/>
+            </a:pPr>
+            <a:endParaRPr lang="en" sz="1400" b="0" i="0" u="none" strike="noStrike" cap="none" spc="0" dirty="0">
+              <a:solidFill>
+                <a:schemeClr val="tx1"/>
+              </a:solidFill>
+              <a:latin typeface="Liberation Mono"/>
+              <a:cs typeface="Liberation Mono"/>
+            </a:endParaRPr>
+          </a:p>
+          <a:p>
+            <a:pPr>
+              <a:defRPr/>
+            </a:pPr>
+            <a:endParaRPr lang="en" sz="1400" dirty="0">
+              <a:latin typeface="Liberation Mono"/>
+              <a:cs typeface="Liberation Mono"/>
+            </a:endParaRPr>
+          </a:p>
+          <a:p>
+            <a:pPr>
+              <a:defRPr/>
+            </a:pPr>
+            <a:endParaRPr lang="en" sz="1400" b="0" i="0" u="none" strike="noStrike" cap="none" spc="0" dirty="0">
+              <a:solidFill>
+                <a:schemeClr val="tx1"/>
+              </a:solidFill>
+              <a:latin typeface="Liberation Mono"/>
+              <a:cs typeface="Liberation Mono"/>
+            </a:endParaRPr>
+          </a:p>
+          <a:p>
+            <a:pPr>
+              <a:defRPr/>
+            </a:pPr>
+            <a:endParaRPr lang="en" sz="1400" dirty="0">
+              <a:latin typeface="Liberation Mono"/>
+              <a:cs typeface="Liberation Mono"/>
+            </a:endParaRPr>
+          </a:p>
+          <a:p>
+            <a:pPr>
+              <a:defRPr/>
+            </a:pPr>
+            <a:endParaRPr lang="en" sz="1400" b="0" i="0" u="none" strike="noStrike" cap="none" spc="0" dirty="0">
+              <a:solidFill>
+                <a:schemeClr val="tx1"/>
+              </a:solidFill>
+              <a:latin typeface="Liberation Mono"/>
+              <a:cs typeface="Liberation Mono"/>
+            </a:endParaRPr>
+          </a:p>
+          <a:p>
+            <a:pPr>
+              <a:defRPr/>
+            </a:pPr>
+            <a:endParaRPr lang="en" sz="1400" dirty="0">
+              <a:latin typeface="Liberation Mono"/>
+              <a:cs typeface="Liberation Mono"/>
+            </a:endParaRPr>
+          </a:p>
+          <a:p>
+            <a:pPr>
+              <a:defRPr/>
+            </a:pPr>
+            <a:endParaRPr lang="en" sz="1400" b="0" i="0" u="none" strike="noStrike" cap="none" spc="0" dirty="0">
+              <a:solidFill>
+                <a:schemeClr val="tx1"/>
+              </a:solidFill>
+              <a:latin typeface="Liberation Mono"/>
+              <a:cs typeface="Liberation Mono"/>
+            </a:endParaRPr>
+          </a:p>
+          <a:p>
+            <a:pPr>
+              <a:defRPr/>
+            </a:pPr>
+            <a:endParaRPr lang="en" sz="1400" dirty="0">
+              <a:latin typeface="Liberation Mono"/>
+              <a:cs typeface="Liberation Mono"/>
+            </a:endParaRPr>
+          </a:p>
+          <a:p>
+            <a:pPr>
+              <a:defRPr/>
+            </a:pPr>
+            <a:endParaRPr sz="1400" b="0" i="0" u="none" strike="noStrike" cap="none" spc="0" dirty="0">
+              <a:solidFill>
+                <a:schemeClr val="tx1"/>
+              </a:solidFill>
+              <a:latin typeface="Liberation Mono"/>
+              <a:cs typeface="Liberation Mono"/>
+            </a:endParaRPr>
+          </a:p>
+        </p:txBody>
+      </p:sp>
+      <p:sp>
+        <p:nvSpPr>
+          <p:cNvPr id="69616992" name="CasellaDiTesto 69616991">
+            <a:extLst>
+              <a:ext uri="{FF2B5EF4-FFF2-40B4-BE49-F238E27FC236}">
+                <a16:creationId xmlns:a16="http://schemas.microsoft.com/office/drawing/2014/main" id="{FA1687BD-3474-1735-378F-450A88F65A0F}"/>
+              </a:ext>
+            </a:extLst>
+          </p:cNvPr>
+          <p:cNvSpPr txBox="1"/>
+          <p:nvPr/>
+        </p:nvSpPr>
+        <p:spPr bwMode="auto">
+          <a:xfrm>
+            <a:off x="6716540" y="2664375"/>
+            <a:ext cx="4850275" cy="2064540"/>
+          </a:xfrm>
+          <a:prstGeom prst="rect">
+            <a:avLst/>
+          </a:prstGeom>
+          <a:noFill/>
+        </p:spPr>
+        <p:txBody>
+          <a:bodyPr vertOverflow="overflow" horzOverflow="overflow" vert="horz" wrap="square" lIns="91440" tIns="45720" rIns="91440" bIns="45720" numCol="1" spcCol="0" rtlCol="0" fromWordArt="0" anchor="t" anchorCtr="0" forceAA="0" compatLnSpc="0">
+            <a:spAutoFit/>
+          </a:bodyPr>
+          <a:lstStyle/>
+          <a:p>
+            <a:pPr>
+              <a:defRPr/>
+            </a:pPr>
+            <a:r>
+              <a:rPr lang="en" dirty="0"/>
+              <a:t>Esempio </a:t>
+            </a:r>
+            <a:r>
+              <a:rPr lang="it-IT" dirty="0"/>
+              <a:t>di Expert</a:t>
+            </a:r>
+            <a:r>
+              <a:rPr lang="en" dirty="0"/>
+              <a:t>: nella classe Visit, sono definiti dei metodi helper che aiutano a recuperare informazioni utili in altre parti del sistema. Visit in questo caso è l’expert, dato che ha tutte le informazioni necessarie per effettuare </a:t>
+            </a:r>
+            <a:r>
+              <a:rPr lang="it-IT"/>
+              <a:t>i calcoli </a:t>
+            </a:r>
+            <a:r>
+              <a:rPr lang="it-IT" dirty="0"/>
+              <a:t>e fornire alle classi di livello superiore i dati fondamentali per proseguire.</a:t>
+            </a:r>
+            <a:endParaRPr dirty="0"/>
+          </a:p>
+        </p:txBody>
+      </p:sp>
+      <p:pic>
+        <p:nvPicPr>
+          <p:cNvPr id="3" name="Picture 2">
+            <a:extLst>
+              <a:ext uri="{FF2B5EF4-FFF2-40B4-BE49-F238E27FC236}">
+                <a16:creationId xmlns:a16="http://schemas.microsoft.com/office/drawing/2014/main" id="{4A476B5F-3FA8-11CF-EC18-054D8ADD0597}"/>
+              </a:ext>
+            </a:extLst>
+          </p:cNvPr>
+          <p:cNvPicPr>
+            <a:picLocks noChangeAspect="1"/>
+          </p:cNvPicPr>
+          <p:nvPr/>
+        </p:nvPicPr>
+        <p:blipFill>
+          <a:blip r:embed="rId3"/>
+          <a:stretch>
+            <a:fillRect/>
+          </a:stretch>
+        </p:blipFill>
+        <p:spPr>
+          <a:xfrm>
+            <a:off x="521275" y="2192481"/>
+            <a:ext cx="5496927" cy="3797877"/>
+          </a:xfrm>
+          <a:prstGeom prst="rect">
+            <a:avLst/>
+          </a:prstGeom>
+        </p:spPr>
+      </p:pic>
+    </p:spTree>
+    <p:extLst>
+      <p:ext uri="{BB962C8B-B14F-4D97-AF65-F5344CB8AC3E}">
+        <p14:creationId xmlns:p14="http://schemas.microsoft.com/office/powerpoint/2010/main" val="2601686502"/>
+      </p:ext>
+    </p:extLst>
+  </p:cSld>
+  <p:clrMapOvr>
+    <a:masterClrMapping/>
+  </p:clrMapOvr>
+</p:sld>
+</file>
+
+<file path=ppt/slides/slide7.xml><?xml version="1.0" encoding="utf-8"?>
+<p:sld xmlns:a="http://schemas.openxmlformats.org/drawingml/2006/main" xmlns:r="http://schemas.openxmlformats.org/officeDocument/2006/relationships" xmlns:p="http://schemas.openxmlformats.org/presentationml/2006/main" showMasterPhAnim="0">
+  <p:cSld>
+    <p:spTree>
+      <p:nvGrpSpPr>
         <p:cNvPr id="1" name=""/>
         <p:cNvGrpSpPr/>
         <p:nvPr/>
@@ -17720,7 +18530,7 @@
         <p:spPr bwMode="auto">
           <a:xfrm>
             <a:off x="351446" y="4751092"/>
-            <a:ext cx="11855593" cy="1154162"/>
+            <a:ext cx="11855593" cy="1501052"/>
           </a:xfrm>
           <a:prstGeom prst="rect">
             <a:avLst/>
@@ -17738,7 +18548,7 @@
             </a:pPr>
             <a:r>
               <a:rPr lang="en" dirty="0"/>
-              <a:t>Nella classe </a:t>
+              <a:t>Esempio violazione: nella classe </a:t>
             </a:r>
             <a:r>
               <a:rPr lang="en" sz="1600" dirty="0">
@@ -17882,7 +18692,7 @@
 </p:sld>
 </file>
 
-<file path=ppt/slides/slide7.xml><?xml version="1.0" encoding="utf-8"?>
+<file path=ppt/slides/slide8.xml><?xml version="1.0" encoding="utf-8"?>
 <p:sld xmlns:a="http://schemas.openxmlformats.org/drawingml/2006/main" xmlns:r="http://schemas.openxmlformats.org/officeDocument/2006/relationships" xmlns:p="http://schemas.openxmlformats.org/presentationml/2006/main" showMasterPhAnim="0">
   <p:cSld>
     <p:spTree>
@@ -18544,7 +19354,7 @@
 </p:sld>
 </file>
 
-<file path=ppt/slides/slide8.xml><?xml version="1.0" encoding="utf-8"?>
+<file path=ppt/slides/slide9.xml><?xml version="1.0" encoding="utf-8"?>
 <p:sld xmlns:a="http://schemas.openxmlformats.org/drawingml/2006/main" xmlns:r="http://schemas.openxmlformats.org/officeDocument/2006/relationships" xmlns:p="http://schemas.openxmlformats.org/presentationml/2006/main" showMasterPhAnim="0">
   <p:cSld>
     <p:spTree>
@@ -18674,167 +19484,6 @@
         </p:txBody>
       </p:sp>
     </p:spTree>
-  </p:cSld>
-  <p:clrMapOvr>
-    <a:masterClrMapping/>
-  </p:clrMapOvr>
-</p:sld>
-</file>
-
-<file path=ppt/slides/slide9.xml><?xml version="1.0" encoding="utf-8"?>
-<p:sld xmlns:a="http://schemas.openxmlformats.org/drawingml/2006/main" xmlns:r="http://schemas.openxmlformats.org/officeDocument/2006/relationships" xmlns:p="http://schemas.openxmlformats.org/presentationml/2006/main">
-  <p:cSld>
-    <p:spTree>
-      <p:nvGrpSpPr>
-        <p:cNvPr id="1" name=""/>
-        <p:cNvGrpSpPr/>
-        <p:nvPr/>
-      </p:nvGrpSpPr>
-      <p:grpSpPr>
-        <a:xfrm>
-          <a:off x="0" y="0"/>
-          <a:ext cx="0" cy="0"/>
-          <a:chOff x="0" y="0"/>
-          <a:chExt cx="0" cy="0"/>
-        </a:xfrm>
-      </p:grpSpPr>
-      <p:sp>
-        <p:nvSpPr>
-          <p:cNvPr id="2" name="Titolo 1">
-            <a:extLst>
-              <a:ext uri="{FF2B5EF4-FFF2-40B4-BE49-F238E27FC236}">
-                <a16:creationId xmlns:a16="http://schemas.microsoft.com/office/drawing/2014/main" id="{3AB6A9EC-0653-BF20-87C5-5B4516EC5BB9}"/>
-              </a:ext>
-            </a:extLst>
-          </p:cNvPr>
-          <p:cNvSpPr>
-            <a:spLocks noGrp="1"/>
-          </p:cNvSpPr>
-          <p:nvPr>
-            <p:ph type="title"/>
-          </p:nvPr>
-        </p:nvSpPr>
-        <p:spPr/>
-        <p:txBody>
-          <a:bodyPr/>
-          <a:lstStyle/>
-          <a:p>
-            <a:r>
-              <a:rPr lang="en" b="1" dirty="0">
-                <a:solidFill>
-                  <a:srgbClr val="0070C0"/>
-                </a:solidFill>
-                <a:latin typeface="Noto Sans"/>
-                <a:ea typeface="Noto Sans"/>
-                <a:cs typeface="Noto Sans"/>
-              </a:rPr>
-              <a:t>GRASP 2 - Controller</a:t>
-            </a:r>
-            <a:endParaRPr lang="it-IT" dirty="0"/>
-          </a:p>
-        </p:txBody>
-      </p:sp>
-      <p:sp>
-        <p:nvSpPr>
-          <p:cNvPr id="3" name="Segnaposto contenuto 2">
-            <a:extLst>
-              <a:ext uri="{FF2B5EF4-FFF2-40B4-BE49-F238E27FC236}">
-                <a16:creationId xmlns:a16="http://schemas.microsoft.com/office/drawing/2014/main" id="{4B61C465-83C7-EE10-10BA-E96D69FF6064}"/>
-              </a:ext>
-            </a:extLst>
-          </p:cNvPr>
-          <p:cNvSpPr>
-            <a:spLocks noGrp="1"/>
-          </p:cNvSpPr>
-          <p:nvPr>
-            <p:ph idx="1"/>
-          </p:nvPr>
-        </p:nvSpPr>
-        <p:spPr/>
-        <p:txBody>
-          <a:bodyPr/>
-          <a:lstStyle/>
-          <a:p>
-            <a:pPr marL="0" indent="0">
-              <a:buNone/>
-            </a:pPr>
-            <a:r>
-              <a:rPr lang="en-GB" dirty="0" err="1"/>
-              <a:t>Esempio</a:t>
-            </a:r>
-            <a:r>
-              <a:rPr lang="en-GB" dirty="0"/>
-              <a:t> </a:t>
-            </a:r>
-            <a:r>
-              <a:rPr lang="en-GB" dirty="0" err="1"/>
-              <a:t>chiamata</a:t>
-            </a:r>
-            <a:r>
-              <a:rPr lang="en-GB" dirty="0"/>
-              <a:t> GET da </a:t>
-            </a:r>
-            <a:r>
-              <a:rPr lang="en-GB" sz="2400" dirty="0" err="1">
-                <a:latin typeface="Cascadia Code" panose="020B0609020000020004" pitchFamily="49" charset="0"/>
-                <a:ea typeface="Cascadia Code" panose="020B0609020000020004" pitchFamily="49" charset="0"/>
-                <a:cs typeface="Cascadia Code" panose="020B0609020000020004" pitchFamily="49" charset="0"/>
-              </a:rPr>
-              <a:t>BookingController</a:t>
-            </a:r>
-            <a:endParaRPr lang="en-GB" dirty="0">
-              <a:latin typeface="Cascadia Code" panose="020B0609020000020004" pitchFamily="49" charset="0"/>
-              <a:ea typeface="Cascadia Code" panose="020B0609020000020004" pitchFamily="49" charset="0"/>
-              <a:cs typeface="Cascadia Code" panose="020B0609020000020004" pitchFamily="49" charset="0"/>
-            </a:endParaRPr>
-          </a:p>
-          <a:p>
-            <a:pPr marL="0" indent="0">
-              <a:buNone/>
-            </a:pPr>
-            <a:br>
-              <a:rPr lang="en-GB" dirty="0"/>
-            </a:br>
-            <a:endParaRPr lang="it-IT" dirty="0"/>
-          </a:p>
-        </p:txBody>
-      </p:sp>
-      <p:pic>
-        <p:nvPicPr>
-          <p:cNvPr id="11" name="Immagine 10">
-            <a:extLst>
-              <a:ext uri="{FF2B5EF4-FFF2-40B4-BE49-F238E27FC236}">
-                <a16:creationId xmlns:a16="http://schemas.microsoft.com/office/drawing/2014/main" id="{67A9A17E-3C15-73F6-C3BA-7CFFC5415145}"/>
-              </a:ext>
-            </a:extLst>
-          </p:cNvPr>
-          <p:cNvPicPr>
-            <a:picLocks noChangeAspect="1"/>
-          </p:cNvPicPr>
-          <p:nvPr/>
-        </p:nvPicPr>
-        <p:blipFill>
-          <a:blip r:embed="rId2"/>
-          <a:stretch>
-            <a:fillRect/>
-          </a:stretch>
-        </p:blipFill>
-        <p:spPr>
-          <a:xfrm>
-            <a:off x="838200" y="2443739"/>
-            <a:ext cx="10536120" cy="3115110"/>
-          </a:xfrm>
-          <a:prstGeom prst="rect">
-            <a:avLst/>
-          </a:prstGeom>
-        </p:spPr>
-      </p:pic>
-    </p:spTree>
-    <p:extLst>
-      <p:ext uri="{BB962C8B-B14F-4D97-AF65-F5344CB8AC3E}">
-        <p14:creationId xmlns:p14="http://schemas.microsoft.com/office/powerpoint/2010/main" val="1460049476"/>
-      </p:ext>
-    </p:extLst>
   </p:cSld>
   <p:clrMapOvr>
     <a:masterClrMapping/>

--- a/doc/Presentazione/Presentazione_ingsw_parteB.pptx
+++ b/doc/Presentazione/Presentazione_ingsw_parteB.pptx
@@ -167,7 +167,7 @@
   <pc:docChgLst>
     <pc:chgData name="Lorenzo Dolzanelli" userId="dff1ab91afad8a33" providerId="LiveId" clId="{E4438C63-D726-4254-B5C1-0731AF93BC5F}"/>
     <pc:docChg chg="custSel addSld delSld modSld sldOrd">
-      <pc:chgData name="Lorenzo Dolzanelli" userId="dff1ab91afad8a33" providerId="LiveId" clId="{E4438C63-D726-4254-B5C1-0731AF93BC5F}" dt="2025-11-10T14:40:48.876" v="468" actId="20577"/>
+      <pc:chgData name="Lorenzo Dolzanelli" userId="dff1ab91afad8a33" providerId="LiveId" clId="{E4438C63-D726-4254-B5C1-0731AF93BC5F}" dt="2025-11-10T15:10:36.996" v="471" actId="1076"/>
       <pc:docMkLst>
         <pc:docMk/>
       </pc:docMkLst>
@@ -185,6 +185,29 @@
             <ac:spMk id="69616992" creationId="{00000000-0000-0000-0000-000000000000}"/>
           </ac:spMkLst>
         </pc:spChg>
+      </pc:sldChg>
+      <pc:sldChg chg="addSp delSp modSp mod">
+        <pc:chgData name="Lorenzo Dolzanelli" userId="dff1ab91afad8a33" providerId="LiveId" clId="{E4438C63-D726-4254-B5C1-0731AF93BC5F}" dt="2025-11-10T15:10:36.996" v="471" actId="1076"/>
+        <pc:sldMkLst>
+          <pc:docMk/>
+          <pc:sldMk cId="1460049476" sldId="279"/>
+        </pc:sldMkLst>
+        <pc:picChg chg="add mod">
+          <ac:chgData name="Lorenzo Dolzanelli" userId="dff1ab91afad8a33" providerId="LiveId" clId="{E4438C63-D726-4254-B5C1-0731AF93BC5F}" dt="2025-11-10T15:10:36.996" v="471" actId="1076"/>
+          <ac:picMkLst>
+            <pc:docMk/>
+            <pc:sldMk cId="1460049476" sldId="279"/>
+            <ac:picMk id="5" creationId="{4DBA8E5E-67CA-8DF6-214D-10FC760F5569}"/>
+          </ac:picMkLst>
+        </pc:picChg>
+        <pc:picChg chg="del">
+          <ac:chgData name="Lorenzo Dolzanelli" userId="dff1ab91afad8a33" providerId="LiveId" clId="{E4438C63-D726-4254-B5C1-0731AF93BC5F}" dt="2025-11-10T15:10:32.149" v="469" actId="478"/>
+          <ac:picMkLst>
+            <pc:docMk/>
+            <pc:sldMk cId="1460049476" sldId="279"/>
+            <ac:picMk id="11" creationId="{67A9A17E-3C15-73F6-C3BA-7CFFC5415145}"/>
+          </ac:picMkLst>
+        </pc:picChg>
       </pc:sldChg>
       <pc:sldChg chg="new del ord">
         <pc:chgData name="Lorenzo Dolzanelli" userId="dff1ab91afad8a33" providerId="LiveId" clId="{E4438C63-D726-4254-B5C1-0731AF93BC5F}" dt="2025-11-10T14:33:45.350" v="34" actId="47"/>
@@ -8805,10 +8828,10 @@
       </p:sp>
       <p:pic>
         <p:nvPicPr>
-          <p:cNvPr id="11" name="Immagine 10">
+          <p:cNvPr id="5" name="Picture 4">
             <a:extLst>
               <a:ext uri="{FF2B5EF4-FFF2-40B4-BE49-F238E27FC236}">
-                <a16:creationId xmlns:a16="http://schemas.microsoft.com/office/drawing/2014/main" id="{67A9A17E-3C15-73F6-C3BA-7CFFC5415145}"/>
+                <a16:creationId xmlns:a16="http://schemas.microsoft.com/office/drawing/2014/main" id="{4DBA8E5E-67CA-8DF6-214D-10FC760F5569}"/>
               </a:ext>
             </a:extLst>
           </p:cNvPr>
@@ -8825,8 +8848,8 @@
         </p:blipFill>
         <p:spPr>
           <a:xfrm>
-            <a:off x="838200" y="2443739"/>
-            <a:ext cx="10536120" cy="3115110"/>
+            <a:off x="836732" y="2458028"/>
+            <a:ext cx="10517068" cy="3086531"/>
           </a:xfrm>
           <a:prstGeom prst="rect">
             <a:avLst/>
@@ -18227,12 +18250,8 @@
               <a:t>: nella classe Visit, sono definiti dei metodi helper che aiutano a recuperare informazioni utili in altre parti del sistema. Visit in questo caso è l’expert, dato che ha tutte le informazioni necessarie per effettuare </a:t>
             </a:r>
             <a:r>
-              <a:rPr lang="it-IT"/>
-              <a:t>i calcoli </a:t>
-            </a:r>
-            <a:r>
               <a:rPr lang="it-IT" dirty="0"/>
-              <a:t>e fornire alle classi di livello superiore i dati fondamentali per proseguire.</a:t>
+              <a:t>i calcoli e fornire alle classi di livello superiore i dati fondamentali per proseguire.</a:t>
             </a:r>
             <a:endParaRPr dirty="0"/>
           </a:p>
